--- a/downloads/presentations/modules/arc-250.pptx
+++ b/downloads/presentations/modules/arc-250.pptx
@@ -615,7 +615,8 @@
               <a:rPr lang="en-US" dirty="0"/>
               <a:t>Core Concepts
 US Core. US Core defines profiles for core U.S. clinical data exchange. It can support common data access patterns, but public health workflows may require additional public health-specific profiles or implementation guides.
-Implementation guide. A FHIR implementation guide defines how FHIR should be used for a particular use case. Public health IGs help translate general resources into operational exchange requirements.</a:t>
+Implementation guide. A FHIR implementation guide defines how FHIR should be used for a particular use case. Public health IGs help translate general resources into operational exchange requirements.
+Application guidance: Connect the concept to public health purpose, responsible use, required safeguards, documentation, and the next action a department should take.</a:t>
             </a:r>
             <a:endParaRPr lang="en-US" dirty="0"/>
           </a:p>
@@ -705,7 +706,8 @@
               <a:rPr lang="en-US" dirty="0"/>
               <a:t>Public Health Example
 A health department may want an AI tool to summarize relevant EHR information for a case investigation. The tool might need Patient, Encounter, Condition, Observation, DiagnosticReport, MedicationRequest, and Practitioner or Organization resources. Staff need to verify whether the source system can provide these resources, whether the data include required dates and terminology, and whether the AI output cites the source data used.
-An immunization use case may need Patient and Immunization resources, along with vaccine codes, dates, lot information, and dose context. If the FHIR source lacks historical immunizations or has incomplete patient matching, the AI tool may incorrectly identify gaps. The FHIR workflow must therefore be assessed for completeness, not just technical availability.</a:t>
+An immunization use case may need Patient and Immunization resources, along with vaccine codes, dates, lot information, and dose context. If the FHIR source lacks historical immunizations or has incomplete patient matching, the AI tool may incorrectly identify gaps. The FHIR workflow must therefore be assessed for completeness, not just technical availability.
+Application guidance: Connect the concept to public health purpose, responsible use, required safeguards, documentation, and the next action a department should take.</a:t>
             </a:r>
             <a:endParaRPr lang="en-US" dirty="0"/>
           </a:p>
@@ -796,7 +798,8 @@
               <a:t>Technical Deep Dive
 FHIR planning should begin with the use case rather than the technology. Staff should identify the public health decision or task, the data elements required, the FHIR resources that may contain those elements, the systems that expose those resources, and the authorization pathway. This prevents over-general claims about FHIR from substituting for a concrete data needs analysis.
 Profiles and implementation guides matter because general resources can be used in different ways. A public health workflow may need specific required elements, value sets, extensions, or constraints. A FHIR resource that is technically valid may still lack a field required for surveillance, case investigation, or decision support.
-Validation should test realistic workflows. Staff should verify not only that an API returns data, but that the returned data are complete, current, correctly coded, and usable in the AI-supported task. Testing should include missing data, conflicting data, multiple encounters, historical records, and user review of source traceability.</a:t>
+Validation should test realistic workflows. Staff should verify not only that an API returns data, but that the returned data are complete, current, correctly coded, and usable in the AI-supported task. Testing should include missing data, conflicting data, multiple encounters, historical records, and user review of source traceability.
+Application guidance: Connect the concept to public health purpose, responsible use, required safeguards, documentation, and the next action a department should take.</a:t>
             </a:r>
             <a:endParaRPr lang="en-US" dirty="0"/>
           </a:p>
@@ -887,7 +890,8 @@
               <a:t>Risks, Failure Modes, and Guardrails
 FHIR-compatible but incomplete. A product may support FHIR but not the data needed for the public health use case. Guardrails include data needs worksheets, test queries, and acceptance criteria.
 Overbroad API access. AI tools may request more data than needed. Guardrails include scoped access, minimum necessary review, and audit logs.
-Source traceability gaps. AI outputs may summarize FHIR data without showing which resources supported the output. Guardrails include source citations, resource identifiers, and user review.</a:t>
+Source traceability gaps. AI outputs may summarize FHIR data without showing which resources supported the output. Guardrails include source citations, resource identifiers, and user review.
+Application guidance: Identify what could go wrong, who could be affected, what safeguards are needed, and what evidence should be reviewed before use expands.</a:t>
             </a:r>
             <a:endParaRPr lang="en-US" dirty="0"/>
           </a:p>
@@ -976,7 +980,8 @@
             <a:r>
               <a:rPr lang="en-US" dirty="0"/>
               <a:t>Risks, Failure Modes, and Guardrails
-Write-back risk. FHIR APIs may support updates or task creation. Guardrails include human approval, restricted permissions, sandbox testing, and rollback procedures.</a:t>
+Write-back risk. FHIR APIs may support updates or task creation. Guardrails include human approval, restricted permissions, sandbox testing, and rollback procedures.
+Application guidance: Identify what could go wrong, who could be affected, what safeguards are needed, and what evidence should be reviewed before use expands.</a:t>
             </a:r>
             <a:endParaRPr lang="en-US" dirty="0"/>
           </a:p>
@@ -1065,7 +1070,8 @@
             <a:r>
               <a:rPr lang="en-US" dirty="0"/>
               <a:t>Application to AI-Supported Workflows
-Generative AI can use FHIR data to draft case or patient summaries, but the output should be grounded in visible source resources. Predictive analytics may use features derived from FHIR resources, which requires stable extraction and monitoring. RAG may combine FHIR-derived facts with agency guidance. Agentic workflows may create Tasks or update statuses, making permissions and approval steps essential.</a:t>
+Generative AI can use FHIR data to draft case or patient summaries, but the output should be grounded in visible source resources. Predictive analytics may use features derived from FHIR resources, which requires stable extraction and monitoring. RAG may combine FHIR-derived facts with agency guidance. Agentic workflows may create Tasks or update statuses, making permissions and approval steps essential.
+Application guidance: Use the concept to clarify workflow changes, dependencies, staffing, procurement requirements, training needs, and implementation checkpoints.</a:t>
             </a:r>
             <a:endParaRPr lang="en-US" dirty="0"/>
           </a:p>
@@ -1156,7 +1162,8 @@
               <a:t>Reflection Questions
 Which public health workflows could benefit from structured FHIR data?
 Which data elements are required for the workflow?
-Are those elements available through FHIR in the source systems?</a:t>
+Are those elements available through FHIR in the source systems?
+Application guidance: Connect the concept to public health purpose, responsible use, required safeguards, documentation, and the next action a department should take.</a:t>
             </a:r>
             <a:endParaRPr lang="en-US" dirty="0"/>
           </a:p>
@@ -1246,7 +1253,8 @@
               <a:rPr lang="en-US" dirty="0"/>
               <a:t>Reflection Questions
 Which profiles or implementation guides apply?
-How will staff verify that the AI tool used the correct FHIR data?</a:t>
+How will staff verify that the AI tool used the correct FHIR data?
+Application guidance: Connect the concept to public health purpose, responsible use, required safeguards, documentation, and the next action a department should take.</a:t>
             </a:r>
             <a:endParaRPr lang="en-US" dirty="0"/>
           </a:p>
@@ -1335,7 +1343,8 @@
             <a:r>
               <a:rPr lang="en-US" dirty="0"/>
               <a:t>Practical Exercise
-Create a FHIR data needs worksheet for one AI-supported public health use case. Include the use case, required data elements, relevant FHIR resources, source systems, API method, terminology requirements, validation questions, human review point, and documentation requirements.</a:t>
+Create a FHIR data needs worksheet for one AI-supported public health use case. Include the use case, required data elements, relevant FHIR resources, source systems, API method, terminology requirements, validation questions, human review point, and documentation requirements.
+Application guidance: Use the assignment to test whether you can explain the concept, apply it to a realistic public health situation, and identify what would need review before the work moves forward.</a:t>
             </a:r>
             <a:endParaRPr lang="en-US" dirty="0"/>
           </a:p>
@@ -1426,7 +1435,8 @@
               <a:t>Expected Artifact or Evidence
 FHIR data needs worksheet
 List of relevant FHIR resources
-Vendor or implementation questions</a:t>
+Vendor or implementation questions
+Application guidance: Connect the concept to public health purpose, responsible use, required safeguards, documentation, and the next action a department should take.</a:t>
             </a:r>
             <a:endParaRPr lang="en-US" dirty="0"/>
           </a:p>
@@ -1607,7 +1617,8 @@
             <a:r>
               <a:rPr lang="en-US" dirty="0"/>
               <a:t>Expected Artifact or Evidence
-Validation checklist</a:t>
+Validation checklist
+Application guidance: Connect the concept to public health purpose, responsible use, required safeguards, documentation, and the next action a department should take.</a:t>
             </a:r>
             <a:endParaRPr lang="en-US" dirty="0"/>
           </a:p>
@@ -1699,7 +1710,8 @@
 FHIR data needs worksheet
 List of relevant FHIR resources
 Vendor or implementation questions
-Validation checklist</a:t>
+Validation checklist
+Application guidance: Use the assignment to test whether you can explain the concept, apply it to a realistic public health situation, and identify what would need review before the work moves forward.</a:t>
             </a:r>
             <a:endParaRPr lang="en-US" dirty="0"/>
           </a:p>
@@ -1792,7 +1804,8 @@
 2. Why does FHIR matter for AI-supported public health workflows?
 3. What should staff verify when a vendor says a product is FHIR-compatible?
 4. Which FHIR resource is commonly relevant to lab observations?
-5. What is strong completion evidence for this module?</a:t>
+5. What is strong completion evidence for this module?
+Application guidance: Use the assignment to test whether you can explain the concept, apply it to a realistic public health situation, and identify what would need review before the work moves forward.</a:t>
             </a:r>
             <a:endParaRPr lang="en-US" dirty="0"/>
           </a:p>
@@ -1885,7 +1898,8 @@
 HL7 US Core Implementation Guide: https://build.fhir.org/ig/HL7/US-Core/
 HL7 eCR FHIR Implementation Guide: https://hl7.org/fhir/us/ecr/
 US Public Health Profiles Library
-ONC USCDI resources: https://isp.healthit.gov/united-states-core-data-interoperability-uscdi</a:t>
+ONC USCDI resources: https://isp.healthit.gov/united-states-core-data-interoperability-uscdi
+Application guidance: Connect the concept to public health purpose, responsible use, required safeguards, documentation, and the next action a department should take.</a:t>
             </a:r>
             <a:endParaRPr lang="en-US" dirty="0"/>
           </a:p>
@@ -2164,7 +2178,8 @@
 Identify FHIR resources commonly relevant to public health AI use cases.
 Explain the role of profiles, implementation guides, and APIs.
 Assess whether FHIR-accessible data are complete and fit for a specific use case.
-Produce a FHIR data needs worksheet for an AI-supported workflow.</a:t>
+Produce a FHIR data needs worksheet for an AI-supported workflow.
+Application guidance: Use the assignment to test whether you can explain the concept, apply it to a realistic public health situation, and identify what would need review before the work moves forward.</a:t>
             </a:r>
             <a:endParaRPr lang="en-US" dirty="0"/>
           </a:p>
@@ -2253,7 +2268,8 @@
             <a:r>
               <a:rPr lang="en-US" dirty="0"/>
               <a:t>Module Overview
-FHIR is increasingly important for public health because it supports structured, API-based access to health data. Public health staff do not need to become FHIR developers to participate in AI planning, but they do need to understand what FHIR can and cannot provide. This module explains how FHIR resources, profiles, implementation guides, and APIs may support AI-enabled public health workflows.</a:t>
+FHIR is increasingly important for public health because it supports structured, API-based access to health data. Public health staff do not need to become FHIR developers to participate in AI planning, but they do need to understand what FHIR can and cannot provide. This module explains how FHIR resources, profiles, implementation guides, and APIs may support AI-enabled public health workflows.
+Application guidance: Connect the concept to public health purpose, responsible use, required safeguards, documentation, and the next action a department should take.</a:t>
             </a:r>
             <a:endParaRPr lang="en-US" dirty="0"/>
           </a:p>
@@ -2342,7 +2358,8 @@
             <a:r>
               <a:rPr lang="en-US" dirty="0"/>
               <a:t>Jurisdiction and Agency Policy Note
-This national-level module is intended for training and planning purposes. It does not replace legal, privacy, procurement, civil rights, records, or agency policy review. Learners should confirm applicable requirements in their own jurisdiction and organization before implementing AI-supported workflows.</a:t>
+This national-level module is intended for training and planning purposes. It does not replace legal, privacy, procurement, civil rights, records, or agency policy review. Learners should confirm applicable requirements in their own jurisdiction and organization before implementing AI-supported workflows.
+Application guidance: Translate this concept into clear decision rights, review steps, documentation expectations, and escalation paths before an AI-supported workflow is approved.</a:t>
             </a:r>
             <a:endParaRPr lang="en-US" dirty="0"/>
           </a:p>
@@ -2433,7 +2450,8 @@
               <a:t>Why This Topic Matters for Public Health AI
 FHIR matters for AI because it may make clinical and public health data more accessible, modular, and reusable. A FHIR API can allow an approved application to request specific resources, such as Patient, Observation, Condition, DiagnosticReport, Immunization, Encounter, Organization, or Task. This can support case summaries, decision support, cohort identification, immunization review, referral workflows, or public health reporting.
 However, FHIR is not magic. A system may support FHIR but expose only certain data elements, use local extensions, omit important context, or require complex authorization. A vendor may say the product is FHIR-compatible while supporting only a narrow subset of resources. Public health staff need to ask whether the actual data required for the workflow are available, coded correctly, timely, and authorized for use.
-FHIR use also raises governance questions. API access can make data retrieval easier, but easier retrieval does not remove privacy, minimum necessary, consent, legal authority, or public health reporting considerations. AI tools using FHIR data should have clear intended use, source traceability, access control, and validation.</a:t>
+FHIR use also raises governance questions. API access can make data retrieval easier, but easier retrieval does not remove privacy, minimum necessary, consent, legal authority, or public health reporting considerations. AI tools using FHIR data should have clear intended use, source traceability, access control, and validation.
+Application guidance: Connect the concept to public health purpose, responsible use, required safeguards, documentation, and the next action a department should take.</a:t>
             </a:r>
             <a:endParaRPr lang="en-US" dirty="0"/>
           </a:p>
@@ -2524,7 +2542,8 @@
               <a:t>Core Concepts
 FHIR resource. A FHIR resource is a structured representation of a type of health information, such as Patient, Observation, Condition, Immunization, Encounter, DiagnosticReport, ServiceRequest, Organization, or Task. AI tools may use combinations of resources to support a workflow.
 FHIR profile. A FHIR profile constrains or extends a resource for a specific purpose. Profiles help ensure that systems use resources consistently enough for implementation.
-FHIR API. A FHIR API allows approved systems or applications to request, send, or update FHIR resources. API access should be governed through authentication, authorization, scopes, logging, and role-based access.</a:t>
+FHIR API. A FHIR API allows approved systems or applications to request, send, or update FHIR resources. API access should be governed through authentication, authorization, scopes, logging, and role-based access.
+Application guidance: Connect the concept to public health purpose, responsible use, required safeguards, documentation, and the next action a department should take.</a:t>
             </a:r>
             <a:endParaRPr lang="en-US" dirty="0"/>
           </a:p>
@@ -3295,8 +3314,8 @@
         </p:nvSpPr>
         <p:spPr>
           <a:xfrm>
-            <a:off x="9966960" y="6537960"/>
-            <a:ext cx="1645920" cy="201168"/>
+            <a:off x="9646920" y="6537960"/>
+            <a:ext cx="1965960" cy="201168"/>
           </a:xfrm>
           <a:prstGeom prst="rect">
             <a:avLst/>
@@ -3320,7 +3339,7 @@
                 <a:ea typeface="Aptos" pitchFamily="34" charset="-122"/>
                 <a:cs typeface="Aptos" pitchFamily="34" charset="-120"/>
               </a:rPr>
-              <a:t>Â© Paula Soper</a:t>
+              <a:t>Copyright Paula Soper</a:t>
             </a:r>
             <a:endParaRPr lang="en-US" sz="800" dirty="0"/>
           </a:p>
@@ -3415,7 +3434,7 @@
         <p:spPr>
           <a:xfrm>
             <a:off x="868680" y="1508760"/>
-            <a:ext cx="6537960" cy="4160520"/>
+            <a:ext cx="6309360" cy="4160520"/>
           </a:xfrm>
           <a:prstGeom prst="rect">
             <a:avLst/>
@@ -3480,12 +3499,12 @@
         </p:nvSpPr>
         <p:spPr>
           <a:xfrm>
-            <a:off x="7909560" y="1417320"/>
-            <a:ext cx="3154680" cy="1828800"/>
+            <a:off x="7635240" y="1325880"/>
+            <a:ext cx="3474720" cy="1325880"/>
           </a:xfrm>
           <a:prstGeom prst="roundRect">
             <a:avLst>
-              <a:gd name="adj" fmla="val 6000"/>
+              <a:gd name="adj" fmla="val 8276"/>
             </a:avLst>
           </a:prstGeom>
           <a:solidFill>
@@ -3507,8 +3526,8 @@
         </p:nvSpPr>
         <p:spPr>
           <a:xfrm>
-            <a:off x="8074152" y="1563624"/>
-            <a:ext cx="2825496" cy="256032"/>
+            <a:off x="7799832" y="1472184"/>
+            <a:ext cx="3145536" cy="256032"/>
           </a:xfrm>
           <a:prstGeom prst="rect">
             <a:avLst/>
@@ -3532,7 +3551,7 @@
                 <a:ea typeface="Aptos" pitchFamily="34" charset="-122"/>
                 <a:cs typeface="Aptos" pitchFamily="34" charset="-120"/>
               </a:rPr>
-              <a:t>Key idea</a:t>
+              <a:t>Core concept</a:t>
             </a:r>
             <a:endParaRPr lang="en-US" sz="1300" dirty="0"/>
           </a:p>
@@ -3546,8 +3565,8 @@
         </p:nvSpPr>
         <p:spPr>
           <a:xfrm>
-            <a:off x="8074152" y="1920240"/>
-            <a:ext cx="2825496" cy="1188720"/>
+            <a:off x="7799832" y="1828800"/>
+            <a:ext cx="3145536" cy="685800"/>
           </a:xfrm>
           <a:prstGeom prst="rect">
             <a:avLst/>
@@ -3587,12 +3606,153 @@
         </p:nvSpPr>
         <p:spPr>
           <a:xfrm>
-            <a:off x="7909560" y="3520440"/>
-            <a:ext cx="3154680" cy="1737360"/>
+            <a:off x="7635240" y="2788920"/>
+            <a:ext cx="3474720" cy="1536192"/>
           </a:xfrm>
           <a:prstGeom prst="roundRect">
             <a:avLst>
-              <a:gd name="adj" fmla="val 6316"/>
+              <a:gd name="adj" fmla="val 7143"/>
+            </a:avLst>
+          </a:prstGeom>
+          <a:solidFill>
+            <a:srgbClr val="FFFFFF">
+              <a:alpha val="88000"/>
+            </a:srgbClr>
+          </a:solidFill>
+          <a:ln w="12700">
+            <a:solidFill>
+              <a:srgbClr val="D6E8F2"/>
+            </a:solidFill>
+            <a:prstDash val="solid"/>
+          </a:ln>
+        </p:spPr>
+      </p:sp>
+      <p:sp>
+        <p:nvSpPr>
+          <p:cNvPr id="14" name="Shape 12"/>
+          <p:cNvSpPr/>
+          <p:nvPr/>
+        </p:nvSpPr>
+        <p:spPr>
+          <a:xfrm>
+            <a:off x="8074152" y="3291840"/>
+            <a:ext cx="2596896" cy="749808"/>
+          </a:xfrm>
+          <a:prstGeom prst="rect">
+            <a:avLst/>
+          </a:prstGeom>
+          <a:solidFill>
+            <a:srgbClr val="EAF6F8"/>
+          </a:solidFill>
+          <a:ln w="12700">
+            <a:solidFill>
+              <a:srgbClr val="8ABBD8"/>
+            </a:solidFill>
+            <a:prstDash val="solid"/>
+          </a:ln>
+        </p:spPr>
+      </p:sp>
+      <p:sp>
+        <p:nvSpPr>
+          <p:cNvPr id="15" name="Shape 13"/>
+          <p:cNvSpPr/>
+          <p:nvPr/>
+        </p:nvSpPr>
+        <p:spPr>
+          <a:xfrm>
+            <a:off x="8202168" y="3721608"/>
+            <a:ext cx="2340864" cy="0"/>
+          </a:xfrm>
+          <a:prstGeom prst="line">
+            <a:avLst/>
+          </a:prstGeom>
+          <a:noFill/>
+          <a:ln w="19050">
+            <a:solidFill>
+              <a:srgbClr val="0068B7"/>
+            </a:solidFill>
+            <a:prstDash val="solid"/>
+          </a:ln>
+        </p:spPr>
+      </p:sp>
+      <p:sp>
+        <p:nvSpPr>
+          <p:cNvPr id="16" name="Shape 14"/>
+          <p:cNvSpPr/>
+          <p:nvPr/>
+        </p:nvSpPr>
+        <p:spPr>
+          <a:xfrm>
+            <a:off x="9198864" y="4206240"/>
+            <a:ext cx="347472" cy="347472"/>
+          </a:xfrm>
+          <a:prstGeom prst="ellipse">
+            <a:avLst/>
+          </a:prstGeom>
+          <a:solidFill>
+            <a:srgbClr val="2F8A28"/>
+          </a:solidFill>
+          <a:ln w="12700">
+            <a:solidFill>
+              <a:srgbClr val="2F8A28"/>
+            </a:solidFill>
+            <a:prstDash val="solid"/>
+          </a:ln>
+        </p:spPr>
+      </p:sp>
+      <p:sp>
+        <p:nvSpPr>
+          <p:cNvPr id="17" name="Text 15"/>
+          <p:cNvSpPr/>
+          <p:nvPr/>
+        </p:nvSpPr>
+        <p:spPr>
+          <a:xfrm>
+            <a:off x="7909560" y="3977640"/>
+            <a:ext cx="2926080" cy="182880"/>
+          </a:xfrm>
+          <a:prstGeom prst="rect">
+            <a:avLst/>
+          </a:prstGeom>
+          <a:noFill/>
+          <a:ln/>
+        </p:spPr>
+        <p:txBody>
+          <a:bodyPr wrap="square" lIns="0" tIns="0" rIns="0" bIns="0" rtlCol="0" anchor="ctr"/>
+          <a:lstStyle/>
+          <a:p>
+            <a:pPr algn="ctr" indent="0" marL="0">
+              <a:buNone/>
+            </a:pPr>
+            <a:r>
+              <a:rPr lang="en-US" sz="1000" dirty="0">
+                <a:solidFill>
+                  <a:srgbClr val="003A63"/>
+                </a:solidFill>
+                <a:latin typeface="Aptos" pitchFamily="34" charset="0"/>
+                <a:ea typeface="Aptos" pitchFamily="34" charset="-122"/>
+                <a:cs typeface="Aptos" pitchFamily="34" charset="-120"/>
+              </a:rPr>
+              <a:t>Concept to action</a:t>
+            </a:r>
+            <a:endParaRPr lang="en-US" sz="1000" dirty="0"/>
+          </a:p>
+        </p:txBody>
+      </p:sp>
+      <p:sp>
+        <p:nvSpPr>
+          <p:cNvPr id="18" name="Shape 16"/>
+          <p:cNvSpPr/>
+          <p:nvPr/>
+        </p:nvSpPr>
+        <p:spPr>
+          <a:xfrm>
+            <a:off x="7635240" y="4498848"/>
+            <a:ext cx="3474720" cy="1143000"/>
+          </a:xfrm>
+          <a:prstGeom prst="roundRect">
+            <a:avLst>
+              <a:gd name="adj" fmla="val 9600"/>
             </a:avLst>
           </a:prstGeom>
           <a:solidFill>
@@ -3608,14 +3768,14 @@
       </p:sp>
       <p:sp>
         <p:nvSpPr>
-          <p:cNvPr id="14" name="Text 12"/>
-          <p:cNvSpPr/>
-          <p:nvPr/>
-        </p:nvSpPr>
-        <p:spPr>
-          <a:xfrm>
-            <a:off x="8074152" y="3666744"/>
-            <a:ext cx="2825496" cy="256032"/>
+          <p:cNvPr id="19" name="Text 17"/>
+          <p:cNvSpPr/>
+          <p:nvPr/>
+        </p:nvSpPr>
+        <p:spPr>
+          <a:xfrm>
+            <a:off x="7799832" y="4645152"/>
+            <a:ext cx="3145536" cy="256032"/>
           </a:xfrm>
           <a:prstGeom prst="rect">
             <a:avLst/>
@@ -3639,7 +3799,7 @@
                 <a:ea typeface="Aptos" pitchFamily="34" charset="-122"/>
                 <a:cs typeface="Aptos" pitchFamily="34" charset="-120"/>
               </a:rPr>
-              <a:t>Use this for</a:t>
+              <a:t>Apply it</a:t>
             </a:r>
             <a:endParaRPr lang="en-US" sz="1300" dirty="0"/>
           </a:p>
@@ -3647,14 +3807,14 @@
       </p:sp>
       <p:sp>
         <p:nvSpPr>
-          <p:cNvPr id="15" name="Text 13"/>
-          <p:cNvSpPr/>
-          <p:nvPr/>
-        </p:nvSpPr>
-        <p:spPr>
-          <a:xfrm>
-            <a:off x="8074152" y="4023360"/>
-            <a:ext cx="2825496" cy="1097280"/>
+          <p:cNvPr id="20" name="Text 18"/>
+          <p:cNvSpPr/>
+          <p:nvPr/>
+        </p:nvSpPr>
+        <p:spPr>
+          <a:xfrm>
+            <a:off x="7799832" y="5001768"/>
+            <a:ext cx="3145536" cy="502920"/>
           </a:xfrm>
           <a:prstGeom prst="rect">
             <a:avLst/>
@@ -3680,7 +3840,7 @@
                 <a:ea typeface="Aptos" pitchFamily="34" charset="-122"/>
                 <a:cs typeface="Aptos" pitchFamily="34" charset="-120"/>
               </a:rPr>
-              <a:t>Connect the concept to public health decisions, safeguards, documentation, or implementation work.</a:t>
+              <a:t>Connect the concept to public health purpose, responsible use, required safeguards, documentation, and the next action a department should take.</a:t>
             </a:r>
             <a:endParaRPr lang="en-US" sz="1550" dirty="0"/>
           </a:p>
@@ -3854,8 +4014,8 @@
         </p:nvSpPr>
         <p:spPr>
           <a:xfrm>
-            <a:off x="9966960" y="6537960"/>
-            <a:ext cx="1645920" cy="201168"/>
+            <a:off x="9646920" y="6537960"/>
+            <a:ext cx="1965960" cy="201168"/>
           </a:xfrm>
           <a:prstGeom prst="rect">
             <a:avLst/>
@@ -3879,7 +4039,7 @@
                 <a:ea typeface="Aptos" pitchFamily="34" charset="-122"/>
                 <a:cs typeface="Aptos" pitchFamily="34" charset="-120"/>
               </a:rPr>
-              <a:t>Â© Paula Soper</a:t>
+              <a:t>Copyright Paula Soper</a:t>
             </a:r>
             <a:endParaRPr lang="en-US" sz="800" dirty="0"/>
           </a:p>
@@ -3926,77 +4086,13 @@
       </p:sp>
       <p:sp>
         <p:nvSpPr>
-          <p:cNvPr id="8" name="Shape 6"/>
+          <p:cNvPr id="8" name="Text 6"/>
           <p:cNvSpPr/>
           <p:nvPr/>
         </p:nvSpPr>
         <p:spPr>
           <a:xfrm>
             <a:off x="640080" y="658368"/>
-            <a:ext cx="420624" cy="420624"/>
-          </a:xfrm>
-          <a:prstGeom prst="ellipse">
-            <a:avLst/>
-          </a:prstGeom>
-          <a:solidFill>
-            <a:srgbClr val="0068B7"/>
-          </a:solidFill>
-          <a:ln w="12700">
-            <a:solidFill>
-              <a:srgbClr val="0068B7"/>
-            </a:solidFill>
-            <a:prstDash val="solid"/>
-          </a:ln>
-        </p:spPr>
-      </p:sp>
-      <p:sp>
-        <p:nvSpPr>
-          <p:cNvPr id="9" name="Text 7"/>
-          <p:cNvSpPr/>
-          <p:nvPr/>
-        </p:nvSpPr>
-        <p:spPr>
-          <a:xfrm>
-            <a:off x="640080" y="731520"/>
-            <a:ext cx="420624" cy="164592"/>
-          </a:xfrm>
-          <a:prstGeom prst="rect">
-            <a:avLst/>
-          </a:prstGeom>
-          <a:noFill/>
-          <a:ln/>
-        </p:spPr>
-        <p:txBody>
-          <a:bodyPr wrap="square" lIns="0" tIns="0" rIns="0" bIns="0" rtlCol="0" anchor="ctr"/>
-          <a:lstStyle/>
-          <a:p>
-            <a:pPr algn="ctr" indent="0" marL="0">
-              <a:buNone/>
-            </a:pPr>
-            <a:r>
-              <a:rPr lang="en-US" sz="1100" b="1" dirty="0">
-                <a:solidFill>
-                  <a:srgbClr val="FFFFFF"/>
-                </a:solidFill>
-                <a:latin typeface="Aptos" pitchFamily="34" charset="0"/>
-                <a:ea typeface="Aptos" pitchFamily="34" charset="-122"/>
-                <a:cs typeface="Aptos" pitchFamily="34" charset="-120"/>
-              </a:rPr>
-              <a:t>6</a:t>
-            </a:r>
-            <a:endParaRPr lang="en-US" sz="1100" dirty="0"/>
-          </a:p>
-        </p:txBody>
-      </p:sp>
-      <p:sp>
-        <p:nvSpPr>
-          <p:cNvPr id="10" name="Text 8"/>
-          <p:cNvSpPr/>
-          <p:nvPr/>
-        </p:nvSpPr>
-        <p:spPr>
-          <a:xfrm>
-            <a:off x="640080" y="621792"/>
             <a:ext cx="10881360" cy="713232"/>
           </a:xfrm>
           <a:prstGeom prst="rect">
@@ -4031,14 +4127,14 @@
       </p:sp>
       <p:sp>
         <p:nvSpPr>
-          <p:cNvPr id="11" name="Text 9"/>
+          <p:cNvPr id="9" name="Text 7"/>
           <p:cNvSpPr/>
           <p:nvPr/>
         </p:nvSpPr>
         <p:spPr>
           <a:xfrm>
             <a:off x="868680" y="1508760"/>
-            <a:ext cx="6537960" cy="4160520"/>
+            <a:ext cx="6309360" cy="4160520"/>
           </a:xfrm>
           <a:prstGeom prst="rect">
             <a:avLst/>
@@ -4097,18 +4193,18 @@
       </p:sp>
       <p:sp>
         <p:nvSpPr>
-          <p:cNvPr id="12" name="Shape 10"/>
-          <p:cNvSpPr/>
-          <p:nvPr/>
-        </p:nvSpPr>
-        <p:spPr>
-          <a:xfrm>
-            <a:off x="7909560" y="1417320"/>
-            <a:ext cx="3154680" cy="1828800"/>
+          <p:cNvPr id="10" name="Shape 8"/>
+          <p:cNvSpPr/>
+          <p:nvPr/>
+        </p:nvSpPr>
+        <p:spPr>
+          <a:xfrm>
+            <a:off x="7635240" y="1325880"/>
+            <a:ext cx="3474720" cy="1325880"/>
           </a:xfrm>
           <a:prstGeom prst="roundRect">
             <a:avLst>
-              <a:gd name="adj" fmla="val 6000"/>
+              <a:gd name="adj" fmla="val 8276"/>
             </a:avLst>
           </a:prstGeom>
           <a:solidFill>
@@ -4124,14 +4220,14 @@
       </p:sp>
       <p:sp>
         <p:nvSpPr>
-          <p:cNvPr id="13" name="Text 11"/>
-          <p:cNvSpPr/>
-          <p:nvPr/>
-        </p:nvSpPr>
-        <p:spPr>
-          <a:xfrm>
-            <a:off x="8074152" y="1563624"/>
-            <a:ext cx="2825496" cy="256032"/>
+          <p:cNvPr id="11" name="Text 9"/>
+          <p:cNvSpPr/>
+          <p:nvPr/>
+        </p:nvSpPr>
+        <p:spPr>
+          <a:xfrm>
+            <a:off x="7799832" y="1472184"/>
+            <a:ext cx="3145536" cy="256032"/>
           </a:xfrm>
           <a:prstGeom prst="rect">
             <a:avLst/>
@@ -4155,7 +4251,7 @@
                 <a:ea typeface="Aptos" pitchFamily="34" charset="-122"/>
                 <a:cs typeface="Aptos" pitchFamily="34" charset="-120"/>
               </a:rPr>
-              <a:t>Key idea</a:t>
+              <a:t>Core concept</a:t>
             </a:r>
             <a:endParaRPr lang="en-US" sz="1300" dirty="0"/>
           </a:p>
@@ -4163,14 +4259,14 @@
       </p:sp>
       <p:sp>
         <p:nvSpPr>
-          <p:cNvPr id="14" name="Text 12"/>
-          <p:cNvSpPr/>
-          <p:nvPr/>
-        </p:nvSpPr>
-        <p:spPr>
-          <a:xfrm>
-            <a:off x="8074152" y="1920240"/>
-            <a:ext cx="2825496" cy="1188720"/>
+          <p:cNvPr id="12" name="Text 10"/>
+          <p:cNvSpPr/>
+          <p:nvPr/>
+        </p:nvSpPr>
+        <p:spPr>
+          <a:xfrm>
+            <a:off x="7799832" y="1828800"/>
+            <a:ext cx="3145536" cy="685800"/>
           </a:xfrm>
           <a:prstGeom prst="rect">
             <a:avLst/>
@@ -4204,18 +4300,159 @@
       </p:sp>
       <p:sp>
         <p:nvSpPr>
-          <p:cNvPr id="15" name="Shape 13"/>
-          <p:cNvSpPr/>
-          <p:nvPr/>
-        </p:nvSpPr>
-        <p:spPr>
-          <a:xfrm>
-            <a:off x="7909560" y="3520440"/>
-            <a:ext cx="3154680" cy="1737360"/>
+          <p:cNvPr id="13" name="Shape 11"/>
+          <p:cNvSpPr/>
+          <p:nvPr/>
+        </p:nvSpPr>
+        <p:spPr>
+          <a:xfrm>
+            <a:off x="7635240" y="2788920"/>
+            <a:ext cx="3474720" cy="1536192"/>
           </a:xfrm>
           <a:prstGeom prst="roundRect">
             <a:avLst>
-              <a:gd name="adj" fmla="val 6316"/>
+              <a:gd name="adj" fmla="val 7143"/>
+            </a:avLst>
+          </a:prstGeom>
+          <a:solidFill>
+            <a:srgbClr val="FFFFFF">
+              <a:alpha val="88000"/>
+            </a:srgbClr>
+          </a:solidFill>
+          <a:ln w="12700">
+            <a:solidFill>
+              <a:srgbClr val="D6E8F2"/>
+            </a:solidFill>
+            <a:prstDash val="solid"/>
+          </a:ln>
+        </p:spPr>
+      </p:sp>
+      <p:sp>
+        <p:nvSpPr>
+          <p:cNvPr id="14" name="Shape 12"/>
+          <p:cNvSpPr/>
+          <p:nvPr/>
+        </p:nvSpPr>
+        <p:spPr>
+          <a:xfrm>
+            <a:off x="8074152" y="3291840"/>
+            <a:ext cx="2596896" cy="749808"/>
+          </a:xfrm>
+          <a:prstGeom prst="rect">
+            <a:avLst/>
+          </a:prstGeom>
+          <a:solidFill>
+            <a:srgbClr val="EAF6F8"/>
+          </a:solidFill>
+          <a:ln w="12700">
+            <a:solidFill>
+              <a:srgbClr val="8ABBD8"/>
+            </a:solidFill>
+            <a:prstDash val="solid"/>
+          </a:ln>
+        </p:spPr>
+      </p:sp>
+      <p:sp>
+        <p:nvSpPr>
+          <p:cNvPr id="15" name="Shape 13"/>
+          <p:cNvSpPr/>
+          <p:nvPr/>
+        </p:nvSpPr>
+        <p:spPr>
+          <a:xfrm>
+            <a:off x="8202168" y="3721608"/>
+            <a:ext cx="2340864" cy="0"/>
+          </a:xfrm>
+          <a:prstGeom prst="line">
+            <a:avLst/>
+          </a:prstGeom>
+          <a:noFill/>
+          <a:ln w="19050">
+            <a:solidFill>
+              <a:srgbClr val="0068B7"/>
+            </a:solidFill>
+            <a:prstDash val="solid"/>
+          </a:ln>
+        </p:spPr>
+      </p:sp>
+      <p:sp>
+        <p:nvSpPr>
+          <p:cNvPr id="16" name="Shape 14"/>
+          <p:cNvSpPr/>
+          <p:nvPr/>
+        </p:nvSpPr>
+        <p:spPr>
+          <a:xfrm>
+            <a:off x="9198864" y="4206240"/>
+            <a:ext cx="347472" cy="347472"/>
+          </a:xfrm>
+          <a:prstGeom prst="ellipse">
+            <a:avLst/>
+          </a:prstGeom>
+          <a:solidFill>
+            <a:srgbClr val="2F8A28"/>
+          </a:solidFill>
+          <a:ln w="12700">
+            <a:solidFill>
+              <a:srgbClr val="2F8A28"/>
+            </a:solidFill>
+            <a:prstDash val="solid"/>
+          </a:ln>
+        </p:spPr>
+      </p:sp>
+      <p:sp>
+        <p:nvSpPr>
+          <p:cNvPr id="17" name="Text 15"/>
+          <p:cNvSpPr/>
+          <p:nvPr/>
+        </p:nvSpPr>
+        <p:spPr>
+          <a:xfrm>
+            <a:off x="7909560" y="3977640"/>
+            <a:ext cx="2926080" cy="182880"/>
+          </a:xfrm>
+          <a:prstGeom prst="rect">
+            <a:avLst/>
+          </a:prstGeom>
+          <a:noFill/>
+          <a:ln/>
+        </p:spPr>
+        <p:txBody>
+          <a:bodyPr wrap="square" lIns="0" tIns="0" rIns="0" bIns="0" rtlCol="0" anchor="ctr"/>
+          <a:lstStyle/>
+          <a:p>
+            <a:pPr algn="ctr" indent="0" marL="0">
+              <a:buNone/>
+            </a:pPr>
+            <a:r>
+              <a:rPr lang="en-US" sz="1000" dirty="0">
+                <a:solidFill>
+                  <a:srgbClr val="003A63"/>
+                </a:solidFill>
+                <a:latin typeface="Aptos" pitchFamily="34" charset="0"/>
+                <a:ea typeface="Aptos" pitchFamily="34" charset="-122"/>
+                <a:cs typeface="Aptos" pitchFamily="34" charset="-120"/>
+              </a:rPr>
+              <a:t>Concept to action</a:t>
+            </a:r>
+            <a:endParaRPr lang="en-US" sz="1000" dirty="0"/>
+          </a:p>
+        </p:txBody>
+      </p:sp>
+      <p:sp>
+        <p:nvSpPr>
+          <p:cNvPr id="18" name="Shape 16"/>
+          <p:cNvSpPr/>
+          <p:nvPr/>
+        </p:nvSpPr>
+        <p:spPr>
+          <a:xfrm>
+            <a:off x="7635240" y="4498848"/>
+            <a:ext cx="3474720" cy="1143000"/>
+          </a:xfrm>
+          <a:prstGeom prst="roundRect">
+            <a:avLst>
+              <a:gd name="adj" fmla="val 9600"/>
             </a:avLst>
           </a:prstGeom>
           <a:solidFill>
@@ -4231,14 +4468,14 @@
       </p:sp>
       <p:sp>
         <p:nvSpPr>
-          <p:cNvPr id="16" name="Text 14"/>
-          <p:cNvSpPr/>
-          <p:nvPr/>
-        </p:nvSpPr>
-        <p:spPr>
-          <a:xfrm>
-            <a:off x="8074152" y="3666744"/>
-            <a:ext cx="2825496" cy="256032"/>
+          <p:cNvPr id="19" name="Text 17"/>
+          <p:cNvSpPr/>
+          <p:nvPr/>
+        </p:nvSpPr>
+        <p:spPr>
+          <a:xfrm>
+            <a:off x="7799832" y="4645152"/>
+            <a:ext cx="3145536" cy="256032"/>
           </a:xfrm>
           <a:prstGeom prst="rect">
             <a:avLst/>
@@ -4262,7 +4499,7 @@
                 <a:ea typeface="Aptos" pitchFamily="34" charset="-122"/>
                 <a:cs typeface="Aptos" pitchFamily="34" charset="-120"/>
               </a:rPr>
-              <a:t>Use this for</a:t>
+              <a:t>Apply it</a:t>
             </a:r>
             <a:endParaRPr lang="en-US" sz="1300" dirty="0"/>
           </a:p>
@@ -4270,14 +4507,14 @@
       </p:sp>
       <p:sp>
         <p:nvSpPr>
-          <p:cNvPr id="17" name="Text 15"/>
-          <p:cNvSpPr/>
-          <p:nvPr/>
-        </p:nvSpPr>
-        <p:spPr>
-          <a:xfrm>
-            <a:off x="8074152" y="4023360"/>
-            <a:ext cx="2825496" cy="1097280"/>
+          <p:cNvPr id="20" name="Text 18"/>
+          <p:cNvSpPr/>
+          <p:nvPr/>
+        </p:nvSpPr>
+        <p:spPr>
+          <a:xfrm>
+            <a:off x="7799832" y="5001768"/>
+            <a:ext cx="3145536" cy="502920"/>
           </a:xfrm>
           <a:prstGeom prst="rect">
             <a:avLst/>
@@ -4303,7 +4540,7 @@
                 <a:ea typeface="Aptos" pitchFamily="34" charset="-122"/>
                 <a:cs typeface="Aptos" pitchFamily="34" charset="-120"/>
               </a:rPr>
-              <a:t>Connect the concept to public health decisions, safeguards, documentation, or implementation work.</a:t>
+              <a:t>Connect the concept to public health purpose, responsible use, required safeguards, documentation, and the next action a department should take.</a:t>
             </a:r>
             <a:endParaRPr lang="en-US" sz="1550" dirty="0"/>
           </a:p>
@@ -4477,8 +4714,8 @@
         </p:nvSpPr>
         <p:spPr>
           <a:xfrm>
-            <a:off x="9966960" y="6537960"/>
-            <a:ext cx="1645920" cy="201168"/>
+            <a:off x="9646920" y="6537960"/>
+            <a:ext cx="1965960" cy="201168"/>
           </a:xfrm>
           <a:prstGeom prst="rect">
             <a:avLst/>
@@ -4502,7 +4739,7 @@
                 <a:ea typeface="Aptos" pitchFamily="34" charset="-122"/>
                 <a:cs typeface="Aptos" pitchFamily="34" charset="-120"/>
               </a:rPr>
-              <a:t>Â© Paula Soper</a:t>
+              <a:t>Copyright Paula Soper</a:t>
             </a:r>
             <a:endParaRPr lang="en-US" sz="800" dirty="0"/>
           </a:p>
@@ -4549,77 +4786,13 @@
       </p:sp>
       <p:sp>
         <p:nvSpPr>
-          <p:cNvPr id="8" name="Shape 6"/>
+          <p:cNvPr id="8" name="Text 6"/>
           <p:cNvSpPr/>
           <p:nvPr/>
         </p:nvSpPr>
         <p:spPr>
           <a:xfrm>
             <a:off x="640080" y="658368"/>
-            <a:ext cx="420624" cy="420624"/>
-          </a:xfrm>
-          <a:prstGeom prst="ellipse">
-            <a:avLst/>
-          </a:prstGeom>
-          <a:solidFill>
-            <a:srgbClr val="0068B7"/>
-          </a:solidFill>
-          <a:ln w="12700">
-            <a:solidFill>
-              <a:srgbClr val="0068B7"/>
-            </a:solidFill>
-            <a:prstDash val="solid"/>
-          </a:ln>
-        </p:spPr>
-      </p:sp>
-      <p:sp>
-        <p:nvSpPr>
-          <p:cNvPr id="9" name="Text 7"/>
-          <p:cNvSpPr/>
-          <p:nvPr/>
-        </p:nvSpPr>
-        <p:spPr>
-          <a:xfrm>
-            <a:off x="640080" y="731520"/>
-            <a:ext cx="420624" cy="164592"/>
-          </a:xfrm>
-          <a:prstGeom prst="rect">
-            <a:avLst/>
-          </a:prstGeom>
-          <a:noFill/>
-          <a:ln/>
-        </p:spPr>
-        <p:txBody>
-          <a:bodyPr wrap="square" lIns="0" tIns="0" rIns="0" bIns="0" rtlCol="0" anchor="ctr"/>
-          <a:lstStyle/>
-          <a:p>
-            <a:pPr algn="ctr" indent="0" marL="0">
-              <a:buNone/>
-            </a:pPr>
-            <a:r>
-              <a:rPr lang="en-US" sz="1100" b="1" dirty="0">
-                <a:solidFill>
-                  <a:srgbClr val="FFFFFF"/>
-                </a:solidFill>
-                <a:latin typeface="Aptos" pitchFamily="34" charset="0"/>
-                <a:ea typeface="Aptos" pitchFamily="34" charset="-122"/>
-                <a:cs typeface="Aptos" pitchFamily="34" charset="-120"/>
-              </a:rPr>
-              <a:t>7</a:t>
-            </a:r>
-            <a:endParaRPr lang="en-US" sz="1100" dirty="0"/>
-          </a:p>
-        </p:txBody>
-      </p:sp>
-      <p:sp>
-        <p:nvSpPr>
-          <p:cNvPr id="10" name="Text 8"/>
-          <p:cNvSpPr/>
-          <p:nvPr/>
-        </p:nvSpPr>
-        <p:spPr>
-          <a:xfrm>
-            <a:off x="640080" y="621792"/>
             <a:ext cx="10881360" cy="713232"/>
           </a:xfrm>
           <a:prstGeom prst="rect">
@@ -4654,14 +4827,14 @@
       </p:sp>
       <p:sp>
         <p:nvSpPr>
-          <p:cNvPr id="11" name="Text 9"/>
+          <p:cNvPr id="9" name="Text 7"/>
           <p:cNvSpPr/>
           <p:nvPr/>
         </p:nvSpPr>
         <p:spPr>
           <a:xfrm>
             <a:off x="868680" y="1508760"/>
-            <a:ext cx="6537960" cy="4160520"/>
+            <a:ext cx="6309360" cy="4160520"/>
           </a:xfrm>
           <a:prstGeom prst="rect">
             <a:avLst/>
@@ -4720,18 +4893,18 @@
       </p:sp>
       <p:sp>
         <p:nvSpPr>
-          <p:cNvPr id="12" name="Shape 10"/>
-          <p:cNvSpPr/>
-          <p:nvPr/>
-        </p:nvSpPr>
-        <p:spPr>
-          <a:xfrm>
-            <a:off x="7909560" y="1417320"/>
-            <a:ext cx="3154680" cy="1828800"/>
+          <p:cNvPr id="10" name="Shape 8"/>
+          <p:cNvSpPr/>
+          <p:nvPr/>
+        </p:nvSpPr>
+        <p:spPr>
+          <a:xfrm>
+            <a:off x="7635240" y="1325880"/>
+            <a:ext cx="3474720" cy="1325880"/>
           </a:xfrm>
           <a:prstGeom prst="roundRect">
             <a:avLst>
-              <a:gd name="adj" fmla="val 6000"/>
+              <a:gd name="adj" fmla="val 8276"/>
             </a:avLst>
           </a:prstGeom>
           <a:solidFill>
@@ -4747,14 +4920,14 @@
       </p:sp>
       <p:sp>
         <p:nvSpPr>
-          <p:cNvPr id="13" name="Text 11"/>
-          <p:cNvSpPr/>
-          <p:nvPr/>
-        </p:nvSpPr>
-        <p:spPr>
-          <a:xfrm>
-            <a:off x="8074152" y="1563624"/>
-            <a:ext cx="2825496" cy="256032"/>
+          <p:cNvPr id="11" name="Text 9"/>
+          <p:cNvSpPr/>
+          <p:nvPr/>
+        </p:nvSpPr>
+        <p:spPr>
+          <a:xfrm>
+            <a:off x="7799832" y="1472184"/>
+            <a:ext cx="3145536" cy="256032"/>
           </a:xfrm>
           <a:prstGeom prst="rect">
             <a:avLst/>
@@ -4778,7 +4951,7 @@
                 <a:ea typeface="Aptos" pitchFamily="34" charset="-122"/>
                 <a:cs typeface="Aptos" pitchFamily="34" charset="-120"/>
               </a:rPr>
-              <a:t>Key idea</a:t>
+              <a:t>Core concept</a:t>
             </a:r>
             <a:endParaRPr lang="en-US" sz="1300" dirty="0"/>
           </a:p>
@@ -4786,14 +4959,14 @@
       </p:sp>
       <p:sp>
         <p:nvSpPr>
-          <p:cNvPr id="14" name="Text 12"/>
-          <p:cNvSpPr/>
-          <p:nvPr/>
-        </p:nvSpPr>
-        <p:spPr>
-          <a:xfrm>
-            <a:off x="8074152" y="1920240"/>
-            <a:ext cx="2825496" cy="1188720"/>
+          <p:cNvPr id="12" name="Text 10"/>
+          <p:cNvSpPr/>
+          <p:nvPr/>
+        </p:nvSpPr>
+        <p:spPr>
+          <a:xfrm>
+            <a:off x="7799832" y="1828800"/>
+            <a:ext cx="3145536" cy="685800"/>
           </a:xfrm>
           <a:prstGeom prst="rect">
             <a:avLst/>
@@ -4827,18 +5000,159 @@
       </p:sp>
       <p:sp>
         <p:nvSpPr>
-          <p:cNvPr id="15" name="Shape 13"/>
-          <p:cNvSpPr/>
-          <p:nvPr/>
-        </p:nvSpPr>
-        <p:spPr>
-          <a:xfrm>
-            <a:off x="7909560" y="3520440"/>
-            <a:ext cx="3154680" cy="1737360"/>
+          <p:cNvPr id="13" name="Shape 11"/>
+          <p:cNvSpPr/>
+          <p:nvPr/>
+        </p:nvSpPr>
+        <p:spPr>
+          <a:xfrm>
+            <a:off x="7635240" y="2788920"/>
+            <a:ext cx="3474720" cy="1536192"/>
           </a:xfrm>
           <a:prstGeom prst="roundRect">
             <a:avLst>
-              <a:gd name="adj" fmla="val 6316"/>
+              <a:gd name="adj" fmla="val 7143"/>
+            </a:avLst>
+          </a:prstGeom>
+          <a:solidFill>
+            <a:srgbClr val="FFFFFF">
+              <a:alpha val="88000"/>
+            </a:srgbClr>
+          </a:solidFill>
+          <a:ln w="12700">
+            <a:solidFill>
+              <a:srgbClr val="D6E8F2"/>
+            </a:solidFill>
+            <a:prstDash val="solid"/>
+          </a:ln>
+        </p:spPr>
+      </p:sp>
+      <p:sp>
+        <p:nvSpPr>
+          <p:cNvPr id="14" name="Shape 12"/>
+          <p:cNvSpPr/>
+          <p:nvPr/>
+        </p:nvSpPr>
+        <p:spPr>
+          <a:xfrm>
+            <a:off x="8074152" y="3291840"/>
+            <a:ext cx="2596896" cy="749808"/>
+          </a:xfrm>
+          <a:prstGeom prst="rect">
+            <a:avLst/>
+          </a:prstGeom>
+          <a:solidFill>
+            <a:srgbClr val="EAF6F8"/>
+          </a:solidFill>
+          <a:ln w="12700">
+            <a:solidFill>
+              <a:srgbClr val="8ABBD8"/>
+            </a:solidFill>
+            <a:prstDash val="solid"/>
+          </a:ln>
+        </p:spPr>
+      </p:sp>
+      <p:sp>
+        <p:nvSpPr>
+          <p:cNvPr id="15" name="Shape 13"/>
+          <p:cNvSpPr/>
+          <p:nvPr/>
+        </p:nvSpPr>
+        <p:spPr>
+          <a:xfrm>
+            <a:off x="8202168" y="3721608"/>
+            <a:ext cx="2340864" cy="0"/>
+          </a:xfrm>
+          <a:prstGeom prst="line">
+            <a:avLst/>
+          </a:prstGeom>
+          <a:noFill/>
+          <a:ln w="19050">
+            <a:solidFill>
+              <a:srgbClr val="0068B7"/>
+            </a:solidFill>
+            <a:prstDash val="solid"/>
+          </a:ln>
+        </p:spPr>
+      </p:sp>
+      <p:sp>
+        <p:nvSpPr>
+          <p:cNvPr id="16" name="Shape 14"/>
+          <p:cNvSpPr/>
+          <p:nvPr/>
+        </p:nvSpPr>
+        <p:spPr>
+          <a:xfrm>
+            <a:off x="9198864" y="4206240"/>
+            <a:ext cx="347472" cy="347472"/>
+          </a:xfrm>
+          <a:prstGeom prst="ellipse">
+            <a:avLst/>
+          </a:prstGeom>
+          <a:solidFill>
+            <a:srgbClr val="2F8A28"/>
+          </a:solidFill>
+          <a:ln w="12700">
+            <a:solidFill>
+              <a:srgbClr val="2F8A28"/>
+            </a:solidFill>
+            <a:prstDash val="solid"/>
+          </a:ln>
+        </p:spPr>
+      </p:sp>
+      <p:sp>
+        <p:nvSpPr>
+          <p:cNvPr id="17" name="Text 15"/>
+          <p:cNvSpPr/>
+          <p:nvPr/>
+        </p:nvSpPr>
+        <p:spPr>
+          <a:xfrm>
+            <a:off x="7909560" y="3977640"/>
+            <a:ext cx="2926080" cy="182880"/>
+          </a:xfrm>
+          <a:prstGeom prst="rect">
+            <a:avLst/>
+          </a:prstGeom>
+          <a:noFill/>
+          <a:ln/>
+        </p:spPr>
+        <p:txBody>
+          <a:bodyPr wrap="square" lIns="0" tIns="0" rIns="0" bIns="0" rtlCol="0" anchor="ctr"/>
+          <a:lstStyle/>
+          <a:p>
+            <a:pPr algn="ctr" indent="0" marL="0">
+              <a:buNone/>
+            </a:pPr>
+            <a:r>
+              <a:rPr lang="en-US" sz="1000" dirty="0">
+                <a:solidFill>
+                  <a:srgbClr val="003A63"/>
+                </a:solidFill>
+                <a:latin typeface="Aptos" pitchFamily="34" charset="0"/>
+                <a:ea typeface="Aptos" pitchFamily="34" charset="-122"/>
+                <a:cs typeface="Aptos" pitchFamily="34" charset="-120"/>
+              </a:rPr>
+              <a:t>Concept to action</a:t>
+            </a:r>
+            <a:endParaRPr lang="en-US" sz="1000" dirty="0"/>
+          </a:p>
+        </p:txBody>
+      </p:sp>
+      <p:sp>
+        <p:nvSpPr>
+          <p:cNvPr id="18" name="Shape 16"/>
+          <p:cNvSpPr/>
+          <p:nvPr/>
+        </p:nvSpPr>
+        <p:spPr>
+          <a:xfrm>
+            <a:off x="7635240" y="4498848"/>
+            <a:ext cx="3474720" cy="1143000"/>
+          </a:xfrm>
+          <a:prstGeom prst="roundRect">
+            <a:avLst>
+              <a:gd name="adj" fmla="val 9600"/>
             </a:avLst>
           </a:prstGeom>
           <a:solidFill>
@@ -4854,14 +5168,14 @@
       </p:sp>
       <p:sp>
         <p:nvSpPr>
-          <p:cNvPr id="16" name="Text 14"/>
-          <p:cNvSpPr/>
-          <p:nvPr/>
-        </p:nvSpPr>
-        <p:spPr>
-          <a:xfrm>
-            <a:off x="8074152" y="3666744"/>
-            <a:ext cx="2825496" cy="256032"/>
+          <p:cNvPr id="19" name="Text 17"/>
+          <p:cNvSpPr/>
+          <p:nvPr/>
+        </p:nvSpPr>
+        <p:spPr>
+          <a:xfrm>
+            <a:off x="7799832" y="4645152"/>
+            <a:ext cx="3145536" cy="256032"/>
           </a:xfrm>
           <a:prstGeom prst="rect">
             <a:avLst/>
@@ -4885,7 +5199,7 @@
                 <a:ea typeface="Aptos" pitchFamily="34" charset="-122"/>
                 <a:cs typeface="Aptos" pitchFamily="34" charset="-120"/>
               </a:rPr>
-              <a:t>Use this for</a:t>
+              <a:t>Apply it</a:t>
             </a:r>
             <a:endParaRPr lang="en-US" sz="1300" dirty="0"/>
           </a:p>
@@ -4893,14 +5207,14 @@
       </p:sp>
       <p:sp>
         <p:nvSpPr>
-          <p:cNvPr id="17" name="Text 15"/>
-          <p:cNvSpPr/>
-          <p:nvPr/>
-        </p:nvSpPr>
-        <p:spPr>
-          <a:xfrm>
-            <a:off x="8074152" y="4023360"/>
-            <a:ext cx="2825496" cy="1097280"/>
+          <p:cNvPr id="20" name="Text 18"/>
+          <p:cNvSpPr/>
+          <p:nvPr/>
+        </p:nvSpPr>
+        <p:spPr>
+          <a:xfrm>
+            <a:off x="7799832" y="5001768"/>
+            <a:ext cx="3145536" cy="502920"/>
           </a:xfrm>
           <a:prstGeom prst="rect">
             <a:avLst/>
@@ -4926,7 +5240,7 @@
                 <a:ea typeface="Aptos" pitchFamily="34" charset="-122"/>
                 <a:cs typeface="Aptos" pitchFamily="34" charset="-120"/>
               </a:rPr>
-              <a:t>Connect the concept to public health decisions, safeguards, documentation, or implementation work.</a:t>
+              <a:t>Connect the concept to public health purpose, responsible use, required safeguards, documentation, and the next action a department should take.</a:t>
             </a:r>
             <a:endParaRPr lang="en-US" sz="1550" dirty="0"/>
           </a:p>
@@ -5100,8 +5414,8 @@
         </p:nvSpPr>
         <p:spPr>
           <a:xfrm>
-            <a:off x="9966960" y="6537960"/>
-            <a:ext cx="1645920" cy="201168"/>
+            <a:off x="9646920" y="6537960"/>
+            <a:ext cx="1965960" cy="201168"/>
           </a:xfrm>
           <a:prstGeom prst="rect">
             <a:avLst/>
@@ -5125,7 +5439,7 @@
                 <a:ea typeface="Aptos" pitchFamily="34" charset="-122"/>
                 <a:cs typeface="Aptos" pitchFamily="34" charset="-120"/>
               </a:rPr>
-              <a:t>Â© Paula Soper</a:t>
+              <a:t>Copyright Paula Soper</a:t>
             </a:r>
             <a:endParaRPr lang="en-US" sz="800" dirty="0"/>
           </a:p>
@@ -5172,77 +5486,13 @@
       </p:sp>
       <p:sp>
         <p:nvSpPr>
-          <p:cNvPr id="8" name="Shape 6"/>
+          <p:cNvPr id="8" name="Text 6"/>
           <p:cNvSpPr/>
           <p:nvPr/>
         </p:nvSpPr>
         <p:spPr>
           <a:xfrm>
             <a:off x="640080" y="658368"/>
-            <a:ext cx="420624" cy="420624"/>
-          </a:xfrm>
-          <a:prstGeom prst="ellipse">
-            <a:avLst/>
-          </a:prstGeom>
-          <a:solidFill>
-            <a:srgbClr val="0068B7"/>
-          </a:solidFill>
-          <a:ln w="12700">
-            <a:solidFill>
-              <a:srgbClr val="0068B7"/>
-            </a:solidFill>
-            <a:prstDash val="solid"/>
-          </a:ln>
-        </p:spPr>
-      </p:sp>
-      <p:sp>
-        <p:nvSpPr>
-          <p:cNvPr id="9" name="Text 7"/>
-          <p:cNvSpPr/>
-          <p:nvPr/>
-        </p:nvSpPr>
-        <p:spPr>
-          <a:xfrm>
-            <a:off x="640080" y="731520"/>
-            <a:ext cx="420624" cy="164592"/>
-          </a:xfrm>
-          <a:prstGeom prst="rect">
-            <a:avLst/>
-          </a:prstGeom>
-          <a:noFill/>
-          <a:ln/>
-        </p:spPr>
-        <p:txBody>
-          <a:bodyPr wrap="square" lIns="0" tIns="0" rIns="0" bIns="0" rtlCol="0" anchor="ctr"/>
-          <a:lstStyle/>
-          <a:p>
-            <a:pPr algn="ctr" indent="0" marL="0">
-              <a:buNone/>
-            </a:pPr>
-            <a:r>
-              <a:rPr lang="en-US" sz="1100" b="1" dirty="0">
-                <a:solidFill>
-                  <a:srgbClr val="FFFFFF"/>
-                </a:solidFill>
-                <a:latin typeface="Aptos" pitchFamily="34" charset="0"/>
-                <a:ea typeface="Aptos" pitchFamily="34" charset="-122"/>
-                <a:cs typeface="Aptos" pitchFamily="34" charset="-120"/>
-              </a:rPr>
-              <a:t>8</a:t>
-            </a:r>
-            <a:endParaRPr lang="en-US" sz="1100" dirty="0"/>
-          </a:p>
-        </p:txBody>
-      </p:sp>
-      <p:sp>
-        <p:nvSpPr>
-          <p:cNvPr id="10" name="Text 8"/>
-          <p:cNvSpPr/>
-          <p:nvPr/>
-        </p:nvSpPr>
-        <p:spPr>
-          <a:xfrm>
-            <a:off x="640080" y="621792"/>
             <a:ext cx="10881360" cy="713232"/>
           </a:xfrm>
           <a:prstGeom prst="rect">
@@ -5277,14 +5527,14 @@
       </p:sp>
       <p:sp>
         <p:nvSpPr>
-          <p:cNvPr id="11" name="Text 9"/>
+          <p:cNvPr id="9" name="Text 7"/>
           <p:cNvSpPr/>
           <p:nvPr/>
         </p:nvSpPr>
         <p:spPr>
           <a:xfrm>
             <a:off x="868680" y="1508760"/>
-            <a:ext cx="6537960" cy="4160520"/>
+            <a:ext cx="6309360" cy="4160520"/>
           </a:xfrm>
           <a:prstGeom prst="rect">
             <a:avLst/>
@@ -5343,18 +5593,18 @@
       </p:sp>
       <p:sp>
         <p:nvSpPr>
-          <p:cNvPr id="12" name="Shape 10"/>
-          <p:cNvSpPr/>
-          <p:nvPr/>
-        </p:nvSpPr>
-        <p:spPr>
-          <a:xfrm>
-            <a:off x="7909560" y="1417320"/>
-            <a:ext cx="3154680" cy="1828800"/>
+          <p:cNvPr id="10" name="Shape 8"/>
+          <p:cNvSpPr/>
+          <p:nvPr/>
+        </p:nvSpPr>
+        <p:spPr>
+          <a:xfrm>
+            <a:off x="7635240" y="1325880"/>
+            <a:ext cx="3474720" cy="1325880"/>
           </a:xfrm>
           <a:prstGeom prst="roundRect">
             <a:avLst>
-              <a:gd name="adj" fmla="val 6000"/>
+              <a:gd name="adj" fmla="val 8276"/>
             </a:avLst>
           </a:prstGeom>
           <a:solidFill>
@@ -5370,14 +5620,14 @@
       </p:sp>
       <p:sp>
         <p:nvSpPr>
-          <p:cNvPr id="13" name="Text 11"/>
-          <p:cNvSpPr/>
-          <p:nvPr/>
-        </p:nvSpPr>
-        <p:spPr>
-          <a:xfrm>
-            <a:off x="8074152" y="1563624"/>
-            <a:ext cx="2825496" cy="256032"/>
+          <p:cNvPr id="11" name="Text 9"/>
+          <p:cNvSpPr/>
+          <p:nvPr/>
+        </p:nvSpPr>
+        <p:spPr>
+          <a:xfrm>
+            <a:off x="7799832" y="1472184"/>
+            <a:ext cx="3145536" cy="256032"/>
           </a:xfrm>
           <a:prstGeom prst="rect">
             <a:avLst/>
@@ -5401,7 +5651,7 @@
                 <a:ea typeface="Aptos" pitchFamily="34" charset="-122"/>
                 <a:cs typeface="Aptos" pitchFamily="34" charset="-120"/>
               </a:rPr>
-              <a:t>Key idea</a:t>
+              <a:t>Risk check</a:t>
             </a:r>
             <a:endParaRPr lang="en-US" sz="1300" dirty="0"/>
           </a:p>
@@ -5409,14 +5659,14 @@
       </p:sp>
       <p:sp>
         <p:nvSpPr>
-          <p:cNvPr id="14" name="Text 12"/>
-          <p:cNvSpPr/>
-          <p:nvPr/>
-        </p:nvSpPr>
-        <p:spPr>
-          <a:xfrm>
-            <a:off x="8074152" y="1920240"/>
-            <a:ext cx="2825496" cy="1188720"/>
+          <p:cNvPr id="12" name="Text 10"/>
+          <p:cNvSpPr/>
+          <p:nvPr/>
+        </p:nvSpPr>
+        <p:spPr>
+          <a:xfrm>
+            <a:off x="7799832" y="1828800"/>
+            <a:ext cx="3145536" cy="685800"/>
           </a:xfrm>
           <a:prstGeom prst="rect">
             <a:avLst/>
@@ -5450,18 +5700,171 @@
       </p:sp>
       <p:sp>
         <p:nvSpPr>
-          <p:cNvPr id="15" name="Shape 13"/>
-          <p:cNvSpPr/>
-          <p:nvPr/>
-        </p:nvSpPr>
-        <p:spPr>
-          <a:xfrm>
-            <a:off x="7909560" y="3520440"/>
-            <a:ext cx="3154680" cy="1737360"/>
+          <p:cNvPr id="13" name="Shape 11"/>
+          <p:cNvSpPr/>
+          <p:nvPr/>
+        </p:nvSpPr>
+        <p:spPr>
+          <a:xfrm>
+            <a:off x="7635240" y="2788920"/>
+            <a:ext cx="3474720" cy="1536192"/>
           </a:xfrm>
           <a:prstGeom prst="roundRect">
             <a:avLst>
-              <a:gd name="adj" fmla="val 6316"/>
+              <a:gd name="adj" fmla="val 7143"/>
+            </a:avLst>
+          </a:prstGeom>
+          <a:solidFill>
+            <a:srgbClr val="FFFFFF">
+              <a:alpha val="88000"/>
+            </a:srgbClr>
+          </a:solidFill>
+          <a:ln w="12700">
+            <a:solidFill>
+              <a:srgbClr val="D6E8F2"/>
+            </a:solidFill>
+            <a:prstDash val="solid"/>
+          </a:ln>
+        </p:spPr>
+      </p:sp>
+      <p:sp>
+        <p:nvSpPr>
+          <p:cNvPr id="14" name="Shape 12"/>
+          <p:cNvSpPr/>
+          <p:nvPr/>
+        </p:nvSpPr>
+        <p:spPr>
+          <a:xfrm>
+            <a:off x="8046720" y="3108960"/>
+            <a:ext cx="2651760" cy="896112"/>
+          </a:xfrm>
+          <a:prstGeom prst="arc">
+            <a:avLst/>
+          </a:prstGeom>
+          <a:noFill/>
+          <a:ln w="25400">
+            <a:solidFill>
+              <a:srgbClr val="0068B7"/>
+            </a:solidFill>
+            <a:prstDash val="solid"/>
+          </a:ln>
+        </p:spPr>
+      </p:sp>
+      <p:sp>
+        <p:nvSpPr>
+          <p:cNvPr id="15" name="Text 13"/>
+          <p:cNvSpPr/>
+          <p:nvPr/>
+        </p:nvSpPr>
+        <p:spPr>
+          <a:xfrm>
+            <a:off x="7909560" y="3099816"/>
+            <a:ext cx="2926080" cy="256032"/>
+          </a:xfrm>
+          <a:prstGeom prst="rect">
+            <a:avLst/>
+          </a:prstGeom>
+          <a:noFill/>
+          <a:ln/>
+        </p:spPr>
+        <p:txBody>
+          <a:bodyPr wrap="square" lIns="0" tIns="0" rIns="0" bIns="0" rtlCol="0" anchor="ctr"/>
+          <a:lstStyle/>
+          <a:p>
+            <a:pPr algn="ctr" indent="0" marL="0">
+              <a:buNone/>
+            </a:pPr>
+            <a:r>
+              <a:rPr lang="en-US" sz="1500" b="1" dirty="0">
+                <a:solidFill>
+                  <a:srgbClr val="003A63"/>
+                </a:solidFill>
+                <a:latin typeface="Aptos" pitchFamily="34" charset="0"/>
+                <a:ea typeface="Aptos" pitchFamily="34" charset="-122"/>
+                <a:cs typeface="Aptos" pitchFamily="34" charset="-120"/>
+              </a:rPr>
+              <a:t>Risk</a:t>
+            </a:r>
+            <a:endParaRPr lang="en-US" sz="1500" dirty="0"/>
+          </a:p>
+        </p:txBody>
+      </p:sp>
+      <p:sp>
+        <p:nvSpPr>
+          <p:cNvPr id="16" name="Shape 14"/>
+          <p:cNvSpPr/>
+          <p:nvPr/>
+        </p:nvSpPr>
+        <p:spPr>
+          <a:xfrm>
+            <a:off x="8366760" y="3639312"/>
+            <a:ext cx="2011680" cy="0"/>
+          </a:xfrm>
+          <a:prstGeom prst="line">
+            <a:avLst/>
+          </a:prstGeom>
+          <a:noFill/>
+          <a:ln w="63500">
+            <a:solidFill>
+              <a:srgbClr val="2F8A28"/>
+            </a:solidFill>
+            <a:prstDash val="solid"/>
+          </a:ln>
+        </p:spPr>
+      </p:sp>
+      <p:sp>
+        <p:nvSpPr>
+          <p:cNvPr id="17" name="Text 15"/>
+          <p:cNvSpPr/>
+          <p:nvPr/>
+        </p:nvSpPr>
+        <p:spPr>
+          <a:xfrm>
+            <a:off x="7909560" y="3849624"/>
+            <a:ext cx="2926080" cy="164592"/>
+          </a:xfrm>
+          <a:prstGeom prst="rect">
+            <a:avLst/>
+          </a:prstGeom>
+          <a:noFill/>
+          <a:ln/>
+        </p:spPr>
+        <p:txBody>
+          <a:bodyPr wrap="square" lIns="0" tIns="0" rIns="0" bIns="0" rtlCol="0" anchor="ctr"/>
+          <a:lstStyle/>
+          <a:p>
+            <a:pPr algn="ctr" indent="0" marL="0">
+              <a:buNone/>
+            </a:pPr>
+            <a:r>
+              <a:rPr lang="en-US" sz="900" dirty="0">
+                <a:solidFill>
+                  <a:srgbClr val="003A63"/>
+                </a:solidFill>
+                <a:latin typeface="Aptos" pitchFamily="34" charset="0"/>
+                <a:ea typeface="Aptos" pitchFamily="34" charset="-122"/>
+                <a:cs typeface="Aptos" pitchFamily="34" charset="-120"/>
+              </a:rPr>
+              <a:t>Human review</a:t>
+            </a:r>
+            <a:endParaRPr lang="en-US" sz="900" dirty="0"/>
+          </a:p>
+        </p:txBody>
+      </p:sp>
+      <p:sp>
+        <p:nvSpPr>
+          <p:cNvPr id="18" name="Shape 16"/>
+          <p:cNvSpPr/>
+          <p:nvPr/>
+        </p:nvSpPr>
+        <p:spPr>
+          <a:xfrm>
+            <a:off x="7635240" y="4498848"/>
+            <a:ext cx="3474720" cy="1143000"/>
+          </a:xfrm>
+          <a:prstGeom prst="roundRect">
+            <a:avLst>
+              <a:gd name="adj" fmla="val 9600"/>
             </a:avLst>
           </a:prstGeom>
           <a:solidFill>
@@ -5477,14 +5880,14 @@
       </p:sp>
       <p:sp>
         <p:nvSpPr>
-          <p:cNvPr id="16" name="Text 14"/>
-          <p:cNvSpPr/>
-          <p:nvPr/>
-        </p:nvSpPr>
-        <p:spPr>
-          <a:xfrm>
-            <a:off x="8074152" y="3666744"/>
-            <a:ext cx="2825496" cy="256032"/>
+          <p:cNvPr id="19" name="Text 17"/>
+          <p:cNvSpPr/>
+          <p:nvPr/>
+        </p:nvSpPr>
+        <p:spPr>
+          <a:xfrm>
+            <a:off x="7799832" y="4645152"/>
+            <a:ext cx="3145536" cy="256032"/>
           </a:xfrm>
           <a:prstGeom prst="rect">
             <a:avLst/>
@@ -5508,7 +5911,7 @@
                 <a:ea typeface="Aptos" pitchFamily="34" charset="-122"/>
                 <a:cs typeface="Aptos" pitchFamily="34" charset="-120"/>
               </a:rPr>
-              <a:t>Use this for</a:t>
+              <a:t>Safeguard to plan</a:t>
             </a:r>
             <a:endParaRPr lang="en-US" sz="1300" dirty="0"/>
           </a:p>
@@ -5516,14 +5919,14 @@
       </p:sp>
       <p:sp>
         <p:nvSpPr>
-          <p:cNvPr id="17" name="Text 15"/>
-          <p:cNvSpPr/>
-          <p:nvPr/>
-        </p:nvSpPr>
-        <p:spPr>
-          <a:xfrm>
-            <a:off x="8074152" y="4023360"/>
-            <a:ext cx="2825496" cy="1097280"/>
+          <p:cNvPr id="20" name="Text 18"/>
+          <p:cNvSpPr/>
+          <p:nvPr/>
+        </p:nvSpPr>
+        <p:spPr>
+          <a:xfrm>
+            <a:off x="7799832" y="5001768"/>
+            <a:ext cx="3145536" cy="502920"/>
           </a:xfrm>
           <a:prstGeom prst="rect">
             <a:avLst/>
@@ -5549,7 +5952,7 @@
                 <a:ea typeface="Aptos" pitchFamily="34" charset="-122"/>
                 <a:cs typeface="Aptos" pitchFamily="34" charset="-120"/>
               </a:rPr>
-              <a:t>Connect the concept to public health decisions, safeguards, documentation, or implementation work.</a:t>
+              <a:t>Identify what could go wrong, who could be affected, what safeguards are needed, and what evidence should be reviewed before use expands.</a:t>
             </a:r>
             <a:endParaRPr lang="en-US" sz="1550" dirty="0"/>
           </a:p>
@@ -5723,8 +6126,8 @@
         </p:nvSpPr>
         <p:spPr>
           <a:xfrm>
-            <a:off x="9966960" y="6537960"/>
-            <a:ext cx="1645920" cy="201168"/>
+            <a:off x="9646920" y="6537960"/>
+            <a:ext cx="1965960" cy="201168"/>
           </a:xfrm>
           <a:prstGeom prst="rect">
             <a:avLst/>
@@ -5748,7 +6151,7 @@
                 <a:ea typeface="Aptos" pitchFamily="34" charset="-122"/>
                 <a:cs typeface="Aptos" pitchFamily="34" charset="-120"/>
               </a:rPr>
-              <a:t>Â© Paula Soper</a:t>
+              <a:t>Copyright Paula Soper</a:t>
             </a:r>
             <a:endParaRPr lang="en-US" sz="800" dirty="0"/>
           </a:p>
@@ -5843,7 +6246,7 @@
         <p:spPr>
           <a:xfrm>
             <a:off x="868680" y="1508760"/>
-            <a:ext cx="6537960" cy="4160520"/>
+            <a:ext cx="6309360" cy="4160520"/>
           </a:xfrm>
           <a:prstGeom prst="rect">
             <a:avLst/>
@@ -5908,12 +6311,12 @@
         </p:nvSpPr>
         <p:spPr>
           <a:xfrm>
-            <a:off x="7909560" y="1417320"/>
-            <a:ext cx="3154680" cy="1828800"/>
+            <a:off x="7635240" y="1325880"/>
+            <a:ext cx="3474720" cy="1325880"/>
           </a:xfrm>
           <a:prstGeom prst="roundRect">
             <a:avLst>
-              <a:gd name="adj" fmla="val 6000"/>
+              <a:gd name="adj" fmla="val 8276"/>
             </a:avLst>
           </a:prstGeom>
           <a:solidFill>
@@ -5935,8 +6338,8 @@
         </p:nvSpPr>
         <p:spPr>
           <a:xfrm>
-            <a:off x="8074152" y="1563624"/>
-            <a:ext cx="2825496" cy="256032"/>
+            <a:off x="7799832" y="1472184"/>
+            <a:ext cx="3145536" cy="256032"/>
           </a:xfrm>
           <a:prstGeom prst="rect">
             <a:avLst/>
@@ -5960,7 +6363,7 @@
                 <a:ea typeface="Aptos" pitchFamily="34" charset="-122"/>
                 <a:cs typeface="Aptos" pitchFamily="34" charset="-120"/>
               </a:rPr>
-              <a:t>Key idea</a:t>
+              <a:t>Risk check</a:t>
             </a:r>
             <a:endParaRPr lang="en-US" sz="1300" dirty="0"/>
           </a:p>
@@ -5974,8 +6377,8 @@
         </p:nvSpPr>
         <p:spPr>
           <a:xfrm>
-            <a:off x="8074152" y="1920240"/>
-            <a:ext cx="2825496" cy="1188720"/>
+            <a:off x="7799832" y="1828800"/>
+            <a:ext cx="3145536" cy="685800"/>
           </a:xfrm>
           <a:prstGeom prst="rect">
             <a:avLst/>
@@ -6015,12 +6418,165 @@
         </p:nvSpPr>
         <p:spPr>
           <a:xfrm>
-            <a:off x="7909560" y="3520440"/>
-            <a:ext cx="3154680" cy="1737360"/>
+            <a:off x="7635240" y="2788920"/>
+            <a:ext cx="3474720" cy="1536192"/>
           </a:xfrm>
           <a:prstGeom prst="roundRect">
             <a:avLst>
-              <a:gd name="adj" fmla="val 6316"/>
+              <a:gd name="adj" fmla="val 7143"/>
+            </a:avLst>
+          </a:prstGeom>
+          <a:solidFill>
+            <a:srgbClr val="FFFFFF">
+              <a:alpha val="88000"/>
+            </a:srgbClr>
+          </a:solidFill>
+          <a:ln w="12700">
+            <a:solidFill>
+              <a:srgbClr val="D6E8F2"/>
+            </a:solidFill>
+            <a:prstDash val="solid"/>
+          </a:ln>
+        </p:spPr>
+      </p:sp>
+      <p:sp>
+        <p:nvSpPr>
+          <p:cNvPr id="14" name="Shape 12"/>
+          <p:cNvSpPr/>
+          <p:nvPr/>
+        </p:nvSpPr>
+        <p:spPr>
+          <a:xfrm>
+            <a:off x="8046720" y="3108960"/>
+            <a:ext cx="2651760" cy="896112"/>
+          </a:xfrm>
+          <a:prstGeom prst="arc">
+            <a:avLst/>
+          </a:prstGeom>
+          <a:noFill/>
+          <a:ln w="25400">
+            <a:solidFill>
+              <a:srgbClr val="0068B7"/>
+            </a:solidFill>
+            <a:prstDash val="solid"/>
+          </a:ln>
+        </p:spPr>
+      </p:sp>
+      <p:sp>
+        <p:nvSpPr>
+          <p:cNvPr id="15" name="Text 13"/>
+          <p:cNvSpPr/>
+          <p:nvPr/>
+        </p:nvSpPr>
+        <p:spPr>
+          <a:xfrm>
+            <a:off x="7909560" y="3099816"/>
+            <a:ext cx="2926080" cy="256032"/>
+          </a:xfrm>
+          <a:prstGeom prst="rect">
+            <a:avLst/>
+          </a:prstGeom>
+          <a:noFill/>
+          <a:ln/>
+        </p:spPr>
+        <p:txBody>
+          <a:bodyPr wrap="square" lIns="0" tIns="0" rIns="0" bIns="0" rtlCol="0" anchor="ctr"/>
+          <a:lstStyle/>
+          <a:p>
+            <a:pPr algn="ctr" indent="0" marL="0">
+              <a:buNone/>
+            </a:pPr>
+            <a:r>
+              <a:rPr lang="en-US" sz="1500" b="1" dirty="0">
+                <a:solidFill>
+                  <a:srgbClr val="003A63"/>
+                </a:solidFill>
+                <a:latin typeface="Aptos" pitchFamily="34" charset="0"/>
+                <a:ea typeface="Aptos" pitchFamily="34" charset="-122"/>
+                <a:cs typeface="Aptos" pitchFamily="34" charset="-120"/>
+              </a:rPr>
+              <a:t>Risk</a:t>
+            </a:r>
+            <a:endParaRPr lang="en-US" sz="1500" dirty="0"/>
+          </a:p>
+        </p:txBody>
+      </p:sp>
+      <p:sp>
+        <p:nvSpPr>
+          <p:cNvPr id="16" name="Shape 14"/>
+          <p:cNvSpPr/>
+          <p:nvPr/>
+        </p:nvSpPr>
+        <p:spPr>
+          <a:xfrm>
+            <a:off x="8366760" y="3639312"/>
+            <a:ext cx="2011680" cy="0"/>
+          </a:xfrm>
+          <a:prstGeom prst="line">
+            <a:avLst/>
+          </a:prstGeom>
+          <a:noFill/>
+          <a:ln w="63500">
+            <a:solidFill>
+              <a:srgbClr val="2F8A28"/>
+            </a:solidFill>
+            <a:prstDash val="solid"/>
+          </a:ln>
+        </p:spPr>
+      </p:sp>
+      <p:sp>
+        <p:nvSpPr>
+          <p:cNvPr id="17" name="Text 15"/>
+          <p:cNvSpPr/>
+          <p:nvPr/>
+        </p:nvSpPr>
+        <p:spPr>
+          <a:xfrm>
+            <a:off x="7909560" y="3849624"/>
+            <a:ext cx="2926080" cy="164592"/>
+          </a:xfrm>
+          <a:prstGeom prst="rect">
+            <a:avLst/>
+          </a:prstGeom>
+          <a:noFill/>
+          <a:ln/>
+        </p:spPr>
+        <p:txBody>
+          <a:bodyPr wrap="square" lIns="0" tIns="0" rIns="0" bIns="0" rtlCol="0" anchor="ctr"/>
+          <a:lstStyle/>
+          <a:p>
+            <a:pPr algn="ctr" indent="0" marL="0">
+              <a:buNone/>
+            </a:pPr>
+            <a:r>
+              <a:rPr lang="en-US" sz="900" dirty="0">
+                <a:solidFill>
+                  <a:srgbClr val="003A63"/>
+                </a:solidFill>
+                <a:latin typeface="Aptos" pitchFamily="34" charset="0"/>
+                <a:ea typeface="Aptos" pitchFamily="34" charset="-122"/>
+                <a:cs typeface="Aptos" pitchFamily="34" charset="-120"/>
+              </a:rPr>
+              <a:t>Human review</a:t>
+            </a:r>
+            <a:endParaRPr lang="en-US" sz="900" dirty="0"/>
+          </a:p>
+        </p:txBody>
+      </p:sp>
+      <p:sp>
+        <p:nvSpPr>
+          <p:cNvPr id="18" name="Shape 16"/>
+          <p:cNvSpPr/>
+          <p:nvPr/>
+        </p:nvSpPr>
+        <p:spPr>
+          <a:xfrm>
+            <a:off x="7635240" y="4498848"/>
+            <a:ext cx="3474720" cy="1143000"/>
+          </a:xfrm>
+          <a:prstGeom prst="roundRect">
+            <a:avLst>
+              <a:gd name="adj" fmla="val 9600"/>
             </a:avLst>
           </a:prstGeom>
           <a:solidFill>
@@ -6036,14 +6592,14 @@
       </p:sp>
       <p:sp>
         <p:nvSpPr>
-          <p:cNvPr id="14" name="Text 12"/>
-          <p:cNvSpPr/>
-          <p:nvPr/>
-        </p:nvSpPr>
-        <p:spPr>
-          <a:xfrm>
-            <a:off x="8074152" y="3666744"/>
-            <a:ext cx="2825496" cy="256032"/>
+          <p:cNvPr id="19" name="Text 17"/>
+          <p:cNvSpPr/>
+          <p:nvPr/>
+        </p:nvSpPr>
+        <p:spPr>
+          <a:xfrm>
+            <a:off x="7799832" y="4645152"/>
+            <a:ext cx="3145536" cy="256032"/>
           </a:xfrm>
           <a:prstGeom prst="rect">
             <a:avLst/>
@@ -6067,7 +6623,7 @@
                 <a:ea typeface="Aptos" pitchFamily="34" charset="-122"/>
                 <a:cs typeface="Aptos" pitchFamily="34" charset="-120"/>
               </a:rPr>
-              <a:t>Use this for</a:t>
+              <a:t>Safeguard to plan</a:t>
             </a:r>
             <a:endParaRPr lang="en-US" sz="1300" dirty="0"/>
           </a:p>
@@ -6075,14 +6631,14 @@
       </p:sp>
       <p:sp>
         <p:nvSpPr>
-          <p:cNvPr id="15" name="Text 13"/>
-          <p:cNvSpPr/>
-          <p:nvPr/>
-        </p:nvSpPr>
-        <p:spPr>
-          <a:xfrm>
-            <a:off x="8074152" y="4023360"/>
-            <a:ext cx="2825496" cy="1097280"/>
+          <p:cNvPr id="20" name="Text 18"/>
+          <p:cNvSpPr/>
+          <p:nvPr/>
+        </p:nvSpPr>
+        <p:spPr>
+          <a:xfrm>
+            <a:off x="7799832" y="5001768"/>
+            <a:ext cx="3145536" cy="502920"/>
           </a:xfrm>
           <a:prstGeom prst="rect">
             <a:avLst/>
@@ -6108,7 +6664,7 @@
                 <a:ea typeface="Aptos" pitchFamily="34" charset="-122"/>
                 <a:cs typeface="Aptos" pitchFamily="34" charset="-120"/>
               </a:rPr>
-              <a:t>Connect the concept to public health decisions, safeguards, documentation, or implementation work.</a:t>
+              <a:t>Identify what could go wrong, who could be affected, what safeguards are needed, and what evidence should be reviewed before use expands.</a:t>
             </a:r>
             <a:endParaRPr lang="en-US" sz="1550" dirty="0"/>
           </a:p>
@@ -6282,8 +6838,8 @@
         </p:nvSpPr>
         <p:spPr>
           <a:xfrm>
-            <a:off x="9966960" y="6537960"/>
-            <a:ext cx="1645920" cy="201168"/>
+            <a:off x="9646920" y="6537960"/>
+            <a:ext cx="1965960" cy="201168"/>
           </a:xfrm>
           <a:prstGeom prst="rect">
             <a:avLst/>
@@ -6307,7 +6863,7 @@
                 <a:ea typeface="Aptos" pitchFamily="34" charset="-122"/>
                 <a:cs typeface="Aptos" pitchFamily="34" charset="-120"/>
               </a:rPr>
-              <a:t>Â© Paula Soper</a:t>
+              <a:t>Copyright Paula Soper</a:t>
             </a:r>
             <a:endParaRPr lang="en-US" sz="800" dirty="0"/>
           </a:p>
@@ -6354,17 +6910,262 @@
       </p:sp>
       <p:sp>
         <p:nvSpPr>
-          <p:cNvPr id="8" name="Shape 6"/>
+          <p:cNvPr id="8" name="Text 6"/>
           <p:cNvSpPr/>
           <p:nvPr/>
         </p:nvSpPr>
         <p:spPr>
           <a:xfrm>
             <a:off x="640080" y="658368"/>
-            <a:ext cx="420624" cy="420624"/>
-          </a:xfrm>
-          <a:prstGeom prst="ellipse">
-            <a:avLst/>
+            <a:ext cx="10881360" cy="713232"/>
+          </a:xfrm>
+          <a:prstGeom prst="rect">
+            <a:avLst/>
+          </a:prstGeom>
+          <a:noFill/>
+          <a:ln/>
+        </p:spPr>
+        <p:txBody>
+          <a:bodyPr wrap="square" lIns="0" tIns="0" rIns="0" bIns="0" rtlCol="0" anchor="ctr">
+            <a:normAutofit/>
+          </a:bodyPr>
+          <a:lstStyle/>
+          <a:p>
+            <a:pPr indent="0" marL="0">
+              <a:buNone/>
+            </a:pPr>
+            <a:r>
+              <a:rPr lang="en-US" sz="3400" b="1" dirty="0">
+                <a:solidFill>
+                  <a:srgbClr val="003A63"/>
+                </a:solidFill>
+                <a:latin typeface="Aptos Display" pitchFamily="34" charset="0"/>
+                <a:ea typeface="Aptos Display" pitchFamily="34" charset="-122"/>
+                <a:cs typeface="Aptos Display" pitchFamily="34" charset="-120"/>
+              </a:rPr>
+              <a:t>Application to AI-Supported Workflows</a:t>
+            </a:r>
+            <a:endParaRPr lang="en-US" sz="3400" dirty="0"/>
+          </a:p>
+        </p:txBody>
+      </p:sp>
+      <p:sp>
+        <p:nvSpPr>
+          <p:cNvPr id="9" name="Text 7"/>
+          <p:cNvSpPr/>
+          <p:nvPr/>
+        </p:nvSpPr>
+        <p:spPr>
+          <a:xfrm>
+            <a:off x="868680" y="1508760"/>
+            <a:ext cx="6309360" cy="4160520"/>
+          </a:xfrm>
+          <a:prstGeom prst="rect">
+            <a:avLst/>
+          </a:prstGeom>
+          <a:noFill/>
+          <a:ln/>
+        </p:spPr>
+        <p:txBody>
+          <a:bodyPr wrap="square" lIns="635" tIns="635" rIns="635" bIns="635" rtlCol="0" anchor="t">
+            <a:normAutofit/>
+          </a:bodyPr>
+          <a:lstStyle/>
+          <a:p>
+            <a:r>
+              <a:rPr lang="en-US" sz="2100" dirty="0">
+                <a:solidFill>
+                  <a:srgbClr val="17364A"/>
+                </a:solidFill>
+                <a:latin typeface="Aptos" pitchFamily="34" charset="0"/>
+                <a:ea typeface="Aptos" pitchFamily="34" charset="-122"/>
+                <a:cs typeface="Aptos" pitchFamily="34" charset="-120"/>
+              </a:rPr>
+              <a:t>Generative AI can use FHIR data to draft case or patient summaries, but the output should be grounded.</a:t>
+            </a:r>
+            <a:endParaRPr lang="en-US" sz="2100" dirty="0"/>
+          </a:p>
+          <a:p>
+            <a:r>
+              <a:rPr lang="en-US" sz="2100" dirty="0">
+                <a:solidFill>
+                  <a:srgbClr val="17364A"/>
+                </a:solidFill>
+                <a:latin typeface="Aptos" pitchFamily="34" charset="0"/>
+                <a:ea typeface="Aptos" pitchFamily="34" charset="-122"/>
+                <a:cs typeface="Aptos" pitchFamily="34" charset="-120"/>
+              </a:rPr>
+              <a:t>Predictive analytics may use features derived from FHIR resources, which requires stable extraction and.</a:t>
+            </a:r>
+            <a:endParaRPr lang="en-US" sz="2100" dirty="0"/>
+          </a:p>
+          <a:p>
+            <a:r>
+              <a:rPr lang="en-US" sz="2100" dirty="0">
+                <a:solidFill>
+                  <a:srgbClr val="17364A"/>
+                </a:solidFill>
+                <a:latin typeface="Aptos" pitchFamily="34" charset="0"/>
+                <a:ea typeface="Aptos" pitchFamily="34" charset="-122"/>
+                <a:cs typeface="Aptos" pitchFamily="34" charset="-120"/>
+              </a:rPr>
+              <a:t>RAG may combine FHIR-derived facts with agency guidance.</a:t>
+            </a:r>
+            <a:endParaRPr lang="en-US" sz="2100" dirty="0"/>
+          </a:p>
+        </p:txBody>
+      </p:sp>
+      <p:sp>
+        <p:nvSpPr>
+          <p:cNvPr id="10" name="Shape 8"/>
+          <p:cNvSpPr/>
+          <p:nvPr/>
+        </p:nvSpPr>
+        <p:spPr>
+          <a:xfrm>
+            <a:off x="7635240" y="1325880"/>
+            <a:ext cx="3474720" cy="1325880"/>
+          </a:xfrm>
+          <a:prstGeom prst="roundRect">
+            <a:avLst>
+              <a:gd name="adj" fmla="val 8276"/>
+            </a:avLst>
+          </a:prstGeom>
+          <a:solidFill>
+            <a:srgbClr val="EEF8ED"/>
+          </a:solidFill>
+          <a:ln w="12700">
+            <a:solidFill>
+              <a:srgbClr val="B9D7E6"/>
+            </a:solidFill>
+            <a:prstDash val="solid"/>
+          </a:ln>
+        </p:spPr>
+      </p:sp>
+      <p:sp>
+        <p:nvSpPr>
+          <p:cNvPr id="11" name="Text 9"/>
+          <p:cNvSpPr/>
+          <p:nvPr/>
+        </p:nvSpPr>
+        <p:spPr>
+          <a:xfrm>
+            <a:off x="7799832" y="1472184"/>
+            <a:ext cx="3145536" cy="256032"/>
+          </a:xfrm>
+          <a:prstGeom prst="rect">
+            <a:avLst/>
+          </a:prstGeom>
+          <a:noFill/>
+          <a:ln/>
+        </p:spPr>
+        <p:txBody>
+          <a:bodyPr wrap="square" lIns="0" tIns="0" rIns="0" bIns="0" rtlCol="0" anchor="ctr"/>
+          <a:lstStyle/>
+          <a:p>
+            <a:pPr indent="0" marL="0">
+              <a:buNone/>
+            </a:pPr>
+            <a:r>
+              <a:rPr lang="en-US" sz="1300" b="1" dirty="0">
+                <a:solidFill>
+                  <a:srgbClr val="0068B7"/>
+                </a:solidFill>
+                <a:latin typeface="Aptos" pitchFamily="34" charset="0"/>
+                <a:ea typeface="Aptos" pitchFamily="34" charset="-122"/>
+                <a:cs typeface="Aptos" pitchFamily="34" charset="-120"/>
+              </a:rPr>
+              <a:t>Implementation cue</a:t>
+            </a:r>
+            <a:endParaRPr lang="en-US" sz="1300" dirty="0"/>
+          </a:p>
+        </p:txBody>
+      </p:sp>
+      <p:sp>
+        <p:nvSpPr>
+          <p:cNvPr id="12" name="Text 10"/>
+          <p:cNvSpPr/>
+          <p:nvPr/>
+        </p:nvSpPr>
+        <p:spPr>
+          <a:xfrm>
+            <a:off x="7799832" y="1828800"/>
+            <a:ext cx="3145536" cy="685800"/>
+          </a:xfrm>
+          <a:prstGeom prst="rect">
+            <a:avLst/>
+          </a:prstGeom>
+          <a:noFill/>
+          <a:ln/>
+        </p:spPr>
+        <p:txBody>
+          <a:bodyPr wrap="square" lIns="0" tIns="0" rIns="0" bIns="0" rtlCol="0" anchor="t">
+            <a:normAutofit/>
+          </a:bodyPr>
+          <a:lstStyle/>
+          <a:p>
+            <a:pPr indent="0" marL="0">
+              <a:buNone/>
+            </a:pPr>
+            <a:r>
+              <a:rPr lang="en-US" sz="1550" dirty="0">
+                <a:solidFill>
+                  <a:srgbClr val="17364A"/>
+                </a:solidFill>
+                <a:latin typeface="Aptos" pitchFamily="34" charset="0"/>
+                <a:ea typeface="Aptos" pitchFamily="34" charset="-122"/>
+                <a:cs typeface="Aptos" pitchFamily="34" charset="-120"/>
+              </a:rPr>
+              <a:t>Generative AI can use FHIR data to draft case or patient summaries, but the output should be grounded.</a:t>
+            </a:r>
+            <a:endParaRPr lang="en-US" sz="1550" dirty="0"/>
+          </a:p>
+        </p:txBody>
+      </p:sp>
+      <p:sp>
+        <p:nvSpPr>
+          <p:cNvPr id="13" name="Shape 11"/>
+          <p:cNvSpPr/>
+          <p:nvPr/>
+        </p:nvSpPr>
+        <p:spPr>
+          <a:xfrm>
+            <a:off x="7635240" y="2788920"/>
+            <a:ext cx="3474720" cy="1536192"/>
+          </a:xfrm>
+          <a:prstGeom prst="roundRect">
+            <a:avLst>
+              <a:gd name="adj" fmla="val 7143"/>
+            </a:avLst>
+          </a:prstGeom>
+          <a:solidFill>
+            <a:srgbClr val="FFFFFF">
+              <a:alpha val="88000"/>
+            </a:srgbClr>
+          </a:solidFill>
+          <a:ln w="12700">
+            <a:solidFill>
+              <a:srgbClr val="D6E8F2"/>
+            </a:solidFill>
+            <a:prstDash val="solid"/>
+          </a:ln>
+        </p:spPr>
+      </p:sp>
+      <p:sp>
+        <p:nvSpPr>
+          <p:cNvPr id="14" name="Shape 12"/>
+          <p:cNvSpPr/>
+          <p:nvPr/>
+        </p:nvSpPr>
+        <p:spPr>
+          <a:xfrm>
+            <a:off x="7927848" y="3319272"/>
+            <a:ext cx="792480" cy="749808"/>
+          </a:xfrm>
+          <a:prstGeom prst="roundRect">
+            <a:avLst>
+              <a:gd name="adj" fmla="val 14634"/>
+            </a:avLst>
           </a:prstGeom>
           <a:solidFill>
             <a:srgbClr val="0068B7"/>
@@ -6379,53 +7180,14 @@
       </p:sp>
       <p:sp>
         <p:nvSpPr>
-          <p:cNvPr id="9" name="Text 7"/>
-          <p:cNvSpPr/>
-          <p:nvPr/>
-        </p:nvSpPr>
-        <p:spPr>
-          <a:xfrm>
-            <a:off x="640080" y="731520"/>
-            <a:ext cx="420624" cy="164592"/>
-          </a:xfrm>
-          <a:prstGeom prst="rect">
-            <a:avLst/>
-          </a:prstGeom>
-          <a:noFill/>
-          <a:ln/>
-        </p:spPr>
-        <p:txBody>
-          <a:bodyPr wrap="square" lIns="0" tIns="0" rIns="0" bIns="0" rtlCol="0" anchor="ctr"/>
-          <a:lstStyle/>
-          <a:p>
-            <a:pPr algn="ctr" indent="0" marL="0">
-              <a:buNone/>
-            </a:pPr>
-            <a:r>
-              <a:rPr lang="en-US" sz="1100" b="1" dirty="0">
-                <a:solidFill>
-                  <a:srgbClr val="FFFFFF"/>
-                </a:solidFill>
-                <a:latin typeface="Aptos" pitchFamily="34" charset="0"/>
-                <a:ea typeface="Aptos" pitchFamily="34" charset="-122"/>
-                <a:cs typeface="Aptos" pitchFamily="34" charset="-120"/>
-              </a:rPr>
-              <a:t>9</a:t>
-            </a:r>
-            <a:endParaRPr lang="en-US" sz="1100" dirty="0"/>
-          </a:p>
-        </p:txBody>
-      </p:sp>
-      <p:sp>
-        <p:nvSpPr>
-          <p:cNvPr id="10" name="Text 8"/>
-          <p:cNvSpPr/>
-          <p:nvPr/>
-        </p:nvSpPr>
-        <p:spPr>
-          <a:xfrm>
-            <a:off x="640080" y="621792"/>
-            <a:ext cx="10881360" cy="713232"/>
+          <p:cNvPr id="15" name="Text 13"/>
+          <p:cNvSpPr/>
+          <p:nvPr/>
+        </p:nvSpPr>
+        <p:spPr>
+          <a:xfrm>
+            <a:off x="8001000" y="3511296"/>
+            <a:ext cx="646176" cy="310896"/>
           </a:xfrm>
           <a:prstGeom prst="rect">
             <a:avLst/>
@@ -6439,112 +7201,46 @@
           </a:bodyPr>
           <a:lstStyle/>
           <a:p>
-            <a:pPr indent="0" marL="0">
-              <a:buNone/>
-            </a:pPr>
-            <a:r>
-              <a:rPr lang="en-US" sz="3400" b="1" dirty="0">
-                <a:solidFill>
-                  <a:srgbClr val="003A63"/>
-                </a:solidFill>
-                <a:latin typeface="Aptos Display" pitchFamily="34" charset="0"/>
-                <a:ea typeface="Aptos Display" pitchFamily="34" charset="-122"/>
-                <a:cs typeface="Aptos Display" pitchFamily="34" charset="-120"/>
-              </a:rPr>
-              <a:t>Application to AI-Supported Workflows</a:t>
-            </a:r>
-            <a:endParaRPr lang="en-US" sz="3400" dirty="0"/>
-          </a:p>
-        </p:txBody>
-      </p:sp>
-      <p:sp>
-        <p:nvSpPr>
-          <p:cNvPr id="11" name="Text 9"/>
-          <p:cNvSpPr/>
-          <p:nvPr/>
-        </p:nvSpPr>
-        <p:spPr>
-          <a:xfrm>
-            <a:off x="868680" y="1508760"/>
-            <a:ext cx="6537960" cy="4160520"/>
-          </a:xfrm>
-          <a:prstGeom prst="rect">
-            <a:avLst/>
-          </a:prstGeom>
-          <a:noFill/>
-          <a:ln/>
-        </p:spPr>
-        <p:txBody>
-          <a:bodyPr wrap="square" lIns="635" tIns="635" rIns="635" bIns="635" rtlCol="0" anchor="t">
-            <a:normAutofit/>
-          </a:bodyPr>
-          <a:lstStyle/>
-          <a:p>
-            <a:r>
-              <a:rPr lang="en-US" sz="2100" dirty="0">
-                <a:solidFill>
-                  <a:srgbClr val="17364A"/>
-                </a:solidFill>
-                <a:latin typeface="Aptos" pitchFamily="34" charset="0"/>
-                <a:ea typeface="Aptos" pitchFamily="34" charset="-122"/>
-                <a:cs typeface="Aptos" pitchFamily="34" charset="-120"/>
-              </a:rPr>
-              <a:t>Generative AI can use FHIR data to draft case or patient summaries, but the output should be grounded.</a:t>
-            </a:r>
-            <a:endParaRPr lang="en-US" sz="2100" dirty="0"/>
-          </a:p>
-          <a:p>
-            <a:r>
-              <a:rPr lang="en-US" sz="2100" dirty="0">
-                <a:solidFill>
-                  <a:srgbClr val="17364A"/>
-                </a:solidFill>
-                <a:latin typeface="Aptos" pitchFamily="34" charset="0"/>
-                <a:ea typeface="Aptos" pitchFamily="34" charset="-122"/>
-                <a:cs typeface="Aptos" pitchFamily="34" charset="-120"/>
-              </a:rPr>
-              <a:t>Predictive analytics may use features derived from FHIR resources, which requires stable extraction and.</a:t>
-            </a:r>
-            <a:endParaRPr lang="en-US" sz="2100" dirty="0"/>
-          </a:p>
-          <a:p>
-            <a:r>
-              <a:rPr lang="en-US" sz="2100" dirty="0">
-                <a:solidFill>
-                  <a:srgbClr val="17364A"/>
-                </a:solidFill>
-                <a:latin typeface="Aptos" pitchFamily="34" charset="0"/>
-                <a:ea typeface="Aptos" pitchFamily="34" charset="-122"/>
-                <a:cs typeface="Aptos" pitchFamily="34" charset="-120"/>
-              </a:rPr>
-              <a:t>RAG may combine FHIR-derived facts with agency guidance.</a:t>
-            </a:r>
-            <a:endParaRPr lang="en-US" sz="2100" dirty="0"/>
-          </a:p>
-        </p:txBody>
-      </p:sp>
-      <p:sp>
-        <p:nvSpPr>
-          <p:cNvPr id="12" name="Shape 10"/>
-          <p:cNvSpPr/>
-          <p:nvPr/>
-        </p:nvSpPr>
-        <p:spPr>
-          <a:xfrm>
-            <a:off x="7909560" y="1417320"/>
-            <a:ext cx="3154680" cy="1828800"/>
+            <a:pPr algn="ctr" indent="0" marL="0">
+              <a:buNone/>
+            </a:pPr>
+            <a:r>
+              <a:rPr lang="en-US" sz="1500" b="1" dirty="0">
+                <a:solidFill>
+                  <a:srgbClr val="FFFFFF"/>
+                </a:solidFill>
+                <a:latin typeface="Aptos" pitchFamily="34" charset="0"/>
+                <a:ea typeface="Aptos" pitchFamily="34" charset="-122"/>
+                <a:cs typeface="Aptos" pitchFamily="34" charset="-120"/>
+              </a:rPr>
+              <a:t>Plan</a:t>
+            </a:r>
+            <a:endParaRPr lang="en-US" sz="1500" dirty="0"/>
+          </a:p>
+        </p:txBody>
+      </p:sp>
+      <p:sp>
+        <p:nvSpPr>
+          <p:cNvPr id="16" name="Shape 14"/>
+          <p:cNvSpPr/>
+          <p:nvPr/>
+        </p:nvSpPr>
+        <p:spPr>
+          <a:xfrm>
+            <a:off x="8976360" y="3319272"/>
+            <a:ext cx="792480" cy="749808"/>
           </a:xfrm>
           <a:prstGeom prst="roundRect">
             <a:avLst>
-              <a:gd name="adj" fmla="val 6000"/>
+              <a:gd name="adj" fmla="val 14634"/>
             </a:avLst>
           </a:prstGeom>
           <a:solidFill>
-            <a:srgbClr val="EEF8ED"/>
+            <a:srgbClr val="2F8A28"/>
           </a:solidFill>
           <a:ln w="12700">
             <a:solidFill>
-              <a:srgbClr val="B9D7E6"/>
+              <a:srgbClr val="2F8A28"/>
             </a:solidFill>
             <a:prstDash val="solid"/>
           </a:ln>
@@ -6552,98 +7248,189 @@
       </p:sp>
       <p:sp>
         <p:nvSpPr>
-          <p:cNvPr id="13" name="Text 11"/>
-          <p:cNvSpPr/>
-          <p:nvPr/>
-        </p:nvSpPr>
-        <p:spPr>
-          <a:xfrm>
-            <a:off x="8074152" y="1563624"/>
-            <a:ext cx="2825496" cy="256032"/>
-          </a:xfrm>
-          <a:prstGeom prst="rect">
-            <a:avLst/>
-          </a:prstGeom>
-          <a:noFill/>
-          <a:ln/>
-        </p:spPr>
-        <p:txBody>
-          <a:bodyPr wrap="square" lIns="0" tIns="0" rIns="0" bIns="0" rtlCol="0" anchor="ctr"/>
-          <a:lstStyle/>
-          <a:p>
-            <a:pPr indent="0" marL="0">
-              <a:buNone/>
-            </a:pPr>
-            <a:r>
-              <a:rPr lang="en-US" sz="1300" b="1" dirty="0">
-                <a:solidFill>
-                  <a:srgbClr val="0068B7"/>
-                </a:solidFill>
-                <a:latin typeface="Aptos" pitchFamily="34" charset="0"/>
-                <a:ea typeface="Aptos" pitchFamily="34" charset="-122"/>
-                <a:cs typeface="Aptos" pitchFamily="34" charset="-120"/>
-              </a:rPr>
-              <a:t>Key idea</a:t>
-            </a:r>
-            <a:endParaRPr lang="en-US" sz="1300" dirty="0"/>
-          </a:p>
-        </p:txBody>
-      </p:sp>
-      <p:sp>
-        <p:nvSpPr>
-          <p:cNvPr id="14" name="Text 12"/>
-          <p:cNvSpPr/>
-          <p:nvPr/>
-        </p:nvSpPr>
-        <p:spPr>
-          <a:xfrm>
-            <a:off x="8074152" y="1920240"/>
-            <a:ext cx="2825496" cy="1188720"/>
-          </a:xfrm>
-          <a:prstGeom prst="rect">
-            <a:avLst/>
-          </a:prstGeom>
-          <a:noFill/>
-          <a:ln/>
-        </p:spPr>
-        <p:txBody>
-          <a:bodyPr wrap="square" lIns="0" tIns="0" rIns="0" bIns="0" rtlCol="0" anchor="t">
+          <p:cNvPr id="17" name="Text 15"/>
+          <p:cNvSpPr/>
+          <p:nvPr/>
+        </p:nvSpPr>
+        <p:spPr>
+          <a:xfrm>
+            <a:off x="9049512" y="3511296"/>
+            <a:ext cx="646176" cy="310896"/>
+          </a:xfrm>
+          <a:prstGeom prst="rect">
+            <a:avLst/>
+          </a:prstGeom>
+          <a:noFill/>
+          <a:ln/>
+        </p:spPr>
+        <p:txBody>
+          <a:bodyPr wrap="square" lIns="0" tIns="0" rIns="0" bIns="0" rtlCol="0" anchor="ctr">
             <a:normAutofit/>
           </a:bodyPr>
           <a:lstStyle/>
           <a:p>
-            <a:pPr indent="0" marL="0">
-              <a:buNone/>
-            </a:pPr>
-            <a:r>
-              <a:rPr lang="en-US" sz="1550" dirty="0">
-                <a:solidFill>
-                  <a:srgbClr val="17364A"/>
-                </a:solidFill>
-                <a:latin typeface="Aptos" pitchFamily="34" charset="0"/>
-                <a:ea typeface="Aptos" pitchFamily="34" charset="-122"/>
-                <a:cs typeface="Aptos" pitchFamily="34" charset="-120"/>
-              </a:rPr>
-              <a:t>Generative AI can use FHIR data to draft case or patient summaries, but the output should be grounded.</a:t>
-            </a:r>
-            <a:endParaRPr lang="en-US" sz="1550" dirty="0"/>
-          </a:p>
-        </p:txBody>
-      </p:sp>
-      <p:sp>
-        <p:nvSpPr>
-          <p:cNvPr id="15" name="Shape 13"/>
-          <p:cNvSpPr/>
-          <p:nvPr/>
-        </p:nvSpPr>
-        <p:spPr>
-          <a:xfrm>
-            <a:off x="7909560" y="3520440"/>
-            <a:ext cx="3154680" cy="1737360"/>
+            <a:pPr algn="ctr" indent="0" marL="0">
+              <a:buNone/>
+            </a:pPr>
+            <a:r>
+              <a:rPr lang="en-US" sz="1500" b="1" dirty="0">
+                <a:solidFill>
+                  <a:srgbClr val="FFFFFF"/>
+                </a:solidFill>
+                <a:latin typeface="Aptos" pitchFamily="34" charset="0"/>
+                <a:ea typeface="Aptos" pitchFamily="34" charset="-122"/>
+                <a:cs typeface="Aptos" pitchFamily="34" charset="-120"/>
+              </a:rPr>
+              <a:t>Do</a:t>
+            </a:r>
+            <a:endParaRPr lang="en-US" sz="1500" dirty="0"/>
+          </a:p>
+        </p:txBody>
+      </p:sp>
+      <p:sp>
+        <p:nvSpPr>
+          <p:cNvPr id="18" name="Shape 16"/>
+          <p:cNvSpPr/>
+          <p:nvPr/>
+        </p:nvSpPr>
+        <p:spPr>
+          <a:xfrm>
+            <a:off x="10024872" y="3319272"/>
+            <a:ext cx="792480" cy="749808"/>
           </a:xfrm>
           <a:prstGeom prst="roundRect">
             <a:avLst>
-              <a:gd name="adj" fmla="val 6316"/>
+              <a:gd name="adj" fmla="val 14634"/>
+            </a:avLst>
+          </a:prstGeom>
+          <a:solidFill>
+            <a:srgbClr val="D69A2D"/>
+          </a:solidFill>
+          <a:ln w="12700">
+            <a:solidFill>
+              <a:srgbClr val="D69A2D"/>
+            </a:solidFill>
+            <a:prstDash val="solid"/>
+          </a:ln>
+        </p:spPr>
+      </p:sp>
+      <p:sp>
+        <p:nvSpPr>
+          <p:cNvPr id="19" name="Text 17"/>
+          <p:cNvSpPr/>
+          <p:nvPr/>
+        </p:nvSpPr>
+        <p:spPr>
+          <a:xfrm>
+            <a:off x="10098024" y="3511296"/>
+            <a:ext cx="646176" cy="310896"/>
+          </a:xfrm>
+          <a:prstGeom prst="rect">
+            <a:avLst/>
+          </a:prstGeom>
+          <a:noFill/>
+          <a:ln/>
+        </p:spPr>
+        <p:txBody>
+          <a:bodyPr wrap="square" lIns="0" tIns="0" rIns="0" bIns="0" rtlCol="0" anchor="ctr">
+            <a:normAutofit/>
+          </a:bodyPr>
+          <a:lstStyle/>
+          <a:p>
+            <a:pPr algn="ctr" indent="0" marL="0">
+              <a:buNone/>
+            </a:pPr>
+            <a:r>
+              <a:rPr lang="en-US" sz="1500" b="1" dirty="0">
+                <a:solidFill>
+                  <a:srgbClr val="FFFFFF"/>
+                </a:solidFill>
+                <a:latin typeface="Aptos" pitchFamily="34" charset="0"/>
+                <a:ea typeface="Aptos" pitchFamily="34" charset="-122"/>
+                <a:cs typeface="Aptos" pitchFamily="34" charset="-120"/>
+              </a:rPr>
+              <a:t>Review</a:t>
+            </a:r>
+            <a:endParaRPr lang="en-US" sz="1500" dirty="0"/>
+          </a:p>
+        </p:txBody>
+      </p:sp>
+      <p:sp>
+        <p:nvSpPr>
+          <p:cNvPr id="20" name="Shape 18"/>
+          <p:cNvSpPr/>
+          <p:nvPr/>
+        </p:nvSpPr>
+        <p:spPr>
+          <a:xfrm>
+            <a:off x="8293608" y="4389120"/>
+            <a:ext cx="2157984" cy="0"/>
+          </a:xfrm>
+          <a:prstGeom prst="line">
+            <a:avLst/>
+          </a:prstGeom>
+          <a:noFill/>
+          <a:ln w="25400">
+            <a:solidFill>
+              <a:srgbClr val="8ABBD8"/>
+            </a:solidFill>
+            <a:prstDash val="solid"/>
+          </a:ln>
+        </p:spPr>
+      </p:sp>
+      <p:sp>
+        <p:nvSpPr>
+          <p:cNvPr id="21" name="Text 19"/>
+          <p:cNvSpPr/>
+          <p:nvPr/>
+        </p:nvSpPr>
+        <p:spPr>
+          <a:xfrm>
+            <a:off x="7909560" y="3977640"/>
+            <a:ext cx="2926080" cy="182880"/>
+          </a:xfrm>
+          <a:prstGeom prst="rect">
+            <a:avLst/>
+          </a:prstGeom>
+          <a:noFill/>
+          <a:ln/>
+        </p:spPr>
+        <p:txBody>
+          <a:bodyPr wrap="square" lIns="0" tIns="0" rIns="0" bIns="0" rtlCol="0" anchor="ctr"/>
+          <a:lstStyle/>
+          <a:p>
+            <a:pPr algn="ctr" indent="0" marL="0">
+              <a:buNone/>
+            </a:pPr>
+            <a:r>
+              <a:rPr lang="en-US" sz="1000" dirty="0">
+                <a:solidFill>
+                  <a:srgbClr val="003A63"/>
+                </a:solidFill>
+                <a:latin typeface="Aptos" pitchFamily="34" charset="0"/>
+                <a:ea typeface="Aptos" pitchFamily="34" charset="-122"/>
+                <a:cs typeface="Aptos" pitchFamily="34" charset="-120"/>
+              </a:rPr>
+              <a:t>Dependencies visible</a:t>
+            </a:r>
+            <a:endParaRPr lang="en-US" sz="1000" dirty="0"/>
+          </a:p>
+        </p:txBody>
+      </p:sp>
+      <p:sp>
+        <p:nvSpPr>
+          <p:cNvPr id="22" name="Shape 20"/>
+          <p:cNvSpPr/>
+          <p:nvPr/>
+        </p:nvSpPr>
+        <p:spPr>
+          <a:xfrm>
+            <a:off x="7635240" y="4498848"/>
+            <a:ext cx="3474720" cy="1143000"/>
+          </a:xfrm>
+          <a:prstGeom prst="roundRect">
+            <a:avLst>
+              <a:gd name="adj" fmla="val 9600"/>
             </a:avLst>
           </a:prstGeom>
           <a:solidFill>
@@ -6659,14 +7446,14 @@
       </p:sp>
       <p:sp>
         <p:nvSpPr>
-          <p:cNvPr id="16" name="Text 14"/>
-          <p:cNvSpPr/>
-          <p:nvPr/>
-        </p:nvSpPr>
-        <p:spPr>
-          <a:xfrm>
-            <a:off x="8074152" y="3666744"/>
-            <a:ext cx="2825496" cy="256032"/>
+          <p:cNvPr id="23" name="Text 21"/>
+          <p:cNvSpPr/>
+          <p:nvPr/>
+        </p:nvSpPr>
+        <p:spPr>
+          <a:xfrm>
+            <a:off x="7799832" y="4645152"/>
+            <a:ext cx="3145536" cy="256032"/>
           </a:xfrm>
           <a:prstGeom prst="rect">
             <a:avLst/>
@@ -6690,7 +7477,7 @@
                 <a:ea typeface="Aptos" pitchFamily="34" charset="-122"/>
                 <a:cs typeface="Aptos" pitchFamily="34" charset="-120"/>
               </a:rPr>
-              <a:t>Use this for</a:t>
+              <a:t>Next action</a:t>
             </a:r>
             <a:endParaRPr lang="en-US" sz="1300" dirty="0"/>
           </a:p>
@@ -6698,14 +7485,14 @@
       </p:sp>
       <p:sp>
         <p:nvSpPr>
-          <p:cNvPr id="17" name="Text 15"/>
-          <p:cNvSpPr/>
-          <p:nvPr/>
-        </p:nvSpPr>
-        <p:spPr>
-          <a:xfrm>
-            <a:off x="8074152" y="4023360"/>
-            <a:ext cx="2825496" cy="1097280"/>
+          <p:cNvPr id="24" name="Text 22"/>
+          <p:cNvSpPr/>
+          <p:nvPr/>
+        </p:nvSpPr>
+        <p:spPr>
+          <a:xfrm>
+            <a:off x="7799832" y="5001768"/>
+            <a:ext cx="3145536" cy="502920"/>
           </a:xfrm>
           <a:prstGeom prst="rect">
             <a:avLst/>
@@ -6731,7 +7518,7 @@
                 <a:ea typeface="Aptos" pitchFamily="34" charset="-122"/>
                 <a:cs typeface="Aptos" pitchFamily="34" charset="-120"/>
               </a:rPr>
-              <a:t>Connect the concept to public health decisions, safeguards, documentation, or implementation work.</a:t>
+              <a:t>Use the concept to clarify workflow changes, dependencies, staffing, procurement requirements, training needs, and implementation checkpoints.</a:t>
             </a:r>
             <a:endParaRPr lang="en-US" sz="1550" dirty="0"/>
           </a:p>
@@ -6905,8 +7692,8 @@
         </p:nvSpPr>
         <p:spPr>
           <a:xfrm>
-            <a:off x="9966960" y="6537960"/>
-            <a:ext cx="1645920" cy="201168"/>
+            <a:off x="9646920" y="6537960"/>
+            <a:ext cx="1965960" cy="201168"/>
           </a:xfrm>
           <a:prstGeom prst="rect">
             <a:avLst/>
@@ -6930,7 +7717,7 @@
                 <a:ea typeface="Aptos" pitchFamily="34" charset="-122"/>
                 <a:cs typeface="Aptos" pitchFamily="34" charset="-120"/>
               </a:rPr>
-              <a:t>Â© Paula Soper</a:t>
+              <a:t>Copyright Paula Soper</a:t>
             </a:r>
             <a:endParaRPr lang="en-US" sz="800" dirty="0"/>
           </a:p>
@@ -6977,77 +7764,13 @@
       </p:sp>
       <p:sp>
         <p:nvSpPr>
-          <p:cNvPr id="8" name="Shape 6"/>
+          <p:cNvPr id="8" name="Text 6"/>
           <p:cNvSpPr/>
           <p:nvPr/>
         </p:nvSpPr>
         <p:spPr>
           <a:xfrm>
             <a:off x="640080" y="658368"/>
-            <a:ext cx="420624" cy="420624"/>
-          </a:xfrm>
-          <a:prstGeom prst="ellipse">
-            <a:avLst/>
-          </a:prstGeom>
-          <a:solidFill>
-            <a:srgbClr val="0068B7"/>
-          </a:solidFill>
-          <a:ln w="12700">
-            <a:solidFill>
-              <a:srgbClr val="0068B7"/>
-            </a:solidFill>
-            <a:prstDash val="solid"/>
-          </a:ln>
-        </p:spPr>
-      </p:sp>
-      <p:sp>
-        <p:nvSpPr>
-          <p:cNvPr id="9" name="Text 7"/>
-          <p:cNvSpPr/>
-          <p:nvPr/>
-        </p:nvSpPr>
-        <p:spPr>
-          <a:xfrm>
-            <a:off x="640080" y="731520"/>
-            <a:ext cx="420624" cy="164592"/>
-          </a:xfrm>
-          <a:prstGeom prst="rect">
-            <a:avLst/>
-          </a:prstGeom>
-          <a:noFill/>
-          <a:ln/>
-        </p:spPr>
-        <p:txBody>
-          <a:bodyPr wrap="square" lIns="0" tIns="0" rIns="0" bIns="0" rtlCol="0" anchor="ctr"/>
-          <a:lstStyle/>
-          <a:p>
-            <a:pPr algn="ctr" indent="0" marL="0">
-              <a:buNone/>
-            </a:pPr>
-            <a:r>
-              <a:rPr lang="en-US" sz="1100" b="1" dirty="0">
-                <a:solidFill>
-                  <a:srgbClr val="FFFFFF"/>
-                </a:solidFill>
-                <a:latin typeface="Aptos" pitchFamily="34" charset="0"/>
-                <a:ea typeface="Aptos" pitchFamily="34" charset="-122"/>
-                <a:cs typeface="Aptos" pitchFamily="34" charset="-120"/>
-              </a:rPr>
-              <a:t>10</a:t>
-            </a:r>
-            <a:endParaRPr lang="en-US" sz="1100" dirty="0"/>
-          </a:p>
-        </p:txBody>
-      </p:sp>
-      <p:sp>
-        <p:nvSpPr>
-          <p:cNvPr id="10" name="Text 8"/>
-          <p:cNvSpPr/>
-          <p:nvPr/>
-        </p:nvSpPr>
-        <p:spPr>
-          <a:xfrm>
-            <a:off x="640080" y="621792"/>
             <a:ext cx="10881360" cy="713232"/>
           </a:xfrm>
           <a:prstGeom prst="rect">
@@ -7082,14 +7805,14 @@
       </p:sp>
       <p:sp>
         <p:nvSpPr>
-          <p:cNvPr id="11" name="Text 9"/>
+          <p:cNvPr id="9" name="Text 7"/>
           <p:cNvSpPr/>
           <p:nvPr/>
         </p:nvSpPr>
         <p:spPr>
           <a:xfrm>
             <a:off x="868680" y="1508760"/>
-            <a:ext cx="6537960" cy="4160520"/>
+            <a:ext cx="6309360" cy="4160520"/>
           </a:xfrm>
           <a:prstGeom prst="rect">
             <a:avLst/>
@@ -7148,18 +7871,18 @@
       </p:sp>
       <p:sp>
         <p:nvSpPr>
-          <p:cNvPr id="12" name="Shape 10"/>
-          <p:cNvSpPr/>
-          <p:nvPr/>
-        </p:nvSpPr>
-        <p:spPr>
-          <a:xfrm>
-            <a:off x="7909560" y="1417320"/>
-            <a:ext cx="3154680" cy="1828800"/>
+          <p:cNvPr id="10" name="Shape 8"/>
+          <p:cNvSpPr/>
+          <p:nvPr/>
+        </p:nvSpPr>
+        <p:spPr>
+          <a:xfrm>
+            <a:off x="7635240" y="1325880"/>
+            <a:ext cx="3474720" cy="1325880"/>
           </a:xfrm>
           <a:prstGeom prst="roundRect">
             <a:avLst>
-              <a:gd name="adj" fmla="val 6000"/>
+              <a:gd name="adj" fmla="val 8276"/>
             </a:avLst>
           </a:prstGeom>
           <a:solidFill>
@@ -7175,14 +7898,14 @@
       </p:sp>
       <p:sp>
         <p:nvSpPr>
-          <p:cNvPr id="13" name="Text 11"/>
-          <p:cNvSpPr/>
-          <p:nvPr/>
-        </p:nvSpPr>
-        <p:spPr>
-          <a:xfrm>
-            <a:off x="8074152" y="1563624"/>
-            <a:ext cx="2825496" cy="256032"/>
+          <p:cNvPr id="11" name="Text 9"/>
+          <p:cNvSpPr/>
+          <p:nvPr/>
+        </p:nvSpPr>
+        <p:spPr>
+          <a:xfrm>
+            <a:off x="7799832" y="1472184"/>
+            <a:ext cx="3145536" cy="256032"/>
           </a:xfrm>
           <a:prstGeom prst="rect">
             <a:avLst/>
@@ -7206,7 +7929,7 @@
                 <a:ea typeface="Aptos" pitchFamily="34" charset="-122"/>
                 <a:cs typeface="Aptos" pitchFamily="34" charset="-120"/>
               </a:rPr>
-              <a:t>Key idea</a:t>
+              <a:t>Core concept</a:t>
             </a:r>
             <a:endParaRPr lang="en-US" sz="1300" dirty="0"/>
           </a:p>
@@ -7214,14 +7937,14 @@
       </p:sp>
       <p:sp>
         <p:nvSpPr>
-          <p:cNvPr id="14" name="Text 12"/>
-          <p:cNvSpPr/>
-          <p:nvPr/>
-        </p:nvSpPr>
-        <p:spPr>
-          <a:xfrm>
-            <a:off x="8074152" y="1920240"/>
-            <a:ext cx="2825496" cy="1188720"/>
+          <p:cNvPr id="12" name="Text 10"/>
+          <p:cNvSpPr/>
+          <p:nvPr/>
+        </p:nvSpPr>
+        <p:spPr>
+          <a:xfrm>
+            <a:off x="7799832" y="1828800"/>
+            <a:ext cx="3145536" cy="685800"/>
           </a:xfrm>
           <a:prstGeom prst="rect">
             <a:avLst/>
@@ -7255,18 +7978,159 @@
       </p:sp>
       <p:sp>
         <p:nvSpPr>
-          <p:cNvPr id="15" name="Shape 13"/>
-          <p:cNvSpPr/>
-          <p:nvPr/>
-        </p:nvSpPr>
-        <p:spPr>
-          <a:xfrm>
-            <a:off x="7909560" y="3520440"/>
-            <a:ext cx="3154680" cy="1737360"/>
+          <p:cNvPr id="13" name="Shape 11"/>
+          <p:cNvSpPr/>
+          <p:nvPr/>
+        </p:nvSpPr>
+        <p:spPr>
+          <a:xfrm>
+            <a:off x="7635240" y="2788920"/>
+            <a:ext cx="3474720" cy="1536192"/>
           </a:xfrm>
           <a:prstGeom prst="roundRect">
             <a:avLst>
-              <a:gd name="adj" fmla="val 6316"/>
+              <a:gd name="adj" fmla="val 7143"/>
+            </a:avLst>
+          </a:prstGeom>
+          <a:solidFill>
+            <a:srgbClr val="FFFFFF">
+              <a:alpha val="88000"/>
+            </a:srgbClr>
+          </a:solidFill>
+          <a:ln w="12700">
+            <a:solidFill>
+              <a:srgbClr val="D6E8F2"/>
+            </a:solidFill>
+            <a:prstDash val="solid"/>
+          </a:ln>
+        </p:spPr>
+      </p:sp>
+      <p:sp>
+        <p:nvSpPr>
+          <p:cNvPr id="14" name="Shape 12"/>
+          <p:cNvSpPr/>
+          <p:nvPr/>
+        </p:nvSpPr>
+        <p:spPr>
+          <a:xfrm>
+            <a:off x="8074152" y="3291840"/>
+            <a:ext cx="2596896" cy="749808"/>
+          </a:xfrm>
+          <a:prstGeom prst="rect">
+            <a:avLst/>
+          </a:prstGeom>
+          <a:solidFill>
+            <a:srgbClr val="EAF6F8"/>
+          </a:solidFill>
+          <a:ln w="12700">
+            <a:solidFill>
+              <a:srgbClr val="8ABBD8"/>
+            </a:solidFill>
+            <a:prstDash val="solid"/>
+          </a:ln>
+        </p:spPr>
+      </p:sp>
+      <p:sp>
+        <p:nvSpPr>
+          <p:cNvPr id="15" name="Shape 13"/>
+          <p:cNvSpPr/>
+          <p:nvPr/>
+        </p:nvSpPr>
+        <p:spPr>
+          <a:xfrm>
+            <a:off x="8202168" y="3721608"/>
+            <a:ext cx="2340864" cy="0"/>
+          </a:xfrm>
+          <a:prstGeom prst="line">
+            <a:avLst/>
+          </a:prstGeom>
+          <a:noFill/>
+          <a:ln w="19050">
+            <a:solidFill>
+              <a:srgbClr val="0068B7"/>
+            </a:solidFill>
+            <a:prstDash val="solid"/>
+          </a:ln>
+        </p:spPr>
+      </p:sp>
+      <p:sp>
+        <p:nvSpPr>
+          <p:cNvPr id="16" name="Shape 14"/>
+          <p:cNvSpPr/>
+          <p:nvPr/>
+        </p:nvSpPr>
+        <p:spPr>
+          <a:xfrm>
+            <a:off x="9198864" y="4206240"/>
+            <a:ext cx="347472" cy="347472"/>
+          </a:xfrm>
+          <a:prstGeom prst="ellipse">
+            <a:avLst/>
+          </a:prstGeom>
+          <a:solidFill>
+            <a:srgbClr val="2F8A28"/>
+          </a:solidFill>
+          <a:ln w="12700">
+            <a:solidFill>
+              <a:srgbClr val="2F8A28"/>
+            </a:solidFill>
+            <a:prstDash val="solid"/>
+          </a:ln>
+        </p:spPr>
+      </p:sp>
+      <p:sp>
+        <p:nvSpPr>
+          <p:cNvPr id="17" name="Text 15"/>
+          <p:cNvSpPr/>
+          <p:nvPr/>
+        </p:nvSpPr>
+        <p:spPr>
+          <a:xfrm>
+            <a:off x="7909560" y="3977640"/>
+            <a:ext cx="2926080" cy="182880"/>
+          </a:xfrm>
+          <a:prstGeom prst="rect">
+            <a:avLst/>
+          </a:prstGeom>
+          <a:noFill/>
+          <a:ln/>
+        </p:spPr>
+        <p:txBody>
+          <a:bodyPr wrap="square" lIns="0" tIns="0" rIns="0" bIns="0" rtlCol="0" anchor="ctr"/>
+          <a:lstStyle/>
+          <a:p>
+            <a:pPr algn="ctr" indent="0" marL="0">
+              <a:buNone/>
+            </a:pPr>
+            <a:r>
+              <a:rPr lang="en-US" sz="1000" dirty="0">
+                <a:solidFill>
+                  <a:srgbClr val="003A63"/>
+                </a:solidFill>
+                <a:latin typeface="Aptos" pitchFamily="34" charset="0"/>
+                <a:ea typeface="Aptos" pitchFamily="34" charset="-122"/>
+                <a:cs typeface="Aptos" pitchFamily="34" charset="-120"/>
+              </a:rPr>
+              <a:t>Concept to action</a:t>
+            </a:r>
+            <a:endParaRPr lang="en-US" sz="1000" dirty="0"/>
+          </a:p>
+        </p:txBody>
+      </p:sp>
+      <p:sp>
+        <p:nvSpPr>
+          <p:cNvPr id="18" name="Shape 16"/>
+          <p:cNvSpPr/>
+          <p:nvPr/>
+        </p:nvSpPr>
+        <p:spPr>
+          <a:xfrm>
+            <a:off x="7635240" y="4498848"/>
+            <a:ext cx="3474720" cy="1143000"/>
+          </a:xfrm>
+          <a:prstGeom prst="roundRect">
+            <a:avLst>
+              <a:gd name="adj" fmla="val 9600"/>
             </a:avLst>
           </a:prstGeom>
           <a:solidFill>
@@ -7282,14 +8146,14 @@
       </p:sp>
       <p:sp>
         <p:nvSpPr>
-          <p:cNvPr id="16" name="Text 14"/>
-          <p:cNvSpPr/>
-          <p:nvPr/>
-        </p:nvSpPr>
-        <p:spPr>
-          <a:xfrm>
-            <a:off x="8074152" y="3666744"/>
-            <a:ext cx="2825496" cy="256032"/>
+          <p:cNvPr id="19" name="Text 17"/>
+          <p:cNvSpPr/>
+          <p:nvPr/>
+        </p:nvSpPr>
+        <p:spPr>
+          <a:xfrm>
+            <a:off x="7799832" y="4645152"/>
+            <a:ext cx="3145536" cy="256032"/>
           </a:xfrm>
           <a:prstGeom prst="rect">
             <a:avLst/>
@@ -7313,7 +8177,7 @@
                 <a:ea typeface="Aptos" pitchFamily="34" charset="-122"/>
                 <a:cs typeface="Aptos" pitchFamily="34" charset="-120"/>
               </a:rPr>
-              <a:t>Use this for</a:t>
+              <a:t>Apply it</a:t>
             </a:r>
             <a:endParaRPr lang="en-US" sz="1300" dirty="0"/>
           </a:p>
@@ -7321,14 +8185,14 @@
       </p:sp>
       <p:sp>
         <p:nvSpPr>
-          <p:cNvPr id="17" name="Text 15"/>
-          <p:cNvSpPr/>
-          <p:nvPr/>
-        </p:nvSpPr>
-        <p:spPr>
-          <a:xfrm>
-            <a:off x="8074152" y="4023360"/>
-            <a:ext cx="2825496" cy="1097280"/>
+          <p:cNvPr id="20" name="Text 18"/>
+          <p:cNvSpPr/>
+          <p:nvPr/>
+        </p:nvSpPr>
+        <p:spPr>
+          <a:xfrm>
+            <a:off x="7799832" y="5001768"/>
+            <a:ext cx="3145536" cy="502920"/>
           </a:xfrm>
           <a:prstGeom prst="rect">
             <a:avLst/>
@@ -7354,7 +8218,7 @@
                 <a:ea typeface="Aptos" pitchFamily="34" charset="-122"/>
                 <a:cs typeface="Aptos" pitchFamily="34" charset="-120"/>
               </a:rPr>
-              <a:t>Connect the concept to public health decisions, safeguards, documentation, or implementation work.</a:t>
+              <a:t>Connect the concept to public health purpose, responsible use, required safeguards, documentation, and the next action a department should take.</a:t>
             </a:r>
             <a:endParaRPr lang="en-US" sz="1550" dirty="0"/>
           </a:p>
@@ -7528,8 +8392,8 @@
         </p:nvSpPr>
         <p:spPr>
           <a:xfrm>
-            <a:off x="9966960" y="6537960"/>
-            <a:ext cx="1645920" cy="201168"/>
+            <a:off x="9646920" y="6537960"/>
+            <a:ext cx="1965960" cy="201168"/>
           </a:xfrm>
           <a:prstGeom prst="rect">
             <a:avLst/>
@@ -7553,7 +8417,7 @@
                 <a:ea typeface="Aptos" pitchFamily="34" charset="-122"/>
                 <a:cs typeface="Aptos" pitchFamily="34" charset="-120"/>
               </a:rPr>
-              <a:t>Â© Paula Soper</a:t>
+              <a:t>Copyright Paula Soper</a:t>
             </a:r>
             <a:endParaRPr lang="en-US" sz="800" dirty="0"/>
           </a:p>
@@ -7648,7 +8512,7 @@
         <p:spPr>
           <a:xfrm>
             <a:off x="868680" y="1508760"/>
-            <a:ext cx="6537960" cy="4160520"/>
+            <a:ext cx="6309360" cy="4160520"/>
           </a:xfrm>
           <a:prstGeom prst="rect">
             <a:avLst/>
@@ -7699,12 +8563,12 @@
         </p:nvSpPr>
         <p:spPr>
           <a:xfrm>
-            <a:off x="7909560" y="1417320"/>
-            <a:ext cx="3154680" cy="1828800"/>
+            <a:off x="7635240" y="1325880"/>
+            <a:ext cx="3474720" cy="1325880"/>
           </a:xfrm>
           <a:prstGeom prst="roundRect">
             <a:avLst>
-              <a:gd name="adj" fmla="val 6000"/>
+              <a:gd name="adj" fmla="val 8276"/>
             </a:avLst>
           </a:prstGeom>
           <a:solidFill>
@@ -7726,8 +8590,8 @@
         </p:nvSpPr>
         <p:spPr>
           <a:xfrm>
-            <a:off x="8074152" y="1563624"/>
-            <a:ext cx="2825496" cy="256032"/>
+            <a:off x="7799832" y="1472184"/>
+            <a:ext cx="3145536" cy="256032"/>
           </a:xfrm>
           <a:prstGeom prst="rect">
             <a:avLst/>
@@ -7751,7 +8615,7 @@
                 <a:ea typeface="Aptos" pitchFamily="34" charset="-122"/>
                 <a:cs typeface="Aptos" pitchFamily="34" charset="-120"/>
               </a:rPr>
-              <a:t>Key idea</a:t>
+              <a:t>Core concept</a:t>
             </a:r>
             <a:endParaRPr lang="en-US" sz="1300" dirty="0"/>
           </a:p>
@@ -7765,8 +8629,8 @@
         </p:nvSpPr>
         <p:spPr>
           <a:xfrm>
-            <a:off x="8074152" y="1920240"/>
-            <a:ext cx="2825496" cy="1188720"/>
+            <a:off x="7799832" y="1828800"/>
+            <a:ext cx="3145536" cy="685800"/>
           </a:xfrm>
           <a:prstGeom prst="rect">
             <a:avLst/>
@@ -7806,12 +8670,153 @@
         </p:nvSpPr>
         <p:spPr>
           <a:xfrm>
-            <a:off x="7909560" y="3520440"/>
-            <a:ext cx="3154680" cy="1737360"/>
+            <a:off x="7635240" y="2788920"/>
+            <a:ext cx="3474720" cy="1536192"/>
           </a:xfrm>
           <a:prstGeom prst="roundRect">
             <a:avLst>
-              <a:gd name="adj" fmla="val 6316"/>
+              <a:gd name="adj" fmla="val 7143"/>
+            </a:avLst>
+          </a:prstGeom>
+          <a:solidFill>
+            <a:srgbClr val="FFFFFF">
+              <a:alpha val="88000"/>
+            </a:srgbClr>
+          </a:solidFill>
+          <a:ln w="12700">
+            <a:solidFill>
+              <a:srgbClr val="D6E8F2"/>
+            </a:solidFill>
+            <a:prstDash val="solid"/>
+          </a:ln>
+        </p:spPr>
+      </p:sp>
+      <p:sp>
+        <p:nvSpPr>
+          <p:cNvPr id="14" name="Shape 12"/>
+          <p:cNvSpPr/>
+          <p:nvPr/>
+        </p:nvSpPr>
+        <p:spPr>
+          <a:xfrm>
+            <a:off x="8074152" y="3291840"/>
+            <a:ext cx="2596896" cy="749808"/>
+          </a:xfrm>
+          <a:prstGeom prst="rect">
+            <a:avLst/>
+          </a:prstGeom>
+          <a:solidFill>
+            <a:srgbClr val="EAF6F8"/>
+          </a:solidFill>
+          <a:ln w="12700">
+            <a:solidFill>
+              <a:srgbClr val="8ABBD8"/>
+            </a:solidFill>
+            <a:prstDash val="solid"/>
+          </a:ln>
+        </p:spPr>
+      </p:sp>
+      <p:sp>
+        <p:nvSpPr>
+          <p:cNvPr id="15" name="Shape 13"/>
+          <p:cNvSpPr/>
+          <p:nvPr/>
+        </p:nvSpPr>
+        <p:spPr>
+          <a:xfrm>
+            <a:off x="8202168" y="3721608"/>
+            <a:ext cx="2340864" cy="0"/>
+          </a:xfrm>
+          <a:prstGeom prst="line">
+            <a:avLst/>
+          </a:prstGeom>
+          <a:noFill/>
+          <a:ln w="19050">
+            <a:solidFill>
+              <a:srgbClr val="0068B7"/>
+            </a:solidFill>
+            <a:prstDash val="solid"/>
+          </a:ln>
+        </p:spPr>
+      </p:sp>
+      <p:sp>
+        <p:nvSpPr>
+          <p:cNvPr id="16" name="Shape 14"/>
+          <p:cNvSpPr/>
+          <p:nvPr/>
+        </p:nvSpPr>
+        <p:spPr>
+          <a:xfrm>
+            <a:off x="9198864" y="4206240"/>
+            <a:ext cx="347472" cy="347472"/>
+          </a:xfrm>
+          <a:prstGeom prst="ellipse">
+            <a:avLst/>
+          </a:prstGeom>
+          <a:solidFill>
+            <a:srgbClr val="2F8A28"/>
+          </a:solidFill>
+          <a:ln w="12700">
+            <a:solidFill>
+              <a:srgbClr val="2F8A28"/>
+            </a:solidFill>
+            <a:prstDash val="solid"/>
+          </a:ln>
+        </p:spPr>
+      </p:sp>
+      <p:sp>
+        <p:nvSpPr>
+          <p:cNvPr id="17" name="Text 15"/>
+          <p:cNvSpPr/>
+          <p:nvPr/>
+        </p:nvSpPr>
+        <p:spPr>
+          <a:xfrm>
+            <a:off x="7909560" y="3977640"/>
+            <a:ext cx="2926080" cy="182880"/>
+          </a:xfrm>
+          <a:prstGeom prst="rect">
+            <a:avLst/>
+          </a:prstGeom>
+          <a:noFill/>
+          <a:ln/>
+        </p:spPr>
+        <p:txBody>
+          <a:bodyPr wrap="square" lIns="0" tIns="0" rIns="0" bIns="0" rtlCol="0" anchor="ctr"/>
+          <a:lstStyle/>
+          <a:p>
+            <a:pPr algn="ctr" indent="0" marL="0">
+              <a:buNone/>
+            </a:pPr>
+            <a:r>
+              <a:rPr lang="en-US" sz="1000" dirty="0">
+                <a:solidFill>
+                  <a:srgbClr val="003A63"/>
+                </a:solidFill>
+                <a:latin typeface="Aptos" pitchFamily="34" charset="0"/>
+                <a:ea typeface="Aptos" pitchFamily="34" charset="-122"/>
+                <a:cs typeface="Aptos" pitchFamily="34" charset="-120"/>
+              </a:rPr>
+              <a:t>Concept to action</a:t>
+            </a:r>
+            <a:endParaRPr lang="en-US" sz="1000" dirty="0"/>
+          </a:p>
+        </p:txBody>
+      </p:sp>
+      <p:sp>
+        <p:nvSpPr>
+          <p:cNvPr id="18" name="Shape 16"/>
+          <p:cNvSpPr/>
+          <p:nvPr/>
+        </p:nvSpPr>
+        <p:spPr>
+          <a:xfrm>
+            <a:off x="7635240" y="4498848"/>
+            <a:ext cx="3474720" cy="1143000"/>
+          </a:xfrm>
+          <a:prstGeom prst="roundRect">
+            <a:avLst>
+              <a:gd name="adj" fmla="val 9600"/>
             </a:avLst>
           </a:prstGeom>
           <a:solidFill>
@@ -7827,14 +8832,14 @@
       </p:sp>
       <p:sp>
         <p:nvSpPr>
-          <p:cNvPr id="14" name="Text 12"/>
-          <p:cNvSpPr/>
-          <p:nvPr/>
-        </p:nvSpPr>
-        <p:spPr>
-          <a:xfrm>
-            <a:off x="8074152" y="3666744"/>
-            <a:ext cx="2825496" cy="256032"/>
+          <p:cNvPr id="19" name="Text 17"/>
+          <p:cNvSpPr/>
+          <p:nvPr/>
+        </p:nvSpPr>
+        <p:spPr>
+          <a:xfrm>
+            <a:off x="7799832" y="4645152"/>
+            <a:ext cx="3145536" cy="256032"/>
           </a:xfrm>
           <a:prstGeom prst="rect">
             <a:avLst/>
@@ -7858,7 +8863,7 @@
                 <a:ea typeface="Aptos" pitchFamily="34" charset="-122"/>
                 <a:cs typeface="Aptos" pitchFamily="34" charset="-120"/>
               </a:rPr>
-              <a:t>Use this for</a:t>
+              <a:t>Apply it</a:t>
             </a:r>
             <a:endParaRPr lang="en-US" sz="1300" dirty="0"/>
           </a:p>
@@ -7866,14 +8871,14 @@
       </p:sp>
       <p:sp>
         <p:nvSpPr>
-          <p:cNvPr id="15" name="Text 13"/>
-          <p:cNvSpPr/>
-          <p:nvPr/>
-        </p:nvSpPr>
-        <p:spPr>
-          <a:xfrm>
-            <a:off x="8074152" y="4023360"/>
-            <a:ext cx="2825496" cy="1097280"/>
+          <p:cNvPr id="20" name="Text 18"/>
+          <p:cNvSpPr/>
+          <p:nvPr/>
+        </p:nvSpPr>
+        <p:spPr>
+          <a:xfrm>
+            <a:off x="7799832" y="5001768"/>
+            <a:ext cx="3145536" cy="502920"/>
           </a:xfrm>
           <a:prstGeom prst="rect">
             <a:avLst/>
@@ -7899,7 +8904,7 @@
                 <a:ea typeface="Aptos" pitchFamily="34" charset="-122"/>
                 <a:cs typeface="Aptos" pitchFamily="34" charset="-120"/>
               </a:rPr>
-              <a:t>Connect the concept to public health decisions, safeguards, documentation, or implementation work.</a:t>
+              <a:t>Connect the concept to public health purpose, responsible use, required safeguards, documentation, and the next action a department should take.</a:t>
             </a:r>
             <a:endParaRPr lang="en-US" sz="1550" dirty="0"/>
           </a:p>
@@ -8073,8 +9078,8 @@
         </p:nvSpPr>
         <p:spPr>
           <a:xfrm>
-            <a:off x="9966960" y="6537960"/>
-            <a:ext cx="1645920" cy="201168"/>
+            <a:off x="9646920" y="6537960"/>
+            <a:ext cx="1965960" cy="201168"/>
           </a:xfrm>
           <a:prstGeom prst="rect">
             <a:avLst/>
@@ -8098,7 +9103,7 @@
                 <a:ea typeface="Aptos" pitchFamily="34" charset="-122"/>
                 <a:cs typeface="Aptos" pitchFamily="34" charset="-120"/>
               </a:rPr>
-              <a:t>Â© Paula Soper</a:t>
+              <a:t>Copyright Paula Soper</a:t>
             </a:r>
             <a:endParaRPr lang="en-US" sz="800" dirty="0"/>
           </a:p>
@@ -8145,77 +9150,13 @@
       </p:sp>
       <p:sp>
         <p:nvSpPr>
-          <p:cNvPr id="8" name="Shape 6"/>
+          <p:cNvPr id="8" name="Text 6"/>
           <p:cNvSpPr/>
           <p:nvPr/>
         </p:nvSpPr>
         <p:spPr>
           <a:xfrm>
             <a:off x="640080" y="658368"/>
-            <a:ext cx="420624" cy="420624"/>
-          </a:xfrm>
-          <a:prstGeom prst="ellipse">
-            <a:avLst/>
-          </a:prstGeom>
-          <a:solidFill>
-            <a:srgbClr val="0068B7"/>
-          </a:solidFill>
-          <a:ln w="12700">
-            <a:solidFill>
-              <a:srgbClr val="0068B7"/>
-            </a:solidFill>
-            <a:prstDash val="solid"/>
-          </a:ln>
-        </p:spPr>
-      </p:sp>
-      <p:sp>
-        <p:nvSpPr>
-          <p:cNvPr id="9" name="Text 7"/>
-          <p:cNvSpPr/>
-          <p:nvPr/>
-        </p:nvSpPr>
-        <p:spPr>
-          <a:xfrm>
-            <a:off x="640080" y="731520"/>
-            <a:ext cx="420624" cy="164592"/>
-          </a:xfrm>
-          <a:prstGeom prst="rect">
-            <a:avLst/>
-          </a:prstGeom>
-          <a:noFill/>
-          <a:ln/>
-        </p:spPr>
-        <p:txBody>
-          <a:bodyPr wrap="square" lIns="0" tIns="0" rIns="0" bIns="0" rtlCol="0" anchor="ctr"/>
-          <a:lstStyle/>
-          <a:p>
-            <a:pPr algn="ctr" indent="0" marL="0">
-              <a:buNone/>
-            </a:pPr>
-            <a:r>
-              <a:rPr lang="en-US" sz="1100" b="1" dirty="0">
-                <a:solidFill>
-                  <a:srgbClr val="FFFFFF"/>
-                </a:solidFill>
-                <a:latin typeface="Aptos" pitchFamily="34" charset="0"/>
-                <a:ea typeface="Aptos" pitchFamily="34" charset="-122"/>
-                <a:cs typeface="Aptos" pitchFamily="34" charset="-120"/>
-              </a:rPr>
-              <a:t>11</a:t>
-            </a:r>
-            <a:endParaRPr lang="en-US" sz="1100" dirty="0"/>
-          </a:p>
-        </p:txBody>
-      </p:sp>
-      <p:sp>
-        <p:nvSpPr>
-          <p:cNvPr id="10" name="Text 8"/>
-          <p:cNvSpPr/>
-          <p:nvPr/>
-        </p:nvSpPr>
-        <p:spPr>
-          <a:xfrm>
-            <a:off x="640080" y="621792"/>
             <a:ext cx="10881360" cy="713232"/>
           </a:xfrm>
           <a:prstGeom prst="rect">
@@ -8250,14 +9191,14 @@
       </p:sp>
       <p:sp>
         <p:nvSpPr>
-          <p:cNvPr id="11" name="Text 9"/>
+          <p:cNvPr id="9" name="Text 7"/>
           <p:cNvSpPr/>
           <p:nvPr/>
         </p:nvSpPr>
         <p:spPr>
           <a:xfrm>
             <a:off x="868680" y="1508760"/>
-            <a:ext cx="6537960" cy="4160520"/>
+            <a:ext cx="6309360" cy="4160520"/>
           </a:xfrm>
           <a:prstGeom prst="rect">
             <a:avLst/>
@@ -8302,18 +9243,18 @@
       </p:sp>
       <p:sp>
         <p:nvSpPr>
-          <p:cNvPr id="12" name="Shape 10"/>
-          <p:cNvSpPr/>
-          <p:nvPr/>
-        </p:nvSpPr>
-        <p:spPr>
-          <a:xfrm>
-            <a:off x="7909560" y="1417320"/>
-            <a:ext cx="3154680" cy="1828800"/>
+          <p:cNvPr id="10" name="Shape 8"/>
+          <p:cNvSpPr/>
+          <p:nvPr/>
+        </p:nvSpPr>
+        <p:spPr>
+          <a:xfrm>
+            <a:off x="7635240" y="1325880"/>
+            <a:ext cx="3474720" cy="1325880"/>
           </a:xfrm>
           <a:prstGeom prst="roundRect">
             <a:avLst>
-              <a:gd name="adj" fmla="val 6000"/>
+              <a:gd name="adj" fmla="val 8276"/>
             </a:avLst>
           </a:prstGeom>
           <a:solidFill>
@@ -8329,14 +9270,14 @@
       </p:sp>
       <p:sp>
         <p:nvSpPr>
-          <p:cNvPr id="13" name="Text 11"/>
-          <p:cNvSpPr/>
-          <p:nvPr/>
-        </p:nvSpPr>
-        <p:spPr>
-          <a:xfrm>
-            <a:off x="8074152" y="1563624"/>
-            <a:ext cx="2825496" cy="256032"/>
+          <p:cNvPr id="11" name="Text 9"/>
+          <p:cNvSpPr/>
+          <p:nvPr/>
+        </p:nvSpPr>
+        <p:spPr>
+          <a:xfrm>
+            <a:off x="7799832" y="1472184"/>
+            <a:ext cx="3145536" cy="256032"/>
           </a:xfrm>
           <a:prstGeom prst="rect">
             <a:avLst/>
@@ -8360,7 +9301,7 @@
                 <a:ea typeface="Aptos" pitchFamily="34" charset="-122"/>
                 <a:cs typeface="Aptos" pitchFamily="34" charset="-120"/>
               </a:rPr>
-              <a:t>Key idea</a:t>
+              <a:t>Practice focus</a:t>
             </a:r>
             <a:endParaRPr lang="en-US" sz="1300" dirty="0"/>
           </a:p>
@@ -8368,14 +9309,14 @@
       </p:sp>
       <p:sp>
         <p:nvSpPr>
-          <p:cNvPr id="14" name="Text 12"/>
-          <p:cNvSpPr/>
-          <p:nvPr/>
-        </p:nvSpPr>
-        <p:spPr>
-          <a:xfrm>
-            <a:off x="8074152" y="1920240"/>
-            <a:ext cx="2825496" cy="1188720"/>
+          <p:cNvPr id="12" name="Text 10"/>
+          <p:cNvSpPr/>
+          <p:nvPr/>
+        </p:nvSpPr>
+        <p:spPr>
+          <a:xfrm>
+            <a:off x="7799832" y="1828800"/>
+            <a:ext cx="3145536" cy="685800"/>
           </a:xfrm>
           <a:prstGeom prst="rect">
             <a:avLst/>
@@ -8409,18 +9350,159 @@
       </p:sp>
       <p:sp>
         <p:nvSpPr>
-          <p:cNvPr id="15" name="Shape 13"/>
-          <p:cNvSpPr/>
-          <p:nvPr/>
-        </p:nvSpPr>
-        <p:spPr>
-          <a:xfrm>
-            <a:off x="7909560" y="3520440"/>
-            <a:ext cx="3154680" cy="1737360"/>
+          <p:cNvPr id="13" name="Shape 11"/>
+          <p:cNvSpPr/>
+          <p:nvPr/>
+        </p:nvSpPr>
+        <p:spPr>
+          <a:xfrm>
+            <a:off x="7635240" y="2788920"/>
+            <a:ext cx="3474720" cy="1536192"/>
           </a:xfrm>
           <a:prstGeom prst="roundRect">
             <a:avLst>
-              <a:gd name="adj" fmla="val 6316"/>
+              <a:gd name="adj" fmla="val 7143"/>
+            </a:avLst>
+          </a:prstGeom>
+          <a:solidFill>
+            <a:srgbClr val="FFFFFF">
+              <a:alpha val="88000"/>
+            </a:srgbClr>
+          </a:solidFill>
+          <a:ln w="12700">
+            <a:solidFill>
+              <a:srgbClr val="D6E8F2"/>
+            </a:solidFill>
+            <a:prstDash val="solid"/>
+          </a:ln>
+        </p:spPr>
+      </p:sp>
+      <p:sp>
+        <p:nvSpPr>
+          <p:cNvPr id="14" name="Shape 12"/>
+          <p:cNvSpPr/>
+          <p:nvPr/>
+        </p:nvSpPr>
+        <p:spPr>
+          <a:xfrm>
+            <a:off x="8074152" y="3291840"/>
+            <a:ext cx="2596896" cy="749808"/>
+          </a:xfrm>
+          <a:prstGeom prst="rect">
+            <a:avLst/>
+          </a:prstGeom>
+          <a:solidFill>
+            <a:srgbClr val="EAF6F8"/>
+          </a:solidFill>
+          <a:ln w="12700">
+            <a:solidFill>
+              <a:srgbClr val="8ABBD8"/>
+            </a:solidFill>
+            <a:prstDash val="solid"/>
+          </a:ln>
+        </p:spPr>
+      </p:sp>
+      <p:sp>
+        <p:nvSpPr>
+          <p:cNvPr id="15" name="Shape 13"/>
+          <p:cNvSpPr/>
+          <p:nvPr/>
+        </p:nvSpPr>
+        <p:spPr>
+          <a:xfrm>
+            <a:off x="8202168" y="3721608"/>
+            <a:ext cx="2340864" cy="0"/>
+          </a:xfrm>
+          <a:prstGeom prst="line">
+            <a:avLst/>
+          </a:prstGeom>
+          <a:noFill/>
+          <a:ln w="19050">
+            <a:solidFill>
+              <a:srgbClr val="0068B7"/>
+            </a:solidFill>
+            <a:prstDash val="solid"/>
+          </a:ln>
+        </p:spPr>
+      </p:sp>
+      <p:sp>
+        <p:nvSpPr>
+          <p:cNvPr id="16" name="Shape 14"/>
+          <p:cNvSpPr/>
+          <p:nvPr/>
+        </p:nvSpPr>
+        <p:spPr>
+          <a:xfrm>
+            <a:off x="9198864" y="4206240"/>
+            <a:ext cx="347472" cy="347472"/>
+          </a:xfrm>
+          <a:prstGeom prst="ellipse">
+            <a:avLst/>
+          </a:prstGeom>
+          <a:solidFill>
+            <a:srgbClr val="2F8A28"/>
+          </a:solidFill>
+          <a:ln w="12700">
+            <a:solidFill>
+              <a:srgbClr val="2F8A28"/>
+            </a:solidFill>
+            <a:prstDash val="solid"/>
+          </a:ln>
+        </p:spPr>
+      </p:sp>
+      <p:sp>
+        <p:nvSpPr>
+          <p:cNvPr id="17" name="Text 15"/>
+          <p:cNvSpPr/>
+          <p:nvPr/>
+        </p:nvSpPr>
+        <p:spPr>
+          <a:xfrm>
+            <a:off x="7909560" y="3977640"/>
+            <a:ext cx="2926080" cy="182880"/>
+          </a:xfrm>
+          <a:prstGeom prst="rect">
+            <a:avLst/>
+          </a:prstGeom>
+          <a:noFill/>
+          <a:ln/>
+        </p:spPr>
+        <p:txBody>
+          <a:bodyPr wrap="square" lIns="0" tIns="0" rIns="0" bIns="0" rtlCol="0" anchor="ctr"/>
+          <a:lstStyle/>
+          <a:p>
+            <a:pPr algn="ctr" indent="0" marL="0">
+              <a:buNone/>
+            </a:pPr>
+            <a:r>
+              <a:rPr lang="en-US" sz="1000" dirty="0">
+                <a:solidFill>
+                  <a:srgbClr val="003A63"/>
+                </a:solidFill>
+                <a:latin typeface="Aptos" pitchFamily="34" charset="0"/>
+                <a:ea typeface="Aptos" pitchFamily="34" charset="-122"/>
+                <a:cs typeface="Aptos" pitchFamily="34" charset="-120"/>
+              </a:rPr>
+              <a:t>Concept to action</a:t>
+            </a:r>
+            <a:endParaRPr lang="en-US" sz="1000" dirty="0"/>
+          </a:p>
+        </p:txBody>
+      </p:sp>
+      <p:sp>
+        <p:nvSpPr>
+          <p:cNvPr id="18" name="Shape 16"/>
+          <p:cNvSpPr/>
+          <p:nvPr/>
+        </p:nvSpPr>
+        <p:spPr>
+          <a:xfrm>
+            <a:off x="7635240" y="4498848"/>
+            <a:ext cx="3474720" cy="1143000"/>
+          </a:xfrm>
+          <a:prstGeom prst="roundRect">
+            <a:avLst>
+              <a:gd name="adj" fmla="val 9600"/>
             </a:avLst>
           </a:prstGeom>
           <a:solidFill>
@@ -8436,14 +9518,14 @@
       </p:sp>
       <p:sp>
         <p:nvSpPr>
-          <p:cNvPr id="16" name="Text 14"/>
-          <p:cNvSpPr/>
-          <p:nvPr/>
-        </p:nvSpPr>
-        <p:spPr>
-          <a:xfrm>
-            <a:off x="8074152" y="3666744"/>
-            <a:ext cx="2825496" cy="256032"/>
+          <p:cNvPr id="19" name="Text 17"/>
+          <p:cNvSpPr/>
+          <p:nvPr/>
+        </p:nvSpPr>
+        <p:spPr>
+          <a:xfrm>
+            <a:off x="7799832" y="4645152"/>
+            <a:ext cx="3145536" cy="256032"/>
           </a:xfrm>
           <a:prstGeom prst="rect">
             <a:avLst/>
@@ -8467,7 +9549,7 @@
                 <a:ea typeface="Aptos" pitchFamily="34" charset="-122"/>
                 <a:cs typeface="Aptos" pitchFamily="34" charset="-120"/>
               </a:rPr>
-              <a:t>Use this for</a:t>
+              <a:t>What to produce</a:t>
             </a:r>
             <a:endParaRPr lang="en-US" sz="1300" dirty="0"/>
           </a:p>
@@ -8475,14 +9557,14 @@
       </p:sp>
       <p:sp>
         <p:nvSpPr>
-          <p:cNvPr id="17" name="Text 15"/>
-          <p:cNvSpPr/>
-          <p:nvPr/>
-        </p:nvSpPr>
-        <p:spPr>
-          <a:xfrm>
-            <a:off x="8074152" y="4023360"/>
-            <a:ext cx="2825496" cy="1097280"/>
+          <p:cNvPr id="20" name="Text 18"/>
+          <p:cNvSpPr/>
+          <p:nvPr/>
+        </p:nvSpPr>
+        <p:spPr>
+          <a:xfrm>
+            <a:off x="7799832" y="5001768"/>
+            <a:ext cx="3145536" cy="502920"/>
           </a:xfrm>
           <a:prstGeom prst="rect">
             <a:avLst/>
@@ -8508,7 +9590,7 @@
                 <a:ea typeface="Aptos" pitchFamily="34" charset="-122"/>
                 <a:cs typeface="Aptos" pitchFamily="34" charset="-120"/>
               </a:rPr>
-              <a:t>Connect the concept to public health decisions, safeguards, documentation, or implementation work.</a:t>
+              <a:t>Use the assignment to test whether you can explain the concept, apply it to a realistic public health situation, and identify what would need review before the work moves forward.</a:t>
             </a:r>
             <a:endParaRPr lang="en-US" sz="1550" dirty="0"/>
           </a:p>
@@ -8682,8 +9764,8 @@
         </p:nvSpPr>
         <p:spPr>
           <a:xfrm>
-            <a:off x="9966960" y="6537960"/>
-            <a:ext cx="1645920" cy="201168"/>
+            <a:off x="9646920" y="6537960"/>
+            <a:ext cx="1965960" cy="201168"/>
           </a:xfrm>
           <a:prstGeom prst="rect">
             <a:avLst/>
@@ -8707,7 +9789,7 @@
                 <a:ea typeface="Aptos" pitchFamily="34" charset="-122"/>
                 <a:cs typeface="Aptos" pitchFamily="34" charset="-120"/>
               </a:rPr>
-              <a:t>Â© Paula Soper</a:t>
+              <a:t>Copyright Paula Soper</a:t>
             </a:r>
             <a:endParaRPr lang="en-US" sz="800" dirty="0"/>
           </a:p>
@@ -8754,77 +9836,13 @@
       </p:sp>
       <p:sp>
         <p:nvSpPr>
-          <p:cNvPr id="8" name="Shape 6"/>
+          <p:cNvPr id="8" name="Text 6"/>
           <p:cNvSpPr/>
           <p:nvPr/>
         </p:nvSpPr>
         <p:spPr>
           <a:xfrm>
             <a:off x="640080" y="658368"/>
-            <a:ext cx="420624" cy="420624"/>
-          </a:xfrm>
-          <a:prstGeom prst="ellipse">
-            <a:avLst/>
-          </a:prstGeom>
-          <a:solidFill>
-            <a:srgbClr val="0068B7"/>
-          </a:solidFill>
-          <a:ln w="12700">
-            <a:solidFill>
-              <a:srgbClr val="0068B7"/>
-            </a:solidFill>
-            <a:prstDash val="solid"/>
-          </a:ln>
-        </p:spPr>
-      </p:sp>
-      <p:sp>
-        <p:nvSpPr>
-          <p:cNvPr id="9" name="Text 7"/>
-          <p:cNvSpPr/>
-          <p:nvPr/>
-        </p:nvSpPr>
-        <p:spPr>
-          <a:xfrm>
-            <a:off x="640080" y="731520"/>
-            <a:ext cx="420624" cy="164592"/>
-          </a:xfrm>
-          <a:prstGeom prst="rect">
-            <a:avLst/>
-          </a:prstGeom>
-          <a:noFill/>
-          <a:ln/>
-        </p:spPr>
-        <p:txBody>
-          <a:bodyPr wrap="square" lIns="0" tIns="0" rIns="0" bIns="0" rtlCol="0" anchor="ctr"/>
-          <a:lstStyle/>
-          <a:p>
-            <a:pPr algn="ctr" indent="0" marL="0">
-              <a:buNone/>
-            </a:pPr>
-            <a:r>
-              <a:rPr lang="en-US" sz="1100" b="1" dirty="0">
-                <a:solidFill>
-                  <a:srgbClr val="FFFFFF"/>
-                </a:solidFill>
-                <a:latin typeface="Aptos" pitchFamily="34" charset="0"/>
-                <a:ea typeface="Aptos" pitchFamily="34" charset="-122"/>
-                <a:cs typeface="Aptos" pitchFamily="34" charset="-120"/>
-              </a:rPr>
-              <a:t>12</a:t>
-            </a:r>
-            <a:endParaRPr lang="en-US" sz="1100" dirty="0"/>
-          </a:p>
-        </p:txBody>
-      </p:sp>
-      <p:sp>
-        <p:nvSpPr>
-          <p:cNvPr id="10" name="Text 8"/>
-          <p:cNvSpPr/>
-          <p:nvPr/>
-        </p:nvSpPr>
-        <p:spPr>
-          <a:xfrm>
-            <a:off x="640080" y="621792"/>
             <a:ext cx="10881360" cy="713232"/>
           </a:xfrm>
           <a:prstGeom prst="rect">
@@ -8859,14 +9877,14 @@
       </p:sp>
       <p:sp>
         <p:nvSpPr>
-          <p:cNvPr id="11" name="Text 9"/>
+          <p:cNvPr id="9" name="Text 7"/>
           <p:cNvSpPr/>
           <p:nvPr/>
         </p:nvSpPr>
         <p:spPr>
           <a:xfrm>
             <a:off x="868680" y="1508760"/>
-            <a:ext cx="6537960" cy="4160520"/>
+            <a:ext cx="6309360" cy="4160520"/>
           </a:xfrm>
           <a:prstGeom prst="rect">
             <a:avLst/>
@@ -8925,18 +9943,18 @@
       </p:sp>
       <p:sp>
         <p:nvSpPr>
-          <p:cNvPr id="12" name="Shape 10"/>
-          <p:cNvSpPr/>
-          <p:nvPr/>
-        </p:nvSpPr>
-        <p:spPr>
-          <a:xfrm>
-            <a:off x="7909560" y="1417320"/>
-            <a:ext cx="3154680" cy="1828800"/>
+          <p:cNvPr id="10" name="Shape 8"/>
+          <p:cNvSpPr/>
+          <p:nvPr/>
+        </p:nvSpPr>
+        <p:spPr>
+          <a:xfrm>
+            <a:off x="7635240" y="1325880"/>
+            <a:ext cx="3474720" cy="1325880"/>
           </a:xfrm>
           <a:prstGeom prst="roundRect">
             <a:avLst>
-              <a:gd name="adj" fmla="val 6000"/>
+              <a:gd name="adj" fmla="val 8276"/>
             </a:avLst>
           </a:prstGeom>
           <a:solidFill>
@@ -8952,14 +9970,14 @@
       </p:sp>
       <p:sp>
         <p:nvSpPr>
-          <p:cNvPr id="13" name="Text 11"/>
-          <p:cNvSpPr/>
-          <p:nvPr/>
-        </p:nvSpPr>
-        <p:spPr>
-          <a:xfrm>
-            <a:off x="8074152" y="1563624"/>
-            <a:ext cx="2825496" cy="256032"/>
+          <p:cNvPr id="11" name="Text 9"/>
+          <p:cNvSpPr/>
+          <p:nvPr/>
+        </p:nvSpPr>
+        <p:spPr>
+          <a:xfrm>
+            <a:off x="7799832" y="1472184"/>
+            <a:ext cx="3145536" cy="256032"/>
           </a:xfrm>
           <a:prstGeom prst="rect">
             <a:avLst/>
@@ -8983,7 +10001,7 @@
                 <a:ea typeface="Aptos" pitchFamily="34" charset="-122"/>
                 <a:cs typeface="Aptos" pitchFamily="34" charset="-120"/>
               </a:rPr>
-              <a:t>Key idea</a:t>
+              <a:t>Core concept</a:t>
             </a:r>
             <a:endParaRPr lang="en-US" sz="1300" dirty="0"/>
           </a:p>
@@ -8991,14 +10009,14 @@
       </p:sp>
       <p:sp>
         <p:nvSpPr>
-          <p:cNvPr id="14" name="Text 12"/>
-          <p:cNvSpPr/>
-          <p:nvPr/>
-        </p:nvSpPr>
-        <p:spPr>
-          <a:xfrm>
-            <a:off x="8074152" y="1920240"/>
-            <a:ext cx="2825496" cy="1188720"/>
+          <p:cNvPr id="12" name="Text 10"/>
+          <p:cNvSpPr/>
+          <p:nvPr/>
+        </p:nvSpPr>
+        <p:spPr>
+          <a:xfrm>
+            <a:off x="7799832" y="1828800"/>
+            <a:ext cx="3145536" cy="685800"/>
           </a:xfrm>
           <a:prstGeom prst="rect">
             <a:avLst/>
@@ -9032,18 +10050,159 @@
       </p:sp>
       <p:sp>
         <p:nvSpPr>
-          <p:cNvPr id="15" name="Shape 13"/>
-          <p:cNvSpPr/>
-          <p:nvPr/>
-        </p:nvSpPr>
-        <p:spPr>
-          <a:xfrm>
-            <a:off x="7909560" y="3520440"/>
-            <a:ext cx="3154680" cy="1737360"/>
+          <p:cNvPr id="13" name="Shape 11"/>
+          <p:cNvSpPr/>
+          <p:nvPr/>
+        </p:nvSpPr>
+        <p:spPr>
+          <a:xfrm>
+            <a:off x="7635240" y="2788920"/>
+            <a:ext cx="3474720" cy="1536192"/>
           </a:xfrm>
           <a:prstGeom prst="roundRect">
             <a:avLst>
-              <a:gd name="adj" fmla="val 6316"/>
+              <a:gd name="adj" fmla="val 7143"/>
+            </a:avLst>
+          </a:prstGeom>
+          <a:solidFill>
+            <a:srgbClr val="FFFFFF">
+              <a:alpha val="88000"/>
+            </a:srgbClr>
+          </a:solidFill>
+          <a:ln w="12700">
+            <a:solidFill>
+              <a:srgbClr val="D6E8F2"/>
+            </a:solidFill>
+            <a:prstDash val="solid"/>
+          </a:ln>
+        </p:spPr>
+      </p:sp>
+      <p:sp>
+        <p:nvSpPr>
+          <p:cNvPr id="14" name="Shape 12"/>
+          <p:cNvSpPr/>
+          <p:nvPr/>
+        </p:nvSpPr>
+        <p:spPr>
+          <a:xfrm>
+            <a:off x="8074152" y="3291840"/>
+            <a:ext cx="2596896" cy="749808"/>
+          </a:xfrm>
+          <a:prstGeom prst="rect">
+            <a:avLst/>
+          </a:prstGeom>
+          <a:solidFill>
+            <a:srgbClr val="EAF6F8"/>
+          </a:solidFill>
+          <a:ln w="12700">
+            <a:solidFill>
+              <a:srgbClr val="8ABBD8"/>
+            </a:solidFill>
+            <a:prstDash val="solid"/>
+          </a:ln>
+        </p:spPr>
+      </p:sp>
+      <p:sp>
+        <p:nvSpPr>
+          <p:cNvPr id="15" name="Shape 13"/>
+          <p:cNvSpPr/>
+          <p:nvPr/>
+        </p:nvSpPr>
+        <p:spPr>
+          <a:xfrm>
+            <a:off x="8202168" y="3721608"/>
+            <a:ext cx="2340864" cy="0"/>
+          </a:xfrm>
+          <a:prstGeom prst="line">
+            <a:avLst/>
+          </a:prstGeom>
+          <a:noFill/>
+          <a:ln w="19050">
+            <a:solidFill>
+              <a:srgbClr val="0068B7"/>
+            </a:solidFill>
+            <a:prstDash val="solid"/>
+          </a:ln>
+        </p:spPr>
+      </p:sp>
+      <p:sp>
+        <p:nvSpPr>
+          <p:cNvPr id="16" name="Shape 14"/>
+          <p:cNvSpPr/>
+          <p:nvPr/>
+        </p:nvSpPr>
+        <p:spPr>
+          <a:xfrm>
+            <a:off x="9198864" y="4206240"/>
+            <a:ext cx="347472" cy="347472"/>
+          </a:xfrm>
+          <a:prstGeom prst="ellipse">
+            <a:avLst/>
+          </a:prstGeom>
+          <a:solidFill>
+            <a:srgbClr val="2F8A28"/>
+          </a:solidFill>
+          <a:ln w="12700">
+            <a:solidFill>
+              <a:srgbClr val="2F8A28"/>
+            </a:solidFill>
+            <a:prstDash val="solid"/>
+          </a:ln>
+        </p:spPr>
+      </p:sp>
+      <p:sp>
+        <p:nvSpPr>
+          <p:cNvPr id="17" name="Text 15"/>
+          <p:cNvSpPr/>
+          <p:nvPr/>
+        </p:nvSpPr>
+        <p:spPr>
+          <a:xfrm>
+            <a:off x="7909560" y="3977640"/>
+            <a:ext cx="2926080" cy="182880"/>
+          </a:xfrm>
+          <a:prstGeom prst="rect">
+            <a:avLst/>
+          </a:prstGeom>
+          <a:noFill/>
+          <a:ln/>
+        </p:spPr>
+        <p:txBody>
+          <a:bodyPr wrap="square" lIns="0" tIns="0" rIns="0" bIns="0" rtlCol="0" anchor="ctr"/>
+          <a:lstStyle/>
+          <a:p>
+            <a:pPr algn="ctr" indent="0" marL="0">
+              <a:buNone/>
+            </a:pPr>
+            <a:r>
+              <a:rPr lang="en-US" sz="1000" dirty="0">
+                <a:solidFill>
+                  <a:srgbClr val="003A63"/>
+                </a:solidFill>
+                <a:latin typeface="Aptos" pitchFamily="34" charset="0"/>
+                <a:ea typeface="Aptos" pitchFamily="34" charset="-122"/>
+                <a:cs typeface="Aptos" pitchFamily="34" charset="-120"/>
+              </a:rPr>
+              <a:t>Concept to action</a:t>
+            </a:r>
+            <a:endParaRPr lang="en-US" sz="1000" dirty="0"/>
+          </a:p>
+        </p:txBody>
+      </p:sp>
+      <p:sp>
+        <p:nvSpPr>
+          <p:cNvPr id="18" name="Shape 16"/>
+          <p:cNvSpPr/>
+          <p:nvPr/>
+        </p:nvSpPr>
+        <p:spPr>
+          <a:xfrm>
+            <a:off x="7635240" y="4498848"/>
+            <a:ext cx="3474720" cy="1143000"/>
+          </a:xfrm>
+          <a:prstGeom prst="roundRect">
+            <a:avLst>
+              <a:gd name="adj" fmla="val 9600"/>
             </a:avLst>
           </a:prstGeom>
           <a:solidFill>
@@ -9059,14 +10218,14 @@
       </p:sp>
       <p:sp>
         <p:nvSpPr>
-          <p:cNvPr id="16" name="Text 14"/>
-          <p:cNvSpPr/>
-          <p:nvPr/>
-        </p:nvSpPr>
-        <p:spPr>
-          <a:xfrm>
-            <a:off x="8074152" y="3666744"/>
-            <a:ext cx="2825496" cy="256032"/>
+          <p:cNvPr id="19" name="Text 17"/>
+          <p:cNvSpPr/>
+          <p:nvPr/>
+        </p:nvSpPr>
+        <p:spPr>
+          <a:xfrm>
+            <a:off x="7799832" y="4645152"/>
+            <a:ext cx="3145536" cy="256032"/>
           </a:xfrm>
           <a:prstGeom prst="rect">
             <a:avLst/>
@@ -9090,7 +10249,7 @@
                 <a:ea typeface="Aptos" pitchFamily="34" charset="-122"/>
                 <a:cs typeface="Aptos" pitchFamily="34" charset="-120"/>
               </a:rPr>
-              <a:t>Use this for</a:t>
+              <a:t>Apply it</a:t>
             </a:r>
             <a:endParaRPr lang="en-US" sz="1300" dirty="0"/>
           </a:p>
@@ -9098,14 +10257,14 @@
       </p:sp>
       <p:sp>
         <p:nvSpPr>
-          <p:cNvPr id="17" name="Text 15"/>
-          <p:cNvSpPr/>
-          <p:nvPr/>
-        </p:nvSpPr>
-        <p:spPr>
-          <a:xfrm>
-            <a:off x="8074152" y="4023360"/>
-            <a:ext cx="2825496" cy="1097280"/>
+          <p:cNvPr id="20" name="Text 18"/>
+          <p:cNvSpPr/>
+          <p:nvPr/>
+        </p:nvSpPr>
+        <p:spPr>
+          <a:xfrm>
+            <a:off x="7799832" y="5001768"/>
+            <a:ext cx="3145536" cy="502920"/>
           </a:xfrm>
           <a:prstGeom prst="rect">
             <a:avLst/>
@@ -9131,7 +10290,7 @@
                 <a:ea typeface="Aptos" pitchFamily="34" charset="-122"/>
                 <a:cs typeface="Aptos" pitchFamily="34" charset="-120"/>
               </a:rPr>
-              <a:t>Connect the concept to public health decisions, safeguards, documentation, or implementation work.</a:t>
+              <a:t>Connect the concept to public health purpose, responsible use, required safeguards, documentation, and the next action a department should take.</a:t>
             </a:r>
             <a:endParaRPr lang="en-US" sz="1550" dirty="0"/>
           </a:p>
@@ -9305,8 +10464,8 @@
         </p:nvSpPr>
         <p:spPr>
           <a:xfrm>
-            <a:off x="9966960" y="6537960"/>
-            <a:ext cx="1645920" cy="201168"/>
+            <a:off x="9646920" y="6537960"/>
+            <a:ext cx="1965960" cy="201168"/>
           </a:xfrm>
           <a:prstGeom prst="rect">
             <a:avLst/>
@@ -9330,7 +10489,7 @@
                 <a:ea typeface="Aptos" pitchFamily="34" charset="-122"/>
                 <a:cs typeface="Aptos" pitchFamily="34" charset="-120"/>
               </a:rPr>
-              <a:t>Â© Paula Soper</a:t>
+              <a:t>Copyright Paula Soper</a:t>
             </a:r>
             <a:endParaRPr lang="en-US" sz="800" dirty="0"/>
           </a:p>
@@ -9693,46 +10852,7 @@
       </p:sp>
       <p:sp>
         <p:nvSpPr>
-          <p:cNvPr id="15" name="Text 13"/>
-          <p:cNvSpPr/>
-          <p:nvPr/>
-        </p:nvSpPr>
-        <p:spPr>
-          <a:xfrm>
-            <a:off x="8695944" y="3941064"/>
-            <a:ext cx="201168" cy="256032"/>
-          </a:xfrm>
-          <a:prstGeom prst="rect">
-            <a:avLst/>
-          </a:prstGeom>
-          <a:noFill/>
-          <a:ln/>
-        </p:spPr>
-        <p:txBody>
-          <a:bodyPr wrap="square" lIns="0" tIns="0" rIns="0" bIns="0" rtlCol="0" anchor="ctr"/>
-          <a:lstStyle/>
-          <a:p>
-            <a:pPr algn="ctr" indent="0" marL="0">
-              <a:buNone/>
-            </a:pPr>
-            <a:r>
-              <a:rPr lang="en-US" sz="1800" b="1" dirty="0">
-                <a:solidFill>
-                  <a:srgbClr val="0068B7"/>
-                </a:solidFill>
-                <a:latin typeface="Aptos" pitchFamily="34" charset="0"/>
-                <a:ea typeface="Aptos" pitchFamily="34" charset="-122"/>
-                <a:cs typeface="Aptos" pitchFamily="34" charset="-120"/>
-              </a:rPr>
-              <a:t>â†’</a:t>
-            </a:r>
-            <a:endParaRPr lang="en-US" sz="1800" dirty="0"/>
-          </a:p>
-        </p:txBody>
-      </p:sp>
-      <p:sp>
-        <p:nvSpPr>
-          <p:cNvPr id="16" name="Shape 14"/>
+          <p:cNvPr id="15" name="Shape 13"/>
           <p:cNvSpPr/>
           <p:nvPr/>
         </p:nvSpPr>
@@ -9759,7 +10879,7 @@
       </p:sp>
       <p:sp>
         <p:nvSpPr>
-          <p:cNvPr id="17" name="Text 15"/>
+          <p:cNvPr id="16" name="Text 14"/>
           <p:cNvSpPr/>
           <p:nvPr/>
         </p:nvSpPr>
@@ -9800,46 +10920,7 @@
       </p:sp>
       <p:sp>
         <p:nvSpPr>
-          <p:cNvPr id="18" name="Text 16"/>
-          <p:cNvSpPr/>
-          <p:nvPr/>
-        </p:nvSpPr>
-        <p:spPr>
-          <a:xfrm>
-            <a:off x="9985248" y="3941064"/>
-            <a:ext cx="201168" cy="256032"/>
-          </a:xfrm>
-          <a:prstGeom prst="rect">
-            <a:avLst/>
-          </a:prstGeom>
-          <a:noFill/>
-          <a:ln/>
-        </p:spPr>
-        <p:txBody>
-          <a:bodyPr wrap="square" lIns="0" tIns="0" rIns="0" bIns="0" rtlCol="0" anchor="ctr"/>
-          <a:lstStyle/>
-          <a:p>
-            <a:pPr algn="ctr" indent="0" marL="0">
-              <a:buNone/>
-            </a:pPr>
-            <a:r>
-              <a:rPr lang="en-US" sz="1800" b="1" dirty="0">
-                <a:solidFill>
-                  <a:srgbClr val="0068B7"/>
-                </a:solidFill>
-                <a:latin typeface="Aptos" pitchFamily="34" charset="0"/>
-                <a:ea typeface="Aptos" pitchFamily="34" charset="-122"/>
-                <a:cs typeface="Aptos" pitchFamily="34" charset="-120"/>
-              </a:rPr>
-              <a:t>â†’</a:t>
-            </a:r>
-            <a:endParaRPr lang="en-US" sz="1800" dirty="0"/>
-          </a:p>
-        </p:txBody>
-      </p:sp>
-      <p:sp>
-        <p:nvSpPr>
-          <p:cNvPr id="19" name="Shape 17"/>
+          <p:cNvPr id="17" name="Shape 15"/>
           <p:cNvSpPr/>
           <p:nvPr/>
         </p:nvSpPr>
@@ -9866,7 +10947,7 @@
       </p:sp>
       <p:sp>
         <p:nvSpPr>
-          <p:cNvPr id="20" name="Text 18"/>
+          <p:cNvPr id="18" name="Text 16"/>
           <p:cNvSpPr/>
           <p:nvPr/>
         </p:nvSpPr>
@@ -10073,8 +11154,8 @@
         </p:nvSpPr>
         <p:spPr>
           <a:xfrm>
-            <a:off x="9966960" y="6537960"/>
-            <a:ext cx="1645920" cy="201168"/>
+            <a:off x="9646920" y="6537960"/>
+            <a:ext cx="1965960" cy="201168"/>
           </a:xfrm>
           <a:prstGeom prst="rect">
             <a:avLst/>
@@ -10098,7 +11179,7 @@
                 <a:ea typeface="Aptos" pitchFamily="34" charset="-122"/>
                 <a:cs typeface="Aptos" pitchFamily="34" charset="-120"/>
               </a:rPr>
-              <a:t>Â© Paula Soper</a:t>
+              <a:t>Copyright Paula Soper</a:t>
             </a:r>
             <a:endParaRPr lang="en-US" sz="800" dirty="0"/>
           </a:p>
@@ -10193,7 +11274,7 @@
         <p:spPr>
           <a:xfrm>
             <a:off x="868680" y="1508760"/>
-            <a:ext cx="6537960" cy="4160520"/>
+            <a:ext cx="6309360" cy="4160520"/>
           </a:xfrm>
           <a:prstGeom prst="rect">
             <a:avLst/>
@@ -10230,12 +11311,12 @@
         </p:nvSpPr>
         <p:spPr>
           <a:xfrm>
-            <a:off x="7909560" y="1417320"/>
-            <a:ext cx="3154680" cy="1828800"/>
+            <a:off x="7635240" y="1325880"/>
+            <a:ext cx="3474720" cy="1325880"/>
           </a:xfrm>
           <a:prstGeom prst="roundRect">
             <a:avLst>
-              <a:gd name="adj" fmla="val 6000"/>
+              <a:gd name="adj" fmla="val 8276"/>
             </a:avLst>
           </a:prstGeom>
           <a:solidFill>
@@ -10257,8 +11338,8 @@
         </p:nvSpPr>
         <p:spPr>
           <a:xfrm>
-            <a:off x="8074152" y="1563624"/>
-            <a:ext cx="2825496" cy="256032"/>
+            <a:off x="7799832" y="1472184"/>
+            <a:ext cx="3145536" cy="256032"/>
           </a:xfrm>
           <a:prstGeom prst="rect">
             <a:avLst/>
@@ -10282,7 +11363,7 @@
                 <a:ea typeface="Aptos" pitchFamily="34" charset="-122"/>
                 <a:cs typeface="Aptos" pitchFamily="34" charset="-120"/>
               </a:rPr>
-              <a:t>Key idea</a:t>
+              <a:t>Core concept</a:t>
             </a:r>
             <a:endParaRPr lang="en-US" sz="1300" dirty="0"/>
           </a:p>
@@ -10296,8 +11377,8 @@
         </p:nvSpPr>
         <p:spPr>
           <a:xfrm>
-            <a:off x="8074152" y="1920240"/>
-            <a:ext cx="2825496" cy="1188720"/>
+            <a:off x="7799832" y="1828800"/>
+            <a:ext cx="3145536" cy="685800"/>
           </a:xfrm>
           <a:prstGeom prst="rect">
             <a:avLst/>
@@ -10337,12 +11418,153 @@
         </p:nvSpPr>
         <p:spPr>
           <a:xfrm>
-            <a:off x="7909560" y="3520440"/>
-            <a:ext cx="3154680" cy="1737360"/>
+            <a:off x="7635240" y="2788920"/>
+            <a:ext cx="3474720" cy="1536192"/>
           </a:xfrm>
           <a:prstGeom prst="roundRect">
             <a:avLst>
-              <a:gd name="adj" fmla="val 6316"/>
+              <a:gd name="adj" fmla="val 7143"/>
+            </a:avLst>
+          </a:prstGeom>
+          <a:solidFill>
+            <a:srgbClr val="FFFFFF">
+              <a:alpha val="88000"/>
+            </a:srgbClr>
+          </a:solidFill>
+          <a:ln w="12700">
+            <a:solidFill>
+              <a:srgbClr val="D6E8F2"/>
+            </a:solidFill>
+            <a:prstDash val="solid"/>
+          </a:ln>
+        </p:spPr>
+      </p:sp>
+      <p:sp>
+        <p:nvSpPr>
+          <p:cNvPr id="14" name="Shape 12"/>
+          <p:cNvSpPr/>
+          <p:nvPr/>
+        </p:nvSpPr>
+        <p:spPr>
+          <a:xfrm>
+            <a:off x="8074152" y="3291840"/>
+            <a:ext cx="2596896" cy="749808"/>
+          </a:xfrm>
+          <a:prstGeom prst="rect">
+            <a:avLst/>
+          </a:prstGeom>
+          <a:solidFill>
+            <a:srgbClr val="EAF6F8"/>
+          </a:solidFill>
+          <a:ln w="12700">
+            <a:solidFill>
+              <a:srgbClr val="8ABBD8"/>
+            </a:solidFill>
+            <a:prstDash val="solid"/>
+          </a:ln>
+        </p:spPr>
+      </p:sp>
+      <p:sp>
+        <p:nvSpPr>
+          <p:cNvPr id="15" name="Shape 13"/>
+          <p:cNvSpPr/>
+          <p:nvPr/>
+        </p:nvSpPr>
+        <p:spPr>
+          <a:xfrm>
+            <a:off x="8202168" y="3721608"/>
+            <a:ext cx="2340864" cy="0"/>
+          </a:xfrm>
+          <a:prstGeom prst="line">
+            <a:avLst/>
+          </a:prstGeom>
+          <a:noFill/>
+          <a:ln w="19050">
+            <a:solidFill>
+              <a:srgbClr val="0068B7"/>
+            </a:solidFill>
+            <a:prstDash val="solid"/>
+          </a:ln>
+        </p:spPr>
+      </p:sp>
+      <p:sp>
+        <p:nvSpPr>
+          <p:cNvPr id="16" name="Shape 14"/>
+          <p:cNvSpPr/>
+          <p:nvPr/>
+        </p:nvSpPr>
+        <p:spPr>
+          <a:xfrm>
+            <a:off x="9198864" y="4206240"/>
+            <a:ext cx="347472" cy="347472"/>
+          </a:xfrm>
+          <a:prstGeom prst="ellipse">
+            <a:avLst/>
+          </a:prstGeom>
+          <a:solidFill>
+            <a:srgbClr val="2F8A28"/>
+          </a:solidFill>
+          <a:ln w="12700">
+            <a:solidFill>
+              <a:srgbClr val="2F8A28"/>
+            </a:solidFill>
+            <a:prstDash val="solid"/>
+          </a:ln>
+        </p:spPr>
+      </p:sp>
+      <p:sp>
+        <p:nvSpPr>
+          <p:cNvPr id="17" name="Text 15"/>
+          <p:cNvSpPr/>
+          <p:nvPr/>
+        </p:nvSpPr>
+        <p:spPr>
+          <a:xfrm>
+            <a:off x="7909560" y="3977640"/>
+            <a:ext cx="2926080" cy="182880"/>
+          </a:xfrm>
+          <a:prstGeom prst="rect">
+            <a:avLst/>
+          </a:prstGeom>
+          <a:noFill/>
+          <a:ln/>
+        </p:spPr>
+        <p:txBody>
+          <a:bodyPr wrap="square" lIns="0" tIns="0" rIns="0" bIns="0" rtlCol="0" anchor="ctr"/>
+          <a:lstStyle/>
+          <a:p>
+            <a:pPr algn="ctr" indent="0" marL="0">
+              <a:buNone/>
+            </a:pPr>
+            <a:r>
+              <a:rPr lang="en-US" sz="1000" dirty="0">
+                <a:solidFill>
+                  <a:srgbClr val="003A63"/>
+                </a:solidFill>
+                <a:latin typeface="Aptos" pitchFamily="34" charset="0"/>
+                <a:ea typeface="Aptos" pitchFamily="34" charset="-122"/>
+                <a:cs typeface="Aptos" pitchFamily="34" charset="-120"/>
+              </a:rPr>
+              <a:t>Concept to action</a:t>
+            </a:r>
+            <a:endParaRPr lang="en-US" sz="1000" dirty="0"/>
+          </a:p>
+        </p:txBody>
+      </p:sp>
+      <p:sp>
+        <p:nvSpPr>
+          <p:cNvPr id="18" name="Shape 16"/>
+          <p:cNvSpPr/>
+          <p:nvPr/>
+        </p:nvSpPr>
+        <p:spPr>
+          <a:xfrm>
+            <a:off x="7635240" y="4498848"/>
+            <a:ext cx="3474720" cy="1143000"/>
+          </a:xfrm>
+          <a:prstGeom prst="roundRect">
+            <a:avLst>
+              <a:gd name="adj" fmla="val 9600"/>
             </a:avLst>
           </a:prstGeom>
           <a:solidFill>
@@ -10358,14 +11580,14 @@
       </p:sp>
       <p:sp>
         <p:nvSpPr>
-          <p:cNvPr id="14" name="Text 12"/>
-          <p:cNvSpPr/>
-          <p:nvPr/>
-        </p:nvSpPr>
-        <p:spPr>
-          <a:xfrm>
-            <a:off x="8074152" y="3666744"/>
-            <a:ext cx="2825496" cy="256032"/>
+          <p:cNvPr id="19" name="Text 17"/>
+          <p:cNvSpPr/>
+          <p:nvPr/>
+        </p:nvSpPr>
+        <p:spPr>
+          <a:xfrm>
+            <a:off x="7799832" y="4645152"/>
+            <a:ext cx="3145536" cy="256032"/>
           </a:xfrm>
           <a:prstGeom prst="rect">
             <a:avLst/>
@@ -10389,7 +11611,7 @@
                 <a:ea typeface="Aptos" pitchFamily="34" charset="-122"/>
                 <a:cs typeface="Aptos" pitchFamily="34" charset="-120"/>
               </a:rPr>
-              <a:t>Use this for</a:t>
+              <a:t>Apply it</a:t>
             </a:r>
             <a:endParaRPr lang="en-US" sz="1300" dirty="0"/>
           </a:p>
@@ -10397,14 +11619,14 @@
       </p:sp>
       <p:sp>
         <p:nvSpPr>
-          <p:cNvPr id="15" name="Text 13"/>
-          <p:cNvSpPr/>
-          <p:nvPr/>
-        </p:nvSpPr>
-        <p:spPr>
-          <a:xfrm>
-            <a:off x="8074152" y="4023360"/>
-            <a:ext cx="2825496" cy="1097280"/>
+          <p:cNvPr id="20" name="Text 18"/>
+          <p:cNvSpPr/>
+          <p:nvPr/>
+        </p:nvSpPr>
+        <p:spPr>
+          <a:xfrm>
+            <a:off x="7799832" y="5001768"/>
+            <a:ext cx="3145536" cy="502920"/>
           </a:xfrm>
           <a:prstGeom prst="rect">
             <a:avLst/>
@@ -10430,7 +11652,7 @@
                 <a:ea typeface="Aptos" pitchFamily="34" charset="-122"/>
                 <a:cs typeface="Aptos" pitchFamily="34" charset="-120"/>
               </a:rPr>
-              <a:t>Connect the concept to public health decisions, safeguards, documentation, or implementation work.</a:t>
+              <a:t>Connect the concept to public health purpose, responsible use, required safeguards, documentation, and the next action a department should take.</a:t>
             </a:r>
             <a:endParaRPr lang="en-US" sz="1550" dirty="0"/>
           </a:p>
@@ -10604,8 +11826,8 @@
         </p:nvSpPr>
         <p:spPr>
           <a:xfrm>
-            <a:off x="9966960" y="6537960"/>
-            <a:ext cx="1645920" cy="201168"/>
+            <a:off x="9646920" y="6537960"/>
+            <a:ext cx="1965960" cy="201168"/>
           </a:xfrm>
           <a:prstGeom prst="rect">
             <a:avLst/>
@@ -10629,7 +11851,7 @@
                 <a:ea typeface="Aptos" pitchFamily="34" charset="-122"/>
                 <a:cs typeface="Aptos" pitchFamily="34" charset="-120"/>
               </a:rPr>
-              <a:t>Â© Paula Soper</a:t>
+              <a:t>Copyright Paula Soper</a:t>
             </a:r>
             <a:endParaRPr lang="en-US" sz="800" dirty="0"/>
           </a:p>
@@ -10676,77 +11898,13 @@
       </p:sp>
       <p:sp>
         <p:nvSpPr>
-          <p:cNvPr id="8" name="Shape 6"/>
+          <p:cNvPr id="8" name="Text 6"/>
           <p:cNvSpPr/>
           <p:nvPr/>
         </p:nvSpPr>
         <p:spPr>
           <a:xfrm>
             <a:off x="640080" y="658368"/>
-            <a:ext cx="420624" cy="420624"/>
-          </a:xfrm>
-          <a:prstGeom prst="ellipse">
-            <a:avLst/>
-          </a:prstGeom>
-          <a:solidFill>
-            <a:srgbClr val="0068B7"/>
-          </a:solidFill>
-          <a:ln w="12700">
-            <a:solidFill>
-              <a:srgbClr val="0068B7"/>
-            </a:solidFill>
-            <a:prstDash val="solid"/>
-          </a:ln>
-        </p:spPr>
-      </p:sp>
-      <p:sp>
-        <p:nvSpPr>
-          <p:cNvPr id="9" name="Text 7"/>
-          <p:cNvSpPr/>
-          <p:nvPr/>
-        </p:nvSpPr>
-        <p:spPr>
-          <a:xfrm>
-            <a:off x="640080" y="731520"/>
-            <a:ext cx="420624" cy="164592"/>
-          </a:xfrm>
-          <a:prstGeom prst="rect">
-            <a:avLst/>
-          </a:prstGeom>
-          <a:noFill/>
-          <a:ln/>
-        </p:spPr>
-        <p:txBody>
-          <a:bodyPr wrap="square" lIns="0" tIns="0" rIns="0" bIns="0" rtlCol="0" anchor="ctr"/>
-          <a:lstStyle/>
-          <a:p>
-            <a:pPr algn="ctr" indent="0" marL="0">
-              <a:buNone/>
-            </a:pPr>
-            <a:r>
-              <a:rPr lang="en-US" sz="1100" b="1" dirty="0">
-                <a:solidFill>
-                  <a:srgbClr val="FFFFFF"/>
-                </a:solidFill>
-                <a:latin typeface="Aptos" pitchFamily="34" charset="0"/>
-                <a:ea typeface="Aptos" pitchFamily="34" charset="-122"/>
-                <a:cs typeface="Aptos" pitchFamily="34" charset="-120"/>
-              </a:rPr>
-              <a:t>13</a:t>
-            </a:r>
-            <a:endParaRPr lang="en-US" sz="1100" dirty="0"/>
-          </a:p>
-        </p:txBody>
-      </p:sp>
-      <p:sp>
-        <p:nvSpPr>
-          <p:cNvPr id="10" name="Text 8"/>
-          <p:cNvSpPr/>
-          <p:nvPr/>
-        </p:nvSpPr>
-        <p:spPr>
-          <a:xfrm>
-            <a:off x="640080" y="621792"/>
             <a:ext cx="10881360" cy="713232"/>
           </a:xfrm>
           <a:prstGeom prst="rect">
@@ -10781,14 +11939,14 @@
       </p:sp>
       <p:sp>
         <p:nvSpPr>
-          <p:cNvPr id="11" name="Text 9"/>
+          <p:cNvPr id="9" name="Text 7"/>
           <p:cNvSpPr/>
           <p:nvPr/>
         </p:nvSpPr>
         <p:spPr>
           <a:xfrm>
             <a:off x="868680" y="1508760"/>
-            <a:ext cx="6537960" cy="4160520"/>
+            <a:ext cx="6309360" cy="4160520"/>
           </a:xfrm>
           <a:prstGeom prst="rect">
             <a:avLst/>
@@ -10847,18 +12005,18 @@
       </p:sp>
       <p:sp>
         <p:nvSpPr>
-          <p:cNvPr id="12" name="Shape 10"/>
-          <p:cNvSpPr/>
-          <p:nvPr/>
-        </p:nvSpPr>
-        <p:spPr>
-          <a:xfrm>
-            <a:off x="7909560" y="1417320"/>
-            <a:ext cx="3154680" cy="1828800"/>
+          <p:cNvPr id="10" name="Shape 8"/>
+          <p:cNvSpPr/>
+          <p:nvPr/>
+        </p:nvSpPr>
+        <p:spPr>
+          <a:xfrm>
+            <a:off x="7635240" y="1325880"/>
+            <a:ext cx="3474720" cy="1325880"/>
           </a:xfrm>
           <a:prstGeom prst="roundRect">
             <a:avLst>
-              <a:gd name="adj" fmla="val 6000"/>
+              <a:gd name="adj" fmla="val 8276"/>
             </a:avLst>
           </a:prstGeom>
           <a:solidFill>
@@ -10874,14 +12032,14 @@
       </p:sp>
       <p:sp>
         <p:nvSpPr>
-          <p:cNvPr id="13" name="Text 11"/>
-          <p:cNvSpPr/>
-          <p:nvPr/>
-        </p:nvSpPr>
-        <p:spPr>
-          <a:xfrm>
-            <a:off x="8074152" y="1563624"/>
-            <a:ext cx="2825496" cy="256032"/>
+          <p:cNvPr id="11" name="Text 9"/>
+          <p:cNvSpPr/>
+          <p:nvPr/>
+        </p:nvSpPr>
+        <p:spPr>
+          <a:xfrm>
+            <a:off x="7799832" y="1472184"/>
+            <a:ext cx="3145536" cy="256032"/>
           </a:xfrm>
           <a:prstGeom prst="rect">
             <a:avLst/>
@@ -10905,7 +12063,7 @@
                 <a:ea typeface="Aptos" pitchFamily="34" charset="-122"/>
                 <a:cs typeface="Aptos" pitchFamily="34" charset="-120"/>
               </a:rPr>
-              <a:t>Key idea</a:t>
+              <a:t>Practice focus</a:t>
             </a:r>
             <a:endParaRPr lang="en-US" sz="1300" dirty="0"/>
           </a:p>
@@ -10913,14 +12071,14 @@
       </p:sp>
       <p:sp>
         <p:nvSpPr>
-          <p:cNvPr id="14" name="Text 12"/>
-          <p:cNvSpPr/>
-          <p:nvPr/>
-        </p:nvSpPr>
-        <p:spPr>
-          <a:xfrm>
-            <a:off x="8074152" y="1920240"/>
-            <a:ext cx="2825496" cy="1188720"/>
+          <p:cNvPr id="12" name="Text 10"/>
+          <p:cNvSpPr/>
+          <p:nvPr/>
+        </p:nvSpPr>
+        <p:spPr>
+          <a:xfrm>
+            <a:off x="7799832" y="1828800"/>
+            <a:ext cx="3145536" cy="685800"/>
           </a:xfrm>
           <a:prstGeom prst="rect">
             <a:avLst/>
@@ -10954,18 +12112,159 @@
       </p:sp>
       <p:sp>
         <p:nvSpPr>
-          <p:cNvPr id="15" name="Shape 13"/>
-          <p:cNvSpPr/>
-          <p:nvPr/>
-        </p:nvSpPr>
-        <p:spPr>
-          <a:xfrm>
-            <a:off x="7909560" y="3520440"/>
-            <a:ext cx="3154680" cy="1737360"/>
+          <p:cNvPr id="13" name="Shape 11"/>
+          <p:cNvSpPr/>
+          <p:nvPr/>
+        </p:nvSpPr>
+        <p:spPr>
+          <a:xfrm>
+            <a:off x="7635240" y="2788920"/>
+            <a:ext cx="3474720" cy="1536192"/>
           </a:xfrm>
           <a:prstGeom prst="roundRect">
             <a:avLst>
-              <a:gd name="adj" fmla="val 6316"/>
+              <a:gd name="adj" fmla="val 7143"/>
+            </a:avLst>
+          </a:prstGeom>
+          <a:solidFill>
+            <a:srgbClr val="FFFFFF">
+              <a:alpha val="88000"/>
+            </a:srgbClr>
+          </a:solidFill>
+          <a:ln w="12700">
+            <a:solidFill>
+              <a:srgbClr val="D6E8F2"/>
+            </a:solidFill>
+            <a:prstDash val="solid"/>
+          </a:ln>
+        </p:spPr>
+      </p:sp>
+      <p:sp>
+        <p:nvSpPr>
+          <p:cNvPr id="14" name="Shape 12"/>
+          <p:cNvSpPr/>
+          <p:nvPr/>
+        </p:nvSpPr>
+        <p:spPr>
+          <a:xfrm>
+            <a:off x="8074152" y="3291840"/>
+            <a:ext cx="2596896" cy="749808"/>
+          </a:xfrm>
+          <a:prstGeom prst="rect">
+            <a:avLst/>
+          </a:prstGeom>
+          <a:solidFill>
+            <a:srgbClr val="EAF6F8"/>
+          </a:solidFill>
+          <a:ln w="12700">
+            <a:solidFill>
+              <a:srgbClr val="8ABBD8"/>
+            </a:solidFill>
+            <a:prstDash val="solid"/>
+          </a:ln>
+        </p:spPr>
+      </p:sp>
+      <p:sp>
+        <p:nvSpPr>
+          <p:cNvPr id="15" name="Shape 13"/>
+          <p:cNvSpPr/>
+          <p:nvPr/>
+        </p:nvSpPr>
+        <p:spPr>
+          <a:xfrm>
+            <a:off x="8202168" y="3721608"/>
+            <a:ext cx="2340864" cy="0"/>
+          </a:xfrm>
+          <a:prstGeom prst="line">
+            <a:avLst/>
+          </a:prstGeom>
+          <a:noFill/>
+          <a:ln w="19050">
+            <a:solidFill>
+              <a:srgbClr val="0068B7"/>
+            </a:solidFill>
+            <a:prstDash val="solid"/>
+          </a:ln>
+        </p:spPr>
+      </p:sp>
+      <p:sp>
+        <p:nvSpPr>
+          <p:cNvPr id="16" name="Shape 14"/>
+          <p:cNvSpPr/>
+          <p:nvPr/>
+        </p:nvSpPr>
+        <p:spPr>
+          <a:xfrm>
+            <a:off x="9198864" y="4206240"/>
+            <a:ext cx="347472" cy="347472"/>
+          </a:xfrm>
+          <a:prstGeom prst="ellipse">
+            <a:avLst/>
+          </a:prstGeom>
+          <a:solidFill>
+            <a:srgbClr val="2F8A28"/>
+          </a:solidFill>
+          <a:ln w="12700">
+            <a:solidFill>
+              <a:srgbClr val="2F8A28"/>
+            </a:solidFill>
+            <a:prstDash val="solid"/>
+          </a:ln>
+        </p:spPr>
+      </p:sp>
+      <p:sp>
+        <p:nvSpPr>
+          <p:cNvPr id="17" name="Text 15"/>
+          <p:cNvSpPr/>
+          <p:nvPr/>
+        </p:nvSpPr>
+        <p:spPr>
+          <a:xfrm>
+            <a:off x="7909560" y="3977640"/>
+            <a:ext cx="2926080" cy="182880"/>
+          </a:xfrm>
+          <a:prstGeom prst="rect">
+            <a:avLst/>
+          </a:prstGeom>
+          <a:noFill/>
+          <a:ln/>
+        </p:spPr>
+        <p:txBody>
+          <a:bodyPr wrap="square" lIns="0" tIns="0" rIns="0" bIns="0" rtlCol="0" anchor="ctr"/>
+          <a:lstStyle/>
+          <a:p>
+            <a:pPr algn="ctr" indent="0" marL="0">
+              <a:buNone/>
+            </a:pPr>
+            <a:r>
+              <a:rPr lang="en-US" sz="1000" dirty="0">
+                <a:solidFill>
+                  <a:srgbClr val="003A63"/>
+                </a:solidFill>
+                <a:latin typeface="Aptos" pitchFamily="34" charset="0"/>
+                <a:ea typeface="Aptos" pitchFamily="34" charset="-122"/>
+                <a:cs typeface="Aptos" pitchFamily="34" charset="-120"/>
+              </a:rPr>
+              <a:t>Concept to action</a:t>
+            </a:r>
+            <a:endParaRPr lang="en-US" sz="1000" dirty="0"/>
+          </a:p>
+        </p:txBody>
+      </p:sp>
+      <p:sp>
+        <p:nvSpPr>
+          <p:cNvPr id="18" name="Shape 16"/>
+          <p:cNvSpPr/>
+          <p:nvPr/>
+        </p:nvSpPr>
+        <p:spPr>
+          <a:xfrm>
+            <a:off x="7635240" y="4498848"/>
+            <a:ext cx="3474720" cy="1143000"/>
+          </a:xfrm>
+          <a:prstGeom prst="roundRect">
+            <a:avLst>
+              <a:gd name="adj" fmla="val 9600"/>
             </a:avLst>
           </a:prstGeom>
           <a:solidFill>
@@ -10981,14 +12280,14 @@
       </p:sp>
       <p:sp>
         <p:nvSpPr>
-          <p:cNvPr id="16" name="Text 14"/>
-          <p:cNvSpPr/>
-          <p:nvPr/>
-        </p:nvSpPr>
-        <p:spPr>
-          <a:xfrm>
-            <a:off x="8074152" y="3666744"/>
-            <a:ext cx="2825496" cy="256032"/>
+          <p:cNvPr id="19" name="Text 17"/>
+          <p:cNvSpPr/>
+          <p:nvPr/>
+        </p:nvSpPr>
+        <p:spPr>
+          <a:xfrm>
+            <a:off x="7799832" y="4645152"/>
+            <a:ext cx="3145536" cy="256032"/>
           </a:xfrm>
           <a:prstGeom prst="rect">
             <a:avLst/>
@@ -11012,7 +12311,7 @@
                 <a:ea typeface="Aptos" pitchFamily="34" charset="-122"/>
                 <a:cs typeface="Aptos" pitchFamily="34" charset="-120"/>
               </a:rPr>
-              <a:t>Use this for</a:t>
+              <a:t>What to produce</a:t>
             </a:r>
             <a:endParaRPr lang="en-US" sz="1300" dirty="0"/>
           </a:p>
@@ -11020,14 +12319,14 @@
       </p:sp>
       <p:sp>
         <p:nvSpPr>
-          <p:cNvPr id="17" name="Text 15"/>
-          <p:cNvSpPr/>
-          <p:nvPr/>
-        </p:nvSpPr>
-        <p:spPr>
-          <a:xfrm>
-            <a:off x="8074152" y="4023360"/>
-            <a:ext cx="2825496" cy="1097280"/>
+          <p:cNvPr id="20" name="Text 18"/>
+          <p:cNvSpPr/>
+          <p:nvPr/>
+        </p:nvSpPr>
+        <p:spPr>
+          <a:xfrm>
+            <a:off x="7799832" y="5001768"/>
+            <a:ext cx="3145536" cy="502920"/>
           </a:xfrm>
           <a:prstGeom prst="rect">
             <a:avLst/>
@@ -11053,7 +12352,7 @@
                 <a:ea typeface="Aptos" pitchFamily="34" charset="-122"/>
                 <a:cs typeface="Aptos" pitchFamily="34" charset="-120"/>
               </a:rPr>
-              <a:t>Connect the concept to public health decisions, safeguards, documentation, or implementation work.</a:t>
+              <a:t>Use the assignment to test whether you can explain the concept, apply it to a realistic public health situation, and identify what would need review before the work moves forward.</a:t>
             </a:r>
             <a:endParaRPr lang="en-US" sz="1550" dirty="0"/>
           </a:p>
@@ -11227,8 +12526,8 @@
         </p:nvSpPr>
         <p:spPr>
           <a:xfrm>
-            <a:off x="9966960" y="6537960"/>
-            <a:ext cx="1645920" cy="201168"/>
+            <a:off x="9646920" y="6537960"/>
+            <a:ext cx="1965960" cy="201168"/>
           </a:xfrm>
           <a:prstGeom prst="rect">
             <a:avLst/>
@@ -11252,7 +12551,7 @@
                 <a:ea typeface="Aptos" pitchFamily="34" charset="-122"/>
                 <a:cs typeface="Aptos" pitchFamily="34" charset="-120"/>
               </a:rPr>
-              <a:t>Â© Paula Soper</a:t>
+              <a:t>Copyright Paula Soper</a:t>
             </a:r>
             <a:endParaRPr lang="en-US" sz="800" dirty="0"/>
           </a:p>
@@ -11299,77 +12598,13 @@
       </p:sp>
       <p:sp>
         <p:nvSpPr>
-          <p:cNvPr id="8" name="Shape 6"/>
+          <p:cNvPr id="8" name="Text 6"/>
           <p:cNvSpPr/>
           <p:nvPr/>
         </p:nvSpPr>
         <p:spPr>
           <a:xfrm>
             <a:off x="640080" y="658368"/>
-            <a:ext cx="420624" cy="420624"/>
-          </a:xfrm>
-          <a:prstGeom prst="ellipse">
-            <a:avLst/>
-          </a:prstGeom>
-          <a:solidFill>
-            <a:srgbClr val="0068B7"/>
-          </a:solidFill>
-          <a:ln w="12700">
-            <a:solidFill>
-              <a:srgbClr val="0068B7"/>
-            </a:solidFill>
-            <a:prstDash val="solid"/>
-          </a:ln>
-        </p:spPr>
-      </p:sp>
-      <p:sp>
-        <p:nvSpPr>
-          <p:cNvPr id="9" name="Text 7"/>
-          <p:cNvSpPr/>
-          <p:nvPr/>
-        </p:nvSpPr>
-        <p:spPr>
-          <a:xfrm>
-            <a:off x="640080" y="731520"/>
-            <a:ext cx="420624" cy="164592"/>
-          </a:xfrm>
-          <a:prstGeom prst="rect">
-            <a:avLst/>
-          </a:prstGeom>
-          <a:noFill/>
-          <a:ln/>
-        </p:spPr>
-        <p:txBody>
-          <a:bodyPr wrap="square" lIns="0" tIns="0" rIns="0" bIns="0" rtlCol="0" anchor="ctr"/>
-          <a:lstStyle/>
-          <a:p>
-            <a:pPr algn="ctr" indent="0" marL="0">
-              <a:buNone/>
-            </a:pPr>
-            <a:r>
-              <a:rPr lang="en-US" sz="1100" b="1" dirty="0">
-                <a:solidFill>
-                  <a:srgbClr val="FFFFFF"/>
-                </a:solidFill>
-                <a:latin typeface="Aptos" pitchFamily="34" charset="0"/>
-                <a:ea typeface="Aptos" pitchFamily="34" charset="-122"/>
-                <a:cs typeface="Aptos" pitchFamily="34" charset="-120"/>
-              </a:rPr>
-              <a:t>14</a:t>
-            </a:r>
-            <a:endParaRPr lang="en-US" sz="1100" dirty="0"/>
-          </a:p>
-        </p:txBody>
-      </p:sp>
-      <p:sp>
-        <p:nvSpPr>
-          <p:cNvPr id="10" name="Text 8"/>
-          <p:cNvSpPr/>
-          <p:nvPr/>
-        </p:nvSpPr>
-        <p:spPr>
-          <a:xfrm>
-            <a:off x="640080" y="621792"/>
             <a:ext cx="10881360" cy="713232"/>
           </a:xfrm>
           <a:prstGeom prst="rect">
@@ -11404,14 +12639,14 @@
       </p:sp>
       <p:sp>
         <p:nvSpPr>
-          <p:cNvPr id="11" name="Text 9"/>
+          <p:cNvPr id="9" name="Text 7"/>
           <p:cNvSpPr/>
           <p:nvPr/>
         </p:nvSpPr>
         <p:spPr>
           <a:xfrm>
             <a:off x="868680" y="1508760"/>
-            <a:ext cx="6537960" cy="4160520"/>
+            <a:ext cx="6309360" cy="4160520"/>
           </a:xfrm>
           <a:prstGeom prst="rect">
             <a:avLst/>
@@ -11470,18 +12705,18 @@
       </p:sp>
       <p:sp>
         <p:nvSpPr>
-          <p:cNvPr id="12" name="Shape 10"/>
-          <p:cNvSpPr/>
-          <p:nvPr/>
-        </p:nvSpPr>
-        <p:spPr>
-          <a:xfrm>
-            <a:off x="7909560" y="1417320"/>
-            <a:ext cx="3154680" cy="1828800"/>
+          <p:cNvPr id="10" name="Shape 8"/>
+          <p:cNvSpPr/>
+          <p:nvPr/>
+        </p:nvSpPr>
+        <p:spPr>
+          <a:xfrm>
+            <a:off x="7635240" y="1325880"/>
+            <a:ext cx="3474720" cy="1325880"/>
           </a:xfrm>
           <a:prstGeom prst="roundRect">
             <a:avLst>
-              <a:gd name="adj" fmla="val 6000"/>
+              <a:gd name="adj" fmla="val 8276"/>
             </a:avLst>
           </a:prstGeom>
           <a:solidFill>
@@ -11497,14 +12732,14 @@
       </p:sp>
       <p:sp>
         <p:nvSpPr>
-          <p:cNvPr id="13" name="Text 11"/>
-          <p:cNvSpPr/>
-          <p:nvPr/>
-        </p:nvSpPr>
-        <p:spPr>
-          <a:xfrm>
-            <a:off x="8074152" y="1563624"/>
-            <a:ext cx="2825496" cy="256032"/>
+          <p:cNvPr id="11" name="Text 9"/>
+          <p:cNvSpPr/>
+          <p:nvPr/>
+        </p:nvSpPr>
+        <p:spPr>
+          <a:xfrm>
+            <a:off x="7799832" y="1472184"/>
+            <a:ext cx="3145536" cy="256032"/>
           </a:xfrm>
           <a:prstGeom prst="rect">
             <a:avLst/>
@@ -11528,7 +12763,7 @@
                 <a:ea typeface="Aptos" pitchFamily="34" charset="-122"/>
                 <a:cs typeface="Aptos" pitchFamily="34" charset="-120"/>
               </a:rPr>
-              <a:t>Key idea</a:t>
+              <a:t>Practice focus</a:t>
             </a:r>
             <a:endParaRPr lang="en-US" sz="1300" dirty="0"/>
           </a:p>
@@ -11536,14 +12771,14 @@
       </p:sp>
       <p:sp>
         <p:nvSpPr>
-          <p:cNvPr id="14" name="Text 12"/>
-          <p:cNvSpPr/>
-          <p:nvPr/>
-        </p:nvSpPr>
-        <p:spPr>
-          <a:xfrm>
-            <a:off x="8074152" y="1920240"/>
-            <a:ext cx="2825496" cy="1188720"/>
+          <p:cNvPr id="12" name="Text 10"/>
+          <p:cNvSpPr/>
+          <p:nvPr/>
+        </p:nvSpPr>
+        <p:spPr>
+          <a:xfrm>
+            <a:off x="7799832" y="1828800"/>
+            <a:ext cx="3145536" cy="685800"/>
           </a:xfrm>
           <a:prstGeom prst="rect">
             <a:avLst/>
@@ -11577,18 +12812,159 @@
       </p:sp>
       <p:sp>
         <p:nvSpPr>
-          <p:cNvPr id="15" name="Shape 13"/>
-          <p:cNvSpPr/>
-          <p:nvPr/>
-        </p:nvSpPr>
-        <p:spPr>
-          <a:xfrm>
-            <a:off x="7909560" y="3520440"/>
-            <a:ext cx="3154680" cy="1737360"/>
+          <p:cNvPr id="13" name="Shape 11"/>
+          <p:cNvSpPr/>
+          <p:nvPr/>
+        </p:nvSpPr>
+        <p:spPr>
+          <a:xfrm>
+            <a:off x="7635240" y="2788920"/>
+            <a:ext cx="3474720" cy="1536192"/>
           </a:xfrm>
           <a:prstGeom prst="roundRect">
             <a:avLst>
-              <a:gd name="adj" fmla="val 6316"/>
+              <a:gd name="adj" fmla="val 7143"/>
+            </a:avLst>
+          </a:prstGeom>
+          <a:solidFill>
+            <a:srgbClr val="FFFFFF">
+              <a:alpha val="88000"/>
+            </a:srgbClr>
+          </a:solidFill>
+          <a:ln w="12700">
+            <a:solidFill>
+              <a:srgbClr val="D6E8F2"/>
+            </a:solidFill>
+            <a:prstDash val="solid"/>
+          </a:ln>
+        </p:spPr>
+      </p:sp>
+      <p:sp>
+        <p:nvSpPr>
+          <p:cNvPr id="14" name="Shape 12"/>
+          <p:cNvSpPr/>
+          <p:nvPr/>
+        </p:nvSpPr>
+        <p:spPr>
+          <a:xfrm>
+            <a:off x="8074152" y="3291840"/>
+            <a:ext cx="2596896" cy="749808"/>
+          </a:xfrm>
+          <a:prstGeom prst="rect">
+            <a:avLst/>
+          </a:prstGeom>
+          <a:solidFill>
+            <a:srgbClr val="EAF6F8"/>
+          </a:solidFill>
+          <a:ln w="12700">
+            <a:solidFill>
+              <a:srgbClr val="8ABBD8"/>
+            </a:solidFill>
+            <a:prstDash val="solid"/>
+          </a:ln>
+        </p:spPr>
+      </p:sp>
+      <p:sp>
+        <p:nvSpPr>
+          <p:cNvPr id="15" name="Shape 13"/>
+          <p:cNvSpPr/>
+          <p:nvPr/>
+        </p:nvSpPr>
+        <p:spPr>
+          <a:xfrm>
+            <a:off x="8202168" y="3721608"/>
+            <a:ext cx="2340864" cy="0"/>
+          </a:xfrm>
+          <a:prstGeom prst="line">
+            <a:avLst/>
+          </a:prstGeom>
+          <a:noFill/>
+          <a:ln w="19050">
+            <a:solidFill>
+              <a:srgbClr val="0068B7"/>
+            </a:solidFill>
+            <a:prstDash val="solid"/>
+          </a:ln>
+        </p:spPr>
+      </p:sp>
+      <p:sp>
+        <p:nvSpPr>
+          <p:cNvPr id="16" name="Shape 14"/>
+          <p:cNvSpPr/>
+          <p:nvPr/>
+        </p:nvSpPr>
+        <p:spPr>
+          <a:xfrm>
+            <a:off x="9198864" y="4206240"/>
+            <a:ext cx="347472" cy="347472"/>
+          </a:xfrm>
+          <a:prstGeom prst="ellipse">
+            <a:avLst/>
+          </a:prstGeom>
+          <a:solidFill>
+            <a:srgbClr val="2F8A28"/>
+          </a:solidFill>
+          <a:ln w="12700">
+            <a:solidFill>
+              <a:srgbClr val="2F8A28"/>
+            </a:solidFill>
+            <a:prstDash val="solid"/>
+          </a:ln>
+        </p:spPr>
+      </p:sp>
+      <p:sp>
+        <p:nvSpPr>
+          <p:cNvPr id="17" name="Text 15"/>
+          <p:cNvSpPr/>
+          <p:nvPr/>
+        </p:nvSpPr>
+        <p:spPr>
+          <a:xfrm>
+            <a:off x="7909560" y="3977640"/>
+            <a:ext cx="2926080" cy="182880"/>
+          </a:xfrm>
+          <a:prstGeom prst="rect">
+            <a:avLst/>
+          </a:prstGeom>
+          <a:noFill/>
+          <a:ln/>
+        </p:spPr>
+        <p:txBody>
+          <a:bodyPr wrap="square" lIns="0" tIns="0" rIns="0" bIns="0" rtlCol="0" anchor="ctr"/>
+          <a:lstStyle/>
+          <a:p>
+            <a:pPr algn="ctr" indent="0" marL="0">
+              <a:buNone/>
+            </a:pPr>
+            <a:r>
+              <a:rPr lang="en-US" sz="1000" dirty="0">
+                <a:solidFill>
+                  <a:srgbClr val="003A63"/>
+                </a:solidFill>
+                <a:latin typeface="Aptos" pitchFamily="34" charset="0"/>
+                <a:ea typeface="Aptos" pitchFamily="34" charset="-122"/>
+                <a:cs typeface="Aptos" pitchFamily="34" charset="-120"/>
+              </a:rPr>
+              <a:t>Concept to action</a:t>
+            </a:r>
+            <a:endParaRPr lang="en-US" sz="1000" dirty="0"/>
+          </a:p>
+        </p:txBody>
+      </p:sp>
+      <p:sp>
+        <p:nvSpPr>
+          <p:cNvPr id="18" name="Shape 16"/>
+          <p:cNvSpPr/>
+          <p:nvPr/>
+        </p:nvSpPr>
+        <p:spPr>
+          <a:xfrm>
+            <a:off x="7635240" y="4498848"/>
+            <a:ext cx="3474720" cy="1143000"/>
+          </a:xfrm>
+          <a:prstGeom prst="roundRect">
+            <a:avLst>
+              <a:gd name="adj" fmla="val 9600"/>
             </a:avLst>
           </a:prstGeom>
           <a:solidFill>
@@ -11604,14 +12980,14 @@
       </p:sp>
       <p:sp>
         <p:nvSpPr>
-          <p:cNvPr id="16" name="Text 14"/>
-          <p:cNvSpPr/>
-          <p:nvPr/>
-        </p:nvSpPr>
-        <p:spPr>
-          <a:xfrm>
-            <a:off x="8074152" y="3666744"/>
-            <a:ext cx="2825496" cy="256032"/>
+          <p:cNvPr id="19" name="Text 17"/>
+          <p:cNvSpPr/>
+          <p:nvPr/>
+        </p:nvSpPr>
+        <p:spPr>
+          <a:xfrm>
+            <a:off x="7799832" y="4645152"/>
+            <a:ext cx="3145536" cy="256032"/>
           </a:xfrm>
           <a:prstGeom prst="rect">
             <a:avLst/>
@@ -11635,7 +13011,7 @@
                 <a:ea typeface="Aptos" pitchFamily="34" charset="-122"/>
                 <a:cs typeface="Aptos" pitchFamily="34" charset="-120"/>
               </a:rPr>
-              <a:t>Use this for</a:t>
+              <a:t>What to produce</a:t>
             </a:r>
             <a:endParaRPr lang="en-US" sz="1300" dirty="0"/>
           </a:p>
@@ -11643,14 +13019,14 @@
       </p:sp>
       <p:sp>
         <p:nvSpPr>
-          <p:cNvPr id="17" name="Text 15"/>
-          <p:cNvSpPr/>
-          <p:nvPr/>
-        </p:nvSpPr>
-        <p:spPr>
-          <a:xfrm>
-            <a:off x="8074152" y="4023360"/>
-            <a:ext cx="2825496" cy="1097280"/>
+          <p:cNvPr id="20" name="Text 18"/>
+          <p:cNvSpPr/>
+          <p:nvPr/>
+        </p:nvSpPr>
+        <p:spPr>
+          <a:xfrm>
+            <a:off x="7799832" y="5001768"/>
+            <a:ext cx="3145536" cy="502920"/>
           </a:xfrm>
           <a:prstGeom prst="rect">
             <a:avLst/>
@@ -11676,7 +13052,7 @@
                 <a:ea typeface="Aptos" pitchFamily="34" charset="-122"/>
                 <a:cs typeface="Aptos" pitchFamily="34" charset="-120"/>
               </a:rPr>
-              <a:t>Connect the concept to public health decisions, safeguards, documentation, or implementation work.</a:t>
+              <a:t>Use the assignment to test whether you can explain the concept, apply it to a realistic public health situation, and identify what would need review before the work moves forward.</a:t>
             </a:r>
             <a:endParaRPr lang="en-US" sz="1550" dirty="0"/>
           </a:p>
@@ -11850,8 +13226,8 @@
         </p:nvSpPr>
         <p:spPr>
           <a:xfrm>
-            <a:off x="9966960" y="6537960"/>
-            <a:ext cx="1645920" cy="201168"/>
+            <a:off x="9646920" y="6537960"/>
+            <a:ext cx="1965960" cy="201168"/>
           </a:xfrm>
           <a:prstGeom prst="rect">
             <a:avLst/>
@@ -11875,7 +13251,7 @@
                 <a:ea typeface="Aptos" pitchFamily="34" charset="-122"/>
                 <a:cs typeface="Aptos" pitchFamily="34" charset="-120"/>
               </a:rPr>
-              <a:t>Â© Paula Soper</a:t>
+              <a:t>Copyright Paula Soper</a:t>
             </a:r>
             <a:endParaRPr lang="en-US" sz="800" dirty="0"/>
           </a:p>
@@ -11922,77 +13298,13 @@
       </p:sp>
       <p:sp>
         <p:nvSpPr>
-          <p:cNvPr id="8" name="Shape 6"/>
+          <p:cNvPr id="8" name="Text 6"/>
           <p:cNvSpPr/>
           <p:nvPr/>
         </p:nvSpPr>
         <p:spPr>
           <a:xfrm>
             <a:off x="640080" y="658368"/>
-            <a:ext cx="420624" cy="420624"/>
-          </a:xfrm>
-          <a:prstGeom prst="ellipse">
-            <a:avLst/>
-          </a:prstGeom>
-          <a:solidFill>
-            <a:srgbClr val="0068B7"/>
-          </a:solidFill>
-          <a:ln w="12700">
-            <a:solidFill>
-              <a:srgbClr val="0068B7"/>
-            </a:solidFill>
-            <a:prstDash val="solid"/>
-          </a:ln>
-        </p:spPr>
-      </p:sp>
-      <p:sp>
-        <p:nvSpPr>
-          <p:cNvPr id="9" name="Text 7"/>
-          <p:cNvSpPr/>
-          <p:nvPr/>
-        </p:nvSpPr>
-        <p:spPr>
-          <a:xfrm>
-            <a:off x="640080" y="731520"/>
-            <a:ext cx="420624" cy="164592"/>
-          </a:xfrm>
-          <a:prstGeom prst="rect">
-            <a:avLst/>
-          </a:prstGeom>
-          <a:noFill/>
-          <a:ln/>
-        </p:spPr>
-        <p:txBody>
-          <a:bodyPr wrap="square" lIns="0" tIns="0" rIns="0" bIns="0" rtlCol="0" anchor="ctr"/>
-          <a:lstStyle/>
-          <a:p>
-            <a:pPr algn="ctr" indent="0" marL="0">
-              <a:buNone/>
-            </a:pPr>
-            <a:r>
-              <a:rPr lang="en-US" sz="1100" b="1" dirty="0">
-                <a:solidFill>
-                  <a:srgbClr val="FFFFFF"/>
-                </a:solidFill>
-                <a:latin typeface="Aptos" pitchFamily="34" charset="0"/>
-                <a:ea typeface="Aptos" pitchFamily="34" charset="-122"/>
-                <a:cs typeface="Aptos" pitchFamily="34" charset="-120"/>
-              </a:rPr>
-              <a:t>15</a:t>
-            </a:r>
-            <a:endParaRPr lang="en-US" sz="1100" dirty="0"/>
-          </a:p>
-        </p:txBody>
-      </p:sp>
-      <p:sp>
-        <p:nvSpPr>
-          <p:cNvPr id="10" name="Text 8"/>
-          <p:cNvSpPr/>
-          <p:nvPr/>
-        </p:nvSpPr>
-        <p:spPr>
-          <a:xfrm>
-            <a:off x="640080" y="621792"/>
             <a:ext cx="10881360" cy="713232"/>
           </a:xfrm>
           <a:prstGeom prst="rect">
@@ -12027,14 +13339,14 @@
       </p:sp>
       <p:sp>
         <p:nvSpPr>
-          <p:cNvPr id="11" name="Text 9"/>
+          <p:cNvPr id="9" name="Text 7"/>
           <p:cNvSpPr/>
           <p:nvPr/>
         </p:nvSpPr>
         <p:spPr>
           <a:xfrm>
             <a:off x="868680" y="1508760"/>
-            <a:ext cx="6537960" cy="4160520"/>
+            <a:ext cx="6309360" cy="4160520"/>
           </a:xfrm>
           <a:prstGeom prst="rect">
             <a:avLst/>
@@ -12093,18 +13405,18 @@
       </p:sp>
       <p:sp>
         <p:nvSpPr>
-          <p:cNvPr id="12" name="Shape 10"/>
-          <p:cNvSpPr/>
-          <p:nvPr/>
-        </p:nvSpPr>
-        <p:spPr>
-          <a:xfrm>
-            <a:off x="7909560" y="1417320"/>
-            <a:ext cx="3154680" cy="1828800"/>
+          <p:cNvPr id="10" name="Shape 8"/>
+          <p:cNvSpPr/>
+          <p:nvPr/>
+        </p:nvSpPr>
+        <p:spPr>
+          <a:xfrm>
+            <a:off x="7635240" y="1325880"/>
+            <a:ext cx="3474720" cy="1325880"/>
           </a:xfrm>
           <a:prstGeom prst="roundRect">
             <a:avLst>
-              <a:gd name="adj" fmla="val 6000"/>
+              <a:gd name="adj" fmla="val 8276"/>
             </a:avLst>
           </a:prstGeom>
           <a:solidFill>
@@ -12120,14 +13432,14 @@
       </p:sp>
       <p:sp>
         <p:nvSpPr>
-          <p:cNvPr id="13" name="Text 11"/>
-          <p:cNvSpPr/>
-          <p:nvPr/>
-        </p:nvSpPr>
-        <p:spPr>
-          <a:xfrm>
-            <a:off x="8074152" y="1563624"/>
-            <a:ext cx="2825496" cy="256032"/>
+          <p:cNvPr id="11" name="Text 9"/>
+          <p:cNvSpPr/>
+          <p:nvPr/>
+        </p:nvSpPr>
+        <p:spPr>
+          <a:xfrm>
+            <a:off x="7799832" y="1472184"/>
+            <a:ext cx="3145536" cy="256032"/>
           </a:xfrm>
           <a:prstGeom prst="rect">
             <a:avLst/>
@@ -12151,7 +13463,7 @@
                 <a:ea typeface="Aptos" pitchFamily="34" charset="-122"/>
                 <a:cs typeface="Aptos" pitchFamily="34" charset="-120"/>
               </a:rPr>
-              <a:t>Key idea</a:t>
+              <a:t>Core concept</a:t>
             </a:r>
             <a:endParaRPr lang="en-US" sz="1300" dirty="0"/>
           </a:p>
@@ -12159,14 +13471,14 @@
       </p:sp>
       <p:sp>
         <p:nvSpPr>
-          <p:cNvPr id="14" name="Text 12"/>
-          <p:cNvSpPr/>
-          <p:nvPr/>
-        </p:nvSpPr>
-        <p:spPr>
-          <a:xfrm>
-            <a:off x="8074152" y="1920240"/>
-            <a:ext cx="2825496" cy="1188720"/>
+          <p:cNvPr id="12" name="Text 10"/>
+          <p:cNvSpPr/>
+          <p:nvPr/>
+        </p:nvSpPr>
+        <p:spPr>
+          <a:xfrm>
+            <a:off x="7799832" y="1828800"/>
+            <a:ext cx="3145536" cy="685800"/>
           </a:xfrm>
           <a:prstGeom prst="rect">
             <a:avLst/>
@@ -12200,18 +13512,159 @@
       </p:sp>
       <p:sp>
         <p:nvSpPr>
-          <p:cNvPr id="15" name="Shape 13"/>
-          <p:cNvSpPr/>
-          <p:nvPr/>
-        </p:nvSpPr>
-        <p:spPr>
-          <a:xfrm>
-            <a:off x="7909560" y="3520440"/>
-            <a:ext cx="3154680" cy="1737360"/>
+          <p:cNvPr id="13" name="Shape 11"/>
+          <p:cNvSpPr/>
+          <p:nvPr/>
+        </p:nvSpPr>
+        <p:spPr>
+          <a:xfrm>
+            <a:off x="7635240" y="2788920"/>
+            <a:ext cx="3474720" cy="1536192"/>
           </a:xfrm>
           <a:prstGeom prst="roundRect">
             <a:avLst>
-              <a:gd name="adj" fmla="val 6316"/>
+              <a:gd name="adj" fmla="val 7143"/>
+            </a:avLst>
+          </a:prstGeom>
+          <a:solidFill>
+            <a:srgbClr val="FFFFFF">
+              <a:alpha val="88000"/>
+            </a:srgbClr>
+          </a:solidFill>
+          <a:ln w="12700">
+            <a:solidFill>
+              <a:srgbClr val="D6E8F2"/>
+            </a:solidFill>
+            <a:prstDash val="solid"/>
+          </a:ln>
+        </p:spPr>
+      </p:sp>
+      <p:sp>
+        <p:nvSpPr>
+          <p:cNvPr id="14" name="Shape 12"/>
+          <p:cNvSpPr/>
+          <p:nvPr/>
+        </p:nvSpPr>
+        <p:spPr>
+          <a:xfrm>
+            <a:off x="8074152" y="3291840"/>
+            <a:ext cx="2596896" cy="749808"/>
+          </a:xfrm>
+          <a:prstGeom prst="rect">
+            <a:avLst/>
+          </a:prstGeom>
+          <a:solidFill>
+            <a:srgbClr val="EAF6F8"/>
+          </a:solidFill>
+          <a:ln w="12700">
+            <a:solidFill>
+              <a:srgbClr val="8ABBD8"/>
+            </a:solidFill>
+            <a:prstDash val="solid"/>
+          </a:ln>
+        </p:spPr>
+      </p:sp>
+      <p:sp>
+        <p:nvSpPr>
+          <p:cNvPr id="15" name="Shape 13"/>
+          <p:cNvSpPr/>
+          <p:nvPr/>
+        </p:nvSpPr>
+        <p:spPr>
+          <a:xfrm>
+            <a:off x="8202168" y="3721608"/>
+            <a:ext cx="2340864" cy="0"/>
+          </a:xfrm>
+          <a:prstGeom prst="line">
+            <a:avLst/>
+          </a:prstGeom>
+          <a:noFill/>
+          <a:ln w="19050">
+            <a:solidFill>
+              <a:srgbClr val="0068B7"/>
+            </a:solidFill>
+            <a:prstDash val="solid"/>
+          </a:ln>
+        </p:spPr>
+      </p:sp>
+      <p:sp>
+        <p:nvSpPr>
+          <p:cNvPr id="16" name="Shape 14"/>
+          <p:cNvSpPr/>
+          <p:nvPr/>
+        </p:nvSpPr>
+        <p:spPr>
+          <a:xfrm>
+            <a:off x="9198864" y="4206240"/>
+            <a:ext cx="347472" cy="347472"/>
+          </a:xfrm>
+          <a:prstGeom prst="ellipse">
+            <a:avLst/>
+          </a:prstGeom>
+          <a:solidFill>
+            <a:srgbClr val="2F8A28"/>
+          </a:solidFill>
+          <a:ln w="12700">
+            <a:solidFill>
+              <a:srgbClr val="2F8A28"/>
+            </a:solidFill>
+            <a:prstDash val="solid"/>
+          </a:ln>
+        </p:spPr>
+      </p:sp>
+      <p:sp>
+        <p:nvSpPr>
+          <p:cNvPr id="17" name="Text 15"/>
+          <p:cNvSpPr/>
+          <p:nvPr/>
+        </p:nvSpPr>
+        <p:spPr>
+          <a:xfrm>
+            <a:off x="7909560" y="3977640"/>
+            <a:ext cx="2926080" cy="182880"/>
+          </a:xfrm>
+          <a:prstGeom prst="rect">
+            <a:avLst/>
+          </a:prstGeom>
+          <a:noFill/>
+          <a:ln/>
+        </p:spPr>
+        <p:txBody>
+          <a:bodyPr wrap="square" lIns="0" tIns="0" rIns="0" bIns="0" rtlCol="0" anchor="ctr"/>
+          <a:lstStyle/>
+          <a:p>
+            <a:pPr algn="ctr" indent="0" marL="0">
+              <a:buNone/>
+            </a:pPr>
+            <a:r>
+              <a:rPr lang="en-US" sz="1000" dirty="0">
+                <a:solidFill>
+                  <a:srgbClr val="003A63"/>
+                </a:solidFill>
+                <a:latin typeface="Aptos" pitchFamily="34" charset="0"/>
+                <a:ea typeface="Aptos" pitchFamily="34" charset="-122"/>
+                <a:cs typeface="Aptos" pitchFamily="34" charset="-120"/>
+              </a:rPr>
+              <a:t>Concept to action</a:t>
+            </a:r>
+            <a:endParaRPr lang="en-US" sz="1000" dirty="0"/>
+          </a:p>
+        </p:txBody>
+      </p:sp>
+      <p:sp>
+        <p:nvSpPr>
+          <p:cNvPr id="18" name="Shape 16"/>
+          <p:cNvSpPr/>
+          <p:nvPr/>
+        </p:nvSpPr>
+        <p:spPr>
+          <a:xfrm>
+            <a:off x="7635240" y="4498848"/>
+            <a:ext cx="3474720" cy="1143000"/>
+          </a:xfrm>
+          <a:prstGeom prst="roundRect">
+            <a:avLst>
+              <a:gd name="adj" fmla="val 9600"/>
             </a:avLst>
           </a:prstGeom>
           <a:solidFill>
@@ -12227,14 +13680,14 @@
       </p:sp>
       <p:sp>
         <p:nvSpPr>
-          <p:cNvPr id="16" name="Text 14"/>
-          <p:cNvSpPr/>
-          <p:nvPr/>
-        </p:nvSpPr>
-        <p:spPr>
-          <a:xfrm>
-            <a:off x="8074152" y="3666744"/>
-            <a:ext cx="2825496" cy="256032"/>
+          <p:cNvPr id="19" name="Text 17"/>
+          <p:cNvSpPr/>
+          <p:nvPr/>
+        </p:nvSpPr>
+        <p:spPr>
+          <a:xfrm>
+            <a:off x="7799832" y="4645152"/>
+            <a:ext cx="3145536" cy="256032"/>
           </a:xfrm>
           <a:prstGeom prst="rect">
             <a:avLst/>
@@ -12258,7 +13711,7 @@
                 <a:ea typeface="Aptos" pitchFamily="34" charset="-122"/>
                 <a:cs typeface="Aptos" pitchFamily="34" charset="-120"/>
               </a:rPr>
-              <a:t>Use this for</a:t>
+              <a:t>Apply it</a:t>
             </a:r>
             <a:endParaRPr lang="en-US" sz="1300" dirty="0"/>
           </a:p>
@@ -12266,14 +13719,14 @@
       </p:sp>
       <p:sp>
         <p:nvSpPr>
-          <p:cNvPr id="17" name="Text 15"/>
-          <p:cNvSpPr/>
-          <p:nvPr/>
-        </p:nvSpPr>
-        <p:spPr>
-          <a:xfrm>
-            <a:off x="8074152" y="4023360"/>
-            <a:ext cx="2825496" cy="1097280"/>
+          <p:cNvPr id="20" name="Text 18"/>
+          <p:cNvSpPr/>
+          <p:nvPr/>
+        </p:nvSpPr>
+        <p:spPr>
+          <a:xfrm>
+            <a:off x="7799832" y="5001768"/>
+            <a:ext cx="3145536" cy="502920"/>
           </a:xfrm>
           <a:prstGeom prst="rect">
             <a:avLst/>
@@ -12299,7 +13752,7 @@
                 <a:ea typeface="Aptos" pitchFamily="34" charset="-122"/>
                 <a:cs typeface="Aptos" pitchFamily="34" charset="-120"/>
               </a:rPr>
-              <a:t>Connect the concept to public health decisions, safeguards, documentation, or implementation work.</a:t>
+              <a:t>Connect the concept to public health purpose, responsible use, required safeguards, documentation, and the next action a department should take.</a:t>
             </a:r>
             <a:endParaRPr lang="en-US" sz="1550" dirty="0"/>
           </a:p>
@@ -12473,8 +13926,8 @@
         </p:nvSpPr>
         <p:spPr>
           <a:xfrm>
-            <a:off x="9966960" y="6537960"/>
-            <a:ext cx="1645920" cy="201168"/>
+            <a:off x="9646920" y="6537960"/>
+            <a:ext cx="1965960" cy="201168"/>
           </a:xfrm>
           <a:prstGeom prst="rect">
             <a:avLst/>
@@ -12498,7 +13951,7 @@
                 <a:ea typeface="Aptos" pitchFamily="34" charset="-122"/>
                 <a:cs typeface="Aptos" pitchFamily="34" charset="-120"/>
               </a:rPr>
-              <a:t>Â© Paula Soper</a:t>
+              <a:t>Copyright Paula Soper</a:t>
             </a:r>
             <a:endParaRPr lang="en-US" sz="800" dirty="0"/>
           </a:p>
@@ -12841,46 +14294,7 @@
       </p:sp>
       <p:sp>
         <p:nvSpPr>
-          <p:cNvPr id="15" name="Text 13"/>
-          <p:cNvSpPr/>
-          <p:nvPr/>
-        </p:nvSpPr>
-        <p:spPr>
-          <a:xfrm>
-            <a:off x="8817864" y="4187952"/>
-            <a:ext cx="201168" cy="256032"/>
-          </a:xfrm>
-          <a:prstGeom prst="rect">
-            <a:avLst/>
-          </a:prstGeom>
-          <a:noFill/>
-          <a:ln/>
-        </p:spPr>
-        <p:txBody>
-          <a:bodyPr wrap="square" lIns="0" tIns="0" rIns="0" bIns="0" rtlCol="0" anchor="ctr"/>
-          <a:lstStyle/>
-          <a:p>
-            <a:pPr algn="ctr" indent="0" marL="0">
-              <a:buNone/>
-            </a:pPr>
-            <a:r>
-              <a:rPr lang="en-US" sz="1800" b="1" dirty="0">
-                <a:solidFill>
-                  <a:srgbClr val="0068B7"/>
-                </a:solidFill>
-                <a:latin typeface="Aptos" pitchFamily="34" charset="0"/>
-                <a:ea typeface="Aptos" pitchFamily="34" charset="-122"/>
-                <a:cs typeface="Aptos" pitchFamily="34" charset="-120"/>
-              </a:rPr>
-              <a:t>â†’</a:t>
-            </a:r>
-            <a:endParaRPr lang="en-US" sz="1800" dirty="0"/>
-          </a:p>
-        </p:txBody>
-      </p:sp>
-      <p:sp>
-        <p:nvSpPr>
-          <p:cNvPr id="16" name="Shape 14"/>
+          <p:cNvPr id="15" name="Shape 13"/>
           <p:cNvSpPr/>
           <p:nvPr/>
         </p:nvSpPr>
@@ -12907,7 +14321,7 @@
       </p:sp>
       <p:sp>
         <p:nvSpPr>
-          <p:cNvPr id="17" name="Text 15"/>
+          <p:cNvPr id="16" name="Text 14"/>
           <p:cNvSpPr/>
           <p:nvPr/>
         </p:nvSpPr>
@@ -12948,46 +14362,7 @@
       </p:sp>
       <p:sp>
         <p:nvSpPr>
-          <p:cNvPr id="18" name="Text 16"/>
-          <p:cNvSpPr/>
-          <p:nvPr/>
-        </p:nvSpPr>
-        <p:spPr>
-          <a:xfrm>
-            <a:off x="10046208" y="4187952"/>
-            <a:ext cx="201168" cy="256032"/>
-          </a:xfrm>
-          <a:prstGeom prst="rect">
-            <a:avLst/>
-          </a:prstGeom>
-          <a:noFill/>
-          <a:ln/>
-        </p:spPr>
-        <p:txBody>
-          <a:bodyPr wrap="square" lIns="0" tIns="0" rIns="0" bIns="0" rtlCol="0" anchor="ctr"/>
-          <a:lstStyle/>
-          <a:p>
-            <a:pPr algn="ctr" indent="0" marL="0">
-              <a:buNone/>
-            </a:pPr>
-            <a:r>
-              <a:rPr lang="en-US" sz="1800" b="1" dirty="0">
-                <a:solidFill>
-                  <a:srgbClr val="0068B7"/>
-                </a:solidFill>
-                <a:latin typeface="Aptos" pitchFamily="34" charset="0"/>
-                <a:ea typeface="Aptos" pitchFamily="34" charset="-122"/>
-                <a:cs typeface="Aptos" pitchFamily="34" charset="-120"/>
-              </a:rPr>
-              <a:t>â†’</a:t>
-            </a:r>
-            <a:endParaRPr lang="en-US" sz="1800" dirty="0"/>
-          </a:p>
-        </p:txBody>
-      </p:sp>
-      <p:sp>
-        <p:nvSpPr>
-          <p:cNvPr id="19" name="Shape 17"/>
+          <p:cNvPr id="17" name="Shape 15"/>
           <p:cNvSpPr/>
           <p:nvPr/>
         </p:nvSpPr>
@@ -13014,7 +14389,7 @@
       </p:sp>
       <p:sp>
         <p:nvSpPr>
-          <p:cNvPr id="20" name="Text 18"/>
+          <p:cNvPr id="18" name="Text 16"/>
           <p:cNvSpPr/>
           <p:nvPr/>
         </p:nvSpPr>
@@ -13221,8 +14596,8 @@
         </p:nvSpPr>
         <p:spPr>
           <a:xfrm>
-            <a:off x="9966960" y="6537960"/>
-            <a:ext cx="1645920" cy="201168"/>
+            <a:off x="9646920" y="6537960"/>
+            <a:ext cx="1965960" cy="201168"/>
           </a:xfrm>
           <a:prstGeom prst="rect">
             <a:avLst/>
@@ -13246,7 +14621,7 @@
                 <a:ea typeface="Aptos" pitchFamily="34" charset="-122"/>
                 <a:cs typeface="Aptos" pitchFamily="34" charset="-120"/>
               </a:rPr>
-              <a:t>Â© Paula Soper</a:t>
+              <a:t>Copyright Paula Soper</a:t>
             </a:r>
             <a:endParaRPr lang="en-US" sz="800" dirty="0"/>
           </a:p>
@@ -13589,46 +14964,7 @@
       </p:sp>
       <p:sp>
         <p:nvSpPr>
-          <p:cNvPr id="15" name="Text 13"/>
-          <p:cNvSpPr/>
-          <p:nvPr/>
-        </p:nvSpPr>
-        <p:spPr>
-          <a:xfrm>
-            <a:off x="8817864" y="4187952"/>
-            <a:ext cx="201168" cy="256032"/>
-          </a:xfrm>
-          <a:prstGeom prst="rect">
-            <a:avLst/>
-          </a:prstGeom>
-          <a:noFill/>
-          <a:ln/>
-        </p:spPr>
-        <p:txBody>
-          <a:bodyPr wrap="square" lIns="0" tIns="0" rIns="0" bIns="0" rtlCol="0" anchor="ctr"/>
-          <a:lstStyle/>
-          <a:p>
-            <a:pPr algn="ctr" indent="0" marL="0">
-              <a:buNone/>
-            </a:pPr>
-            <a:r>
-              <a:rPr lang="en-US" sz="1800" b="1" dirty="0">
-                <a:solidFill>
-                  <a:srgbClr val="0068B7"/>
-                </a:solidFill>
-                <a:latin typeface="Aptos" pitchFamily="34" charset="0"/>
-                <a:ea typeface="Aptos" pitchFamily="34" charset="-122"/>
-                <a:cs typeface="Aptos" pitchFamily="34" charset="-120"/>
-              </a:rPr>
-              <a:t>â†’</a:t>
-            </a:r>
-            <a:endParaRPr lang="en-US" sz="1800" dirty="0"/>
-          </a:p>
-        </p:txBody>
-      </p:sp>
-      <p:sp>
-        <p:nvSpPr>
-          <p:cNvPr id="16" name="Shape 14"/>
+          <p:cNvPr id="15" name="Shape 13"/>
           <p:cNvSpPr/>
           <p:nvPr/>
         </p:nvSpPr>
@@ -13655,7 +14991,7 @@
       </p:sp>
       <p:sp>
         <p:nvSpPr>
-          <p:cNvPr id="17" name="Text 15"/>
+          <p:cNvPr id="16" name="Text 14"/>
           <p:cNvSpPr/>
           <p:nvPr/>
         </p:nvSpPr>
@@ -13696,46 +15032,7 @@
       </p:sp>
       <p:sp>
         <p:nvSpPr>
-          <p:cNvPr id="18" name="Text 16"/>
-          <p:cNvSpPr/>
-          <p:nvPr/>
-        </p:nvSpPr>
-        <p:spPr>
-          <a:xfrm>
-            <a:off x="10046208" y="4187952"/>
-            <a:ext cx="201168" cy="256032"/>
-          </a:xfrm>
-          <a:prstGeom prst="rect">
-            <a:avLst/>
-          </a:prstGeom>
-          <a:noFill/>
-          <a:ln/>
-        </p:spPr>
-        <p:txBody>
-          <a:bodyPr wrap="square" lIns="0" tIns="0" rIns="0" bIns="0" rtlCol="0" anchor="ctr"/>
-          <a:lstStyle/>
-          <a:p>
-            <a:pPr algn="ctr" indent="0" marL="0">
-              <a:buNone/>
-            </a:pPr>
-            <a:r>
-              <a:rPr lang="en-US" sz="1800" b="1" dirty="0">
-                <a:solidFill>
-                  <a:srgbClr val="0068B7"/>
-                </a:solidFill>
-                <a:latin typeface="Aptos" pitchFamily="34" charset="0"/>
-                <a:ea typeface="Aptos" pitchFamily="34" charset="-122"/>
-                <a:cs typeface="Aptos" pitchFamily="34" charset="-120"/>
-              </a:rPr>
-              <a:t>â†’</a:t>
-            </a:r>
-            <a:endParaRPr lang="en-US" sz="1800" dirty="0"/>
-          </a:p>
-        </p:txBody>
-      </p:sp>
-      <p:sp>
-        <p:nvSpPr>
-          <p:cNvPr id="19" name="Shape 17"/>
+          <p:cNvPr id="17" name="Shape 15"/>
           <p:cNvSpPr/>
           <p:nvPr/>
         </p:nvSpPr>
@@ -13762,7 +15059,7 @@
       </p:sp>
       <p:sp>
         <p:nvSpPr>
-          <p:cNvPr id="20" name="Text 18"/>
+          <p:cNvPr id="18" name="Text 16"/>
           <p:cNvSpPr/>
           <p:nvPr/>
         </p:nvSpPr>
@@ -13969,8 +15266,8 @@
         </p:nvSpPr>
         <p:spPr>
           <a:xfrm>
-            <a:off x="9966960" y="6537960"/>
-            <a:ext cx="1645920" cy="201168"/>
+            <a:off x="9646920" y="6537960"/>
+            <a:ext cx="1965960" cy="201168"/>
           </a:xfrm>
           <a:prstGeom prst="rect">
             <a:avLst/>
@@ -13994,7 +15291,7 @@
                 <a:ea typeface="Aptos" pitchFamily="34" charset="-122"/>
                 <a:cs typeface="Aptos" pitchFamily="34" charset="-120"/>
               </a:rPr>
-              <a:t>Â© Paula Soper</a:t>
+              <a:t>Copyright Paula Soper</a:t>
             </a:r>
             <a:endParaRPr lang="en-US" sz="800" dirty="0"/>
           </a:p>
@@ -14041,77 +15338,13 @@
       </p:sp>
       <p:sp>
         <p:nvSpPr>
-          <p:cNvPr id="8" name="Shape 6"/>
+          <p:cNvPr id="8" name="Text 6"/>
           <p:cNvSpPr/>
           <p:nvPr/>
         </p:nvSpPr>
         <p:spPr>
           <a:xfrm>
             <a:off x="640080" y="658368"/>
-            <a:ext cx="420624" cy="420624"/>
-          </a:xfrm>
-          <a:prstGeom prst="ellipse">
-            <a:avLst/>
-          </a:prstGeom>
-          <a:solidFill>
-            <a:srgbClr val="0068B7"/>
-          </a:solidFill>
-          <a:ln w="12700">
-            <a:solidFill>
-              <a:srgbClr val="0068B7"/>
-            </a:solidFill>
-            <a:prstDash val="solid"/>
-          </a:ln>
-        </p:spPr>
-      </p:sp>
-      <p:sp>
-        <p:nvSpPr>
-          <p:cNvPr id="9" name="Text 7"/>
-          <p:cNvSpPr/>
-          <p:nvPr/>
-        </p:nvSpPr>
-        <p:spPr>
-          <a:xfrm>
-            <a:off x="640080" y="731520"/>
-            <a:ext cx="420624" cy="164592"/>
-          </a:xfrm>
-          <a:prstGeom prst="rect">
-            <a:avLst/>
-          </a:prstGeom>
-          <a:noFill/>
-          <a:ln/>
-        </p:spPr>
-        <p:txBody>
-          <a:bodyPr wrap="square" lIns="0" tIns="0" rIns="0" bIns="0" rtlCol="0" anchor="ctr"/>
-          <a:lstStyle/>
-          <a:p>
-            <a:pPr algn="ctr" indent="0" marL="0">
-              <a:buNone/>
-            </a:pPr>
-            <a:r>
-              <a:rPr lang="en-US" sz="1100" b="1" dirty="0">
-                <a:solidFill>
-                  <a:srgbClr val="FFFFFF"/>
-                </a:solidFill>
-                <a:latin typeface="Aptos" pitchFamily="34" charset="0"/>
-                <a:ea typeface="Aptos" pitchFamily="34" charset="-122"/>
-                <a:cs typeface="Aptos" pitchFamily="34" charset="-120"/>
-              </a:rPr>
-              <a:t>1</a:t>
-            </a:r>
-            <a:endParaRPr lang="en-US" sz="1100" dirty="0"/>
-          </a:p>
-        </p:txBody>
-      </p:sp>
-      <p:sp>
-        <p:nvSpPr>
-          <p:cNvPr id="10" name="Text 8"/>
-          <p:cNvSpPr/>
-          <p:nvPr/>
-        </p:nvSpPr>
-        <p:spPr>
-          <a:xfrm>
-            <a:off x="640080" y="621792"/>
             <a:ext cx="10881360" cy="713232"/>
           </a:xfrm>
           <a:prstGeom prst="rect">
@@ -14146,14 +15379,14 @@
       </p:sp>
       <p:sp>
         <p:nvSpPr>
-          <p:cNvPr id="11" name="Text 9"/>
+          <p:cNvPr id="9" name="Text 7"/>
           <p:cNvSpPr/>
           <p:nvPr/>
         </p:nvSpPr>
         <p:spPr>
           <a:xfrm>
             <a:off x="868680" y="1508760"/>
-            <a:ext cx="6537960" cy="4160520"/>
+            <a:ext cx="6309360" cy="4160520"/>
           </a:xfrm>
           <a:prstGeom prst="rect">
             <a:avLst/>
@@ -14212,18 +15445,18 @@
       </p:sp>
       <p:sp>
         <p:nvSpPr>
-          <p:cNvPr id="12" name="Shape 10"/>
-          <p:cNvSpPr/>
-          <p:nvPr/>
-        </p:nvSpPr>
-        <p:spPr>
-          <a:xfrm>
-            <a:off x="7909560" y="1417320"/>
-            <a:ext cx="3154680" cy="1828800"/>
+          <p:cNvPr id="10" name="Shape 8"/>
+          <p:cNvSpPr/>
+          <p:nvPr/>
+        </p:nvSpPr>
+        <p:spPr>
+          <a:xfrm>
+            <a:off x="7635240" y="1325880"/>
+            <a:ext cx="3474720" cy="1325880"/>
           </a:xfrm>
           <a:prstGeom prst="roundRect">
             <a:avLst>
-              <a:gd name="adj" fmla="val 6000"/>
+              <a:gd name="adj" fmla="val 8276"/>
             </a:avLst>
           </a:prstGeom>
           <a:solidFill>
@@ -14239,14 +15472,14 @@
       </p:sp>
       <p:sp>
         <p:nvSpPr>
-          <p:cNvPr id="13" name="Text 11"/>
-          <p:cNvSpPr/>
-          <p:nvPr/>
-        </p:nvSpPr>
-        <p:spPr>
-          <a:xfrm>
-            <a:off x="8074152" y="1563624"/>
-            <a:ext cx="2825496" cy="256032"/>
+          <p:cNvPr id="11" name="Text 9"/>
+          <p:cNvSpPr/>
+          <p:nvPr/>
+        </p:nvSpPr>
+        <p:spPr>
+          <a:xfrm>
+            <a:off x="7799832" y="1472184"/>
+            <a:ext cx="3145536" cy="256032"/>
           </a:xfrm>
           <a:prstGeom prst="rect">
             <a:avLst/>
@@ -14270,7 +15503,7 @@
                 <a:ea typeface="Aptos" pitchFamily="34" charset="-122"/>
                 <a:cs typeface="Aptos" pitchFamily="34" charset="-120"/>
               </a:rPr>
-              <a:t>Key idea</a:t>
+              <a:t>Practice focus</a:t>
             </a:r>
             <a:endParaRPr lang="en-US" sz="1300" dirty="0"/>
           </a:p>
@@ -14278,14 +15511,14 @@
       </p:sp>
       <p:sp>
         <p:nvSpPr>
-          <p:cNvPr id="14" name="Text 12"/>
-          <p:cNvSpPr/>
-          <p:nvPr/>
-        </p:nvSpPr>
-        <p:spPr>
-          <a:xfrm>
-            <a:off x="8074152" y="1920240"/>
-            <a:ext cx="2825496" cy="1188720"/>
+          <p:cNvPr id="12" name="Text 10"/>
+          <p:cNvSpPr/>
+          <p:nvPr/>
+        </p:nvSpPr>
+        <p:spPr>
+          <a:xfrm>
+            <a:off x="7799832" y="1828800"/>
+            <a:ext cx="3145536" cy="685800"/>
           </a:xfrm>
           <a:prstGeom prst="rect">
             <a:avLst/>
@@ -14319,18 +15552,159 @@
       </p:sp>
       <p:sp>
         <p:nvSpPr>
-          <p:cNvPr id="15" name="Shape 13"/>
-          <p:cNvSpPr/>
-          <p:nvPr/>
-        </p:nvSpPr>
-        <p:spPr>
-          <a:xfrm>
-            <a:off x="7909560" y="3520440"/>
-            <a:ext cx="3154680" cy="1737360"/>
+          <p:cNvPr id="13" name="Shape 11"/>
+          <p:cNvSpPr/>
+          <p:nvPr/>
+        </p:nvSpPr>
+        <p:spPr>
+          <a:xfrm>
+            <a:off x="7635240" y="2788920"/>
+            <a:ext cx="3474720" cy="1536192"/>
           </a:xfrm>
           <a:prstGeom prst="roundRect">
             <a:avLst>
-              <a:gd name="adj" fmla="val 6316"/>
+              <a:gd name="adj" fmla="val 7143"/>
+            </a:avLst>
+          </a:prstGeom>
+          <a:solidFill>
+            <a:srgbClr val="FFFFFF">
+              <a:alpha val="88000"/>
+            </a:srgbClr>
+          </a:solidFill>
+          <a:ln w="12700">
+            <a:solidFill>
+              <a:srgbClr val="D6E8F2"/>
+            </a:solidFill>
+            <a:prstDash val="solid"/>
+          </a:ln>
+        </p:spPr>
+      </p:sp>
+      <p:sp>
+        <p:nvSpPr>
+          <p:cNvPr id="14" name="Shape 12"/>
+          <p:cNvSpPr/>
+          <p:nvPr/>
+        </p:nvSpPr>
+        <p:spPr>
+          <a:xfrm>
+            <a:off x="8074152" y="3291840"/>
+            <a:ext cx="2596896" cy="749808"/>
+          </a:xfrm>
+          <a:prstGeom prst="rect">
+            <a:avLst/>
+          </a:prstGeom>
+          <a:solidFill>
+            <a:srgbClr val="EAF6F8"/>
+          </a:solidFill>
+          <a:ln w="12700">
+            <a:solidFill>
+              <a:srgbClr val="8ABBD8"/>
+            </a:solidFill>
+            <a:prstDash val="solid"/>
+          </a:ln>
+        </p:spPr>
+      </p:sp>
+      <p:sp>
+        <p:nvSpPr>
+          <p:cNvPr id="15" name="Shape 13"/>
+          <p:cNvSpPr/>
+          <p:nvPr/>
+        </p:nvSpPr>
+        <p:spPr>
+          <a:xfrm>
+            <a:off x="8202168" y="3721608"/>
+            <a:ext cx="2340864" cy="0"/>
+          </a:xfrm>
+          <a:prstGeom prst="line">
+            <a:avLst/>
+          </a:prstGeom>
+          <a:noFill/>
+          <a:ln w="19050">
+            <a:solidFill>
+              <a:srgbClr val="0068B7"/>
+            </a:solidFill>
+            <a:prstDash val="solid"/>
+          </a:ln>
+        </p:spPr>
+      </p:sp>
+      <p:sp>
+        <p:nvSpPr>
+          <p:cNvPr id="16" name="Shape 14"/>
+          <p:cNvSpPr/>
+          <p:nvPr/>
+        </p:nvSpPr>
+        <p:spPr>
+          <a:xfrm>
+            <a:off x="9198864" y="4206240"/>
+            <a:ext cx="347472" cy="347472"/>
+          </a:xfrm>
+          <a:prstGeom prst="ellipse">
+            <a:avLst/>
+          </a:prstGeom>
+          <a:solidFill>
+            <a:srgbClr val="2F8A28"/>
+          </a:solidFill>
+          <a:ln w="12700">
+            <a:solidFill>
+              <a:srgbClr val="2F8A28"/>
+            </a:solidFill>
+            <a:prstDash val="solid"/>
+          </a:ln>
+        </p:spPr>
+      </p:sp>
+      <p:sp>
+        <p:nvSpPr>
+          <p:cNvPr id="17" name="Text 15"/>
+          <p:cNvSpPr/>
+          <p:nvPr/>
+        </p:nvSpPr>
+        <p:spPr>
+          <a:xfrm>
+            <a:off x="7909560" y="3977640"/>
+            <a:ext cx="2926080" cy="182880"/>
+          </a:xfrm>
+          <a:prstGeom prst="rect">
+            <a:avLst/>
+          </a:prstGeom>
+          <a:noFill/>
+          <a:ln/>
+        </p:spPr>
+        <p:txBody>
+          <a:bodyPr wrap="square" lIns="0" tIns="0" rIns="0" bIns="0" rtlCol="0" anchor="ctr"/>
+          <a:lstStyle/>
+          <a:p>
+            <a:pPr algn="ctr" indent="0" marL="0">
+              <a:buNone/>
+            </a:pPr>
+            <a:r>
+              <a:rPr lang="en-US" sz="1000" dirty="0">
+                <a:solidFill>
+                  <a:srgbClr val="003A63"/>
+                </a:solidFill>
+                <a:latin typeface="Aptos" pitchFamily="34" charset="0"/>
+                <a:ea typeface="Aptos" pitchFamily="34" charset="-122"/>
+                <a:cs typeface="Aptos" pitchFamily="34" charset="-120"/>
+              </a:rPr>
+              <a:t>Concept to action</a:t>
+            </a:r>
+            <a:endParaRPr lang="en-US" sz="1000" dirty="0"/>
+          </a:p>
+        </p:txBody>
+      </p:sp>
+      <p:sp>
+        <p:nvSpPr>
+          <p:cNvPr id="18" name="Shape 16"/>
+          <p:cNvSpPr/>
+          <p:nvPr/>
+        </p:nvSpPr>
+        <p:spPr>
+          <a:xfrm>
+            <a:off x="7635240" y="4498848"/>
+            <a:ext cx="3474720" cy="1143000"/>
+          </a:xfrm>
+          <a:prstGeom prst="roundRect">
+            <a:avLst>
+              <a:gd name="adj" fmla="val 9600"/>
             </a:avLst>
           </a:prstGeom>
           <a:solidFill>
@@ -14346,14 +15720,14 @@
       </p:sp>
       <p:sp>
         <p:nvSpPr>
-          <p:cNvPr id="16" name="Text 14"/>
-          <p:cNvSpPr/>
-          <p:nvPr/>
-        </p:nvSpPr>
-        <p:spPr>
-          <a:xfrm>
-            <a:off x="8074152" y="3666744"/>
-            <a:ext cx="2825496" cy="256032"/>
+          <p:cNvPr id="19" name="Text 17"/>
+          <p:cNvSpPr/>
+          <p:nvPr/>
+        </p:nvSpPr>
+        <p:spPr>
+          <a:xfrm>
+            <a:off x="7799832" y="4645152"/>
+            <a:ext cx="3145536" cy="256032"/>
           </a:xfrm>
           <a:prstGeom prst="rect">
             <a:avLst/>
@@ -14377,7 +15751,7 @@
                 <a:ea typeface="Aptos" pitchFamily="34" charset="-122"/>
                 <a:cs typeface="Aptos" pitchFamily="34" charset="-120"/>
               </a:rPr>
-              <a:t>Use this for</a:t>
+              <a:t>What to produce</a:t>
             </a:r>
             <a:endParaRPr lang="en-US" sz="1300" dirty="0"/>
           </a:p>
@@ -14385,14 +15759,14 @@
       </p:sp>
       <p:sp>
         <p:nvSpPr>
-          <p:cNvPr id="17" name="Text 15"/>
-          <p:cNvSpPr/>
-          <p:nvPr/>
-        </p:nvSpPr>
-        <p:spPr>
-          <a:xfrm>
-            <a:off x="8074152" y="4023360"/>
-            <a:ext cx="2825496" cy="1097280"/>
+          <p:cNvPr id="20" name="Text 18"/>
+          <p:cNvSpPr/>
+          <p:nvPr/>
+        </p:nvSpPr>
+        <p:spPr>
+          <a:xfrm>
+            <a:off x="7799832" y="5001768"/>
+            <a:ext cx="3145536" cy="502920"/>
           </a:xfrm>
           <a:prstGeom prst="rect">
             <a:avLst/>
@@ -14418,7 +15792,7 @@
                 <a:ea typeface="Aptos" pitchFamily="34" charset="-122"/>
                 <a:cs typeface="Aptos" pitchFamily="34" charset="-120"/>
               </a:rPr>
-              <a:t>Connect the concept to public health decisions, safeguards, documentation, or implementation work.</a:t>
+              <a:t>Use the assignment to test whether you can explain the concept, apply it to a realistic public health situation, and identify what would need review before the work moves forward.</a:t>
             </a:r>
             <a:endParaRPr lang="en-US" sz="1550" dirty="0"/>
           </a:p>
@@ -14592,8 +15966,8 @@
         </p:nvSpPr>
         <p:spPr>
           <a:xfrm>
-            <a:off x="9966960" y="6537960"/>
-            <a:ext cx="1645920" cy="201168"/>
+            <a:off x="9646920" y="6537960"/>
+            <a:ext cx="1965960" cy="201168"/>
           </a:xfrm>
           <a:prstGeom prst="rect">
             <a:avLst/>
@@ -14617,7 +15991,7 @@
                 <a:ea typeface="Aptos" pitchFamily="34" charset="-122"/>
                 <a:cs typeface="Aptos" pitchFamily="34" charset="-120"/>
               </a:rPr>
-              <a:t>Â© Paula Soper</a:t>
+              <a:t>Copyright Paula Soper</a:t>
             </a:r>
             <a:endParaRPr lang="en-US" sz="800" dirty="0"/>
           </a:p>
@@ -14664,77 +16038,13 @@
       </p:sp>
       <p:sp>
         <p:nvSpPr>
-          <p:cNvPr id="8" name="Shape 6"/>
+          <p:cNvPr id="8" name="Text 6"/>
           <p:cNvSpPr/>
           <p:nvPr/>
         </p:nvSpPr>
         <p:spPr>
           <a:xfrm>
             <a:off x="640080" y="658368"/>
-            <a:ext cx="420624" cy="420624"/>
-          </a:xfrm>
-          <a:prstGeom prst="ellipse">
-            <a:avLst/>
-          </a:prstGeom>
-          <a:solidFill>
-            <a:srgbClr val="0068B7"/>
-          </a:solidFill>
-          <a:ln w="12700">
-            <a:solidFill>
-              <a:srgbClr val="0068B7"/>
-            </a:solidFill>
-            <a:prstDash val="solid"/>
-          </a:ln>
-        </p:spPr>
-      </p:sp>
-      <p:sp>
-        <p:nvSpPr>
-          <p:cNvPr id="9" name="Text 7"/>
-          <p:cNvSpPr/>
-          <p:nvPr/>
-        </p:nvSpPr>
-        <p:spPr>
-          <a:xfrm>
-            <a:off x="640080" y="731520"/>
-            <a:ext cx="420624" cy="164592"/>
-          </a:xfrm>
-          <a:prstGeom prst="rect">
-            <a:avLst/>
-          </a:prstGeom>
-          <a:noFill/>
-          <a:ln/>
-        </p:spPr>
-        <p:txBody>
-          <a:bodyPr wrap="square" lIns="0" tIns="0" rIns="0" bIns="0" rtlCol="0" anchor="ctr"/>
-          <a:lstStyle/>
-          <a:p>
-            <a:pPr algn="ctr" indent="0" marL="0">
-              <a:buNone/>
-            </a:pPr>
-            <a:r>
-              <a:rPr lang="en-US" sz="1100" b="1" dirty="0">
-                <a:solidFill>
-                  <a:srgbClr val="FFFFFF"/>
-                </a:solidFill>
-                <a:latin typeface="Aptos" pitchFamily="34" charset="0"/>
-                <a:ea typeface="Aptos" pitchFamily="34" charset="-122"/>
-                <a:cs typeface="Aptos" pitchFamily="34" charset="-120"/>
-              </a:rPr>
-              <a:t>2</a:t>
-            </a:r>
-            <a:endParaRPr lang="en-US" sz="1100" dirty="0"/>
-          </a:p>
-        </p:txBody>
-      </p:sp>
-      <p:sp>
-        <p:nvSpPr>
-          <p:cNvPr id="10" name="Text 8"/>
-          <p:cNvSpPr/>
-          <p:nvPr/>
-        </p:nvSpPr>
-        <p:spPr>
-          <a:xfrm>
-            <a:off x="640080" y="621792"/>
             <a:ext cx="10881360" cy="713232"/>
           </a:xfrm>
           <a:prstGeom prst="rect">
@@ -14769,14 +16079,14 @@
       </p:sp>
       <p:sp>
         <p:nvSpPr>
-          <p:cNvPr id="11" name="Text 9"/>
+          <p:cNvPr id="9" name="Text 7"/>
           <p:cNvSpPr/>
           <p:nvPr/>
         </p:nvSpPr>
         <p:spPr>
           <a:xfrm>
             <a:off x="868680" y="1508760"/>
-            <a:ext cx="6537960" cy="4160520"/>
+            <a:ext cx="6309360" cy="4160520"/>
           </a:xfrm>
           <a:prstGeom prst="rect">
             <a:avLst/>
@@ -14835,18 +16145,18 @@
       </p:sp>
       <p:sp>
         <p:nvSpPr>
-          <p:cNvPr id="12" name="Shape 10"/>
-          <p:cNvSpPr/>
-          <p:nvPr/>
-        </p:nvSpPr>
-        <p:spPr>
-          <a:xfrm>
-            <a:off x="7909560" y="1417320"/>
-            <a:ext cx="3154680" cy="1828800"/>
+          <p:cNvPr id="10" name="Shape 8"/>
+          <p:cNvSpPr/>
+          <p:nvPr/>
+        </p:nvSpPr>
+        <p:spPr>
+          <a:xfrm>
+            <a:off x="7635240" y="1325880"/>
+            <a:ext cx="3474720" cy="1325880"/>
           </a:xfrm>
           <a:prstGeom prst="roundRect">
             <a:avLst>
-              <a:gd name="adj" fmla="val 6000"/>
+              <a:gd name="adj" fmla="val 8276"/>
             </a:avLst>
           </a:prstGeom>
           <a:solidFill>
@@ -14862,14 +16172,14 @@
       </p:sp>
       <p:sp>
         <p:nvSpPr>
-          <p:cNvPr id="13" name="Text 11"/>
-          <p:cNvSpPr/>
-          <p:nvPr/>
-        </p:nvSpPr>
-        <p:spPr>
-          <a:xfrm>
-            <a:off x="8074152" y="1563624"/>
-            <a:ext cx="2825496" cy="256032"/>
+          <p:cNvPr id="11" name="Text 9"/>
+          <p:cNvSpPr/>
+          <p:nvPr/>
+        </p:nvSpPr>
+        <p:spPr>
+          <a:xfrm>
+            <a:off x="7799832" y="1472184"/>
+            <a:ext cx="3145536" cy="256032"/>
           </a:xfrm>
           <a:prstGeom prst="rect">
             <a:avLst/>
@@ -14893,7 +16203,7 @@
                 <a:ea typeface="Aptos" pitchFamily="34" charset="-122"/>
                 <a:cs typeface="Aptos" pitchFamily="34" charset="-120"/>
               </a:rPr>
-              <a:t>Key idea</a:t>
+              <a:t>Core concept</a:t>
             </a:r>
             <a:endParaRPr lang="en-US" sz="1300" dirty="0"/>
           </a:p>
@@ -14901,14 +16211,14 @@
       </p:sp>
       <p:sp>
         <p:nvSpPr>
-          <p:cNvPr id="14" name="Text 12"/>
-          <p:cNvSpPr/>
-          <p:nvPr/>
-        </p:nvSpPr>
-        <p:spPr>
-          <a:xfrm>
-            <a:off x="8074152" y="1920240"/>
-            <a:ext cx="2825496" cy="1188720"/>
+          <p:cNvPr id="12" name="Text 10"/>
+          <p:cNvSpPr/>
+          <p:nvPr/>
+        </p:nvSpPr>
+        <p:spPr>
+          <a:xfrm>
+            <a:off x="7799832" y="1828800"/>
+            <a:ext cx="3145536" cy="685800"/>
           </a:xfrm>
           <a:prstGeom prst="rect">
             <a:avLst/>
@@ -14942,18 +16252,159 @@
       </p:sp>
       <p:sp>
         <p:nvSpPr>
-          <p:cNvPr id="15" name="Shape 13"/>
-          <p:cNvSpPr/>
-          <p:nvPr/>
-        </p:nvSpPr>
-        <p:spPr>
-          <a:xfrm>
-            <a:off x="7909560" y="3520440"/>
-            <a:ext cx="3154680" cy="1737360"/>
+          <p:cNvPr id="13" name="Shape 11"/>
+          <p:cNvSpPr/>
+          <p:nvPr/>
+        </p:nvSpPr>
+        <p:spPr>
+          <a:xfrm>
+            <a:off x="7635240" y="2788920"/>
+            <a:ext cx="3474720" cy="1536192"/>
           </a:xfrm>
           <a:prstGeom prst="roundRect">
             <a:avLst>
-              <a:gd name="adj" fmla="val 6316"/>
+              <a:gd name="adj" fmla="val 7143"/>
+            </a:avLst>
+          </a:prstGeom>
+          <a:solidFill>
+            <a:srgbClr val="FFFFFF">
+              <a:alpha val="88000"/>
+            </a:srgbClr>
+          </a:solidFill>
+          <a:ln w="12700">
+            <a:solidFill>
+              <a:srgbClr val="D6E8F2"/>
+            </a:solidFill>
+            <a:prstDash val="solid"/>
+          </a:ln>
+        </p:spPr>
+      </p:sp>
+      <p:sp>
+        <p:nvSpPr>
+          <p:cNvPr id="14" name="Shape 12"/>
+          <p:cNvSpPr/>
+          <p:nvPr/>
+        </p:nvSpPr>
+        <p:spPr>
+          <a:xfrm>
+            <a:off x="8074152" y="3291840"/>
+            <a:ext cx="2596896" cy="749808"/>
+          </a:xfrm>
+          <a:prstGeom prst="rect">
+            <a:avLst/>
+          </a:prstGeom>
+          <a:solidFill>
+            <a:srgbClr val="EAF6F8"/>
+          </a:solidFill>
+          <a:ln w="12700">
+            <a:solidFill>
+              <a:srgbClr val="8ABBD8"/>
+            </a:solidFill>
+            <a:prstDash val="solid"/>
+          </a:ln>
+        </p:spPr>
+      </p:sp>
+      <p:sp>
+        <p:nvSpPr>
+          <p:cNvPr id="15" name="Shape 13"/>
+          <p:cNvSpPr/>
+          <p:nvPr/>
+        </p:nvSpPr>
+        <p:spPr>
+          <a:xfrm>
+            <a:off x="8202168" y="3721608"/>
+            <a:ext cx="2340864" cy="0"/>
+          </a:xfrm>
+          <a:prstGeom prst="line">
+            <a:avLst/>
+          </a:prstGeom>
+          <a:noFill/>
+          <a:ln w="19050">
+            <a:solidFill>
+              <a:srgbClr val="0068B7"/>
+            </a:solidFill>
+            <a:prstDash val="solid"/>
+          </a:ln>
+        </p:spPr>
+      </p:sp>
+      <p:sp>
+        <p:nvSpPr>
+          <p:cNvPr id="16" name="Shape 14"/>
+          <p:cNvSpPr/>
+          <p:nvPr/>
+        </p:nvSpPr>
+        <p:spPr>
+          <a:xfrm>
+            <a:off x="9198864" y="4206240"/>
+            <a:ext cx="347472" cy="347472"/>
+          </a:xfrm>
+          <a:prstGeom prst="ellipse">
+            <a:avLst/>
+          </a:prstGeom>
+          <a:solidFill>
+            <a:srgbClr val="2F8A28"/>
+          </a:solidFill>
+          <a:ln w="12700">
+            <a:solidFill>
+              <a:srgbClr val="2F8A28"/>
+            </a:solidFill>
+            <a:prstDash val="solid"/>
+          </a:ln>
+        </p:spPr>
+      </p:sp>
+      <p:sp>
+        <p:nvSpPr>
+          <p:cNvPr id="17" name="Text 15"/>
+          <p:cNvSpPr/>
+          <p:nvPr/>
+        </p:nvSpPr>
+        <p:spPr>
+          <a:xfrm>
+            <a:off x="7909560" y="3977640"/>
+            <a:ext cx="2926080" cy="182880"/>
+          </a:xfrm>
+          <a:prstGeom prst="rect">
+            <a:avLst/>
+          </a:prstGeom>
+          <a:noFill/>
+          <a:ln/>
+        </p:spPr>
+        <p:txBody>
+          <a:bodyPr wrap="square" lIns="0" tIns="0" rIns="0" bIns="0" rtlCol="0" anchor="ctr"/>
+          <a:lstStyle/>
+          <a:p>
+            <a:pPr algn="ctr" indent="0" marL="0">
+              <a:buNone/>
+            </a:pPr>
+            <a:r>
+              <a:rPr lang="en-US" sz="1000" dirty="0">
+                <a:solidFill>
+                  <a:srgbClr val="003A63"/>
+                </a:solidFill>
+                <a:latin typeface="Aptos" pitchFamily="34" charset="0"/>
+                <a:ea typeface="Aptos" pitchFamily="34" charset="-122"/>
+                <a:cs typeface="Aptos" pitchFamily="34" charset="-120"/>
+              </a:rPr>
+              <a:t>Concept to action</a:t>
+            </a:r>
+            <a:endParaRPr lang="en-US" sz="1000" dirty="0"/>
+          </a:p>
+        </p:txBody>
+      </p:sp>
+      <p:sp>
+        <p:nvSpPr>
+          <p:cNvPr id="18" name="Shape 16"/>
+          <p:cNvSpPr/>
+          <p:nvPr/>
+        </p:nvSpPr>
+        <p:spPr>
+          <a:xfrm>
+            <a:off x="7635240" y="4498848"/>
+            <a:ext cx="3474720" cy="1143000"/>
+          </a:xfrm>
+          <a:prstGeom prst="roundRect">
+            <a:avLst>
+              <a:gd name="adj" fmla="val 9600"/>
             </a:avLst>
           </a:prstGeom>
           <a:solidFill>
@@ -14969,14 +16420,14 @@
       </p:sp>
       <p:sp>
         <p:nvSpPr>
-          <p:cNvPr id="16" name="Text 14"/>
-          <p:cNvSpPr/>
-          <p:nvPr/>
-        </p:nvSpPr>
-        <p:spPr>
-          <a:xfrm>
-            <a:off x="8074152" y="3666744"/>
-            <a:ext cx="2825496" cy="256032"/>
+          <p:cNvPr id="19" name="Text 17"/>
+          <p:cNvSpPr/>
+          <p:nvPr/>
+        </p:nvSpPr>
+        <p:spPr>
+          <a:xfrm>
+            <a:off x="7799832" y="4645152"/>
+            <a:ext cx="3145536" cy="256032"/>
           </a:xfrm>
           <a:prstGeom prst="rect">
             <a:avLst/>
@@ -15000,7 +16451,7 @@
                 <a:ea typeface="Aptos" pitchFamily="34" charset="-122"/>
                 <a:cs typeface="Aptos" pitchFamily="34" charset="-120"/>
               </a:rPr>
-              <a:t>Use this for</a:t>
+              <a:t>Apply it</a:t>
             </a:r>
             <a:endParaRPr lang="en-US" sz="1300" dirty="0"/>
           </a:p>
@@ -15008,14 +16459,14 @@
       </p:sp>
       <p:sp>
         <p:nvSpPr>
-          <p:cNvPr id="17" name="Text 15"/>
-          <p:cNvSpPr/>
-          <p:nvPr/>
-        </p:nvSpPr>
-        <p:spPr>
-          <a:xfrm>
-            <a:off x="8074152" y="4023360"/>
-            <a:ext cx="2825496" cy="1097280"/>
+          <p:cNvPr id="20" name="Text 18"/>
+          <p:cNvSpPr/>
+          <p:nvPr/>
+        </p:nvSpPr>
+        <p:spPr>
+          <a:xfrm>
+            <a:off x="7799832" y="5001768"/>
+            <a:ext cx="3145536" cy="502920"/>
           </a:xfrm>
           <a:prstGeom prst="rect">
             <a:avLst/>
@@ -15041,7 +16492,7 @@
                 <a:ea typeface="Aptos" pitchFamily="34" charset="-122"/>
                 <a:cs typeface="Aptos" pitchFamily="34" charset="-120"/>
               </a:rPr>
-              <a:t>Connect the concept to public health decisions, safeguards, documentation, or implementation work.</a:t>
+              <a:t>Connect the concept to public health purpose, responsible use, required safeguards, documentation, and the next action a department should take.</a:t>
             </a:r>
             <a:endParaRPr lang="en-US" sz="1550" dirty="0"/>
           </a:p>
@@ -15215,8 +16666,8 @@
         </p:nvSpPr>
         <p:spPr>
           <a:xfrm>
-            <a:off x="9966960" y="6537960"/>
-            <a:ext cx="1645920" cy="201168"/>
+            <a:off x="9646920" y="6537960"/>
+            <a:ext cx="1965960" cy="201168"/>
           </a:xfrm>
           <a:prstGeom prst="rect">
             <a:avLst/>
@@ -15240,7 +16691,7 @@
                 <a:ea typeface="Aptos" pitchFamily="34" charset="-122"/>
                 <a:cs typeface="Aptos" pitchFamily="34" charset="-120"/>
               </a:rPr>
-              <a:t>Â© Paula Soper</a:t>
+              <a:t>Copyright Paula Soper</a:t>
             </a:r>
             <a:endParaRPr lang="en-US" sz="800" dirty="0"/>
           </a:p>
@@ -15287,14 +16738,257 @@
       </p:sp>
       <p:sp>
         <p:nvSpPr>
-          <p:cNvPr id="8" name="Shape 6"/>
+          <p:cNvPr id="8" name="Text 6"/>
           <p:cNvSpPr/>
           <p:nvPr/>
         </p:nvSpPr>
         <p:spPr>
           <a:xfrm>
             <a:off x="640080" y="658368"/>
-            <a:ext cx="420624" cy="420624"/>
+            <a:ext cx="10881360" cy="713232"/>
+          </a:xfrm>
+          <a:prstGeom prst="rect">
+            <a:avLst/>
+          </a:prstGeom>
+          <a:noFill/>
+          <a:ln/>
+        </p:spPr>
+        <p:txBody>
+          <a:bodyPr wrap="square" lIns="0" tIns="0" rIns="0" bIns="0" rtlCol="0" anchor="ctr">
+            <a:normAutofit/>
+          </a:bodyPr>
+          <a:lstStyle/>
+          <a:p>
+            <a:pPr indent="0" marL="0">
+              <a:buNone/>
+            </a:pPr>
+            <a:r>
+              <a:rPr lang="en-US" sz="3400" b="1" dirty="0">
+                <a:solidFill>
+                  <a:srgbClr val="003A63"/>
+                </a:solidFill>
+                <a:latin typeface="Aptos Display" pitchFamily="34" charset="0"/>
+                <a:ea typeface="Aptos Display" pitchFamily="34" charset="-122"/>
+                <a:cs typeface="Aptos Display" pitchFamily="34" charset="-120"/>
+              </a:rPr>
+              <a:t>Jurisdiction and Agency Policy Note</a:t>
+            </a:r>
+            <a:endParaRPr lang="en-US" sz="3400" dirty="0"/>
+          </a:p>
+        </p:txBody>
+      </p:sp>
+      <p:sp>
+        <p:nvSpPr>
+          <p:cNvPr id="9" name="Text 7"/>
+          <p:cNvSpPr/>
+          <p:nvPr/>
+        </p:nvSpPr>
+        <p:spPr>
+          <a:xfrm>
+            <a:off x="868680" y="1508760"/>
+            <a:ext cx="6309360" cy="4160520"/>
+          </a:xfrm>
+          <a:prstGeom prst="rect">
+            <a:avLst/>
+          </a:prstGeom>
+          <a:noFill/>
+          <a:ln/>
+        </p:spPr>
+        <p:txBody>
+          <a:bodyPr wrap="square" lIns="635" tIns="635" rIns="635" bIns="635" rtlCol="0" anchor="t">
+            <a:normAutofit/>
+          </a:bodyPr>
+          <a:lstStyle/>
+          <a:p>
+            <a:r>
+              <a:rPr lang="en-US" sz="2100" dirty="0">
+                <a:solidFill>
+                  <a:srgbClr val="17364A"/>
+                </a:solidFill>
+                <a:latin typeface="Aptos" pitchFamily="34" charset="0"/>
+                <a:ea typeface="Aptos" pitchFamily="34" charset="-122"/>
+                <a:cs typeface="Aptos" pitchFamily="34" charset="-120"/>
+              </a:rPr>
+              <a:t>This national-level module is intended for training and planning purposes.</a:t>
+            </a:r>
+            <a:endParaRPr lang="en-US" sz="2100" dirty="0"/>
+          </a:p>
+          <a:p>
+            <a:r>
+              <a:rPr lang="en-US" sz="2100" dirty="0">
+                <a:solidFill>
+                  <a:srgbClr val="17364A"/>
+                </a:solidFill>
+                <a:latin typeface="Aptos" pitchFamily="34" charset="0"/>
+                <a:ea typeface="Aptos" pitchFamily="34" charset="-122"/>
+                <a:cs typeface="Aptos" pitchFamily="34" charset="-120"/>
+              </a:rPr>
+              <a:t>It does not replace legal, privacy, procurement, civil rights, records, or agency policy review.</a:t>
+            </a:r>
+            <a:endParaRPr lang="en-US" sz="2100" dirty="0"/>
+          </a:p>
+          <a:p>
+            <a:r>
+              <a:rPr lang="en-US" sz="2100" dirty="0">
+                <a:solidFill>
+                  <a:srgbClr val="17364A"/>
+                </a:solidFill>
+                <a:latin typeface="Aptos" pitchFamily="34" charset="0"/>
+                <a:ea typeface="Aptos" pitchFamily="34" charset="-122"/>
+                <a:cs typeface="Aptos" pitchFamily="34" charset="-120"/>
+              </a:rPr>
+              <a:t>Learners should confirm applicable requirements in their own jurisdiction and organization before.</a:t>
+            </a:r>
+            <a:endParaRPr lang="en-US" sz="2100" dirty="0"/>
+          </a:p>
+        </p:txBody>
+      </p:sp>
+      <p:sp>
+        <p:nvSpPr>
+          <p:cNvPr id="10" name="Shape 8"/>
+          <p:cNvSpPr/>
+          <p:nvPr/>
+        </p:nvSpPr>
+        <p:spPr>
+          <a:xfrm>
+            <a:off x="7635240" y="1325880"/>
+            <a:ext cx="3474720" cy="1325880"/>
+          </a:xfrm>
+          <a:prstGeom prst="roundRect">
+            <a:avLst>
+              <a:gd name="adj" fmla="val 8276"/>
+            </a:avLst>
+          </a:prstGeom>
+          <a:solidFill>
+            <a:srgbClr val="EEF8ED"/>
+          </a:solidFill>
+          <a:ln w="12700">
+            <a:solidFill>
+              <a:srgbClr val="B9D7E6"/>
+            </a:solidFill>
+            <a:prstDash val="solid"/>
+          </a:ln>
+        </p:spPr>
+      </p:sp>
+      <p:sp>
+        <p:nvSpPr>
+          <p:cNvPr id="11" name="Text 9"/>
+          <p:cNvSpPr/>
+          <p:nvPr/>
+        </p:nvSpPr>
+        <p:spPr>
+          <a:xfrm>
+            <a:off x="7799832" y="1472184"/>
+            <a:ext cx="3145536" cy="256032"/>
+          </a:xfrm>
+          <a:prstGeom prst="rect">
+            <a:avLst/>
+          </a:prstGeom>
+          <a:noFill/>
+          <a:ln/>
+        </p:spPr>
+        <p:txBody>
+          <a:bodyPr wrap="square" lIns="0" tIns="0" rIns="0" bIns="0" rtlCol="0" anchor="ctr"/>
+          <a:lstStyle/>
+          <a:p>
+            <a:pPr indent="0" marL="0">
+              <a:buNone/>
+            </a:pPr>
+            <a:r>
+              <a:rPr lang="en-US" sz="1300" b="1" dirty="0">
+                <a:solidFill>
+                  <a:srgbClr val="0068B7"/>
+                </a:solidFill>
+                <a:latin typeface="Aptos" pitchFamily="34" charset="0"/>
+                <a:ea typeface="Aptos" pitchFamily="34" charset="-122"/>
+                <a:cs typeface="Aptos" pitchFamily="34" charset="-120"/>
+              </a:rPr>
+              <a:t>Governance lens</a:t>
+            </a:r>
+            <a:endParaRPr lang="en-US" sz="1300" dirty="0"/>
+          </a:p>
+        </p:txBody>
+      </p:sp>
+      <p:sp>
+        <p:nvSpPr>
+          <p:cNvPr id="12" name="Text 10"/>
+          <p:cNvSpPr/>
+          <p:nvPr/>
+        </p:nvSpPr>
+        <p:spPr>
+          <a:xfrm>
+            <a:off x="7799832" y="1828800"/>
+            <a:ext cx="3145536" cy="685800"/>
+          </a:xfrm>
+          <a:prstGeom prst="rect">
+            <a:avLst/>
+          </a:prstGeom>
+          <a:noFill/>
+          <a:ln/>
+        </p:spPr>
+        <p:txBody>
+          <a:bodyPr wrap="square" lIns="0" tIns="0" rIns="0" bIns="0" rtlCol="0" anchor="t">
+            <a:normAutofit/>
+          </a:bodyPr>
+          <a:lstStyle/>
+          <a:p>
+            <a:pPr indent="0" marL="0">
+              <a:buNone/>
+            </a:pPr>
+            <a:r>
+              <a:rPr lang="en-US" sz="1550" dirty="0">
+                <a:solidFill>
+                  <a:srgbClr val="17364A"/>
+                </a:solidFill>
+                <a:latin typeface="Aptos" pitchFamily="34" charset="0"/>
+                <a:ea typeface="Aptos" pitchFamily="34" charset="-122"/>
+                <a:cs typeface="Aptos" pitchFamily="34" charset="-120"/>
+              </a:rPr>
+              <a:t>This national-level module is intended for training and planning purposes.</a:t>
+            </a:r>
+            <a:endParaRPr lang="en-US" sz="1550" dirty="0"/>
+          </a:p>
+        </p:txBody>
+      </p:sp>
+      <p:sp>
+        <p:nvSpPr>
+          <p:cNvPr id="13" name="Shape 11"/>
+          <p:cNvSpPr/>
+          <p:nvPr/>
+        </p:nvSpPr>
+        <p:spPr>
+          <a:xfrm>
+            <a:off x="7635240" y="2788920"/>
+            <a:ext cx="3474720" cy="1536192"/>
+          </a:xfrm>
+          <a:prstGeom prst="roundRect">
+            <a:avLst>
+              <a:gd name="adj" fmla="val 7143"/>
+            </a:avLst>
+          </a:prstGeom>
+          <a:solidFill>
+            <a:srgbClr val="FFFFFF">
+              <a:alpha val="88000"/>
+            </a:srgbClr>
+          </a:solidFill>
+          <a:ln w="12700">
+            <a:solidFill>
+              <a:srgbClr val="D6E8F2"/>
+            </a:solidFill>
+            <a:prstDash val="solid"/>
+          </a:ln>
+        </p:spPr>
+      </p:sp>
+      <p:sp>
+        <p:nvSpPr>
+          <p:cNvPr id="14" name="Shape 12"/>
+          <p:cNvSpPr/>
+          <p:nvPr/>
+        </p:nvSpPr>
+        <p:spPr>
+          <a:xfrm>
+            <a:off x="7891272" y="3108960"/>
+            <a:ext cx="566928" cy="566928"/>
           </a:xfrm>
           <a:prstGeom prst="ellipse">
             <a:avLst/>
@@ -15312,172 +17006,24 @@
       </p:sp>
       <p:sp>
         <p:nvSpPr>
-          <p:cNvPr id="9" name="Text 7"/>
-          <p:cNvSpPr/>
-          <p:nvPr/>
-        </p:nvSpPr>
-        <p:spPr>
-          <a:xfrm>
-            <a:off x="640080" y="731520"/>
-            <a:ext cx="420624" cy="164592"/>
-          </a:xfrm>
-          <a:prstGeom prst="rect">
-            <a:avLst/>
-          </a:prstGeom>
-          <a:noFill/>
-          <a:ln/>
-        </p:spPr>
-        <p:txBody>
-          <a:bodyPr wrap="square" lIns="0" tIns="0" rIns="0" bIns="0" rtlCol="0" anchor="ctr"/>
-          <a:lstStyle/>
-          <a:p>
-            <a:pPr algn="ctr" indent="0" marL="0">
-              <a:buNone/>
-            </a:pPr>
-            <a:r>
-              <a:rPr lang="en-US" sz="1100" b="1" dirty="0">
-                <a:solidFill>
-                  <a:srgbClr val="FFFFFF"/>
-                </a:solidFill>
-                <a:latin typeface="Aptos" pitchFamily="34" charset="0"/>
-                <a:ea typeface="Aptos" pitchFamily="34" charset="-122"/>
-                <a:cs typeface="Aptos" pitchFamily="34" charset="-120"/>
-              </a:rPr>
-              <a:t>3</a:t>
-            </a:r>
-            <a:endParaRPr lang="en-US" sz="1100" dirty="0"/>
-          </a:p>
-        </p:txBody>
-      </p:sp>
-      <p:sp>
-        <p:nvSpPr>
-          <p:cNvPr id="10" name="Text 8"/>
-          <p:cNvSpPr/>
-          <p:nvPr/>
-        </p:nvSpPr>
-        <p:spPr>
-          <a:xfrm>
-            <a:off x="640080" y="621792"/>
-            <a:ext cx="10881360" cy="713232"/>
-          </a:xfrm>
-          <a:prstGeom prst="rect">
-            <a:avLst/>
-          </a:prstGeom>
-          <a:noFill/>
-          <a:ln/>
-        </p:spPr>
-        <p:txBody>
-          <a:bodyPr wrap="square" lIns="0" tIns="0" rIns="0" bIns="0" rtlCol="0" anchor="ctr">
-            <a:normAutofit/>
-          </a:bodyPr>
-          <a:lstStyle/>
-          <a:p>
-            <a:pPr indent="0" marL="0">
-              <a:buNone/>
-            </a:pPr>
-            <a:r>
-              <a:rPr lang="en-US" sz="3400" b="1" dirty="0">
-                <a:solidFill>
-                  <a:srgbClr val="003A63"/>
-                </a:solidFill>
-                <a:latin typeface="Aptos Display" pitchFamily="34" charset="0"/>
-                <a:ea typeface="Aptos Display" pitchFamily="34" charset="-122"/>
-                <a:cs typeface="Aptos Display" pitchFamily="34" charset="-120"/>
-              </a:rPr>
-              <a:t>Jurisdiction and Agency Policy Note</a:t>
-            </a:r>
-            <a:endParaRPr lang="en-US" sz="3400" dirty="0"/>
-          </a:p>
-        </p:txBody>
-      </p:sp>
-      <p:sp>
-        <p:nvSpPr>
-          <p:cNvPr id="11" name="Text 9"/>
-          <p:cNvSpPr/>
-          <p:nvPr/>
-        </p:nvSpPr>
-        <p:spPr>
-          <a:xfrm>
-            <a:off x="868680" y="1508760"/>
-            <a:ext cx="6537960" cy="4160520"/>
-          </a:xfrm>
-          <a:prstGeom prst="rect">
-            <a:avLst/>
-          </a:prstGeom>
-          <a:noFill/>
-          <a:ln/>
-        </p:spPr>
-        <p:txBody>
-          <a:bodyPr wrap="square" lIns="635" tIns="635" rIns="635" bIns="635" rtlCol="0" anchor="t">
-            <a:normAutofit/>
-          </a:bodyPr>
-          <a:lstStyle/>
-          <a:p>
-            <a:r>
-              <a:rPr lang="en-US" sz="2100" dirty="0">
-                <a:solidFill>
-                  <a:srgbClr val="17364A"/>
-                </a:solidFill>
-                <a:latin typeface="Aptos" pitchFamily="34" charset="0"/>
-                <a:ea typeface="Aptos" pitchFamily="34" charset="-122"/>
-                <a:cs typeface="Aptos" pitchFamily="34" charset="-120"/>
-              </a:rPr>
-              <a:t>This national-level module is intended for training and planning purposes.</a:t>
-            </a:r>
-            <a:endParaRPr lang="en-US" sz="2100" dirty="0"/>
-          </a:p>
-          <a:p>
-            <a:r>
-              <a:rPr lang="en-US" sz="2100" dirty="0">
-                <a:solidFill>
-                  <a:srgbClr val="17364A"/>
-                </a:solidFill>
-                <a:latin typeface="Aptos" pitchFamily="34" charset="0"/>
-                <a:ea typeface="Aptos" pitchFamily="34" charset="-122"/>
-                <a:cs typeface="Aptos" pitchFamily="34" charset="-120"/>
-              </a:rPr>
-              <a:t>It does not replace legal, privacy, procurement, civil rights, records, or agency policy review.</a:t>
-            </a:r>
-            <a:endParaRPr lang="en-US" sz="2100" dirty="0"/>
-          </a:p>
-          <a:p>
-            <a:r>
-              <a:rPr lang="en-US" sz="2100" dirty="0">
-                <a:solidFill>
-                  <a:srgbClr val="17364A"/>
-                </a:solidFill>
-                <a:latin typeface="Aptos" pitchFamily="34" charset="0"/>
-                <a:ea typeface="Aptos" pitchFamily="34" charset="-122"/>
-                <a:cs typeface="Aptos" pitchFamily="34" charset="-120"/>
-              </a:rPr>
-              <a:t>Learners should confirm applicable requirements in their own jurisdiction and organization before.</a:t>
-            </a:r>
-            <a:endParaRPr lang="en-US" sz="2100" dirty="0"/>
-          </a:p>
-        </p:txBody>
-      </p:sp>
-      <p:sp>
-        <p:nvSpPr>
-          <p:cNvPr id="12" name="Shape 10"/>
-          <p:cNvSpPr/>
-          <p:nvPr/>
-        </p:nvSpPr>
-        <p:spPr>
-          <a:xfrm>
-            <a:off x="7909560" y="1417320"/>
-            <a:ext cx="3154680" cy="1828800"/>
-          </a:xfrm>
-          <a:prstGeom prst="roundRect">
-            <a:avLst>
-              <a:gd name="adj" fmla="val 6000"/>
-            </a:avLst>
+          <p:cNvPr id="15" name="Shape 13"/>
+          <p:cNvSpPr/>
+          <p:nvPr/>
+        </p:nvSpPr>
+        <p:spPr>
+          <a:xfrm>
+            <a:off x="10287000" y="3108960"/>
+            <a:ext cx="566928" cy="566928"/>
+          </a:xfrm>
+          <a:prstGeom prst="ellipse">
+            <a:avLst/>
           </a:prstGeom>
           <a:solidFill>
-            <a:srgbClr val="EEF8ED"/>
+            <a:srgbClr val="2F8A28"/>
           </a:solidFill>
           <a:ln w="12700">
             <a:solidFill>
-              <a:srgbClr val="B9D7E6"/>
+              <a:srgbClr val="2F8A28"/>
             </a:solidFill>
             <a:prstDash val="solid"/>
           </a:ln>
@@ -15485,14 +17031,108 @@
       </p:sp>
       <p:sp>
         <p:nvSpPr>
-          <p:cNvPr id="13" name="Text 11"/>
-          <p:cNvSpPr/>
-          <p:nvPr/>
-        </p:nvSpPr>
-        <p:spPr>
-          <a:xfrm>
-            <a:off x="8074152" y="1563624"/>
-            <a:ext cx="2825496" cy="256032"/>
+          <p:cNvPr id="16" name="Shape 14"/>
+          <p:cNvSpPr/>
+          <p:nvPr/>
+        </p:nvSpPr>
+        <p:spPr>
+          <a:xfrm>
+            <a:off x="9089136" y="3456432"/>
+            <a:ext cx="566928" cy="566928"/>
+          </a:xfrm>
+          <a:prstGeom prst="ellipse">
+            <a:avLst/>
+          </a:prstGeom>
+          <a:solidFill>
+            <a:srgbClr val="6A4CA3"/>
+          </a:solidFill>
+          <a:ln w="12700">
+            <a:solidFill>
+              <a:srgbClr val="6A4CA3"/>
+            </a:solidFill>
+            <a:prstDash val="solid"/>
+          </a:ln>
+        </p:spPr>
+      </p:sp>
+      <p:sp>
+        <p:nvSpPr>
+          <p:cNvPr id="17" name="Shape 15"/>
+          <p:cNvSpPr/>
+          <p:nvPr/>
+        </p:nvSpPr>
+        <p:spPr>
+          <a:xfrm>
+            <a:off x="8385048" y="3419856"/>
+            <a:ext cx="1975104" cy="0"/>
+          </a:xfrm>
+          <a:prstGeom prst="line">
+            <a:avLst/>
+          </a:prstGeom>
+          <a:noFill/>
+          <a:ln w="25400">
+            <a:solidFill>
+              <a:srgbClr val="8ABBD8"/>
+            </a:solidFill>
+            <a:prstDash val="solid"/>
+          </a:ln>
+        </p:spPr>
+      </p:sp>
+      <p:sp>
+        <p:nvSpPr>
+          <p:cNvPr id="18" name="Shape 16"/>
+          <p:cNvSpPr/>
+          <p:nvPr/>
+        </p:nvSpPr>
+        <p:spPr>
+          <a:xfrm>
+            <a:off x="8202168" y="3630168"/>
+            <a:ext cx="1170432" cy="118872"/>
+          </a:xfrm>
+          <a:prstGeom prst="line">
+            <a:avLst/>
+          </a:prstGeom>
+          <a:noFill/>
+          <a:ln w="25400">
+            <a:solidFill>
+              <a:srgbClr val="8ABBD8"/>
+            </a:solidFill>
+            <a:prstDash val="solid"/>
+          </a:ln>
+        </p:spPr>
+      </p:sp>
+      <p:sp>
+        <p:nvSpPr>
+          <p:cNvPr id="19" name="Shape 17"/>
+          <p:cNvSpPr/>
+          <p:nvPr/>
+        </p:nvSpPr>
+        <p:spPr>
+          <a:xfrm>
+            <a:off x="10543032" y="3630168"/>
+            <a:ext cx="-1170432" cy="118872"/>
+          </a:xfrm>
+          <a:prstGeom prst="line">
+            <a:avLst/>
+          </a:prstGeom>
+          <a:noFill/>
+          <a:ln w="25400">
+            <a:solidFill>
+              <a:srgbClr val="8ABBD8"/>
+            </a:solidFill>
+            <a:prstDash val="solid"/>
+          </a:ln>
+        </p:spPr>
+      </p:sp>
+      <p:sp>
+        <p:nvSpPr>
+          <p:cNvPr id="20" name="Text 18"/>
+          <p:cNvSpPr/>
+          <p:nvPr/>
+        </p:nvSpPr>
+        <p:spPr>
+          <a:xfrm>
+            <a:off x="7863840" y="4069080"/>
+            <a:ext cx="3017520" cy="164592"/>
           </a:xfrm>
           <a:prstGeom prst="rect">
             <a:avLst/>
@@ -15504,79 +17144,38 @@
           <a:bodyPr wrap="square" lIns="0" tIns="0" rIns="0" bIns="0" rtlCol="0" anchor="ctr"/>
           <a:lstStyle/>
           <a:p>
-            <a:pPr indent="0" marL="0">
-              <a:buNone/>
-            </a:pPr>
-            <a:r>
-              <a:rPr lang="en-US" sz="1300" b="1" dirty="0">
-                <a:solidFill>
-                  <a:srgbClr val="0068B7"/>
-                </a:solidFill>
-                <a:latin typeface="Aptos" pitchFamily="34" charset="0"/>
-                <a:ea typeface="Aptos" pitchFamily="34" charset="-122"/>
-                <a:cs typeface="Aptos" pitchFamily="34" charset="-120"/>
-              </a:rPr>
-              <a:t>Key idea</a:t>
-            </a:r>
-            <a:endParaRPr lang="en-US" sz="1300" dirty="0"/>
-          </a:p>
-        </p:txBody>
-      </p:sp>
-      <p:sp>
-        <p:nvSpPr>
-          <p:cNvPr id="14" name="Text 12"/>
-          <p:cNvSpPr/>
-          <p:nvPr/>
-        </p:nvSpPr>
-        <p:spPr>
-          <a:xfrm>
-            <a:off x="8074152" y="1920240"/>
-            <a:ext cx="2825496" cy="1188720"/>
-          </a:xfrm>
-          <a:prstGeom prst="rect">
-            <a:avLst/>
-          </a:prstGeom>
-          <a:noFill/>
-          <a:ln/>
-        </p:spPr>
-        <p:txBody>
-          <a:bodyPr wrap="square" lIns="0" tIns="0" rIns="0" bIns="0" rtlCol="0" anchor="t">
-            <a:normAutofit/>
-          </a:bodyPr>
-          <a:lstStyle/>
-          <a:p>
-            <a:pPr indent="0" marL="0">
-              <a:buNone/>
-            </a:pPr>
-            <a:r>
-              <a:rPr lang="en-US" sz="1550" dirty="0">
-                <a:solidFill>
-                  <a:srgbClr val="17364A"/>
-                </a:solidFill>
-                <a:latin typeface="Aptos" pitchFamily="34" charset="0"/>
-                <a:ea typeface="Aptos" pitchFamily="34" charset="-122"/>
-                <a:cs typeface="Aptos" pitchFamily="34" charset="-120"/>
-              </a:rPr>
-              <a:t>This national-level module is intended for training and planning purposes.</a:t>
-            </a:r>
-            <a:endParaRPr lang="en-US" sz="1550" dirty="0"/>
-          </a:p>
-        </p:txBody>
-      </p:sp>
-      <p:sp>
-        <p:nvSpPr>
-          <p:cNvPr id="15" name="Shape 13"/>
-          <p:cNvSpPr/>
-          <p:nvPr/>
-        </p:nvSpPr>
-        <p:spPr>
-          <a:xfrm>
-            <a:off x="7909560" y="3520440"/>
-            <a:ext cx="3154680" cy="1737360"/>
+            <a:pPr algn="ctr" indent="0" marL="0">
+              <a:buNone/>
+            </a:pPr>
+            <a:r>
+              <a:rPr lang="en-US" sz="900" b="1" dirty="0">
+                <a:solidFill>
+                  <a:srgbClr val="003A63"/>
+                </a:solidFill>
+                <a:latin typeface="Aptos" pitchFamily="34" charset="0"/>
+                <a:ea typeface="Aptos" pitchFamily="34" charset="-122"/>
+                <a:cs typeface="Aptos" pitchFamily="34" charset="-120"/>
+              </a:rPr>
+              <a:t>Decision rights</a:t>
+            </a:r>
+            <a:endParaRPr lang="en-US" sz="900" dirty="0"/>
+          </a:p>
+        </p:txBody>
+      </p:sp>
+      <p:sp>
+        <p:nvSpPr>
+          <p:cNvPr id="21" name="Shape 19"/>
+          <p:cNvSpPr/>
+          <p:nvPr/>
+        </p:nvSpPr>
+        <p:spPr>
+          <a:xfrm>
+            <a:off x="7635240" y="4498848"/>
+            <a:ext cx="3474720" cy="1143000"/>
           </a:xfrm>
           <a:prstGeom prst="roundRect">
             <a:avLst>
-              <a:gd name="adj" fmla="val 6316"/>
+              <a:gd name="adj" fmla="val 9600"/>
             </a:avLst>
           </a:prstGeom>
           <a:solidFill>
@@ -15592,14 +17191,14 @@
       </p:sp>
       <p:sp>
         <p:nvSpPr>
-          <p:cNvPr id="16" name="Text 14"/>
-          <p:cNvSpPr/>
-          <p:nvPr/>
-        </p:nvSpPr>
-        <p:spPr>
-          <a:xfrm>
-            <a:off x="8074152" y="3666744"/>
-            <a:ext cx="2825496" cy="256032"/>
+          <p:cNvPr id="22" name="Text 20"/>
+          <p:cNvSpPr/>
+          <p:nvPr/>
+        </p:nvSpPr>
+        <p:spPr>
+          <a:xfrm>
+            <a:off x="7799832" y="4645152"/>
+            <a:ext cx="3145536" cy="256032"/>
           </a:xfrm>
           <a:prstGeom prst="rect">
             <a:avLst/>
@@ -15623,7 +17222,7 @@
                 <a:ea typeface="Aptos" pitchFamily="34" charset="-122"/>
                 <a:cs typeface="Aptos" pitchFamily="34" charset="-120"/>
               </a:rPr>
-              <a:t>Use this for</a:t>
+              <a:t>What to document</a:t>
             </a:r>
             <a:endParaRPr lang="en-US" sz="1300" dirty="0"/>
           </a:p>
@@ -15631,14 +17230,14 @@
       </p:sp>
       <p:sp>
         <p:nvSpPr>
-          <p:cNvPr id="17" name="Text 15"/>
-          <p:cNvSpPr/>
-          <p:nvPr/>
-        </p:nvSpPr>
-        <p:spPr>
-          <a:xfrm>
-            <a:off x="8074152" y="4023360"/>
-            <a:ext cx="2825496" cy="1097280"/>
+          <p:cNvPr id="23" name="Text 21"/>
+          <p:cNvSpPr/>
+          <p:nvPr/>
+        </p:nvSpPr>
+        <p:spPr>
+          <a:xfrm>
+            <a:off x="7799832" y="5001768"/>
+            <a:ext cx="3145536" cy="502920"/>
           </a:xfrm>
           <a:prstGeom prst="rect">
             <a:avLst/>
@@ -15664,7 +17263,7 @@
                 <a:ea typeface="Aptos" pitchFamily="34" charset="-122"/>
                 <a:cs typeface="Aptos" pitchFamily="34" charset="-120"/>
               </a:rPr>
-              <a:t>Connect the concept to public health decisions, safeguards, documentation, or implementation work.</a:t>
+              <a:t>Translate this concept into clear decision rights, review steps, documentation expectations, and escalation paths before an AI-supported workflow is approved.</a:t>
             </a:r>
             <a:endParaRPr lang="en-US" sz="1550" dirty="0"/>
           </a:p>
@@ -15838,8 +17437,8 @@
         </p:nvSpPr>
         <p:spPr>
           <a:xfrm>
-            <a:off x="9966960" y="6537960"/>
-            <a:ext cx="1645920" cy="201168"/>
+            <a:off x="9646920" y="6537960"/>
+            <a:ext cx="1965960" cy="201168"/>
           </a:xfrm>
           <a:prstGeom prst="rect">
             <a:avLst/>
@@ -15863,7 +17462,7 @@
                 <a:ea typeface="Aptos" pitchFamily="34" charset="-122"/>
                 <a:cs typeface="Aptos" pitchFamily="34" charset="-120"/>
               </a:rPr>
-              <a:t>Â© Paula Soper</a:t>
+              <a:t>Copyright Paula Soper</a:t>
             </a:r>
             <a:endParaRPr lang="en-US" sz="800" dirty="0"/>
           </a:p>
@@ -15910,77 +17509,13 @@
       </p:sp>
       <p:sp>
         <p:nvSpPr>
-          <p:cNvPr id="8" name="Shape 6"/>
+          <p:cNvPr id="8" name="Text 6"/>
           <p:cNvSpPr/>
           <p:nvPr/>
         </p:nvSpPr>
         <p:spPr>
           <a:xfrm>
             <a:off x="640080" y="658368"/>
-            <a:ext cx="420624" cy="420624"/>
-          </a:xfrm>
-          <a:prstGeom prst="ellipse">
-            <a:avLst/>
-          </a:prstGeom>
-          <a:solidFill>
-            <a:srgbClr val="0068B7"/>
-          </a:solidFill>
-          <a:ln w="12700">
-            <a:solidFill>
-              <a:srgbClr val="0068B7"/>
-            </a:solidFill>
-            <a:prstDash val="solid"/>
-          </a:ln>
-        </p:spPr>
-      </p:sp>
-      <p:sp>
-        <p:nvSpPr>
-          <p:cNvPr id="9" name="Text 7"/>
-          <p:cNvSpPr/>
-          <p:nvPr/>
-        </p:nvSpPr>
-        <p:spPr>
-          <a:xfrm>
-            <a:off x="640080" y="731520"/>
-            <a:ext cx="420624" cy="164592"/>
-          </a:xfrm>
-          <a:prstGeom prst="rect">
-            <a:avLst/>
-          </a:prstGeom>
-          <a:noFill/>
-          <a:ln/>
-        </p:spPr>
-        <p:txBody>
-          <a:bodyPr wrap="square" lIns="0" tIns="0" rIns="0" bIns="0" rtlCol="0" anchor="ctr"/>
-          <a:lstStyle/>
-          <a:p>
-            <a:pPr algn="ctr" indent="0" marL="0">
-              <a:buNone/>
-            </a:pPr>
-            <a:r>
-              <a:rPr lang="en-US" sz="1100" b="1" dirty="0">
-                <a:solidFill>
-                  <a:srgbClr val="FFFFFF"/>
-                </a:solidFill>
-                <a:latin typeface="Aptos" pitchFamily="34" charset="0"/>
-                <a:ea typeface="Aptos" pitchFamily="34" charset="-122"/>
-                <a:cs typeface="Aptos" pitchFamily="34" charset="-120"/>
-              </a:rPr>
-              <a:t>4</a:t>
-            </a:r>
-            <a:endParaRPr lang="en-US" sz="1100" dirty="0"/>
-          </a:p>
-        </p:txBody>
-      </p:sp>
-      <p:sp>
-        <p:nvSpPr>
-          <p:cNvPr id="10" name="Text 8"/>
-          <p:cNvSpPr/>
-          <p:nvPr/>
-        </p:nvSpPr>
-        <p:spPr>
-          <a:xfrm>
-            <a:off x="640080" y="621792"/>
             <a:ext cx="10881360" cy="713232"/>
           </a:xfrm>
           <a:prstGeom prst="rect">
@@ -16015,14 +17550,14 @@
       </p:sp>
       <p:sp>
         <p:nvSpPr>
-          <p:cNvPr id="11" name="Text 9"/>
+          <p:cNvPr id="9" name="Text 7"/>
           <p:cNvSpPr/>
           <p:nvPr/>
         </p:nvSpPr>
         <p:spPr>
           <a:xfrm>
             <a:off x="868680" y="1508760"/>
-            <a:ext cx="6537960" cy="4160520"/>
+            <a:ext cx="6309360" cy="4160520"/>
           </a:xfrm>
           <a:prstGeom prst="rect">
             <a:avLst/>
@@ -16081,18 +17616,18 @@
       </p:sp>
       <p:sp>
         <p:nvSpPr>
-          <p:cNvPr id="12" name="Shape 10"/>
-          <p:cNvSpPr/>
-          <p:nvPr/>
-        </p:nvSpPr>
-        <p:spPr>
-          <a:xfrm>
-            <a:off x="7909560" y="1417320"/>
-            <a:ext cx="3154680" cy="1828800"/>
+          <p:cNvPr id="10" name="Shape 8"/>
+          <p:cNvSpPr/>
+          <p:nvPr/>
+        </p:nvSpPr>
+        <p:spPr>
+          <a:xfrm>
+            <a:off x="7635240" y="1325880"/>
+            <a:ext cx="3474720" cy="1325880"/>
           </a:xfrm>
           <a:prstGeom prst="roundRect">
             <a:avLst>
-              <a:gd name="adj" fmla="val 6000"/>
+              <a:gd name="adj" fmla="val 8276"/>
             </a:avLst>
           </a:prstGeom>
           <a:solidFill>
@@ -16108,14 +17643,14 @@
       </p:sp>
       <p:sp>
         <p:nvSpPr>
-          <p:cNvPr id="13" name="Text 11"/>
-          <p:cNvSpPr/>
-          <p:nvPr/>
-        </p:nvSpPr>
-        <p:spPr>
-          <a:xfrm>
-            <a:off x="8074152" y="1563624"/>
-            <a:ext cx="2825496" cy="256032"/>
+          <p:cNvPr id="11" name="Text 9"/>
+          <p:cNvSpPr/>
+          <p:nvPr/>
+        </p:nvSpPr>
+        <p:spPr>
+          <a:xfrm>
+            <a:off x="7799832" y="1472184"/>
+            <a:ext cx="3145536" cy="256032"/>
           </a:xfrm>
           <a:prstGeom prst="rect">
             <a:avLst/>
@@ -16139,7 +17674,7 @@
                 <a:ea typeface="Aptos" pitchFamily="34" charset="-122"/>
                 <a:cs typeface="Aptos" pitchFamily="34" charset="-120"/>
               </a:rPr>
-              <a:t>Key idea</a:t>
+              <a:t>Core concept</a:t>
             </a:r>
             <a:endParaRPr lang="en-US" sz="1300" dirty="0"/>
           </a:p>
@@ -16147,14 +17682,14 @@
       </p:sp>
       <p:sp>
         <p:nvSpPr>
-          <p:cNvPr id="14" name="Text 12"/>
-          <p:cNvSpPr/>
-          <p:nvPr/>
-        </p:nvSpPr>
-        <p:spPr>
-          <a:xfrm>
-            <a:off x="8074152" y="1920240"/>
-            <a:ext cx="2825496" cy="1188720"/>
+          <p:cNvPr id="12" name="Text 10"/>
+          <p:cNvSpPr/>
+          <p:nvPr/>
+        </p:nvSpPr>
+        <p:spPr>
+          <a:xfrm>
+            <a:off x="7799832" y="1828800"/>
+            <a:ext cx="3145536" cy="685800"/>
           </a:xfrm>
           <a:prstGeom prst="rect">
             <a:avLst/>
@@ -16188,18 +17723,159 @@
       </p:sp>
       <p:sp>
         <p:nvSpPr>
-          <p:cNvPr id="15" name="Shape 13"/>
-          <p:cNvSpPr/>
-          <p:nvPr/>
-        </p:nvSpPr>
-        <p:spPr>
-          <a:xfrm>
-            <a:off x="7909560" y="3520440"/>
-            <a:ext cx="3154680" cy="1737360"/>
+          <p:cNvPr id="13" name="Shape 11"/>
+          <p:cNvSpPr/>
+          <p:nvPr/>
+        </p:nvSpPr>
+        <p:spPr>
+          <a:xfrm>
+            <a:off x="7635240" y="2788920"/>
+            <a:ext cx="3474720" cy="1536192"/>
           </a:xfrm>
           <a:prstGeom prst="roundRect">
             <a:avLst>
-              <a:gd name="adj" fmla="val 6316"/>
+              <a:gd name="adj" fmla="val 7143"/>
+            </a:avLst>
+          </a:prstGeom>
+          <a:solidFill>
+            <a:srgbClr val="FFFFFF">
+              <a:alpha val="88000"/>
+            </a:srgbClr>
+          </a:solidFill>
+          <a:ln w="12700">
+            <a:solidFill>
+              <a:srgbClr val="D6E8F2"/>
+            </a:solidFill>
+            <a:prstDash val="solid"/>
+          </a:ln>
+        </p:spPr>
+      </p:sp>
+      <p:sp>
+        <p:nvSpPr>
+          <p:cNvPr id="14" name="Shape 12"/>
+          <p:cNvSpPr/>
+          <p:nvPr/>
+        </p:nvSpPr>
+        <p:spPr>
+          <a:xfrm>
+            <a:off x="8074152" y="3291840"/>
+            <a:ext cx="2596896" cy="749808"/>
+          </a:xfrm>
+          <a:prstGeom prst="rect">
+            <a:avLst/>
+          </a:prstGeom>
+          <a:solidFill>
+            <a:srgbClr val="EAF6F8"/>
+          </a:solidFill>
+          <a:ln w="12700">
+            <a:solidFill>
+              <a:srgbClr val="8ABBD8"/>
+            </a:solidFill>
+            <a:prstDash val="solid"/>
+          </a:ln>
+        </p:spPr>
+      </p:sp>
+      <p:sp>
+        <p:nvSpPr>
+          <p:cNvPr id="15" name="Shape 13"/>
+          <p:cNvSpPr/>
+          <p:nvPr/>
+        </p:nvSpPr>
+        <p:spPr>
+          <a:xfrm>
+            <a:off x="8202168" y="3721608"/>
+            <a:ext cx="2340864" cy="0"/>
+          </a:xfrm>
+          <a:prstGeom prst="line">
+            <a:avLst/>
+          </a:prstGeom>
+          <a:noFill/>
+          <a:ln w="19050">
+            <a:solidFill>
+              <a:srgbClr val="0068B7"/>
+            </a:solidFill>
+            <a:prstDash val="solid"/>
+          </a:ln>
+        </p:spPr>
+      </p:sp>
+      <p:sp>
+        <p:nvSpPr>
+          <p:cNvPr id="16" name="Shape 14"/>
+          <p:cNvSpPr/>
+          <p:nvPr/>
+        </p:nvSpPr>
+        <p:spPr>
+          <a:xfrm>
+            <a:off x="9198864" y="4206240"/>
+            <a:ext cx="347472" cy="347472"/>
+          </a:xfrm>
+          <a:prstGeom prst="ellipse">
+            <a:avLst/>
+          </a:prstGeom>
+          <a:solidFill>
+            <a:srgbClr val="2F8A28"/>
+          </a:solidFill>
+          <a:ln w="12700">
+            <a:solidFill>
+              <a:srgbClr val="2F8A28"/>
+            </a:solidFill>
+            <a:prstDash val="solid"/>
+          </a:ln>
+        </p:spPr>
+      </p:sp>
+      <p:sp>
+        <p:nvSpPr>
+          <p:cNvPr id="17" name="Text 15"/>
+          <p:cNvSpPr/>
+          <p:nvPr/>
+        </p:nvSpPr>
+        <p:spPr>
+          <a:xfrm>
+            <a:off x="7909560" y="3977640"/>
+            <a:ext cx="2926080" cy="182880"/>
+          </a:xfrm>
+          <a:prstGeom prst="rect">
+            <a:avLst/>
+          </a:prstGeom>
+          <a:noFill/>
+          <a:ln/>
+        </p:spPr>
+        <p:txBody>
+          <a:bodyPr wrap="square" lIns="0" tIns="0" rIns="0" bIns="0" rtlCol="0" anchor="ctr"/>
+          <a:lstStyle/>
+          <a:p>
+            <a:pPr algn="ctr" indent="0" marL="0">
+              <a:buNone/>
+            </a:pPr>
+            <a:r>
+              <a:rPr lang="en-US" sz="1000" dirty="0">
+                <a:solidFill>
+                  <a:srgbClr val="003A63"/>
+                </a:solidFill>
+                <a:latin typeface="Aptos" pitchFamily="34" charset="0"/>
+                <a:ea typeface="Aptos" pitchFamily="34" charset="-122"/>
+                <a:cs typeface="Aptos" pitchFamily="34" charset="-120"/>
+              </a:rPr>
+              <a:t>Concept to action</a:t>
+            </a:r>
+            <a:endParaRPr lang="en-US" sz="1000" dirty="0"/>
+          </a:p>
+        </p:txBody>
+      </p:sp>
+      <p:sp>
+        <p:nvSpPr>
+          <p:cNvPr id="18" name="Shape 16"/>
+          <p:cNvSpPr/>
+          <p:nvPr/>
+        </p:nvSpPr>
+        <p:spPr>
+          <a:xfrm>
+            <a:off x="7635240" y="4498848"/>
+            <a:ext cx="3474720" cy="1143000"/>
+          </a:xfrm>
+          <a:prstGeom prst="roundRect">
+            <a:avLst>
+              <a:gd name="adj" fmla="val 9600"/>
             </a:avLst>
           </a:prstGeom>
           <a:solidFill>
@@ -16215,14 +17891,14 @@
       </p:sp>
       <p:sp>
         <p:nvSpPr>
-          <p:cNvPr id="16" name="Text 14"/>
-          <p:cNvSpPr/>
-          <p:nvPr/>
-        </p:nvSpPr>
-        <p:spPr>
-          <a:xfrm>
-            <a:off x="8074152" y="3666744"/>
-            <a:ext cx="2825496" cy="256032"/>
+          <p:cNvPr id="19" name="Text 17"/>
+          <p:cNvSpPr/>
+          <p:nvPr/>
+        </p:nvSpPr>
+        <p:spPr>
+          <a:xfrm>
+            <a:off x="7799832" y="4645152"/>
+            <a:ext cx="3145536" cy="256032"/>
           </a:xfrm>
           <a:prstGeom prst="rect">
             <a:avLst/>
@@ -16246,7 +17922,7 @@
                 <a:ea typeface="Aptos" pitchFamily="34" charset="-122"/>
                 <a:cs typeface="Aptos" pitchFamily="34" charset="-120"/>
               </a:rPr>
-              <a:t>Use this for</a:t>
+              <a:t>Apply it</a:t>
             </a:r>
             <a:endParaRPr lang="en-US" sz="1300" dirty="0"/>
           </a:p>
@@ -16254,14 +17930,14 @@
       </p:sp>
       <p:sp>
         <p:nvSpPr>
-          <p:cNvPr id="17" name="Text 15"/>
-          <p:cNvSpPr/>
-          <p:nvPr/>
-        </p:nvSpPr>
-        <p:spPr>
-          <a:xfrm>
-            <a:off x="8074152" y="4023360"/>
-            <a:ext cx="2825496" cy="1097280"/>
+          <p:cNvPr id="20" name="Text 18"/>
+          <p:cNvSpPr/>
+          <p:nvPr/>
+        </p:nvSpPr>
+        <p:spPr>
+          <a:xfrm>
+            <a:off x="7799832" y="5001768"/>
+            <a:ext cx="3145536" cy="502920"/>
           </a:xfrm>
           <a:prstGeom prst="rect">
             <a:avLst/>
@@ -16287,7 +17963,7 @@
                 <a:ea typeface="Aptos" pitchFamily="34" charset="-122"/>
                 <a:cs typeface="Aptos" pitchFamily="34" charset="-120"/>
               </a:rPr>
-              <a:t>Connect the concept to public health decisions, safeguards, documentation, or implementation work.</a:t>
+              <a:t>Connect the concept to public health purpose, responsible use, required safeguards, documentation, and the next action a department should take.</a:t>
             </a:r>
             <a:endParaRPr lang="en-US" sz="1550" dirty="0"/>
           </a:p>
@@ -16461,8 +18137,8 @@
         </p:nvSpPr>
         <p:spPr>
           <a:xfrm>
-            <a:off x="9966960" y="6537960"/>
-            <a:ext cx="1645920" cy="201168"/>
+            <a:off x="9646920" y="6537960"/>
+            <a:ext cx="1965960" cy="201168"/>
           </a:xfrm>
           <a:prstGeom prst="rect">
             <a:avLst/>
@@ -16486,7 +18162,7 @@
                 <a:ea typeface="Aptos" pitchFamily="34" charset="-122"/>
                 <a:cs typeface="Aptos" pitchFamily="34" charset="-120"/>
               </a:rPr>
-              <a:t>Â© Paula Soper</a:t>
+              <a:t>Copyright Paula Soper</a:t>
             </a:r>
             <a:endParaRPr lang="en-US" sz="800" dirty="0"/>
           </a:p>
@@ -16533,77 +18209,13 @@
       </p:sp>
       <p:sp>
         <p:nvSpPr>
-          <p:cNvPr id="8" name="Shape 6"/>
+          <p:cNvPr id="8" name="Text 6"/>
           <p:cNvSpPr/>
           <p:nvPr/>
         </p:nvSpPr>
         <p:spPr>
           <a:xfrm>
             <a:off x="640080" y="658368"/>
-            <a:ext cx="420624" cy="420624"/>
-          </a:xfrm>
-          <a:prstGeom prst="ellipse">
-            <a:avLst/>
-          </a:prstGeom>
-          <a:solidFill>
-            <a:srgbClr val="0068B7"/>
-          </a:solidFill>
-          <a:ln w="12700">
-            <a:solidFill>
-              <a:srgbClr val="0068B7"/>
-            </a:solidFill>
-            <a:prstDash val="solid"/>
-          </a:ln>
-        </p:spPr>
-      </p:sp>
-      <p:sp>
-        <p:nvSpPr>
-          <p:cNvPr id="9" name="Text 7"/>
-          <p:cNvSpPr/>
-          <p:nvPr/>
-        </p:nvSpPr>
-        <p:spPr>
-          <a:xfrm>
-            <a:off x="640080" y="731520"/>
-            <a:ext cx="420624" cy="164592"/>
-          </a:xfrm>
-          <a:prstGeom prst="rect">
-            <a:avLst/>
-          </a:prstGeom>
-          <a:noFill/>
-          <a:ln/>
-        </p:spPr>
-        <p:txBody>
-          <a:bodyPr wrap="square" lIns="0" tIns="0" rIns="0" bIns="0" rtlCol="0" anchor="ctr"/>
-          <a:lstStyle/>
-          <a:p>
-            <a:pPr algn="ctr" indent="0" marL="0">
-              <a:buNone/>
-            </a:pPr>
-            <a:r>
-              <a:rPr lang="en-US" sz="1100" b="1" dirty="0">
-                <a:solidFill>
-                  <a:srgbClr val="FFFFFF"/>
-                </a:solidFill>
-                <a:latin typeface="Aptos" pitchFamily="34" charset="0"/>
-                <a:ea typeface="Aptos" pitchFamily="34" charset="-122"/>
-                <a:cs typeface="Aptos" pitchFamily="34" charset="-120"/>
-              </a:rPr>
-              <a:t>5</a:t>
-            </a:r>
-            <a:endParaRPr lang="en-US" sz="1100" dirty="0"/>
-          </a:p>
-        </p:txBody>
-      </p:sp>
-      <p:sp>
-        <p:nvSpPr>
-          <p:cNvPr id="10" name="Text 8"/>
-          <p:cNvSpPr/>
-          <p:nvPr/>
-        </p:nvSpPr>
-        <p:spPr>
-          <a:xfrm>
-            <a:off x="640080" y="621792"/>
             <a:ext cx="10881360" cy="713232"/>
           </a:xfrm>
           <a:prstGeom prst="rect">
@@ -16638,14 +18250,14 @@
       </p:sp>
       <p:sp>
         <p:nvSpPr>
-          <p:cNvPr id="11" name="Text 9"/>
+          <p:cNvPr id="9" name="Text 7"/>
           <p:cNvSpPr/>
           <p:nvPr/>
         </p:nvSpPr>
         <p:spPr>
           <a:xfrm>
             <a:off x="868680" y="1508760"/>
-            <a:ext cx="6537960" cy="4160520"/>
+            <a:ext cx="6309360" cy="4160520"/>
           </a:xfrm>
           <a:prstGeom prst="rect">
             <a:avLst/>
@@ -16704,18 +18316,18 @@
       </p:sp>
       <p:sp>
         <p:nvSpPr>
-          <p:cNvPr id="12" name="Shape 10"/>
-          <p:cNvSpPr/>
-          <p:nvPr/>
-        </p:nvSpPr>
-        <p:spPr>
-          <a:xfrm>
-            <a:off x="7909560" y="1417320"/>
-            <a:ext cx="3154680" cy="1828800"/>
+          <p:cNvPr id="10" name="Shape 8"/>
+          <p:cNvSpPr/>
+          <p:nvPr/>
+        </p:nvSpPr>
+        <p:spPr>
+          <a:xfrm>
+            <a:off x="7635240" y="1325880"/>
+            <a:ext cx="3474720" cy="1325880"/>
           </a:xfrm>
           <a:prstGeom prst="roundRect">
             <a:avLst>
-              <a:gd name="adj" fmla="val 6000"/>
+              <a:gd name="adj" fmla="val 8276"/>
             </a:avLst>
           </a:prstGeom>
           <a:solidFill>
@@ -16731,14 +18343,14 @@
       </p:sp>
       <p:sp>
         <p:nvSpPr>
-          <p:cNvPr id="13" name="Text 11"/>
-          <p:cNvSpPr/>
-          <p:nvPr/>
-        </p:nvSpPr>
-        <p:spPr>
-          <a:xfrm>
-            <a:off x="8074152" y="1563624"/>
-            <a:ext cx="2825496" cy="256032"/>
+          <p:cNvPr id="11" name="Text 9"/>
+          <p:cNvSpPr/>
+          <p:nvPr/>
+        </p:nvSpPr>
+        <p:spPr>
+          <a:xfrm>
+            <a:off x="7799832" y="1472184"/>
+            <a:ext cx="3145536" cy="256032"/>
           </a:xfrm>
           <a:prstGeom prst="rect">
             <a:avLst/>
@@ -16762,7 +18374,7 @@
                 <a:ea typeface="Aptos" pitchFamily="34" charset="-122"/>
                 <a:cs typeface="Aptos" pitchFamily="34" charset="-120"/>
               </a:rPr>
-              <a:t>Key idea</a:t>
+              <a:t>Core concept</a:t>
             </a:r>
             <a:endParaRPr lang="en-US" sz="1300" dirty="0"/>
           </a:p>
@@ -16770,14 +18382,14 @@
       </p:sp>
       <p:sp>
         <p:nvSpPr>
-          <p:cNvPr id="14" name="Text 12"/>
-          <p:cNvSpPr/>
-          <p:nvPr/>
-        </p:nvSpPr>
-        <p:spPr>
-          <a:xfrm>
-            <a:off x="8074152" y="1920240"/>
-            <a:ext cx="2825496" cy="1188720"/>
+          <p:cNvPr id="12" name="Text 10"/>
+          <p:cNvSpPr/>
+          <p:nvPr/>
+        </p:nvSpPr>
+        <p:spPr>
+          <a:xfrm>
+            <a:off x="7799832" y="1828800"/>
+            <a:ext cx="3145536" cy="685800"/>
           </a:xfrm>
           <a:prstGeom prst="rect">
             <a:avLst/>
@@ -16811,18 +18423,159 @@
       </p:sp>
       <p:sp>
         <p:nvSpPr>
-          <p:cNvPr id="15" name="Shape 13"/>
-          <p:cNvSpPr/>
-          <p:nvPr/>
-        </p:nvSpPr>
-        <p:spPr>
-          <a:xfrm>
-            <a:off x="7909560" y="3520440"/>
-            <a:ext cx="3154680" cy="1737360"/>
+          <p:cNvPr id="13" name="Shape 11"/>
+          <p:cNvSpPr/>
+          <p:nvPr/>
+        </p:nvSpPr>
+        <p:spPr>
+          <a:xfrm>
+            <a:off x="7635240" y="2788920"/>
+            <a:ext cx="3474720" cy="1536192"/>
           </a:xfrm>
           <a:prstGeom prst="roundRect">
             <a:avLst>
-              <a:gd name="adj" fmla="val 6316"/>
+              <a:gd name="adj" fmla="val 7143"/>
+            </a:avLst>
+          </a:prstGeom>
+          <a:solidFill>
+            <a:srgbClr val="FFFFFF">
+              <a:alpha val="88000"/>
+            </a:srgbClr>
+          </a:solidFill>
+          <a:ln w="12700">
+            <a:solidFill>
+              <a:srgbClr val="D6E8F2"/>
+            </a:solidFill>
+            <a:prstDash val="solid"/>
+          </a:ln>
+        </p:spPr>
+      </p:sp>
+      <p:sp>
+        <p:nvSpPr>
+          <p:cNvPr id="14" name="Shape 12"/>
+          <p:cNvSpPr/>
+          <p:nvPr/>
+        </p:nvSpPr>
+        <p:spPr>
+          <a:xfrm>
+            <a:off x="8074152" y="3291840"/>
+            <a:ext cx="2596896" cy="749808"/>
+          </a:xfrm>
+          <a:prstGeom prst="rect">
+            <a:avLst/>
+          </a:prstGeom>
+          <a:solidFill>
+            <a:srgbClr val="EAF6F8"/>
+          </a:solidFill>
+          <a:ln w="12700">
+            <a:solidFill>
+              <a:srgbClr val="8ABBD8"/>
+            </a:solidFill>
+            <a:prstDash val="solid"/>
+          </a:ln>
+        </p:spPr>
+      </p:sp>
+      <p:sp>
+        <p:nvSpPr>
+          <p:cNvPr id="15" name="Shape 13"/>
+          <p:cNvSpPr/>
+          <p:nvPr/>
+        </p:nvSpPr>
+        <p:spPr>
+          <a:xfrm>
+            <a:off x="8202168" y="3721608"/>
+            <a:ext cx="2340864" cy="0"/>
+          </a:xfrm>
+          <a:prstGeom prst="line">
+            <a:avLst/>
+          </a:prstGeom>
+          <a:noFill/>
+          <a:ln w="19050">
+            <a:solidFill>
+              <a:srgbClr val="0068B7"/>
+            </a:solidFill>
+            <a:prstDash val="solid"/>
+          </a:ln>
+        </p:spPr>
+      </p:sp>
+      <p:sp>
+        <p:nvSpPr>
+          <p:cNvPr id="16" name="Shape 14"/>
+          <p:cNvSpPr/>
+          <p:nvPr/>
+        </p:nvSpPr>
+        <p:spPr>
+          <a:xfrm>
+            <a:off x="9198864" y="4206240"/>
+            <a:ext cx="347472" cy="347472"/>
+          </a:xfrm>
+          <a:prstGeom prst="ellipse">
+            <a:avLst/>
+          </a:prstGeom>
+          <a:solidFill>
+            <a:srgbClr val="2F8A28"/>
+          </a:solidFill>
+          <a:ln w="12700">
+            <a:solidFill>
+              <a:srgbClr val="2F8A28"/>
+            </a:solidFill>
+            <a:prstDash val="solid"/>
+          </a:ln>
+        </p:spPr>
+      </p:sp>
+      <p:sp>
+        <p:nvSpPr>
+          <p:cNvPr id="17" name="Text 15"/>
+          <p:cNvSpPr/>
+          <p:nvPr/>
+        </p:nvSpPr>
+        <p:spPr>
+          <a:xfrm>
+            <a:off x="7909560" y="3977640"/>
+            <a:ext cx="2926080" cy="182880"/>
+          </a:xfrm>
+          <a:prstGeom prst="rect">
+            <a:avLst/>
+          </a:prstGeom>
+          <a:noFill/>
+          <a:ln/>
+        </p:spPr>
+        <p:txBody>
+          <a:bodyPr wrap="square" lIns="0" tIns="0" rIns="0" bIns="0" rtlCol="0" anchor="ctr"/>
+          <a:lstStyle/>
+          <a:p>
+            <a:pPr algn="ctr" indent="0" marL="0">
+              <a:buNone/>
+            </a:pPr>
+            <a:r>
+              <a:rPr lang="en-US" sz="1000" dirty="0">
+                <a:solidFill>
+                  <a:srgbClr val="003A63"/>
+                </a:solidFill>
+                <a:latin typeface="Aptos" pitchFamily="34" charset="0"/>
+                <a:ea typeface="Aptos" pitchFamily="34" charset="-122"/>
+                <a:cs typeface="Aptos" pitchFamily="34" charset="-120"/>
+              </a:rPr>
+              <a:t>Concept to action</a:t>
+            </a:r>
+            <a:endParaRPr lang="en-US" sz="1000" dirty="0"/>
+          </a:p>
+        </p:txBody>
+      </p:sp>
+      <p:sp>
+        <p:nvSpPr>
+          <p:cNvPr id="18" name="Shape 16"/>
+          <p:cNvSpPr/>
+          <p:nvPr/>
+        </p:nvSpPr>
+        <p:spPr>
+          <a:xfrm>
+            <a:off x="7635240" y="4498848"/>
+            <a:ext cx="3474720" cy="1143000"/>
+          </a:xfrm>
+          <a:prstGeom prst="roundRect">
+            <a:avLst>
+              <a:gd name="adj" fmla="val 9600"/>
             </a:avLst>
           </a:prstGeom>
           <a:solidFill>
@@ -16838,14 +18591,14 @@
       </p:sp>
       <p:sp>
         <p:nvSpPr>
-          <p:cNvPr id="16" name="Text 14"/>
-          <p:cNvSpPr/>
-          <p:nvPr/>
-        </p:nvSpPr>
-        <p:spPr>
-          <a:xfrm>
-            <a:off x="8074152" y="3666744"/>
-            <a:ext cx="2825496" cy="256032"/>
+          <p:cNvPr id="19" name="Text 17"/>
+          <p:cNvSpPr/>
+          <p:nvPr/>
+        </p:nvSpPr>
+        <p:spPr>
+          <a:xfrm>
+            <a:off x="7799832" y="4645152"/>
+            <a:ext cx="3145536" cy="256032"/>
           </a:xfrm>
           <a:prstGeom prst="rect">
             <a:avLst/>
@@ -16869,7 +18622,7 @@
                 <a:ea typeface="Aptos" pitchFamily="34" charset="-122"/>
                 <a:cs typeface="Aptos" pitchFamily="34" charset="-120"/>
               </a:rPr>
-              <a:t>Use this for</a:t>
+              <a:t>Apply it</a:t>
             </a:r>
             <a:endParaRPr lang="en-US" sz="1300" dirty="0"/>
           </a:p>
@@ -16877,14 +18630,14 @@
       </p:sp>
       <p:sp>
         <p:nvSpPr>
-          <p:cNvPr id="17" name="Text 15"/>
-          <p:cNvSpPr/>
-          <p:nvPr/>
-        </p:nvSpPr>
-        <p:spPr>
-          <a:xfrm>
-            <a:off x="8074152" y="4023360"/>
-            <a:ext cx="2825496" cy="1097280"/>
+          <p:cNvPr id="20" name="Text 18"/>
+          <p:cNvSpPr/>
+          <p:nvPr/>
+        </p:nvSpPr>
+        <p:spPr>
+          <a:xfrm>
+            <a:off x="7799832" y="5001768"/>
+            <a:ext cx="3145536" cy="502920"/>
           </a:xfrm>
           <a:prstGeom prst="rect">
             <a:avLst/>
@@ -16910,7 +18663,7 @@
                 <a:ea typeface="Aptos" pitchFamily="34" charset="-122"/>
                 <a:cs typeface="Aptos" pitchFamily="34" charset="-120"/>
               </a:rPr>
-              <a:t>Connect the concept to public health decisions, safeguards, documentation, or implementation work.</a:t>
+              <a:t>Connect the concept to public health purpose, responsible use, required safeguards, documentation, and the next action a department should take.</a:t>
             </a:r>
             <a:endParaRPr lang="en-US" sz="1550" dirty="0"/>
           </a:p>

--- a/downloads/presentations/modules/arc-250.pptx
+++ b/downloads/presentations/modules/arc-250.pptx
@@ -3615,13 +3615,11 @@
             </a:avLst>
           </a:prstGeom>
           <a:solidFill>
-            <a:srgbClr val="FFFFFF">
-              <a:alpha val="88000"/>
-            </a:srgbClr>
+            <a:srgbClr val="FFFFFF"/>
           </a:solidFill>
           <a:ln w="12700">
             <a:solidFill>
-              <a:srgbClr val="D6E8F2"/>
+              <a:srgbClr val="B9D7E6"/>
             </a:solidFill>
             <a:prstDash val="solid"/>
           </a:ln>
@@ -3629,119 +3627,112 @@
       </p:sp>
       <p:sp>
         <p:nvSpPr>
-          <p:cNvPr id="14" name="Shape 12"/>
-          <p:cNvSpPr/>
-          <p:nvPr/>
-        </p:nvSpPr>
-        <p:spPr>
-          <a:xfrm>
-            <a:off x="8074152" y="3291840"/>
-            <a:ext cx="2596896" cy="749808"/>
-          </a:xfrm>
-          <a:prstGeom prst="rect">
-            <a:avLst/>
-          </a:prstGeom>
-          <a:solidFill>
-            <a:srgbClr val="EAF6F8"/>
-          </a:solidFill>
-          <a:ln w="12700">
-            <a:solidFill>
-              <a:srgbClr val="8ABBD8"/>
-            </a:solidFill>
-            <a:prstDash val="solid"/>
-          </a:ln>
-        </p:spPr>
-      </p:sp>
-      <p:sp>
-        <p:nvSpPr>
-          <p:cNvPr id="15" name="Shape 13"/>
-          <p:cNvSpPr/>
-          <p:nvPr/>
-        </p:nvSpPr>
-        <p:spPr>
-          <a:xfrm>
-            <a:off x="8202168" y="3721608"/>
-            <a:ext cx="2340864" cy="0"/>
-          </a:xfrm>
-          <a:prstGeom prst="line">
-            <a:avLst/>
-          </a:prstGeom>
-          <a:noFill/>
-          <a:ln w="19050">
-            <a:solidFill>
-              <a:srgbClr val="0068B7"/>
-            </a:solidFill>
-            <a:prstDash val="solid"/>
-          </a:ln>
-        </p:spPr>
+          <p:cNvPr id="14" name="Text 12"/>
+          <p:cNvSpPr/>
+          <p:nvPr/>
+        </p:nvSpPr>
+        <p:spPr>
+          <a:xfrm>
+            <a:off x="7799832" y="2935224"/>
+            <a:ext cx="3145536" cy="256032"/>
+          </a:xfrm>
+          <a:prstGeom prst="rect">
+            <a:avLst/>
+          </a:prstGeom>
+          <a:noFill/>
+          <a:ln/>
+        </p:spPr>
+        <p:txBody>
+          <a:bodyPr wrap="square" lIns="0" tIns="0" rIns="0" bIns="0" rtlCol="0" anchor="ctr"/>
+          <a:lstStyle/>
+          <a:p>
+            <a:pPr indent="0" marL="0">
+              <a:buNone/>
+            </a:pPr>
+            <a:r>
+              <a:rPr lang="en-US" sz="1300" b="1" dirty="0">
+                <a:solidFill>
+                  <a:srgbClr val="0068B7"/>
+                </a:solidFill>
+                <a:latin typeface="Aptos" pitchFamily="34" charset="0"/>
+                <a:ea typeface="Aptos" pitchFamily="34" charset="-122"/>
+                <a:cs typeface="Aptos" pitchFamily="34" charset="-120"/>
+              </a:rPr>
+              <a:t>Concept checkpoints</a:t>
+            </a:r>
+            <a:endParaRPr lang="en-US" sz="1300" dirty="0"/>
+          </a:p>
+        </p:txBody>
+      </p:sp>
+      <p:sp>
+        <p:nvSpPr>
+          <p:cNvPr id="15" name="Text 13"/>
+          <p:cNvSpPr/>
+          <p:nvPr/>
+        </p:nvSpPr>
+        <p:spPr>
+          <a:xfrm>
+            <a:off x="7818120" y="3300984"/>
+            <a:ext cx="3090672" cy="877824"/>
+          </a:xfrm>
+          <a:prstGeom prst="rect">
+            <a:avLst/>
+          </a:prstGeom>
+          <a:noFill/>
+          <a:ln/>
+        </p:spPr>
+        <p:txBody>
+          <a:bodyPr wrap="square" lIns="254" tIns="254" rIns="254" bIns="254" rtlCol="0" anchor="t">
+            <a:normAutofit/>
+          </a:bodyPr>
+          <a:lstStyle/>
+          <a:p>
+            <a:r>
+              <a:rPr lang="en-US" sz="1380" dirty="0">
+                <a:solidFill>
+                  <a:srgbClr val="17364A"/>
+                </a:solidFill>
+                <a:latin typeface="Aptos" pitchFamily="34" charset="0"/>
+                <a:ea typeface="Aptos" pitchFamily="34" charset="-122"/>
+                <a:cs typeface="Aptos" pitchFamily="34" charset="-120"/>
+              </a:rPr>
+              <a:t>It can support common data access patterns, but public health workflows may require.</a:t>
+            </a:r>
+            <a:endParaRPr lang="en-US" sz="1380" dirty="0"/>
+          </a:p>
+          <a:p>
+            <a:r>
+              <a:rPr lang="en-US" sz="1380" dirty="0">
+                <a:solidFill>
+                  <a:srgbClr val="17364A"/>
+                </a:solidFill>
+                <a:latin typeface="Aptos" pitchFamily="34" charset="0"/>
+                <a:ea typeface="Aptos" pitchFamily="34" charset="-122"/>
+                <a:cs typeface="Aptos" pitchFamily="34" charset="-120"/>
+              </a:rPr>
+              <a:t>Implementation guide.</a:t>
+            </a:r>
+            <a:endParaRPr lang="en-US" sz="1380" dirty="0"/>
+          </a:p>
+          <a:p>
+            <a:r>
+              <a:rPr lang="en-US" sz="1380" dirty="0">
+                <a:solidFill>
+                  <a:srgbClr val="17364A"/>
+                </a:solidFill>
+                <a:latin typeface="Aptos" pitchFamily="34" charset="0"/>
+                <a:ea typeface="Aptos" pitchFamily="34" charset="-122"/>
+                <a:cs typeface="Aptos" pitchFamily="34" charset="-120"/>
+              </a:rPr>
+              <a:t>A FHIR implementation guide defines how FHIR should be used for a particular use case.</a:t>
+            </a:r>
+            <a:endParaRPr lang="en-US" sz="1380" dirty="0"/>
+          </a:p>
+        </p:txBody>
       </p:sp>
       <p:sp>
         <p:nvSpPr>
           <p:cNvPr id="16" name="Shape 14"/>
-          <p:cNvSpPr/>
-          <p:nvPr/>
-        </p:nvSpPr>
-        <p:spPr>
-          <a:xfrm>
-            <a:off x="9198864" y="4206240"/>
-            <a:ext cx="347472" cy="347472"/>
-          </a:xfrm>
-          <a:prstGeom prst="ellipse">
-            <a:avLst/>
-          </a:prstGeom>
-          <a:solidFill>
-            <a:srgbClr val="2F8A28"/>
-          </a:solidFill>
-          <a:ln w="12700">
-            <a:solidFill>
-              <a:srgbClr val="2F8A28"/>
-            </a:solidFill>
-            <a:prstDash val="solid"/>
-          </a:ln>
-        </p:spPr>
-      </p:sp>
-      <p:sp>
-        <p:nvSpPr>
-          <p:cNvPr id="17" name="Text 15"/>
-          <p:cNvSpPr/>
-          <p:nvPr/>
-        </p:nvSpPr>
-        <p:spPr>
-          <a:xfrm>
-            <a:off x="7909560" y="3977640"/>
-            <a:ext cx="2926080" cy="182880"/>
-          </a:xfrm>
-          <a:prstGeom prst="rect">
-            <a:avLst/>
-          </a:prstGeom>
-          <a:noFill/>
-          <a:ln/>
-        </p:spPr>
-        <p:txBody>
-          <a:bodyPr wrap="square" lIns="0" tIns="0" rIns="0" bIns="0" rtlCol="0" anchor="ctr"/>
-          <a:lstStyle/>
-          <a:p>
-            <a:pPr algn="ctr" indent="0" marL="0">
-              <a:buNone/>
-            </a:pPr>
-            <a:r>
-              <a:rPr lang="en-US" sz="1000" dirty="0">
-                <a:solidFill>
-                  <a:srgbClr val="003A63"/>
-                </a:solidFill>
-                <a:latin typeface="Aptos" pitchFamily="34" charset="0"/>
-                <a:ea typeface="Aptos" pitchFamily="34" charset="-122"/>
-                <a:cs typeface="Aptos" pitchFamily="34" charset="-120"/>
-              </a:rPr>
-              <a:t>Concept to action</a:t>
-            </a:r>
-            <a:endParaRPr lang="en-US" sz="1000" dirty="0"/>
-          </a:p>
-        </p:txBody>
-      </p:sp>
-      <p:sp>
-        <p:nvSpPr>
-          <p:cNvPr id="18" name="Shape 16"/>
           <p:cNvSpPr/>
           <p:nvPr/>
         </p:nvSpPr>
@@ -3768,7 +3759,7 @@
       </p:sp>
       <p:sp>
         <p:nvSpPr>
-          <p:cNvPr id="19" name="Text 17"/>
+          <p:cNvPr id="17" name="Text 15"/>
           <p:cNvSpPr/>
           <p:nvPr/>
         </p:nvSpPr>
@@ -3807,7 +3798,7 @@
       </p:sp>
       <p:sp>
         <p:nvSpPr>
-          <p:cNvPr id="20" name="Text 18"/>
+          <p:cNvPr id="18" name="Text 16"/>
           <p:cNvSpPr/>
           <p:nvPr/>
         </p:nvSpPr>
@@ -4315,13 +4306,11 @@
             </a:avLst>
           </a:prstGeom>
           <a:solidFill>
-            <a:srgbClr val="FFFFFF">
-              <a:alpha val="88000"/>
-            </a:srgbClr>
+            <a:srgbClr val="FFFFFF"/>
           </a:solidFill>
           <a:ln w="12700">
             <a:solidFill>
-              <a:srgbClr val="D6E8F2"/>
+              <a:srgbClr val="B9D7E6"/>
             </a:solidFill>
             <a:prstDash val="solid"/>
           </a:ln>
@@ -4329,119 +4318,112 @@
       </p:sp>
       <p:sp>
         <p:nvSpPr>
-          <p:cNvPr id="14" name="Shape 12"/>
-          <p:cNvSpPr/>
-          <p:nvPr/>
-        </p:nvSpPr>
-        <p:spPr>
-          <a:xfrm>
-            <a:off x="8074152" y="3291840"/>
-            <a:ext cx="2596896" cy="749808"/>
-          </a:xfrm>
-          <a:prstGeom prst="rect">
-            <a:avLst/>
-          </a:prstGeom>
-          <a:solidFill>
-            <a:srgbClr val="EAF6F8"/>
-          </a:solidFill>
-          <a:ln w="12700">
-            <a:solidFill>
-              <a:srgbClr val="8ABBD8"/>
-            </a:solidFill>
-            <a:prstDash val="solid"/>
-          </a:ln>
-        </p:spPr>
-      </p:sp>
-      <p:sp>
-        <p:nvSpPr>
-          <p:cNvPr id="15" name="Shape 13"/>
-          <p:cNvSpPr/>
-          <p:nvPr/>
-        </p:nvSpPr>
-        <p:spPr>
-          <a:xfrm>
-            <a:off x="8202168" y="3721608"/>
-            <a:ext cx="2340864" cy="0"/>
-          </a:xfrm>
-          <a:prstGeom prst="line">
-            <a:avLst/>
-          </a:prstGeom>
-          <a:noFill/>
-          <a:ln w="19050">
-            <a:solidFill>
-              <a:srgbClr val="0068B7"/>
-            </a:solidFill>
-            <a:prstDash val="solid"/>
-          </a:ln>
-        </p:spPr>
+          <p:cNvPr id="14" name="Text 12"/>
+          <p:cNvSpPr/>
+          <p:nvPr/>
+        </p:nvSpPr>
+        <p:spPr>
+          <a:xfrm>
+            <a:off x="7799832" y="2935224"/>
+            <a:ext cx="3145536" cy="256032"/>
+          </a:xfrm>
+          <a:prstGeom prst="rect">
+            <a:avLst/>
+          </a:prstGeom>
+          <a:noFill/>
+          <a:ln/>
+        </p:spPr>
+        <p:txBody>
+          <a:bodyPr wrap="square" lIns="0" tIns="0" rIns="0" bIns="0" rtlCol="0" anchor="ctr"/>
+          <a:lstStyle/>
+          <a:p>
+            <a:pPr indent="0" marL="0">
+              <a:buNone/>
+            </a:pPr>
+            <a:r>
+              <a:rPr lang="en-US" sz="1300" b="1" dirty="0">
+                <a:solidFill>
+                  <a:srgbClr val="0068B7"/>
+                </a:solidFill>
+                <a:latin typeface="Aptos" pitchFamily="34" charset="0"/>
+                <a:ea typeface="Aptos" pitchFamily="34" charset="-122"/>
+                <a:cs typeface="Aptos" pitchFamily="34" charset="-120"/>
+              </a:rPr>
+              <a:t>Concept checkpoints</a:t>
+            </a:r>
+            <a:endParaRPr lang="en-US" sz="1300" dirty="0"/>
+          </a:p>
+        </p:txBody>
+      </p:sp>
+      <p:sp>
+        <p:nvSpPr>
+          <p:cNvPr id="15" name="Text 13"/>
+          <p:cNvSpPr/>
+          <p:nvPr/>
+        </p:nvSpPr>
+        <p:spPr>
+          <a:xfrm>
+            <a:off x="7818120" y="3300984"/>
+            <a:ext cx="3090672" cy="877824"/>
+          </a:xfrm>
+          <a:prstGeom prst="rect">
+            <a:avLst/>
+          </a:prstGeom>
+          <a:noFill/>
+          <a:ln/>
+        </p:spPr>
+        <p:txBody>
+          <a:bodyPr wrap="square" lIns="254" tIns="254" rIns="254" bIns="254" rtlCol="0" anchor="t">
+            <a:normAutofit/>
+          </a:bodyPr>
+          <a:lstStyle/>
+          <a:p>
+            <a:r>
+              <a:rPr lang="en-US" sz="1380" dirty="0">
+                <a:solidFill>
+                  <a:srgbClr val="17364A"/>
+                </a:solidFill>
+                <a:latin typeface="Aptos" pitchFamily="34" charset="0"/>
+                <a:ea typeface="Aptos" pitchFamily="34" charset="-122"/>
+                <a:cs typeface="Aptos" pitchFamily="34" charset="-120"/>
+              </a:rPr>
+              <a:t>The tool might need Patient, Encounter, Condition, Observation, DiagnosticReport,.</a:t>
+            </a:r>
+            <a:endParaRPr lang="en-US" sz="1380" dirty="0"/>
+          </a:p>
+          <a:p>
+            <a:r>
+              <a:rPr lang="en-US" sz="1380" dirty="0">
+                <a:solidFill>
+                  <a:srgbClr val="17364A"/>
+                </a:solidFill>
+                <a:latin typeface="Aptos" pitchFamily="34" charset="0"/>
+                <a:ea typeface="Aptos" pitchFamily="34" charset="-122"/>
+                <a:cs typeface="Aptos" pitchFamily="34" charset="-120"/>
+              </a:rPr>
+              <a:t>Staff need to verify whether the source system can provide these resources, whether the.</a:t>
+            </a:r>
+            <a:endParaRPr lang="en-US" sz="1380" dirty="0"/>
+          </a:p>
+          <a:p>
+            <a:r>
+              <a:rPr lang="en-US" sz="1380" dirty="0">
+                <a:solidFill>
+                  <a:srgbClr val="17364A"/>
+                </a:solidFill>
+                <a:latin typeface="Aptos" pitchFamily="34" charset="0"/>
+                <a:ea typeface="Aptos" pitchFamily="34" charset="-122"/>
+                <a:cs typeface="Aptos" pitchFamily="34" charset="-120"/>
+              </a:rPr>
+              <a:t>An immunization use case may need Patient and Immunization resources, along with vaccine.</a:t>
+            </a:r>
+            <a:endParaRPr lang="en-US" sz="1380" dirty="0"/>
+          </a:p>
+        </p:txBody>
       </p:sp>
       <p:sp>
         <p:nvSpPr>
           <p:cNvPr id="16" name="Shape 14"/>
-          <p:cNvSpPr/>
-          <p:nvPr/>
-        </p:nvSpPr>
-        <p:spPr>
-          <a:xfrm>
-            <a:off x="9198864" y="4206240"/>
-            <a:ext cx="347472" cy="347472"/>
-          </a:xfrm>
-          <a:prstGeom prst="ellipse">
-            <a:avLst/>
-          </a:prstGeom>
-          <a:solidFill>
-            <a:srgbClr val="2F8A28"/>
-          </a:solidFill>
-          <a:ln w="12700">
-            <a:solidFill>
-              <a:srgbClr val="2F8A28"/>
-            </a:solidFill>
-            <a:prstDash val="solid"/>
-          </a:ln>
-        </p:spPr>
-      </p:sp>
-      <p:sp>
-        <p:nvSpPr>
-          <p:cNvPr id="17" name="Text 15"/>
-          <p:cNvSpPr/>
-          <p:nvPr/>
-        </p:nvSpPr>
-        <p:spPr>
-          <a:xfrm>
-            <a:off x="7909560" y="3977640"/>
-            <a:ext cx="2926080" cy="182880"/>
-          </a:xfrm>
-          <a:prstGeom prst="rect">
-            <a:avLst/>
-          </a:prstGeom>
-          <a:noFill/>
-          <a:ln/>
-        </p:spPr>
-        <p:txBody>
-          <a:bodyPr wrap="square" lIns="0" tIns="0" rIns="0" bIns="0" rtlCol="0" anchor="ctr"/>
-          <a:lstStyle/>
-          <a:p>
-            <a:pPr algn="ctr" indent="0" marL="0">
-              <a:buNone/>
-            </a:pPr>
-            <a:r>
-              <a:rPr lang="en-US" sz="1000" dirty="0">
-                <a:solidFill>
-                  <a:srgbClr val="003A63"/>
-                </a:solidFill>
-                <a:latin typeface="Aptos" pitchFamily="34" charset="0"/>
-                <a:ea typeface="Aptos" pitchFamily="34" charset="-122"/>
-                <a:cs typeface="Aptos" pitchFamily="34" charset="-120"/>
-              </a:rPr>
-              <a:t>Concept to action</a:t>
-            </a:r>
-            <a:endParaRPr lang="en-US" sz="1000" dirty="0"/>
-          </a:p>
-        </p:txBody>
-      </p:sp>
-      <p:sp>
-        <p:nvSpPr>
-          <p:cNvPr id="18" name="Shape 16"/>
           <p:cNvSpPr/>
           <p:nvPr/>
         </p:nvSpPr>
@@ -4468,7 +4450,7 @@
       </p:sp>
       <p:sp>
         <p:nvSpPr>
-          <p:cNvPr id="19" name="Text 17"/>
+          <p:cNvPr id="17" name="Text 15"/>
           <p:cNvSpPr/>
           <p:nvPr/>
         </p:nvSpPr>
@@ -4507,7 +4489,7 @@
       </p:sp>
       <p:sp>
         <p:nvSpPr>
-          <p:cNvPr id="20" name="Text 18"/>
+          <p:cNvPr id="18" name="Text 16"/>
           <p:cNvSpPr/>
           <p:nvPr/>
         </p:nvSpPr>
@@ -5015,13 +4997,11 @@
             </a:avLst>
           </a:prstGeom>
           <a:solidFill>
-            <a:srgbClr val="FFFFFF">
-              <a:alpha val="88000"/>
-            </a:srgbClr>
+            <a:srgbClr val="FFFFFF"/>
           </a:solidFill>
           <a:ln w="12700">
             <a:solidFill>
-              <a:srgbClr val="D6E8F2"/>
+              <a:srgbClr val="B9D7E6"/>
             </a:solidFill>
             <a:prstDash val="solid"/>
           </a:ln>
@@ -5029,119 +5009,112 @@
       </p:sp>
       <p:sp>
         <p:nvSpPr>
-          <p:cNvPr id="14" name="Shape 12"/>
-          <p:cNvSpPr/>
-          <p:nvPr/>
-        </p:nvSpPr>
-        <p:spPr>
-          <a:xfrm>
-            <a:off x="8074152" y="3291840"/>
-            <a:ext cx="2596896" cy="749808"/>
-          </a:xfrm>
-          <a:prstGeom prst="rect">
-            <a:avLst/>
-          </a:prstGeom>
-          <a:solidFill>
-            <a:srgbClr val="EAF6F8"/>
-          </a:solidFill>
-          <a:ln w="12700">
-            <a:solidFill>
-              <a:srgbClr val="8ABBD8"/>
-            </a:solidFill>
-            <a:prstDash val="solid"/>
-          </a:ln>
-        </p:spPr>
-      </p:sp>
-      <p:sp>
-        <p:nvSpPr>
-          <p:cNvPr id="15" name="Shape 13"/>
-          <p:cNvSpPr/>
-          <p:nvPr/>
-        </p:nvSpPr>
-        <p:spPr>
-          <a:xfrm>
-            <a:off x="8202168" y="3721608"/>
-            <a:ext cx="2340864" cy="0"/>
-          </a:xfrm>
-          <a:prstGeom prst="line">
-            <a:avLst/>
-          </a:prstGeom>
-          <a:noFill/>
-          <a:ln w="19050">
-            <a:solidFill>
-              <a:srgbClr val="0068B7"/>
-            </a:solidFill>
-            <a:prstDash val="solid"/>
-          </a:ln>
-        </p:spPr>
+          <p:cNvPr id="14" name="Text 12"/>
+          <p:cNvSpPr/>
+          <p:nvPr/>
+        </p:nvSpPr>
+        <p:spPr>
+          <a:xfrm>
+            <a:off x="7799832" y="2935224"/>
+            <a:ext cx="3145536" cy="256032"/>
+          </a:xfrm>
+          <a:prstGeom prst="rect">
+            <a:avLst/>
+          </a:prstGeom>
+          <a:noFill/>
+          <a:ln/>
+        </p:spPr>
+        <p:txBody>
+          <a:bodyPr wrap="square" lIns="0" tIns="0" rIns="0" bIns="0" rtlCol="0" anchor="ctr"/>
+          <a:lstStyle/>
+          <a:p>
+            <a:pPr indent="0" marL="0">
+              <a:buNone/>
+            </a:pPr>
+            <a:r>
+              <a:rPr lang="en-US" sz="1300" b="1" dirty="0">
+                <a:solidFill>
+                  <a:srgbClr val="0068B7"/>
+                </a:solidFill>
+                <a:latin typeface="Aptos" pitchFamily="34" charset="0"/>
+                <a:ea typeface="Aptos" pitchFamily="34" charset="-122"/>
+                <a:cs typeface="Aptos" pitchFamily="34" charset="-120"/>
+              </a:rPr>
+              <a:t>Concept checkpoints</a:t>
+            </a:r>
+            <a:endParaRPr lang="en-US" sz="1300" dirty="0"/>
+          </a:p>
+        </p:txBody>
+      </p:sp>
+      <p:sp>
+        <p:nvSpPr>
+          <p:cNvPr id="15" name="Text 13"/>
+          <p:cNvSpPr/>
+          <p:nvPr/>
+        </p:nvSpPr>
+        <p:spPr>
+          <a:xfrm>
+            <a:off x="7818120" y="3300984"/>
+            <a:ext cx="3090672" cy="877824"/>
+          </a:xfrm>
+          <a:prstGeom prst="rect">
+            <a:avLst/>
+          </a:prstGeom>
+          <a:noFill/>
+          <a:ln/>
+        </p:spPr>
+        <p:txBody>
+          <a:bodyPr wrap="square" lIns="254" tIns="254" rIns="254" bIns="254" rtlCol="0" anchor="t">
+            <a:normAutofit/>
+          </a:bodyPr>
+          <a:lstStyle/>
+          <a:p>
+            <a:r>
+              <a:rPr lang="en-US" sz="1380" dirty="0">
+                <a:solidFill>
+                  <a:srgbClr val="17364A"/>
+                </a:solidFill>
+                <a:latin typeface="Aptos" pitchFamily="34" charset="0"/>
+                <a:ea typeface="Aptos" pitchFamily="34" charset="-122"/>
+                <a:cs typeface="Aptos" pitchFamily="34" charset="-120"/>
+              </a:rPr>
+              <a:t>Staff should identify the public health decision or task, the data elements required, the.</a:t>
+            </a:r>
+            <a:endParaRPr lang="en-US" sz="1380" dirty="0"/>
+          </a:p>
+          <a:p>
+            <a:r>
+              <a:rPr lang="en-US" sz="1380" dirty="0">
+                <a:solidFill>
+                  <a:srgbClr val="17364A"/>
+                </a:solidFill>
+                <a:latin typeface="Aptos" pitchFamily="34" charset="0"/>
+                <a:ea typeface="Aptos" pitchFamily="34" charset="-122"/>
+                <a:cs typeface="Aptos" pitchFamily="34" charset="-120"/>
+              </a:rPr>
+              <a:t>Profiles and implementation guides matter because general resources can be used in.</a:t>
+            </a:r>
+            <a:endParaRPr lang="en-US" sz="1380" dirty="0"/>
+          </a:p>
+          <a:p>
+            <a:r>
+              <a:rPr lang="en-US" sz="1380" dirty="0">
+                <a:solidFill>
+                  <a:srgbClr val="17364A"/>
+                </a:solidFill>
+                <a:latin typeface="Aptos" pitchFamily="34" charset="0"/>
+                <a:ea typeface="Aptos" pitchFamily="34" charset="-122"/>
+                <a:cs typeface="Aptos" pitchFamily="34" charset="-120"/>
+              </a:rPr>
+              <a:t>A public health workflow may need specific required elements, value sets, extensions, or.</a:t>
+            </a:r>
+            <a:endParaRPr lang="en-US" sz="1380" dirty="0"/>
+          </a:p>
+        </p:txBody>
       </p:sp>
       <p:sp>
         <p:nvSpPr>
           <p:cNvPr id="16" name="Shape 14"/>
-          <p:cNvSpPr/>
-          <p:nvPr/>
-        </p:nvSpPr>
-        <p:spPr>
-          <a:xfrm>
-            <a:off x="9198864" y="4206240"/>
-            <a:ext cx="347472" cy="347472"/>
-          </a:xfrm>
-          <a:prstGeom prst="ellipse">
-            <a:avLst/>
-          </a:prstGeom>
-          <a:solidFill>
-            <a:srgbClr val="2F8A28"/>
-          </a:solidFill>
-          <a:ln w="12700">
-            <a:solidFill>
-              <a:srgbClr val="2F8A28"/>
-            </a:solidFill>
-            <a:prstDash val="solid"/>
-          </a:ln>
-        </p:spPr>
-      </p:sp>
-      <p:sp>
-        <p:nvSpPr>
-          <p:cNvPr id="17" name="Text 15"/>
-          <p:cNvSpPr/>
-          <p:nvPr/>
-        </p:nvSpPr>
-        <p:spPr>
-          <a:xfrm>
-            <a:off x="7909560" y="3977640"/>
-            <a:ext cx="2926080" cy="182880"/>
-          </a:xfrm>
-          <a:prstGeom prst="rect">
-            <a:avLst/>
-          </a:prstGeom>
-          <a:noFill/>
-          <a:ln/>
-        </p:spPr>
-        <p:txBody>
-          <a:bodyPr wrap="square" lIns="0" tIns="0" rIns="0" bIns="0" rtlCol="0" anchor="ctr"/>
-          <a:lstStyle/>
-          <a:p>
-            <a:pPr algn="ctr" indent="0" marL="0">
-              <a:buNone/>
-            </a:pPr>
-            <a:r>
-              <a:rPr lang="en-US" sz="1000" dirty="0">
-                <a:solidFill>
-                  <a:srgbClr val="003A63"/>
-                </a:solidFill>
-                <a:latin typeface="Aptos" pitchFamily="34" charset="0"/>
-                <a:ea typeface="Aptos" pitchFamily="34" charset="-122"/>
-                <a:cs typeface="Aptos" pitchFamily="34" charset="-120"/>
-              </a:rPr>
-              <a:t>Concept to action</a:t>
-            </a:r>
-            <a:endParaRPr lang="en-US" sz="1000" dirty="0"/>
-          </a:p>
-        </p:txBody>
-      </p:sp>
-      <p:sp>
-        <p:nvSpPr>
-          <p:cNvPr id="18" name="Shape 16"/>
           <p:cNvSpPr/>
           <p:nvPr/>
         </p:nvSpPr>
@@ -5168,7 +5141,7 @@
       </p:sp>
       <p:sp>
         <p:nvSpPr>
-          <p:cNvPr id="19" name="Text 17"/>
+          <p:cNvPr id="17" name="Text 15"/>
           <p:cNvSpPr/>
           <p:nvPr/>
         </p:nvSpPr>
@@ -5207,7 +5180,7 @@
       </p:sp>
       <p:sp>
         <p:nvSpPr>
-          <p:cNvPr id="20" name="Text 18"/>
+          <p:cNvPr id="18" name="Text 16"/>
           <p:cNvSpPr/>
           <p:nvPr/>
         </p:nvSpPr>
@@ -5715,13 +5688,11 @@
             </a:avLst>
           </a:prstGeom>
           <a:solidFill>
-            <a:srgbClr val="FFFFFF">
-              <a:alpha val="88000"/>
-            </a:srgbClr>
+            <a:srgbClr val="FFFFFF"/>
           </a:solidFill>
           <a:ln w="12700">
             <a:solidFill>
-              <a:srgbClr val="D6E8F2"/>
+              <a:srgbClr val="B9D7E6"/>
             </a:solidFill>
             <a:prstDash val="solid"/>
           </a:ln>
@@ -5729,26 +5700,42 @@
       </p:sp>
       <p:sp>
         <p:nvSpPr>
-          <p:cNvPr id="14" name="Shape 12"/>
-          <p:cNvSpPr/>
-          <p:nvPr/>
-        </p:nvSpPr>
-        <p:spPr>
-          <a:xfrm>
-            <a:off x="8046720" y="3108960"/>
-            <a:ext cx="2651760" cy="896112"/>
-          </a:xfrm>
-          <a:prstGeom prst="arc">
-            <a:avLst/>
-          </a:prstGeom>
-          <a:noFill/>
-          <a:ln w="25400">
-            <a:solidFill>
-              <a:srgbClr val="0068B7"/>
-            </a:solidFill>
-            <a:prstDash val="solid"/>
-          </a:ln>
-        </p:spPr>
+          <p:cNvPr id="14" name="Text 12"/>
+          <p:cNvSpPr/>
+          <p:nvPr/>
+        </p:nvSpPr>
+        <p:spPr>
+          <a:xfrm>
+            <a:off x="7799832" y="2935224"/>
+            <a:ext cx="3145536" cy="256032"/>
+          </a:xfrm>
+          <a:prstGeom prst="rect">
+            <a:avLst/>
+          </a:prstGeom>
+          <a:noFill/>
+          <a:ln/>
+        </p:spPr>
+        <p:txBody>
+          <a:bodyPr wrap="square" lIns="0" tIns="0" rIns="0" bIns="0" rtlCol="0" anchor="ctr"/>
+          <a:lstStyle/>
+          <a:p>
+            <a:pPr indent="0" marL="0">
+              <a:buNone/>
+            </a:pPr>
+            <a:r>
+              <a:rPr lang="en-US" sz="1300" b="1" dirty="0">
+                <a:solidFill>
+                  <a:srgbClr val="0068B7"/>
+                </a:solidFill>
+                <a:latin typeface="Aptos" pitchFamily="34" charset="0"/>
+                <a:ea typeface="Aptos" pitchFamily="34" charset="-122"/>
+                <a:cs typeface="Aptos" pitchFamily="34" charset="-120"/>
+              </a:rPr>
+              <a:t>Concept checkpoints</a:t>
+            </a:r>
+            <a:endParaRPr lang="en-US" sz="1300" dirty="0"/>
+          </a:p>
+        </p:txBody>
       </p:sp>
       <p:sp>
         <p:nvSpPr>
@@ -5758,102 +5745,67 @@
         </p:nvSpPr>
         <p:spPr>
           <a:xfrm>
-            <a:off x="7909560" y="3099816"/>
-            <a:ext cx="2926080" cy="256032"/>
-          </a:xfrm>
-          <a:prstGeom prst="rect">
-            <a:avLst/>
-          </a:prstGeom>
-          <a:noFill/>
-          <a:ln/>
-        </p:spPr>
-        <p:txBody>
-          <a:bodyPr wrap="square" lIns="0" tIns="0" rIns="0" bIns="0" rtlCol="0" anchor="ctr"/>
-          <a:lstStyle/>
-          <a:p>
-            <a:pPr algn="ctr" indent="0" marL="0">
-              <a:buNone/>
-            </a:pPr>
-            <a:r>
-              <a:rPr lang="en-US" sz="1500" b="1" dirty="0">
-                <a:solidFill>
-                  <a:srgbClr val="003A63"/>
-                </a:solidFill>
-                <a:latin typeface="Aptos" pitchFamily="34" charset="0"/>
-                <a:ea typeface="Aptos" pitchFamily="34" charset="-122"/>
-                <a:cs typeface="Aptos" pitchFamily="34" charset="-120"/>
-              </a:rPr>
-              <a:t>Risk</a:t>
-            </a:r>
-            <a:endParaRPr lang="en-US" sz="1500" dirty="0"/>
+            <a:off x="7818120" y="3300984"/>
+            <a:ext cx="3090672" cy="877824"/>
+          </a:xfrm>
+          <a:prstGeom prst="rect">
+            <a:avLst/>
+          </a:prstGeom>
+          <a:noFill/>
+          <a:ln/>
+        </p:spPr>
+        <p:txBody>
+          <a:bodyPr wrap="square" lIns="254" tIns="254" rIns="254" bIns="254" rtlCol="0" anchor="t">
+            <a:normAutofit/>
+          </a:bodyPr>
+          <a:lstStyle/>
+          <a:p>
+            <a:r>
+              <a:rPr lang="en-US" sz="1380" dirty="0">
+                <a:solidFill>
+                  <a:srgbClr val="17364A"/>
+                </a:solidFill>
+                <a:latin typeface="Aptos" pitchFamily="34" charset="0"/>
+                <a:ea typeface="Aptos" pitchFamily="34" charset="-122"/>
+                <a:cs typeface="Aptos" pitchFamily="34" charset="-120"/>
+              </a:rPr>
+              <a:t>Overbroad API access.</a:t>
+            </a:r>
+            <a:endParaRPr lang="en-US" sz="1380" dirty="0"/>
+          </a:p>
+          <a:p>
+            <a:r>
+              <a:rPr lang="en-US" sz="1380" dirty="0">
+                <a:solidFill>
+                  <a:srgbClr val="17364A"/>
+                </a:solidFill>
+                <a:latin typeface="Aptos" pitchFamily="34" charset="0"/>
+                <a:ea typeface="Aptos" pitchFamily="34" charset="-122"/>
+                <a:cs typeface="Aptos" pitchFamily="34" charset="-120"/>
+              </a:rPr>
+              <a:t>AI tools may request more data than needed.</a:t>
+            </a:r>
+            <a:endParaRPr lang="en-US" sz="1380" dirty="0"/>
+          </a:p>
+          <a:p>
+            <a:r>
+              <a:rPr lang="en-US" sz="1380" dirty="0">
+                <a:solidFill>
+                  <a:srgbClr val="17364A"/>
+                </a:solidFill>
+                <a:latin typeface="Aptos" pitchFamily="34" charset="0"/>
+                <a:ea typeface="Aptos" pitchFamily="34" charset="-122"/>
+                <a:cs typeface="Aptos" pitchFamily="34" charset="-120"/>
+              </a:rPr>
+              <a:t>Guardrails include scoped access, minimum necessary review, and audit logs.</a:t>
+            </a:r>
+            <a:endParaRPr lang="en-US" sz="1380" dirty="0"/>
           </a:p>
         </p:txBody>
       </p:sp>
       <p:sp>
         <p:nvSpPr>
           <p:cNvPr id="16" name="Shape 14"/>
-          <p:cNvSpPr/>
-          <p:nvPr/>
-        </p:nvSpPr>
-        <p:spPr>
-          <a:xfrm>
-            <a:off x="8366760" y="3639312"/>
-            <a:ext cx="2011680" cy="0"/>
-          </a:xfrm>
-          <a:prstGeom prst="line">
-            <a:avLst/>
-          </a:prstGeom>
-          <a:noFill/>
-          <a:ln w="63500">
-            <a:solidFill>
-              <a:srgbClr val="2F8A28"/>
-            </a:solidFill>
-            <a:prstDash val="solid"/>
-          </a:ln>
-        </p:spPr>
-      </p:sp>
-      <p:sp>
-        <p:nvSpPr>
-          <p:cNvPr id="17" name="Text 15"/>
-          <p:cNvSpPr/>
-          <p:nvPr/>
-        </p:nvSpPr>
-        <p:spPr>
-          <a:xfrm>
-            <a:off x="7909560" y="3849624"/>
-            <a:ext cx="2926080" cy="164592"/>
-          </a:xfrm>
-          <a:prstGeom prst="rect">
-            <a:avLst/>
-          </a:prstGeom>
-          <a:noFill/>
-          <a:ln/>
-        </p:spPr>
-        <p:txBody>
-          <a:bodyPr wrap="square" lIns="0" tIns="0" rIns="0" bIns="0" rtlCol="0" anchor="ctr"/>
-          <a:lstStyle/>
-          <a:p>
-            <a:pPr algn="ctr" indent="0" marL="0">
-              <a:buNone/>
-            </a:pPr>
-            <a:r>
-              <a:rPr lang="en-US" sz="900" dirty="0">
-                <a:solidFill>
-                  <a:srgbClr val="003A63"/>
-                </a:solidFill>
-                <a:latin typeface="Aptos" pitchFamily="34" charset="0"/>
-                <a:ea typeface="Aptos" pitchFamily="34" charset="-122"/>
-                <a:cs typeface="Aptos" pitchFamily="34" charset="-120"/>
-              </a:rPr>
-              <a:t>Human review</a:t>
-            </a:r>
-            <a:endParaRPr lang="en-US" sz="900" dirty="0"/>
-          </a:p>
-        </p:txBody>
-      </p:sp>
-      <p:sp>
-        <p:nvSpPr>
-          <p:cNvPr id="18" name="Shape 16"/>
           <p:cNvSpPr/>
           <p:nvPr/>
         </p:nvSpPr>
@@ -5880,7 +5832,7 @@
       </p:sp>
       <p:sp>
         <p:nvSpPr>
-          <p:cNvPr id="19" name="Text 17"/>
+          <p:cNvPr id="17" name="Text 15"/>
           <p:cNvSpPr/>
           <p:nvPr/>
         </p:nvSpPr>
@@ -5919,7 +5871,7 @@
       </p:sp>
       <p:sp>
         <p:nvSpPr>
-          <p:cNvPr id="20" name="Text 18"/>
+          <p:cNvPr id="18" name="Text 16"/>
           <p:cNvSpPr/>
           <p:nvPr/>
         </p:nvSpPr>
@@ -6427,13 +6379,11 @@
             </a:avLst>
           </a:prstGeom>
           <a:solidFill>
-            <a:srgbClr val="FFFFFF">
-              <a:alpha val="88000"/>
-            </a:srgbClr>
+            <a:srgbClr val="FFFFFF"/>
           </a:solidFill>
           <a:ln w="12700">
             <a:solidFill>
-              <a:srgbClr val="D6E8F2"/>
+              <a:srgbClr val="B9D7E6"/>
             </a:solidFill>
             <a:prstDash val="solid"/>
           </a:ln>
@@ -6441,26 +6391,42 @@
       </p:sp>
       <p:sp>
         <p:nvSpPr>
-          <p:cNvPr id="14" name="Shape 12"/>
-          <p:cNvSpPr/>
-          <p:nvPr/>
-        </p:nvSpPr>
-        <p:spPr>
-          <a:xfrm>
-            <a:off x="8046720" y="3108960"/>
-            <a:ext cx="2651760" cy="896112"/>
-          </a:xfrm>
-          <a:prstGeom prst="arc">
-            <a:avLst/>
-          </a:prstGeom>
-          <a:noFill/>
-          <a:ln w="25400">
-            <a:solidFill>
-              <a:srgbClr val="0068B7"/>
-            </a:solidFill>
-            <a:prstDash val="solid"/>
-          </a:ln>
-        </p:spPr>
+          <p:cNvPr id="14" name="Text 12"/>
+          <p:cNvSpPr/>
+          <p:nvPr/>
+        </p:nvSpPr>
+        <p:spPr>
+          <a:xfrm>
+            <a:off x="7799832" y="2935224"/>
+            <a:ext cx="3145536" cy="256032"/>
+          </a:xfrm>
+          <a:prstGeom prst="rect">
+            <a:avLst/>
+          </a:prstGeom>
+          <a:noFill/>
+          <a:ln/>
+        </p:spPr>
+        <p:txBody>
+          <a:bodyPr wrap="square" lIns="0" tIns="0" rIns="0" bIns="0" rtlCol="0" anchor="ctr"/>
+          <a:lstStyle/>
+          <a:p>
+            <a:pPr indent="0" marL="0">
+              <a:buNone/>
+            </a:pPr>
+            <a:r>
+              <a:rPr lang="en-US" sz="1300" b="1" dirty="0">
+                <a:solidFill>
+                  <a:srgbClr val="0068B7"/>
+                </a:solidFill>
+                <a:latin typeface="Aptos" pitchFamily="34" charset="0"/>
+                <a:ea typeface="Aptos" pitchFamily="34" charset="-122"/>
+                <a:cs typeface="Aptos" pitchFamily="34" charset="-120"/>
+              </a:rPr>
+              <a:t>Concept checkpoints</a:t>
+            </a:r>
+            <a:endParaRPr lang="en-US" sz="1300" dirty="0"/>
+          </a:p>
+        </p:txBody>
       </p:sp>
       <p:sp>
         <p:nvSpPr>
@@ -6470,102 +6436,67 @@
         </p:nvSpPr>
         <p:spPr>
           <a:xfrm>
-            <a:off x="7909560" y="3099816"/>
-            <a:ext cx="2926080" cy="256032"/>
-          </a:xfrm>
-          <a:prstGeom prst="rect">
-            <a:avLst/>
-          </a:prstGeom>
-          <a:noFill/>
-          <a:ln/>
-        </p:spPr>
-        <p:txBody>
-          <a:bodyPr wrap="square" lIns="0" tIns="0" rIns="0" bIns="0" rtlCol="0" anchor="ctr"/>
-          <a:lstStyle/>
-          <a:p>
-            <a:pPr algn="ctr" indent="0" marL="0">
-              <a:buNone/>
-            </a:pPr>
-            <a:r>
-              <a:rPr lang="en-US" sz="1500" b="1" dirty="0">
-                <a:solidFill>
-                  <a:srgbClr val="003A63"/>
-                </a:solidFill>
-                <a:latin typeface="Aptos" pitchFamily="34" charset="0"/>
-                <a:ea typeface="Aptos" pitchFamily="34" charset="-122"/>
-                <a:cs typeface="Aptos" pitchFamily="34" charset="-120"/>
-              </a:rPr>
-              <a:t>Risk</a:t>
-            </a:r>
-            <a:endParaRPr lang="en-US" sz="1500" dirty="0"/>
+            <a:off x="7818120" y="3300984"/>
+            <a:ext cx="3090672" cy="877824"/>
+          </a:xfrm>
+          <a:prstGeom prst="rect">
+            <a:avLst/>
+          </a:prstGeom>
+          <a:noFill/>
+          <a:ln/>
+        </p:spPr>
+        <p:txBody>
+          <a:bodyPr wrap="square" lIns="254" tIns="254" rIns="254" bIns="254" rtlCol="0" anchor="t">
+            <a:normAutofit/>
+          </a:bodyPr>
+          <a:lstStyle/>
+          <a:p>
+            <a:r>
+              <a:rPr lang="en-US" sz="1380" dirty="0">
+                <a:solidFill>
+                  <a:srgbClr val="17364A"/>
+                </a:solidFill>
+                <a:latin typeface="Aptos" pitchFamily="34" charset="0"/>
+                <a:ea typeface="Aptos" pitchFamily="34" charset="-122"/>
+                <a:cs typeface="Aptos" pitchFamily="34" charset="-120"/>
+              </a:rPr>
+              <a:t>Write-back risk.</a:t>
+            </a:r>
+            <a:endParaRPr lang="en-US" sz="1380" dirty="0"/>
+          </a:p>
+          <a:p>
+            <a:r>
+              <a:rPr lang="en-US" sz="1380" dirty="0">
+                <a:solidFill>
+                  <a:srgbClr val="17364A"/>
+                </a:solidFill>
+                <a:latin typeface="Aptos" pitchFamily="34" charset="0"/>
+                <a:ea typeface="Aptos" pitchFamily="34" charset="-122"/>
+                <a:cs typeface="Aptos" pitchFamily="34" charset="-120"/>
+              </a:rPr>
+              <a:t>FHIR APIs may support updates or task creation.</a:t>
+            </a:r>
+            <a:endParaRPr lang="en-US" sz="1380" dirty="0"/>
+          </a:p>
+          <a:p>
+            <a:r>
+              <a:rPr lang="en-US" sz="1380" dirty="0">
+                <a:solidFill>
+                  <a:srgbClr val="17364A"/>
+                </a:solidFill>
+                <a:latin typeface="Aptos" pitchFamily="34" charset="0"/>
+                <a:ea typeface="Aptos" pitchFamily="34" charset="-122"/>
+                <a:cs typeface="Aptos" pitchFamily="34" charset="-120"/>
+              </a:rPr>
+              <a:t>Guardrails include human approval, restricted permissions, sandbox testing, and rollback.</a:t>
+            </a:r>
+            <a:endParaRPr lang="en-US" sz="1380" dirty="0"/>
           </a:p>
         </p:txBody>
       </p:sp>
       <p:sp>
         <p:nvSpPr>
           <p:cNvPr id="16" name="Shape 14"/>
-          <p:cNvSpPr/>
-          <p:nvPr/>
-        </p:nvSpPr>
-        <p:spPr>
-          <a:xfrm>
-            <a:off x="8366760" y="3639312"/>
-            <a:ext cx="2011680" cy="0"/>
-          </a:xfrm>
-          <a:prstGeom prst="line">
-            <a:avLst/>
-          </a:prstGeom>
-          <a:noFill/>
-          <a:ln w="63500">
-            <a:solidFill>
-              <a:srgbClr val="2F8A28"/>
-            </a:solidFill>
-            <a:prstDash val="solid"/>
-          </a:ln>
-        </p:spPr>
-      </p:sp>
-      <p:sp>
-        <p:nvSpPr>
-          <p:cNvPr id="17" name="Text 15"/>
-          <p:cNvSpPr/>
-          <p:nvPr/>
-        </p:nvSpPr>
-        <p:spPr>
-          <a:xfrm>
-            <a:off x="7909560" y="3849624"/>
-            <a:ext cx="2926080" cy="164592"/>
-          </a:xfrm>
-          <a:prstGeom prst="rect">
-            <a:avLst/>
-          </a:prstGeom>
-          <a:noFill/>
-          <a:ln/>
-        </p:spPr>
-        <p:txBody>
-          <a:bodyPr wrap="square" lIns="0" tIns="0" rIns="0" bIns="0" rtlCol="0" anchor="ctr"/>
-          <a:lstStyle/>
-          <a:p>
-            <a:pPr algn="ctr" indent="0" marL="0">
-              <a:buNone/>
-            </a:pPr>
-            <a:r>
-              <a:rPr lang="en-US" sz="900" dirty="0">
-                <a:solidFill>
-                  <a:srgbClr val="003A63"/>
-                </a:solidFill>
-                <a:latin typeface="Aptos" pitchFamily="34" charset="0"/>
-                <a:ea typeface="Aptos" pitchFamily="34" charset="-122"/>
-                <a:cs typeface="Aptos" pitchFamily="34" charset="-120"/>
-              </a:rPr>
-              <a:t>Human review</a:t>
-            </a:r>
-            <a:endParaRPr lang="en-US" sz="900" dirty="0"/>
-          </a:p>
-        </p:txBody>
-      </p:sp>
-      <p:sp>
-        <p:nvSpPr>
-          <p:cNvPr id="18" name="Shape 16"/>
           <p:cNvSpPr/>
           <p:nvPr/>
         </p:nvSpPr>
@@ -6592,7 +6523,7 @@
       </p:sp>
       <p:sp>
         <p:nvSpPr>
-          <p:cNvPr id="19" name="Text 17"/>
+          <p:cNvPr id="17" name="Text 15"/>
           <p:cNvSpPr/>
           <p:nvPr/>
         </p:nvSpPr>
@@ -6631,7 +6562,7 @@
       </p:sp>
       <p:sp>
         <p:nvSpPr>
-          <p:cNvPr id="20" name="Text 18"/>
+          <p:cNvPr id="18" name="Text 16"/>
           <p:cNvSpPr/>
           <p:nvPr/>
         </p:nvSpPr>
@@ -7139,13 +7070,11 @@
             </a:avLst>
           </a:prstGeom>
           <a:solidFill>
-            <a:srgbClr val="FFFFFF">
-              <a:alpha val="88000"/>
-            </a:srgbClr>
+            <a:srgbClr val="FFFFFF"/>
           </a:solidFill>
           <a:ln w="12700">
             <a:solidFill>
-              <a:srgbClr val="D6E8F2"/>
+              <a:srgbClr val="B9D7E6"/>
             </a:solidFill>
             <a:prstDash val="solid"/>
           </a:ln>
@@ -7153,30 +7082,42 @@
       </p:sp>
       <p:sp>
         <p:nvSpPr>
-          <p:cNvPr id="14" name="Shape 12"/>
-          <p:cNvSpPr/>
-          <p:nvPr/>
-        </p:nvSpPr>
-        <p:spPr>
-          <a:xfrm>
-            <a:off x="7927848" y="3319272"/>
-            <a:ext cx="792480" cy="749808"/>
-          </a:xfrm>
-          <a:prstGeom prst="roundRect">
-            <a:avLst>
-              <a:gd name="adj" fmla="val 14634"/>
-            </a:avLst>
-          </a:prstGeom>
-          <a:solidFill>
-            <a:srgbClr val="0068B7"/>
-          </a:solidFill>
-          <a:ln w="12700">
-            <a:solidFill>
-              <a:srgbClr val="0068B7"/>
-            </a:solidFill>
-            <a:prstDash val="solid"/>
-          </a:ln>
-        </p:spPr>
+          <p:cNvPr id="14" name="Text 12"/>
+          <p:cNvSpPr/>
+          <p:nvPr/>
+        </p:nvSpPr>
+        <p:spPr>
+          <a:xfrm>
+            <a:off x="7799832" y="2935224"/>
+            <a:ext cx="3145536" cy="256032"/>
+          </a:xfrm>
+          <a:prstGeom prst="rect">
+            <a:avLst/>
+          </a:prstGeom>
+          <a:noFill/>
+          <a:ln/>
+        </p:spPr>
+        <p:txBody>
+          <a:bodyPr wrap="square" lIns="0" tIns="0" rIns="0" bIns="0" rtlCol="0" anchor="ctr"/>
+          <a:lstStyle/>
+          <a:p>
+            <a:pPr indent="0" marL="0">
+              <a:buNone/>
+            </a:pPr>
+            <a:r>
+              <a:rPr lang="en-US" sz="1300" b="1" dirty="0">
+                <a:solidFill>
+                  <a:srgbClr val="0068B7"/>
+                </a:solidFill>
+                <a:latin typeface="Aptos" pitchFamily="34" charset="0"/>
+                <a:ea typeface="Aptos" pitchFamily="34" charset="-122"/>
+                <a:cs typeface="Aptos" pitchFamily="34" charset="-120"/>
+              </a:rPr>
+              <a:t>Concept checkpoints</a:t>
+            </a:r>
+            <a:endParaRPr lang="en-US" sz="1300" dirty="0"/>
+          </a:p>
+        </p:txBody>
       </p:sp>
       <p:sp>
         <p:nvSpPr>
@@ -7186,240 +7127,67 @@
         </p:nvSpPr>
         <p:spPr>
           <a:xfrm>
-            <a:off x="8001000" y="3511296"/>
-            <a:ext cx="646176" cy="310896"/>
-          </a:xfrm>
-          <a:prstGeom prst="rect">
-            <a:avLst/>
-          </a:prstGeom>
-          <a:noFill/>
-          <a:ln/>
-        </p:spPr>
-        <p:txBody>
-          <a:bodyPr wrap="square" lIns="0" tIns="0" rIns="0" bIns="0" rtlCol="0" anchor="ctr">
+            <a:off x="7818120" y="3300984"/>
+            <a:ext cx="3090672" cy="877824"/>
+          </a:xfrm>
+          <a:prstGeom prst="rect">
+            <a:avLst/>
+          </a:prstGeom>
+          <a:noFill/>
+          <a:ln/>
+        </p:spPr>
+        <p:txBody>
+          <a:bodyPr wrap="square" lIns="254" tIns="254" rIns="254" bIns="254" rtlCol="0" anchor="t">
             <a:normAutofit/>
           </a:bodyPr>
           <a:lstStyle/>
           <a:p>
-            <a:pPr algn="ctr" indent="0" marL="0">
-              <a:buNone/>
-            </a:pPr>
-            <a:r>
-              <a:rPr lang="en-US" sz="1500" b="1" dirty="0">
-                <a:solidFill>
-                  <a:srgbClr val="FFFFFF"/>
-                </a:solidFill>
-                <a:latin typeface="Aptos" pitchFamily="34" charset="0"/>
-                <a:ea typeface="Aptos" pitchFamily="34" charset="-122"/>
-                <a:cs typeface="Aptos" pitchFamily="34" charset="-120"/>
-              </a:rPr>
-              <a:t>Plan</a:t>
-            </a:r>
-            <a:endParaRPr lang="en-US" sz="1500" dirty="0"/>
+            <a:r>
+              <a:rPr lang="en-US" sz="1380" dirty="0">
+                <a:solidFill>
+                  <a:srgbClr val="17364A"/>
+                </a:solidFill>
+                <a:latin typeface="Aptos" pitchFamily="34" charset="0"/>
+                <a:ea typeface="Aptos" pitchFamily="34" charset="-122"/>
+                <a:cs typeface="Aptos" pitchFamily="34" charset="-120"/>
+              </a:rPr>
+              <a:t>Generative AI can use FHIR data to draft case or patient summaries, but the output should.</a:t>
+            </a:r>
+            <a:endParaRPr lang="en-US" sz="1380" dirty="0"/>
+          </a:p>
+          <a:p>
+            <a:r>
+              <a:rPr lang="en-US" sz="1380" dirty="0">
+                <a:solidFill>
+                  <a:srgbClr val="17364A"/>
+                </a:solidFill>
+                <a:latin typeface="Aptos" pitchFamily="34" charset="0"/>
+                <a:ea typeface="Aptos" pitchFamily="34" charset="-122"/>
+                <a:cs typeface="Aptos" pitchFamily="34" charset="-120"/>
+              </a:rPr>
+              <a:t>Predictive analytics may use features derived from FHIR resources, which requires stable.</a:t>
+            </a:r>
+            <a:endParaRPr lang="en-US" sz="1380" dirty="0"/>
+          </a:p>
+          <a:p>
+            <a:r>
+              <a:rPr lang="en-US" sz="1380" dirty="0">
+                <a:solidFill>
+                  <a:srgbClr val="17364A"/>
+                </a:solidFill>
+                <a:latin typeface="Aptos" pitchFamily="34" charset="0"/>
+                <a:ea typeface="Aptos" pitchFamily="34" charset="-122"/>
+                <a:cs typeface="Aptos" pitchFamily="34" charset="-120"/>
+              </a:rPr>
+              <a:t>Agentic workflows may create Tasks or update statuses, making permissions and approval.</a:t>
+            </a:r>
+            <a:endParaRPr lang="en-US" sz="1380" dirty="0"/>
           </a:p>
         </p:txBody>
       </p:sp>
       <p:sp>
         <p:nvSpPr>
           <p:cNvPr id="16" name="Shape 14"/>
-          <p:cNvSpPr/>
-          <p:nvPr/>
-        </p:nvSpPr>
-        <p:spPr>
-          <a:xfrm>
-            <a:off x="8976360" y="3319272"/>
-            <a:ext cx="792480" cy="749808"/>
-          </a:xfrm>
-          <a:prstGeom prst="roundRect">
-            <a:avLst>
-              <a:gd name="adj" fmla="val 14634"/>
-            </a:avLst>
-          </a:prstGeom>
-          <a:solidFill>
-            <a:srgbClr val="2F8A28"/>
-          </a:solidFill>
-          <a:ln w="12700">
-            <a:solidFill>
-              <a:srgbClr val="2F8A28"/>
-            </a:solidFill>
-            <a:prstDash val="solid"/>
-          </a:ln>
-        </p:spPr>
-      </p:sp>
-      <p:sp>
-        <p:nvSpPr>
-          <p:cNvPr id="17" name="Text 15"/>
-          <p:cNvSpPr/>
-          <p:nvPr/>
-        </p:nvSpPr>
-        <p:spPr>
-          <a:xfrm>
-            <a:off x="9049512" y="3511296"/>
-            <a:ext cx="646176" cy="310896"/>
-          </a:xfrm>
-          <a:prstGeom prst="rect">
-            <a:avLst/>
-          </a:prstGeom>
-          <a:noFill/>
-          <a:ln/>
-        </p:spPr>
-        <p:txBody>
-          <a:bodyPr wrap="square" lIns="0" tIns="0" rIns="0" bIns="0" rtlCol="0" anchor="ctr">
-            <a:normAutofit/>
-          </a:bodyPr>
-          <a:lstStyle/>
-          <a:p>
-            <a:pPr algn="ctr" indent="0" marL="0">
-              <a:buNone/>
-            </a:pPr>
-            <a:r>
-              <a:rPr lang="en-US" sz="1500" b="1" dirty="0">
-                <a:solidFill>
-                  <a:srgbClr val="FFFFFF"/>
-                </a:solidFill>
-                <a:latin typeface="Aptos" pitchFamily="34" charset="0"/>
-                <a:ea typeface="Aptos" pitchFamily="34" charset="-122"/>
-                <a:cs typeface="Aptos" pitchFamily="34" charset="-120"/>
-              </a:rPr>
-              <a:t>Do</a:t>
-            </a:r>
-            <a:endParaRPr lang="en-US" sz="1500" dirty="0"/>
-          </a:p>
-        </p:txBody>
-      </p:sp>
-      <p:sp>
-        <p:nvSpPr>
-          <p:cNvPr id="18" name="Shape 16"/>
-          <p:cNvSpPr/>
-          <p:nvPr/>
-        </p:nvSpPr>
-        <p:spPr>
-          <a:xfrm>
-            <a:off x="10024872" y="3319272"/>
-            <a:ext cx="792480" cy="749808"/>
-          </a:xfrm>
-          <a:prstGeom prst="roundRect">
-            <a:avLst>
-              <a:gd name="adj" fmla="val 14634"/>
-            </a:avLst>
-          </a:prstGeom>
-          <a:solidFill>
-            <a:srgbClr val="D69A2D"/>
-          </a:solidFill>
-          <a:ln w="12700">
-            <a:solidFill>
-              <a:srgbClr val="D69A2D"/>
-            </a:solidFill>
-            <a:prstDash val="solid"/>
-          </a:ln>
-        </p:spPr>
-      </p:sp>
-      <p:sp>
-        <p:nvSpPr>
-          <p:cNvPr id="19" name="Text 17"/>
-          <p:cNvSpPr/>
-          <p:nvPr/>
-        </p:nvSpPr>
-        <p:spPr>
-          <a:xfrm>
-            <a:off x="10098024" y="3511296"/>
-            <a:ext cx="646176" cy="310896"/>
-          </a:xfrm>
-          <a:prstGeom prst="rect">
-            <a:avLst/>
-          </a:prstGeom>
-          <a:noFill/>
-          <a:ln/>
-        </p:spPr>
-        <p:txBody>
-          <a:bodyPr wrap="square" lIns="0" tIns="0" rIns="0" bIns="0" rtlCol="0" anchor="ctr">
-            <a:normAutofit/>
-          </a:bodyPr>
-          <a:lstStyle/>
-          <a:p>
-            <a:pPr algn="ctr" indent="0" marL="0">
-              <a:buNone/>
-            </a:pPr>
-            <a:r>
-              <a:rPr lang="en-US" sz="1500" b="1" dirty="0">
-                <a:solidFill>
-                  <a:srgbClr val="FFFFFF"/>
-                </a:solidFill>
-                <a:latin typeface="Aptos" pitchFamily="34" charset="0"/>
-                <a:ea typeface="Aptos" pitchFamily="34" charset="-122"/>
-                <a:cs typeface="Aptos" pitchFamily="34" charset="-120"/>
-              </a:rPr>
-              <a:t>Review</a:t>
-            </a:r>
-            <a:endParaRPr lang="en-US" sz="1500" dirty="0"/>
-          </a:p>
-        </p:txBody>
-      </p:sp>
-      <p:sp>
-        <p:nvSpPr>
-          <p:cNvPr id="20" name="Shape 18"/>
-          <p:cNvSpPr/>
-          <p:nvPr/>
-        </p:nvSpPr>
-        <p:spPr>
-          <a:xfrm>
-            <a:off x="8293608" y="4389120"/>
-            <a:ext cx="2157984" cy="0"/>
-          </a:xfrm>
-          <a:prstGeom prst="line">
-            <a:avLst/>
-          </a:prstGeom>
-          <a:noFill/>
-          <a:ln w="25400">
-            <a:solidFill>
-              <a:srgbClr val="8ABBD8"/>
-            </a:solidFill>
-            <a:prstDash val="solid"/>
-          </a:ln>
-        </p:spPr>
-      </p:sp>
-      <p:sp>
-        <p:nvSpPr>
-          <p:cNvPr id="21" name="Text 19"/>
-          <p:cNvSpPr/>
-          <p:nvPr/>
-        </p:nvSpPr>
-        <p:spPr>
-          <a:xfrm>
-            <a:off x="7909560" y="3977640"/>
-            <a:ext cx="2926080" cy="182880"/>
-          </a:xfrm>
-          <a:prstGeom prst="rect">
-            <a:avLst/>
-          </a:prstGeom>
-          <a:noFill/>
-          <a:ln/>
-        </p:spPr>
-        <p:txBody>
-          <a:bodyPr wrap="square" lIns="0" tIns="0" rIns="0" bIns="0" rtlCol="0" anchor="ctr"/>
-          <a:lstStyle/>
-          <a:p>
-            <a:pPr algn="ctr" indent="0" marL="0">
-              <a:buNone/>
-            </a:pPr>
-            <a:r>
-              <a:rPr lang="en-US" sz="1000" dirty="0">
-                <a:solidFill>
-                  <a:srgbClr val="003A63"/>
-                </a:solidFill>
-                <a:latin typeface="Aptos" pitchFamily="34" charset="0"/>
-                <a:ea typeface="Aptos" pitchFamily="34" charset="-122"/>
-                <a:cs typeface="Aptos" pitchFamily="34" charset="-120"/>
-              </a:rPr>
-              <a:t>Dependencies visible</a:t>
-            </a:r>
-            <a:endParaRPr lang="en-US" sz="1000" dirty="0"/>
-          </a:p>
-        </p:txBody>
-      </p:sp>
-      <p:sp>
-        <p:nvSpPr>
-          <p:cNvPr id="22" name="Shape 20"/>
           <p:cNvSpPr/>
           <p:nvPr/>
         </p:nvSpPr>
@@ -7446,7 +7214,7 @@
       </p:sp>
       <p:sp>
         <p:nvSpPr>
-          <p:cNvPr id="23" name="Text 21"/>
+          <p:cNvPr id="17" name="Text 15"/>
           <p:cNvSpPr/>
           <p:nvPr/>
         </p:nvSpPr>
@@ -7485,7 +7253,7 @@
       </p:sp>
       <p:sp>
         <p:nvSpPr>
-          <p:cNvPr id="24" name="Text 22"/>
+          <p:cNvPr id="18" name="Text 16"/>
           <p:cNvSpPr/>
           <p:nvPr/>
         </p:nvSpPr>
@@ -7993,13 +7761,11 @@
             </a:avLst>
           </a:prstGeom>
           <a:solidFill>
-            <a:srgbClr val="FFFFFF">
-              <a:alpha val="88000"/>
-            </a:srgbClr>
+            <a:srgbClr val="FFFFFF"/>
           </a:solidFill>
           <a:ln w="12700">
             <a:solidFill>
-              <a:srgbClr val="D6E8F2"/>
+              <a:srgbClr val="B9D7E6"/>
             </a:solidFill>
             <a:prstDash val="solid"/>
           </a:ln>
@@ -8007,119 +7773,112 @@
       </p:sp>
       <p:sp>
         <p:nvSpPr>
-          <p:cNvPr id="14" name="Shape 12"/>
-          <p:cNvSpPr/>
-          <p:nvPr/>
-        </p:nvSpPr>
-        <p:spPr>
-          <a:xfrm>
-            <a:off x="8074152" y="3291840"/>
-            <a:ext cx="2596896" cy="749808"/>
-          </a:xfrm>
-          <a:prstGeom prst="rect">
-            <a:avLst/>
-          </a:prstGeom>
-          <a:solidFill>
-            <a:srgbClr val="EAF6F8"/>
-          </a:solidFill>
-          <a:ln w="12700">
-            <a:solidFill>
-              <a:srgbClr val="8ABBD8"/>
-            </a:solidFill>
-            <a:prstDash val="solid"/>
-          </a:ln>
-        </p:spPr>
-      </p:sp>
-      <p:sp>
-        <p:nvSpPr>
-          <p:cNvPr id="15" name="Shape 13"/>
-          <p:cNvSpPr/>
-          <p:nvPr/>
-        </p:nvSpPr>
-        <p:spPr>
-          <a:xfrm>
-            <a:off x="8202168" y="3721608"/>
-            <a:ext cx="2340864" cy="0"/>
-          </a:xfrm>
-          <a:prstGeom prst="line">
-            <a:avLst/>
-          </a:prstGeom>
-          <a:noFill/>
-          <a:ln w="19050">
-            <a:solidFill>
-              <a:srgbClr val="0068B7"/>
-            </a:solidFill>
-            <a:prstDash val="solid"/>
-          </a:ln>
-        </p:spPr>
+          <p:cNvPr id="14" name="Text 12"/>
+          <p:cNvSpPr/>
+          <p:nvPr/>
+        </p:nvSpPr>
+        <p:spPr>
+          <a:xfrm>
+            <a:off x="7799832" y="2935224"/>
+            <a:ext cx="3145536" cy="256032"/>
+          </a:xfrm>
+          <a:prstGeom prst="rect">
+            <a:avLst/>
+          </a:prstGeom>
+          <a:noFill/>
+          <a:ln/>
+        </p:spPr>
+        <p:txBody>
+          <a:bodyPr wrap="square" lIns="0" tIns="0" rIns="0" bIns="0" rtlCol="0" anchor="ctr"/>
+          <a:lstStyle/>
+          <a:p>
+            <a:pPr indent="0" marL="0">
+              <a:buNone/>
+            </a:pPr>
+            <a:r>
+              <a:rPr lang="en-US" sz="1300" b="1" dirty="0">
+                <a:solidFill>
+                  <a:srgbClr val="0068B7"/>
+                </a:solidFill>
+                <a:latin typeface="Aptos" pitchFamily="34" charset="0"/>
+                <a:ea typeface="Aptos" pitchFamily="34" charset="-122"/>
+                <a:cs typeface="Aptos" pitchFamily="34" charset="-120"/>
+              </a:rPr>
+              <a:t>Concept checkpoints</a:t>
+            </a:r>
+            <a:endParaRPr lang="en-US" sz="1300" dirty="0"/>
+          </a:p>
+        </p:txBody>
+      </p:sp>
+      <p:sp>
+        <p:nvSpPr>
+          <p:cNvPr id="15" name="Text 13"/>
+          <p:cNvSpPr/>
+          <p:nvPr/>
+        </p:nvSpPr>
+        <p:spPr>
+          <a:xfrm>
+            <a:off x="7818120" y="3300984"/>
+            <a:ext cx="3090672" cy="877824"/>
+          </a:xfrm>
+          <a:prstGeom prst="rect">
+            <a:avLst/>
+          </a:prstGeom>
+          <a:noFill/>
+          <a:ln/>
+        </p:spPr>
+        <p:txBody>
+          <a:bodyPr wrap="square" lIns="254" tIns="254" rIns="254" bIns="254" rtlCol="0" anchor="t">
+            <a:normAutofit/>
+          </a:bodyPr>
+          <a:lstStyle/>
+          <a:p>
+            <a:r>
+              <a:rPr lang="en-US" sz="1380" dirty="0">
+                <a:solidFill>
+                  <a:srgbClr val="17364A"/>
+                </a:solidFill>
+                <a:latin typeface="Aptos" pitchFamily="34" charset="0"/>
+                <a:ea typeface="Aptos" pitchFamily="34" charset="-122"/>
+                <a:cs typeface="Aptos" pitchFamily="34" charset="-120"/>
+              </a:rPr>
+              <a:t>Which public health workflows could benefit from structured FHIR data?</a:t>
+            </a:r>
+            <a:endParaRPr lang="en-US" sz="1380" dirty="0"/>
+          </a:p>
+          <a:p>
+            <a:r>
+              <a:rPr lang="en-US" sz="1380" dirty="0">
+                <a:solidFill>
+                  <a:srgbClr val="17364A"/>
+                </a:solidFill>
+                <a:latin typeface="Aptos" pitchFamily="34" charset="0"/>
+                <a:ea typeface="Aptos" pitchFamily="34" charset="-122"/>
+                <a:cs typeface="Aptos" pitchFamily="34" charset="-120"/>
+              </a:rPr>
+              <a:t>Which data elements are required for the workflow?</a:t>
+            </a:r>
+            <a:endParaRPr lang="en-US" sz="1380" dirty="0"/>
+          </a:p>
+          <a:p>
+            <a:r>
+              <a:rPr lang="en-US" sz="1380" dirty="0">
+                <a:solidFill>
+                  <a:srgbClr val="17364A"/>
+                </a:solidFill>
+                <a:latin typeface="Aptos" pitchFamily="34" charset="0"/>
+                <a:ea typeface="Aptos" pitchFamily="34" charset="-122"/>
+                <a:cs typeface="Aptos" pitchFamily="34" charset="-120"/>
+              </a:rPr>
+              <a:t>Are those elements available through FHIR in the source systems?</a:t>
+            </a:r>
+            <a:endParaRPr lang="en-US" sz="1380" dirty="0"/>
+          </a:p>
+        </p:txBody>
       </p:sp>
       <p:sp>
         <p:nvSpPr>
           <p:cNvPr id="16" name="Shape 14"/>
-          <p:cNvSpPr/>
-          <p:nvPr/>
-        </p:nvSpPr>
-        <p:spPr>
-          <a:xfrm>
-            <a:off x="9198864" y="4206240"/>
-            <a:ext cx="347472" cy="347472"/>
-          </a:xfrm>
-          <a:prstGeom prst="ellipse">
-            <a:avLst/>
-          </a:prstGeom>
-          <a:solidFill>
-            <a:srgbClr val="2F8A28"/>
-          </a:solidFill>
-          <a:ln w="12700">
-            <a:solidFill>
-              <a:srgbClr val="2F8A28"/>
-            </a:solidFill>
-            <a:prstDash val="solid"/>
-          </a:ln>
-        </p:spPr>
-      </p:sp>
-      <p:sp>
-        <p:nvSpPr>
-          <p:cNvPr id="17" name="Text 15"/>
-          <p:cNvSpPr/>
-          <p:nvPr/>
-        </p:nvSpPr>
-        <p:spPr>
-          <a:xfrm>
-            <a:off x="7909560" y="3977640"/>
-            <a:ext cx="2926080" cy="182880"/>
-          </a:xfrm>
-          <a:prstGeom prst="rect">
-            <a:avLst/>
-          </a:prstGeom>
-          <a:noFill/>
-          <a:ln/>
-        </p:spPr>
-        <p:txBody>
-          <a:bodyPr wrap="square" lIns="0" tIns="0" rIns="0" bIns="0" rtlCol="0" anchor="ctr"/>
-          <a:lstStyle/>
-          <a:p>
-            <a:pPr algn="ctr" indent="0" marL="0">
-              <a:buNone/>
-            </a:pPr>
-            <a:r>
-              <a:rPr lang="en-US" sz="1000" dirty="0">
-                <a:solidFill>
-                  <a:srgbClr val="003A63"/>
-                </a:solidFill>
-                <a:latin typeface="Aptos" pitchFamily="34" charset="0"/>
-                <a:ea typeface="Aptos" pitchFamily="34" charset="-122"/>
-                <a:cs typeface="Aptos" pitchFamily="34" charset="-120"/>
-              </a:rPr>
-              <a:t>Concept to action</a:t>
-            </a:r>
-            <a:endParaRPr lang="en-US" sz="1000" dirty="0"/>
-          </a:p>
-        </p:txBody>
-      </p:sp>
-      <p:sp>
-        <p:nvSpPr>
-          <p:cNvPr id="18" name="Shape 16"/>
           <p:cNvSpPr/>
           <p:nvPr/>
         </p:nvSpPr>
@@ -8146,7 +7905,7 @@
       </p:sp>
       <p:sp>
         <p:nvSpPr>
-          <p:cNvPr id="19" name="Text 17"/>
+          <p:cNvPr id="17" name="Text 15"/>
           <p:cNvSpPr/>
           <p:nvPr/>
         </p:nvSpPr>
@@ -8185,7 +7944,7 @@
       </p:sp>
       <p:sp>
         <p:nvSpPr>
-          <p:cNvPr id="20" name="Text 18"/>
+          <p:cNvPr id="18" name="Text 16"/>
           <p:cNvSpPr/>
           <p:nvPr/>
         </p:nvSpPr>
@@ -8679,13 +8438,11 @@
             </a:avLst>
           </a:prstGeom>
           <a:solidFill>
-            <a:srgbClr val="FFFFFF">
-              <a:alpha val="88000"/>
-            </a:srgbClr>
+            <a:srgbClr val="FFFFFF"/>
           </a:solidFill>
           <a:ln w="12700">
             <a:solidFill>
-              <a:srgbClr val="D6E8F2"/>
+              <a:srgbClr val="B9D7E6"/>
             </a:solidFill>
             <a:prstDash val="solid"/>
           </a:ln>
@@ -8693,119 +8450,98 @@
       </p:sp>
       <p:sp>
         <p:nvSpPr>
-          <p:cNvPr id="14" name="Shape 12"/>
-          <p:cNvSpPr/>
-          <p:nvPr/>
-        </p:nvSpPr>
-        <p:spPr>
-          <a:xfrm>
-            <a:off x="8074152" y="3291840"/>
-            <a:ext cx="2596896" cy="749808"/>
-          </a:xfrm>
-          <a:prstGeom prst="rect">
-            <a:avLst/>
-          </a:prstGeom>
-          <a:solidFill>
-            <a:srgbClr val="EAF6F8"/>
-          </a:solidFill>
-          <a:ln w="12700">
-            <a:solidFill>
-              <a:srgbClr val="8ABBD8"/>
-            </a:solidFill>
-            <a:prstDash val="solid"/>
-          </a:ln>
-        </p:spPr>
-      </p:sp>
-      <p:sp>
-        <p:nvSpPr>
-          <p:cNvPr id="15" name="Shape 13"/>
-          <p:cNvSpPr/>
-          <p:nvPr/>
-        </p:nvSpPr>
-        <p:spPr>
-          <a:xfrm>
-            <a:off x="8202168" y="3721608"/>
-            <a:ext cx="2340864" cy="0"/>
-          </a:xfrm>
-          <a:prstGeom prst="line">
-            <a:avLst/>
-          </a:prstGeom>
-          <a:noFill/>
-          <a:ln w="19050">
-            <a:solidFill>
-              <a:srgbClr val="0068B7"/>
-            </a:solidFill>
-            <a:prstDash val="solid"/>
-          </a:ln>
-        </p:spPr>
+          <p:cNvPr id="14" name="Text 12"/>
+          <p:cNvSpPr/>
+          <p:nvPr/>
+        </p:nvSpPr>
+        <p:spPr>
+          <a:xfrm>
+            <a:off x="7799832" y="2935224"/>
+            <a:ext cx="3145536" cy="256032"/>
+          </a:xfrm>
+          <a:prstGeom prst="rect">
+            <a:avLst/>
+          </a:prstGeom>
+          <a:noFill/>
+          <a:ln/>
+        </p:spPr>
+        <p:txBody>
+          <a:bodyPr wrap="square" lIns="0" tIns="0" rIns="0" bIns="0" rtlCol="0" anchor="ctr"/>
+          <a:lstStyle/>
+          <a:p>
+            <a:pPr indent="0" marL="0">
+              <a:buNone/>
+            </a:pPr>
+            <a:r>
+              <a:rPr lang="en-US" sz="1300" b="1" dirty="0">
+                <a:solidFill>
+                  <a:srgbClr val="0068B7"/>
+                </a:solidFill>
+                <a:latin typeface="Aptos" pitchFamily="34" charset="0"/>
+                <a:ea typeface="Aptos" pitchFamily="34" charset="-122"/>
+                <a:cs typeface="Aptos" pitchFamily="34" charset="-120"/>
+              </a:rPr>
+              <a:t>Concept checkpoints</a:t>
+            </a:r>
+            <a:endParaRPr lang="en-US" sz="1300" dirty="0"/>
+          </a:p>
+        </p:txBody>
+      </p:sp>
+      <p:sp>
+        <p:nvSpPr>
+          <p:cNvPr id="15" name="Text 13"/>
+          <p:cNvSpPr/>
+          <p:nvPr/>
+        </p:nvSpPr>
+        <p:spPr>
+          <a:xfrm>
+            <a:off x="7818120" y="3300984"/>
+            <a:ext cx="3090672" cy="877824"/>
+          </a:xfrm>
+          <a:prstGeom prst="rect">
+            <a:avLst/>
+          </a:prstGeom>
+          <a:noFill/>
+          <a:ln/>
+        </p:spPr>
+        <p:txBody>
+          <a:bodyPr wrap="square" lIns="254" tIns="254" rIns="254" bIns="254" rtlCol="0" anchor="t">
+            <a:normAutofit/>
+          </a:bodyPr>
+          <a:lstStyle/>
+          <a:p>
+            <a:r>
+              <a:rPr lang="en-US" sz="1380" dirty="0">
+                <a:solidFill>
+                  <a:srgbClr val="17364A"/>
+                </a:solidFill>
+                <a:latin typeface="Aptos" pitchFamily="34" charset="0"/>
+                <a:ea typeface="Aptos" pitchFamily="34" charset="-122"/>
+                <a:cs typeface="Aptos" pitchFamily="34" charset="-120"/>
+              </a:rPr>
+              <a:t>Which profiles or implementation guides apply?</a:t>
+            </a:r>
+            <a:endParaRPr lang="en-US" sz="1380" dirty="0"/>
+          </a:p>
+          <a:p>
+            <a:r>
+              <a:rPr lang="en-US" sz="1380" dirty="0">
+                <a:solidFill>
+                  <a:srgbClr val="17364A"/>
+                </a:solidFill>
+                <a:latin typeface="Aptos" pitchFamily="34" charset="0"/>
+                <a:ea typeface="Aptos" pitchFamily="34" charset="-122"/>
+                <a:cs typeface="Aptos" pitchFamily="34" charset="-120"/>
+              </a:rPr>
+              <a:t>How will staff verify that the AI tool used the correct FHIR data?</a:t>
+            </a:r>
+            <a:endParaRPr lang="en-US" sz="1380" dirty="0"/>
+          </a:p>
+        </p:txBody>
       </p:sp>
       <p:sp>
         <p:nvSpPr>
           <p:cNvPr id="16" name="Shape 14"/>
-          <p:cNvSpPr/>
-          <p:nvPr/>
-        </p:nvSpPr>
-        <p:spPr>
-          <a:xfrm>
-            <a:off x="9198864" y="4206240"/>
-            <a:ext cx="347472" cy="347472"/>
-          </a:xfrm>
-          <a:prstGeom prst="ellipse">
-            <a:avLst/>
-          </a:prstGeom>
-          <a:solidFill>
-            <a:srgbClr val="2F8A28"/>
-          </a:solidFill>
-          <a:ln w="12700">
-            <a:solidFill>
-              <a:srgbClr val="2F8A28"/>
-            </a:solidFill>
-            <a:prstDash val="solid"/>
-          </a:ln>
-        </p:spPr>
-      </p:sp>
-      <p:sp>
-        <p:nvSpPr>
-          <p:cNvPr id="17" name="Text 15"/>
-          <p:cNvSpPr/>
-          <p:nvPr/>
-        </p:nvSpPr>
-        <p:spPr>
-          <a:xfrm>
-            <a:off x="7909560" y="3977640"/>
-            <a:ext cx="2926080" cy="182880"/>
-          </a:xfrm>
-          <a:prstGeom prst="rect">
-            <a:avLst/>
-          </a:prstGeom>
-          <a:noFill/>
-          <a:ln/>
-        </p:spPr>
-        <p:txBody>
-          <a:bodyPr wrap="square" lIns="0" tIns="0" rIns="0" bIns="0" rtlCol="0" anchor="ctr"/>
-          <a:lstStyle/>
-          <a:p>
-            <a:pPr algn="ctr" indent="0" marL="0">
-              <a:buNone/>
-            </a:pPr>
-            <a:r>
-              <a:rPr lang="en-US" sz="1000" dirty="0">
-                <a:solidFill>
-                  <a:srgbClr val="003A63"/>
-                </a:solidFill>
-                <a:latin typeface="Aptos" pitchFamily="34" charset="0"/>
-                <a:ea typeface="Aptos" pitchFamily="34" charset="-122"/>
-                <a:cs typeface="Aptos" pitchFamily="34" charset="-120"/>
-              </a:rPr>
-              <a:t>Concept to action</a:t>
-            </a:r>
-            <a:endParaRPr lang="en-US" sz="1000" dirty="0"/>
-          </a:p>
-        </p:txBody>
-      </p:sp>
-      <p:sp>
-        <p:nvSpPr>
-          <p:cNvPr id="18" name="Shape 16"/>
           <p:cNvSpPr/>
           <p:nvPr/>
         </p:nvSpPr>
@@ -8832,7 +8568,7 @@
       </p:sp>
       <p:sp>
         <p:nvSpPr>
-          <p:cNvPr id="19" name="Text 17"/>
+          <p:cNvPr id="17" name="Text 15"/>
           <p:cNvSpPr/>
           <p:nvPr/>
         </p:nvSpPr>
@@ -8871,7 +8607,7 @@
       </p:sp>
       <p:sp>
         <p:nvSpPr>
-          <p:cNvPr id="20" name="Text 18"/>
+          <p:cNvPr id="18" name="Text 16"/>
           <p:cNvSpPr/>
           <p:nvPr/>
         </p:nvSpPr>
@@ -9365,13 +9101,11 @@
             </a:avLst>
           </a:prstGeom>
           <a:solidFill>
-            <a:srgbClr val="FFFFFF">
-              <a:alpha val="88000"/>
-            </a:srgbClr>
+            <a:srgbClr val="FFFFFF"/>
           </a:solidFill>
           <a:ln w="12700">
             <a:solidFill>
-              <a:srgbClr val="D6E8F2"/>
+              <a:srgbClr val="B9D7E6"/>
             </a:solidFill>
             <a:prstDash val="solid"/>
           </a:ln>
@@ -9379,119 +9113,98 @@
       </p:sp>
       <p:sp>
         <p:nvSpPr>
-          <p:cNvPr id="14" name="Shape 12"/>
-          <p:cNvSpPr/>
-          <p:nvPr/>
-        </p:nvSpPr>
-        <p:spPr>
-          <a:xfrm>
-            <a:off x="8074152" y="3291840"/>
-            <a:ext cx="2596896" cy="749808"/>
-          </a:xfrm>
-          <a:prstGeom prst="rect">
-            <a:avLst/>
-          </a:prstGeom>
-          <a:solidFill>
-            <a:srgbClr val="EAF6F8"/>
-          </a:solidFill>
-          <a:ln w="12700">
-            <a:solidFill>
-              <a:srgbClr val="8ABBD8"/>
-            </a:solidFill>
-            <a:prstDash val="solid"/>
-          </a:ln>
-        </p:spPr>
-      </p:sp>
-      <p:sp>
-        <p:nvSpPr>
-          <p:cNvPr id="15" name="Shape 13"/>
-          <p:cNvSpPr/>
-          <p:nvPr/>
-        </p:nvSpPr>
-        <p:spPr>
-          <a:xfrm>
-            <a:off x="8202168" y="3721608"/>
-            <a:ext cx="2340864" cy="0"/>
-          </a:xfrm>
-          <a:prstGeom prst="line">
-            <a:avLst/>
-          </a:prstGeom>
-          <a:noFill/>
-          <a:ln w="19050">
-            <a:solidFill>
-              <a:srgbClr val="0068B7"/>
-            </a:solidFill>
-            <a:prstDash val="solid"/>
-          </a:ln>
-        </p:spPr>
+          <p:cNvPr id="14" name="Text 12"/>
+          <p:cNvSpPr/>
+          <p:nvPr/>
+        </p:nvSpPr>
+        <p:spPr>
+          <a:xfrm>
+            <a:off x="7799832" y="2935224"/>
+            <a:ext cx="3145536" cy="256032"/>
+          </a:xfrm>
+          <a:prstGeom prst="rect">
+            <a:avLst/>
+          </a:prstGeom>
+          <a:noFill/>
+          <a:ln/>
+        </p:spPr>
+        <p:txBody>
+          <a:bodyPr wrap="square" lIns="0" tIns="0" rIns="0" bIns="0" rtlCol="0" anchor="ctr"/>
+          <a:lstStyle/>
+          <a:p>
+            <a:pPr indent="0" marL="0">
+              <a:buNone/>
+            </a:pPr>
+            <a:r>
+              <a:rPr lang="en-US" sz="1300" b="1" dirty="0">
+                <a:solidFill>
+                  <a:srgbClr val="0068B7"/>
+                </a:solidFill>
+                <a:latin typeface="Aptos" pitchFamily="34" charset="0"/>
+                <a:ea typeface="Aptos" pitchFamily="34" charset="-122"/>
+                <a:cs typeface="Aptos" pitchFamily="34" charset="-120"/>
+              </a:rPr>
+              <a:t>Concept checkpoints</a:t>
+            </a:r>
+            <a:endParaRPr lang="en-US" sz="1300" dirty="0"/>
+          </a:p>
+        </p:txBody>
+      </p:sp>
+      <p:sp>
+        <p:nvSpPr>
+          <p:cNvPr id="15" name="Text 13"/>
+          <p:cNvSpPr/>
+          <p:nvPr/>
+        </p:nvSpPr>
+        <p:spPr>
+          <a:xfrm>
+            <a:off x="7818120" y="3300984"/>
+            <a:ext cx="3090672" cy="877824"/>
+          </a:xfrm>
+          <a:prstGeom prst="rect">
+            <a:avLst/>
+          </a:prstGeom>
+          <a:noFill/>
+          <a:ln/>
+        </p:spPr>
+        <p:txBody>
+          <a:bodyPr wrap="square" lIns="254" tIns="254" rIns="254" bIns="254" rtlCol="0" anchor="t">
+            <a:normAutofit/>
+          </a:bodyPr>
+          <a:lstStyle/>
+          <a:p>
+            <a:r>
+              <a:rPr lang="en-US" sz="1380" dirty="0">
+                <a:solidFill>
+                  <a:srgbClr val="17364A"/>
+                </a:solidFill>
+                <a:latin typeface="Aptos" pitchFamily="34" charset="0"/>
+                <a:ea typeface="Aptos" pitchFamily="34" charset="-122"/>
+                <a:cs typeface="Aptos" pitchFamily="34" charset="-120"/>
+              </a:rPr>
+              <a:t>Create a FHIR data needs worksheet for one AI-supported public health use case.</a:t>
+            </a:r>
+            <a:endParaRPr lang="en-US" sz="1380" dirty="0"/>
+          </a:p>
+          <a:p>
+            <a:r>
+              <a:rPr lang="en-US" sz="1380" dirty="0">
+                <a:solidFill>
+                  <a:srgbClr val="17364A"/>
+                </a:solidFill>
+                <a:latin typeface="Aptos" pitchFamily="34" charset="0"/>
+                <a:ea typeface="Aptos" pitchFamily="34" charset="-122"/>
+                <a:cs typeface="Aptos" pitchFamily="34" charset="-120"/>
+              </a:rPr>
+              <a:t>Include the use case, required data elements, relevant FHIR resources, source systems, API.</a:t>
+            </a:r>
+            <a:endParaRPr lang="en-US" sz="1380" dirty="0"/>
+          </a:p>
+        </p:txBody>
       </p:sp>
       <p:sp>
         <p:nvSpPr>
           <p:cNvPr id="16" name="Shape 14"/>
-          <p:cNvSpPr/>
-          <p:nvPr/>
-        </p:nvSpPr>
-        <p:spPr>
-          <a:xfrm>
-            <a:off x="9198864" y="4206240"/>
-            <a:ext cx="347472" cy="347472"/>
-          </a:xfrm>
-          <a:prstGeom prst="ellipse">
-            <a:avLst/>
-          </a:prstGeom>
-          <a:solidFill>
-            <a:srgbClr val="2F8A28"/>
-          </a:solidFill>
-          <a:ln w="12700">
-            <a:solidFill>
-              <a:srgbClr val="2F8A28"/>
-            </a:solidFill>
-            <a:prstDash val="solid"/>
-          </a:ln>
-        </p:spPr>
-      </p:sp>
-      <p:sp>
-        <p:nvSpPr>
-          <p:cNvPr id="17" name="Text 15"/>
-          <p:cNvSpPr/>
-          <p:nvPr/>
-        </p:nvSpPr>
-        <p:spPr>
-          <a:xfrm>
-            <a:off x="7909560" y="3977640"/>
-            <a:ext cx="2926080" cy="182880"/>
-          </a:xfrm>
-          <a:prstGeom prst="rect">
-            <a:avLst/>
-          </a:prstGeom>
-          <a:noFill/>
-          <a:ln/>
-        </p:spPr>
-        <p:txBody>
-          <a:bodyPr wrap="square" lIns="0" tIns="0" rIns="0" bIns="0" rtlCol="0" anchor="ctr"/>
-          <a:lstStyle/>
-          <a:p>
-            <a:pPr algn="ctr" indent="0" marL="0">
-              <a:buNone/>
-            </a:pPr>
-            <a:r>
-              <a:rPr lang="en-US" sz="1000" dirty="0">
-                <a:solidFill>
-                  <a:srgbClr val="003A63"/>
-                </a:solidFill>
-                <a:latin typeface="Aptos" pitchFamily="34" charset="0"/>
-                <a:ea typeface="Aptos" pitchFamily="34" charset="-122"/>
-                <a:cs typeface="Aptos" pitchFamily="34" charset="-120"/>
-              </a:rPr>
-              <a:t>Concept to action</a:t>
-            </a:r>
-            <a:endParaRPr lang="en-US" sz="1000" dirty="0"/>
-          </a:p>
-        </p:txBody>
-      </p:sp>
-      <p:sp>
-        <p:nvSpPr>
-          <p:cNvPr id="18" name="Shape 16"/>
           <p:cNvSpPr/>
           <p:nvPr/>
         </p:nvSpPr>
@@ -9518,7 +9231,7 @@
       </p:sp>
       <p:sp>
         <p:nvSpPr>
-          <p:cNvPr id="19" name="Text 17"/>
+          <p:cNvPr id="17" name="Text 15"/>
           <p:cNvSpPr/>
           <p:nvPr/>
         </p:nvSpPr>
@@ -9557,7 +9270,7 @@
       </p:sp>
       <p:sp>
         <p:nvSpPr>
-          <p:cNvPr id="20" name="Text 18"/>
+          <p:cNvPr id="18" name="Text 16"/>
           <p:cNvSpPr/>
           <p:nvPr/>
         </p:nvSpPr>
@@ -10065,13 +9778,11 @@
             </a:avLst>
           </a:prstGeom>
           <a:solidFill>
-            <a:srgbClr val="FFFFFF">
-              <a:alpha val="88000"/>
-            </a:srgbClr>
+            <a:srgbClr val="FFFFFF"/>
           </a:solidFill>
           <a:ln w="12700">
             <a:solidFill>
-              <a:srgbClr val="D6E8F2"/>
+              <a:srgbClr val="B9D7E6"/>
             </a:solidFill>
             <a:prstDash val="solid"/>
           </a:ln>
@@ -10079,119 +9790,112 @@
       </p:sp>
       <p:sp>
         <p:nvSpPr>
-          <p:cNvPr id="14" name="Shape 12"/>
-          <p:cNvSpPr/>
-          <p:nvPr/>
-        </p:nvSpPr>
-        <p:spPr>
-          <a:xfrm>
-            <a:off x="8074152" y="3291840"/>
-            <a:ext cx="2596896" cy="749808"/>
-          </a:xfrm>
-          <a:prstGeom prst="rect">
-            <a:avLst/>
-          </a:prstGeom>
-          <a:solidFill>
-            <a:srgbClr val="EAF6F8"/>
-          </a:solidFill>
-          <a:ln w="12700">
-            <a:solidFill>
-              <a:srgbClr val="8ABBD8"/>
-            </a:solidFill>
-            <a:prstDash val="solid"/>
-          </a:ln>
-        </p:spPr>
-      </p:sp>
-      <p:sp>
-        <p:nvSpPr>
-          <p:cNvPr id="15" name="Shape 13"/>
-          <p:cNvSpPr/>
-          <p:nvPr/>
-        </p:nvSpPr>
-        <p:spPr>
-          <a:xfrm>
-            <a:off x="8202168" y="3721608"/>
-            <a:ext cx="2340864" cy="0"/>
-          </a:xfrm>
-          <a:prstGeom prst="line">
-            <a:avLst/>
-          </a:prstGeom>
-          <a:noFill/>
-          <a:ln w="19050">
-            <a:solidFill>
-              <a:srgbClr val="0068B7"/>
-            </a:solidFill>
-            <a:prstDash val="solid"/>
-          </a:ln>
-        </p:spPr>
+          <p:cNvPr id="14" name="Text 12"/>
+          <p:cNvSpPr/>
+          <p:nvPr/>
+        </p:nvSpPr>
+        <p:spPr>
+          <a:xfrm>
+            <a:off x="7799832" y="2935224"/>
+            <a:ext cx="3145536" cy="256032"/>
+          </a:xfrm>
+          <a:prstGeom prst="rect">
+            <a:avLst/>
+          </a:prstGeom>
+          <a:noFill/>
+          <a:ln/>
+        </p:spPr>
+        <p:txBody>
+          <a:bodyPr wrap="square" lIns="0" tIns="0" rIns="0" bIns="0" rtlCol="0" anchor="ctr"/>
+          <a:lstStyle/>
+          <a:p>
+            <a:pPr indent="0" marL="0">
+              <a:buNone/>
+            </a:pPr>
+            <a:r>
+              <a:rPr lang="en-US" sz="1300" b="1" dirty="0">
+                <a:solidFill>
+                  <a:srgbClr val="0068B7"/>
+                </a:solidFill>
+                <a:latin typeface="Aptos" pitchFamily="34" charset="0"/>
+                <a:ea typeface="Aptos" pitchFamily="34" charset="-122"/>
+                <a:cs typeface="Aptos" pitchFamily="34" charset="-120"/>
+              </a:rPr>
+              <a:t>Concept checkpoints</a:t>
+            </a:r>
+            <a:endParaRPr lang="en-US" sz="1300" dirty="0"/>
+          </a:p>
+        </p:txBody>
+      </p:sp>
+      <p:sp>
+        <p:nvSpPr>
+          <p:cNvPr id="15" name="Text 13"/>
+          <p:cNvSpPr/>
+          <p:nvPr/>
+        </p:nvSpPr>
+        <p:spPr>
+          <a:xfrm>
+            <a:off x="7818120" y="3300984"/>
+            <a:ext cx="3090672" cy="877824"/>
+          </a:xfrm>
+          <a:prstGeom prst="rect">
+            <a:avLst/>
+          </a:prstGeom>
+          <a:noFill/>
+          <a:ln/>
+        </p:spPr>
+        <p:txBody>
+          <a:bodyPr wrap="square" lIns="254" tIns="254" rIns="254" bIns="254" rtlCol="0" anchor="t">
+            <a:normAutofit/>
+          </a:bodyPr>
+          <a:lstStyle/>
+          <a:p>
+            <a:r>
+              <a:rPr lang="en-US" sz="1380" dirty="0">
+                <a:solidFill>
+                  <a:srgbClr val="17364A"/>
+                </a:solidFill>
+                <a:latin typeface="Aptos" pitchFamily="34" charset="0"/>
+                <a:ea typeface="Aptos" pitchFamily="34" charset="-122"/>
+                <a:cs typeface="Aptos" pitchFamily="34" charset="-120"/>
+              </a:rPr>
+              <a:t>FHIR data needs worksheet</a:t>
+            </a:r>
+            <a:endParaRPr lang="en-US" sz="1380" dirty="0"/>
+          </a:p>
+          <a:p>
+            <a:r>
+              <a:rPr lang="en-US" sz="1380" dirty="0">
+                <a:solidFill>
+                  <a:srgbClr val="17364A"/>
+                </a:solidFill>
+                <a:latin typeface="Aptos" pitchFamily="34" charset="0"/>
+                <a:ea typeface="Aptos" pitchFamily="34" charset="-122"/>
+                <a:cs typeface="Aptos" pitchFamily="34" charset="-120"/>
+              </a:rPr>
+              <a:t>List of relevant FHIR resources</a:t>
+            </a:r>
+            <a:endParaRPr lang="en-US" sz="1380" dirty="0"/>
+          </a:p>
+          <a:p>
+            <a:r>
+              <a:rPr lang="en-US" sz="1380" dirty="0">
+                <a:solidFill>
+                  <a:srgbClr val="17364A"/>
+                </a:solidFill>
+                <a:latin typeface="Aptos" pitchFamily="34" charset="0"/>
+                <a:ea typeface="Aptos" pitchFamily="34" charset="-122"/>
+                <a:cs typeface="Aptos" pitchFamily="34" charset="-120"/>
+              </a:rPr>
+              <a:t>Vendor or implementation questions</a:t>
+            </a:r>
+            <a:endParaRPr lang="en-US" sz="1380" dirty="0"/>
+          </a:p>
+        </p:txBody>
       </p:sp>
       <p:sp>
         <p:nvSpPr>
           <p:cNvPr id="16" name="Shape 14"/>
-          <p:cNvSpPr/>
-          <p:nvPr/>
-        </p:nvSpPr>
-        <p:spPr>
-          <a:xfrm>
-            <a:off x="9198864" y="4206240"/>
-            <a:ext cx="347472" cy="347472"/>
-          </a:xfrm>
-          <a:prstGeom prst="ellipse">
-            <a:avLst/>
-          </a:prstGeom>
-          <a:solidFill>
-            <a:srgbClr val="2F8A28"/>
-          </a:solidFill>
-          <a:ln w="12700">
-            <a:solidFill>
-              <a:srgbClr val="2F8A28"/>
-            </a:solidFill>
-            <a:prstDash val="solid"/>
-          </a:ln>
-        </p:spPr>
-      </p:sp>
-      <p:sp>
-        <p:nvSpPr>
-          <p:cNvPr id="17" name="Text 15"/>
-          <p:cNvSpPr/>
-          <p:nvPr/>
-        </p:nvSpPr>
-        <p:spPr>
-          <a:xfrm>
-            <a:off x="7909560" y="3977640"/>
-            <a:ext cx="2926080" cy="182880"/>
-          </a:xfrm>
-          <a:prstGeom prst="rect">
-            <a:avLst/>
-          </a:prstGeom>
-          <a:noFill/>
-          <a:ln/>
-        </p:spPr>
-        <p:txBody>
-          <a:bodyPr wrap="square" lIns="0" tIns="0" rIns="0" bIns="0" rtlCol="0" anchor="ctr"/>
-          <a:lstStyle/>
-          <a:p>
-            <a:pPr algn="ctr" indent="0" marL="0">
-              <a:buNone/>
-            </a:pPr>
-            <a:r>
-              <a:rPr lang="en-US" sz="1000" dirty="0">
-                <a:solidFill>
-                  <a:srgbClr val="003A63"/>
-                </a:solidFill>
-                <a:latin typeface="Aptos" pitchFamily="34" charset="0"/>
-                <a:ea typeface="Aptos" pitchFamily="34" charset="-122"/>
-                <a:cs typeface="Aptos" pitchFamily="34" charset="-120"/>
-              </a:rPr>
-              <a:t>Concept to action</a:t>
-            </a:r>
-            <a:endParaRPr lang="en-US" sz="1000" dirty="0"/>
-          </a:p>
-        </p:txBody>
-      </p:sp>
-      <p:sp>
-        <p:nvSpPr>
-          <p:cNvPr id="18" name="Shape 16"/>
           <p:cNvSpPr/>
           <p:nvPr/>
         </p:nvSpPr>
@@ -10218,7 +9922,7 @@
       </p:sp>
       <p:sp>
         <p:nvSpPr>
-          <p:cNvPr id="19" name="Text 17"/>
+          <p:cNvPr id="17" name="Text 15"/>
           <p:cNvSpPr/>
           <p:nvPr/>
         </p:nvSpPr>
@@ -10257,7 +9961,7 @@
       </p:sp>
       <p:sp>
         <p:nvSpPr>
-          <p:cNvPr id="20" name="Text 18"/>
+          <p:cNvPr id="18" name="Text 16"/>
           <p:cNvSpPr/>
           <p:nvPr/>
         </p:nvSpPr>
@@ -10790,20 +10494,20 @@
         </p:nvSpPr>
         <p:spPr>
           <a:xfrm>
-            <a:off x="7635240" y="3730752"/>
-            <a:ext cx="1033272" cy="749808"/>
+            <a:off x="7909560" y="3675888"/>
+            <a:ext cx="3154680" cy="1691640"/>
           </a:xfrm>
           <a:prstGeom prst="roundRect">
             <a:avLst>
-              <a:gd name="adj" fmla="val 14634"/>
+              <a:gd name="adj" fmla="val 6486"/>
             </a:avLst>
           </a:prstGeom>
           <a:solidFill>
-            <a:srgbClr val="0068B7"/>
+            <a:srgbClr val="FFFFFF"/>
           </a:solidFill>
           <a:ln w="12700">
             <a:solidFill>
-              <a:srgbClr val="0068B7"/>
+              <a:srgbClr val="B9D7E6"/>
             </a:solidFill>
             <a:prstDash val="solid"/>
           </a:ln>
@@ -10817,172 +10521,100 @@
         </p:nvSpPr>
         <p:spPr>
           <a:xfrm>
-            <a:off x="7708392" y="3922776"/>
-            <a:ext cx="886968" cy="310896"/>
-          </a:xfrm>
-          <a:prstGeom prst="rect">
-            <a:avLst/>
-          </a:prstGeom>
-          <a:noFill/>
-          <a:ln/>
-        </p:spPr>
-        <p:txBody>
-          <a:bodyPr wrap="square" lIns="0" tIns="0" rIns="0" bIns="0" rtlCol="0" anchor="ctr">
+            <a:off x="8074152" y="3822192"/>
+            <a:ext cx="2825496" cy="256032"/>
+          </a:xfrm>
+          <a:prstGeom prst="rect">
+            <a:avLst/>
+          </a:prstGeom>
+          <a:noFill/>
+          <a:ln/>
+        </p:spPr>
+        <p:txBody>
+          <a:bodyPr wrap="square" lIns="0" tIns="0" rIns="0" bIns="0" rtlCol="0" anchor="ctr"/>
+          <a:lstStyle/>
+          <a:p>
+            <a:pPr indent="0" marL="0">
+              <a:buNone/>
+            </a:pPr>
+            <a:r>
+              <a:rPr lang="en-US" sz="1300" b="1" dirty="0">
+                <a:solidFill>
+                  <a:srgbClr val="0068B7"/>
+                </a:solidFill>
+                <a:latin typeface="Aptos" pitchFamily="34" charset="0"/>
+                <a:ea typeface="Aptos" pitchFamily="34" charset="-122"/>
+                <a:cs typeface="Aptos" pitchFamily="34" charset="-120"/>
+              </a:rPr>
+              <a:t>Learning sequence</a:t>
+            </a:r>
+            <a:endParaRPr lang="en-US" sz="1300" dirty="0"/>
+          </a:p>
+        </p:txBody>
+      </p:sp>
+      <p:sp>
+        <p:nvSpPr>
+          <p:cNvPr id="15" name="Text 13"/>
+          <p:cNvSpPr/>
+          <p:nvPr/>
+        </p:nvSpPr>
+        <p:spPr>
+          <a:xfrm>
+            <a:off x="8092440" y="4187952"/>
+            <a:ext cx="2770632" cy="1033272"/>
+          </a:xfrm>
+          <a:prstGeom prst="rect">
+            <a:avLst/>
+          </a:prstGeom>
+          <a:noFill/>
+          <a:ln/>
+        </p:spPr>
+        <p:txBody>
+          <a:bodyPr wrap="square" lIns="254" tIns="254" rIns="254" bIns="254" rtlCol="0" anchor="t">
             <a:normAutofit/>
           </a:bodyPr>
           <a:lstStyle/>
           <a:p>
-            <a:pPr algn="ctr" indent="0" marL="0">
-              <a:buNone/>
-            </a:pPr>
-            <a:r>
-              <a:rPr lang="en-US" sz="1500" b="1" dirty="0">
-                <a:solidFill>
-                  <a:srgbClr val="FFFFFF"/>
-                </a:solidFill>
-                <a:latin typeface="Aptos" pitchFamily="34" charset="0"/>
-                <a:ea typeface="Aptos" pitchFamily="34" charset="-122"/>
-                <a:cs typeface="Aptos" pitchFamily="34" charset="-120"/>
-              </a:rPr>
-              <a:t>Learn</a:t>
-            </a:r>
-            <a:endParaRPr lang="en-US" sz="1500" dirty="0"/>
-          </a:p>
-        </p:txBody>
-      </p:sp>
-      <p:sp>
-        <p:nvSpPr>
-          <p:cNvPr id="15" name="Shape 13"/>
-          <p:cNvSpPr/>
-          <p:nvPr/>
-        </p:nvSpPr>
-        <p:spPr>
-          <a:xfrm>
-            <a:off x="8924544" y="3730752"/>
-            <a:ext cx="1033272" cy="749808"/>
-          </a:xfrm>
-          <a:prstGeom prst="roundRect">
-            <a:avLst>
-              <a:gd name="adj" fmla="val 14634"/>
-            </a:avLst>
-          </a:prstGeom>
-          <a:solidFill>
-            <a:srgbClr val="2F8A28"/>
-          </a:solidFill>
-          <a:ln w="12700">
-            <a:solidFill>
-              <a:srgbClr val="2F8A28"/>
-            </a:solidFill>
-            <a:prstDash val="solid"/>
-          </a:ln>
-        </p:spPr>
-      </p:sp>
-      <p:sp>
-        <p:nvSpPr>
-          <p:cNvPr id="16" name="Text 14"/>
-          <p:cNvSpPr/>
-          <p:nvPr/>
-        </p:nvSpPr>
-        <p:spPr>
-          <a:xfrm>
-            <a:off x="8997696" y="3922776"/>
-            <a:ext cx="886968" cy="310896"/>
-          </a:xfrm>
-          <a:prstGeom prst="rect">
-            <a:avLst/>
-          </a:prstGeom>
-          <a:noFill/>
-          <a:ln/>
-        </p:spPr>
-        <p:txBody>
-          <a:bodyPr wrap="square" lIns="0" tIns="0" rIns="0" bIns="0" rtlCol="0" anchor="ctr">
-            <a:normAutofit/>
-          </a:bodyPr>
-          <a:lstStyle/>
-          <a:p>
-            <a:pPr algn="ctr" indent="0" marL="0">
-              <a:buNone/>
-            </a:pPr>
-            <a:r>
-              <a:rPr lang="en-US" sz="1500" b="1" dirty="0">
-                <a:solidFill>
-                  <a:srgbClr val="FFFFFF"/>
-                </a:solidFill>
-                <a:latin typeface="Aptos" pitchFamily="34" charset="0"/>
-                <a:ea typeface="Aptos" pitchFamily="34" charset="-122"/>
-                <a:cs typeface="Aptos" pitchFamily="34" charset="-120"/>
-              </a:rPr>
-              <a:t>Apply</a:t>
-            </a:r>
-            <a:endParaRPr lang="en-US" sz="1500" dirty="0"/>
-          </a:p>
-        </p:txBody>
-      </p:sp>
-      <p:sp>
-        <p:nvSpPr>
-          <p:cNvPr id="17" name="Shape 15"/>
-          <p:cNvSpPr/>
-          <p:nvPr/>
-        </p:nvSpPr>
-        <p:spPr>
-          <a:xfrm>
-            <a:off x="10213848" y="3730752"/>
-            <a:ext cx="1033272" cy="749808"/>
-          </a:xfrm>
-          <a:prstGeom prst="roundRect">
-            <a:avLst>
-              <a:gd name="adj" fmla="val 14634"/>
-            </a:avLst>
-          </a:prstGeom>
-          <a:solidFill>
-            <a:srgbClr val="6A4CA3"/>
-          </a:solidFill>
-          <a:ln w="12700">
-            <a:solidFill>
-              <a:srgbClr val="6A4CA3"/>
-            </a:solidFill>
-            <a:prstDash val="solid"/>
-          </a:ln>
-        </p:spPr>
-      </p:sp>
-      <p:sp>
-        <p:nvSpPr>
-          <p:cNvPr id="18" name="Text 16"/>
-          <p:cNvSpPr/>
-          <p:nvPr/>
-        </p:nvSpPr>
-        <p:spPr>
-          <a:xfrm>
-            <a:off x="10287000" y="3922776"/>
-            <a:ext cx="886968" cy="310896"/>
-          </a:xfrm>
-          <a:prstGeom prst="rect">
-            <a:avLst/>
-          </a:prstGeom>
-          <a:noFill/>
-          <a:ln/>
-        </p:spPr>
-        <p:txBody>
-          <a:bodyPr wrap="square" lIns="0" tIns="0" rIns="0" bIns="0" rtlCol="0" anchor="ctr">
-            <a:normAutofit/>
-          </a:bodyPr>
-          <a:lstStyle/>
-          <a:p>
-            <a:pPr algn="ctr" indent="0" marL="0">
-              <a:buNone/>
-            </a:pPr>
-            <a:r>
-              <a:rPr lang="en-US" sz="1500" b="1" dirty="0">
-                <a:solidFill>
-                  <a:srgbClr val="FFFFFF"/>
-                </a:solidFill>
-                <a:latin typeface="Aptos" pitchFamily="34" charset="0"/>
-                <a:ea typeface="Aptos" pitchFamily="34" charset="-122"/>
-                <a:cs typeface="Aptos" pitchFamily="34" charset="-120"/>
-              </a:rPr>
-              <a:t>Document</a:t>
-            </a:r>
-            <a:endParaRPr lang="en-US" sz="1500" dirty="0"/>
+            <a:r>
+              <a:rPr lang="en-US" sz="1380" dirty="0">
+                <a:solidFill>
+                  <a:srgbClr val="17364A"/>
+                </a:solidFill>
+                <a:latin typeface="Aptos" pitchFamily="34" charset="0"/>
+                <a:ea typeface="Aptos" pitchFamily="34" charset="-122"/>
+                <a:cs typeface="Aptos" pitchFamily="34" charset="-120"/>
+              </a:rPr>
+              <a:t>Read the module for shared vocabulary and context.</a:t>
+            </a:r>
+            <a:endParaRPr lang="en-US" sz="1380" dirty="0"/>
+          </a:p>
+          <a:p>
+            <a:r>
+              <a:rPr lang="en-US" sz="1380" dirty="0">
+                <a:solidFill>
+                  <a:srgbClr val="17364A"/>
+                </a:solidFill>
+                <a:latin typeface="Aptos" pitchFamily="34" charset="0"/>
+                <a:ea typeface="Aptos" pitchFamily="34" charset="-122"/>
+                <a:cs typeface="Aptos" pitchFamily="34" charset="-120"/>
+              </a:rPr>
+              <a:t>Complete the practical exercise to apply the concept.</a:t>
+            </a:r>
+            <a:endParaRPr lang="en-US" sz="1380" dirty="0"/>
+          </a:p>
+          <a:p>
+            <a:r>
+              <a:rPr lang="en-US" sz="1380" dirty="0">
+                <a:solidFill>
+                  <a:srgbClr val="17364A"/>
+                </a:solidFill>
+                <a:latin typeface="Aptos" pitchFamily="34" charset="0"/>
+                <a:ea typeface="Aptos" pitchFamily="34" charset="-122"/>
+                <a:cs typeface="Aptos" pitchFamily="34" charset="-120"/>
+              </a:rPr>
+              <a:t>Use the notes and references for deeper review.</a:t>
+            </a:r>
+            <a:endParaRPr lang="en-US" sz="1380" dirty="0"/>
           </a:p>
         </p:txBody>
       </p:sp>
@@ -11427,13 +11059,11 @@
             </a:avLst>
           </a:prstGeom>
           <a:solidFill>
-            <a:srgbClr val="FFFFFF">
-              <a:alpha val="88000"/>
-            </a:srgbClr>
+            <a:srgbClr val="FFFFFF"/>
           </a:solidFill>
           <a:ln w="12700">
             <a:solidFill>
-              <a:srgbClr val="D6E8F2"/>
+              <a:srgbClr val="B9D7E6"/>
             </a:solidFill>
             <a:prstDash val="solid"/>
           </a:ln>
@@ -11441,119 +11071,84 @@
       </p:sp>
       <p:sp>
         <p:nvSpPr>
-          <p:cNvPr id="14" name="Shape 12"/>
-          <p:cNvSpPr/>
-          <p:nvPr/>
-        </p:nvSpPr>
-        <p:spPr>
-          <a:xfrm>
-            <a:off x="8074152" y="3291840"/>
-            <a:ext cx="2596896" cy="749808"/>
-          </a:xfrm>
-          <a:prstGeom prst="rect">
-            <a:avLst/>
-          </a:prstGeom>
-          <a:solidFill>
-            <a:srgbClr val="EAF6F8"/>
-          </a:solidFill>
-          <a:ln w="12700">
-            <a:solidFill>
-              <a:srgbClr val="8ABBD8"/>
-            </a:solidFill>
-            <a:prstDash val="solid"/>
-          </a:ln>
-        </p:spPr>
-      </p:sp>
-      <p:sp>
-        <p:nvSpPr>
-          <p:cNvPr id="15" name="Shape 13"/>
-          <p:cNvSpPr/>
-          <p:nvPr/>
-        </p:nvSpPr>
-        <p:spPr>
-          <a:xfrm>
-            <a:off x="8202168" y="3721608"/>
-            <a:ext cx="2340864" cy="0"/>
-          </a:xfrm>
-          <a:prstGeom prst="line">
-            <a:avLst/>
-          </a:prstGeom>
-          <a:noFill/>
-          <a:ln w="19050">
-            <a:solidFill>
-              <a:srgbClr val="0068B7"/>
-            </a:solidFill>
-            <a:prstDash val="solid"/>
-          </a:ln>
-        </p:spPr>
+          <p:cNvPr id="14" name="Text 12"/>
+          <p:cNvSpPr/>
+          <p:nvPr/>
+        </p:nvSpPr>
+        <p:spPr>
+          <a:xfrm>
+            <a:off x="7799832" y="2935224"/>
+            <a:ext cx="3145536" cy="256032"/>
+          </a:xfrm>
+          <a:prstGeom prst="rect">
+            <a:avLst/>
+          </a:prstGeom>
+          <a:noFill/>
+          <a:ln/>
+        </p:spPr>
+        <p:txBody>
+          <a:bodyPr wrap="square" lIns="0" tIns="0" rIns="0" bIns="0" rtlCol="0" anchor="ctr"/>
+          <a:lstStyle/>
+          <a:p>
+            <a:pPr indent="0" marL="0">
+              <a:buNone/>
+            </a:pPr>
+            <a:r>
+              <a:rPr lang="en-US" sz="1300" b="1" dirty="0">
+                <a:solidFill>
+                  <a:srgbClr val="0068B7"/>
+                </a:solidFill>
+                <a:latin typeface="Aptos" pitchFamily="34" charset="0"/>
+                <a:ea typeface="Aptos" pitchFamily="34" charset="-122"/>
+                <a:cs typeface="Aptos" pitchFamily="34" charset="-120"/>
+              </a:rPr>
+              <a:t>Concept checkpoints</a:t>
+            </a:r>
+            <a:endParaRPr lang="en-US" sz="1300" dirty="0"/>
+          </a:p>
+        </p:txBody>
+      </p:sp>
+      <p:sp>
+        <p:nvSpPr>
+          <p:cNvPr id="15" name="Text 13"/>
+          <p:cNvSpPr/>
+          <p:nvPr/>
+        </p:nvSpPr>
+        <p:spPr>
+          <a:xfrm>
+            <a:off x="7818120" y="3300984"/>
+            <a:ext cx="3090672" cy="877824"/>
+          </a:xfrm>
+          <a:prstGeom prst="rect">
+            <a:avLst/>
+          </a:prstGeom>
+          <a:noFill/>
+          <a:ln/>
+        </p:spPr>
+        <p:txBody>
+          <a:bodyPr wrap="square" lIns="254" tIns="254" rIns="254" bIns="254" rtlCol="0" anchor="t">
+            <a:normAutofit/>
+          </a:bodyPr>
+          <a:lstStyle/>
+          <a:p>
+            <a:r>
+              <a:rPr lang="en-US" sz="1380" dirty="0">
+                <a:solidFill>
+                  <a:srgbClr val="17364A"/>
+                </a:solidFill>
+                <a:latin typeface="Aptos" pitchFamily="34" charset="0"/>
+                <a:ea typeface="Aptos" pitchFamily="34" charset="-122"/>
+                <a:cs typeface="Aptos" pitchFamily="34" charset="-120"/>
+              </a:rPr>
+              <a:t>Validation checklist</a:t>
+            </a:r>
+            <a:endParaRPr lang="en-US" sz="1380" dirty="0"/>
+          </a:p>
+        </p:txBody>
       </p:sp>
       <p:sp>
         <p:nvSpPr>
           <p:cNvPr id="16" name="Shape 14"/>
-          <p:cNvSpPr/>
-          <p:nvPr/>
-        </p:nvSpPr>
-        <p:spPr>
-          <a:xfrm>
-            <a:off x="9198864" y="4206240"/>
-            <a:ext cx="347472" cy="347472"/>
-          </a:xfrm>
-          <a:prstGeom prst="ellipse">
-            <a:avLst/>
-          </a:prstGeom>
-          <a:solidFill>
-            <a:srgbClr val="2F8A28"/>
-          </a:solidFill>
-          <a:ln w="12700">
-            <a:solidFill>
-              <a:srgbClr val="2F8A28"/>
-            </a:solidFill>
-            <a:prstDash val="solid"/>
-          </a:ln>
-        </p:spPr>
-      </p:sp>
-      <p:sp>
-        <p:nvSpPr>
-          <p:cNvPr id="17" name="Text 15"/>
-          <p:cNvSpPr/>
-          <p:nvPr/>
-        </p:nvSpPr>
-        <p:spPr>
-          <a:xfrm>
-            <a:off x="7909560" y="3977640"/>
-            <a:ext cx="2926080" cy="182880"/>
-          </a:xfrm>
-          <a:prstGeom prst="rect">
-            <a:avLst/>
-          </a:prstGeom>
-          <a:noFill/>
-          <a:ln/>
-        </p:spPr>
-        <p:txBody>
-          <a:bodyPr wrap="square" lIns="0" tIns="0" rIns="0" bIns="0" rtlCol="0" anchor="ctr"/>
-          <a:lstStyle/>
-          <a:p>
-            <a:pPr algn="ctr" indent="0" marL="0">
-              <a:buNone/>
-            </a:pPr>
-            <a:r>
-              <a:rPr lang="en-US" sz="1000" dirty="0">
-                <a:solidFill>
-                  <a:srgbClr val="003A63"/>
-                </a:solidFill>
-                <a:latin typeface="Aptos" pitchFamily="34" charset="0"/>
-                <a:ea typeface="Aptos" pitchFamily="34" charset="-122"/>
-                <a:cs typeface="Aptos" pitchFamily="34" charset="-120"/>
-              </a:rPr>
-              <a:t>Concept to action</a:t>
-            </a:r>
-            <a:endParaRPr lang="en-US" sz="1000" dirty="0"/>
-          </a:p>
-        </p:txBody>
-      </p:sp>
-      <p:sp>
-        <p:nvSpPr>
-          <p:cNvPr id="18" name="Shape 16"/>
           <p:cNvSpPr/>
           <p:nvPr/>
         </p:nvSpPr>
@@ -11580,7 +11175,7 @@
       </p:sp>
       <p:sp>
         <p:nvSpPr>
-          <p:cNvPr id="19" name="Text 17"/>
+          <p:cNvPr id="17" name="Text 15"/>
           <p:cNvSpPr/>
           <p:nvPr/>
         </p:nvSpPr>
@@ -11619,7 +11214,7 @@
       </p:sp>
       <p:sp>
         <p:nvSpPr>
-          <p:cNvPr id="20" name="Text 18"/>
+          <p:cNvPr id="18" name="Text 16"/>
           <p:cNvSpPr/>
           <p:nvPr/>
         </p:nvSpPr>
@@ -12127,13 +11722,11 @@
             </a:avLst>
           </a:prstGeom>
           <a:solidFill>
-            <a:srgbClr val="FFFFFF">
-              <a:alpha val="88000"/>
-            </a:srgbClr>
+            <a:srgbClr val="FFFFFF"/>
           </a:solidFill>
           <a:ln w="12700">
             <a:solidFill>
-              <a:srgbClr val="D6E8F2"/>
+              <a:srgbClr val="B9D7E6"/>
             </a:solidFill>
             <a:prstDash val="solid"/>
           </a:ln>
@@ -12141,119 +11734,112 @@
       </p:sp>
       <p:sp>
         <p:nvSpPr>
-          <p:cNvPr id="14" name="Shape 12"/>
-          <p:cNvSpPr/>
-          <p:nvPr/>
-        </p:nvSpPr>
-        <p:spPr>
-          <a:xfrm>
-            <a:off x="8074152" y="3291840"/>
-            <a:ext cx="2596896" cy="749808"/>
-          </a:xfrm>
-          <a:prstGeom prst="rect">
-            <a:avLst/>
-          </a:prstGeom>
-          <a:solidFill>
-            <a:srgbClr val="EAF6F8"/>
-          </a:solidFill>
-          <a:ln w="12700">
-            <a:solidFill>
-              <a:srgbClr val="8ABBD8"/>
-            </a:solidFill>
-            <a:prstDash val="solid"/>
-          </a:ln>
-        </p:spPr>
-      </p:sp>
-      <p:sp>
-        <p:nvSpPr>
-          <p:cNvPr id="15" name="Shape 13"/>
-          <p:cNvSpPr/>
-          <p:nvPr/>
-        </p:nvSpPr>
-        <p:spPr>
-          <a:xfrm>
-            <a:off x="8202168" y="3721608"/>
-            <a:ext cx="2340864" cy="0"/>
-          </a:xfrm>
-          <a:prstGeom prst="line">
-            <a:avLst/>
-          </a:prstGeom>
-          <a:noFill/>
-          <a:ln w="19050">
-            <a:solidFill>
-              <a:srgbClr val="0068B7"/>
-            </a:solidFill>
-            <a:prstDash val="solid"/>
-          </a:ln>
-        </p:spPr>
+          <p:cNvPr id="14" name="Text 12"/>
+          <p:cNvSpPr/>
+          <p:nvPr/>
+        </p:nvSpPr>
+        <p:spPr>
+          <a:xfrm>
+            <a:off x="7799832" y="2935224"/>
+            <a:ext cx="3145536" cy="256032"/>
+          </a:xfrm>
+          <a:prstGeom prst="rect">
+            <a:avLst/>
+          </a:prstGeom>
+          <a:noFill/>
+          <a:ln/>
+        </p:spPr>
+        <p:txBody>
+          <a:bodyPr wrap="square" lIns="0" tIns="0" rIns="0" bIns="0" rtlCol="0" anchor="ctr"/>
+          <a:lstStyle/>
+          <a:p>
+            <a:pPr indent="0" marL="0">
+              <a:buNone/>
+            </a:pPr>
+            <a:r>
+              <a:rPr lang="en-US" sz="1300" b="1" dirty="0">
+                <a:solidFill>
+                  <a:srgbClr val="0068B7"/>
+                </a:solidFill>
+                <a:latin typeface="Aptos" pitchFamily="34" charset="0"/>
+                <a:ea typeface="Aptos" pitchFamily="34" charset="-122"/>
+                <a:cs typeface="Aptos" pitchFamily="34" charset="-120"/>
+              </a:rPr>
+              <a:t>Concept checkpoints</a:t>
+            </a:r>
+            <a:endParaRPr lang="en-US" sz="1300" dirty="0"/>
+          </a:p>
+        </p:txBody>
+      </p:sp>
+      <p:sp>
+        <p:nvSpPr>
+          <p:cNvPr id="15" name="Text 13"/>
+          <p:cNvSpPr/>
+          <p:nvPr/>
+        </p:nvSpPr>
+        <p:spPr>
+          <a:xfrm>
+            <a:off x="7818120" y="3300984"/>
+            <a:ext cx="3090672" cy="877824"/>
+          </a:xfrm>
+          <a:prstGeom prst="rect">
+            <a:avLst/>
+          </a:prstGeom>
+          <a:noFill/>
+          <a:ln/>
+        </p:spPr>
+        <p:txBody>
+          <a:bodyPr wrap="square" lIns="254" tIns="254" rIns="254" bIns="254" rtlCol="0" anchor="t">
+            <a:normAutofit/>
+          </a:bodyPr>
+          <a:lstStyle/>
+          <a:p>
+            <a:r>
+              <a:rPr lang="en-US" sz="1380" dirty="0">
+                <a:solidFill>
+                  <a:srgbClr val="17364A"/>
+                </a:solidFill>
+                <a:latin typeface="Aptos" pitchFamily="34" charset="0"/>
+                <a:ea typeface="Aptos" pitchFamily="34" charset="-122"/>
+                <a:cs typeface="Aptos" pitchFamily="34" charset="-120"/>
+              </a:rPr>
+              <a:t>FHIR data needs worksheet</a:t>
+            </a:r>
+            <a:endParaRPr lang="en-US" sz="1380" dirty="0"/>
+          </a:p>
+          <a:p>
+            <a:r>
+              <a:rPr lang="en-US" sz="1380" dirty="0">
+                <a:solidFill>
+                  <a:srgbClr val="17364A"/>
+                </a:solidFill>
+                <a:latin typeface="Aptos" pitchFamily="34" charset="0"/>
+                <a:ea typeface="Aptos" pitchFamily="34" charset="-122"/>
+                <a:cs typeface="Aptos" pitchFamily="34" charset="-120"/>
+              </a:rPr>
+              <a:t>List of relevant FHIR resources</a:t>
+            </a:r>
+            <a:endParaRPr lang="en-US" sz="1380" dirty="0"/>
+          </a:p>
+          <a:p>
+            <a:r>
+              <a:rPr lang="en-US" sz="1380" dirty="0">
+                <a:solidFill>
+                  <a:srgbClr val="17364A"/>
+                </a:solidFill>
+                <a:latin typeface="Aptos" pitchFamily="34" charset="0"/>
+                <a:ea typeface="Aptos" pitchFamily="34" charset="-122"/>
+                <a:cs typeface="Aptos" pitchFamily="34" charset="-120"/>
+              </a:rPr>
+              <a:t>Vendor or implementation questions</a:t>
+            </a:r>
+            <a:endParaRPr lang="en-US" sz="1380" dirty="0"/>
+          </a:p>
+        </p:txBody>
       </p:sp>
       <p:sp>
         <p:nvSpPr>
           <p:cNvPr id="16" name="Shape 14"/>
-          <p:cNvSpPr/>
-          <p:nvPr/>
-        </p:nvSpPr>
-        <p:spPr>
-          <a:xfrm>
-            <a:off x="9198864" y="4206240"/>
-            <a:ext cx="347472" cy="347472"/>
-          </a:xfrm>
-          <a:prstGeom prst="ellipse">
-            <a:avLst/>
-          </a:prstGeom>
-          <a:solidFill>
-            <a:srgbClr val="2F8A28"/>
-          </a:solidFill>
-          <a:ln w="12700">
-            <a:solidFill>
-              <a:srgbClr val="2F8A28"/>
-            </a:solidFill>
-            <a:prstDash val="solid"/>
-          </a:ln>
-        </p:spPr>
-      </p:sp>
-      <p:sp>
-        <p:nvSpPr>
-          <p:cNvPr id="17" name="Text 15"/>
-          <p:cNvSpPr/>
-          <p:nvPr/>
-        </p:nvSpPr>
-        <p:spPr>
-          <a:xfrm>
-            <a:off x="7909560" y="3977640"/>
-            <a:ext cx="2926080" cy="182880"/>
-          </a:xfrm>
-          <a:prstGeom prst="rect">
-            <a:avLst/>
-          </a:prstGeom>
-          <a:noFill/>
-          <a:ln/>
-        </p:spPr>
-        <p:txBody>
-          <a:bodyPr wrap="square" lIns="0" tIns="0" rIns="0" bIns="0" rtlCol="0" anchor="ctr"/>
-          <a:lstStyle/>
-          <a:p>
-            <a:pPr algn="ctr" indent="0" marL="0">
-              <a:buNone/>
-            </a:pPr>
-            <a:r>
-              <a:rPr lang="en-US" sz="1000" dirty="0">
-                <a:solidFill>
-                  <a:srgbClr val="003A63"/>
-                </a:solidFill>
-                <a:latin typeface="Aptos" pitchFamily="34" charset="0"/>
-                <a:ea typeface="Aptos" pitchFamily="34" charset="-122"/>
-                <a:cs typeface="Aptos" pitchFamily="34" charset="-120"/>
-              </a:rPr>
-              <a:t>Concept to action</a:t>
-            </a:r>
-            <a:endParaRPr lang="en-US" sz="1000" dirty="0"/>
-          </a:p>
-        </p:txBody>
-      </p:sp>
-      <p:sp>
-        <p:nvSpPr>
-          <p:cNvPr id="18" name="Shape 16"/>
           <p:cNvSpPr/>
           <p:nvPr/>
         </p:nvSpPr>
@@ -12280,7 +11866,7 @@
       </p:sp>
       <p:sp>
         <p:nvSpPr>
-          <p:cNvPr id="19" name="Text 17"/>
+          <p:cNvPr id="17" name="Text 15"/>
           <p:cNvSpPr/>
           <p:nvPr/>
         </p:nvSpPr>
@@ -12319,7 +11905,7 @@
       </p:sp>
       <p:sp>
         <p:nvSpPr>
-          <p:cNvPr id="20" name="Text 18"/>
+          <p:cNvPr id="18" name="Text 16"/>
           <p:cNvSpPr/>
           <p:nvPr/>
         </p:nvSpPr>
@@ -12827,13 +12413,11 @@
             </a:avLst>
           </a:prstGeom>
           <a:solidFill>
-            <a:srgbClr val="FFFFFF">
-              <a:alpha val="88000"/>
-            </a:srgbClr>
+            <a:srgbClr val="FFFFFF"/>
           </a:solidFill>
           <a:ln w="12700">
             <a:solidFill>
-              <a:srgbClr val="D6E8F2"/>
+              <a:srgbClr val="B9D7E6"/>
             </a:solidFill>
             <a:prstDash val="solid"/>
           </a:ln>
@@ -12841,119 +12425,112 @@
       </p:sp>
       <p:sp>
         <p:nvSpPr>
-          <p:cNvPr id="14" name="Shape 12"/>
-          <p:cNvSpPr/>
-          <p:nvPr/>
-        </p:nvSpPr>
-        <p:spPr>
-          <a:xfrm>
-            <a:off x="8074152" y="3291840"/>
-            <a:ext cx="2596896" cy="749808"/>
-          </a:xfrm>
-          <a:prstGeom prst="rect">
-            <a:avLst/>
-          </a:prstGeom>
-          <a:solidFill>
-            <a:srgbClr val="EAF6F8"/>
-          </a:solidFill>
-          <a:ln w="12700">
-            <a:solidFill>
-              <a:srgbClr val="8ABBD8"/>
-            </a:solidFill>
-            <a:prstDash val="solid"/>
-          </a:ln>
-        </p:spPr>
-      </p:sp>
-      <p:sp>
-        <p:nvSpPr>
-          <p:cNvPr id="15" name="Shape 13"/>
-          <p:cNvSpPr/>
-          <p:nvPr/>
-        </p:nvSpPr>
-        <p:spPr>
-          <a:xfrm>
-            <a:off x="8202168" y="3721608"/>
-            <a:ext cx="2340864" cy="0"/>
-          </a:xfrm>
-          <a:prstGeom prst="line">
-            <a:avLst/>
-          </a:prstGeom>
-          <a:noFill/>
-          <a:ln w="19050">
-            <a:solidFill>
-              <a:srgbClr val="0068B7"/>
-            </a:solidFill>
-            <a:prstDash val="solid"/>
-          </a:ln>
-        </p:spPr>
+          <p:cNvPr id="14" name="Text 12"/>
+          <p:cNvSpPr/>
+          <p:nvPr/>
+        </p:nvSpPr>
+        <p:spPr>
+          <a:xfrm>
+            <a:off x="7799832" y="2935224"/>
+            <a:ext cx="3145536" cy="256032"/>
+          </a:xfrm>
+          <a:prstGeom prst="rect">
+            <a:avLst/>
+          </a:prstGeom>
+          <a:noFill/>
+          <a:ln/>
+        </p:spPr>
+        <p:txBody>
+          <a:bodyPr wrap="square" lIns="0" tIns="0" rIns="0" bIns="0" rtlCol="0" anchor="ctr"/>
+          <a:lstStyle/>
+          <a:p>
+            <a:pPr indent="0" marL="0">
+              <a:buNone/>
+            </a:pPr>
+            <a:r>
+              <a:rPr lang="en-US" sz="1300" b="1" dirty="0">
+                <a:solidFill>
+                  <a:srgbClr val="0068B7"/>
+                </a:solidFill>
+                <a:latin typeface="Aptos" pitchFamily="34" charset="0"/>
+                <a:ea typeface="Aptos" pitchFamily="34" charset="-122"/>
+                <a:cs typeface="Aptos" pitchFamily="34" charset="-120"/>
+              </a:rPr>
+              <a:t>Concept checkpoints</a:t>
+            </a:r>
+            <a:endParaRPr lang="en-US" sz="1300" dirty="0"/>
+          </a:p>
+        </p:txBody>
+      </p:sp>
+      <p:sp>
+        <p:nvSpPr>
+          <p:cNvPr id="15" name="Text 13"/>
+          <p:cNvSpPr/>
+          <p:nvPr/>
+        </p:nvSpPr>
+        <p:spPr>
+          <a:xfrm>
+            <a:off x="7818120" y="3300984"/>
+            <a:ext cx="3090672" cy="877824"/>
+          </a:xfrm>
+          <a:prstGeom prst="rect">
+            <a:avLst/>
+          </a:prstGeom>
+          <a:noFill/>
+          <a:ln/>
+        </p:spPr>
+        <p:txBody>
+          <a:bodyPr wrap="square" lIns="254" tIns="254" rIns="254" bIns="254" rtlCol="0" anchor="t">
+            <a:normAutofit/>
+          </a:bodyPr>
+          <a:lstStyle/>
+          <a:p>
+            <a:r>
+              <a:rPr lang="en-US" sz="1380" dirty="0">
+                <a:solidFill>
+                  <a:srgbClr val="17364A"/>
+                </a:solidFill>
+                <a:latin typeface="Aptos" pitchFamily="34" charset="0"/>
+                <a:ea typeface="Aptos" pitchFamily="34" charset="-122"/>
+                <a:cs typeface="Aptos" pitchFamily="34" charset="-120"/>
+              </a:rPr>
+              <a:t>1.</a:t>
+            </a:r>
+            <a:endParaRPr lang="en-US" sz="1380" dirty="0"/>
+          </a:p>
+          <a:p>
+            <a:r>
+              <a:rPr lang="en-US" sz="1380" dirty="0">
+                <a:solidFill>
+                  <a:srgbClr val="17364A"/>
+                </a:solidFill>
+                <a:latin typeface="Aptos" pitchFamily="34" charset="0"/>
+                <a:ea typeface="Aptos" pitchFamily="34" charset="-122"/>
+                <a:cs typeface="Aptos" pitchFamily="34" charset="-120"/>
+              </a:rPr>
+              <a:t>What is a FHIR resource?</a:t>
+            </a:r>
+            <a:endParaRPr lang="en-US" sz="1380" dirty="0"/>
+          </a:p>
+          <a:p>
+            <a:r>
+              <a:rPr lang="en-US" sz="1380" dirty="0">
+                <a:solidFill>
+                  <a:srgbClr val="17364A"/>
+                </a:solidFill>
+                <a:latin typeface="Aptos" pitchFamily="34" charset="0"/>
+                <a:ea typeface="Aptos" pitchFamily="34" charset="-122"/>
+                <a:cs typeface="Aptos" pitchFamily="34" charset="-120"/>
+              </a:rPr>
+              <a:t>2.</a:t>
+            </a:r>
+            <a:endParaRPr lang="en-US" sz="1380" dirty="0"/>
+          </a:p>
+        </p:txBody>
       </p:sp>
       <p:sp>
         <p:nvSpPr>
           <p:cNvPr id="16" name="Shape 14"/>
-          <p:cNvSpPr/>
-          <p:nvPr/>
-        </p:nvSpPr>
-        <p:spPr>
-          <a:xfrm>
-            <a:off x="9198864" y="4206240"/>
-            <a:ext cx="347472" cy="347472"/>
-          </a:xfrm>
-          <a:prstGeom prst="ellipse">
-            <a:avLst/>
-          </a:prstGeom>
-          <a:solidFill>
-            <a:srgbClr val="2F8A28"/>
-          </a:solidFill>
-          <a:ln w="12700">
-            <a:solidFill>
-              <a:srgbClr val="2F8A28"/>
-            </a:solidFill>
-            <a:prstDash val="solid"/>
-          </a:ln>
-        </p:spPr>
-      </p:sp>
-      <p:sp>
-        <p:nvSpPr>
-          <p:cNvPr id="17" name="Text 15"/>
-          <p:cNvSpPr/>
-          <p:nvPr/>
-        </p:nvSpPr>
-        <p:spPr>
-          <a:xfrm>
-            <a:off x="7909560" y="3977640"/>
-            <a:ext cx="2926080" cy="182880"/>
-          </a:xfrm>
-          <a:prstGeom prst="rect">
-            <a:avLst/>
-          </a:prstGeom>
-          <a:noFill/>
-          <a:ln/>
-        </p:spPr>
-        <p:txBody>
-          <a:bodyPr wrap="square" lIns="0" tIns="0" rIns="0" bIns="0" rtlCol="0" anchor="ctr"/>
-          <a:lstStyle/>
-          <a:p>
-            <a:pPr algn="ctr" indent="0" marL="0">
-              <a:buNone/>
-            </a:pPr>
-            <a:r>
-              <a:rPr lang="en-US" sz="1000" dirty="0">
-                <a:solidFill>
-                  <a:srgbClr val="003A63"/>
-                </a:solidFill>
-                <a:latin typeface="Aptos" pitchFamily="34" charset="0"/>
-                <a:ea typeface="Aptos" pitchFamily="34" charset="-122"/>
-                <a:cs typeface="Aptos" pitchFamily="34" charset="-120"/>
-              </a:rPr>
-              <a:t>Concept to action</a:t>
-            </a:r>
-            <a:endParaRPr lang="en-US" sz="1000" dirty="0"/>
-          </a:p>
-        </p:txBody>
-      </p:sp>
-      <p:sp>
-        <p:nvSpPr>
-          <p:cNvPr id="18" name="Shape 16"/>
           <p:cNvSpPr/>
           <p:nvPr/>
         </p:nvSpPr>
@@ -12980,7 +12557,7 @@
       </p:sp>
       <p:sp>
         <p:nvSpPr>
-          <p:cNvPr id="19" name="Text 17"/>
+          <p:cNvPr id="17" name="Text 15"/>
           <p:cNvSpPr/>
           <p:nvPr/>
         </p:nvSpPr>
@@ -13019,7 +12596,7 @@
       </p:sp>
       <p:sp>
         <p:nvSpPr>
-          <p:cNvPr id="20" name="Text 18"/>
+          <p:cNvPr id="18" name="Text 16"/>
           <p:cNvSpPr/>
           <p:nvPr/>
         </p:nvSpPr>
@@ -13527,13 +13104,11 @@
             </a:avLst>
           </a:prstGeom>
           <a:solidFill>
-            <a:srgbClr val="FFFFFF">
-              <a:alpha val="88000"/>
-            </a:srgbClr>
+            <a:srgbClr val="FFFFFF"/>
           </a:solidFill>
           <a:ln w="12700">
             <a:solidFill>
-              <a:srgbClr val="D6E8F2"/>
+              <a:srgbClr val="B9D7E6"/>
             </a:solidFill>
             <a:prstDash val="solid"/>
           </a:ln>
@@ -13541,119 +13116,98 @@
       </p:sp>
       <p:sp>
         <p:nvSpPr>
-          <p:cNvPr id="14" name="Shape 12"/>
-          <p:cNvSpPr/>
-          <p:nvPr/>
-        </p:nvSpPr>
-        <p:spPr>
-          <a:xfrm>
-            <a:off x="8074152" y="3291840"/>
-            <a:ext cx="2596896" cy="749808"/>
-          </a:xfrm>
-          <a:prstGeom prst="rect">
-            <a:avLst/>
-          </a:prstGeom>
-          <a:solidFill>
-            <a:srgbClr val="EAF6F8"/>
-          </a:solidFill>
-          <a:ln w="12700">
-            <a:solidFill>
-              <a:srgbClr val="8ABBD8"/>
-            </a:solidFill>
-            <a:prstDash val="solid"/>
-          </a:ln>
-        </p:spPr>
-      </p:sp>
-      <p:sp>
-        <p:nvSpPr>
-          <p:cNvPr id="15" name="Shape 13"/>
-          <p:cNvSpPr/>
-          <p:nvPr/>
-        </p:nvSpPr>
-        <p:spPr>
-          <a:xfrm>
-            <a:off x="8202168" y="3721608"/>
-            <a:ext cx="2340864" cy="0"/>
-          </a:xfrm>
-          <a:prstGeom prst="line">
-            <a:avLst/>
-          </a:prstGeom>
-          <a:noFill/>
-          <a:ln w="19050">
-            <a:solidFill>
-              <a:srgbClr val="0068B7"/>
-            </a:solidFill>
-            <a:prstDash val="solid"/>
-          </a:ln>
-        </p:spPr>
+          <p:cNvPr id="14" name="Text 12"/>
+          <p:cNvSpPr/>
+          <p:nvPr/>
+        </p:nvSpPr>
+        <p:spPr>
+          <a:xfrm>
+            <a:off x="7799832" y="2935224"/>
+            <a:ext cx="3145536" cy="256032"/>
+          </a:xfrm>
+          <a:prstGeom prst="rect">
+            <a:avLst/>
+          </a:prstGeom>
+          <a:noFill/>
+          <a:ln/>
+        </p:spPr>
+        <p:txBody>
+          <a:bodyPr wrap="square" lIns="0" tIns="0" rIns="0" bIns="0" rtlCol="0" anchor="ctr"/>
+          <a:lstStyle/>
+          <a:p>
+            <a:pPr indent="0" marL="0">
+              <a:buNone/>
+            </a:pPr>
+            <a:r>
+              <a:rPr lang="en-US" sz="1300" b="1" dirty="0">
+                <a:solidFill>
+                  <a:srgbClr val="0068B7"/>
+                </a:solidFill>
+                <a:latin typeface="Aptos" pitchFamily="34" charset="0"/>
+                <a:ea typeface="Aptos" pitchFamily="34" charset="-122"/>
+                <a:cs typeface="Aptos" pitchFamily="34" charset="-120"/>
+              </a:rPr>
+              <a:t>Concept checkpoints</a:t>
+            </a:r>
+            <a:endParaRPr lang="en-US" sz="1300" dirty="0"/>
+          </a:p>
+        </p:txBody>
+      </p:sp>
+      <p:sp>
+        <p:nvSpPr>
+          <p:cNvPr id="15" name="Text 13"/>
+          <p:cNvSpPr/>
+          <p:nvPr/>
+        </p:nvSpPr>
+        <p:spPr>
+          <a:xfrm>
+            <a:off x="7818120" y="3300984"/>
+            <a:ext cx="3090672" cy="877824"/>
+          </a:xfrm>
+          <a:prstGeom prst="rect">
+            <a:avLst/>
+          </a:prstGeom>
+          <a:noFill/>
+          <a:ln/>
+        </p:spPr>
+        <p:txBody>
+          <a:bodyPr wrap="square" lIns="254" tIns="254" rIns="254" bIns="254" rtlCol="0" anchor="t">
+            <a:normAutofit/>
+          </a:bodyPr>
+          <a:lstStyle/>
+          <a:p>
+            <a:r>
+              <a:rPr lang="en-US" sz="1380" dirty="0">
+                <a:solidFill>
+                  <a:srgbClr val="17364A"/>
+                </a:solidFill>
+                <a:latin typeface="Aptos" pitchFamily="34" charset="0"/>
+                <a:ea typeface="Aptos" pitchFamily="34" charset="-122"/>
+                <a:cs typeface="Aptos" pitchFamily="34" charset="-120"/>
+              </a:rPr>
+              <a:t>US Public Health Profiles Library</a:t>
+            </a:r>
+            <a:endParaRPr lang="en-US" sz="1380" dirty="0"/>
+          </a:p>
+          <a:p>
+            <a:r>
+              <a:rPr lang="en-US" sz="1380" dirty="0">
+                <a:solidFill>
+                  <a:srgbClr val="17364A"/>
+                </a:solidFill>
+                <a:latin typeface="Aptos" pitchFamily="34" charset="0"/>
+                <a:ea typeface="Aptos" pitchFamily="34" charset="-122"/>
+                <a:cs typeface="Aptos" pitchFamily="34" charset="-120"/>
+              </a:rPr>
+              <a:t>ONC USCDI resources: https://isp.healthit.gov/united-states-core-data-interoperability-uscdi</a:t>
+            </a:r>
+            <a:endParaRPr lang="en-US" sz="1380" dirty="0"/>
+          </a:p>
+        </p:txBody>
       </p:sp>
       <p:sp>
         <p:nvSpPr>
           <p:cNvPr id="16" name="Shape 14"/>
-          <p:cNvSpPr/>
-          <p:nvPr/>
-        </p:nvSpPr>
-        <p:spPr>
-          <a:xfrm>
-            <a:off x="9198864" y="4206240"/>
-            <a:ext cx="347472" cy="347472"/>
-          </a:xfrm>
-          <a:prstGeom prst="ellipse">
-            <a:avLst/>
-          </a:prstGeom>
-          <a:solidFill>
-            <a:srgbClr val="2F8A28"/>
-          </a:solidFill>
-          <a:ln w="12700">
-            <a:solidFill>
-              <a:srgbClr val="2F8A28"/>
-            </a:solidFill>
-            <a:prstDash val="solid"/>
-          </a:ln>
-        </p:spPr>
-      </p:sp>
-      <p:sp>
-        <p:nvSpPr>
-          <p:cNvPr id="17" name="Text 15"/>
-          <p:cNvSpPr/>
-          <p:nvPr/>
-        </p:nvSpPr>
-        <p:spPr>
-          <a:xfrm>
-            <a:off x="7909560" y="3977640"/>
-            <a:ext cx="2926080" cy="182880"/>
-          </a:xfrm>
-          <a:prstGeom prst="rect">
-            <a:avLst/>
-          </a:prstGeom>
-          <a:noFill/>
-          <a:ln/>
-        </p:spPr>
-        <p:txBody>
-          <a:bodyPr wrap="square" lIns="0" tIns="0" rIns="0" bIns="0" rtlCol="0" anchor="ctr"/>
-          <a:lstStyle/>
-          <a:p>
-            <a:pPr algn="ctr" indent="0" marL="0">
-              <a:buNone/>
-            </a:pPr>
-            <a:r>
-              <a:rPr lang="en-US" sz="1000" dirty="0">
-                <a:solidFill>
-                  <a:srgbClr val="003A63"/>
-                </a:solidFill>
-                <a:latin typeface="Aptos" pitchFamily="34" charset="0"/>
-                <a:ea typeface="Aptos" pitchFamily="34" charset="-122"/>
-                <a:cs typeface="Aptos" pitchFamily="34" charset="-120"/>
-              </a:rPr>
-              <a:t>Concept to action</a:t>
-            </a:r>
-            <a:endParaRPr lang="en-US" sz="1000" dirty="0"/>
-          </a:p>
-        </p:txBody>
-      </p:sp>
-      <p:sp>
-        <p:nvSpPr>
-          <p:cNvPr id="18" name="Shape 16"/>
           <p:cNvSpPr/>
           <p:nvPr/>
         </p:nvSpPr>
@@ -13680,7 +13234,7 @@
       </p:sp>
       <p:sp>
         <p:nvSpPr>
-          <p:cNvPr id="19" name="Text 17"/>
+          <p:cNvPr id="17" name="Text 15"/>
           <p:cNvSpPr/>
           <p:nvPr/>
         </p:nvSpPr>
@@ -13719,7 +13273,7 @@
       </p:sp>
       <p:sp>
         <p:nvSpPr>
-          <p:cNvPr id="20" name="Text 18"/>
+          <p:cNvPr id="18" name="Text 16"/>
           <p:cNvSpPr/>
           <p:nvPr/>
         </p:nvSpPr>
@@ -14232,20 +13786,20 @@
         </p:nvSpPr>
         <p:spPr>
           <a:xfrm>
-            <a:off x="7818120" y="3977640"/>
-            <a:ext cx="972312" cy="749808"/>
+            <a:off x="8046720" y="3794760"/>
+            <a:ext cx="3063240" cy="1600200"/>
           </a:xfrm>
           <a:prstGeom prst="roundRect">
             <a:avLst>
-              <a:gd name="adj" fmla="val 14634"/>
+              <a:gd name="adj" fmla="val 6857"/>
             </a:avLst>
           </a:prstGeom>
           <a:solidFill>
-            <a:srgbClr val="0068B7"/>
+            <a:srgbClr val="FFFFFF"/>
           </a:solidFill>
           <a:ln w="12700">
             <a:solidFill>
-              <a:srgbClr val="0068B7"/>
+              <a:srgbClr val="B9D7E6"/>
             </a:solidFill>
             <a:prstDash val="solid"/>
           </a:ln>
@@ -14259,172 +13813,100 @@
         </p:nvSpPr>
         <p:spPr>
           <a:xfrm>
-            <a:off x="7891272" y="4169664"/>
-            <a:ext cx="826008" cy="310896"/>
-          </a:xfrm>
-          <a:prstGeom prst="rect">
-            <a:avLst/>
-          </a:prstGeom>
-          <a:noFill/>
-          <a:ln/>
-        </p:spPr>
-        <p:txBody>
-          <a:bodyPr wrap="square" lIns="0" tIns="0" rIns="0" bIns="0" rtlCol="0" anchor="ctr">
+            <a:off x="8211312" y="3941064"/>
+            <a:ext cx="2734056" cy="256032"/>
+          </a:xfrm>
+          <a:prstGeom prst="rect">
+            <a:avLst/>
+          </a:prstGeom>
+          <a:noFill/>
+          <a:ln/>
+        </p:spPr>
+        <p:txBody>
+          <a:bodyPr wrap="square" lIns="0" tIns="0" rIns="0" bIns="0" rtlCol="0" anchor="ctr"/>
+          <a:lstStyle/>
+          <a:p>
+            <a:pPr indent="0" marL="0">
+              <a:buNone/>
+            </a:pPr>
+            <a:r>
+              <a:rPr lang="en-US" sz="1300" b="1" dirty="0">
+                <a:solidFill>
+                  <a:srgbClr val="0068B7"/>
+                </a:solidFill>
+                <a:latin typeface="Aptos" pitchFamily="34" charset="0"/>
+                <a:ea typeface="Aptos" pitchFamily="34" charset="-122"/>
+                <a:cs typeface="Aptos" pitchFamily="34" charset="-120"/>
+              </a:rPr>
+              <a:t>Use the play links to</a:t>
+            </a:r>
+            <a:endParaRPr lang="en-US" sz="1300" dirty="0"/>
+          </a:p>
+        </p:txBody>
+      </p:sp>
+      <p:sp>
+        <p:nvSpPr>
+          <p:cNvPr id="15" name="Text 13"/>
+          <p:cNvSpPr/>
+          <p:nvPr/>
+        </p:nvSpPr>
+        <p:spPr>
+          <a:xfrm>
+            <a:off x="8229600" y="4306824"/>
+            <a:ext cx="2679192" cy="941832"/>
+          </a:xfrm>
+          <a:prstGeom prst="rect">
+            <a:avLst/>
+          </a:prstGeom>
+          <a:noFill/>
+          <a:ln/>
+        </p:spPr>
+        <p:txBody>
+          <a:bodyPr wrap="square" lIns="254" tIns="254" rIns="254" bIns="254" rtlCol="0" anchor="t">
             <a:normAutofit/>
           </a:bodyPr>
           <a:lstStyle/>
           <a:p>
-            <a:pPr algn="ctr" indent="0" marL="0">
-              <a:buNone/>
-            </a:pPr>
-            <a:r>
-              <a:rPr lang="en-US" sz="1500" b="1" dirty="0">
-                <a:solidFill>
-                  <a:srgbClr val="FFFFFF"/>
-                </a:solidFill>
-                <a:latin typeface="Aptos" pitchFamily="34" charset="0"/>
-                <a:ea typeface="Aptos" pitchFamily="34" charset="-122"/>
-                <a:cs typeface="Aptos" pitchFamily="34" charset="-120"/>
-              </a:rPr>
-              <a:t>Lesson</a:t>
-            </a:r>
-            <a:endParaRPr lang="en-US" sz="1500" dirty="0"/>
-          </a:p>
-        </p:txBody>
-      </p:sp>
-      <p:sp>
-        <p:nvSpPr>
-          <p:cNvPr id="15" name="Shape 13"/>
-          <p:cNvSpPr/>
-          <p:nvPr/>
-        </p:nvSpPr>
-        <p:spPr>
-          <a:xfrm>
-            <a:off x="9046464" y="3977640"/>
-            <a:ext cx="972312" cy="749808"/>
-          </a:xfrm>
-          <a:prstGeom prst="roundRect">
-            <a:avLst>
-              <a:gd name="adj" fmla="val 14634"/>
-            </a:avLst>
-          </a:prstGeom>
-          <a:solidFill>
-            <a:srgbClr val="2F8A28"/>
-          </a:solidFill>
-          <a:ln w="12700">
-            <a:solidFill>
-              <a:srgbClr val="2F8A28"/>
-            </a:solidFill>
-            <a:prstDash val="solid"/>
-          </a:ln>
-        </p:spPr>
-      </p:sp>
-      <p:sp>
-        <p:nvSpPr>
-          <p:cNvPr id="16" name="Text 14"/>
-          <p:cNvSpPr/>
-          <p:nvPr/>
-        </p:nvSpPr>
-        <p:spPr>
-          <a:xfrm>
-            <a:off x="9119616" y="4169664"/>
-            <a:ext cx="826008" cy="310896"/>
-          </a:xfrm>
-          <a:prstGeom prst="rect">
-            <a:avLst/>
-          </a:prstGeom>
-          <a:noFill/>
-          <a:ln/>
-        </p:spPr>
-        <p:txBody>
-          <a:bodyPr wrap="square" lIns="0" tIns="0" rIns="0" bIns="0" rtlCol="0" anchor="ctr">
-            <a:normAutofit/>
-          </a:bodyPr>
-          <a:lstStyle/>
-          <a:p>
-            <a:pPr algn="ctr" indent="0" marL="0">
-              <a:buNone/>
-            </a:pPr>
-            <a:r>
-              <a:rPr lang="en-US" sz="1500" b="1" dirty="0">
-                <a:solidFill>
-                  <a:srgbClr val="FFFFFF"/>
-                </a:solidFill>
-                <a:latin typeface="Aptos" pitchFamily="34" charset="0"/>
-                <a:ea typeface="Aptos" pitchFamily="34" charset="-122"/>
-                <a:cs typeface="Aptos" pitchFamily="34" charset="-120"/>
-              </a:rPr>
-              <a:t>Plays</a:t>
-            </a:r>
-            <a:endParaRPr lang="en-US" sz="1500" dirty="0"/>
-          </a:p>
-        </p:txBody>
-      </p:sp>
-      <p:sp>
-        <p:nvSpPr>
-          <p:cNvPr id="17" name="Shape 15"/>
-          <p:cNvSpPr/>
-          <p:nvPr/>
-        </p:nvSpPr>
-        <p:spPr>
-          <a:xfrm>
-            <a:off x="10274808" y="3977640"/>
-            <a:ext cx="972312" cy="749808"/>
-          </a:xfrm>
-          <a:prstGeom prst="roundRect">
-            <a:avLst>
-              <a:gd name="adj" fmla="val 14634"/>
-            </a:avLst>
-          </a:prstGeom>
-          <a:solidFill>
-            <a:srgbClr val="6A4CA3"/>
-          </a:solidFill>
-          <a:ln w="12700">
-            <a:solidFill>
-              <a:srgbClr val="6A4CA3"/>
-            </a:solidFill>
-            <a:prstDash val="solid"/>
-          </a:ln>
-        </p:spPr>
-      </p:sp>
-      <p:sp>
-        <p:nvSpPr>
-          <p:cNvPr id="18" name="Text 16"/>
-          <p:cNvSpPr/>
-          <p:nvPr/>
-        </p:nvSpPr>
-        <p:spPr>
-          <a:xfrm>
-            <a:off x="10347960" y="4169664"/>
-            <a:ext cx="826008" cy="310896"/>
-          </a:xfrm>
-          <a:prstGeom prst="rect">
-            <a:avLst/>
-          </a:prstGeom>
-          <a:noFill/>
-          <a:ln/>
-        </p:spPr>
-        <p:txBody>
-          <a:bodyPr wrap="square" lIns="0" tIns="0" rIns="0" bIns="0" rtlCol="0" anchor="ctr">
-            <a:normAutofit/>
-          </a:bodyPr>
-          <a:lstStyle/>
-          <a:p>
-            <a:pPr algn="ctr" indent="0" marL="0">
-              <a:buNone/>
-            </a:pPr>
-            <a:r>
-              <a:rPr lang="en-US" sz="1500" b="1" dirty="0">
-                <a:solidFill>
-                  <a:srgbClr val="FFFFFF"/>
-                </a:solidFill>
-                <a:latin typeface="Aptos" pitchFamily="34" charset="0"/>
-                <a:ea typeface="Aptos" pitchFamily="34" charset="-122"/>
-                <a:cs typeface="Aptos" pitchFamily="34" charset="-120"/>
-              </a:rPr>
-              <a:t>Action</a:t>
-            </a:r>
-            <a:endParaRPr lang="en-US" sz="1500" dirty="0"/>
+            <a:r>
+              <a:rPr lang="en-US" sz="1380" dirty="0">
+                <a:solidFill>
+                  <a:srgbClr val="17364A"/>
+                </a:solidFill>
+                <a:latin typeface="Aptos" pitchFamily="34" charset="0"/>
+                <a:ea typeface="Aptos" pitchFamily="34" charset="-122"/>
+                <a:cs typeface="Aptos" pitchFamily="34" charset="-120"/>
+              </a:rPr>
+              <a:t>Locate the decision point in the playbook sequence.</a:t>
+            </a:r>
+            <a:endParaRPr lang="en-US" sz="1380" dirty="0"/>
+          </a:p>
+          <a:p>
+            <a:r>
+              <a:rPr lang="en-US" sz="1380" dirty="0">
+                <a:solidFill>
+                  <a:srgbClr val="17364A"/>
+                </a:solidFill>
+                <a:latin typeface="Aptos" pitchFamily="34" charset="0"/>
+                <a:ea typeface="Aptos" pitchFamily="34" charset="-122"/>
+                <a:cs typeface="Aptos" pitchFamily="34" charset="-120"/>
+              </a:rPr>
+              <a:t>Identify who should participate in the work.</a:t>
+            </a:r>
+            <a:endParaRPr lang="en-US" sz="1380" dirty="0"/>
+          </a:p>
+          <a:p>
+            <a:r>
+              <a:rPr lang="en-US" sz="1380" dirty="0">
+                <a:solidFill>
+                  <a:srgbClr val="17364A"/>
+                </a:solidFill>
+                <a:latin typeface="Aptos" pitchFamily="34" charset="0"/>
+                <a:ea typeface="Aptos" pitchFamily="34" charset="-122"/>
+                <a:cs typeface="Aptos" pitchFamily="34" charset="-120"/>
+              </a:rPr>
+              <a:t>Document the review, approval, or implementation step.</a:t>
+            </a:r>
+            <a:endParaRPr lang="en-US" sz="1380" dirty="0"/>
           </a:p>
         </p:txBody>
       </p:sp>
@@ -14902,20 +14384,20 @@
         </p:nvSpPr>
         <p:spPr>
           <a:xfrm>
-            <a:off x="7818120" y="3977640"/>
-            <a:ext cx="972312" cy="749808"/>
+            <a:off x="8046720" y="3794760"/>
+            <a:ext cx="3063240" cy="1600200"/>
           </a:xfrm>
           <a:prstGeom prst="roundRect">
             <a:avLst>
-              <a:gd name="adj" fmla="val 14634"/>
+              <a:gd name="adj" fmla="val 6857"/>
             </a:avLst>
           </a:prstGeom>
           <a:solidFill>
-            <a:srgbClr val="0068B7"/>
+            <a:srgbClr val="FFFFFF"/>
           </a:solidFill>
           <a:ln w="12700">
             <a:solidFill>
-              <a:srgbClr val="0068B7"/>
+              <a:srgbClr val="B9D7E6"/>
             </a:solidFill>
             <a:prstDash val="solid"/>
           </a:ln>
@@ -14929,172 +14411,100 @@
         </p:nvSpPr>
         <p:spPr>
           <a:xfrm>
-            <a:off x="7891272" y="4169664"/>
-            <a:ext cx="826008" cy="310896"/>
-          </a:xfrm>
-          <a:prstGeom prst="rect">
-            <a:avLst/>
-          </a:prstGeom>
-          <a:noFill/>
-          <a:ln/>
-        </p:spPr>
-        <p:txBody>
-          <a:bodyPr wrap="square" lIns="0" tIns="0" rIns="0" bIns="0" rtlCol="0" anchor="ctr">
+            <a:off x="8211312" y="3941064"/>
+            <a:ext cx="2734056" cy="256032"/>
+          </a:xfrm>
+          <a:prstGeom prst="rect">
+            <a:avLst/>
+          </a:prstGeom>
+          <a:noFill/>
+          <a:ln/>
+        </p:spPr>
+        <p:txBody>
+          <a:bodyPr wrap="square" lIns="0" tIns="0" rIns="0" bIns="0" rtlCol="0" anchor="ctr"/>
+          <a:lstStyle/>
+          <a:p>
+            <a:pPr indent="0" marL="0">
+              <a:buNone/>
+            </a:pPr>
+            <a:r>
+              <a:rPr lang="en-US" sz="1300" b="1" dirty="0">
+                <a:solidFill>
+                  <a:srgbClr val="0068B7"/>
+                </a:solidFill>
+                <a:latin typeface="Aptos" pitchFamily="34" charset="0"/>
+                <a:ea typeface="Aptos" pitchFamily="34" charset="-122"/>
+                <a:cs typeface="Aptos" pitchFamily="34" charset="-120"/>
+              </a:rPr>
+              <a:t>Tool selection cues</a:t>
+            </a:r>
+            <a:endParaRPr lang="en-US" sz="1300" dirty="0"/>
+          </a:p>
+        </p:txBody>
+      </p:sp>
+      <p:sp>
+        <p:nvSpPr>
+          <p:cNvPr id="15" name="Text 13"/>
+          <p:cNvSpPr/>
+          <p:nvPr/>
+        </p:nvSpPr>
+        <p:spPr>
+          <a:xfrm>
+            <a:off x="8229600" y="4306824"/>
+            <a:ext cx="2679192" cy="941832"/>
+          </a:xfrm>
+          <a:prstGeom prst="rect">
+            <a:avLst/>
+          </a:prstGeom>
+          <a:noFill/>
+          <a:ln/>
+        </p:spPr>
+        <p:txBody>
+          <a:bodyPr wrap="square" lIns="254" tIns="254" rIns="254" bIns="254" rtlCol="0" anchor="t">
             <a:normAutofit/>
           </a:bodyPr>
           <a:lstStyle/>
           <a:p>
-            <a:pPr algn="ctr" indent="0" marL="0">
-              <a:buNone/>
-            </a:pPr>
-            <a:r>
-              <a:rPr lang="en-US" sz="1500" b="1" dirty="0">
-                <a:solidFill>
-                  <a:srgbClr val="FFFFFF"/>
-                </a:solidFill>
-                <a:latin typeface="Aptos" pitchFamily="34" charset="0"/>
-                <a:ea typeface="Aptos" pitchFamily="34" charset="-122"/>
-                <a:cs typeface="Aptos" pitchFamily="34" charset="-120"/>
-              </a:rPr>
-              <a:t>Concept</a:t>
-            </a:r>
-            <a:endParaRPr lang="en-US" sz="1500" dirty="0"/>
-          </a:p>
-        </p:txBody>
-      </p:sp>
-      <p:sp>
-        <p:nvSpPr>
-          <p:cNvPr id="15" name="Shape 13"/>
-          <p:cNvSpPr/>
-          <p:nvPr/>
-        </p:nvSpPr>
-        <p:spPr>
-          <a:xfrm>
-            <a:off x="9046464" y="3977640"/>
-            <a:ext cx="972312" cy="749808"/>
-          </a:xfrm>
-          <a:prstGeom prst="roundRect">
-            <a:avLst>
-              <a:gd name="adj" fmla="val 14634"/>
-            </a:avLst>
-          </a:prstGeom>
-          <a:solidFill>
-            <a:srgbClr val="2F8A28"/>
-          </a:solidFill>
-          <a:ln w="12700">
-            <a:solidFill>
-              <a:srgbClr val="2F8A28"/>
-            </a:solidFill>
-            <a:prstDash val="solid"/>
-          </a:ln>
-        </p:spPr>
-      </p:sp>
-      <p:sp>
-        <p:nvSpPr>
-          <p:cNvPr id="16" name="Text 14"/>
-          <p:cNvSpPr/>
-          <p:nvPr/>
-        </p:nvSpPr>
-        <p:spPr>
-          <a:xfrm>
-            <a:off x="9119616" y="4169664"/>
-            <a:ext cx="826008" cy="310896"/>
-          </a:xfrm>
-          <a:prstGeom prst="rect">
-            <a:avLst/>
-          </a:prstGeom>
-          <a:noFill/>
-          <a:ln/>
-        </p:spPr>
-        <p:txBody>
-          <a:bodyPr wrap="square" lIns="0" tIns="0" rIns="0" bIns="0" rtlCol="0" anchor="ctr">
-            <a:normAutofit/>
-          </a:bodyPr>
-          <a:lstStyle/>
-          <a:p>
-            <a:pPr algn="ctr" indent="0" marL="0">
-              <a:buNone/>
-            </a:pPr>
-            <a:r>
-              <a:rPr lang="en-US" sz="1500" b="1" dirty="0">
-                <a:solidFill>
-                  <a:srgbClr val="FFFFFF"/>
-                </a:solidFill>
-                <a:latin typeface="Aptos" pitchFamily="34" charset="0"/>
-                <a:ea typeface="Aptos" pitchFamily="34" charset="-122"/>
-                <a:cs typeface="Aptos" pitchFamily="34" charset="-120"/>
-              </a:rPr>
-              <a:t>Tool</a:t>
-            </a:r>
-            <a:endParaRPr lang="en-US" sz="1500" dirty="0"/>
-          </a:p>
-        </p:txBody>
-      </p:sp>
-      <p:sp>
-        <p:nvSpPr>
-          <p:cNvPr id="17" name="Shape 15"/>
-          <p:cNvSpPr/>
-          <p:nvPr/>
-        </p:nvSpPr>
-        <p:spPr>
-          <a:xfrm>
-            <a:off x="10274808" y="3977640"/>
-            <a:ext cx="972312" cy="749808"/>
-          </a:xfrm>
-          <a:prstGeom prst="roundRect">
-            <a:avLst>
-              <a:gd name="adj" fmla="val 14634"/>
-            </a:avLst>
-          </a:prstGeom>
-          <a:solidFill>
-            <a:srgbClr val="D69A2D"/>
-          </a:solidFill>
-          <a:ln w="12700">
-            <a:solidFill>
-              <a:srgbClr val="D69A2D"/>
-            </a:solidFill>
-            <a:prstDash val="solid"/>
-          </a:ln>
-        </p:spPr>
-      </p:sp>
-      <p:sp>
-        <p:nvSpPr>
-          <p:cNvPr id="18" name="Text 16"/>
-          <p:cNvSpPr/>
-          <p:nvPr/>
-        </p:nvSpPr>
-        <p:spPr>
-          <a:xfrm>
-            <a:off x="10347960" y="4169664"/>
-            <a:ext cx="826008" cy="310896"/>
-          </a:xfrm>
-          <a:prstGeom prst="rect">
-            <a:avLst/>
-          </a:prstGeom>
-          <a:noFill/>
-          <a:ln/>
-        </p:spPr>
-        <p:txBody>
-          <a:bodyPr wrap="square" lIns="0" tIns="0" rIns="0" bIns="0" rtlCol="0" anchor="ctr">
-            <a:normAutofit/>
-          </a:bodyPr>
-          <a:lstStyle/>
-          <a:p>
-            <a:pPr algn="ctr" indent="0" marL="0">
-              <a:buNone/>
-            </a:pPr>
-            <a:r>
-              <a:rPr lang="en-US" sz="1500" b="1" dirty="0">
-                <a:solidFill>
-                  <a:srgbClr val="FFFFFF"/>
-                </a:solidFill>
-                <a:latin typeface="Aptos" pitchFamily="34" charset="0"/>
-                <a:ea typeface="Aptos" pitchFamily="34" charset="-122"/>
-                <a:cs typeface="Aptos" pitchFamily="34" charset="-120"/>
-              </a:rPr>
-              <a:t>Artifact</a:t>
-            </a:r>
-            <a:endParaRPr lang="en-US" sz="1500" dirty="0"/>
+            <a:r>
+              <a:rPr lang="en-US" sz="1380" dirty="0">
+                <a:solidFill>
+                  <a:srgbClr val="17364A"/>
+                </a:solidFill>
+                <a:latin typeface="Aptos" pitchFamily="34" charset="0"/>
+                <a:ea typeface="Aptos" pitchFamily="34" charset="-122"/>
+                <a:cs typeface="Aptos" pitchFamily="34" charset="-120"/>
+              </a:rPr>
+              <a:t>Use a tool when no comparable local process exists.</a:t>
+            </a:r>
+            <a:endParaRPr lang="en-US" sz="1380" dirty="0"/>
+          </a:p>
+          <a:p>
+            <a:r>
+              <a:rPr lang="en-US" sz="1380" dirty="0">
+                <a:solidFill>
+                  <a:srgbClr val="17364A"/>
+                </a:solidFill>
+                <a:latin typeface="Aptos" pitchFamily="34" charset="0"/>
+                <a:ea typeface="Aptos" pitchFamily="34" charset="-122"/>
+                <a:cs typeface="Aptos" pitchFamily="34" charset="-120"/>
+              </a:rPr>
+              <a:t>Adapt existing department templates when they already fit the purpose.</a:t>
+            </a:r>
+            <a:endParaRPr lang="en-US" sz="1380" dirty="0"/>
+          </a:p>
+          <a:p>
+            <a:r>
+              <a:rPr lang="en-US" sz="1380" dirty="0">
+                <a:solidFill>
+                  <a:srgbClr val="17364A"/>
+                </a:solidFill>
+                <a:latin typeface="Aptos" pitchFamily="34" charset="0"/>
+                <a:ea typeface="Aptos" pitchFamily="34" charset="-122"/>
+                <a:cs typeface="Aptos" pitchFamily="34" charset="-120"/>
+              </a:rPr>
+              <a:t>Save the completed artifact as evidence of the decision.</a:t>
+            </a:r>
+            <a:endParaRPr lang="en-US" sz="1380" dirty="0"/>
           </a:p>
         </p:txBody>
       </p:sp>
@@ -15567,13 +14977,11 @@
             </a:avLst>
           </a:prstGeom>
           <a:solidFill>
-            <a:srgbClr val="FFFFFF">
-              <a:alpha val="88000"/>
-            </a:srgbClr>
+            <a:srgbClr val="FFFFFF"/>
           </a:solidFill>
           <a:ln w="12700">
             <a:solidFill>
-              <a:srgbClr val="D6E8F2"/>
+              <a:srgbClr val="B9D7E6"/>
             </a:solidFill>
             <a:prstDash val="solid"/>
           </a:ln>
@@ -15581,119 +14989,98 @@
       </p:sp>
       <p:sp>
         <p:nvSpPr>
-          <p:cNvPr id="14" name="Shape 12"/>
-          <p:cNvSpPr/>
-          <p:nvPr/>
-        </p:nvSpPr>
-        <p:spPr>
-          <a:xfrm>
-            <a:off x="8074152" y="3291840"/>
-            <a:ext cx="2596896" cy="749808"/>
-          </a:xfrm>
-          <a:prstGeom prst="rect">
-            <a:avLst/>
-          </a:prstGeom>
-          <a:solidFill>
-            <a:srgbClr val="EAF6F8"/>
-          </a:solidFill>
-          <a:ln w="12700">
-            <a:solidFill>
-              <a:srgbClr val="8ABBD8"/>
-            </a:solidFill>
-            <a:prstDash val="solid"/>
-          </a:ln>
-        </p:spPr>
-      </p:sp>
-      <p:sp>
-        <p:nvSpPr>
-          <p:cNvPr id="15" name="Shape 13"/>
-          <p:cNvSpPr/>
-          <p:nvPr/>
-        </p:nvSpPr>
-        <p:spPr>
-          <a:xfrm>
-            <a:off x="8202168" y="3721608"/>
-            <a:ext cx="2340864" cy="0"/>
-          </a:xfrm>
-          <a:prstGeom prst="line">
-            <a:avLst/>
-          </a:prstGeom>
-          <a:noFill/>
-          <a:ln w="19050">
-            <a:solidFill>
-              <a:srgbClr val="0068B7"/>
-            </a:solidFill>
-            <a:prstDash val="solid"/>
-          </a:ln>
-        </p:spPr>
+          <p:cNvPr id="14" name="Text 12"/>
+          <p:cNvSpPr/>
+          <p:nvPr/>
+        </p:nvSpPr>
+        <p:spPr>
+          <a:xfrm>
+            <a:off x="7799832" y="2935224"/>
+            <a:ext cx="3145536" cy="256032"/>
+          </a:xfrm>
+          <a:prstGeom prst="rect">
+            <a:avLst/>
+          </a:prstGeom>
+          <a:noFill/>
+          <a:ln/>
+        </p:spPr>
+        <p:txBody>
+          <a:bodyPr wrap="square" lIns="0" tIns="0" rIns="0" bIns="0" rtlCol="0" anchor="ctr"/>
+          <a:lstStyle/>
+          <a:p>
+            <a:pPr indent="0" marL="0">
+              <a:buNone/>
+            </a:pPr>
+            <a:r>
+              <a:rPr lang="en-US" sz="1300" b="1" dirty="0">
+                <a:solidFill>
+                  <a:srgbClr val="0068B7"/>
+                </a:solidFill>
+                <a:latin typeface="Aptos" pitchFamily="34" charset="0"/>
+                <a:ea typeface="Aptos" pitchFamily="34" charset="-122"/>
+                <a:cs typeface="Aptos" pitchFamily="34" charset="-120"/>
+              </a:rPr>
+              <a:t>Concept checkpoints</a:t>
+            </a:r>
+            <a:endParaRPr lang="en-US" sz="1300" dirty="0"/>
+          </a:p>
+        </p:txBody>
+      </p:sp>
+      <p:sp>
+        <p:nvSpPr>
+          <p:cNvPr id="15" name="Text 13"/>
+          <p:cNvSpPr/>
+          <p:nvPr/>
+        </p:nvSpPr>
+        <p:spPr>
+          <a:xfrm>
+            <a:off x="7818120" y="3300984"/>
+            <a:ext cx="3090672" cy="877824"/>
+          </a:xfrm>
+          <a:prstGeom prst="rect">
+            <a:avLst/>
+          </a:prstGeom>
+          <a:noFill/>
+          <a:ln/>
+        </p:spPr>
+        <p:txBody>
+          <a:bodyPr wrap="square" lIns="254" tIns="254" rIns="254" bIns="254" rtlCol="0" anchor="t">
+            <a:normAutofit/>
+          </a:bodyPr>
+          <a:lstStyle/>
+          <a:p>
+            <a:r>
+              <a:rPr lang="en-US" sz="1380" dirty="0">
+                <a:solidFill>
+                  <a:srgbClr val="17364A"/>
+                </a:solidFill>
+                <a:latin typeface="Aptos" pitchFamily="34" charset="0"/>
+                <a:ea typeface="Aptos" pitchFamily="34" charset="-122"/>
+                <a:cs typeface="Aptos" pitchFamily="34" charset="-120"/>
+              </a:rPr>
+              <a:t>Assess whether FHIR-accessible data are complete and fit for a specific use case.</a:t>
+            </a:r>
+            <a:endParaRPr lang="en-US" sz="1380" dirty="0"/>
+          </a:p>
+          <a:p>
+            <a:r>
+              <a:rPr lang="en-US" sz="1380" dirty="0">
+                <a:solidFill>
+                  <a:srgbClr val="17364A"/>
+                </a:solidFill>
+                <a:latin typeface="Aptos" pitchFamily="34" charset="0"/>
+                <a:ea typeface="Aptos" pitchFamily="34" charset="-122"/>
+                <a:cs typeface="Aptos" pitchFamily="34" charset="-120"/>
+              </a:rPr>
+              <a:t>Produce a FHIR data needs worksheet for an AI-supported workflow.</a:t>
+            </a:r>
+            <a:endParaRPr lang="en-US" sz="1380" dirty="0"/>
+          </a:p>
+        </p:txBody>
       </p:sp>
       <p:sp>
         <p:nvSpPr>
           <p:cNvPr id="16" name="Shape 14"/>
-          <p:cNvSpPr/>
-          <p:nvPr/>
-        </p:nvSpPr>
-        <p:spPr>
-          <a:xfrm>
-            <a:off x="9198864" y="4206240"/>
-            <a:ext cx="347472" cy="347472"/>
-          </a:xfrm>
-          <a:prstGeom prst="ellipse">
-            <a:avLst/>
-          </a:prstGeom>
-          <a:solidFill>
-            <a:srgbClr val="2F8A28"/>
-          </a:solidFill>
-          <a:ln w="12700">
-            <a:solidFill>
-              <a:srgbClr val="2F8A28"/>
-            </a:solidFill>
-            <a:prstDash val="solid"/>
-          </a:ln>
-        </p:spPr>
-      </p:sp>
-      <p:sp>
-        <p:nvSpPr>
-          <p:cNvPr id="17" name="Text 15"/>
-          <p:cNvSpPr/>
-          <p:nvPr/>
-        </p:nvSpPr>
-        <p:spPr>
-          <a:xfrm>
-            <a:off x="7909560" y="3977640"/>
-            <a:ext cx="2926080" cy="182880"/>
-          </a:xfrm>
-          <a:prstGeom prst="rect">
-            <a:avLst/>
-          </a:prstGeom>
-          <a:noFill/>
-          <a:ln/>
-        </p:spPr>
-        <p:txBody>
-          <a:bodyPr wrap="square" lIns="0" tIns="0" rIns="0" bIns="0" rtlCol="0" anchor="ctr"/>
-          <a:lstStyle/>
-          <a:p>
-            <a:pPr algn="ctr" indent="0" marL="0">
-              <a:buNone/>
-            </a:pPr>
-            <a:r>
-              <a:rPr lang="en-US" sz="1000" dirty="0">
-                <a:solidFill>
-                  <a:srgbClr val="003A63"/>
-                </a:solidFill>
-                <a:latin typeface="Aptos" pitchFamily="34" charset="0"/>
-                <a:ea typeface="Aptos" pitchFamily="34" charset="-122"/>
-                <a:cs typeface="Aptos" pitchFamily="34" charset="-120"/>
-              </a:rPr>
-              <a:t>Concept to action</a:t>
-            </a:r>
-            <a:endParaRPr lang="en-US" sz="1000" dirty="0"/>
-          </a:p>
-        </p:txBody>
-      </p:sp>
-      <p:sp>
-        <p:nvSpPr>
-          <p:cNvPr id="18" name="Shape 16"/>
           <p:cNvSpPr/>
           <p:nvPr/>
         </p:nvSpPr>
@@ -15720,7 +15107,7 @@
       </p:sp>
       <p:sp>
         <p:nvSpPr>
-          <p:cNvPr id="19" name="Text 17"/>
+          <p:cNvPr id="17" name="Text 15"/>
           <p:cNvSpPr/>
           <p:nvPr/>
         </p:nvSpPr>
@@ -15759,7 +15146,7 @@
       </p:sp>
       <p:sp>
         <p:nvSpPr>
-          <p:cNvPr id="20" name="Text 18"/>
+          <p:cNvPr id="18" name="Text 16"/>
           <p:cNvSpPr/>
           <p:nvPr/>
         </p:nvSpPr>
@@ -16267,13 +15654,11 @@
             </a:avLst>
           </a:prstGeom>
           <a:solidFill>
-            <a:srgbClr val="FFFFFF">
-              <a:alpha val="88000"/>
-            </a:srgbClr>
+            <a:srgbClr val="FFFFFF"/>
           </a:solidFill>
           <a:ln w="12700">
             <a:solidFill>
-              <a:srgbClr val="D6E8F2"/>
+              <a:srgbClr val="B9D7E6"/>
             </a:solidFill>
             <a:prstDash val="solid"/>
           </a:ln>
@@ -16281,119 +15666,112 @@
       </p:sp>
       <p:sp>
         <p:nvSpPr>
-          <p:cNvPr id="14" name="Shape 12"/>
-          <p:cNvSpPr/>
-          <p:nvPr/>
-        </p:nvSpPr>
-        <p:spPr>
-          <a:xfrm>
-            <a:off x="8074152" y="3291840"/>
-            <a:ext cx="2596896" cy="749808"/>
-          </a:xfrm>
-          <a:prstGeom prst="rect">
-            <a:avLst/>
-          </a:prstGeom>
-          <a:solidFill>
-            <a:srgbClr val="EAF6F8"/>
-          </a:solidFill>
-          <a:ln w="12700">
-            <a:solidFill>
-              <a:srgbClr val="8ABBD8"/>
-            </a:solidFill>
-            <a:prstDash val="solid"/>
-          </a:ln>
-        </p:spPr>
-      </p:sp>
-      <p:sp>
-        <p:nvSpPr>
-          <p:cNvPr id="15" name="Shape 13"/>
-          <p:cNvSpPr/>
-          <p:nvPr/>
-        </p:nvSpPr>
-        <p:spPr>
-          <a:xfrm>
-            <a:off x="8202168" y="3721608"/>
-            <a:ext cx="2340864" cy="0"/>
-          </a:xfrm>
-          <a:prstGeom prst="line">
-            <a:avLst/>
-          </a:prstGeom>
-          <a:noFill/>
-          <a:ln w="19050">
-            <a:solidFill>
-              <a:srgbClr val="0068B7"/>
-            </a:solidFill>
-            <a:prstDash val="solid"/>
-          </a:ln>
-        </p:spPr>
+          <p:cNvPr id="14" name="Text 12"/>
+          <p:cNvSpPr/>
+          <p:nvPr/>
+        </p:nvSpPr>
+        <p:spPr>
+          <a:xfrm>
+            <a:off x="7799832" y="2935224"/>
+            <a:ext cx="3145536" cy="256032"/>
+          </a:xfrm>
+          <a:prstGeom prst="rect">
+            <a:avLst/>
+          </a:prstGeom>
+          <a:noFill/>
+          <a:ln/>
+        </p:spPr>
+        <p:txBody>
+          <a:bodyPr wrap="square" lIns="0" tIns="0" rIns="0" bIns="0" rtlCol="0" anchor="ctr"/>
+          <a:lstStyle/>
+          <a:p>
+            <a:pPr indent="0" marL="0">
+              <a:buNone/>
+            </a:pPr>
+            <a:r>
+              <a:rPr lang="en-US" sz="1300" b="1" dirty="0">
+                <a:solidFill>
+                  <a:srgbClr val="0068B7"/>
+                </a:solidFill>
+                <a:latin typeface="Aptos" pitchFamily="34" charset="0"/>
+                <a:ea typeface="Aptos" pitchFamily="34" charset="-122"/>
+                <a:cs typeface="Aptos" pitchFamily="34" charset="-120"/>
+              </a:rPr>
+              <a:t>Concept checkpoints</a:t>
+            </a:r>
+            <a:endParaRPr lang="en-US" sz="1300" dirty="0"/>
+          </a:p>
+        </p:txBody>
+      </p:sp>
+      <p:sp>
+        <p:nvSpPr>
+          <p:cNvPr id="15" name="Text 13"/>
+          <p:cNvSpPr/>
+          <p:nvPr/>
+        </p:nvSpPr>
+        <p:spPr>
+          <a:xfrm>
+            <a:off x="7818120" y="3300984"/>
+            <a:ext cx="3090672" cy="877824"/>
+          </a:xfrm>
+          <a:prstGeom prst="rect">
+            <a:avLst/>
+          </a:prstGeom>
+          <a:noFill/>
+          <a:ln/>
+        </p:spPr>
+        <p:txBody>
+          <a:bodyPr wrap="square" lIns="254" tIns="254" rIns="254" bIns="254" rtlCol="0" anchor="t">
+            <a:normAutofit/>
+          </a:bodyPr>
+          <a:lstStyle/>
+          <a:p>
+            <a:r>
+              <a:rPr lang="en-US" sz="1380" dirty="0">
+                <a:solidFill>
+                  <a:srgbClr val="17364A"/>
+                </a:solidFill>
+                <a:latin typeface="Aptos" pitchFamily="34" charset="0"/>
+                <a:ea typeface="Aptos" pitchFamily="34" charset="-122"/>
+                <a:cs typeface="Aptos" pitchFamily="34" charset="-120"/>
+              </a:rPr>
+              <a:t>FHIR is increasingly important for public health because it supports structured, API-based.</a:t>
+            </a:r>
+            <a:endParaRPr lang="en-US" sz="1380" dirty="0"/>
+          </a:p>
+          <a:p>
+            <a:r>
+              <a:rPr lang="en-US" sz="1380" dirty="0">
+                <a:solidFill>
+                  <a:srgbClr val="17364A"/>
+                </a:solidFill>
+                <a:latin typeface="Aptos" pitchFamily="34" charset="0"/>
+                <a:ea typeface="Aptos" pitchFamily="34" charset="-122"/>
+                <a:cs typeface="Aptos" pitchFamily="34" charset="-120"/>
+              </a:rPr>
+              <a:t>Public health staff do not need to become FHIR developers to participate in AI planning,.</a:t>
+            </a:r>
+            <a:endParaRPr lang="en-US" sz="1380" dirty="0"/>
+          </a:p>
+          <a:p>
+            <a:r>
+              <a:rPr lang="en-US" sz="1380" dirty="0">
+                <a:solidFill>
+                  <a:srgbClr val="17364A"/>
+                </a:solidFill>
+                <a:latin typeface="Aptos" pitchFamily="34" charset="0"/>
+                <a:ea typeface="Aptos" pitchFamily="34" charset="-122"/>
+                <a:cs typeface="Aptos" pitchFamily="34" charset="-120"/>
+              </a:rPr>
+              <a:t>This module explains how FHIR resources, profiles, implementation guides, and APIs may.</a:t>
+            </a:r>
+            <a:endParaRPr lang="en-US" sz="1380" dirty="0"/>
+          </a:p>
+        </p:txBody>
       </p:sp>
       <p:sp>
         <p:nvSpPr>
           <p:cNvPr id="16" name="Shape 14"/>
-          <p:cNvSpPr/>
-          <p:nvPr/>
-        </p:nvSpPr>
-        <p:spPr>
-          <a:xfrm>
-            <a:off x="9198864" y="4206240"/>
-            <a:ext cx="347472" cy="347472"/>
-          </a:xfrm>
-          <a:prstGeom prst="ellipse">
-            <a:avLst/>
-          </a:prstGeom>
-          <a:solidFill>
-            <a:srgbClr val="2F8A28"/>
-          </a:solidFill>
-          <a:ln w="12700">
-            <a:solidFill>
-              <a:srgbClr val="2F8A28"/>
-            </a:solidFill>
-            <a:prstDash val="solid"/>
-          </a:ln>
-        </p:spPr>
-      </p:sp>
-      <p:sp>
-        <p:nvSpPr>
-          <p:cNvPr id="17" name="Text 15"/>
-          <p:cNvSpPr/>
-          <p:nvPr/>
-        </p:nvSpPr>
-        <p:spPr>
-          <a:xfrm>
-            <a:off x="7909560" y="3977640"/>
-            <a:ext cx="2926080" cy="182880"/>
-          </a:xfrm>
-          <a:prstGeom prst="rect">
-            <a:avLst/>
-          </a:prstGeom>
-          <a:noFill/>
-          <a:ln/>
-        </p:spPr>
-        <p:txBody>
-          <a:bodyPr wrap="square" lIns="0" tIns="0" rIns="0" bIns="0" rtlCol="0" anchor="ctr"/>
-          <a:lstStyle/>
-          <a:p>
-            <a:pPr algn="ctr" indent="0" marL="0">
-              <a:buNone/>
-            </a:pPr>
-            <a:r>
-              <a:rPr lang="en-US" sz="1000" dirty="0">
-                <a:solidFill>
-                  <a:srgbClr val="003A63"/>
-                </a:solidFill>
-                <a:latin typeface="Aptos" pitchFamily="34" charset="0"/>
-                <a:ea typeface="Aptos" pitchFamily="34" charset="-122"/>
-                <a:cs typeface="Aptos" pitchFamily="34" charset="-120"/>
-              </a:rPr>
-              <a:t>Concept to action</a:t>
-            </a:r>
-            <a:endParaRPr lang="en-US" sz="1000" dirty="0"/>
-          </a:p>
-        </p:txBody>
-      </p:sp>
-      <p:sp>
-        <p:nvSpPr>
-          <p:cNvPr id="18" name="Shape 16"/>
           <p:cNvSpPr/>
           <p:nvPr/>
         </p:nvSpPr>
@@ -16420,7 +15798,7 @@
       </p:sp>
       <p:sp>
         <p:nvSpPr>
-          <p:cNvPr id="19" name="Text 17"/>
+          <p:cNvPr id="17" name="Text 15"/>
           <p:cNvSpPr/>
           <p:nvPr/>
         </p:nvSpPr>
@@ -16459,7 +15837,7 @@
       </p:sp>
       <p:sp>
         <p:nvSpPr>
-          <p:cNvPr id="20" name="Text 18"/>
+          <p:cNvPr id="18" name="Text 16"/>
           <p:cNvSpPr/>
           <p:nvPr/>
         </p:nvSpPr>
@@ -16967,13 +16345,11 @@
             </a:avLst>
           </a:prstGeom>
           <a:solidFill>
-            <a:srgbClr val="FFFFFF">
-              <a:alpha val="88000"/>
-            </a:srgbClr>
+            <a:srgbClr val="FFFFFF"/>
           </a:solidFill>
           <a:ln w="12700">
             <a:solidFill>
-              <a:srgbClr val="D6E8F2"/>
+              <a:srgbClr val="B9D7E6"/>
             </a:solidFill>
             <a:prstDash val="solid"/>
           </a:ln>
@@ -16981,190 +16357,112 @@
       </p:sp>
       <p:sp>
         <p:nvSpPr>
-          <p:cNvPr id="14" name="Shape 12"/>
-          <p:cNvSpPr/>
-          <p:nvPr/>
-        </p:nvSpPr>
-        <p:spPr>
-          <a:xfrm>
-            <a:off x="7891272" y="3108960"/>
-            <a:ext cx="566928" cy="566928"/>
-          </a:xfrm>
-          <a:prstGeom prst="ellipse">
-            <a:avLst/>
-          </a:prstGeom>
-          <a:solidFill>
-            <a:srgbClr val="0068B7"/>
-          </a:solidFill>
-          <a:ln w="12700">
-            <a:solidFill>
-              <a:srgbClr val="0068B7"/>
-            </a:solidFill>
-            <a:prstDash val="solid"/>
-          </a:ln>
-        </p:spPr>
-      </p:sp>
-      <p:sp>
-        <p:nvSpPr>
-          <p:cNvPr id="15" name="Shape 13"/>
-          <p:cNvSpPr/>
-          <p:nvPr/>
-        </p:nvSpPr>
-        <p:spPr>
-          <a:xfrm>
-            <a:off x="10287000" y="3108960"/>
-            <a:ext cx="566928" cy="566928"/>
-          </a:xfrm>
-          <a:prstGeom prst="ellipse">
-            <a:avLst/>
-          </a:prstGeom>
-          <a:solidFill>
-            <a:srgbClr val="2F8A28"/>
-          </a:solidFill>
-          <a:ln w="12700">
-            <a:solidFill>
-              <a:srgbClr val="2F8A28"/>
-            </a:solidFill>
-            <a:prstDash val="solid"/>
-          </a:ln>
-        </p:spPr>
+          <p:cNvPr id="14" name="Text 12"/>
+          <p:cNvSpPr/>
+          <p:nvPr/>
+        </p:nvSpPr>
+        <p:spPr>
+          <a:xfrm>
+            <a:off x="7799832" y="2935224"/>
+            <a:ext cx="3145536" cy="256032"/>
+          </a:xfrm>
+          <a:prstGeom prst="rect">
+            <a:avLst/>
+          </a:prstGeom>
+          <a:noFill/>
+          <a:ln/>
+        </p:spPr>
+        <p:txBody>
+          <a:bodyPr wrap="square" lIns="0" tIns="0" rIns="0" bIns="0" rtlCol="0" anchor="ctr"/>
+          <a:lstStyle/>
+          <a:p>
+            <a:pPr indent="0" marL="0">
+              <a:buNone/>
+            </a:pPr>
+            <a:r>
+              <a:rPr lang="en-US" sz="1300" b="1" dirty="0">
+                <a:solidFill>
+                  <a:srgbClr val="0068B7"/>
+                </a:solidFill>
+                <a:latin typeface="Aptos" pitchFamily="34" charset="0"/>
+                <a:ea typeface="Aptos" pitchFamily="34" charset="-122"/>
+                <a:cs typeface="Aptos" pitchFamily="34" charset="-120"/>
+              </a:rPr>
+              <a:t>Concept checkpoints</a:t>
+            </a:r>
+            <a:endParaRPr lang="en-US" sz="1300" dirty="0"/>
+          </a:p>
+        </p:txBody>
+      </p:sp>
+      <p:sp>
+        <p:nvSpPr>
+          <p:cNvPr id="15" name="Text 13"/>
+          <p:cNvSpPr/>
+          <p:nvPr/>
+        </p:nvSpPr>
+        <p:spPr>
+          <a:xfrm>
+            <a:off x="7818120" y="3300984"/>
+            <a:ext cx="3090672" cy="877824"/>
+          </a:xfrm>
+          <a:prstGeom prst="rect">
+            <a:avLst/>
+          </a:prstGeom>
+          <a:noFill/>
+          <a:ln/>
+        </p:spPr>
+        <p:txBody>
+          <a:bodyPr wrap="square" lIns="254" tIns="254" rIns="254" bIns="254" rtlCol="0" anchor="t">
+            <a:normAutofit/>
+          </a:bodyPr>
+          <a:lstStyle/>
+          <a:p>
+            <a:r>
+              <a:rPr lang="en-US" sz="1380" dirty="0">
+                <a:solidFill>
+                  <a:srgbClr val="17364A"/>
+                </a:solidFill>
+                <a:latin typeface="Aptos" pitchFamily="34" charset="0"/>
+                <a:ea typeface="Aptos" pitchFamily="34" charset="-122"/>
+                <a:cs typeface="Aptos" pitchFamily="34" charset="-120"/>
+              </a:rPr>
+              <a:t>This national-level module is intended for training and planning purposes.</a:t>
+            </a:r>
+            <a:endParaRPr lang="en-US" sz="1380" dirty="0"/>
+          </a:p>
+          <a:p>
+            <a:r>
+              <a:rPr lang="en-US" sz="1380" dirty="0">
+                <a:solidFill>
+                  <a:srgbClr val="17364A"/>
+                </a:solidFill>
+                <a:latin typeface="Aptos" pitchFamily="34" charset="0"/>
+                <a:ea typeface="Aptos" pitchFamily="34" charset="-122"/>
+                <a:cs typeface="Aptos" pitchFamily="34" charset="-120"/>
+              </a:rPr>
+              <a:t>It does not replace legal, privacy, procurement, civil rights, records, or agency policy.</a:t>
+            </a:r>
+            <a:endParaRPr lang="en-US" sz="1380" dirty="0"/>
+          </a:p>
+          <a:p>
+            <a:r>
+              <a:rPr lang="en-US" sz="1380" dirty="0">
+                <a:solidFill>
+                  <a:srgbClr val="17364A"/>
+                </a:solidFill>
+                <a:latin typeface="Aptos" pitchFamily="34" charset="0"/>
+                <a:ea typeface="Aptos" pitchFamily="34" charset="-122"/>
+                <a:cs typeface="Aptos" pitchFamily="34" charset="-120"/>
+              </a:rPr>
+              <a:t>Learners should confirm applicable requirements in their own jurisdiction and organization.</a:t>
+            </a:r>
+            <a:endParaRPr lang="en-US" sz="1380" dirty="0"/>
+          </a:p>
+        </p:txBody>
       </p:sp>
       <p:sp>
         <p:nvSpPr>
           <p:cNvPr id="16" name="Shape 14"/>
-          <p:cNvSpPr/>
-          <p:nvPr/>
-        </p:nvSpPr>
-        <p:spPr>
-          <a:xfrm>
-            <a:off x="9089136" y="3456432"/>
-            <a:ext cx="566928" cy="566928"/>
-          </a:xfrm>
-          <a:prstGeom prst="ellipse">
-            <a:avLst/>
-          </a:prstGeom>
-          <a:solidFill>
-            <a:srgbClr val="6A4CA3"/>
-          </a:solidFill>
-          <a:ln w="12700">
-            <a:solidFill>
-              <a:srgbClr val="6A4CA3"/>
-            </a:solidFill>
-            <a:prstDash val="solid"/>
-          </a:ln>
-        </p:spPr>
-      </p:sp>
-      <p:sp>
-        <p:nvSpPr>
-          <p:cNvPr id="17" name="Shape 15"/>
-          <p:cNvSpPr/>
-          <p:nvPr/>
-        </p:nvSpPr>
-        <p:spPr>
-          <a:xfrm>
-            <a:off x="8385048" y="3419856"/>
-            <a:ext cx="1975104" cy="0"/>
-          </a:xfrm>
-          <a:prstGeom prst="line">
-            <a:avLst/>
-          </a:prstGeom>
-          <a:noFill/>
-          <a:ln w="25400">
-            <a:solidFill>
-              <a:srgbClr val="8ABBD8"/>
-            </a:solidFill>
-            <a:prstDash val="solid"/>
-          </a:ln>
-        </p:spPr>
-      </p:sp>
-      <p:sp>
-        <p:nvSpPr>
-          <p:cNvPr id="18" name="Shape 16"/>
-          <p:cNvSpPr/>
-          <p:nvPr/>
-        </p:nvSpPr>
-        <p:spPr>
-          <a:xfrm>
-            <a:off x="8202168" y="3630168"/>
-            <a:ext cx="1170432" cy="118872"/>
-          </a:xfrm>
-          <a:prstGeom prst="line">
-            <a:avLst/>
-          </a:prstGeom>
-          <a:noFill/>
-          <a:ln w="25400">
-            <a:solidFill>
-              <a:srgbClr val="8ABBD8"/>
-            </a:solidFill>
-            <a:prstDash val="solid"/>
-          </a:ln>
-        </p:spPr>
-      </p:sp>
-      <p:sp>
-        <p:nvSpPr>
-          <p:cNvPr id="19" name="Shape 17"/>
-          <p:cNvSpPr/>
-          <p:nvPr/>
-        </p:nvSpPr>
-        <p:spPr>
-          <a:xfrm>
-            <a:off x="10543032" y="3630168"/>
-            <a:ext cx="-1170432" cy="118872"/>
-          </a:xfrm>
-          <a:prstGeom prst="line">
-            <a:avLst/>
-          </a:prstGeom>
-          <a:noFill/>
-          <a:ln w="25400">
-            <a:solidFill>
-              <a:srgbClr val="8ABBD8"/>
-            </a:solidFill>
-            <a:prstDash val="solid"/>
-          </a:ln>
-        </p:spPr>
-      </p:sp>
-      <p:sp>
-        <p:nvSpPr>
-          <p:cNvPr id="20" name="Text 18"/>
-          <p:cNvSpPr/>
-          <p:nvPr/>
-        </p:nvSpPr>
-        <p:spPr>
-          <a:xfrm>
-            <a:off x="7863840" y="4069080"/>
-            <a:ext cx="3017520" cy="164592"/>
-          </a:xfrm>
-          <a:prstGeom prst="rect">
-            <a:avLst/>
-          </a:prstGeom>
-          <a:noFill/>
-          <a:ln/>
-        </p:spPr>
-        <p:txBody>
-          <a:bodyPr wrap="square" lIns="0" tIns="0" rIns="0" bIns="0" rtlCol="0" anchor="ctr"/>
-          <a:lstStyle/>
-          <a:p>
-            <a:pPr algn="ctr" indent="0" marL="0">
-              <a:buNone/>
-            </a:pPr>
-            <a:r>
-              <a:rPr lang="en-US" sz="900" b="1" dirty="0">
-                <a:solidFill>
-                  <a:srgbClr val="003A63"/>
-                </a:solidFill>
-                <a:latin typeface="Aptos" pitchFamily="34" charset="0"/>
-                <a:ea typeface="Aptos" pitchFamily="34" charset="-122"/>
-                <a:cs typeface="Aptos" pitchFamily="34" charset="-120"/>
-              </a:rPr>
-              <a:t>Decision rights</a:t>
-            </a:r>
-            <a:endParaRPr lang="en-US" sz="900" dirty="0"/>
-          </a:p>
-        </p:txBody>
-      </p:sp>
-      <p:sp>
-        <p:nvSpPr>
-          <p:cNvPr id="21" name="Shape 19"/>
           <p:cNvSpPr/>
           <p:nvPr/>
         </p:nvSpPr>
@@ -17191,7 +16489,7 @@
       </p:sp>
       <p:sp>
         <p:nvSpPr>
-          <p:cNvPr id="22" name="Text 20"/>
+          <p:cNvPr id="17" name="Text 15"/>
           <p:cNvSpPr/>
           <p:nvPr/>
         </p:nvSpPr>
@@ -17230,7 +16528,7 @@
       </p:sp>
       <p:sp>
         <p:nvSpPr>
-          <p:cNvPr id="23" name="Text 21"/>
+          <p:cNvPr id="18" name="Text 16"/>
           <p:cNvSpPr/>
           <p:nvPr/>
         </p:nvSpPr>
@@ -17738,13 +17036,11 @@
             </a:avLst>
           </a:prstGeom>
           <a:solidFill>
-            <a:srgbClr val="FFFFFF">
-              <a:alpha val="88000"/>
-            </a:srgbClr>
+            <a:srgbClr val="FFFFFF"/>
           </a:solidFill>
           <a:ln w="12700">
             <a:solidFill>
-              <a:srgbClr val="D6E8F2"/>
+              <a:srgbClr val="B9D7E6"/>
             </a:solidFill>
             <a:prstDash val="solid"/>
           </a:ln>
@@ -17752,119 +17048,112 @@
       </p:sp>
       <p:sp>
         <p:nvSpPr>
-          <p:cNvPr id="14" name="Shape 12"/>
-          <p:cNvSpPr/>
-          <p:nvPr/>
-        </p:nvSpPr>
-        <p:spPr>
-          <a:xfrm>
-            <a:off x="8074152" y="3291840"/>
-            <a:ext cx="2596896" cy="749808"/>
-          </a:xfrm>
-          <a:prstGeom prst="rect">
-            <a:avLst/>
-          </a:prstGeom>
-          <a:solidFill>
-            <a:srgbClr val="EAF6F8"/>
-          </a:solidFill>
-          <a:ln w="12700">
-            <a:solidFill>
-              <a:srgbClr val="8ABBD8"/>
-            </a:solidFill>
-            <a:prstDash val="solid"/>
-          </a:ln>
-        </p:spPr>
-      </p:sp>
-      <p:sp>
-        <p:nvSpPr>
-          <p:cNvPr id="15" name="Shape 13"/>
-          <p:cNvSpPr/>
-          <p:nvPr/>
-        </p:nvSpPr>
-        <p:spPr>
-          <a:xfrm>
-            <a:off x="8202168" y="3721608"/>
-            <a:ext cx="2340864" cy="0"/>
-          </a:xfrm>
-          <a:prstGeom prst="line">
-            <a:avLst/>
-          </a:prstGeom>
-          <a:noFill/>
-          <a:ln w="19050">
-            <a:solidFill>
-              <a:srgbClr val="0068B7"/>
-            </a:solidFill>
-            <a:prstDash val="solid"/>
-          </a:ln>
-        </p:spPr>
+          <p:cNvPr id="14" name="Text 12"/>
+          <p:cNvSpPr/>
+          <p:nvPr/>
+        </p:nvSpPr>
+        <p:spPr>
+          <a:xfrm>
+            <a:off x="7799832" y="2935224"/>
+            <a:ext cx="3145536" cy="256032"/>
+          </a:xfrm>
+          <a:prstGeom prst="rect">
+            <a:avLst/>
+          </a:prstGeom>
+          <a:noFill/>
+          <a:ln/>
+        </p:spPr>
+        <p:txBody>
+          <a:bodyPr wrap="square" lIns="0" tIns="0" rIns="0" bIns="0" rtlCol="0" anchor="ctr"/>
+          <a:lstStyle/>
+          <a:p>
+            <a:pPr indent="0" marL="0">
+              <a:buNone/>
+            </a:pPr>
+            <a:r>
+              <a:rPr lang="en-US" sz="1300" b="1" dirty="0">
+                <a:solidFill>
+                  <a:srgbClr val="0068B7"/>
+                </a:solidFill>
+                <a:latin typeface="Aptos" pitchFamily="34" charset="0"/>
+                <a:ea typeface="Aptos" pitchFamily="34" charset="-122"/>
+                <a:cs typeface="Aptos" pitchFamily="34" charset="-120"/>
+              </a:rPr>
+              <a:t>Concept checkpoints</a:t>
+            </a:r>
+            <a:endParaRPr lang="en-US" sz="1300" dirty="0"/>
+          </a:p>
+        </p:txBody>
+      </p:sp>
+      <p:sp>
+        <p:nvSpPr>
+          <p:cNvPr id="15" name="Text 13"/>
+          <p:cNvSpPr/>
+          <p:nvPr/>
+        </p:nvSpPr>
+        <p:spPr>
+          <a:xfrm>
+            <a:off x="7818120" y="3300984"/>
+            <a:ext cx="3090672" cy="877824"/>
+          </a:xfrm>
+          <a:prstGeom prst="rect">
+            <a:avLst/>
+          </a:prstGeom>
+          <a:noFill/>
+          <a:ln/>
+        </p:spPr>
+        <p:txBody>
+          <a:bodyPr wrap="square" lIns="254" tIns="254" rIns="254" bIns="254" rtlCol="0" anchor="t">
+            <a:normAutofit/>
+          </a:bodyPr>
+          <a:lstStyle/>
+          <a:p>
+            <a:r>
+              <a:rPr lang="en-US" sz="1380" dirty="0">
+                <a:solidFill>
+                  <a:srgbClr val="17364A"/>
+                </a:solidFill>
+                <a:latin typeface="Aptos" pitchFamily="34" charset="0"/>
+                <a:ea typeface="Aptos" pitchFamily="34" charset="-122"/>
+                <a:cs typeface="Aptos" pitchFamily="34" charset="-120"/>
+              </a:rPr>
+              <a:t>FHIR matters for AI because it may make clinical and public health data more accessible,.</a:t>
+            </a:r>
+            <a:endParaRPr lang="en-US" sz="1380" dirty="0"/>
+          </a:p>
+          <a:p>
+            <a:r>
+              <a:rPr lang="en-US" sz="1380" dirty="0">
+                <a:solidFill>
+                  <a:srgbClr val="17364A"/>
+                </a:solidFill>
+                <a:latin typeface="Aptos" pitchFamily="34" charset="0"/>
+                <a:ea typeface="Aptos" pitchFamily="34" charset="-122"/>
+                <a:cs typeface="Aptos" pitchFamily="34" charset="-120"/>
+              </a:rPr>
+              <a:t>A FHIR API can allow an approved application to request specific resources, such as.</a:t>
+            </a:r>
+            <a:endParaRPr lang="en-US" sz="1380" dirty="0"/>
+          </a:p>
+          <a:p>
+            <a:r>
+              <a:rPr lang="en-US" sz="1380" dirty="0">
+                <a:solidFill>
+                  <a:srgbClr val="17364A"/>
+                </a:solidFill>
+                <a:latin typeface="Aptos" pitchFamily="34" charset="0"/>
+                <a:ea typeface="Aptos" pitchFamily="34" charset="-122"/>
+                <a:cs typeface="Aptos" pitchFamily="34" charset="-120"/>
+              </a:rPr>
+              <a:t>This can support case summaries, decision support, cohort identification, immunization.</a:t>
+            </a:r>
+            <a:endParaRPr lang="en-US" sz="1380" dirty="0"/>
+          </a:p>
+        </p:txBody>
       </p:sp>
       <p:sp>
         <p:nvSpPr>
           <p:cNvPr id="16" name="Shape 14"/>
-          <p:cNvSpPr/>
-          <p:nvPr/>
-        </p:nvSpPr>
-        <p:spPr>
-          <a:xfrm>
-            <a:off x="9198864" y="4206240"/>
-            <a:ext cx="347472" cy="347472"/>
-          </a:xfrm>
-          <a:prstGeom prst="ellipse">
-            <a:avLst/>
-          </a:prstGeom>
-          <a:solidFill>
-            <a:srgbClr val="2F8A28"/>
-          </a:solidFill>
-          <a:ln w="12700">
-            <a:solidFill>
-              <a:srgbClr val="2F8A28"/>
-            </a:solidFill>
-            <a:prstDash val="solid"/>
-          </a:ln>
-        </p:spPr>
-      </p:sp>
-      <p:sp>
-        <p:nvSpPr>
-          <p:cNvPr id="17" name="Text 15"/>
-          <p:cNvSpPr/>
-          <p:nvPr/>
-        </p:nvSpPr>
-        <p:spPr>
-          <a:xfrm>
-            <a:off x="7909560" y="3977640"/>
-            <a:ext cx="2926080" cy="182880"/>
-          </a:xfrm>
-          <a:prstGeom prst="rect">
-            <a:avLst/>
-          </a:prstGeom>
-          <a:noFill/>
-          <a:ln/>
-        </p:spPr>
-        <p:txBody>
-          <a:bodyPr wrap="square" lIns="0" tIns="0" rIns="0" bIns="0" rtlCol="0" anchor="ctr"/>
-          <a:lstStyle/>
-          <a:p>
-            <a:pPr algn="ctr" indent="0" marL="0">
-              <a:buNone/>
-            </a:pPr>
-            <a:r>
-              <a:rPr lang="en-US" sz="1000" dirty="0">
-                <a:solidFill>
-                  <a:srgbClr val="003A63"/>
-                </a:solidFill>
-                <a:latin typeface="Aptos" pitchFamily="34" charset="0"/>
-                <a:ea typeface="Aptos" pitchFamily="34" charset="-122"/>
-                <a:cs typeface="Aptos" pitchFamily="34" charset="-120"/>
-              </a:rPr>
-              <a:t>Concept to action</a:t>
-            </a:r>
-            <a:endParaRPr lang="en-US" sz="1000" dirty="0"/>
-          </a:p>
-        </p:txBody>
-      </p:sp>
-      <p:sp>
-        <p:nvSpPr>
-          <p:cNvPr id="18" name="Shape 16"/>
           <p:cNvSpPr/>
           <p:nvPr/>
         </p:nvSpPr>
@@ -17891,7 +17180,7 @@
       </p:sp>
       <p:sp>
         <p:nvSpPr>
-          <p:cNvPr id="19" name="Text 17"/>
+          <p:cNvPr id="17" name="Text 15"/>
           <p:cNvSpPr/>
           <p:nvPr/>
         </p:nvSpPr>
@@ -17930,7 +17219,7 @@
       </p:sp>
       <p:sp>
         <p:nvSpPr>
-          <p:cNvPr id="20" name="Text 18"/>
+          <p:cNvPr id="18" name="Text 16"/>
           <p:cNvSpPr/>
           <p:nvPr/>
         </p:nvSpPr>
@@ -18438,13 +17727,11 @@
             </a:avLst>
           </a:prstGeom>
           <a:solidFill>
-            <a:srgbClr val="FFFFFF">
-              <a:alpha val="88000"/>
-            </a:srgbClr>
+            <a:srgbClr val="FFFFFF"/>
           </a:solidFill>
           <a:ln w="12700">
             <a:solidFill>
-              <a:srgbClr val="D6E8F2"/>
+              <a:srgbClr val="B9D7E6"/>
             </a:solidFill>
             <a:prstDash val="solid"/>
           </a:ln>
@@ -18452,119 +17739,112 @@
       </p:sp>
       <p:sp>
         <p:nvSpPr>
-          <p:cNvPr id="14" name="Shape 12"/>
-          <p:cNvSpPr/>
-          <p:nvPr/>
-        </p:nvSpPr>
-        <p:spPr>
-          <a:xfrm>
-            <a:off x="8074152" y="3291840"/>
-            <a:ext cx="2596896" cy="749808"/>
-          </a:xfrm>
-          <a:prstGeom prst="rect">
-            <a:avLst/>
-          </a:prstGeom>
-          <a:solidFill>
-            <a:srgbClr val="EAF6F8"/>
-          </a:solidFill>
-          <a:ln w="12700">
-            <a:solidFill>
-              <a:srgbClr val="8ABBD8"/>
-            </a:solidFill>
-            <a:prstDash val="solid"/>
-          </a:ln>
-        </p:spPr>
-      </p:sp>
-      <p:sp>
-        <p:nvSpPr>
-          <p:cNvPr id="15" name="Shape 13"/>
-          <p:cNvSpPr/>
-          <p:nvPr/>
-        </p:nvSpPr>
-        <p:spPr>
-          <a:xfrm>
-            <a:off x="8202168" y="3721608"/>
-            <a:ext cx="2340864" cy="0"/>
-          </a:xfrm>
-          <a:prstGeom prst="line">
-            <a:avLst/>
-          </a:prstGeom>
-          <a:noFill/>
-          <a:ln w="19050">
-            <a:solidFill>
-              <a:srgbClr val="0068B7"/>
-            </a:solidFill>
-            <a:prstDash val="solid"/>
-          </a:ln>
-        </p:spPr>
+          <p:cNvPr id="14" name="Text 12"/>
+          <p:cNvSpPr/>
+          <p:nvPr/>
+        </p:nvSpPr>
+        <p:spPr>
+          <a:xfrm>
+            <a:off x="7799832" y="2935224"/>
+            <a:ext cx="3145536" cy="256032"/>
+          </a:xfrm>
+          <a:prstGeom prst="rect">
+            <a:avLst/>
+          </a:prstGeom>
+          <a:noFill/>
+          <a:ln/>
+        </p:spPr>
+        <p:txBody>
+          <a:bodyPr wrap="square" lIns="0" tIns="0" rIns="0" bIns="0" rtlCol="0" anchor="ctr"/>
+          <a:lstStyle/>
+          <a:p>
+            <a:pPr indent="0" marL="0">
+              <a:buNone/>
+            </a:pPr>
+            <a:r>
+              <a:rPr lang="en-US" sz="1300" b="1" dirty="0">
+                <a:solidFill>
+                  <a:srgbClr val="0068B7"/>
+                </a:solidFill>
+                <a:latin typeface="Aptos" pitchFamily="34" charset="0"/>
+                <a:ea typeface="Aptos" pitchFamily="34" charset="-122"/>
+                <a:cs typeface="Aptos" pitchFamily="34" charset="-120"/>
+              </a:rPr>
+              <a:t>Concept checkpoints</a:t>
+            </a:r>
+            <a:endParaRPr lang="en-US" sz="1300" dirty="0"/>
+          </a:p>
+        </p:txBody>
+      </p:sp>
+      <p:sp>
+        <p:nvSpPr>
+          <p:cNvPr id="15" name="Text 13"/>
+          <p:cNvSpPr/>
+          <p:nvPr/>
+        </p:nvSpPr>
+        <p:spPr>
+          <a:xfrm>
+            <a:off x="7818120" y="3300984"/>
+            <a:ext cx="3090672" cy="877824"/>
+          </a:xfrm>
+          <a:prstGeom prst="rect">
+            <a:avLst/>
+          </a:prstGeom>
+          <a:noFill/>
+          <a:ln/>
+        </p:spPr>
+        <p:txBody>
+          <a:bodyPr wrap="square" lIns="254" tIns="254" rIns="254" bIns="254" rtlCol="0" anchor="t">
+            <a:normAutofit/>
+          </a:bodyPr>
+          <a:lstStyle/>
+          <a:p>
+            <a:r>
+              <a:rPr lang="en-US" sz="1380" dirty="0">
+                <a:solidFill>
+                  <a:srgbClr val="17364A"/>
+                </a:solidFill>
+                <a:latin typeface="Aptos" pitchFamily="34" charset="0"/>
+                <a:ea typeface="Aptos" pitchFamily="34" charset="-122"/>
+                <a:cs typeface="Aptos" pitchFamily="34" charset="-120"/>
+              </a:rPr>
+              <a:t>A FHIR resource is a structured representation of a type of health information, such as.</a:t>
+            </a:r>
+            <a:endParaRPr lang="en-US" sz="1380" dirty="0"/>
+          </a:p>
+          <a:p>
+            <a:r>
+              <a:rPr lang="en-US" sz="1380" dirty="0">
+                <a:solidFill>
+                  <a:srgbClr val="17364A"/>
+                </a:solidFill>
+                <a:latin typeface="Aptos" pitchFamily="34" charset="0"/>
+                <a:ea typeface="Aptos" pitchFamily="34" charset="-122"/>
+                <a:cs typeface="Aptos" pitchFamily="34" charset="-120"/>
+              </a:rPr>
+              <a:t>FHIR profile.</a:t>
+            </a:r>
+            <a:endParaRPr lang="en-US" sz="1380" dirty="0"/>
+          </a:p>
+          <a:p>
+            <a:r>
+              <a:rPr lang="en-US" sz="1380" dirty="0">
+                <a:solidFill>
+                  <a:srgbClr val="17364A"/>
+                </a:solidFill>
+                <a:latin typeface="Aptos" pitchFamily="34" charset="0"/>
+                <a:ea typeface="Aptos" pitchFamily="34" charset="-122"/>
+                <a:cs typeface="Aptos" pitchFamily="34" charset="-120"/>
+              </a:rPr>
+              <a:t>A FHIR profile constrains or extends a resource for a specific purpose.</a:t>
+            </a:r>
+            <a:endParaRPr lang="en-US" sz="1380" dirty="0"/>
+          </a:p>
+        </p:txBody>
       </p:sp>
       <p:sp>
         <p:nvSpPr>
           <p:cNvPr id="16" name="Shape 14"/>
-          <p:cNvSpPr/>
-          <p:nvPr/>
-        </p:nvSpPr>
-        <p:spPr>
-          <a:xfrm>
-            <a:off x="9198864" y="4206240"/>
-            <a:ext cx="347472" cy="347472"/>
-          </a:xfrm>
-          <a:prstGeom prst="ellipse">
-            <a:avLst/>
-          </a:prstGeom>
-          <a:solidFill>
-            <a:srgbClr val="2F8A28"/>
-          </a:solidFill>
-          <a:ln w="12700">
-            <a:solidFill>
-              <a:srgbClr val="2F8A28"/>
-            </a:solidFill>
-            <a:prstDash val="solid"/>
-          </a:ln>
-        </p:spPr>
-      </p:sp>
-      <p:sp>
-        <p:nvSpPr>
-          <p:cNvPr id="17" name="Text 15"/>
-          <p:cNvSpPr/>
-          <p:nvPr/>
-        </p:nvSpPr>
-        <p:spPr>
-          <a:xfrm>
-            <a:off x="7909560" y="3977640"/>
-            <a:ext cx="2926080" cy="182880"/>
-          </a:xfrm>
-          <a:prstGeom prst="rect">
-            <a:avLst/>
-          </a:prstGeom>
-          <a:noFill/>
-          <a:ln/>
-        </p:spPr>
-        <p:txBody>
-          <a:bodyPr wrap="square" lIns="0" tIns="0" rIns="0" bIns="0" rtlCol="0" anchor="ctr"/>
-          <a:lstStyle/>
-          <a:p>
-            <a:pPr algn="ctr" indent="0" marL="0">
-              <a:buNone/>
-            </a:pPr>
-            <a:r>
-              <a:rPr lang="en-US" sz="1000" dirty="0">
-                <a:solidFill>
-                  <a:srgbClr val="003A63"/>
-                </a:solidFill>
-                <a:latin typeface="Aptos" pitchFamily="34" charset="0"/>
-                <a:ea typeface="Aptos" pitchFamily="34" charset="-122"/>
-                <a:cs typeface="Aptos" pitchFamily="34" charset="-120"/>
-              </a:rPr>
-              <a:t>Concept to action</a:t>
-            </a:r>
-            <a:endParaRPr lang="en-US" sz="1000" dirty="0"/>
-          </a:p>
-        </p:txBody>
-      </p:sp>
-      <p:sp>
-        <p:nvSpPr>
-          <p:cNvPr id="18" name="Shape 16"/>
           <p:cNvSpPr/>
           <p:nvPr/>
         </p:nvSpPr>
@@ -18591,7 +17871,7 @@
       </p:sp>
       <p:sp>
         <p:nvSpPr>
-          <p:cNvPr id="19" name="Text 17"/>
+          <p:cNvPr id="17" name="Text 15"/>
           <p:cNvSpPr/>
           <p:nvPr/>
         </p:nvSpPr>
@@ -18630,7 +17910,7 @@
       </p:sp>
       <p:sp>
         <p:nvSpPr>
-          <p:cNvPr id="20" name="Text 18"/>
+          <p:cNvPr id="18" name="Text 16"/>
           <p:cNvSpPr/>
           <p:nvPr/>
         </p:nvSpPr>

--- a/downloads/presentations/modules/arc-250.pptx
+++ b/downloads/presentations/modules/arc-250.pptx
@@ -3443,49 +3443,58 @@
           <a:ln/>
         </p:spPr>
         <p:txBody>
-          <a:bodyPr wrap="square" lIns="635" tIns="635" rIns="635" bIns="635" rtlCol="0" anchor="t">
+          <a:bodyPr wrap="square" lIns="1016" tIns="1016" rIns="1016" bIns="1016" rtlCol="0" anchor="t">
             <a:normAutofit/>
           </a:bodyPr>
           <a:lstStyle/>
           <a:p>
+            <a:pPr indent="0" marL="0">
+              <a:buNone/>
+            </a:pPr>
             <a:r>
               <a:rPr lang="en-US" sz="2100" dirty="0">
                 <a:solidFill>
-                  <a:srgbClr val="17364A"/>
-                </a:solidFill>
-                <a:latin typeface="Aptos" pitchFamily="34" charset="0"/>
-                <a:ea typeface="Aptos" pitchFamily="34" charset="-122"/>
-                <a:cs typeface="Aptos" pitchFamily="34" charset="-120"/>
-              </a:rPr>
-              <a:t>US Core.</a:t>
+                  <a:srgbClr val="003A63"/>
+                </a:solidFill>
+                <a:latin typeface="Aptos" pitchFamily="34" charset="0"/>
+                <a:ea typeface="Aptos" pitchFamily="34" charset="-122"/>
+                <a:cs typeface="Aptos" pitchFamily="34" charset="-120"/>
+              </a:rPr>
+              <a:t>• US Core.</a:t>
             </a:r>
             <a:endParaRPr lang="en-US" sz="2100" dirty="0"/>
           </a:p>
           <a:p>
+            <a:pPr indent="0" marL="0">
+              <a:buNone/>
+            </a:pPr>
             <a:r>
               <a:rPr lang="en-US" sz="2100" dirty="0">
                 <a:solidFill>
-                  <a:srgbClr val="17364A"/>
-                </a:solidFill>
-                <a:latin typeface="Aptos" pitchFamily="34" charset="0"/>
-                <a:ea typeface="Aptos" pitchFamily="34" charset="-122"/>
-                <a:cs typeface="Aptos" pitchFamily="34" charset="-120"/>
-              </a:rPr>
-              <a:t>US Core defines profiles for core U.S. clinical data exchange.</a:t>
+                  <a:srgbClr val="003A63"/>
+                </a:solidFill>
+                <a:latin typeface="Aptos" pitchFamily="34" charset="0"/>
+                <a:ea typeface="Aptos" pitchFamily="34" charset="-122"/>
+                <a:cs typeface="Aptos" pitchFamily="34" charset="-120"/>
+              </a:rPr>
+              <a:t>• US Core defines profiles for core U.S. clinical data exchange.</a:t>
             </a:r>
             <a:endParaRPr lang="en-US" sz="2100" dirty="0"/>
           </a:p>
           <a:p>
+            <a:pPr indent="0" marL="0">
+              <a:buNone/>
+            </a:pPr>
             <a:r>
               <a:rPr lang="en-US" sz="2100" dirty="0">
                 <a:solidFill>
-                  <a:srgbClr val="17364A"/>
-                </a:solidFill>
-                <a:latin typeface="Aptos" pitchFamily="34" charset="0"/>
-                <a:ea typeface="Aptos" pitchFamily="34" charset="-122"/>
-                <a:cs typeface="Aptos" pitchFamily="34" charset="-120"/>
-              </a:rPr>
-              <a:t>It can support common data access patterns, but public health workflows may require additional public.</a:t>
+                  <a:srgbClr val="003A63"/>
+                </a:solidFill>
+                <a:latin typeface="Aptos" pitchFamily="34" charset="0"/>
+                <a:ea typeface="Aptos" pitchFamily="34" charset="-122"/>
+                <a:cs typeface="Aptos" pitchFamily="34" charset="-120"/>
+              </a:rPr>
+              <a:t>• It can support common data access patterns, but public health workflows may require additional.</a:t>
             </a:r>
             <a:endParaRPr lang="en-US" sz="2100" dirty="0"/>
           </a:p>
@@ -3565,17 +3574,17 @@
         </p:nvSpPr>
         <p:spPr>
           <a:xfrm>
-            <a:off x="7799832" y="1828800"/>
-            <a:ext cx="3145536" cy="685800"/>
-          </a:xfrm>
-          <a:prstGeom prst="rect">
-            <a:avLst/>
-          </a:prstGeom>
-          <a:noFill/>
-          <a:ln/>
-        </p:spPr>
-        <p:txBody>
-          <a:bodyPr wrap="square" lIns="0" tIns="0" rIns="0" bIns="0" rtlCol="0" anchor="t">
+            <a:off x="7799832" y="1801368"/>
+            <a:ext cx="3145536" cy="758952"/>
+          </a:xfrm>
+          <a:prstGeom prst="rect">
+            <a:avLst/>
+          </a:prstGeom>
+          <a:noFill/>
+          <a:ln/>
+        </p:spPr>
+        <p:txBody>
+          <a:bodyPr wrap="square" lIns="254" tIns="254" rIns="254" bIns="254" rtlCol="0" anchor="t">
             <a:normAutofit/>
           </a:bodyPr>
           <a:lstStyle/>
@@ -3584,7 +3593,7 @@
               <a:buNone/>
             </a:pPr>
             <a:r>
-              <a:rPr lang="en-US" sz="1550" dirty="0">
+              <a:rPr lang="en-US" sz="1320" dirty="0">
                 <a:solidFill>
                   <a:srgbClr val="17364A"/>
                 </a:solidFill>
@@ -3594,7 +3603,7 @@
               </a:rPr>
               <a:t>US Core.</a:t>
             </a:r>
-            <a:endParaRPr lang="en-US" sz="1550" dirty="0"/>
+            <a:endParaRPr lang="en-US" sz="1320" dirty="0"/>
           </a:p>
         </p:txBody>
       </p:sp>
@@ -3682,13 +3691,16 @@
           <a:ln/>
         </p:spPr>
         <p:txBody>
-          <a:bodyPr wrap="square" lIns="254" tIns="254" rIns="254" bIns="254" rtlCol="0" anchor="t">
+          <a:bodyPr wrap="square" lIns="508" tIns="508" rIns="508" bIns="508" rtlCol="0" anchor="t">
             <a:normAutofit/>
           </a:bodyPr>
           <a:lstStyle/>
           <a:p>
-            <a:r>
-              <a:rPr lang="en-US" sz="1380" dirty="0">
+            <a:pPr indent="0" marL="0">
+              <a:buNone/>
+            </a:pPr>
+            <a:r>
+              <a:rPr lang="en-US" sz="1220" dirty="0">
                 <a:solidFill>
                   <a:srgbClr val="17364A"/>
                 </a:solidFill>
@@ -3696,13 +3708,16 @@
                 <a:ea typeface="Aptos" pitchFamily="34" charset="-122"/>
                 <a:cs typeface="Aptos" pitchFamily="34" charset="-120"/>
               </a:rPr>
-              <a:t>It can support common data access patterns, but public health workflows may require.</a:t>
-            </a:r>
-            <a:endParaRPr lang="en-US" sz="1380" dirty="0"/>
-          </a:p>
-          <a:p>
-            <a:r>
-              <a:rPr lang="en-US" sz="1380" dirty="0">
+              <a:t>It can support common data access patterns, but public health.</a:t>
+            </a:r>
+            <a:endParaRPr lang="en-US" sz="1220" dirty="0"/>
+          </a:p>
+          <a:p>
+            <a:pPr indent="0" marL="0">
+              <a:buNone/>
+            </a:pPr>
+            <a:r>
+              <a:rPr lang="en-US" sz="1220" dirty="0">
                 <a:solidFill>
                   <a:srgbClr val="17364A"/>
                 </a:solidFill>
@@ -3712,11 +3727,14 @@
               </a:rPr>
               <a:t>Implementation guide.</a:t>
             </a:r>
-            <a:endParaRPr lang="en-US" sz="1380" dirty="0"/>
-          </a:p>
-          <a:p>
-            <a:r>
-              <a:rPr lang="en-US" sz="1380" dirty="0">
+            <a:endParaRPr lang="en-US" sz="1220" dirty="0"/>
+          </a:p>
+          <a:p>
+            <a:pPr indent="0" marL="0">
+              <a:buNone/>
+            </a:pPr>
+            <a:r>
+              <a:rPr lang="en-US" sz="1220" dirty="0">
                 <a:solidFill>
                   <a:srgbClr val="17364A"/>
                 </a:solidFill>
@@ -3724,9 +3742,9 @@
                 <a:ea typeface="Aptos" pitchFamily="34" charset="-122"/>
                 <a:cs typeface="Aptos" pitchFamily="34" charset="-120"/>
               </a:rPr>
-              <a:t>A FHIR implementation guide defines how FHIR should be used for a particular use case.</a:t>
-            </a:r>
-            <a:endParaRPr lang="en-US" sz="1380" dirty="0"/>
+              <a:t>A FHIR implementation guide defines how FHIR should be used for a.</a:t>
+            </a:r>
+            <a:endParaRPr lang="en-US" sz="1220" dirty="0"/>
           </a:p>
         </p:txBody>
       </p:sp>
@@ -3804,17 +3822,17 @@
         </p:nvSpPr>
         <p:spPr>
           <a:xfrm>
-            <a:off x="7799832" y="5001768"/>
-            <a:ext cx="3145536" cy="502920"/>
-          </a:xfrm>
-          <a:prstGeom prst="rect">
-            <a:avLst/>
-          </a:prstGeom>
-          <a:noFill/>
-          <a:ln/>
-        </p:spPr>
-        <p:txBody>
-          <a:bodyPr wrap="square" lIns="0" tIns="0" rIns="0" bIns="0" rtlCol="0" anchor="t">
+            <a:off x="7799832" y="4974336"/>
+            <a:ext cx="3145536" cy="576072"/>
+          </a:xfrm>
+          <a:prstGeom prst="rect">
+            <a:avLst/>
+          </a:prstGeom>
+          <a:noFill/>
+          <a:ln/>
+        </p:spPr>
+        <p:txBody>
+          <a:bodyPr wrap="square" lIns="254" tIns="254" rIns="254" bIns="254" rtlCol="0" anchor="t">
             <a:normAutofit/>
           </a:bodyPr>
           <a:lstStyle/>
@@ -3823,7 +3841,7 @@
               <a:buNone/>
             </a:pPr>
             <a:r>
-              <a:rPr lang="en-US" sz="1550" dirty="0">
+              <a:rPr lang="en-US" sz="1320" dirty="0">
                 <a:solidFill>
                   <a:srgbClr val="17364A"/>
                 </a:solidFill>
@@ -3831,9 +3849,9 @@
                 <a:ea typeface="Aptos" pitchFamily="34" charset="-122"/>
                 <a:cs typeface="Aptos" pitchFamily="34" charset="-120"/>
               </a:rPr>
-              <a:t>Connect the concept to public health purpose, responsible use, required safeguards, documentation, and the next action a department should take.</a:t>
-            </a:r>
-            <a:endParaRPr lang="en-US" sz="1550" dirty="0"/>
+              <a:t>Connect the concept to public health purpose, responsible use, required safeguards, documentation, and the next action a.</a:t>
+            </a:r>
+            <a:endParaRPr lang="en-US" sz="1320" dirty="0"/>
           </a:p>
         </p:txBody>
       </p:sp>
@@ -4134,49 +4152,58 @@
           <a:ln/>
         </p:spPr>
         <p:txBody>
-          <a:bodyPr wrap="square" lIns="635" tIns="635" rIns="635" bIns="635" rtlCol="0" anchor="t">
+          <a:bodyPr wrap="square" lIns="1016" tIns="1016" rIns="1016" bIns="1016" rtlCol="0" anchor="t">
             <a:normAutofit/>
           </a:bodyPr>
           <a:lstStyle/>
           <a:p>
+            <a:pPr indent="0" marL="0">
+              <a:buNone/>
+            </a:pPr>
             <a:r>
               <a:rPr lang="en-US" sz="2100" dirty="0">
                 <a:solidFill>
-                  <a:srgbClr val="17364A"/>
-                </a:solidFill>
-                <a:latin typeface="Aptos" pitchFamily="34" charset="0"/>
-                <a:ea typeface="Aptos" pitchFamily="34" charset="-122"/>
-                <a:cs typeface="Aptos" pitchFamily="34" charset="-120"/>
-              </a:rPr>
-              <a:t>A health department may want an AI tool to summarize relevant EHR information for a case investigation.</a:t>
+                  <a:srgbClr val="003A63"/>
+                </a:solidFill>
+                <a:latin typeface="Aptos" pitchFamily="34" charset="0"/>
+                <a:ea typeface="Aptos" pitchFamily="34" charset="-122"/>
+                <a:cs typeface="Aptos" pitchFamily="34" charset="-120"/>
+              </a:rPr>
+              <a:t>• A health department may want an AI tool to summarize relevant EHR information for a case.</a:t>
             </a:r>
             <a:endParaRPr lang="en-US" sz="2100" dirty="0"/>
           </a:p>
           <a:p>
+            <a:pPr indent="0" marL="0">
+              <a:buNone/>
+            </a:pPr>
             <a:r>
               <a:rPr lang="en-US" sz="2100" dirty="0">
                 <a:solidFill>
-                  <a:srgbClr val="17364A"/>
-                </a:solidFill>
-                <a:latin typeface="Aptos" pitchFamily="34" charset="0"/>
-                <a:ea typeface="Aptos" pitchFamily="34" charset="-122"/>
-                <a:cs typeface="Aptos" pitchFamily="34" charset="-120"/>
-              </a:rPr>
-              <a:t>The tool might need Patient, Encounter, Condition, Observation, DiagnosticReport, MedicationRequest,.</a:t>
+                  <a:srgbClr val="003A63"/>
+                </a:solidFill>
+                <a:latin typeface="Aptos" pitchFamily="34" charset="0"/>
+                <a:ea typeface="Aptos" pitchFamily="34" charset="-122"/>
+                <a:cs typeface="Aptos" pitchFamily="34" charset="-120"/>
+              </a:rPr>
+              <a:t>• The tool might need Patient, Encounter, Condition, Observation, DiagnosticReport,.</a:t>
             </a:r>
             <a:endParaRPr lang="en-US" sz="2100" dirty="0"/>
           </a:p>
           <a:p>
+            <a:pPr indent="0" marL="0">
+              <a:buNone/>
+            </a:pPr>
             <a:r>
               <a:rPr lang="en-US" sz="2100" dirty="0">
                 <a:solidFill>
-                  <a:srgbClr val="17364A"/>
-                </a:solidFill>
-                <a:latin typeface="Aptos" pitchFamily="34" charset="0"/>
-                <a:ea typeface="Aptos" pitchFamily="34" charset="-122"/>
-                <a:cs typeface="Aptos" pitchFamily="34" charset="-120"/>
-              </a:rPr>
-              <a:t>Staff need to verify whether the source system can provide these resources, whether the data include.</a:t>
+                  <a:srgbClr val="003A63"/>
+                </a:solidFill>
+                <a:latin typeface="Aptos" pitchFamily="34" charset="0"/>
+                <a:ea typeface="Aptos" pitchFamily="34" charset="-122"/>
+                <a:cs typeface="Aptos" pitchFamily="34" charset="-120"/>
+              </a:rPr>
+              <a:t>• Staff need to verify whether the source system can provide these resources, whether the data.</a:t>
             </a:r>
             <a:endParaRPr lang="en-US" sz="2100" dirty="0"/>
           </a:p>
@@ -4256,17 +4283,17 @@
         </p:nvSpPr>
         <p:spPr>
           <a:xfrm>
-            <a:off x="7799832" y="1828800"/>
-            <a:ext cx="3145536" cy="685800"/>
-          </a:xfrm>
-          <a:prstGeom prst="rect">
-            <a:avLst/>
-          </a:prstGeom>
-          <a:noFill/>
-          <a:ln/>
-        </p:spPr>
-        <p:txBody>
-          <a:bodyPr wrap="square" lIns="0" tIns="0" rIns="0" bIns="0" rtlCol="0" anchor="t">
+            <a:off x="7799832" y="1801368"/>
+            <a:ext cx="3145536" cy="758952"/>
+          </a:xfrm>
+          <a:prstGeom prst="rect">
+            <a:avLst/>
+          </a:prstGeom>
+          <a:noFill/>
+          <a:ln/>
+        </p:spPr>
+        <p:txBody>
+          <a:bodyPr wrap="square" lIns="254" tIns="254" rIns="254" bIns="254" rtlCol="0" anchor="t">
             <a:normAutofit/>
           </a:bodyPr>
           <a:lstStyle/>
@@ -4275,7 +4302,7 @@
               <a:buNone/>
             </a:pPr>
             <a:r>
-              <a:rPr lang="en-US" sz="1550" dirty="0">
+              <a:rPr lang="en-US" sz="1320" dirty="0">
                 <a:solidFill>
                   <a:srgbClr val="17364A"/>
                 </a:solidFill>
@@ -4285,7 +4312,7 @@
               </a:rPr>
               <a:t>A health department may want an AI tool to summarize relevant EHR information for a case investigation.</a:t>
             </a:r>
-            <a:endParaRPr lang="en-US" sz="1550" dirty="0"/>
+            <a:endParaRPr lang="en-US" sz="1320" dirty="0"/>
           </a:p>
         </p:txBody>
       </p:sp>
@@ -4373,13 +4400,16 @@
           <a:ln/>
         </p:spPr>
         <p:txBody>
-          <a:bodyPr wrap="square" lIns="254" tIns="254" rIns="254" bIns="254" rtlCol="0" anchor="t">
+          <a:bodyPr wrap="square" lIns="508" tIns="508" rIns="508" bIns="508" rtlCol="0" anchor="t">
             <a:normAutofit/>
           </a:bodyPr>
           <a:lstStyle/>
           <a:p>
-            <a:r>
-              <a:rPr lang="en-US" sz="1380" dirty="0">
+            <a:pPr indent="0" marL="0">
+              <a:buNone/>
+            </a:pPr>
+            <a:r>
+              <a:rPr lang="en-US" sz="1220" dirty="0">
                 <a:solidFill>
                   <a:srgbClr val="17364A"/>
                 </a:solidFill>
@@ -4387,13 +4417,16 @@
                 <a:ea typeface="Aptos" pitchFamily="34" charset="-122"/>
                 <a:cs typeface="Aptos" pitchFamily="34" charset="-120"/>
               </a:rPr>
-              <a:t>The tool might need Patient, Encounter, Condition, Observation, DiagnosticReport,.</a:t>
-            </a:r>
-            <a:endParaRPr lang="en-US" sz="1380" dirty="0"/>
-          </a:p>
-          <a:p>
-            <a:r>
-              <a:rPr lang="en-US" sz="1380" dirty="0">
+              <a:t>The tool might need Patient, Encounter, Condition, Observation,.</a:t>
+            </a:r>
+            <a:endParaRPr lang="en-US" sz="1220" dirty="0"/>
+          </a:p>
+          <a:p>
+            <a:pPr indent="0" marL="0">
+              <a:buNone/>
+            </a:pPr>
+            <a:r>
+              <a:rPr lang="en-US" sz="1220" dirty="0">
                 <a:solidFill>
                   <a:srgbClr val="17364A"/>
                 </a:solidFill>
@@ -4401,13 +4434,16 @@
                 <a:ea typeface="Aptos" pitchFamily="34" charset="-122"/>
                 <a:cs typeface="Aptos" pitchFamily="34" charset="-120"/>
               </a:rPr>
-              <a:t>Staff need to verify whether the source system can provide these resources, whether the.</a:t>
-            </a:r>
-            <a:endParaRPr lang="en-US" sz="1380" dirty="0"/>
-          </a:p>
-          <a:p>
-            <a:r>
-              <a:rPr lang="en-US" sz="1380" dirty="0">
+              <a:t>Staff need to verify whether the source system can provide these.</a:t>
+            </a:r>
+            <a:endParaRPr lang="en-US" sz="1220" dirty="0"/>
+          </a:p>
+          <a:p>
+            <a:pPr indent="0" marL="0">
+              <a:buNone/>
+            </a:pPr>
+            <a:r>
+              <a:rPr lang="en-US" sz="1220" dirty="0">
                 <a:solidFill>
                   <a:srgbClr val="17364A"/>
                 </a:solidFill>
@@ -4415,9 +4451,9 @@
                 <a:ea typeface="Aptos" pitchFamily="34" charset="-122"/>
                 <a:cs typeface="Aptos" pitchFamily="34" charset="-120"/>
               </a:rPr>
-              <a:t>An immunization use case may need Patient and Immunization resources, along with vaccine.</a:t>
-            </a:r>
-            <a:endParaRPr lang="en-US" sz="1380" dirty="0"/>
+              <a:t>An immunization use case may need Patient and Immunization.</a:t>
+            </a:r>
+            <a:endParaRPr lang="en-US" sz="1220" dirty="0"/>
           </a:p>
         </p:txBody>
       </p:sp>
@@ -4495,17 +4531,17 @@
         </p:nvSpPr>
         <p:spPr>
           <a:xfrm>
-            <a:off x="7799832" y="5001768"/>
-            <a:ext cx="3145536" cy="502920"/>
-          </a:xfrm>
-          <a:prstGeom prst="rect">
-            <a:avLst/>
-          </a:prstGeom>
-          <a:noFill/>
-          <a:ln/>
-        </p:spPr>
-        <p:txBody>
-          <a:bodyPr wrap="square" lIns="0" tIns="0" rIns="0" bIns="0" rtlCol="0" anchor="t">
+            <a:off x="7799832" y="4974336"/>
+            <a:ext cx="3145536" cy="576072"/>
+          </a:xfrm>
+          <a:prstGeom prst="rect">
+            <a:avLst/>
+          </a:prstGeom>
+          <a:noFill/>
+          <a:ln/>
+        </p:spPr>
+        <p:txBody>
+          <a:bodyPr wrap="square" lIns="254" tIns="254" rIns="254" bIns="254" rtlCol="0" anchor="t">
             <a:normAutofit/>
           </a:bodyPr>
           <a:lstStyle/>
@@ -4514,7 +4550,7 @@
               <a:buNone/>
             </a:pPr>
             <a:r>
-              <a:rPr lang="en-US" sz="1550" dirty="0">
+              <a:rPr lang="en-US" sz="1320" dirty="0">
                 <a:solidFill>
                   <a:srgbClr val="17364A"/>
                 </a:solidFill>
@@ -4522,9 +4558,9 @@
                 <a:ea typeface="Aptos" pitchFamily="34" charset="-122"/>
                 <a:cs typeface="Aptos" pitchFamily="34" charset="-120"/>
               </a:rPr>
-              <a:t>Connect the concept to public health purpose, responsible use, required safeguards, documentation, and the next action a department should take.</a:t>
-            </a:r>
-            <a:endParaRPr lang="en-US" sz="1550" dirty="0"/>
+              <a:t>Connect the concept to public health purpose, responsible use, required safeguards, documentation, and the next action a.</a:t>
+            </a:r>
+            <a:endParaRPr lang="en-US" sz="1320" dirty="0"/>
           </a:p>
         </p:txBody>
       </p:sp>
@@ -4825,49 +4861,58 @@
           <a:ln/>
         </p:spPr>
         <p:txBody>
-          <a:bodyPr wrap="square" lIns="635" tIns="635" rIns="635" bIns="635" rtlCol="0" anchor="t">
+          <a:bodyPr wrap="square" lIns="1016" tIns="1016" rIns="1016" bIns="1016" rtlCol="0" anchor="t">
             <a:normAutofit/>
           </a:bodyPr>
           <a:lstStyle/>
           <a:p>
+            <a:pPr indent="0" marL="0">
+              <a:buNone/>
+            </a:pPr>
             <a:r>
               <a:rPr lang="en-US" sz="2100" dirty="0">
                 <a:solidFill>
-                  <a:srgbClr val="17364A"/>
-                </a:solidFill>
-                <a:latin typeface="Aptos" pitchFamily="34" charset="0"/>
-                <a:ea typeface="Aptos" pitchFamily="34" charset="-122"/>
-                <a:cs typeface="Aptos" pitchFamily="34" charset="-120"/>
-              </a:rPr>
-              <a:t>FHIR planning should begin with the use case rather than the technology.</a:t>
+                  <a:srgbClr val="003A63"/>
+                </a:solidFill>
+                <a:latin typeface="Aptos" pitchFamily="34" charset="0"/>
+                <a:ea typeface="Aptos" pitchFamily="34" charset="-122"/>
+                <a:cs typeface="Aptos" pitchFamily="34" charset="-120"/>
+              </a:rPr>
+              <a:t>• FHIR planning should begin with the use case rather than the technology.</a:t>
             </a:r>
             <a:endParaRPr lang="en-US" sz="2100" dirty="0"/>
           </a:p>
           <a:p>
+            <a:pPr indent="0" marL="0">
+              <a:buNone/>
+            </a:pPr>
             <a:r>
               <a:rPr lang="en-US" sz="2100" dirty="0">
                 <a:solidFill>
-                  <a:srgbClr val="17364A"/>
-                </a:solidFill>
-                <a:latin typeface="Aptos" pitchFamily="34" charset="0"/>
-                <a:ea typeface="Aptos" pitchFamily="34" charset="-122"/>
-                <a:cs typeface="Aptos" pitchFamily="34" charset="-120"/>
-              </a:rPr>
-              <a:t>Staff should identify the public health decision or task, the data elements required, the FHIR.</a:t>
+                  <a:srgbClr val="003A63"/>
+                </a:solidFill>
+                <a:latin typeface="Aptos" pitchFamily="34" charset="0"/>
+                <a:ea typeface="Aptos" pitchFamily="34" charset="-122"/>
+                <a:cs typeface="Aptos" pitchFamily="34" charset="-120"/>
+              </a:rPr>
+              <a:t>• Staff should identify the public health decision or task, the data elements required, the FHIR.</a:t>
             </a:r>
             <a:endParaRPr lang="en-US" sz="2100" dirty="0"/>
           </a:p>
           <a:p>
+            <a:pPr indent="0" marL="0">
+              <a:buNone/>
+            </a:pPr>
             <a:r>
               <a:rPr lang="en-US" sz="2100" dirty="0">
                 <a:solidFill>
-                  <a:srgbClr val="17364A"/>
-                </a:solidFill>
-                <a:latin typeface="Aptos" pitchFamily="34" charset="0"/>
-                <a:ea typeface="Aptos" pitchFamily="34" charset="-122"/>
-                <a:cs typeface="Aptos" pitchFamily="34" charset="-120"/>
-              </a:rPr>
-              <a:t>This prevents over-general claims about FHIR from substituting for a concrete data needs analysis.</a:t>
+                  <a:srgbClr val="003A63"/>
+                </a:solidFill>
+                <a:latin typeface="Aptos" pitchFamily="34" charset="0"/>
+                <a:ea typeface="Aptos" pitchFamily="34" charset="-122"/>
+                <a:cs typeface="Aptos" pitchFamily="34" charset="-120"/>
+              </a:rPr>
+              <a:t>• This prevents over-general claims about FHIR from substituting for a concrete data needs.</a:t>
             </a:r>
             <a:endParaRPr lang="en-US" sz="2100" dirty="0"/>
           </a:p>
@@ -4947,17 +4992,17 @@
         </p:nvSpPr>
         <p:spPr>
           <a:xfrm>
-            <a:off x="7799832" y="1828800"/>
-            <a:ext cx="3145536" cy="685800"/>
-          </a:xfrm>
-          <a:prstGeom prst="rect">
-            <a:avLst/>
-          </a:prstGeom>
-          <a:noFill/>
-          <a:ln/>
-        </p:spPr>
-        <p:txBody>
-          <a:bodyPr wrap="square" lIns="0" tIns="0" rIns="0" bIns="0" rtlCol="0" anchor="t">
+            <a:off x="7799832" y="1801368"/>
+            <a:ext cx="3145536" cy="758952"/>
+          </a:xfrm>
+          <a:prstGeom prst="rect">
+            <a:avLst/>
+          </a:prstGeom>
+          <a:noFill/>
+          <a:ln/>
+        </p:spPr>
+        <p:txBody>
+          <a:bodyPr wrap="square" lIns="254" tIns="254" rIns="254" bIns="254" rtlCol="0" anchor="t">
             <a:normAutofit/>
           </a:bodyPr>
           <a:lstStyle/>
@@ -4966,7 +5011,7 @@
               <a:buNone/>
             </a:pPr>
             <a:r>
-              <a:rPr lang="en-US" sz="1550" dirty="0">
+              <a:rPr lang="en-US" sz="1320" dirty="0">
                 <a:solidFill>
                   <a:srgbClr val="17364A"/>
                 </a:solidFill>
@@ -4976,7 +5021,7 @@
               </a:rPr>
               <a:t>FHIR planning should begin with the use case rather than the technology.</a:t>
             </a:r>
-            <a:endParaRPr lang="en-US" sz="1550" dirty="0"/>
+            <a:endParaRPr lang="en-US" sz="1320" dirty="0"/>
           </a:p>
         </p:txBody>
       </p:sp>
@@ -5064,13 +5109,16 @@
           <a:ln/>
         </p:spPr>
         <p:txBody>
-          <a:bodyPr wrap="square" lIns="254" tIns="254" rIns="254" bIns="254" rtlCol="0" anchor="t">
+          <a:bodyPr wrap="square" lIns="508" tIns="508" rIns="508" bIns="508" rtlCol="0" anchor="t">
             <a:normAutofit/>
           </a:bodyPr>
           <a:lstStyle/>
           <a:p>
-            <a:r>
-              <a:rPr lang="en-US" sz="1380" dirty="0">
+            <a:pPr indent="0" marL="0">
+              <a:buNone/>
+            </a:pPr>
+            <a:r>
+              <a:rPr lang="en-US" sz="1220" dirty="0">
                 <a:solidFill>
                   <a:srgbClr val="17364A"/>
                 </a:solidFill>
@@ -5078,13 +5126,16 @@
                 <a:ea typeface="Aptos" pitchFamily="34" charset="-122"/>
                 <a:cs typeface="Aptos" pitchFamily="34" charset="-120"/>
               </a:rPr>
-              <a:t>Staff should identify the public health decision or task, the data elements required, the.</a:t>
-            </a:r>
-            <a:endParaRPr lang="en-US" sz="1380" dirty="0"/>
-          </a:p>
-          <a:p>
-            <a:r>
-              <a:rPr lang="en-US" sz="1380" dirty="0">
+              <a:t>Staff should identify the public health decision or task, the data.</a:t>
+            </a:r>
+            <a:endParaRPr lang="en-US" sz="1220" dirty="0"/>
+          </a:p>
+          <a:p>
+            <a:pPr indent="0" marL="0">
+              <a:buNone/>
+            </a:pPr>
+            <a:r>
+              <a:rPr lang="en-US" sz="1220" dirty="0">
                 <a:solidFill>
                   <a:srgbClr val="17364A"/>
                 </a:solidFill>
@@ -5092,13 +5143,16 @@
                 <a:ea typeface="Aptos" pitchFamily="34" charset="-122"/>
                 <a:cs typeface="Aptos" pitchFamily="34" charset="-120"/>
               </a:rPr>
-              <a:t>Profiles and implementation guides matter because general resources can be used in.</a:t>
-            </a:r>
-            <a:endParaRPr lang="en-US" sz="1380" dirty="0"/>
-          </a:p>
-          <a:p>
-            <a:r>
-              <a:rPr lang="en-US" sz="1380" dirty="0">
+              <a:t>Profiles and implementation guides matter because general.</a:t>
+            </a:r>
+            <a:endParaRPr lang="en-US" sz="1220" dirty="0"/>
+          </a:p>
+          <a:p>
+            <a:pPr indent="0" marL="0">
+              <a:buNone/>
+            </a:pPr>
+            <a:r>
+              <a:rPr lang="en-US" sz="1220" dirty="0">
                 <a:solidFill>
                   <a:srgbClr val="17364A"/>
                 </a:solidFill>
@@ -5106,9 +5160,9 @@
                 <a:ea typeface="Aptos" pitchFamily="34" charset="-122"/>
                 <a:cs typeface="Aptos" pitchFamily="34" charset="-120"/>
               </a:rPr>
-              <a:t>A public health workflow may need specific required elements, value sets, extensions, or.</a:t>
-            </a:r>
-            <a:endParaRPr lang="en-US" sz="1380" dirty="0"/>
+              <a:t>A public health workflow may need specific required elements,.</a:t>
+            </a:r>
+            <a:endParaRPr lang="en-US" sz="1220" dirty="0"/>
           </a:p>
         </p:txBody>
       </p:sp>
@@ -5186,17 +5240,17 @@
         </p:nvSpPr>
         <p:spPr>
           <a:xfrm>
-            <a:off x="7799832" y="5001768"/>
-            <a:ext cx="3145536" cy="502920"/>
-          </a:xfrm>
-          <a:prstGeom prst="rect">
-            <a:avLst/>
-          </a:prstGeom>
-          <a:noFill/>
-          <a:ln/>
-        </p:spPr>
-        <p:txBody>
-          <a:bodyPr wrap="square" lIns="0" tIns="0" rIns="0" bIns="0" rtlCol="0" anchor="t">
+            <a:off x="7799832" y="4974336"/>
+            <a:ext cx="3145536" cy="576072"/>
+          </a:xfrm>
+          <a:prstGeom prst="rect">
+            <a:avLst/>
+          </a:prstGeom>
+          <a:noFill/>
+          <a:ln/>
+        </p:spPr>
+        <p:txBody>
+          <a:bodyPr wrap="square" lIns="254" tIns="254" rIns="254" bIns="254" rtlCol="0" anchor="t">
             <a:normAutofit/>
           </a:bodyPr>
           <a:lstStyle/>
@@ -5205,7 +5259,7 @@
               <a:buNone/>
             </a:pPr>
             <a:r>
-              <a:rPr lang="en-US" sz="1550" dirty="0">
+              <a:rPr lang="en-US" sz="1320" dirty="0">
                 <a:solidFill>
                   <a:srgbClr val="17364A"/>
                 </a:solidFill>
@@ -5213,9 +5267,9 @@
                 <a:ea typeface="Aptos" pitchFamily="34" charset="-122"/>
                 <a:cs typeface="Aptos" pitchFamily="34" charset="-120"/>
               </a:rPr>
-              <a:t>Connect the concept to public health purpose, responsible use, required safeguards, documentation, and the next action a department should take.</a:t>
-            </a:r>
-            <a:endParaRPr lang="en-US" sz="1550" dirty="0"/>
+              <a:t>Connect the concept to public health purpose, responsible use, required safeguards, documentation, and the next action a.</a:t>
+            </a:r>
+            <a:endParaRPr lang="en-US" sz="1320" dirty="0"/>
           </a:p>
         </p:txBody>
       </p:sp>
@@ -5516,49 +5570,58 @@
           <a:ln/>
         </p:spPr>
         <p:txBody>
-          <a:bodyPr wrap="square" lIns="635" tIns="635" rIns="635" bIns="635" rtlCol="0" anchor="t">
+          <a:bodyPr wrap="square" lIns="1016" tIns="1016" rIns="1016" bIns="1016" rtlCol="0" anchor="t">
             <a:normAutofit/>
           </a:bodyPr>
           <a:lstStyle/>
           <a:p>
+            <a:pPr indent="0" marL="0">
+              <a:buNone/>
+            </a:pPr>
             <a:r>
               <a:rPr lang="en-US" sz="2100" dirty="0">
                 <a:solidFill>
-                  <a:srgbClr val="17364A"/>
-                </a:solidFill>
-                <a:latin typeface="Aptos" pitchFamily="34" charset="0"/>
-                <a:ea typeface="Aptos" pitchFamily="34" charset="-122"/>
-                <a:cs typeface="Aptos" pitchFamily="34" charset="-120"/>
-              </a:rPr>
-              <a:t>FHIR-compatible but incomplete.</a:t>
+                  <a:srgbClr val="003A63"/>
+                </a:solidFill>
+                <a:latin typeface="Aptos" pitchFamily="34" charset="0"/>
+                <a:ea typeface="Aptos" pitchFamily="34" charset="-122"/>
+                <a:cs typeface="Aptos" pitchFamily="34" charset="-120"/>
+              </a:rPr>
+              <a:t>• FHIR-compatible but incomplete.</a:t>
             </a:r>
             <a:endParaRPr lang="en-US" sz="2100" dirty="0"/>
           </a:p>
           <a:p>
+            <a:pPr indent="0" marL="0">
+              <a:buNone/>
+            </a:pPr>
             <a:r>
               <a:rPr lang="en-US" sz="2100" dirty="0">
                 <a:solidFill>
-                  <a:srgbClr val="17364A"/>
-                </a:solidFill>
-                <a:latin typeface="Aptos" pitchFamily="34" charset="0"/>
-                <a:ea typeface="Aptos" pitchFamily="34" charset="-122"/>
-                <a:cs typeface="Aptos" pitchFamily="34" charset="-120"/>
-              </a:rPr>
-              <a:t>A product may support FHIR but not the data needed for the public health use case.</a:t>
+                  <a:srgbClr val="003A63"/>
+                </a:solidFill>
+                <a:latin typeface="Aptos" pitchFamily="34" charset="0"/>
+                <a:ea typeface="Aptos" pitchFamily="34" charset="-122"/>
+                <a:cs typeface="Aptos" pitchFamily="34" charset="-120"/>
+              </a:rPr>
+              <a:t>• A product may support FHIR but not the data needed for the public health use case.</a:t>
             </a:r>
             <a:endParaRPr lang="en-US" sz="2100" dirty="0"/>
           </a:p>
           <a:p>
+            <a:pPr indent="0" marL="0">
+              <a:buNone/>
+            </a:pPr>
             <a:r>
               <a:rPr lang="en-US" sz="2100" dirty="0">
                 <a:solidFill>
-                  <a:srgbClr val="17364A"/>
-                </a:solidFill>
-                <a:latin typeface="Aptos" pitchFamily="34" charset="0"/>
-                <a:ea typeface="Aptos" pitchFamily="34" charset="-122"/>
-                <a:cs typeface="Aptos" pitchFamily="34" charset="-120"/>
-              </a:rPr>
-              <a:t>Guardrails include data needs worksheets, test queries, and acceptance criteria.</a:t>
+                  <a:srgbClr val="003A63"/>
+                </a:solidFill>
+                <a:latin typeface="Aptos" pitchFamily="34" charset="0"/>
+                <a:ea typeface="Aptos" pitchFamily="34" charset="-122"/>
+                <a:cs typeface="Aptos" pitchFamily="34" charset="-120"/>
+              </a:rPr>
+              <a:t>• Guardrails include data needs worksheets, test queries, and acceptance criteria.</a:t>
             </a:r>
             <a:endParaRPr lang="en-US" sz="2100" dirty="0"/>
           </a:p>
@@ -5638,17 +5701,17 @@
         </p:nvSpPr>
         <p:spPr>
           <a:xfrm>
-            <a:off x="7799832" y="1828800"/>
-            <a:ext cx="3145536" cy="685800"/>
-          </a:xfrm>
-          <a:prstGeom prst="rect">
-            <a:avLst/>
-          </a:prstGeom>
-          <a:noFill/>
-          <a:ln/>
-        </p:spPr>
-        <p:txBody>
-          <a:bodyPr wrap="square" lIns="0" tIns="0" rIns="0" bIns="0" rtlCol="0" anchor="t">
+            <a:off x="7799832" y="1801368"/>
+            <a:ext cx="3145536" cy="758952"/>
+          </a:xfrm>
+          <a:prstGeom prst="rect">
+            <a:avLst/>
+          </a:prstGeom>
+          <a:noFill/>
+          <a:ln/>
+        </p:spPr>
+        <p:txBody>
+          <a:bodyPr wrap="square" lIns="254" tIns="254" rIns="254" bIns="254" rtlCol="0" anchor="t">
             <a:normAutofit/>
           </a:bodyPr>
           <a:lstStyle/>
@@ -5657,7 +5720,7 @@
               <a:buNone/>
             </a:pPr>
             <a:r>
-              <a:rPr lang="en-US" sz="1550" dirty="0">
+              <a:rPr lang="en-US" sz="1320" dirty="0">
                 <a:solidFill>
                   <a:srgbClr val="17364A"/>
                 </a:solidFill>
@@ -5667,7 +5730,7 @@
               </a:rPr>
               <a:t>FHIR-compatible but incomplete.</a:t>
             </a:r>
-            <a:endParaRPr lang="en-US" sz="1550" dirty="0"/>
+            <a:endParaRPr lang="en-US" sz="1320" dirty="0"/>
           </a:p>
         </p:txBody>
       </p:sp>
@@ -5755,13 +5818,16 @@
           <a:ln/>
         </p:spPr>
         <p:txBody>
-          <a:bodyPr wrap="square" lIns="254" tIns="254" rIns="254" bIns="254" rtlCol="0" anchor="t">
+          <a:bodyPr wrap="square" lIns="508" tIns="508" rIns="508" bIns="508" rtlCol="0" anchor="t">
             <a:normAutofit/>
           </a:bodyPr>
           <a:lstStyle/>
           <a:p>
-            <a:r>
-              <a:rPr lang="en-US" sz="1380" dirty="0">
+            <a:pPr indent="0" marL="0">
+              <a:buNone/>
+            </a:pPr>
+            <a:r>
+              <a:rPr lang="en-US" sz="1220" dirty="0">
                 <a:solidFill>
                   <a:srgbClr val="17364A"/>
                 </a:solidFill>
@@ -5771,11 +5837,14 @@
               </a:rPr>
               <a:t>Overbroad API access.</a:t>
             </a:r>
-            <a:endParaRPr lang="en-US" sz="1380" dirty="0"/>
-          </a:p>
-          <a:p>
-            <a:r>
-              <a:rPr lang="en-US" sz="1380" dirty="0">
+            <a:endParaRPr lang="en-US" sz="1220" dirty="0"/>
+          </a:p>
+          <a:p>
+            <a:pPr indent="0" marL="0">
+              <a:buNone/>
+            </a:pPr>
+            <a:r>
+              <a:rPr lang="en-US" sz="1220" dirty="0">
                 <a:solidFill>
                   <a:srgbClr val="17364A"/>
                 </a:solidFill>
@@ -5785,11 +5854,14 @@
               </a:rPr>
               <a:t>AI tools may request more data than needed.</a:t>
             </a:r>
-            <a:endParaRPr lang="en-US" sz="1380" dirty="0"/>
-          </a:p>
-          <a:p>
-            <a:r>
-              <a:rPr lang="en-US" sz="1380" dirty="0">
+            <a:endParaRPr lang="en-US" sz="1220" dirty="0"/>
+          </a:p>
+          <a:p>
+            <a:pPr indent="0" marL="0">
+              <a:buNone/>
+            </a:pPr>
+            <a:r>
+              <a:rPr lang="en-US" sz="1220" dirty="0">
                 <a:solidFill>
                   <a:srgbClr val="17364A"/>
                 </a:solidFill>
@@ -5797,9 +5869,9 @@
                 <a:ea typeface="Aptos" pitchFamily="34" charset="-122"/>
                 <a:cs typeface="Aptos" pitchFamily="34" charset="-120"/>
               </a:rPr>
-              <a:t>Guardrails include scoped access, minimum necessary review, and audit logs.</a:t>
-            </a:r>
-            <a:endParaRPr lang="en-US" sz="1380" dirty="0"/>
+              <a:t>Guardrails include scoped access, minimum necessary review, and.</a:t>
+            </a:r>
+            <a:endParaRPr lang="en-US" sz="1220" dirty="0"/>
           </a:p>
         </p:txBody>
       </p:sp>
@@ -5877,17 +5949,17 @@
         </p:nvSpPr>
         <p:spPr>
           <a:xfrm>
-            <a:off x="7799832" y="5001768"/>
-            <a:ext cx="3145536" cy="502920"/>
-          </a:xfrm>
-          <a:prstGeom prst="rect">
-            <a:avLst/>
-          </a:prstGeom>
-          <a:noFill/>
-          <a:ln/>
-        </p:spPr>
-        <p:txBody>
-          <a:bodyPr wrap="square" lIns="0" tIns="0" rIns="0" bIns="0" rtlCol="0" anchor="t">
+            <a:off x="7799832" y="4974336"/>
+            <a:ext cx="3145536" cy="576072"/>
+          </a:xfrm>
+          <a:prstGeom prst="rect">
+            <a:avLst/>
+          </a:prstGeom>
+          <a:noFill/>
+          <a:ln/>
+        </p:spPr>
+        <p:txBody>
+          <a:bodyPr wrap="square" lIns="254" tIns="254" rIns="254" bIns="254" rtlCol="0" anchor="t">
             <a:normAutofit/>
           </a:bodyPr>
           <a:lstStyle/>
@@ -5896,7 +5968,7 @@
               <a:buNone/>
             </a:pPr>
             <a:r>
-              <a:rPr lang="en-US" sz="1550" dirty="0">
+              <a:rPr lang="en-US" sz="1320" dirty="0">
                 <a:solidFill>
                   <a:srgbClr val="17364A"/>
                 </a:solidFill>
@@ -5904,9 +5976,9 @@
                 <a:ea typeface="Aptos" pitchFamily="34" charset="-122"/>
                 <a:cs typeface="Aptos" pitchFamily="34" charset="-120"/>
               </a:rPr>
-              <a:t>Identify what could go wrong, who could be affected, what safeguards are needed, and what evidence should be reviewed before use expands.</a:t>
-            </a:r>
-            <a:endParaRPr lang="en-US" sz="1550" dirty="0"/>
+              <a:t>Identify what could go wrong, who could be affected, what safeguards are needed, and what evidence should be reviewed.</a:t>
+            </a:r>
+            <a:endParaRPr lang="en-US" sz="1320" dirty="0"/>
           </a:p>
         </p:txBody>
       </p:sp>
@@ -6207,49 +6279,58 @@
           <a:ln/>
         </p:spPr>
         <p:txBody>
-          <a:bodyPr wrap="square" lIns="635" tIns="635" rIns="635" bIns="635" rtlCol="0" anchor="t">
+          <a:bodyPr wrap="square" lIns="1016" tIns="1016" rIns="1016" bIns="1016" rtlCol="0" anchor="t">
             <a:normAutofit/>
           </a:bodyPr>
           <a:lstStyle/>
           <a:p>
+            <a:pPr indent="0" marL="0">
+              <a:buNone/>
+            </a:pPr>
             <a:r>
               <a:rPr lang="en-US" sz="2100" dirty="0">
                 <a:solidFill>
-                  <a:srgbClr val="17364A"/>
-                </a:solidFill>
-                <a:latin typeface="Aptos" pitchFamily="34" charset="0"/>
-                <a:ea typeface="Aptos" pitchFamily="34" charset="-122"/>
-                <a:cs typeface="Aptos" pitchFamily="34" charset="-120"/>
-              </a:rPr>
-              <a:t>Write-back risk.</a:t>
+                  <a:srgbClr val="003A63"/>
+                </a:solidFill>
+                <a:latin typeface="Aptos" pitchFamily="34" charset="0"/>
+                <a:ea typeface="Aptos" pitchFamily="34" charset="-122"/>
+                <a:cs typeface="Aptos" pitchFamily="34" charset="-120"/>
+              </a:rPr>
+              <a:t>• Write-back risk.</a:t>
             </a:r>
             <a:endParaRPr lang="en-US" sz="2100" dirty="0"/>
           </a:p>
           <a:p>
+            <a:pPr indent="0" marL="0">
+              <a:buNone/>
+            </a:pPr>
             <a:r>
               <a:rPr lang="en-US" sz="2100" dirty="0">
                 <a:solidFill>
-                  <a:srgbClr val="17364A"/>
-                </a:solidFill>
-                <a:latin typeface="Aptos" pitchFamily="34" charset="0"/>
-                <a:ea typeface="Aptos" pitchFamily="34" charset="-122"/>
-                <a:cs typeface="Aptos" pitchFamily="34" charset="-120"/>
-              </a:rPr>
-              <a:t>FHIR APIs may support updates or task creation.</a:t>
+                  <a:srgbClr val="003A63"/>
+                </a:solidFill>
+                <a:latin typeface="Aptos" pitchFamily="34" charset="0"/>
+                <a:ea typeface="Aptos" pitchFamily="34" charset="-122"/>
+                <a:cs typeface="Aptos" pitchFamily="34" charset="-120"/>
+              </a:rPr>
+              <a:t>• FHIR APIs may support updates or task creation.</a:t>
             </a:r>
             <a:endParaRPr lang="en-US" sz="2100" dirty="0"/>
           </a:p>
           <a:p>
+            <a:pPr indent="0" marL="0">
+              <a:buNone/>
+            </a:pPr>
             <a:r>
               <a:rPr lang="en-US" sz="2100" dirty="0">
                 <a:solidFill>
-                  <a:srgbClr val="17364A"/>
-                </a:solidFill>
-                <a:latin typeface="Aptos" pitchFamily="34" charset="0"/>
-                <a:ea typeface="Aptos" pitchFamily="34" charset="-122"/>
-                <a:cs typeface="Aptos" pitchFamily="34" charset="-120"/>
-              </a:rPr>
-              <a:t>Guardrails include human approval, restricted permissions, sandbox testing, and rollback procedures.</a:t>
+                  <a:srgbClr val="003A63"/>
+                </a:solidFill>
+                <a:latin typeface="Aptos" pitchFamily="34" charset="0"/>
+                <a:ea typeface="Aptos" pitchFamily="34" charset="-122"/>
+                <a:cs typeface="Aptos" pitchFamily="34" charset="-120"/>
+              </a:rPr>
+              <a:t>• Guardrails include human approval, restricted permissions, sandbox testing, and rollback.</a:t>
             </a:r>
             <a:endParaRPr lang="en-US" sz="2100" dirty="0"/>
           </a:p>
@@ -6329,17 +6410,17 @@
         </p:nvSpPr>
         <p:spPr>
           <a:xfrm>
-            <a:off x="7799832" y="1828800"/>
-            <a:ext cx="3145536" cy="685800"/>
-          </a:xfrm>
-          <a:prstGeom prst="rect">
-            <a:avLst/>
-          </a:prstGeom>
-          <a:noFill/>
-          <a:ln/>
-        </p:spPr>
-        <p:txBody>
-          <a:bodyPr wrap="square" lIns="0" tIns="0" rIns="0" bIns="0" rtlCol="0" anchor="t">
+            <a:off x="7799832" y="1801368"/>
+            <a:ext cx="3145536" cy="758952"/>
+          </a:xfrm>
+          <a:prstGeom prst="rect">
+            <a:avLst/>
+          </a:prstGeom>
+          <a:noFill/>
+          <a:ln/>
+        </p:spPr>
+        <p:txBody>
+          <a:bodyPr wrap="square" lIns="254" tIns="254" rIns="254" bIns="254" rtlCol="0" anchor="t">
             <a:normAutofit/>
           </a:bodyPr>
           <a:lstStyle/>
@@ -6348,7 +6429,7 @@
               <a:buNone/>
             </a:pPr>
             <a:r>
-              <a:rPr lang="en-US" sz="1550" dirty="0">
+              <a:rPr lang="en-US" sz="1320" dirty="0">
                 <a:solidFill>
                   <a:srgbClr val="17364A"/>
                 </a:solidFill>
@@ -6358,7 +6439,7 @@
               </a:rPr>
               <a:t>Write-back risk.</a:t>
             </a:r>
-            <a:endParaRPr lang="en-US" sz="1550" dirty="0"/>
+            <a:endParaRPr lang="en-US" sz="1320" dirty="0"/>
           </a:p>
         </p:txBody>
       </p:sp>
@@ -6446,13 +6527,16 @@
           <a:ln/>
         </p:spPr>
         <p:txBody>
-          <a:bodyPr wrap="square" lIns="254" tIns="254" rIns="254" bIns="254" rtlCol="0" anchor="t">
+          <a:bodyPr wrap="square" lIns="508" tIns="508" rIns="508" bIns="508" rtlCol="0" anchor="t">
             <a:normAutofit/>
           </a:bodyPr>
           <a:lstStyle/>
           <a:p>
-            <a:r>
-              <a:rPr lang="en-US" sz="1380" dirty="0">
+            <a:pPr indent="0" marL="0">
+              <a:buNone/>
+            </a:pPr>
+            <a:r>
+              <a:rPr lang="en-US" sz="1220" dirty="0">
                 <a:solidFill>
                   <a:srgbClr val="17364A"/>
                 </a:solidFill>
@@ -6462,11 +6546,14 @@
               </a:rPr>
               <a:t>Write-back risk.</a:t>
             </a:r>
-            <a:endParaRPr lang="en-US" sz="1380" dirty="0"/>
-          </a:p>
-          <a:p>
-            <a:r>
-              <a:rPr lang="en-US" sz="1380" dirty="0">
+            <a:endParaRPr lang="en-US" sz="1220" dirty="0"/>
+          </a:p>
+          <a:p>
+            <a:pPr indent="0" marL="0">
+              <a:buNone/>
+            </a:pPr>
+            <a:r>
+              <a:rPr lang="en-US" sz="1220" dirty="0">
                 <a:solidFill>
                   <a:srgbClr val="17364A"/>
                 </a:solidFill>
@@ -6476,11 +6563,14 @@
               </a:rPr>
               <a:t>FHIR APIs may support updates or task creation.</a:t>
             </a:r>
-            <a:endParaRPr lang="en-US" sz="1380" dirty="0"/>
-          </a:p>
-          <a:p>
-            <a:r>
-              <a:rPr lang="en-US" sz="1380" dirty="0">
+            <a:endParaRPr lang="en-US" sz="1220" dirty="0"/>
+          </a:p>
+          <a:p>
+            <a:pPr indent="0" marL="0">
+              <a:buNone/>
+            </a:pPr>
+            <a:r>
+              <a:rPr lang="en-US" sz="1220" dirty="0">
                 <a:solidFill>
                   <a:srgbClr val="17364A"/>
                 </a:solidFill>
@@ -6488,9 +6578,9 @@
                 <a:ea typeface="Aptos" pitchFamily="34" charset="-122"/>
                 <a:cs typeface="Aptos" pitchFamily="34" charset="-120"/>
               </a:rPr>
-              <a:t>Guardrails include human approval, restricted permissions, sandbox testing, and rollback.</a:t>
-            </a:r>
-            <a:endParaRPr lang="en-US" sz="1380" dirty="0"/>
+              <a:t>Guardrails include human approval, restricted permissions, sandbox.</a:t>
+            </a:r>
+            <a:endParaRPr lang="en-US" sz="1220" dirty="0"/>
           </a:p>
         </p:txBody>
       </p:sp>
@@ -6568,17 +6658,17 @@
         </p:nvSpPr>
         <p:spPr>
           <a:xfrm>
-            <a:off x="7799832" y="5001768"/>
-            <a:ext cx="3145536" cy="502920"/>
-          </a:xfrm>
-          <a:prstGeom prst="rect">
-            <a:avLst/>
-          </a:prstGeom>
-          <a:noFill/>
-          <a:ln/>
-        </p:spPr>
-        <p:txBody>
-          <a:bodyPr wrap="square" lIns="0" tIns="0" rIns="0" bIns="0" rtlCol="0" anchor="t">
+            <a:off x="7799832" y="4974336"/>
+            <a:ext cx="3145536" cy="576072"/>
+          </a:xfrm>
+          <a:prstGeom prst="rect">
+            <a:avLst/>
+          </a:prstGeom>
+          <a:noFill/>
+          <a:ln/>
+        </p:spPr>
+        <p:txBody>
+          <a:bodyPr wrap="square" lIns="254" tIns="254" rIns="254" bIns="254" rtlCol="0" anchor="t">
             <a:normAutofit/>
           </a:bodyPr>
           <a:lstStyle/>
@@ -6587,7 +6677,7 @@
               <a:buNone/>
             </a:pPr>
             <a:r>
-              <a:rPr lang="en-US" sz="1550" dirty="0">
+              <a:rPr lang="en-US" sz="1320" dirty="0">
                 <a:solidFill>
                   <a:srgbClr val="17364A"/>
                 </a:solidFill>
@@ -6595,9 +6685,9 @@
                 <a:ea typeface="Aptos" pitchFamily="34" charset="-122"/>
                 <a:cs typeface="Aptos" pitchFamily="34" charset="-120"/>
               </a:rPr>
-              <a:t>Identify what could go wrong, who could be affected, what safeguards are needed, and what evidence should be reviewed before use expands.</a:t>
-            </a:r>
-            <a:endParaRPr lang="en-US" sz="1550" dirty="0"/>
+              <a:t>Identify what could go wrong, who could be affected, what safeguards are needed, and what evidence should be reviewed.</a:t>
+            </a:r>
+            <a:endParaRPr lang="en-US" sz="1320" dirty="0"/>
           </a:p>
         </p:txBody>
       </p:sp>
@@ -6898,49 +6988,58 @@
           <a:ln/>
         </p:spPr>
         <p:txBody>
-          <a:bodyPr wrap="square" lIns="635" tIns="635" rIns="635" bIns="635" rtlCol="0" anchor="t">
+          <a:bodyPr wrap="square" lIns="1016" tIns="1016" rIns="1016" bIns="1016" rtlCol="0" anchor="t">
             <a:normAutofit/>
           </a:bodyPr>
           <a:lstStyle/>
           <a:p>
+            <a:pPr indent="0" marL="0">
+              <a:buNone/>
+            </a:pPr>
             <a:r>
               <a:rPr lang="en-US" sz="2100" dirty="0">
                 <a:solidFill>
-                  <a:srgbClr val="17364A"/>
-                </a:solidFill>
-                <a:latin typeface="Aptos" pitchFamily="34" charset="0"/>
-                <a:ea typeface="Aptos" pitchFamily="34" charset="-122"/>
-                <a:cs typeface="Aptos" pitchFamily="34" charset="-120"/>
-              </a:rPr>
-              <a:t>Generative AI can use FHIR data to draft case or patient summaries, but the output should be grounded.</a:t>
+                  <a:srgbClr val="003A63"/>
+                </a:solidFill>
+                <a:latin typeface="Aptos" pitchFamily="34" charset="0"/>
+                <a:ea typeface="Aptos" pitchFamily="34" charset="-122"/>
+                <a:cs typeface="Aptos" pitchFamily="34" charset="-120"/>
+              </a:rPr>
+              <a:t>• Generative AI can use FHIR data to draft case or patient summaries, but the output should be.</a:t>
             </a:r>
             <a:endParaRPr lang="en-US" sz="2100" dirty="0"/>
           </a:p>
           <a:p>
+            <a:pPr indent="0" marL="0">
+              <a:buNone/>
+            </a:pPr>
             <a:r>
               <a:rPr lang="en-US" sz="2100" dirty="0">
                 <a:solidFill>
-                  <a:srgbClr val="17364A"/>
-                </a:solidFill>
-                <a:latin typeface="Aptos" pitchFamily="34" charset="0"/>
-                <a:ea typeface="Aptos" pitchFamily="34" charset="-122"/>
-                <a:cs typeface="Aptos" pitchFamily="34" charset="-120"/>
-              </a:rPr>
-              <a:t>Predictive analytics may use features derived from FHIR resources, which requires stable extraction and.</a:t>
+                  <a:srgbClr val="003A63"/>
+                </a:solidFill>
+                <a:latin typeface="Aptos" pitchFamily="34" charset="0"/>
+                <a:ea typeface="Aptos" pitchFamily="34" charset="-122"/>
+                <a:cs typeface="Aptos" pitchFamily="34" charset="-120"/>
+              </a:rPr>
+              <a:t>• Predictive analytics may use features derived from FHIR resources, which requires stable.</a:t>
             </a:r>
             <a:endParaRPr lang="en-US" sz="2100" dirty="0"/>
           </a:p>
           <a:p>
+            <a:pPr indent="0" marL="0">
+              <a:buNone/>
+            </a:pPr>
             <a:r>
               <a:rPr lang="en-US" sz="2100" dirty="0">
                 <a:solidFill>
-                  <a:srgbClr val="17364A"/>
-                </a:solidFill>
-                <a:latin typeface="Aptos" pitchFamily="34" charset="0"/>
-                <a:ea typeface="Aptos" pitchFamily="34" charset="-122"/>
-                <a:cs typeface="Aptos" pitchFamily="34" charset="-120"/>
-              </a:rPr>
-              <a:t>RAG may combine FHIR-derived facts with agency guidance.</a:t>
+                  <a:srgbClr val="003A63"/>
+                </a:solidFill>
+                <a:latin typeface="Aptos" pitchFamily="34" charset="0"/>
+                <a:ea typeface="Aptos" pitchFamily="34" charset="-122"/>
+                <a:cs typeface="Aptos" pitchFamily="34" charset="-120"/>
+              </a:rPr>
+              <a:t>• RAG may combine FHIR-derived facts with agency guidance.</a:t>
             </a:r>
             <a:endParaRPr lang="en-US" sz="2100" dirty="0"/>
           </a:p>
@@ -7020,17 +7119,17 @@
         </p:nvSpPr>
         <p:spPr>
           <a:xfrm>
-            <a:off x="7799832" y="1828800"/>
-            <a:ext cx="3145536" cy="685800"/>
-          </a:xfrm>
-          <a:prstGeom prst="rect">
-            <a:avLst/>
-          </a:prstGeom>
-          <a:noFill/>
-          <a:ln/>
-        </p:spPr>
-        <p:txBody>
-          <a:bodyPr wrap="square" lIns="0" tIns="0" rIns="0" bIns="0" rtlCol="0" anchor="t">
+            <a:off x="7799832" y="1801368"/>
+            <a:ext cx="3145536" cy="758952"/>
+          </a:xfrm>
+          <a:prstGeom prst="rect">
+            <a:avLst/>
+          </a:prstGeom>
+          <a:noFill/>
+          <a:ln/>
+        </p:spPr>
+        <p:txBody>
+          <a:bodyPr wrap="square" lIns="254" tIns="254" rIns="254" bIns="254" rtlCol="0" anchor="t">
             <a:normAutofit/>
           </a:bodyPr>
           <a:lstStyle/>
@@ -7039,7 +7138,7 @@
               <a:buNone/>
             </a:pPr>
             <a:r>
-              <a:rPr lang="en-US" sz="1550" dirty="0">
+              <a:rPr lang="en-US" sz="1320" dirty="0">
                 <a:solidFill>
                   <a:srgbClr val="17364A"/>
                 </a:solidFill>
@@ -7049,7 +7148,7 @@
               </a:rPr>
               <a:t>Generative AI can use FHIR data to draft case or patient summaries, but the output should be grounded.</a:t>
             </a:r>
-            <a:endParaRPr lang="en-US" sz="1550" dirty="0"/>
+            <a:endParaRPr lang="en-US" sz="1320" dirty="0"/>
           </a:p>
         </p:txBody>
       </p:sp>
@@ -7137,13 +7236,16 @@
           <a:ln/>
         </p:spPr>
         <p:txBody>
-          <a:bodyPr wrap="square" lIns="254" tIns="254" rIns="254" bIns="254" rtlCol="0" anchor="t">
+          <a:bodyPr wrap="square" lIns="508" tIns="508" rIns="508" bIns="508" rtlCol="0" anchor="t">
             <a:normAutofit/>
           </a:bodyPr>
           <a:lstStyle/>
           <a:p>
-            <a:r>
-              <a:rPr lang="en-US" sz="1380" dirty="0">
+            <a:pPr indent="0" marL="0">
+              <a:buNone/>
+            </a:pPr>
+            <a:r>
+              <a:rPr lang="en-US" sz="1220" dirty="0">
                 <a:solidFill>
                   <a:srgbClr val="17364A"/>
                 </a:solidFill>
@@ -7151,13 +7253,16 @@
                 <a:ea typeface="Aptos" pitchFamily="34" charset="-122"/>
                 <a:cs typeface="Aptos" pitchFamily="34" charset="-120"/>
               </a:rPr>
-              <a:t>Generative AI can use FHIR data to draft case or patient summaries, but the output should.</a:t>
-            </a:r>
-            <a:endParaRPr lang="en-US" sz="1380" dirty="0"/>
-          </a:p>
-          <a:p>
-            <a:r>
-              <a:rPr lang="en-US" sz="1380" dirty="0">
+              <a:t>Generative AI can use FHIR data to draft case or patient.</a:t>
+            </a:r>
+            <a:endParaRPr lang="en-US" sz="1220" dirty="0"/>
+          </a:p>
+          <a:p>
+            <a:pPr indent="0" marL="0">
+              <a:buNone/>
+            </a:pPr>
+            <a:r>
+              <a:rPr lang="en-US" sz="1220" dirty="0">
                 <a:solidFill>
                   <a:srgbClr val="17364A"/>
                 </a:solidFill>
@@ -7165,13 +7270,16 @@
                 <a:ea typeface="Aptos" pitchFamily="34" charset="-122"/>
                 <a:cs typeface="Aptos" pitchFamily="34" charset="-120"/>
               </a:rPr>
-              <a:t>Predictive analytics may use features derived from FHIR resources, which requires stable.</a:t>
-            </a:r>
-            <a:endParaRPr lang="en-US" sz="1380" dirty="0"/>
-          </a:p>
-          <a:p>
-            <a:r>
-              <a:rPr lang="en-US" sz="1380" dirty="0">
+              <a:t>Predictive analytics may use features derived from FHIR resources,.</a:t>
+            </a:r>
+            <a:endParaRPr lang="en-US" sz="1220" dirty="0"/>
+          </a:p>
+          <a:p>
+            <a:pPr indent="0" marL="0">
+              <a:buNone/>
+            </a:pPr>
+            <a:r>
+              <a:rPr lang="en-US" sz="1220" dirty="0">
                 <a:solidFill>
                   <a:srgbClr val="17364A"/>
                 </a:solidFill>
@@ -7179,9 +7287,9 @@
                 <a:ea typeface="Aptos" pitchFamily="34" charset="-122"/>
                 <a:cs typeface="Aptos" pitchFamily="34" charset="-120"/>
               </a:rPr>
-              <a:t>Agentic workflows may create Tasks or update statuses, making permissions and approval.</a:t>
-            </a:r>
-            <a:endParaRPr lang="en-US" sz="1380" dirty="0"/>
+              <a:t>Agentic workflows may create Tasks or update statuses, making.</a:t>
+            </a:r>
+            <a:endParaRPr lang="en-US" sz="1220" dirty="0"/>
           </a:p>
         </p:txBody>
       </p:sp>
@@ -7259,17 +7367,17 @@
         </p:nvSpPr>
         <p:spPr>
           <a:xfrm>
-            <a:off x="7799832" y="5001768"/>
-            <a:ext cx="3145536" cy="502920"/>
-          </a:xfrm>
-          <a:prstGeom prst="rect">
-            <a:avLst/>
-          </a:prstGeom>
-          <a:noFill/>
-          <a:ln/>
-        </p:spPr>
-        <p:txBody>
-          <a:bodyPr wrap="square" lIns="0" tIns="0" rIns="0" bIns="0" rtlCol="0" anchor="t">
+            <a:off x="7799832" y="4974336"/>
+            <a:ext cx="3145536" cy="576072"/>
+          </a:xfrm>
+          <a:prstGeom prst="rect">
+            <a:avLst/>
+          </a:prstGeom>
+          <a:noFill/>
+          <a:ln/>
+        </p:spPr>
+        <p:txBody>
+          <a:bodyPr wrap="square" lIns="254" tIns="254" rIns="254" bIns="254" rtlCol="0" anchor="t">
             <a:normAutofit/>
           </a:bodyPr>
           <a:lstStyle/>
@@ -7278,7 +7386,7 @@
               <a:buNone/>
             </a:pPr>
             <a:r>
-              <a:rPr lang="en-US" sz="1550" dirty="0">
+              <a:rPr lang="en-US" sz="1320" dirty="0">
                 <a:solidFill>
                   <a:srgbClr val="17364A"/>
                 </a:solidFill>
@@ -7286,9 +7394,9 @@
                 <a:ea typeface="Aptos" pitchFamily="34" charset="-122"/>
                 <a:cs typeface="Aptos" pitchFamily="34" charset="-120"/>
               </a:rPr>
-              <a:t>Use the concept to clarify workflow changes, dependencies, staffing, procurement requirements, training needs, and implementation checkpoints.</a:t>
-            </a:r>
-            <a:endParaRPr lang="en-US" sz="1550" dirty="0"/>
+              <a:t>Use the concept to clarify workflow changes, dependencies, staffing, procurement requirements, training needs, and.</a:t>
+            </a:r>
+            <a:endParaRPr lang="en-US" sz="1320" dirty="0"/>
           </a:p>
         </p:txBody>
       </p:sp>
@@ -7589,49 +7697,58 @@
           <a:ln/>
         </p:spPr>
         <p:txBody>
-          <a:bodyPr wrap="square" lIns="635" tIns="635" rIns="635" bIns="635" rtlCol="0" anchor="t">
+          <a:bodyPr wrap="square" lIns="1016" tIns="1016" rIns="1016" bIns="1016" rtlCol="0" anchor="t">
             <a:normAutofit/>
           </a:bodyPr>
           <a:lstStyle/>
           <a:p>
+            <a:pPr indent="0" marL="0">
+              <a:buNone/>
+            </a:pPr>
             <a:r>
               <a:rPr lang="en-US" sz="2100" dirty="0">
                 <a:solidFill>
-                  <a:srgbClr val="17364A"/>
-                </a:solidFill>
-                <a:latin typeface="Aptos" pitchFamily="34" charset="0"/>
-                <a:ea typeface="Aptos" pitchFamily="34" charset="-122"/>
-                <a:cs typeface="Aptos" pitchFamily="34" charset="-120"/>
-              </a:rPr>
-              <a:t>Which public health workflows could benefit from structured FHIR data?</a:t>
+                  <a:srgbClr val="003A63"/>
+                </a:solidFill>
+                <a:latin typeface="Aptos" pitchFamily="34" charset="0"/>
+                <a:ea typeface="Aptos" pitchFamily="34" charset="-122"/>
+                <a:cs typeface="Aptos" pitchFamily="34" charset="-120"/>
+              </a:rPr>
+              <a:t>• Which public health workflows could benefit from structured FHIR data?</a:t>
             </a:r>
             <a:endParaRPr lang="en-US" sz="2100" dirty="0"/>
           </a:p>
           <a:p>
+            <a:pPr indent="0" marL="0">
+              <a:buNone/>
+            </a:pPr>
             <a:r>
               <a:rPr lang="en-US" sz="2100" dirty="0">
                 <a:solidFill>
-                  <a:srgbClr val="17364A"/>
-                </a:solidFill>
-                <a:latin typeface="Aptos" pitchFamily="34" charset="0"/>
-                <a:ea typeface="Aptos" pitchFamily="34" charset="-122"/>
-                <a:cs typeface="Aptos" pitchFamily="34" charset="-120"/>
-              </a:rPr>
-              <a:t>Which data elements are required for the workflow?</a:t>
+                  <a:srgbClr val="003A63"/>
+                </a:solidFill>
+                <a:latin typeface="Aptos" pitchFamily="34" charset="0"/>
+                <a:ea typeface="Aptos" pitchFamily="34" charset="-122"/>
+                <a:cs typeface="Aptos" pitchFamily="34" charset="-120"/>
+              </a:rPr>
+              <a:t>• Which data elements are required for the workflow?</a:t>
             </a:r>
             <a:endParaRPr lang="en-US" sz="2100" dirty="0"/>
           </a:p>
           <a:p>
+            <a:pPr indent="0" marL="0">
+              <a:buNone/>
+            </a:pPr>
             <a:r>
               <a:rPr lang="en-US" sz="2100" dirty="0">
                 <a:solidFill>
-                  <a:srgbClr val="17364A"/>
-                </a:solidFill>
-                <a:latin typeface="Aptos" pitchFamily="34" charset="0"/>
-                <a:ea typeface="Aptos" pitchFamily="34" charset="-122"/>
-                <a:cs typeface="Aptos" pitchFamily="34" charset="-120"/>
-              </a:rPr>
-              <a:t>Are those elements available through FHIR in the source systems?</a:t>
+                  <a:srgbClr val="003A63"/>
+                </a:solidFill>
+                <a:latin typeface="Aptos" pitchFamily="34" charset="0"/>
+                <a:ea typeface="Aptos" pitchFamily="34" charset="-122"/>
+                <a:cs typeface="Aptos" pitchFamily="34" charset="-120"/>
+              </a:rPr>
+              <a:t>• Are those elements available through FHIR in the source systems?</a:t>
             </a:r>
             <a:endParaRPr lang="en-US" sz="2100" dirty="0"/>
           </a:p>
@@ -7711,17 +7828,17 @@
         </p:nvSpPr>
         <p:spPr>
           <a:xfrm>
-            <a:off x="7799832" y="1828800"/>
-            <a:ext cx="3145536" cy="685800"/>
-          </a:xfrm>
-          <a:prstGeom prst="rect">
-            <a:avLst/>
-          </a:prstGeom>
-          <a:noFill/>
-          <a:ln/>
-        </p:spPr>
-        <p:txBody>
-          <a:bodyPr wrap="square" lIns="0" tIns="0" rIns="0" bIns="0" rtlCol="0" anchor="t">
+            <a:off x="7799832" y="1801368"/>
+            <a:ext cx="3145536" cy="758952"/>
+          </a:xfrm>
+          <a:prstGeom prst="rect">
+            <a:avLst/>
+          </a:prstGeom>
+          <a:noFill/>
+          <a:ln/>
+        </p:spPr>
+        <p:txBody>
+          <a:bodyPr wrap="square" lIns="254" tIns="254" rIns="254" bIns="254" rtlCol="0" anchor="t">
             <a:normAutofit/>
           </a:bodyPr>
           <a:lstStyle/>
@@ -7730,7 +7847,7 @@
               <a:buNone/>
             </a:pPr>
             <a:r>
-              <a:rPr lang="en-US" sz="1550" dirty="0">
+              <a:rPr lang="en-US" sz="1320" dirty="0">
                 <a:solidFill>
                   <a:srgbClr val="17364A"/>
                 </a:solidFill>
@@ -7740,7 +7857,7 @@
               </a:rPr>
               <a:t>Which public health workflows could benefit from structured FHIR data?</a:t>
             </a:r>
-            <a:endParaRPr lang="en-US" sz="1550" dirty="0"/>
+            <a:endParaRPr lang="en-US" sz="1320" dirty="0"/>
           </a:p>
         </p:txBody>
       </p:sp>
@@ -7828,13 +7945,16 @@
           <a:ln/>
         </p:spPr>
         <p:txBody>
-          <a:bodyPr wrap="square" lIns="254" tIns="254" rIns="254" bIns="254" rtlCol="0" anchor="t">
+          <a:bodyPr wrap="square" lIns="508" tIns="508" rIns="508" bIns="508" rtlCol="0" anchor="t">
             <a:normAutofit/>
           </a:bodyPr>
           <a:lstStyle/>
           <a:p>
-            <a:r>
-              <a:rPr lang="en-US" sz="1380" dirty="0">
+            <a:pPr indent="0" marL="0">
+              <a:buNone/>
+            </a:pPr>
+            <a:r>
+              <a:rPr lang="en-US" sz="1220" dirty="0">
                 <a:solidFill>
                   <a:srgbClr val="17364A"/>
                 </a:solidFill>
@@ -7842,13 +7962,16 @@
                 <a:ea typeface="Aptos" pitchFamily="34" charset="-122"/>
                 <a:cs typeface="Aptos" pitchFamily="34" charset="-120"/>
               </a:rPr>
-              <a:t>Which public health workflows could benefit from structured FHIR data?</a:t>
-            </a:r>
-            <a:endParaRPr lang="en-US" sz="1380" dirty="0"/>
-          </a:p>
-          <a:p>
-            <a:r>
-              <a:rPr lang="en-US" sz="1380" dirty="0">
+              <a:t>Which public health workflows could benefit from structured FHIR.</a:t>
+            </a:r>
+            <a:endParaRPr lang="en-US" sz="1220" dirty="0"/>
+          </a:p>
+          <a:p>
+            <a:pPr indent="0" marL="0">
+              <a:buNone/>
+            </a:pPr>
+            <a:r>
+              <a:rPr lang="en-US" sz="1220" dirty="0">
                 <a:solidFill>
                   <a:srgbClr val="17364A"/>
                 </a:solidFill>
@@ -7858,11 +7981,14 @@
               </a:rPr>
               <a:t>Which data elements are required for the workflow?</a:t>
             </a:r>
-            <a:endParaRPr lang="en-US" sz="1380" dirty="0"/>
-          </a:p>
-          <a:p>
-            <a:r>
-              <a:rPr lang="en-US" sz="1380" dirty="0">
+            <a:endParaRPr lang="en-US" sz="1220" dirty="0"/>
+          </a:p>
+          <a:p>
+            <a:pPr indent="0" marL="0">
+              <a:buNone/>
+            </a:pPr>
+            <a:r>
+              <a:rPr lang="en-US" sz="1220" dirty="0">
                 <a:solidFill>
                   <a:srgbClr val="17364A"/>
                 </a:solidFill>
@@ -7872,7 +7998,7 @@
               </a:rPr>
               <a:t>Are those elements available through FHIR in the source systems?</a:t>
             </a:r>
-            <a:endParaRPr lang="en-US" sz="1380" dirty="0"/>
+            <a:endParaRPr lang="en-US" sz="1220" dirty="0"/>
           </a:p>
         </p:txBody>
       </p:sp>
@@ -7950,17 +8076,17 @@
         </p:nvSpPr>
         <p:spPr>
           <a:xfrm>
-            <a:off x="7799832" y="5001768"/>
-            <a:ext cx="3145536" cy="502920"/>
-          </a:xfrm>
-          <a:prstGeom prst="rect">
-            <a:avLst/>
-          </a:prstGeom>
-          <a:noFill/>
-          <a:ln/>
-        </p:spPr>
-        <p:txBody>
-          <a:bodyPr wrap="square" lIns="0" tIns="0" rIns="0" bIns="0" rtlCol="0" anchor="t">
+            <a:off x="7799832" y="4974336"/>
+            <a:ext cx="3145536" cy="576072"/>
+          </a:xfrm>
+          <a:prstGeom prst="rect">
+            <a:avLst/>
+          </a:prstGeom>
+          <a:noFill/>
+          <a:ln/>
+        </p:spPr>
+        <p:txBody>
+          <a:bodyPr wrap="square" lIns="254" tIns="254" rIns="254" bIns="254" rtlCol="0" anchor="t">
             <a:normAutofit/>
           </a:bodyPr>
           <a:lstStyle/>
@@ -7969,7 +8095,7 @@
               <a:buNone/>
             </a:pPr>
             <a:r>
-              <a:rPr lang="en-US" sz="1550" dirty="0">
+              <a:rPr lang="en-US" sz="1320" dirty="0">
                 <a:solidFill>
                   <a:srgbClr val="17364A"/>
                 </a:solidFill>
@@ -7977,9 +8103,9 @@
                 <a:ea typeface="Aptos" pitchFamily="34" charset="-122"/>
                 <a:cs typeface="Aptos" pitchFamily="34" charset="-120"/>
               </a:rPr>
-              <a:t>Connect the concept to public health purpose, responsible use, required safeguards, documentation, and the next action a department should take.</a:t>
-            </a:r>
-            <a:endParaRPr lang="en-US" sz="1550" dirty="0"/>
+              <a:t>Connect the concept to public health purpose, responsible use, required safeguards, documentation, and the next action a.</a:t>
+            </a:r>
+            <a:endParaRPr lang="en-US" sz="1320" dirty="0"/>
           </a:p>
         </p:txBody>
       </p:sp>
@@ -8280,35 +8406,41 @@
           <a:ln/>
         </p:spPr>
         <p:txBody>
-          <a:bodyPr wrap="square" lIns="635" tIns="635" rIns="635" bIns="635" rtlCol="0" anchor="t">
+          <a:bodyPr wrap="square" lIns="1016" tIns="1016" rIns="1016" bIns="1016" rtlCol="0" anchor="t">
             <a:normAutofit/>
           </a:bodyPr>
           <a:lstStyle/>
           <a:p>
+            <a:pPr indent="0" marL="0">
+              <a:buNone/>
+            </a:pPr>
             <a:r>
               <a:rPr lang="en-US" sz="2100" dirty="0">
                 <a:solidFill>
-                  <a:srgbClr val="17364A"/>
-                </a:solidFill>
-                <a:latin typeface="Aptos" pitchFamily="34" charset="0"/>
-                <a:ea typeface="Aptos" pitchFamily="34" charset="-122"/>
-                <a:cs typeface="Aptos" pitchFamily="34" charset="-120"/>
-              </a:rPr>
-              <a:t>Which profiles or implementation guides apply?</a:t>
+                  <a:srgbClr val="003A63"/>
+                </a:solidFill>
+                <a:latin typeface="Aptos" pitchFamily="34" charset="0"/>
+                <a:ea typeface="Aptos" pitchFamily="34" charset="-122"/>
+                <a:cs typeface="Aptos" pitchFamily="34" charset="-120"/>
+              </a:rPr>
+              <a:t>• Which profiles or implementation guides apply?</a:t>
             </a:r>
             <a:endParaRPr lang="en-US" sz="2100" dirty="0"/>
           </a:p>
           <a:p>
+            <a:pPr indent="0" marL="0">
+              <a:buNone/>
+            </a:pPr>
             <a:r>
               <a:rPr lang="en-US" sz="2100" dirty="0">
                 <a:solidFill>
-                  <a:srgbClr val="17364A"/>
-                </a:solidFill>
-                <a:latin typeface="Aptos" pitchFamily="34" charset="0"/>
-                <a:ea typeface="Aptos" pitchFamily="34" charset="-122"/>
-                <a:cs typeface="Aptos" pitchFamily="34" charset="-120"/>
-              </a:rPr>
-              <a:t>How will staff verify that the AI tool used the correct FHIR data?</a:t>
+                  <a:srgbClr val="003A63"/>
+                </a:solidFill>
+                <a:latin typeface="Aptos" pitchFamily="34" charset="0"/>
+                <a:ea typeface="Aptos" pitchFamily="34" charset="-122"/>
+                <a:cs typeface="Aptos" pitchFamily="34" charset="-120"/>
+              </a:rPr>
+              <a:t>• How will staff verify that the AI tool used the correct FHIR data?</a:t>
             </a:r>
             <a:endParaRPr lang="en-US" sz="2100" dirty="0"/>
           </a:p>
@@ -8388,17 +8520,17 @@
         </p:nvSpPr>
         <p:spPr>
           <a:xfrm>
-            <a:off x="7799832" y="1828800"/>
-            <a:ext cx="3145536" cy="685800"/>
-          </a:xfrm>
-          <a:prstGeom prst="rect">
-            <a:avLst/>
-          </a:prstGeom>
-          <a:noFill/>
-          <a:ln/>
-        </p:spPr>
-        <p:txBody>
-          <a:bodyPr wrap="square" lIns="0" tIns="0" rIns="0" bIns="0" rtlCol="0" anchor="t">
+            <a:off x="7799832" y="1801368"/>
+            <a:ext cx="3145536" cy="758952"/>
+          </a:xfrm>
+          <a:prstGeom prst="rect">
+            <a:avLst/>
+          </a:prstGeom>
+          <a:noFill/>
+          <a:ln/>
+        </p:spPr>
+        <p:txBody>
+          <a:bodyPr wrap="square" lIns="254" tIns="254" rIns="254" bIns="254" rtlCol="0" anchor="t">
             <a:normAutofit/>
           </a:bodyPr>
           <a:lstStyle/>
@@ -8407,7 +8539,7 @@
               <a:buNone/>
             </a:pPr>
             <a:r>
-              <a:rPr lang="en-US" sz="1550" dirty="0">
+              <a:rPr lang="en-US" sz="1320" dirty="0">
                 <a:solidFill>
                   <a:srgbClr val="17364A"/>
                 </a:solidFill>
@@ -8417,7 +8549,7 @@
               </a:rPr>
               <a:t>Which profiles or implementation guides apply?</a:t>
             </a:r>
-            <a:endParaRPr lang="en-US" sz="1550" dirty="0"/>
+            <a:endParaRPr lang="en-US" sz="1320" dirty="0"/>
           </a:p>
         </p:txBody>
       </p:sp>
@@ -8505,13 +8637,16 @@
           <a:ln/>
         </p:spPr>
         <p:txBody>
-          <a:bodyPr wrap="square" lIns="254" tIns="254" rIns="254" bIns="254" rtlCol="0" anchor="t">
+          <a:bodyPr wrap="square" lIns="508" tIns="508" rIns="508" bIns="508" rtlCol="0" anchor="t">
             <a:normAutofit/>
           </a:bodyPr>
           <a:lstStyle/>
           <a:p>
-            <a:r>
-              <a:rPr lang="en-US" sz="1380" dirty="0">
+            <a:pPr indent="0" marL="0">
+              <a:buNone/>
+            </a:pPr>
+            <a:r>
+              <a:rPr lang="en-US" sz="1220" dirty="0">
                 <a:solidFill>
                   <a:srgbClr val="17364A"/>
                 </a:solidFill>
@@ -8521,11 +8656,14 @@
               </a:rPr>
               <a:t>Which profiles or implementation guides apply?</a:t>
             </a:r>
-            <a:endParaRPr lang="en-US" sz="1380" dirty="0"/>
-          </a:p>
-          <a:p>
-            <a:r>
-              <a:rPr lang="en-US" sz="1380" dirty="0">
+            <a:endParaRPr lang="en-US" sz="1220" dirty="0"/>
+          </a:p>
+          <a:p>
+            <a:pPr indent="0" marL="0">
+              <a:buNone/>
+            </a:pPr>
+            <a:r>
+              <a:rPr lang="en-US" sz="1220" dirty="0">
                 <a:solidFill>
                   <a:srgbClr val="17364A"/>
                 </a:solidFill>
@@ -8535,7 +8673,7 @@
               </a:rPr>
               <a:t>How will staff verify that the AI tool used the correct FHIR data?</a:t>
             </a:r>
-            <a:endParaRPr lang="en-US" sz="1380" dirty="0"/>
+            <a:endParaRPr lang="en-US" sz="1220" dirty="0"/>
           </a:p>
         </p:txBody>
       </p:sp>
@@ -8613,17 +8751,17 @@
         </p:nvSpPr>
         <p:spPr>
           <a:xfrm>
-            <a:off x="7799832" y="5001768"/>
-            <a:ext cx="3145536" cy="502920"/>
-          </a:xfrm>
-          <a:prstGeom prst="rect">
-            <a:avLst/>
-          </a:prstGeom>
-          <a:noFill/>
-          <a:ln/>
-        </p:spPr>
-        <p:txBody>
-          <a:bodyPr wrap="square" lIns="0" tIns="0" rIns="0" bIns="0" rtlCol="0" anchor="t">
+            <a:off x="7799832" y="4974336"/>
+            <a:ext cx="3145536" cy="576072"/>
+          </a:xfrm>
+          <a:prstGeom prst="rect">
+            <a:avLst/>
+          </a:prstGeom>
+          <a:noFill/>
+          <a:ln/>
+        </p:spPr>
+        <p:txBody>
+          <a:bodyPr wrap="square" lIns="254" tIns="254" rIns="254" bIns="254" rtlCol="0" anchor="t">
             <a:normAutofit/>
           </a:bodyPr>
           <a:lstStyle/>
@@ -8632,7 +8770,7 @@
               <a:buNone/>
             </a:pPr>
             <a:r>
-              <a:rPr lang="en-US" sz="1550" dirty="0">
+              <a:rPr lang="en-US" sz="1320" dirty="0">
                 <a:solidFill>
                   <a:srgbClr val="17364A"/>
                 </a:solidFill>
@@ -8640,9 +8778,9 @@
                 <a:ea typeface="Aptos" pitchFamily="34" charset="-122"/>
                 <a:cs typeface="Aptos" pitchFamily="34" charset="-120"/>
               </a:rPr>
-              <a:t>Connect the concept to public health purpose, responsible use, required safeguards, documentation, and the next action a department should take.</a:t>
-            </a:r>
-            <a:endParaRPr lang="en-US" sz="1550" dirty="0"/>
+              <a:t>Connect the concept to public health purpose, responsible use, required safeguards, documentation, and the next action a.</a:t>
+            </a:r>
+            <a:endParaRPr lang="en-US" sz="1320" dirty="0"/>
           </a:p>
         </p:txBody>
       </p:sp>
@@ -8943,35 +9081,41 @@
           <a:ln/>
         </p:spPr>
         <p:txBody>
-          <a:bodyPr wrap="square" lIns="635" tIns="635" rIns="635" bIns="635" rtlCol="0" anchor="t">
+          <a:bodyPr wrap="square" lIns="1016" tIns="1016" rIns="1016" bIns="1016" rtlCol="0" anchor="t">
             <a:normAutofit/>
           </a:bodyPr>
           <a:lstStyle/>
           <a:p>
+            <a:pPr indent="0" marL="0">
+              <a:buNone/>
+            </a:pPr>
             <a:r>
               <a:rPr lang="en-US" sz="2100" dirty="0">
                 <a:solidFill>
-                  <a:srgbClr val="17364A"/>
-                </a:solidFill>
-                <a:latin typeface="Aptos" pitchFamily="34" charset="0"/>
-                <a:ea typeface="Aptos" pitchFamily="34" charset="-122"/>
-                <a:cs typeface="Aptos" pitchFamily="34" charset="-120"/>
-              </a:rPr>
-              <a:t>Create a FHIR data needs worksheet for one AI-supported public health use case.</a:t>
+                  <a:srgbClr val="003A63"/>
+                </a:solidFill>
+                <a:latin typeface="Aptos" pitchFamily="34" charset="0"/>
+                <a:ea typeface="Aptos" pitchFamily="34" charset="-122"/>
+                <a:cs typeface="Aptos" pitchFamily="34" charset="-120"/>
+              </a:rPr>
+              <a:t>• Create a FHIR data needs worksheet for one AI-supported public health use case.</a:t>
             </a:r>
             <a:endParaRPr lang="en-US" sz="2100" dirty="0"/>
           </a:p>
           <a:p>
+            <a:pPr indent="0" marL="0">
+              <a:buNone/>
+            </a:pPr>
             <a:r>
               <a:rPr lang="en-US" sz="2100" dirty="0">
                 <a:solidFill>
-                  <a:srgbClr val="17364A"/>
-                </a:solidFill>
-                <a:latin typeface="Aptos" pitchFamily="34" charset="0"/>
-                <a:ea typeface="Aptos" pitchFamily="34" charset="-122"/>
-                <a:cs typeface="Aptos" pitchFamily="34" charset="-120"/>
-              </a:rPr>
-              <a:t>Include the use case, required data elements, relevant FHIR resources, source systems, API method,.</a:t>
+                  <a:srgbClr val="003A63"/>
+                </a:solidFill>
+                <a:latin typeface="Aptos" pitchFamily="34" charset="0"/>
+                <a:ea typeface="Aptos" pitchFamily="34" charset="-122"/>
+                <a:cs typeface="Aptos" pitchFamily="34" charset="-120"/>
+              </a:rPr>
+              <a:t>• Include the use case, required data elements, relevant FHIR resources, source systems, API.</a:t>
             </a:r>
             <a:endParaRPr lang="en-US" sz="2100" dirty="0"/>
           </a:p>
@@ -9051,17 +9195,17 @@
         </p:nvSpPr>
         <p:spPr>
           <a:xfrm>
-            <a:off x="7799832" y="1828800"/>
-            <a:ext cx="3145536" cy="685800"/>
-          </a:xfrm>
-          <a:prstGeom prst="rect">
-            <a:avLst/>
-          </a:prstGeom>
-          <a:noFill/>
-          <a:ln/>
-        </p:spPr>
-        <p:txBody>
-          <a:bodyPr wrap="square" lIns="0" tIns="0" rIns="0" bIns="0" rtlCol="0" anchor="t">
+            <a:off x="7799832" y="1801368"/>
+            <a:ext cx="3145536" cy="758952"/>
+          </a:xfrm>
+          <a:prstGeom prst="rect">
+            <a:avLst/>
+          </a:prstGeom>
+          <a:noFill/>
+          <a:ln/>
+        </p:spPr>
+        <p:txBody>
+          <a:bodyPr wrap="square" lIns="254" tIns="254" rIns="254" bIns="254" rtlCol="0" anchor="t">
             <a:normAutofit/>
           </a:bodyPr>
           <a:lstStyle/>
@@ -9070,7 +9214,7 @@
               <a:buNone/>
             </a:pPr>
             <a:r>
-              <a:rPr lang="en-US" sz="1550" dirty="0">
+              <a:rPr lang="en-US" sz="1320" dirty="0">
                 <a:solidFill>
                   <a:srgbClr val="17364A"/>
                 </a:solidFill>
@@ -9080,7 +9224,7 @@
               </a:rPr>
               <a:t>Create a FHIR data needs worksheet for one AI-supported public health use case.</a:t>
             </a:r>
-            <a:endParaRPr lang="en-US" sz="1550" dirty="0"/>
+            <a:endParaRPr lang="en-US" sz="1320" dirty="0"/>
           </a:p>
         </p:txBody>
       </p:sp>
@@ -9168,13 +9312,16 @@
           <a:ln/>
         </p:spPr>
         <p:txBody>
-          <a:bodyPr wrap="square" lIns="254" tIns="254" rIns="254" bIns="254" rtlCol="0" anchor="t">
+          <a:bodyPr wrap="square" lIns="508" tIns="508" rIns="508" bIns="508" rtlCol="0" anchor="t">
             <a:normAutofit/>
           </a:bodyPr>
           <a:lstStyle/>
           <a:p>
-            <a:r>
-              <a:rPr lang="en-US" sz="1380" dirty="0">
+            <a:pPr indent="0" marL="0">
+              <a:buNone/>
+            </a:pPr>
+            <a:r>
+              <a:rPr lang="en-US" sz="1220" dirty="0">
                 <a:solidFill>
                   <a:srgbClr val="17364A"/>
                 </a:solidFill>
@@ -9182,13 +9329,16 @@
                 <a:ea typeface="Aptos" pitchFamily="34" charset="-122"/>
                 <a:cs typeface="Aptos" pitchFamily="34" charset="-120"/>
               </a:rPr>
-              <a:t>Create a FHIR data needs worksheet for one AI-supported public health use case.</a:t>
-            </a:r>
-            <a:endParaRPr lang="en-US" sz="1380" dirty="0"/>
-          </a:p>
-          <a:p>
-            <a:r>
-              <a:rPr lang="en-US" sz="1380" dirty="0">
+              <a:t>Create a FHIR data needs worksheet for one AI-supported public.</a:t>
+            </a:r>
+            <a:endParaRPr lang="en-US" sz="1220" dirty="0"/>
+          </a:p>
+          <a:p>
+            <a:pPr indent="0" marL="0">
+              <a:buNone/>
+            </a:pPr>
+            <a:r>
+              <a:rPr lang="en-US" sz="1220" dirty="0">
                 <a:solidFill>
                   <a:srgbClr val="17364A"/>
                 </a:solidFill>
@@ -9196,9 +9346,9 @@
                 <a:ea typeface="Aptos" pitchFamily="34" charset="-122"/>
                 <a:cs typeface="Aptos" pitchFamily="34" charset="-120"/>
               </a:rPr>
-              <a:t>Include the use case, required data elements, relevant FHIR resources, source systems, API.</a:t>
-            </a:r>
-            <a:endParaRPr lang="en-US" sz="1380" dirty="0"/>
+              <a:t>Include the use case, required data elements, relevant FHIR.</a:t>
+            </a:r>
+            <a:endParaRPr lang="en-US" sz="1220" dirty="0"/>
           </a:p>
         </p:txBody>
       </p:sp>
@@ -9276,17 +9426,17 @@
         </p:nvSpPr>
         <p:spPr>
           <a:xfrm>
-            <a:off x="7799832" y="5001768"/>
-            <a:ext cx="3145536" cy="502920"/>
-          </a:xfrm>
-          <a:prstGeom prst="rect">
-            <a:avLst/>
-          </a:prstGeom>
-          <a:noFill/>
-          <a:ln/>
-        </p:spPr>
-        <p:txBody>
-          <a:bodyPr wrap="square" lIns="0" tIns="0" rIns="0" bIns="0" rtlCol="0" anchor="t">
+            <a:off x="7799832" y="4974336"/>
+            <a:ext cx="3145536" cy="576072"/>
+          </a:xfrm>
+          <a:prstGeom prst="rect">
+            <a:avLst/>
+          </a:prstGeom>
+          <a:noFill/>
+          <a:ln/>
+        </p:spPr>
+        <p:txBody>
+          <a:bodyPr wrap="square" lIns="254" tIns="254" rIns="254" bIns="254" rtlCol="0" anchor="t">
             <a:normAutofit/>
           </a:bodyPr>
           <a:lstStyle/>
@@ -9295,7 +9445,7 @@
               <a:buNone/>
             </a:pPr>
             <a:r>
-              <a:rPr lang="en-US" sz="1550" dirty="0">
+              <a:rPr lang="en-US" sz="1320" dirty="0">
                 <a:solidFill>
                   <a:srgbClr val="17364A"/>
                 </a:solidFill>
@@ -9303,9 +9453,9 @@
                 <a:ea typeface="Aptos" pitchFamily="34" charset="-122"/>
                 <a:cs typeface="Aptos" pitchFamily="34" charset="-120"/>
               </a:rPr>
-              <a:t>Use the assignment to test whether you can explain the concept, apply it to a realistic public health situation, and identify what would need review before the work moves forward.</a:t>
-            </a:r>
-            <a:endParaRPr lang="en-US" sz="1550" dirty="0"/>
+              <a:t>Use the assignment to test whether you can explain the concept, apply it to a realistic public health situation, and.</a:t>
+            </a:r>
+            <a:endParaRPr lang="en-US" sz="1320" dirty="0"/>
           </a:p>
         </p:txBody>
       </p:sp>
@@ -9606,49 +9756,58 @@
           <a:ln/>
         </p:spPr>
         <p:txBody>
-          <a:bodyPr wrap="square" lIns="635" tIns="635" rIns="635" bIns="635" rtlCol="0" anchor="t">
+          <a:bodyPr wrap="square" lIns="1016" tIns="1016" rIns="1016" bIns="1016" rtlCol="0" anchor="t">
             <a:normAutofit/>
           </a:bodyPr>
           <a:lstStyle/>
           <a:p>
+            <a:pPr indent="0" marL="0">
+              <a:buNone/>
+            </a:pPr>
             <a:r>
               <a:rPr lang="en-US" sz="2100" dirty="0">
                 <a:solidFill>
-                  <a:srgbClr val="17364A"/>
-                </a:solidFill>
-                <a:latin typeface="Aptos" pitchFamily="34" charset="0"/>
-                <a:ea typeface="Aptos" pitchFamily="34" charset="-122"/>
-                <a:cs typeface="Aptos" pitchFamily="34" charset="-120"/>
-              </a:rPr>
-              <a:t>FHIR data needs worksheet</a:t>
+                  <a:srgbClr val="003A63"/>
+                </a:solidFill>
+                <a:latin typeface="Aptos" pitchFamily="34" charset="0"/>
+                <a:ea typeface="Aptos" pitchFamily="34" charset="-122"/>
+                <a:cs typeface="Aptos" pitchFamily="34" charset="-120"/>
+              </a:rPr>
+              <a:t>• FHIR data needs worksheet</a:t>
             </a:r>
             <a:endParaRPr lang="en-US" sz="2100" dirty="0"/>
           </a:p>
           <a:p>
+            <a:pPr indent="0" marL="0">
+              <a:buNone/>
+            </a:pPr>
             <a:r>
               <a:rPr lang="en-US" sz="2100" dirty="0">
                 <a:solidFill>
-                  <a:srgbClr val="17364A"/>
-                </a:solidFill>
-                <a:latin typeface="Aptos" pitchFamily="34" charset="0"/>
-                <a:ea typeface="Aptos" pitchFamily="34" charset="-122"/>
-                <a:cs typeface="Aptos" pitchFamily="34" charset="-120"/>
-              </a:rPr>
-              <a:t>List of relevant FHIR resources</a:t>
+                  <a:srgbClr val="003A63"/>
+                </a:solidFill>
+                <a:latin typeface="Aptos" pitchFamily="34" charset="0"/>
+                <a:ea typeface="Aptos" pitchFamily="34" charset="-122"/>
+                <a:cs typeface="Aptos" pitchFamily="34" charset="-120"/>
+              </a:rPr>
+              <a:t>• List of relevant FHIR resources</a:t>
             </a:r>
             <a:endParaRPr lang="en-US" sz="2100" dirty="0"/>
           </a:p>
           <a:p>
+            <a:pPr indent="0" marL="0">
+              <a:buNone/>
+            </a:pPr>
             <a:r>
               <a:rPr lang="en-US" sz="2100" dirty="0">
                 <a:solidFill>
-                  <a:srgbClr val="17364A"/>
-                </a:solidFill>
-                <a:latin typeface="Aptos" pitchFamily="34" charset="0"/>
-                <a:ea typeface="Aptos" pitchFamily="34" charset="-122"/>
-                <a:cs typeface="Aptos" pitchFamily="34" charset="-120"/>
-              </a:rPr>
-              <a:t>Vendor or implementation questions</a:t>
+                  <a:srgbClr val="003A63"/>
+                </a:solidFill>
+                <a:latin typeface="Aptos" pitchFamily="34" charset="0"/>
+                <a:ea typeface="Aptos" pitchFamily="34" charset="-122"/>
+                <a:cs typeface="Aptos" pitchFamily="34" charset="-120"/>
+              </a:rPr>
+              <a:t>• Vendor or implementation questions</a:t>
             </a:r>
             <a:endParaRPr lang="en-US" sz="2100" dirty="0"/>
           </a:p>
@@ -9728,17 +9887,17 @@
         </p:nvSpPr>
         <p:spPr>
           <a:xfrm>
-            <a:off x="7799832" y="1828800"/>
-            <a:ext cx="3145536" cy="685800"/>
-          </a:xfrm>
-          <a:prstGeom prst="rect">
-            <a:avLst/>
-          </a:prstGeom>
-          <a:noFill/>
-          <a:ln/>
-        </p:spPr>
-        <p:txBody>
-          <a:bodyPr wrap="square" lIns="0" tIns="0" rIns="0" bIns="0" rtlCol="0" anchor="t">
+            <a:off x="7799832" y="1801368"/>
+            <a:ext cx="3145536" cy="758952"/>
+          </a:xfrm>
+          <a:prstGeom prst="rect">
+            <a:avLst/>
+          </a:prstGeom>
+          <a:noFill/>
+          <a:ln/>
+        </p:spPr>
+        <p:txBody>
+          <a:bodyPr wrap="square" lIns="254" tIns="254" rIns="254" bIns="254" rtlCol="0" anchor="t">
             <a:normAutofit/>
           </a:bodyPr>
           <a:lstStyle/>
@@ -9747,7 +9906,7 @@
               <a:buNone/>
             </a:pPr>
             <a:r>
-              <a:rPr lang="en-US" sz="1550" dirty="0">
+              <a:rPr lang="en-US" sz="1320" dirty="0">
                 <a:solidFill>
                   <a:srgbClr val="17364A"/>
                 </a:solidFill>
@@ -9757,7 +9916,7 @@
               </a:rPr>
               <a:t>FHIR data needs worksheet</a:t>
             </a:r>
-            <a:endParaRPr lang="en-US" sz="1550" dirty="0"/>
+            <a:endParaRPr lang="en-US" sz="1320" dirty="0"/>
           </a:p>
         </p:txBody>
       </p:sp>
@@ -9845,13 +10004,16 @@
           <a:ln/>
         </p:spPr>
         <p:txBody>
-          <a:bodyPr wrap="square" lIns="254" tIns="254" rIns="254" bIns="254" rtlCol="0" anchor="t">
+          <a:bodyPr wrap="square" lIns="508" tIns="508" rIns="508" bIns="508" rtlCol="0" anchor="t">
             <a:normAutofit/>
           </a:bodyPr>
           <a:lstStyle/>
           <a:p>
-            <a:r>
-              <a:rPr lang="en-US" sz="1380" dirty="0">
+            <a:pPr indent="0" marL="0">
+              <a:buNone/>
+            </a:pPr>
+            <a:r>
+              <a:rPr lang="en-US" sz="1220" dirty="0">
                 <a:solidFill>
                   <a:srgbClr val="17364A"/>
                 </a:solidFill>
@@ -9861,11 +10023,14 @@
               </a:rPr>
               <a:t>FHIR data needs worksheet</a:t>
             </a:r>
-            <a:endParaRPr lang="en-US" sz="1380" dirty="0"/>
-          </a:p>
-          <a:p>
-            <a:r>
-              <a:rPr lang="en-US" sz="1380" dirty="0">
+            <a:endParaRPr lang="en-US" sz="1220" dirty="0"/>
+          </a:p>
+          <a:p>
+            <a:pPr indent="0" marL="0">
+              <a:buNone/>
+            </a:pPr>
+            <a:r>
+              <a:rPr lang="en-US" sz="1220" dirty="0">
                 <a:solidFill>
                   <a:srgbClr val="17364A"/>
                 </a:solidFill>
@@ -9875,11 +10040,14 @@
               </a:rPr>
               <a:t>List of relevant FHIR resources</a:t>
             </a:r>
-            <a:endParaRPr lang="en-US" sz="1380" dirty="0"/>
-          </a:p>
-          <a:p>
-            <a:r>
-              <a:rPr lang="en-US" sz="1380" dirty="0">
+            <a:endParaRPr lang="en-US" sz="1220" dirty="0"/>
+          </a:p>
+          <a:p>
+            <a:pPr indent="0" marL="0">
+              <a:buNone/>
+            </a:pPr>
+            <a:r>
+              <a:rPr lang="en-US" sz="1220" dirty="0">
                 <a:solidFill>
                   <a:srgbClr val="17364A"/>
                 </a:solidFill>
@@ -9889,7 +10057,7 @@
               </a:rPr>
               <a:t>Vendor or implementation questions</a:t>
             </a:r>
-            <a:endParaRPr lang="en-US" sz="1380" dirty="0"/>
+            <a:endParaRPr lang="en-US" sz="1220" dirty="0"/>
           </a:p>
         </p:txBody>
       </p:sp>
@@ -9967,17 +10135,17 @@
         </p:nvSpPr>
         <p:spPr>
           <a:xfrm>
-            <a:off x="7799832" y="5001768"/>
-            <a:ext cx="3145536" cy="502920"/>
-          </a:xfrm>
-          <a:prstGeom prst="rect">
-            <a:avLst/>
-          </a:prstGeom>
-          <a:noFill/>
-          <a:ln/>
-        </p:spPr>
-        <p:txBody>
-          <a:bodyPr wrap="square" lIns="0" tIns="0" rIns="0" bIns="0" rtlCol="0" anchor="t">
+            <a:off x="7799832" y="4974336"/>
+            <a:ext cx="3145536" cy="576072"/>
+          </a:xfrm>
+          <a:prstGeom prst="rect">
+            <a:avLst/>
+          </a:prstGeom>
+          <a:noFill/>
+          <a:ln/>
+        </p:spPr>
+        <p:txBody>
+          <a:bodyPr wrap="square" lIns="254" tIns="254" rIns="254" bIns="254" rtlCol="0" anchor="t">
             <a:normAutofit/>
           </a:bodyPr>
           <a:lstStyle/>
@@ -9986,7 +10154,7 @@
               <a:buNone/>
             </a:pPr>
             <a:r>
-              <a:rPr lang="en-US" sz="1550" dirty="0">
+              <a:rPr lang="en-US" sz="1320" dirty="0">
                 <a:solidFill>
                   <a:srgbClr val="17364A"/>
                 </a:solidFill>
@@ -9994,9 +10162,9 @@
                 <a:ea typeface="Aptos" pitchFamily="34" charset="-122"/>
                 <a:cs typeface="Aptos" pitchFamily="34" charset="-120"/>
               </a:rPr>
-              <a:t>Connect the concept to public health purpose, responsible use, required safeguards, documentation, and the next action a department should take.</a:t>
-            </a:r>
-            <a:endParaRPr lang="en-US" sz="1550" dirty="0"/>
+              <a:t>Connect the concept to public health purpose, responsible use, required safeguards, documentation, and the next action a.</a:t>
+            </a:r>
+            <a:endParaRPr lang="en-US" sz="1320" dirty="0"/>
           </a:p>
         </p:txBody>
       </p:sp>
@@ -10297,49 +10465,58 @@
           <a:ln/>
         </p:spPr>
         <p:txBody>
-          <a:bodyPr wrap="square" lIns="635" tIns="635" rIns="635" bIns="635" rtlCol="0" anchor="t">
+          <a:bodyPr wrap="square" lIns="1016" tIns="1016" rIns="1016" bIns="1016" rtlCol="0" anchor="t">
             <a:normAutofit/>
           </a:bodyPr>
           <a:lstStyle/>
           <a:p>
+            <a:pPr indent="0" marL="0">
+              <a:buNone/>
+            </a:pPr>
             <a:r>
               <a:rPr lang="en-US" sz="2100" dirty="0">
                 <a:solidFill>
-                  <a:srgbClr val="17364A"/>
-                </a:solidFill>
-                <a:latin typeface="Aptos" pitchFamily="34" charset="0"/>
-                <a:ea typeface="Aptos" pitchFamily="34" charset="-122"/>
-                <a:cs typeface="Aptos" pitchFamily="34" charset="-120"/>
-              </a:rPr>
-              <a:t>FHIR is increasingly important for public health because it supports structured, API-based access to health data.</a:t>
+                  <a:srgbClr val="003A63"/>
+                </a:solidFill>
+                <a:latin typeface="Aptos" pitchFamily="34" charset="0"/>
+                <a:ea typeface="Aptos" pitchFamily="34" charset="-122"/>
+                <a:cs typeface="Aptos" pitchFamily="34" charset="-120"/>
+              </a:rPr>
+              <a:t>• FHIR is increasingly important for public health because it supports structured, API-based.</a:t>
             </a:r>
             <a:endParaRPr lang="en-US" sz="2100" dirty="0"/>
           </a:p>
           <a:p>
+            <a:pPr indent="0" marL="0">
+              <a:buNone/>
+            </a:pPr>
             <a:r>
               <a:rPr lang="en-US" sz="2100" dirty="0">
                 <a:solidFill>
-                  <a:srgbClr val="17364A"/>
-                </a:solidFill>
-                <a:latin typeface="Aptos" pitchFamily="34" charset="0"/>
-                <a:ea typeface="Aptos" pitchFamily="34" charset="-122"/>
-                <a:cs typeface="Aptos" pitchFamily="34" charset="-120"/>
-              </a:rPr>
-              <a:t>Public health staff do not need to become FHIR developers to participate in AI planning, but they do need to.</a:t>
+                  <a:srgbClr val="003A63"/>
+                </a:solidFill>
+                <a:latin typeface="Aptos" pitchFamily="34" charset="0"/>
+                <a:ea typeface="Aptos" pitchFamily="34" charset="-122"/>
+                <a:cs typeface="Aptos" pitchFamily="34" charset="-120"/>
+              </a:rPr>
+              <a:t>• Public health staff do not need to become FHIR developers to participate in AI planning, but.</a:t>
             </a:r>
             <a:endParaRPr lang="en-US" sz="2100" dirty="0"/>
           </a:p>
           <a:p>
+            <a:pPr indent="0" marL="0">
+              <a:buNone/>
+            </a:pPr>
             <a:r>
               <a:rPr lang="en-US" sz="2100" dirty="0">
                 <a:solidFill>
-                  <a:srgbClr val="17364A"/>
-                </a:solidFill>
-                <a:latin typeface="Aptos" pitchFamily="34" charset="0"/>
-                <a:ea typeface="Aptos" pitchFamily="34" charset="-122"/>
-                <a:cs typeface="Aptos" pitchFamily="34" charset="-120"/>
-              </a:rPr>
-              <a:t>This module explains how FHIR resources, profiles, implementation guides, and APIs may support AI-enabled public.</a:t>
+                  <a:srgbClr val="003A63"/>
+                </a:solidFill>
+                <a:latin typeface="Aptos" pitchFamily="34" charset="0"/>
+                <a:ea typeface="Aptos" pitchFamily="34" charset="-122"/>
+                <a:cs typeface="Aptos" pitchFamily="34" charset="-120"/>
+              </a:rPr>
+              <a:t>• This module explains how FHIR resources, profiles, implementation guides, and APIs may support.</a:t>
             </a:r>
             <a:endParaRPr lang="en-US" sz="2100" dirty="0"/>
           </a:p>
@@ -10419,17 +10596,17 @@
         </p:nvSpPr>
         <p:spPr>
           <a:xfrm>
-            <a:off x="8074152" y="1920240"/>
-            <a:ext cx="2825496" cy="1280160"/>
-          </a:xfrm>
-          <a:prstGeom prst="rect">
-            <a:avLst/>
-          </a:prstGeom>
-          <a:noFill/>
-          <a:ln/>
-        </p:spPr>
-        <p:txBody>
-          <a:bodyPr wrap="square" lIns="0" tIns="0" rIns="0" bIns="0" rtlCol="0" anchor="t">
+            <a:off x="8074152" y="1892808"/>
+            <a:ext cx="2825496" cy="1353312"/>
+          </a:xfrm>
+          <a:prstGeom prst="rect">
+            <a:avLst/>
+          </a:prstGeom>
+          <a:noFill/>
+          <a:ln/>
+        </p:spPr>
+        <p:txBody>
+          <a:bodyPr wrap="square" lIns="254" tIns="254" rIns="254" bIns="254" rtlCol="0" anchor="t">
             <a:normAutofit/>
           </a:bodyPr>
           <a:lstStyle/>
@@ -10438,7 +10615,7 @@
               <a:buNone/>
             </a:pPr>
             <a:r>
-              <a:rPr lang="en-US" sz="1550" dirty="0">
+              <a:rPr lang="en-US" sz="1320" dirty="0">
                 <a:solidFill>
                   <a:srgbClr val="17364A"/>
                 </a:solidFill>
@@ -10446,43 +10623,9 @@
                 <a:ea typeface="Aptos" pitchFamily="34" charset="-122"/>
                 <a:cs typeface="Aptos" pitchFamily="34" charset="-120"/>
               </a:rPr>
-              <a:t>Level: applied/foundational</a:t>
-            </a:r>
-            <a:endParaRPr lang="en-US" sz="1550" dirty="0"/>
-          </a:p>
-          <a:p>
-            <a:pPr indent="0" marL="0">
-              <a:buNone/>
-            </a:pPr>
-            <a:r>
-              <a:rPr lang="en-US" sz="1550" dirty="0">
-                <a:solidFill>
-                  <a:srgbClr val="17364A"/>
-                </a:solidFill>
-                <a:latin typeface="Aptos" pitchFamily="34" charset="0"/>
-                <a:ea typeface="Aptos" pitchFamily="34" charset="-122"/>
-                <a:cs typeface="Aptos" pitchFamily="34" charset="-120"/>
-              </a:rPr>
-              <a:t>Primary track: Technical Architecture Track</a:t>
-            </a:r>
-            <a:endParaRPr lang="en-US" sz="1550" dirty="0"/>
-          </a:p>
-          <a:p>
-            <a:pPr indent="0" marL="0">
-              <a:buNone/>
-            </a:pPr>
-            <a:r>
-              <a:rPr lang="en-US" sz="1550" dirty="0">
-                <a:solidFill>
-                  <a:srgbClr val="17364A"/>
-                </a:solidFill>
-                <a:latin typeface="Aptos" pitchFamily="34" charset="0"/>
-                <a:ea typeface="Aptos" pitchFamily="34" charset="-122"/>
-                <a:cs typeface="Aptos" pitchFamily="34" charset="-120"/>
-              </a:rPr>
-              <a:t>Appears in tracks: technical-architecture</a:t>
-            </a:r>
-            <a:endParaRPr lang="en-US" sz="1550" dirty="0"/>
+              <a:t>Level: applied/foundational Primary track: Technical Architecture Track Appears in tracks: technical-architecture</a:t>
+            </a:r>
+            <a:endParaRPr lang="en-US" sz="1320" dirty="0"/>
           </a:p>
         </p:txBody>
       </p:sp>
@@ -10570,13 +10713,16 @@
           <a:ln/>
         </p:spPr>
         <p:txBody>
-          <a:bodyPr wrap="square" lIns="254" tIns="254" rIns="254" bIns="254" rtlCol="0" anchor="t">
+          <a:bodyPr wrap="square" lIns="508" tIns="508" rIns="508" bIns="508" rtlCol="0" anchor="t">
             <a:normAutofit/>
           </a:bodyPr>
           <a:lstStyle/>
           <a:p>
-            <a:r>
-              <a:rPr lang="en-US" sz="1380" dirty="0">
+            <a:pPr indent="0" marL="0">
+              <a:buNone/>
+            </a:pPr>
+            <a:r>
+              <a:rPr lang="en-US" sz="1220" dirty="0">
                 <a:solidFill>
                   <a:srgbClr val="17364A"/>
                 </a:solidFill>
@@ -10586,11 +10732,14 @@
               </a:rPr>
               <a:t>Read the module for shared vocabulary and context.</a:t>
             </a:r>
-            <a:endParaRPr lang="en-US" sz="1380" dirty="0"/>
-          </a:p>
-          <a:p>
-            <a:r>
-              <a:rPr lang="en-US" sz="1380" dirty="0">
+            <a:endParaRPr lang="en-US" sz="1220" dirty="0"/>
+          </a:p>
+          <a:p>
+            <a:pPr indent="0" marL="0">
+              <a:buNone/>
+            </a:pPr>
+            <a:r>
+              <a:rPr lang="en-US" sz="1220" dirty="0">
                 <a:solidFill>
                   <a:srgbClr val="17364A"/>
                 </a:solidFill>
@@ -10600,11 +10749,14 @@
               </a:rPr>
               <a:t>Complete the practical exercise to apply the concept.</a:t>
             </a:r>
-            <a:endParaRPr lang="en-US" sz="1380" dirty="0"/>
-          </a:p>
-          <a:p>
-            <a:r>
-              <a:rPr lang="en-US" sz="1380" dirty="0">
+            <a:endParaRPr lang="en-US" sz="1220" dirty="0"/>
+          </a:p>
+          <a:p>
+            <a:pPr indent="0" marL="0">
+              <a:buNone/>
+            </a:pPr>
+            <a:r>
+              <a:rPr lang="en-US" sz="1220" dirty="0">
                 <a:solidFill>
                   <a:srgbClr val="17364A"/>
                 </a:solidFill>
@@ -10614,7 +10766,7 @@
               </a:rPr>
               <a:t>Use the notes and references for deeper review.</a:t>
             </a:r>
-            <a:endParaRPr lang="en-US" sz="1380" dirty="0"/>
+            <a:endParaRPr lang="en-US" sz="1220" dirty="0"/>
           </a:p>
         </p:txBody>
       </p:sp>
@@ -10915,21 +11067,24 @@
           <a:ln/>
         </p:spPr>
         <p:txBody>
-          <a:bodyPr wrap="square" lIns="635" tIns="635" rIns="635" bIns="635" rtlCol="0" anchor="t">
+          <a:bodyPr wrap="square" lIns="1016" tIns="1016" rIns="1016" bIns="1016" rtlCol="0" anchor="t">
             <a:normAutofit/>
           </a:bodyPr>
           <a:lstStyle/>
           <a:p>
+            <a:pPr indent="0" marL="0">
+              <a:buNone/>
+            </a:pPr>
             <a:r>
               <a:rPr lang="en-US" sz="2100" dirty="0">
                 <a:solidFill>
-                  <a:srgbClr val="17364A"/>
-                </a:solidFill>
-                <a:latin typeface="Aptos" pitchFamily="34" charset="0"/>
-                <a:ea typeface="Aptos" pitchFamily="34" charset="-122"/>
-                <a:cs typeface="Aptos" pitchFamily="34" charset="-120"/>
-              </a:rPr>
-              <a:t>Validation checklist</a:t>
+                  <a:srgbClr val="003A63"/>
+                </a:solidFill>
+                <a:latin typeface="Aptos" pitchFamily="34" charset="0"/>
+                <a:ea typeface="Aptos" pitchFamily="34" charset="-122"/>
+                <a:cs typeface="Aptos" pitchFamily="34" charset="-120"/>
+              </a:rPr>
+              <a:t>• Validation checklist</a:t>
             </a:r>
             <a:endParaRPr lang="en-US" sz="2100" dirty="0"/>
           </a:p>
@@ -11009,17 +11164,17 @@
         </p:nvSpPr>
         <p:spPr>
           <a:xfrm>
-            <a:off x="7799832" y="1828800"/>
-            <a:ext cx="3145536" cy="685800"/>
-          </a:xfrm>
-          <a:prstGeom prst="rect">
-            <a:avLst/>
-          </a:prstGeom>
-          <a:noFill/>
-          <a:ln/>
-        </p:spPr>
-        <p:txBody>
-          <a:bodyPr wrap="square" lIns="0" tIns="0" rIns="0" bIns="0" rtlCol="0" anchor="t">
+            <a:off x="7799832" y="1801368"/>
+            <a:ext cx="3145536" cy="758952"/>
+          </a:xfrm>
+          <a:prstGeom prst="rect">
+            <a:avLst/>
+          </a:prstGeom>
+          <a:noFill/>
+          <a:ln/>
+        </p:spPr>
+        <p:txBody>
+          <a:bodyPr wrap="square" lIns="254" tIns="254" rIns="254" bIns="254" rtlCol="0" anchor="t">
             <a:normAutofit/>
           </a:bodyPr>
           <a:lstStyle/>
@@ -11028,7 +11183,7 @@
               <a:buNone/>
             </a:pPr>
             <a:r>
-              <a:rPr lang="en-US" sz="1550" dirty="0">
+              <a:rPr lang="en-US" sz="1320" dirty="0">
                 <a:solidFill>
                   <a:srgbClr val="17364A"/>
                 </a:solidFill>
@@ -11038,7 +11193,7 @@
               </a:rPr>
               <a:t>Validation checklist</a:t>
             </a:r>
-            <a:endParaRPr lang="en-US" sz="1550" dirty="0"/>
+            <a:endParaRPr lang="en-US" sz="1320" dirty="0"/>
           </a:p>
         </p:txBody>
       </p:sp>
@@ -11126,13 +11281,16 @@
           <a:ln/>
         </p:spPr>
         <p:txBody>
-          <a:bodyPr wrap="square" lIns="254" tIns="254" rIns="254" bIns="254" rtlCol="0" anchor="t">
+          <a:bodyPr wrap="square" lIns="508" tIns="508" rIns="508" bIns="508" rtlCol="0" anchor="t">
             <a:normAutofit/>
           </a:bodyPr>
           <a:lstStyle/>
           <a:p>
-            <a:r>
-              <a:rPr lang="en-US" sz="1380" dirty="0">
+            <a:pPr indent="0" marL="0">
+              <a:buNone/>
+            </a:pPr>
+            <a:r>
+              <a:rPr lang="en-US" sz="1220" dirty="0">
                 <a:solidFill>
                   <a:srgbClr val="17364A"/>
                 </a:solidFill>
@@ -11142,7 +11300,7 @@
               </a:rPr>
               <a:t>Validation checklist</a:t>
             </a:r>
-            <a:endParaRPr lang="en-US" sz="1380" dirty="0"/>
+            <a:endParaRPr lang="en-US" sz="1220" dirty="0"/>
           </a:p>
         </p:txBody>
       </p:sp>
@@ -11220,17 +11378,17 @@
         </p:nvSpPr>
         <p:spPr>
           <a:xfrm>
-            <a:off x="7799832" y="5001768"/>
-            <a:ext cx="3145536" cy="502920"/>
-          </a:xfrm>
-          <a:prstGeom prst="rect">
-            <a:avLst/>
-          </a:prstGeom>
-          <a:noFill/>
-          <a:ln/>
-        </p:spPr>
-        <p:txBody>
-          <a:bodyPr wrap="square" lIns="0" tIns="0" rIns="0" bIns="0" rtlCol="0" anchor="t">
+            <a:off x="7799832" y="4974336"/>
+            <a:ext cx="3145536" cy="576072"/>
+          </a:xfrm>
+          <a:prstGeom prst="rect">
+            <a:avLst/>
+          </a:prstGeom>
+          <a:noFill/>
+          <a:ln/>
+        </p:spPr>
+        <p:txBody>
+          <a:bodyPr wrap="square" lIns="254" tIns="254" rIns="254" bIns="254" rtlCol="0" anchor="t">
             <a:normAutofit/>
           </a:bodyPr>
           <a:lstStyle/>
@@ -11239,7 +11397,7 @@
               <a:buNone/>
             </a:pPr>
             <a:r>
-              <a:rPr lang="en-US" sz="1550" dirty="0">
+              <a:rPr lang="en-US" sz="1320" dirty="0">
                 <a:solidFill>
                   <a:srgbClr val="17364A"/>
                 </a:solidFill>
@@ -11247,9 +11405,9 @@
                 <a:ea typeface="Aptos" pitchFamily="34" charset="-122"/>
                 <a:cs typeface="Aptos" pitchFamily="34" charset="-120"/>
               </a:rPr>
-              <a:t>Connect the concept to public health purpose, responsible use, required safeguards, documentation, and the next action a department should take.</a:t>
-            </a:r>
-            <a:endParaRPr lang="en-US" sz="1550" dirty="0"/>
+              <a:t>Connect the concept to public health purpose, responsible use, required safeguards, documentation, and the next action a.</a:t>
+            </a:r>
+            <a:endParaRPr lang="en-US" sz="1320" dirty="0"/>
           </a:p>
         </p:txBody>
       </p:sp>
@@ -11550,49 +11708,58 @@
           <a:ln/>
         </p:spPr>
         <p:txBody>
-          <a:bodyPr wrap="square" lIns="635" tIns="635" rIns="635" bIns="635" rtlCol="0" anchor="t">
+          <a:bodyPr wrap="square" lIns="1016" tIns="1016" rIns="1016" bIns="1016" rtlCol="0" anchor="t">
             <a:normAutofit/>
           </a:bodyPr>
           <a:lstStyle/>
           <a:p>
+            <a:pPr indent="0" marL="0">
+              <a:buNone/>
+            </a:pPr>
             <a:r>
               <a:rPr lang="en-US" sz="2100" dirty="0">
                 <a:solidFill>
-                  <a:srgbClr val="17364A"/>
-                </a:solidFill>
-                <a:latin typeface="Aptos" pitchFamily="34" charset="0"/>
-                <a:ea typeface="Aptos" pitchFamily="34" charset="-122"/>
-                <a:cs typeface="Aptos" pitchFamily="34" charset="-120"/>
-              </a:rPr>
-              <a:t>FHIR data needs worksheet</a:t>
+                  <a:srgbClr val="003A63"/>
+                </a:solidFill>
+                <a:latin typeface="Aptos" pitchFamily="34" charset="0"/>
+                <a:ea typeface="Aptos" pitchFamily="34" charset="-122"/>
+                <a:cs typeface="Aptos" pitchFamily="34" charset="-120"/>
+              </a:rPr>
+              <a:t>• FHIR data needs worksheet</a:t>
             </a:r>
             <a:endParaRPr lang="en-US" sz="2100" dirty="0"/>
           </a:p>
           <a:p>
+            <a:pPr indent="0" marL="0">
+              <a:buNone/>
+            </a:pPr>
             <a:r>
               <a:rPr lang="en-US" sz="2100" dirty="0">
                 <a:solidFill>
-                  <a:srgbClr val="17364A"/>
-                </a:solidFill>
-                <a:latin typeface="Aptos" pitchFamily="34" charset="0"/>
-                <a:ea typeface="Aptos" pitchFamily="34" charset="-122"/>
-                <a:cs typeface="Aptos" pitchFamily="34" charset="-120"/>
-              </a:rPr>
-              <a:t>List of relevant FHIR resources</a:t>
+                  <a:srgbClr val="003A63"/>
+                </a:solidFill>
+                <a:latin typeface="Aptos" pitchFamily="34" charset="0"/>
+                <a:ea typeface="Aptos" pitchFamily="34" charset="-122"/>
+                <a:cs typeface="Aptos" pitchFamily="34" charset="-120"/>
+              </a:rPr>
+              <a:t>• List of relevant FHIR resources</a:t>
             </a:r>
             <a:endParaRPr lang="en-US" sz="2100" dirty="0"/>
           </a:p>
           <a:p>
+            <a:pPr indent="0" marL="0">
+              <a:buNone/>
+            </a:pPr>
             <a:r>
               <a:rPr lang="en-US" sz="2100" dirty="0">
                 <a:solidFill>
-                  <a:srgbClr val="17364A"/>
-                </a:solidFill>
-                <a:latin typeface="Aptos" pitchFamily="34" charset="0"/>
-                <a:ea typeface="Aptos" pitchFamily="34" charset="-122"/>
-                <a:cs typeface="Aptos" pitchFamily="34" charset="-120"/>
-              </a:rPr>
-              <a:t>Vendor or implementation questions</a:t>
+                  <a:srgbClr val="003A63"/>
+                </a:solidFill>
+                <a:latin typeface="Aptos" pitchFamily="34" charset="0"/>
+                <a:ea typeface="Aptos" pitchFamily="34" charset="-122"/>
+                <a:cs typeface="Aptos" pitchFamily="34" charset="-120"/>
+              </a:rPr>
+              <a:t>• Vendor or implementation questions</a:t>
             </a:r>
             <a:endParaRPr lang="en-US" sz="2100" dirty="0"/>
           </a:p>
@@ -11672,17 +11839,17 @@
         </p:nvSpPr>
         <p:spPr>
           <a:xfrm>
-            <a:off x="7799832" y="1828800"/>
-            <a:ext cx="3145536" cy="685800"/>
-          </a:xfrm>
-          <a:prstGeom prst="rect">
-            <a:avLst/>
-          </a:prstGeom>
-          <a:noFill/>
-          <a:ln/>
-        </p:spPr>
-        <p:txBody>
-          <a:bodyPr wrap="square" lIns="0" tIns="0" rIns="0" bIns="0" rtlCol="0" anchor="t">
+            <a:off x="7799832" y="1801368"/>
+            <a:ext cx="3145536" cy="758952"/>
+          </a:xfrm>
+          <a:prstGeom prst="rect">
+            <a:avLst/>
+          </a:prstGeom>
+          <a:noFill/>
+          <a:ln/>
+        </p:spPr>
+        <p:txBody>
+          <a:bodyPr wrap="square" lIns="254" tIns="254" rIns="254" bIns="254" rtlCol="0" anchor="t">
             <a:normAutofit/>
           </a:bodyPr>
           <a:lstStyle/>
@@ -11691,7 +11858,7 @@
               <a:buNone/>
             </a:pPr>
             <a:r>
-              <a:rPr lang="en-US" sz="1550" dirty="0">
+              <a:rPr lang="en-US" sz="1320" dirty="0">
                 <a:solidFill>
                   <a:srgbClr val="17364A"/>
                 </a:solidFill>
@@ -11701,7 +11868,7 @@
               </a:rPr>
               <a:t>FHIR data needs worksheet</a:t>
             </a:r>
-            <a:endParaRPr lang="en-US" sz="1550" dirty="0"/>
+            <a:endParaRPr lang="en-US" sz="1320" dirty="0"/>
           </a:p>
         </p:txBody>
       </p:sp>
@@ -11789,13 +11956,16 @@
           <a:ln/>
         </p:spPr>
         <p:txBody>
-          <a:bodyPr wrap="square" lIns="254" tIns="254" rIns="254" bIns="254" rtlCol="0" anchor="t">
+          <a:bodyPr wrap="square" lIns="508" tIns="508" rIns="508" bIns="508" rtlCol="0" anchor="t">
             <a:normAutofit/>
           </a:bodyPr>
           <a:lstStyle/>
           <a:p>
-            <a:r>
-              <a:rPr lang="en-US" sz="1380" dirty="0">
+            <a:pPr indent="0" marL="0">
+              <a:buNone/>
+            </a:pPr>
+            <a:r>
+              <a:rPr lang="en-US" sz="1220" dirty="0">
                 <a:solidFill>
                   <a:srgbClr val="17364A"/>
                 </a:solidFill>
@@ -11805,11 +11975,14 @@
               </a:rPr>
               <a:t>FHIR data needs worksheet</a:t>
             </a:r>
-            <a:endParaRPr lang="en-US" sz="1380" dirty="0"/>
-          </a:p>
-          <a:p>
-            <a:r>
-              <a:rPr lang="en-US" sz="1380" dirty="0">
+            <a:endParaRPr lang="en-US" sz="1220" dirty="0"/>
+          </a:p>
+          <a:p>
+            <a:pPr indent="0" marL="0">
+              <a:buNone/>
+            </a:pPr>
+            <a:r>
+              <a:rPr lang="en-US" sz="1220" dirty="0">
                 <a:solidFill>
                   <a:srgbClr val="17364A"/>
                 </a:solidFill>
@@ -11819,11 +11992,14 @@
               </a:rPr>
               <a:t>List of relevant FHIR resources</a:t>
             </a:r>
-            <a:endParaRPr lang="en-US" sz="1380" dirty="0"/>
-          </a:p>
-          <a:p>
-            <a:r>
-              <a:rPr lang="en-US" sz="1380" dirty="0">
+            <a:endParaRPr lang="en-US" sz="1220" dirty="0"/>
+          </a:p>
+          <a:p>
+            <a:pPr indent="0" marL="0">
+              <a:buNone/>
+            </a:pPr>
+            <a:r>
+              <a:rPr lang="en-US" sz="1220" dirty="0">
                 <a:solidFill>
                   <a:srgbClr val="17364A"/>
                 </a:solidFill>
@@ -11833,7 +12009,7 @@
               </a:rPr>
               <a:t>Vendor or implementation questions</a:t>
             </a:r>
-            <a:endParaRPr lang="en-US" sz="1380" dirty="0"/>
+            <a:endParaRPr lang="en-US" sz="1220" dirty="0"/>
           </a:p>
         </p:txBody>
       </p:sp>
@@ -11911,17 +12087,17 @@
         </p:nvSpPr>
         <p:spPr>
           <a:xfrm>
-            <a:off x="7799832" y="5001768"/>
-            <a:ext cx="3145536" cy="502920"/>
-          </a:xfrm>
-          <a:prstGeom prst="rect">
-            <a:avLst/>
-          </a:prstGeom>
-          <a:noFill/>
-          <a:ln/>
-        </p:spPr>
-        <p:txBody>
-          <a:bodyPr wrap="square" lIns="0" tIns="0" rIns="0" bIns="0" rtlCol="0" anchor="t">
+            <a:off x="7799832" y="4974336"/>
+            <a:ext cx="3145536" cy="576072"/>
+          </a:xfrm>
+          <a:prstGeom prst="rect">
+            <a:avLst/>
+          </a:prstGeom>
+          <a:noFill/>
+          <a:ln/>
+        </p:spPr>
+        <p:txBody>
+          <a:bodyPr wrap="square" lIns="254" tIns="254" rIns="254" bIns="254" rtlCol="0" anchor="t">
             <a:normAutofit/>
           </a:bodyPr>
           <a:lstStyle/>
@@ -11930,7 +12106,7 @@
               <a:buNone/>
             </a:pPr>
             <a:r>
-              <a:rPr lang="en-US" sz="1550" dirty="0">
+              <a:rPr lang="en-US" sz="1320" dirty="0">
                 <a:solidFill>
                   <a:srgbClr val="17364A"/>
                 </a:solidFill>
@@ -11938,9 +12114,9 @@
                 <a:ea typeface="Aptos" pitchFamily="34" charset="-122"/>
                 <a:cs typeface="Aptos" pitchFamily="34" charset="-120"/>
               </a:rPr>
-              <a:t>Use the assignment to test whether you can explain the concept, apply it to a realistic public health situation, and identify what would need review before the work moves forward.</a:t>
-            </a:r>
-            <a:endParaRPr lang="en-US" sz="1550" dirty="0"/>
+              <a:t>Use the assignment to test whether you can explain the concept, apply it to a realistic public health situation, and.</a:t>
+            </a:r>
+            <a:endParaRPr lang="en-US" sz="1320" dirty="0"/>
           </a:p>
         </p:txBody>
       </p:sp>
@@ -12241,49 +12417,58 @@
           <a:ln/>
         </p:spPr>
         <p:txBody>
-          <a:bodyPr wrap="square" lIns="635" tIns="635" rIns="635" bIns="635" rtlCol="0" anchor="t">
+          <a:bodyPr wrap="square" lIns="1016" tIns="1016" rIns="1016" bIns="1016" rtlCol="0" anchor="t">
             <a:normAutofit/>
           </a:bodyPr>
           <a:lstStyle/>
           <a:p>
+            <a:pPr indent="0" marL="0">
+              <a:buNone/>
+            </a:pPr>
             <a:r>
               <a:rPr lang="en-US" sz="2100" dirty="0">
                 <a:solidFill>
-                  <a:srgbClr val="17364A"/>
-                </a:solidFill>
-                <a:latin typeface="Aptos" pitchFamily="34" charset="0"/>
-                <a:ea typeface="Aptos" pitchFamily="34" charset="-122"/>
-                <a:cs typeface="Aptos" pitchFamily="34" charset="-120"/>
-              </a:rPr>
-              <a:t>1. What is a FHIR resource?</a:t>
+                  <a:srgbClr val="003A63"/>
+                </a:solidFill>
+                <a:latin typeface="Aptos" pitchFamily="34" charset="0"/>
+                <a:ea typeface="Aptos" pitchFamily="34" charset="-122"/>
+                <a:cs typeface="Aptos" pitchFamily="34" charset="-120"/>
+              </a:rPr>
+              <a:t>• 1. What is a FHIR resource?</a:t>
             </a:r>
             <a:endParaRPr lang="en-US" sz="2100" dirty="0"/>
           </a:p>
           <a:p>
+            <a:pPr indent="0" marL="0">
+              <a:buNone/>
+            </a:pPr>
             <a:r>
               <a:rPr lang="en-US" sz="2100" dirty="0">
                 <a:solidFill>
-                  <a:srgbClr val="17364A"/>
-                </a:solidFill>
-                <a:latin typeface="Aptos" pitchFamily="34" charset="0"/>
-                <a:ea typeface="Aptos" pitchFamily="34" charset="-122"/>
-                <a:cs typeface="Aptos" pitchFamily="34" charset="-120"/>
-              </a:rPr>
-              <a:t>2. Why does FHIR matter for AI-supported public health workflows?</a:t>
+                  <a:srgbClr val="003A63"/>
+                </a:solidFill>
+                <a:latin typeface="Aptos" pitchFamily="34" charset="0"/>
+                <a:ea typeface="Aptos" pitchFamily="34" charset="-122"/>
+                <a:cs typeface="Aptos" pitchFamily="34" charset="-120"/>
+              </a:rPr>
+              <a:t>• 2. Why does FHIR matter for AI-supported public health workflows?</a:t>
             </a:r>
             <a:endParaRPr lang="en-US" sz="2100" dirty="0"/>
           </a:p>
           <a:p>
+            <a:pPr indent="0" marL="0">
+              <a:buNone/>
+            </a:pPr>
             <a:r>
               <a:rPr lang="en-US" sz="2100" dirty="0">
                 <a:solidFill>
-                  <a:srgbClr val="17364A"/>
-                </a:solidFill>
-                <a:latin typeface="Aptos" pitchFamily="34" charset="0"/>
-                <a:ea typeface="Aptos" pitchFamily="34" charset="-122"/>
-                <a:cs typeface="Aptos" pitchFamily="34" charset="-120"/>
-              </a:rPr>
-              <a:t>3. What should staff verify when a vendor says a product is FHIR-compatible?</a:t>
+                  <a:srgbClr val="003A63"/>
+                </a:solidFill>
+                <a:latin typeface="Aptos" pitchFamily="34" charset="0"/>
+                <a:ea typeface="Aptos" pitchFamily="34" charset="-122"/>
+                <a:cs typeface="Aptos" pitchFamily="34" charset="-120"/>
+              </a:rPr>
+              <a:t>• 3. What should staff verify when a vendor says a product is FHIR-compatible?</a:t>
             </a:r>
             <a:endParaRPr lang="en-US" sz="2100" dirty="0"/>
           </a:p>
@@ -12363,17 +12548,17 @@
         </p:nvSpPr>
         <p:spPr>
           <a:xfrm>
-            <a:off x="7799832" y="1828800"/>
-            <a:ext cx="3145536" cy="685800"/>
-          </a:xfrm>
-          <a:prstGeom prst="rect">
-            <a:avLst/>
-          </a:prstGeom>
-          <a:noFill/>
-          <a:ln/>
-        </p:spPr>
-        <p:txBody>
-          <a:bodyPr wrap="square" lIns="0" tIns="0" rIns="0" bIns="0" rtlCol="0" anchor="t">
+            <a:off x="7799832" y="1801368"/>
+            <a:ext cx="3145536" cy="758952"/>
+          </a:xfrm>
+          <a:prstGeom prst="rect">
+            <a:avLst/>
+          </a:prstGeom>
+          <a:noFill/>
+          <a:ln/>
+        </p:spPr>
+        <p:txBody>
+          <a:bodyPr wrap="square" lIns="254" tIns="254" rIns="254" bIns="254" rtlCol="0" anchor="t">
             <a:normAutofit/>
           </a:bodyPr>
           <a:lstStyle/>
@@ -12382,7 +12567,7 @@
               <a:buNone/>
             </a:pPr>
             <a:r>
-              <a:rPr lang="en-US" sz="1550" dirty="0">
+              <a:rPr lang="en-US" sz="1320" dirty="0">
                 <a:solidFill>
                   <a:srgbClr val="17364A"/>
                 </a:solidFill>
@@ -12392,7 +12577,7 @@
               </a:rPr>
               <a:t>1. What is a FHIR resource?</a:t>
             </a:r>
-            <a:endParaRPr lang="en-US" sz="1550" dirty="0"/>
+            <a:endParaRPr lang="en-US" sz="1320" dirty="0"/>
           </a:p>
         </p:txBody>
       </p:sp>
@@ -12480,13 +12665,16 @@
           <a:ln/>
         </p:spPr>
         <p:txBody>
-          <a:bodyPr wrap="square" lIns="254" tIns="254" rIns="254" bIns="254" rtlCol="0" anchor="t">
+          <a:bodyPr wrap="square" lIns="508" tIns="508" rIns="508" bIns="508" rtlCol="0" anchor="t">
             <a:normAutofit/>
           </a:bodyPr>
           <a:lstStyle/>
           <a:p>
-            <a:r>
-              <a:rPr lang="en-US" sz="1380" dirty="0">
+            <a:pPr indent="0" marL="0">
+              <a:buNone/>
+            </a:pPr>
+            <a:r>
+              <a:rPr lang="en-US" sz="1220" dirty="0">
                 <a:solidFill>
                   <a:srgbClr val="17364A"/>
                 </a:solidFill>
@@ -12496,11 +12684,14 @@
               </a:rPr>
               <a:t>1.</a:t>
             </a:r>
-            <a:endParaRPr lang="en-US" sz="1380" dirty="0"/>
-          </a:p>
-          <a:p>
-            <a:r>
-              <a:rPr lang="en-US" sz="1380" dirty="0">
+            <a:endParaRPr lang="en-US" sz="1220" dirty="0"/>
+          </a:p>
+          <a:p>
+            <a:pPr indent="0" marL="0">
+              <a:buNone/>
+            </a:pPr>
+            <a:r>
+              <a:rPr lang="en-US" sz="1220" dirty="0">
                 <a:solidFill>
                   <a:srgbClr val="17364A"/>
                 </a:solidFill>
@@ -12510,11 +12701,14 @@
               </a:rPr>
               <a:t>What is a FHIR resource?</a:t>
             </a:r>
-            <a:endParaRPr lang="en-US" sz="1380" dirty="0"/>
-          </a:p>
-          <a:p>
-            <a:r>
-              <a:rPr lang="en-US" sz="1380" dirty="0">
+            <a:endParaRPr lang="en-US" sz="1220" dirty="0"/>
+          </a:p>
+          <a:p>
+            <a:pPr indent="0" marL="0">
+              <a:buNone/>
+            </a:pPr>
+            <a:r>
+              <a:rPr lang="en-US" sz="1220" dirty="0">
                 <a:solidFill>
                   <a:srgbClr val="17364A"/>
                 </a:solidFill>
@@ -12524,7 +12718,7 @@
               </a:rPr>
               <a:t>2.</a:t>
             </a:r>
-            <a:endParaRPr lang="en-US" sz="1380" dirty="0"/>
+            <a:endParaRPr lang="en-US" sz="1220" dirty="0"/>
           </a:p>
         </p:txBody>
       </p:sp>
@@ -12602,17 +12796,17 @@
         </p:nvSpPr>
         <p:spPr>
           <a:xfrm>
-            <a:off x="7799832" y="5001768"/>
-            <a:ext cx="3145536" cy="502920"/>
-          </a:xfrm>
-          <a:prstGeom prst="rect">
-            <a:avLst/>
-          </a:prstGeom>
-          <a:noFill/>
-          <a:ln/>
-        </p:spPr>
-        <p:txBody>
-          <a:bodyPr wrap="square" lIns="0" tIns="0" rIns="0" bIns="0" rtlCol="0" anchor="t">
+            <a:off x="7799832" y="4974336"/>
+            <a:ext cx="3145536" cy="576072"/>
+          </a:xfrm>
+          <a:prstGeom prst="rect">
+            <a:avLst/>
+          </a:prstGeom>
+          <a:noFill/>
+          <a:ln/>
+        </p:spPr>
+        <p:txBody>
+          <a:bodyPr wrap="square" lIns="254" tIns="254" rIns="254" bIns="254" rtlCol="0" anchor="t">
             <a:normAutofit/>
           </a:bodyPr>
           <a:lstStyle/>
@@ -12621,7 +12815,7 @@
               <a:buNone/>
             </a:pPr>
             <a:r>
-              <a:rPr lang="en-US" sz="1550" dirty="0">
+              <a:rPr lang="en-US" sz="1320" dirty="0">
                 <a:solidFill>
                   <a:srgbClr val="17364A"/>
                 </a:solidFill>
@@ -12629,9 +12823,9 @@
                 <a:ea typeface="Aptos" pitchFamily="34" charset="-122"/>
                 <a:cs typeface="Aptos" pitchFamily="34" charset="-120"/>
               </a:rPr>
-              <a:t>Use the assignment to test whether you can explain the concept, apply it to a realistic public health situation, and identify what would need review before the work moves forward.</a:t>
-            </a:r>
-            <a:endParaRPr lang="en-US" sz="1550" dirty="0"/>
+              <a:t>Use the assignment to test whether you can explain the concept, apply it to a realistic public health situation, and.</a:t>
+            </a:r>
+            <a:endParaRPr lang="en-US" sz="1320" dirty="0"/>
           </a:p>
         </p:txBody>
       </p:sp>
@@ -12932,49 +13126,58 @@
           <a:ln/>
         </p:spPr>
         <p:txBody>
-          <a:bodyPr wrap="square" lIns="635" tIns="635" rIns="635" bIns="635" rtlCol="0" anchor="t">
+          <a:bodyPr wrap="square" lIns="1016" tIns="1016" rIns="1016" bIns="1016" rtlCol="0" anchor="t">
             <a:normAutofit/>
           </a:bodyPr>
           <a:lstStyle/>
           <a:p>
+            <a:pPr indent="0" marL="0">
+              <a:buNone/>
+            </a:pPr>
             <a:r>
               <a:rPr lang="en-US" sz="2100" dirty="0">
                 <a:solidFill>
-                  <a:srgbClr val="17364A"/>
-                </a:solidFill>
-                <a:latin typeface="Aptos" pitchFamily="34" charset="0"/>
-                <a:ea typeface="Aptos" pitchFamily="34" charset="-122"/>
-                <a:cs typeface="Aptos" pitchFamily="34" charset="-120"/>
-              </a:rPr>
-              <a:t>HL7 FHIR resources: https://hl7.org/fhir/</a:t>
+                  <a:srgbClr val="003A63"/>
+                </a:solidFill>
+                <a:latin typeface="Aptos" pitchFamily="34" charset="0"/>
+                <a:ea typeface="Aptos" pitchFamily="34" charset="-122"/>
+                <a:cs typeface="Aptos" pitchFamily="34" charset="-120"/>
+              </a:rPr>
+              <a:t>• HL7 FHIR resources: https://hl7.org/fhir/</a:t>
             </a:r>
             <a:endParaRPr lang="en-US" sz="2100" dirty="0"/>
           </a:p>
           <a:p>
+            <a:pPr indent="0" marL="0">
+              <a:buNone/>
+            </a:pPr>
             <a:r>
               <a:rPr lang="en-US" sz="2100" dirty="0">
                 <a:solidFill>
-                  <a:srgbClr val="17364A"/>
-                </a:solidFill>
-                <a:latin typeface="Aptos" pitchFamily="34" charset="0"/>
-                <a:ea typeface="Aptos" pitchFamily="34" charset="-122"/>
-                <a:cs typeface="Aptos" pitchFamily="34" charset="-120"/>
-              </a:rPr>
-              <a:t>HL7 US Core Implementation Guide: https://build.fhir.org/ig/HL7/US-Core/</a:t>
+                  <a:srgbClr val="003A63"/>
+                </a:solidFill>
+                <a:latin typeface="Aptos" pitchFamily="34" charset="0"/>
+                <a:ea typeface="Aptos" pitchFamily="34" charset="-122"/>
+                <a:cs typeface="Aptos" pitchFamily="34" charset="-120"/>
+              </a:rPr>
+              <a:t>• HL7 US Core Implementation Guide: https://build.fhir.org/ig/HL7/US-Core/</a:t>
             </a:r>
             <a:endParaRPr lang="en-US" sz="2100" dirty="0"/>
           </a:p>
           <a:p>
+            <a:pPr indent="0" marL="0">
+              <a:buNone/>
+            </a:pPr>
             <a:r>
               <a:rPr lang="en-US" sz="2100" dirty="0">
                 <a:solidFill>
-                  <a:srgbClr val="17364A"/>
-                </a:solidFill>
-                <a:latin typeface="Aptos" pitchFamily="34" charset="0"/>
-                <a:ea typeface="Aptos" pitchFamily="34" charset="-122"/>
-                <a:cs typeface="Aptos" pitchFamily="34" charset="-120"/>
-              </a:rPr>
-              <a:t>HL7 eCR FHIR Implementation Guide: https://hl7.org/fhir/us/ecr/</a:t>
+                  <a:srgbClr val="003A63"/>
+                </a:solidFill>
+                <a:latin typeface="Aptos" pitchFamily="34" charset="0"/>
+                <a:ea typeface="Aptos" pitchFamily="34" charset="-122"/>
+                <a:cs typeface="Aptos" pitchFamily="34" charset="-120"/>
+              </a:rPr>
+              <a:t>• HL7 eCR FHIR Implementation Guide: https://hl7.org/fhir/us/ecr/</a:t>
             </a:r>
             <a:endParaRPr lang="en-US" sz="2100" dirty="0"/>
           </a:p>
@@ -13054,17 +13257,17 @@
         </p:nvSpPr>
         <p:spPr>
           <a:xfrm>
-            <a:off x="7799832" y="1828800"/>
-            <a:ext cx="3145536" cy="685800"/>
-          </a:xfrm>
-          <a:prstGeom prst="rect">
-            <a:avLst/>
-          </a:prstGeom>
-          <a:noFill/>
-          <a:ln/>
-        </p:spPr>
-        <p:txBody>
-          <a:bodyPr wrap="square" lIns="0" tIns="0" rIns="0" bIns="0" rtlCol="0" anchor="t">
+            <a:off x="7799832" y="1801368"/>
+            <a:ext cx="3145536" cy="758952"/>
+          </a:xfrm>
+          <a:prstGeom prst="rect">
+            <a:avLst/>
+          </a:prstGeom>
+          <a:noFill/>
+          <a:ln/>
+        </p:spPr>
+        <p:txBody>
+          <a:bodyPr wrap="square" lIns="254" tIns="254" rIns="254" bIns="254" rtlCol="0" anchor="t">
             <a:normAutofit/>
           </a:bodyPr>
           <a:lstStyle/>
@@ -13073,7 +13276,7 @@
               <a:buNone/>
             </a:pPr>
             <a:r>
-              <a:rPr lang="en-US" sz="1550" dirty="0">
+              <a:rPr lang="en-US" sz="1320" dirty="0">
                 <a:solidFill>
                   <a:srgbClr val="17364A"/>
                 </a:solidFill>
@@ -13083,7 +13286,7 @@
               </a:rPr>
               <a:t>HL7 FHIR resources: https://hl7.org/fhir/</a:t>
             </a:r>
-            <a:endParaRPr lang="en-US" sz="1550" dirty="0"/>
+            <a:endParaRPr lang="en-US" sz="1320" dirty="0"/>
           </a:p>
         </p:txBody>
       </p:sp>
@@ -13171,13 +13374,16 @@
           <a:ln/>
         </p:spPr>
         <p:txBody>
-          <a:bodyPr wrap="square" lIns="254" tIns="254" rIns="254" bIns="254" rtlCol="0" anchor="t">
+          <a:bodyPr wrap="square" lIns="508" tIns="508" rIns="508" bIns="508" rtlCol="0" anchor="t">
             <a:normAutofit/>
           </a:bodyPr>
           <a:lstStyle/>
           <a:p>
-            <a:r>
-              <a:rPr lang="en-US" sz="1380" dirty="0">
+            <a:pPr indent="0" marL="0">
+              <a:buNone/>
+            </a:pPr>
+            <a:r>
+              <a:rPr lang="en-US" sz="1220" dirty="0">
                 <a:solidFill>
                   <a:srgbClr val="17364A"/>
                 </a:solidFill>
@@ -13187,11 +13393,14 @@
               </a:rPr>
               <a:t>US Public Health Profiles Library</a:t>
             </a:r>
-            <a:endParaRPr lang="en-US" sz="1380" dirty="0"/>
-          </a:p>
-          <a:p>
-            <a:r>
-              <a:rPr lang="en-US" sz="1380" dirty="0">
+            <a:endParaRPr lang="en-US" sz="1220" dirty="0"/>
+          </a:p>
+          <a:p>
+            <a:pPr indent="0" marL="0">
+              <a:buNone/>
+            </a:pPr>
+            <a:r>
+              <a:rPr lang="en-US" sz="1220" dirty="0">
                 <a:solidFill>
                   <a:srgbClr val="17364A"/>
                 </a:solidFill>
@@ -13199,9 +13408,9 @@
                 <a:ea typeface="Aptos" pitchFamily="34" charset="-122"/>
                 <a:cs typeface="Aptos" pitchFamily="34" charset="-120"/>
               </a:rPr>
-              <a:t>ONC USCDI resources: https://isp.healthit.gov/united-states-core-data-interoperability-uscdi</a:t>
-            </a:r>
-            <a:endParaRPr lang="en-US" sz="1380" dirty="0"/>
+              <a:t>ONC USCDI resources:.</a:t>
+            </a:r>
+            <a:endParaRPr lang="en-US" sz="1220" dirty="0"/>
           </a:p>
         </p:txBody>
       </p:sp>
@@ -13279,17 +13488,17 @@
         </p:nvSpPr>
         <p:spPr>
           <a:xfrm>
-            <a:off x="7799832" y="5001768"/>
-            <a:ext cx="3145536" cy="502920"/>
-          </a:xfrm>
-          <a:prstGeom prst="rect">
-            <a:avLst/>
-          </a:prstGeom>
-          <a:noFill/>
-          <a:ln/>
-        </p:spPr>
-        <p:txBody>
-          <a:bodyPr wrap="square" lIns="0" tIns="0" rIns="0" bIns="0" rtlCol="0" anchor="t">
+            <a:off x="7799832" y="4974336"/>
+            <a:ext cx="3145536" cy="576072"/>
+          </a:xfrm>
+          <a:prstGeom prst="rect">
+            <a:avLst/>
+          </a:prstGeom>
+          <a:noFill/>
+          <a:ln/>
+        </p:spPr>
+        <p:txBody>
+          <a:bodyPr wrap="square" lIns="254" tIns="254" rIns="254" bIns="254" rtlCol="0" anchor="t">
             <a:normAutofit/>
           </a:bodyPr>
           <a:lstStyle/>
@@ -13298,7 +13507,7 @@
               <a:buNone/>
             </a:pPr>
             <a:r>
-              <a:rPr lang="en-US" sz="1550" dirty="0">
+              <a:rPr lang="en-US" sz="1320" dirty="0">
                 <a:solidFill>
                   <a:srgbClr val="17364A"/>
                 </a:solidFill>
@@ -13306,9 +13515,9 @@
                 <a:ea typeface="Aptos" pitchFamily="34" charset="-122"/>
                 <a:cs typeface="Aptos" pitchFamily="34" charset="-120"/>
               </a:rPr>
-              <a:t>Connect the concept to public health purpose, responsible use, required safeguards, documentation, and the next action a department should take.</a:t>
-            </a:r>
-            <a:endParaRPr lang="en-US" sz="1550" dirty="0"/>
+              <a:t>Connect the concept to public health purpose, responsible use, required safeguards, documentation, and the next action a.</a:t>
+            </a:r>
+            <a:endParaRPr lang="en-US" sz="1320" dirty="0"/>
           </a:p>
         </p:txBody>
       </p:sp>
@@ -13609,63 +13818,75 @@
           <a:ln/>
         </p:spPr>
         <p:txBody>
-          <a:bodyPr wrap="square" lIns="635" tIns="635" rIns="635" bIns="635" rtlCol="0" anchor="t">
+          <a:bodyPr wrap="square" lIns="1016" tIns="1016" rIns="1016" bIns="1016" rtlCol="0" anchor="t">
             <a:normAutofit/>
           </a:bodyPr>
           <a:lstStyle/>
           <a:p>
+            <a:pPr indent="0" marL="0">
+              <a:buNone/>
+            </a:pPr>
             <a:r>
               <a:rPr lang="en-US" sz="1900" dirty="0">
                 <a:solidFill>
-                  <a:srgbClr val="17364A"/>
-                </a:solidFill>
-                <a:latin typeface="Aptos" pitchFamily="34" charset="0"/>
-                <a:ea typeface="Aptos" pitchFamily="34" charset="-122"/>
-                <a:cs typeface="Aptos" pitchFamily="34" charset="-120"/>
-              </a:rPr>
-              <a:t>Play 11: Build and Deploy AI Solutions - This lesson informs Play 11 by helping learners connect the lesson.</a:t>
+                  <a:srgbClr val="003A63"/>
+                </a:solidFill>
+                <a:latin typeface="Aptos" pitchFamily="34" charset="0"/>
+                <a:ea typeface="Aptos" pitchFamily="34" charset="-122"/>
+                <a:cs typeface="Aptos" pitchFamily="34" charset="-120"/>
+              </a:rPr>
+              <a:t>• Play 11: Build and Deploy AI Solutions - This lesson informs Play 11 by helping learners.</a:t>
             </a:r>
             <a:endParaRPr lang="en-US" sz="1900" dirty="0"/>
           </a:p>
           <a:p>
+            <a:pPr indent="0" marL="0">
+              <a:buNone/>
+            </a:pPr>
             <a:r>
               <a:rPr lang="en-US" sz="1900" dirty="0">
                 <a:solidFill>
-                  <a:srgbClr val="17364A"/>
-                </a:solidFill>
-                <a:latin typeface="Aptos" pitchFamily="34" charset="0"/>
-                <a:ea typeface="Aptos" pitchFamily="34" charset="-122"/>
-                <a:cs typeface="Aptos" pitchFamily="34" charset="-120"/>
-              </a:rPr>
-              <a:t>Play 2: Readiness Assessment - This lesson informs Play 2 by helping learners connect the lesson topic to.</a:t>
+                  <a:srgbClr val="003A63"/>
+                </a:solidFill>
+                <a:latin typeface="Aptos" pitchFamily="34" charset="0"/>
+                <a:ea typeface="Aptos" pitchFamily="34" charset="-122"/>
+                <a:cs typeface="Aptos" pitchFamily="34" charset="-120"/>
+              </a:rPr>
+              <a:t>• Play 2: Readiness Assessment - This lesson informs Play 2 by helping learners connect the.</a:t>
             </a:r>
             <a:endParaRPr lang="en-US" sz="1900" dirty="0"/>
           </a:p>
           <a:p>
+            <a:pPr indent="0" marL="0">
+              <a:buNone/>
+            </a:pPr>
             <a:r>
               <a:rPr lang="en-US" sz="1900" dirty="0">
                 <a:solidFill>
-                  <a:srgbClr val="17364A"/>
-                </a:solidFill>
-                <a:latin typeface="Aptos" pitchFamily="34" charset="0"/>
-                <a:ea typeface="Aptos" pitchFamily="34" charset="-122"/>
-                <a:cs typeface="Aptos" pitchFamily="34" charset="-120"/>
-              </a:rPr>
-              <a:t>Play 1: Vision &amp; Guardrails - This lesson informs Play 1 by helping learners connect the lesson topic to.</a:t>
+                  <a:srgbClr val="003A63"/>
+                </a:solidFill>
+                <a:latin typeface="Aptos" pitchFamily="34" charset="0"/>
+                <a:ea typeface="Aptos" pitchFamily="34" charset="-122"/>
+                <a:cs typeface="Aptos" pitchFamily="34" charset="-120"/>
+              </a:rPr>
+              <a:t>• Play 1: Vision &amp; Guardrails - This lesson informs Play 1 by helping learners connect the.</a:t>
             </a:r>
             <a:endParaRPr lang="en-US" sz="1900" dirty="0"/>
           </a:p>
           <a:p>
+            <a:pPr indent="0" marL="0">
+              <a:buNone/>
+            </a:pPr>
             <a:r>
               <a:rPr lang="en-US" sz="1900" dirty="0">
                 <a:solidFill>
-                  <a:srgbClr val="17364A"/>
-                </a:solidFill>
-                <a:latin typeface="Aptos" pitchFamily="34" charset="0"/>
-                <a:ea typeface="Aptos" pitchFamily="34" charset="-122"/>
-                <a:cs typeface="Aptos" pitchFamily="34" charset="-120"/>
-              </a:rPr>
-              <a:t>Play 7: Prioritize Use Cases - This lesson informs Play 7 by helping learners connect the lesson topic to.</a:t>
+                  <a:srgbClr val="003A63"/>
+                </a:solidFill>
+                <a:latin typeface="Aptos" pitchFamily="34" charset="0"/>
+                <a:ea typeface="Aptos" pitchFamily="34" charset="-122"/>
+                <a:cs typeface="Aptos" pitchFamily="34" charset="-120"/>
+              </a:rPr>
+              <a:t>• Play 7: Prioritize Use Cases - This lesson informs Play 7 by helping learners connect the.</a:t>
             </a:r>
             <a:endParaRPr lang="en-US" sz="1900" dirty="0"/>
           </a:p>
@@ -13745,17 +13966,17 @@
         </p:nvSpPr>
         <p:spPr>
           <a:xfrm>
-            <a:off x="8211312" y="1920240"/>
-            <a:ext cx="2734056" cy="1463040"/>
-          </a:xfrm>
-          <a:prstGeom prst="rect">
-            <a:avLst/>
-          </a:prstGeom>
-          <a:noFill/>
-          <a:ln/>
-        </p:spPr>
-        <p:txBody>
-          <a:bodyPr wrap="square" lIns="0" tIns="0" rIns="0" bIns="0" rtlCol="0" anchor="t">
+            <a:off x="8211312" y="1892808"/>
+            <a:ext cx="2734056" cy="1536192"/>
+          </a:xfrm>
+          <a:prstGeom prst="rect">
+            <a:avLst/>
+          </a:prstGeom>
+          <a:noFill/>
+          <a:ln/>
+        </p:spPr>
+        <p:txBody>
+          <a:bodyPr wrap="square" lIns="254" tIns="254" rIns="254" bIns="254" rtlCol="0" anchor="t">
             <a:normAutofit/>
           </a:bodyPr>
           <a:lstStyle/>
@@ -13764,7 +13985,7 @@
               <a:buNone/>
             </a:pPr>
             <a:r>
-              <a:rPr lang="en-US" sz="1550" dirty="0">
+              <a:rPr lang="en-US" sz="1320" dirty="0">
                 <a:solidFill>
                   <a:srgbClr val="17364A"/>
                 </a:solidFill>
@@ -13772,9 +13993,9 @@
                 <a:ea typeface="Aptos" pitchFamily="34" charset="-122"/>
                 <a:cs typeface="Aptos" pitchFamily="34" charset="-120"/>
               </a:rPr>
-              <a:t>Use the related plays to identify decisions, participants, timing, approvals, and documentation needed for responsible implementation.</a:t>
-            </a:r>
-            <a:endParaRPr lang="en-US" sz="1550" dirty="0"/>
+              <a:t>Use the related plays to identify decisions, participants, timing, approvals, and documentation needed for responsible.</a:t>
+            </a:r>
+            <a:endParaRPr lang="en-US" sz="1320" dirty="0"/>
           </a:p>
         </p:txBody>
       </p:sp>
@@ -13862,13 +14083,16 @@
           <a:ln/>
         </p:spPr>
         <p:txBody>
-          <a:bodyPr wrap="square" lIns="254" tIns="254" rIns="254" bIns="254" rtlCol="0" anchor="t">
+          <a:bodyPr wrap="square" lIns="508" tIns="508" rIns="508" bIns="508" rtlCol="0" anchor="t">
             <a:normAutofit/>
           </a:bodyPr>
           <a:lstStyle/>
           <a:p>
-            <a:r>
-              <a:rPr lang="en-US" sz="1380" dirty="0">
+            <a:pPr indent="0" marL="0">
+              <a:buNone/>
+            </a:pPr>
+            <a:r>
+              <a:rPr lang="en-US" sz="1220" dirty="0">
                 <a:solidFill>
                   <a:srgbClr val="17364A"/>
                 </a:solidFill>
@@ -13878,11 +14102,14 @@
               </a:rPr>
               <a:t>Locate the decision point in the playbook sequence.</a:t>
             </a:r>
-            <a:endParaRPr lang="en-US" sz="1380" dirty="0"/>
-          </a:p>
-          <a:p>
-            <a:r>
-              <a:rPr lang="en-US" sz="1380" dirty="0">
+            <a:endParaRPr lang="en-US" sz="1220" dirty="0"/>
+          </a:p>
+          <a:p>
+            <a:pPr indent="0" marL="0">
+              <a:buNone/>
+            </a:pPr>
+            <a:r>
+              <a:rPr lang="en-US" sz="1220" dirty="0">
                 <a:solidFill>
                   <a:srgbClr val="17364A"/>
                 </a:solidFill>
@@ -13892,11 +14119,14 @@
               </a:rPr>
               <a:t>Identify who should participate in the work.</a:t>
             </a:r>
-            <a:endParaRPr lang="en-US" sz="1380" dirty="0"/>
-          </a:p>
-          <a:p>
-            <a:r>
-              <a:rPr lang="en-US" sz="1380" dirty="0">
+            <a:endParaRPr lang="en-US" sz="1220" dirty="0"/>
+          </a:p>
+          <a:p>
+            <a:pPr indent="0" marL="0">
+              <a:buNone/>
+            </a:pPr>
+            <a:r>
+              <a:rPr lang="en-US" sz="1220" dirty="0">
                 <a:solidFill>
                   <a:srgbClr val="17364A"/>
                 </a:solidFill>
@@ -13906,7 +14136,7 @@
               </a:rPr>
               <a:t>Document the review, approval, or implementation step.</a:t>
             </a:r>
-            <a:endParaRPr lang="en-US" sz="1380" dirty="0"/>
+            <a:endParaRPr lang="en-US" sz="1220" dirty="0"/>
           </a:p>
         </p:txBody>
       </p:sp>
@@ -14207,63 +14437,75 @@
           <a:ln/>
         </p:spPr>
         <p:txBody>
-          <a:bodyPr wrap="square" lIns="635" tIns="635" rIns="635" bIns="635" rtlCol="0" anchor="t">
+          <a:bodyPr wrap="square" lIns="1016" tIns="1016" rIns="1016" bIns="1016" rtlCol="0" anchor="t">
             <a:normAutofit/>
           </a:bodyPr>
           <a:lstStyle/>
           <a:p>
+            <a:pPr indent="0" marL="0">
+              <a:buNone/>
+            </a:pPr>
             <a:r>
               <a:rPr lang="en-US" sz="1850" dirty="0">
                 <a:solidFill>
-                  <a:srgbClr val="17364A"/>
-                </a:solidFill>
-                <a:latin typeface="Aptos" pitchFamily="34" charset="0"/>
-                <a:ea typeface="Aptos" pitchFamily="34" charset="-122"/>
-                <a:cs typeface="Aptos" pitchFamily="34" charset="-120"/>
-              </a:rPr>
-              <a:t>Tool 4: AI Policy Landscape Scan (Worksheet) - Use AI Policy Landscape Scan to translate this lesson into a.</a:t>
+                  <a:srgbClr val="003A63"/>
+                </a:solidFill>
+                <a:latin typeface="Aptos" pitchFamily="34" charset="0"/>
+                <a:ea typeface="Aptos" pitchFamily="34" charset="-122"/>
+                <a:cs typeface="Aptos" pitchFamily="34" charset="-120"/>
+              </a:rPr>
+              <a:t>• Tool 4: AI Policy Landscape Scan (Worksheet) - Use AI Policy Landscape Scan to translate this.</a:t>
             </a:r>
             <a:endParaRPr lang="en-US" sz="1850" dirty="0"/>
           </a:p>
           <a:p>
+            <a:pPr indent="0" marL="0">
+              <a:buNone/>
+            </a:pPr>
             <a:r>
               <a:rPr lang="en-US" sz="1850" dirty="0">
                 <a:solidFill>
-                  <a:srgbClr val="17364A"/>
-                </a:solidFill>
-                <a:latin typeface="Aptos" pitchFamily="34" charset="0"/>
-                <a:ea typeface="Aptos" pitchFamily="34" charset="-122"/>
-                <a:cs typeface="Aptos" pitchFamily="34" charset="-120"/>
-              </a:rPr>
-              <a:t>Tool 5: AI Environmental and Resource Impact Review (Checklist) - Use AI Environmental and Resource Impact.</a:t>
+                  <a:srgbClr val="003A63"/>
+                </a:solidFill>
+                <a:latin typeface="Aptos" pitchFamily="34" charset="0"/>
+                <a:ea typeface="Aptos" pitchFamily="34" charset="-122"/>
+                <a:cs typeface="Aptos" pitchFamily="34" charset="-120"/>
+              </a:rPr>
+              <a:t>• Tool 5: AI Environmental and Resource Impact Review (Checklist) - Use AI Environmental and.</a:t>
             </a:r>
             <a:endParaRPr lang="en-US" sz="1850" dirty="0"/>
           </a:p>
           <a:p>
+            <a:pPr indent="0" marL="0">
+              <a:buNone/>
+            </a:pPr>
             <a:r>
               <a:rPr lang="en-US" sz="1850" dirty="0">
                 <a:solidFill>
-                  <a:srgbClr val="17364A"/>
-                </a:solidFill>
-                <a:latin typeface="Aptos" pitchFamily="34" charset="0"/>
-                <a:ea typeface="Aptos" pitchFamily="34" charset="-122"/>
-                <a:cs typeface="Aptos" pitchFamily="34" charset="-120"/>
-              </a:rPr>
-              <a:t>Tool 6: Human-Centered AI Decision Rule Checklist (Checklist) - Use Human-Centered AI Decision Rule.</a:t>
+                  <a:srgbClr val="003A63"/>
+                </a:solidFill>
+                <a:latin typeface="Aptos" pitchFamily="34" charset="0"/>
+                <a:ea typeface="Aptos" pitchFamily="34" charset="-122"/>
+                <a:cs typeface="Aptos" pitchFamily="34" charset="-120"/>
+              </a:rPr>
+              <a:t>• Tool 6: Human-Centered AI Decision Rule Checklist (Checklist) - Use Human-Centered AI Decision.</a:t>
             </a:r>
             <a:endParaRPr lang="en-US" sz="1850" dirty="0"/>
           </a:p>
           <a:p>
+            <a:pPr indent="0" marL="0">
+              <a:buNone/>
+            </a:pPr>
             <a:r>
               <a:rPr lang="en-US" sz="1850" dirty="0">
                 <a:solidFill>
-                  <a:srgbClr val="17364A"/>
-                </a:solidFill>
-                <a:latin typeface="Aptos" pitchFamily="34" charset="0"/>
-                <a:ea typeface="Aptos" pitchFamily="34" charset="-122"/>
-                <a:cs typeface="Aptos" pitchFamily="34" charset="-120"/>
-              </a:rPr>
-              <a:t>Tool 8: AI Project Charter (Planning) - Use AI Project Charter to translate this lesson into a documented.</a:t>
+                  <a:srgbClr val="003A63"/>
+                </a:solidFill>
+                <a:latin typeface="Aptos" pitchFamily="34" charset="0"/>
+                <a:ea typeface="Aptos" pitchFamily="34" charset="-122"/>
+                <a:cs typeface="Aptos" pitchFamily="34" charset="-120"/>
+              </a:rPr>
+              <a:t>• Tool 8: AI Project Charter (Planning) - Use AI Project Charter to translate this lesson into a.</a:t>
             </a:r>
             <a:endParaRPr lang="en-US" sz="1850" dirty="0"/>
           </a:p>
@@ -14343,17 +14585,17 @@
         </p:nvSpPr>
         <p:spPr>
           <a:xfrm>
-            <a:off x="8211312" y="1920240"/>
-            <a:ext cx="2734056" cy="1463040"/>
-          </a:xfrm>
-          <a:prstGeom prst="rect">
-            <a:avLst/>
-          </a:prstGeom>
-          <a:noFill/>
-          <a:ln/>
-        </p:spPr>
-        <p:txBody>
-          <a:bodyPr wrap="square" lIns="0" tIns="0" rIns="0" bIns="0" rtlCol="0" anchor="t">
+            <a:off x="8211312" y="1892808"/>
+            <a:ext cx="2734056" cy="1536192"/>
+          </a:xfrm>
+          <a:prstGeom prst="rect">
+            <a:avLst/>
+          </a:prstGeom>
+          <a:noFill/>
+          <a:ln/>
+        </p:spPr>
+        <p:txBody>
+          <a:bodyPr wrap="square" lIns="254" tIns="254" rIns="254" bIns="254" rtlCol="0" anchor="t">
             <a:normAutofit/>
           </a:bodyPr>
           <a:lstStyle/>
@@ -14362,7 +14604,7 @@
               <a:buNone/>
             </a:pPr>
             <a:r>
-              <a:rPr lang="en-US" sz="1550" dirty="0">
+              <a:rPr lang="en-US" sz="1320" dirty="0">
                 <a:solidFill>
                   <a:srgbClr val="17364A"/>
                 </a:solidFill>
@@ -14370,9 +14612,9 @@
                 <a:ea typeface="Aptos" pitchFamily="34" charset="-122"/>
                 <a:cs typeface="Aptos" pitchFamily="34" charset="-120"/>
               </a:rPr>
-              <a:t>Use linked tools when your department needs a structured worksheet, template, checklist, review process, or documentation artifact.</a:t>
-            </a:r>
-            <a:endParaRPr lang="en-US" sz="1550" dirty="0"/>
+              <a:t>Use linked tools when your department needs a structured worksheet, template, checklist, review process, or.</a:t>
+            </a:r>
+            <a:endParaRPr lang="en-US" sz="1320" dirty="0"/>
           </a:p>
         </p:txBody>
       </p:sp>
@@ -14460,13 +14702,16 @@
           <a:ln/>
         </p:spPr>
         <p:txBody>
-          <a:bodyPr wrap="square" lIns="254" tIns="254" rIns="254" bIns="254" rtlCol="0" anchor="t">
+          <a:bodyPr wrap="square" lIns="508" tIns="508" rIns="508" bIns="508" rtlCol="0" anchor="t">
             <a:normAutofit/>
           </a:bodyPr>
           <a:lstStyle/>
           <a:p>
-            <a:r>
-              <a:rPr lang="en-US" sz="1380" dirty="0">
+            <a:pPr indent="0" marL="0">
+              <a:buNone/>
+            </a:pPr>
+            <a:r>
+              <a:rPr lang="en-US" sz="1220" dirty="0">
                 <a:solidFill>
                   <a:srgbClr val="17364A"/>
                 </a:solidFill>
@@ -14476,11 +14721,14 @@
               </a:rPr>
               <a:t>Use a tool when no comparable local process exists.</a:t>
             </a:r>
-            <a:endParaRPr lang="en-US" sz="1380" dirty="0"/>
-          </a:p>
-          <a:p>
-            <a:r>
-              <a:rPr lang="en-US" sz="1380" dirty="0">
+            <a:endParaRPr lang="en-US" sz="1220" dirty="0"/>
+          </a:p>
+          <a:p>
+            <a:pPr indent="0" marL="0">
+              <a:buNone/>
+            </a:pPr>
+            <a:r>
+              <a:rPr lang="en-US" sz="1220" dirty="0">
                 <a:solidFill>
                   <a:srgbClr val="17364A"/>
                 </a:solidFill>
@@ -14488,13 +14736,16 @@
                 <a:ea typeface="Aptos" pitchFamily="34" charset="-122"/>
                 <a:cs typeface="Aptos" pitchFamily="34" charset="-120"/>
               </a:rPr>
-              <a:t>Adapt existing department templates when they already fit the purpose.</a:t>
-            </a:r>
-            <a:endParaRPr lang="en-US" sz="1380" dirty="0"/>
-          </a:p>
-          <a:p>
-            <a:r>
-              <a:rPr lang="en-US" sz="1380" dirty="0">
+              <a:t>Adapt existing department templates when they already fit the.</a:t>
+            </a:r>
+            <a:endParaRPr lang="en-US" sz="1220" dirty="0"/>
+          </a:p>
+          <a:p>
+            <a:pPr indent="0" marL="0">
+              <a:buNone/>
+            </a:pPr>
+            <a:r>
+              <a:rPr lang="en-US" sz="1220" dirty="0">
                 <a:solidFill>
                   <a:srgbClr val="17364A"/>
                 </a:solidFill>
@@ -14504,7 +14755,7 @@
               </a:rPr>
               <a:t>Save the completed artifact as evidence of the decision.</a:t>
             </a:r>
-            <a:endParaRPr lang="en-US" sz="1380" dirty="0"/>
+            <a:endParaRPr lang="en-US" sz="1220" dirty="0"/>
           </a:p>
         </p:txBody>
       </p:sp>
@@ -14805,49 +15056,58 @@
           <a:ln/>
         </p:spPr>
         <p:txBody>
-          <a:bodyPr wrap="square" lIns="635" tIns="635" rIns="635" bIns="635" rtlCol="0" anchor="t">
+          <a:bodyPr wrap="square" lIns="1016" tIns="1016" rIns="1016" bIns="1016" rtlCol="0" anchor="t">
             <a:normAutofit/>
           </a:bodyPr>
           <a:lstStyle/>
           <a:p>
+            <a:pPr indent="0" marL="0">
+              <a:buNone/>
+            </a:pPr>
             <a:r>
               <a:rPr lang="en-US" sz="2100" dirty="0">
                 <a:solidFill>
-                  <a:srgbClr val="17364A"/>
-                </a:solidFill>
-                <a:latin typeface="Aptos" pitchFamily="34" charset="0"/>
-                <a:ea typeface="Aptos" pitchFamily="34" charset="-122"/>
-                <a:cs typeface="Aptos" pitchFamily="34" charset="-120"/>
-              </a:rPr>
-              <a:t>Define FHIR in practical public health terms.</a:t>
+                  <a:srgbClr val="003A63"/>
+                </a:solidFill>
+                <a:latin typeface="Aptos" pitchFamily="34" charset="0"/>
+                <a:ea typeface="Aptos" pitchFamily="34" charset="-122"/>
+                <a:cs typeface="Aptos" pitchFamily="34" charset="-120"/>
+              </a:rPr>
+              <a:t>• Define FHIR in practical public health terms.</a:t>
             </a:r>
             <a:endParaRPr lang="en-US" sz="2100" dirty="0"/>
           </a:p>
           <a:p>
+            <a:pPr indent="0" marL="0">
+              <a:buNone/>
+            </a:pPr>
             <a:r>
               <a:rPr lang="en-US" sz="2100" dirty="0">
                 <a:solidFill>
-                  <a:srgbClr val="17364A"/>
-                </a:solidFill>
-                <a:latin typeface="Aptos" pitchFamily="34" charset="0"/>
-                <a:ea typeface="Aptos" pitchFamily="34" charset="-122"/>
-                <a:cs typeface="Aptos" pitchFamily="34" charset="-120"/>
-              </a:rPr>
-              <a:t>Identify FHIR resources commonly relevant to public health AI use cases.</a:t>
+                  <a:srgbClr val="003A63"/>
+                </a:solidFill>
+                <a:latin typeface="Aptos" pitchFamily="34" charset="0"/>
+                <a:ea typeface="Aptos" pitchFamily="34" charset="-122"/>
+                <a:cs typeface="Aptos" pitchFamily="34" charset="-120"/>
+              </a:rPr>
+              <a:t>• Identify FHIR resources commonly relevant to public health AI use cases.</a:t>
             </a:r>
             <a:endParaRPr lang="en-US" sz="2100" dirty="0"/>
           </a:p>
           <a:p>
+            <a:pPr indent="0" marL="0">
+              <a:buNone/>
+            </a:pPr>
             <a:r>
               <a:rPr lang="en-US" sz="2100" dirty="0">
                 <a:solidFill>
-                  <a:srgbClr val="17364A"/>
-                </a:solidFill>
-                <a:latin typeface="Aptos" pitchFamily="34" charset="0"/>
-                <a:ea typeface="Aptos" pitchFamily="34" charset="-122"/>
-                <a:cs typeface="Aptos" pitchFamily="34" charset="-120"/>
-              </a:rPr>
-              <a:t>Explain the role of profiles, implementation guides, and APIs.</a:t>
+                  <a:srgbClr val="003A63"/>
+                </a:solidFill>
+                <a:latin typeface="Aptos" pitchFamily="34" charset="0"/>
+                <a:ea typeface="Aptos" pitchFamily="34" charset="-122"/>
+                <a:cs typeface="Aptos" pitchFamily="34" charset="-120"/>
+              </a:rPr>
+              <a:t>• Explain the role of profiles, implementation guides, and APIs.</a:t>
             </a:r>
             <a:endParaRPr lang="en-US" sz="2100" dirty="0"/>
           </a:p>
@@ -14927,17 +15187,17 @@
         </p:nvSpPr>
         <p:spPr>
           <a:xfrm>
-            <a:off x="7799832" y="1828800"/>
-            <a:ext cx="3145536" cy="685800"/>
-          </a:xfrm>
-          <a:prstGeom prst="rect">
-            <a:avLst/>
-          </a:prstGeom>
-          <a:noFill/>
-          <a:ln/>
-        </p:spPr>
-        <p:txBody>
-          <a:bodyPr wrap="square" lIns="0" tIns="0" rIns="0" bIns="0" rtlCol="0" anchor="t">
+            <a:off x="7799832" y="1801368"/>
+            <a:ext cx="3145536" cy="758952"/>
+          </a:xfrm>
+          <a:prstGeom prst="rect">
+            <a:avLst/>
+          </a:prstGeom>
+          <a:noFill/>
+          <a:ln/>
+        </p:spPr>
+        <p:txBody>
+          <a:bodyPr wrap="square" lIns="254" tIns="254" rIns="254" bIns="254" rtlCol="0" anchor="t">
             <a:normAutofit/>
           </a:bodyPr>
           <a:lstStyle/>
@@ -14946,7 +15206,7 @@
               <a:buNone/>
             </a:pPr>
             <a:r>
-              <a:rPr lang="en-US" sz="1550" dirty="0">
+              <a:rPr lang="en-US" sz="1320" dirty="0">
                 <a:solidFill>
                   <a:srgbClr val="17364A"/>
                 </a:solidFill>
@@ -14956,7 +15216,7 @@
               </a:rPr>
               <a:t>Define FHIR in practical public health terms.</a:t>
             </a:r>
-            <a:endParaRPr lang="en-US" sz="1550" dirty="0"/>
+            <a:endParaRPr lang="en-US" sz="1320" dirty="0"/>
           </a:p>
         </p:txBody>
       </p:sp>
@@ -15044,13 +15304,16 @@
           <a:ln/>
         </p:spPr>
         <p:txBody>
-          <a:bodyPr wrap="square" lIns="254" tIns="254" rIns="254" bIns="254" rtlCol="0" anchor="t">
+          <a:bodyPr wrap="square" lIns="508" tIns="508" rIns="508" bIns="508" rtlCol="0" anchor="t">
             <a:normAutofit/>
           </a:bodyPr>
           <a:lstStyle/>
           <a:p>
-            <a:r>
-              <a:rPr lang="en-US" sz="1380" dirty="0">
+            <a:pPr indent="0" marL="0">
+              <a:buNone/>
+            </a:pPr>
+            <a:r>
+              <a:rPr lang="en-US" sz="1220" dirty="0">
                 <a:solidFill>
                   <a:srgbClr val="17364A"/>
                 </a:solidFill>
@@ -15058,13 +15321,16 @@
                 <a:ea typeface="Aptos" pitchFamily="34" charset="-122"/>
                 <a:cs typeface="Aptos" pitchFamily="34" charset="-120"/>
               </a:rPr>
-              <a:t>Assess whether FHIR-accessible data are complete and fit for a specific use case.</a:t>
-            </a:r>
-            <a:endParaRPr lang="en-US" sz="1380" dirty="0"/>
-          </a:p>
-          <a:p>
-            <a:r>
-              <a:rPr lang="en-US" sz="1380" dirty="0">
+              <a:t>Assess whether FHIR-accessible data are complete and fit for a.</a:t>
+            </a:r>
+            <a:endParaRPr lang="en-US" sz="1220" dirty="0"/>
+          </a:p>
+          <a:p>
+            <a:pPr indent="0" marL="0">
+              <a:buNone/>
+            </a:pPr>
+            <a:r>
+              <a:rPr lang="en-US" sz="1220" dirty="0">
                 <a:solidFill>
                   <a:srgbClr val="17364A"/>
                 </a:solidFill>
@@ -15074,7 +15340,7 @@
               </a:rPr>
               <a:t>Produce a FHIR data needs worksheet for an AI-supported workflow.</a:t>
             </a:r>
-            <a:endParaRPr lang="en-US" sz="1380" dirty="0"/>
+            <a:endParaRPr lang="en-US" sz="1220" dirty="0"/>
           </a:p>
         </p:txBody>
       </p:sp>
@@ -15152,17 +15418,17 @@
         </p:nvSpPr>
         <p:spPr>
           <a:xfrm>
-            <a:off x="7799832" y="5001768"/>
-            <a:ext cx="3145536" cy="502920"/>
-          </a:xfrm>
-          <a:prstGeom prst="rect">
-            <a:avLst/>
-          </a:prstGeom>
-          <a:noFill/>
-          <a:ln/>
-        </p:spPr>
-        <p:txBody>
-          <a:bodyPr wrap="square" lIns="0" tIns="0" rIns="0" bIns="0" rtlCol="0" anchor="t">
+            <a:off x="7799832" y="4974336"/>
+            <a:ext cx="3145536" cy="576072"/>
+          </a:xfrm>
+          <a:prstGeom prst="rect">
+            <a:avLst/>
+          </a:prstGeom>
+          <a:noFill/>
+          <a:ln/>
+        </p:spPr>
+        <p:txBody>
+          <a:bodyPr wrap="square" lIns="254" tIns="254" rIns="254" bIns="254" rtlCol="0" anchor="t">
             <a:normAutofit/>
           </a:bodyPr>
           <a:lstStyle/>
@@ -15171,7 +15437,7 @@
               <a:buNone/>
             </a:pPr>
             <a:r>
-              <a:rPr lang="en-US" sz="1550" dirty="0">
+              <a:rPr lang="en-US" sz="1320" dirty="0">
                 <a:solidFill>
                   <a:srgbClr val="17364A"/>
                 </a:solidFill>
@@ -15179,9 +15445,9 @@
                 <a:ea typeface="Aptos" pitchFamily="34" charset="-122"/>
                 <a:cs typeface="Aptos" pitchFamily="34" charset="-120"/>
               </a:rPr>
-              <a:t>Use the assignment to test whether you can explain the concept, apply it to a realistic public health situation, and identify what would need review before the work moves forward.</a:t>
-            </a:r>
-            <a:endParaRPr lang="en-US" sz="1550" dirty="0"/>
+              <a:t>Use the assignment to test whether you can explain the concept, apply it to a realistic public health situation, and.</a:t>
+            </a:r>
+            <a:endParaRPr lang="en-US" sz="1320" dirty="0"/>
           </a:p>
         </p:txBody>
       </p:sp>
@@ -15482,49 +15748,58 @@
           <a:ln/>
         </p:spPr>
         <p:txBody>
-          <a:bodyPr wrap="square" lIns="635" tIns="635" rIns="635" bIns="635" rtlCol="0" anchor="t">
+          <a:bodyPr wrap="square" lIns="1016" tIns="1016" rIns="1016" bIns="1016" rtlCol="0" anchor="t">
             <a:normAutofit/>
           </a:bodyPr>
           <a:lstStyle/>
           <a:p>
+            <a:pPr indent="0" marL="0">
+              <a:buNone/>
+            </a:pPr>
             <a:r>
               <a:rPr lang="en-US" sz="2100" dirty="0">
                 <a:solidFill>
-                  <a:srgbClr val="17364A"/>
-                </a:solidFill>
-                <a:latin typeface="Aptos" pitchFamily="34" charset="0"/>
-                <a:ea typeface="Aptos" pitchFamily="34" charset="-122"/>
-                <a:cs typeface="Aptos" pitchFamily="34" charset="-120"/>
-              </a:rPr>
-              <a:t>FHIR is increasingly important for public health because it supports structured, API-based access to.</a:t>
+                  <a:srgbClr val="003A63"/>
+                </a:solidFill>
+                <a:latin typeface="Aptos" pitchFamily="34" charset="0"/>
+                <a:ea typeface="Aptos" pitchFamily="34" charset="-122"/>
+                <a:cs typeface="Aptos" pitchFamily="34" charset="-120"/>
+              </a:rPr>
+              <a:t>• FHIR is increasingly important for public health because it supports structured, API-based.</a:t>
             </a:r>
             <a:endParaRPr lang="en-US" sz="2100" dirty="0"/>
           </a:p>
           <a:p>
+            <a:pPr indent="0" marL="0">
+              <a:buNone/>
+            </a:pPr>
             <a:r>
               <a:rPr lang="en-US" sz="2100" dirty="0">
                 <a:solidFill>
-                  <a:srgbClr val="17364A"/>
-                </a:solidFill>
-                <a:latin typeface="Aptos" pitchFamily="34" charset="0"/>
-                <a:ea typeface="Aptos" pitchFamily="34" charset="-122"/>
-                <a:cs typeface="Aptos" pitchFamily="34" charset="-120"/>
-              </a:rPr>
-              <a:t>Public health staff do not need to become FHIR developers to participate in AI planning, but they do.</a:t>
+                  <a:srgbClr val="003A63"/>
+                </a:solidFill>
+                <a:latin typeface="Aptos" pitchFamily="34" charset="0"/>
+                <a:ea typeface="Aptos" pitchFamily="34" charset="-122"/>
+                <a:cs typeface="Aptos" pitchFamily="34" charset="-120"/>
+              </a:rPr>
+              <a:t>• Public health staff do not need to become FHIR developers to participate in AI planning, but.</a:t>
             </a:r>
             <a:endParaRPr lang="en-US" sz="2100" dirty="0"/>
           </a:p>
           <a:p>
+            <a:pPr indent="0" marL="0">
+              <a:buNone/>
+            </a:pPr>
             <a:r>
               <a:rPr lang="en-US" sz="2100" dirty="0">
                 <a:solidFill>
-                  <a:srgbClr val="17364A"/>
-                </a:solidFill>
-                <a:latin typeface="Aptos" pitchFamily="34" charset="0"/>
-                <a:ea typeface="Aptos" pitchFamily="34" charset="-122"/>
-                <a:cs typeface="Aptos" pitchFamily="34" charset="-120"/>
-              </a:rPr>
-              <a:t>This module explains how FHIR resources, profiles, implementation guides, and APIs may support.</a:t>
+                  <a:srgbClr val="003A63"/>
+                </a:solidFill>
+                <a:latin typeface="Aptos" pitchFamily="34" charset="0"/>
+                <a:ea typeface="Aptos" pitchFamily="34" charset="-122"/>
+                <a:cs typeface="Aptos" pitchFamily="34" charset="-120"/>
+              </a:rPr>
+              <a:t>• This module explains how FHIR resources, profiles, implementation guides, and APIs may support.</a:t>
             </a:r>
             <a:endParaRPr lang="en-US" sz="2100" dirty="0"/>
           </a:p>
@@ -15604,17 +15879,17 @@
         </p:nvSpPr>
         <p:spPr>
           <a:xfrm>
-            <a:off x="7799832" y="1828800"/>
-            <a:ext cx="3145536" cy="685800"/>
-          </a:xfrm>
-          <a:prstGeom prst="rect">
-            <a:avLst/>
-          </a:prstGeom>
-          <a:noFill/>
-          <a:ln/>
-        </p:spPr>
-        <p:txBody>
-          <a:bodyPr wrap="square" lIns="0" tIns="0" rIns="0" bIns="0" rtlCol="0" anchor="t">
+            <a:off x="7799832" y="1801368"/>
+            <a:ext cx="3145536" cy="758952"/>
+          </a:xfrm>
+          <a:prstGeom prst="rect">
+            <a:avLst/>
+          </a:prstGeom>
+          <a:noFill/>
+          <a:ln/>
+        </p:spPr>
+        <p:txBody>
+          <a:bodyPr wrap="square" lIns="254" tIns="254" rIns="254" bIns="254" rtlCol="0" anchor="t">
             <a:normAutofit/>
           </a:bodyPr>
           <a:lstStyle/>
@@ -15623,7 +15898,7 @@
               <a:buNone/>
             </a:pPr>
             <a:r>
-              <a:rPr lang="en-US" sz="1550" dirty="0">
+              <a:rPr lang="en-US" sz="1320" dirty="0">
                 <a:solidFill>
                   <a:srgbClr val="17364A"/>
                 </a:solidFill>
@@ -15633,7 +15908,7 @@
               </a:rPr>
               <a:t>FHIR is increasingly important for public health because it supports structured, API-based access to.</a:t>
             </a:r>
-            <a:endParaRPr lang="en-US" sz="1550" dirty="0"/>
+            <a:endParaRPr lang="en-US" sz="1320" dirty="0"/>
           </a:p>
         </p:txBody>
       </p:sp>
@@ -15721,13 +15996,16 @@
           <a:ln/>
         </p:spPr>
         <p:txBody>
-          <a:bodyPr wrap="square" lIns="254" tIns="254" rIns="254" bIns="254" rtlCol="0" anchor="t">
+          <a:bodyPr wrap="square" lIns="508" tIns="508" rIns="508" bIns="508" rtlCol="0" anchor="t">
             <a:normAutofit/>
           </a:bodyPr>
           <a:lstStyle/>
           <a:p>
-            <a:r>
-              <a:rPr lang="en-US" sz="1380" dirty="0">
+            <a:pPr indent="0" marL="0">
+              <a:buNone/>
+            </a:pPr>
+            <a:r>
+              <a:rPr lang="en-US" sz="1220" dirty="0">
                 <a:solidFill>
                   <a:srgbClr val="17364A"/>
                 </a:solidFill>
@@ -15735,13 +16013,16 @@
                 <a:ea typeface="Aptos" pitchFamily="34" charset="-122"/>
                 <a:cs typeface="Aptos" pitchFamily="34" charset="-120"/>
               </a:rPr>
-              <a:t>FHIR is increasingly important for public health because it supports structured, API-based.</a:t>
-            </a:r>
-            <a:endParaRPr lang="en-US" sz="1380" dirty="0"/>
-          </a:p>
-          <a:p>
-            <a:r>
-              <a:rPr lang="en-US" sz="1380" dirty="0">
+              <a:t>FHIR is increasingly important for public health because it.</a:t>
+            </a:r>
+            <a:endParaRPr lang="en-US" sz="1220" dirty="0"/>
+          </a:p>
+          <a:p>
+            <a:pPr indent="0" marL="0">
+              <a:buNone/>
+            </a:pPr>
+            <a:r>
+              <a:rPr lang="en-US" sz="1220" dirty="0">
                 <a:solidFill>
                   <a:srgbClr val="17364A"/>
                 </a:solidFill>
@@ -15749,13 +16030,16 @@
                 <a:ea typeface="Aptos" pitchFamily="34" charset="-122"/>
                 <a:cs typeface="Aptos" pitchFamily="34" charset="-120"/>
               </a:rPr>
-              <a:t>Public health staff do not need to become FHIR developers to participate in AI planning,.</a:t>
-            </a:r>
-            <a:endParaRPr lang="en-US" sz="1380" dirty="0"/>
-          </a:p>
-          <a:p>
-            <a:r>
-              <a:rPr lang="en-US" sz="1380" dirty="0">
+              <a:t>Public health staff do not need to become FHIR developers to.</a:t>
+            </a:r>
+            <a:endParaRPr lang="en-US" sz="1220" dirty="0"/>
+          </a:p>
+          <a:p>
+            <a:pPr indent="0" marL="0">
+              <a:buNone/>
+            </a:pPr>
+            <a:r>
+              <a:rPr lang="en-US" sz="1220" dirty="0">
                 <a:solidFill>
                   <a:srgbClr val="17364A"/>
                 </a:solidFill>
@@ -15763,9 +16047,9 @@
                 <a:ea typeface="Aptos" pitchFamily="34" charset="-122"/>
                 <a:cs typeface="Aptos" pitchFamily="34" charset="-120"/>
               </a:rPr>
-              <a:t>This module explains how FHIR resources, profiles, implementation guides, and APIs may.</a:t>
-            </a:r>
-            <a:endParaRPr lang="en-US" sz="1380" dirty="0"/>
+              <a:t>This module explains how FHIR resources, profiles, implementation.</a:t>
+            </a:r>
+            <a:endParaRPr lang="en-US" sz="1220" dirty="0"/>
           </a:p>
         </p:txBody>
       </p:sp>
@@ -15843,17 +16127,17 @@
         </p:nvSpPr>
         <p:spPr>
           <a:xfrm>
-            <a:off x="7799832" y="5001768"/>
-            <a:ext cx="3145536" cy="502920"/>
-          </a:xfrm>
-          <a:prstGeom prst="rect">
-            <a:avLst/>
-          </a:prstGeom>
-          <a:noFill/>
-          <a:ln/>
-        </p:spPr>
-        <p:txBody>
-          <a:bodyPr wrap="square" lIns="0" tIns="0" rIns="0" bIns="0" rtlCol="0" anchor="t">
+            <a:off x="7799832" y="4974336"/>
+            <a:ext cx="3145536" cy="576072"/>
+          </a:xfrm>
+          <a:prstGeom prst="rect">
+            <a:avLst/>
+          </a:prstGeom>
+          <a:noFill/>
+          <a:ln/>
+        </p:spPr>
+        <p:txBody>
+          <a:bodyPr wrap="square" lIns="254" tIns="254" rIns="254" bIns="254" rtlCol="0" anchor="t">
             <a:normAutofit/>
           </a:bodyPr>
           <a:lstStyle/>
@@ -15862,7 +16146,7 @@
               <a:buNone/>
             </a:pPr>
             <a:r>
-              <a:rPr lang="en-US" sz="1550" dirty="0">
+              <a:rPr lang="en-US" sz="1320" dirty="0">
                 <a:solidFill>
                   <a:srgbClr val="17364A"/>
                 </a:solidFill>
@@ -15870,9 +16154,9 @@
                 <a:ea typeface="Aptos" pitchFamily="34" charset="-122"/>
                 <a:cs typeface="Aptos" pitchFamily="34" charset="-120"/>
               </a:rPr>
-              <a:t>Connect the concept to public health purpose, responsible use, required safeguards, documentation, and the next action a department should take.</a:t>
-            </a:r>
-            <a:endParaRPr lang="en-US" sz="1550" dirty="0"/>
+              <a:t>Connect the concept to public health purpose, responsible use, required safeguards, documentation, and the next action a.</a:t>
+            </a:r>
+            <a:endParaRPr lang="en-US" sz="1320" dirty="0"/>
           </a:p>
         </p:txBody>
       </p:sp>
@@ -16173,49 +16457,58 @@
           <a:ln/>
         </p:spPr>
         <p:txBody>
-          <a:bodyPr wrap="square" lIns="635" tIns="635" rIns="635" bIns="635" rtlCol="0" anchor="t">
+          <a:bodyPr wrap="square" lIns="1016" tIns="1016" rIns="1016" bIns="1016" rtlCol="0" anchor="t">
             <a:normAutofit/>
           </a:bodyPr>
           <a:lstStyle/>
           <a:p>
+            <a:pPr indent="0" marL="0">
+              <a:buNone/>
+            </a:pPr>
             <a:r>
               <a:rPr lang="en-US" sz="2100" dirty="0">
                 <a:solidFill>
-                  <a:srgbClr val="17364A"/>
-                </a:solidFill>
-                <a:latin typeface="Aptos" pitchFamily="34" charset="0"/>
-                <a:ea typeface="Aptos" pitchFamily="34" charset="-122"/>
-                <a:cs typeface="Aptos" pitchFamily="34" charset="-120"/>
-              </a:rPr>
-              <a:t>This national-level module is intended for training and planning purposes.</a:t>
+                  <a:srgbClr val="003A63"/>
+                </a:solidFill>
+                <a:latin typeface="Aptos" pitchFamily="34" charset="0"/>
+                <a:ea typeface="Aptos" pitchFamily="34" charset="-122"/>
+                <a:cs typeface="Aptos" pitchFamily="34" charset="-120"/>
+              </a:rPr>
+              <a:t>• This national-level module is intended for training and planning purposes.</a:t>
             </a:r>
             <a:endParaRPr lang="en-US" sz="2100" dirty="0"/>
           </a:p>
           <a:p>
+            <a:pPr indent="0" marL="0">
+              <a:buNone/>
+            </a:pPr>
             <a:r>
               <a:rPr lang="en-US" sz="2100" dirty="0">
                 <a:solidFill>
-                  <a:srgbClr val="17364A"/>
-                </a:solidFill>
-                <a:latin typeface="Aptos" pitchFamily="34" charset="0"/>
-                <a:ea typeface="Aptos" pitchFamily="34" charset="-122"/>
-                <a:cs typeface="Aptos" pitchFamily="34" charset="-120"/>
-              </a:rPr>
-              <a:t>It does not replace legal, privacy, procurement, civil rights, records, or agency policy review.</a:t>
+                  <a:srgbClr val="003A63"/>
+                </a:solidFill>
+                <a:latin typeface="Aptos" pitchFamily="34" charset="0"/>
+                <a:ea typeface="Aptos" pitchFamily="34" charset="-122"/>
+                <a:cs typeface="Aptos" pitchFamily="34" charset="-120"/>
+              </a:rPr>
+              <a:t>• It does not replace legal, privacy, procurement, civil rights, records, or agency policy review.</a:t>
             </a:r>
             <a:endParaRPr lang="en-US" sz="2100" dirty="0"/>
           </a:p>
           <a:p>
+            <a:pPr indent="0" marL="0">
+              <a:buNone/>
+            </a:pPr>
             <a:r>
               <a:rPr lang="en-US" sz="2100" dirty="0">
                 <a:solidFill>
-                  <a:srgbClr val="17364A"/>
-                </a:solidFill>
-                <a:latin typeface="Aptos" pitchFamily="34" charset="0"/>
-                <a:ea typeface="Aptos" pitchFamily="34" charset="-122"/>
-                <a:cs typeface="Aptos" pitchFamily="34" charset="-120"/>
-              </a:rPr>
-              <a:t>Learners should confirm applicable requirements in their own jurisdiction and organization before.</a:t>
+                  <a:srgbClr val="003A63"/>
+                </a:solidFill>
+                <a:latin typeface="Aptos" pitchFamily="34" charset="0"/>
+                <a:ea typeface="Aptos" pitchFamily="34" charset="-122"/>
+                <a:cs typeface="Aptos" pitchFamily="34" charset="-120"/>
+              </a:rPr>
+              <a:t>• Learners should confirm applicable requirements in their own jurisdiction and organization.</a:t>
             </a:r>
             <a:endParaRPr lang="en-US" sz="2100" dirty="0"/>
           </a:p>
@@ -16295,17 +16588,17 @@
         </p:nvSpPr>
         <p:spPr>
           <a:xfrm>
-            <a:off x="7799832" y="1828800"/>
-            <a:ext cx="3145536" cy="685800"/>
-          </a:xfrm>
-          <a:prstGeom prst="rect">
-            <a:avLst/>
-          </a:prstGeom>
-          <a:noFill/>
-          <a:ln/>
-        </p:spPr>
-        <p:txBody>
-          <a:bodyPr wrap="square" lIns="0" tIns="0" rIns="0" bIns="0" rtlCol="0" anchor="t">
+            <a:off x="7799832" y="1801368"/>
+            <a:ext cx="3145536" cy="758952"/>
+          </a:xfrm>
+          <a:prstGeom prst="rect">
+            <a:avLst/>
+          </a:prstGeom>
+          <a:noFill/>
+          <a:ln/>
+        </p:spPr>
+        <p:txBody>
+          <a:bodyPr wrap="square" lIns="254" tIns="254" rIns="254" bIns="254" rtlCol="0" anchor="t">
             <a:normAutofit/>
           </a:bodyPr>
           <a:lstStyle/>
@@ -16314,7 +16607,7 @@
               <a:buNone/>
             </a:pPr>
             <a:r>
-              <a:rPr lang="en-US" sz="1550" dirty="0">
+              <a:rPr lang="en-US" sz="1320" dirty="0">
                 <a:solidFill>
                   <a:srgbClr val="17364A"/>
                 </a:solidFill>
@@ -16324,7 +16617,7 @@
               </a:rPr>
               <a:t>This national-level module is intended for training and planning purposes.</a:t>
             </a:r>
-            <a:endParaRPr lang="en-US" sz="1550" dirty="0"/>
+            <a:endParaRPr lang="en-US" sz="1320" dirty="0"/>
           </a:p>
         </p:txBody>
       </p:sp>
@@ -16412,13 +16705,16 @@
           <a:ln/>
         </p:spPr>
         <p:txBody>
-          <a:bodyPr wrap="square" lIns="254" tIns="254" rIns="254" bIns="254" rtlCol="0" anchor="t">
+          <a:bodyPr wrap="square" lIns="508" tIns="508" rIns="508" bIns="508" rtlCol="0" anchor="t">
             <a:normAutofit/>
           </a:bodyPr>
           <a:lstStyle/>
           <a:p>
-            <a:r>
-              <a:rPr lang="en-US" sz="1380" dirty="0">
+            <a:pPr indent="0" marL="0">
+              <a:buNone/>
+            </a:pPr>
+            <a:r>
+              <a:rPr lang="en-US" sz="1220" dirty="0">
                 <a:solidFill>
                   <a:srgbClr val="17364A"/>
                 </a:solidFill>
@@ -16426,13 +16722,16 @@
                 <a:ea typeface="Aptos" pitchFamily="34" charset="-122"/>
                 <a:cs typeface="Aptos" pitchFamily="34" charset="-120"/>
               </a:rPr>
-              <a:t>This national-level module is intended for training and planning purposes.</a:t>
-            </a:r>
-            <a:endParaRPr lang="en-US" sz="1380" dirty="0"/>
-          </a:p>
-          <a:p>
-            <a:r>
-              <a:rPr lang="en-US" sz="1380" dirty="0">
+              <a:t>This national-level module is intended for training and planning.</a:t>
+            </a:r>
+            <a:endParaRPr lang="en-US" sz="1220" dirty="0"/>
+          </a:p>
+          <a:p>
+            <a:pPr indent="0" marL="0">
+              <a:buNone/>
+            </a:pPr>
+            <a:r>
+              <a:rPr lang="en-US" sz="1220" dirty="0">
                 <a:solidFill>
                   <a:srgbClr val="17364A"/>
                 </a:solidFill>
@@ -16440,13 +16739,16 @@
                 <a:ea typeface="Aptos" pitchFamily="34" charset="-122"/>
                 <a:cs typeface="Aptos" pitchFamily="34" charset="-120"/>
               </a:rPr>
-              <a:t>It does not replace legal, privacy, procurement, civil rights, records, or agency policy.</a:t>
-            </a:r>
-            <a:endParaRPr lang="en-US" sz="1380" dirty="0"/>
-          </a:p>
-          <a:p>
-            <a:r>
-              <a:rPr lang="en-US" sz="1380" dirty="0">
+              <a:t>It does not replace legal, privacy, procurement, civil rights,.</a:t>
+            </a:r>
+            <a:endParaRPr lang="en-US" sz="1220" dirty="0"/>
+          </a:p>
+          <a:p>
+            <a:pPr indent="0" marL="0">
+              <a:buNone/>
+            </a:pPr>
+            <a:r>
+              <a:rPr lang="en-US" sz="1220" dirty="0">
                 <a:solidFill>
                   <a:srgbClr val="17364A"/>
                 </a:solidFill>
@@ -16454,9 +16756,9 @@
                 <a:ea typeface="Aptos" pitchFamily="34" charset="-122"/>
                 <a:cs typeface="Aptos" pitchFamily="34" charset="-120"/>
               </a:rPr>
-              <a:t>Learners should confirm applicable requirements in their own jurisdiction and organization.</a:t>
-            </a:r>
-            <a:endParaRPr lang="en-US" sz="1380" dirty="0"/>
+              <a:t>Learners should confirm applicable requirements in their own.</a:t>
+            </a:r>
+            <a:endParaRPr lang="en-US" sz="1220" dirty="0"/>
           </a:p>
         </p:txBody>
       </p:sp>
@@ -16534,17 +16836,17 @@
         </p:nvSpPr>
         <p:spPr>
           <a:xfrm>
-            <a:off x="7799832" y="5001768"/>
-            <a:ext cx="3145536" cy="502920"/>
-          </a:xfrm>
-          <a:prstGeom prst="rect">
-            <a:avLst/>
-          </a:prstGeom>
-          <a:noFill/>
-          <a:ln/>
-        </p:spPr>
-        <p:txBody>
-          <a:bodyPr wrap="square" lIns="0" tIns="0" rIns="0" bIns="0" rtlCol="0" anchor="t">
+            <a:off x="7799832" y="4974336"/>
+            <a:ext cx="3145536" cy="576072"/>
+          </a:xfrm>
+          <a:prstGeom prst="rect">
+            <a:avLst/>
+          </a:prstGeom>
+          <a:noFill/>
+          <a:ln/>
+        </p:spPr>
+        <p:txBody>
+          <a:bodyPr wrap="square" lIns="254" tIns="254" rIns="254" bIns="254" rtlCol="0" anchor="t">
             <a:normAutofit/>
           </a:bodyPr>
           <a:lstStyle/>
@@ -16553,7 +16855,7 @@
               <a:buNone/>
             </a:pPr>
             <a:r>
-              <a:rPr lang="en-US" sz="1550" dirty="0">
+              <a:rPr lang="en-US" sz="1320" dirty="0">
                 <a:solidFill>
                   <a:srgbClr val="17364A"/>
                 </a:solidFill>
@@ -16561,9 +16863,9 @@
                 <a:ea typeface="Aptos" pitchFamily="34" charset="-122"/>
                 <a:cs typeface="Aptos" pitchFamily="34" charset="-120"/>
               </a:rPr>
-              <a:t>Translate this concept into clear decision rights, review steps, documentation expectations, and escalation paths before an AI-supported workflow is approved.</a:t>
-            </a:r>
-            <a:endParaRPr lang="en-US" sz="1550" dirty="0"/>
+              <a:t>Translate this concept into clear decision rights, review steps, documentation expectations, and escalation paths before.</a:t>
+            </a:r>
+            <a:endParaRPr lang="en-US" sz="1320" dirty="0"/>
           </a:p>
         </p:txBody>
       </p:sp>
@@ -16864,49 +17166,58 @@
           <a:ln/>
         </p:spPr>
         <p:txBody>
-          <a:bodyPr wrap="square" lIns="635" tIns="635" rIns="635" bIns="635" rtlCol="0" anchor="t">
+          <a:bodyPr wrap="square" lIns="1016" tIns="1016" rIns="1016" bIns="1016" rtlCol="0" anchor="t">
             <a:normAutofit/>
           </a:bodyPr>
           <a:lstStyle/>
           <a:p>
+            <a:pPr indent="0" marL="0">
+              <a:buNone/>
+            </a:pPr>
             <a:r>
               <a:rPr lang="en-US" sz="2100" dirty="0">
                 <a:solidFill>
-                  <a:srgbClr val="17364A"/>
-                </a:solidFill>
-                <a:latin typeface="Aptos" pitchFamily="34" charset="0"/>
-                <a:ea typeface="Aptos" pitchFamily="34" charset="-122"/>
-                <a:cs typeface="Aptos" pitchFamily="34" charset="-120"/>
-              </a:rPr>
-              <a:t>FHIR matters for AI because it may make clinical and public health data more accessible, modular, and.</a:t>
+                  <a:srgbClr val="003A63"/>
+                </a:solidFill>
+                <a:latin typeface="Aptos" pitchFamily="34" charset="0"/>
+                <a:ea typeface="Aptos" pitchFamily="34" charset="-122"/>
+                <a:cs typeface="Aptos" pitchFamily="34" charset="-120"/>
+              </a:rPr>
+              <a:t>• FHIR matters for AI because it may make clinical and public health data more accessible,.</a:t>
             </a:r>
             <a:endParaRPr lang="en-US" sz="2100" dirty="0"/>
           </a:p>
           <a:p>
+            <a:pPr indent="0" marL="0">
+              <a:buNone/>
+            </a:pPr>
             <a:r>
               <a:rPr lang="en-US" sz="2100" dirty="0">
                 <a:solidFill>
-                  <a:srgbClr val="17364A"/>
-                </a:solidFill>
-                <a:latin typeface="Aptos" pitchFamily="34" charset="0"/>
-                <a:ea typeface="Aptos" pitchFamily="34" charset="-122"/>
-                <a:cs typeface="Aptos" pitchFamily="34" charset="-120"/>
-              </a:rPr>
-              <a:t>A FHIR API can allow an approved application to request specific resources, such as Patient,.</a:t>
+                  <a:srgbClr val="003A63"/>
+                </a:solidFill>
+                <a:latin typeface="Aptos" pitchFamily="34" charset="0"/>
+                <a:ea typeface="Aptos" pitchFamily="34" charset="-122"/>
+                <a:cs typeface="Aptos" pitchFamily="34" charset="-120"/>
+              </a:rPr>
+              <a:t>• A FHIR API can allow an approved application to request specific resources, such as Patient,.</a:t>
             </a:r>
             <a:endParaRPr lang="en-US" sz="2100" dirty="0"/>
           </a:p>
           <a:p>
+            <a:pPr indent="0" marL="0">
+              <a:buNone/>
+            </a:pPr>
             <a:r>
               <a:rPr lang="en-US" sz="2100" dirty="0">
                 <a:solidFill>
-                  <a:srgbClr val="17364A"/>
-                </a:solidFill>
-                <a:latin typeface="Aptos" pitchFamily="34" charset="0"/>
-                <a:ea typeface="Aptos" pitchFamily="34" charset="-122"/>
-                <a:cs typeface="Aptos" pitchFamily="34" charset="-120"/>
-              </a:rPr>
-              <a:t>This can support case summaries, decision support, cohort identification, immunization review, referral.</a:t>
+                  <a:srgbClr val="003A63"/>
+                </a:solidFill>
+                <a:latin typeface="Aptos" pitchFamily="34" charset="0"/>
+                <a:ea typeface="Aptos" pitchFamily="34" charset="-122"/>
+                <a:cs typeface="Aptos" pitchFamily="34" charset="-120"/>
+              </a:rPr>
+              <a:t>• This can support case summaries, decision support, cohort identification, immunization review,.</a:t>
             </a:r>
             <a:endParaRPr lang="en-US" sz="2100" dirty="0"/>
           </a:p>
@@ -16986,17 +17297,17 @@
         </p:nvSpPr>
         <p:spPr>
           <a:xfrm>
-            <a:off x="7799832" y="1828800"/>
-            <a:ext cx="3145536" cy="685800"/>
-          </a:xfrm>
-          <a:prstGeom prst="rect">
-            <a:avLst/>
-          </a:prstGeom>
-          <a:noFill/>
-          <a:ln/>
-        </p:spPr>
-        <p:txBody>
-          <a:bodyPr wrap="square" lIns="0" tIns="0" rIns="0" bIns="0" rtlCol="0" anchor="t">
+            <a:off x="7799832" y="1801368"/>
+            <a:ext cx="3145536" cy="758952"/>
+          </a:xfrm>
+          <a:prstGeom prst="rect">
+            <a:avLst/>
+          </a:prstGeom>
+          <a:noFill/>
+          <a:ln/>
+        </p:spPr>
+        <p:txBody>
+          <a:bodyPr wrap="square" lIns="254" tIns="254" rIns="254" bIns="254" rtlCol="0" anchor="t">
             <a:normAutofit/>
           </a:bodyPr>
           <a:lstStyle/>
@@ -17005,7 +17316,7 @@
               <a:buNone/>
             </a:pPr>
             <a:r>
-              <a:rPr lang="en-US" sz="1550" dirty="0">
+              <a:rPr lang="en-US" sz="1320" dirty="0">
                 <a:solidFill>
                   <a:srgbClr val="17364A"/>
                 </a:solidFill>
@@ -17015,7 +17326,7 @@
               </a:rPr>
               <a:t>FHIR matters for AI because it may make clinical and public health data more accessible, modular, and.</a:t>
             </a:r>
-            <a:endParaRPr lang="en-US" sz="1550" dirty="0"/>
+            <a:endParaRPr lang="en-US" sz="1320" dirty="0"/>
           </a:p>
         </p:txBody>
       </p:sp>
@@ -17103,13 +17414,16 @@
           <a:ln/>
         </p:spPr>
         <p:txBody>
-          <a:bodyPr wrap="square" lIns="254" tIns="254" rIns="254" bIns="254" rtlCol="0" anchor="t">
+          <a:bodyPr wrap="square" lIns="508" tIns="508" rIns="508" bIns="508" rtlCol="0" anchor="t">
             <a:normAutofit/>
           </a:bodyPr>
           <a:lstStyle/>
           <a:p>
-            <a:r>
-              <a:rPr lang="en-US" sz="1380" dirty="0">
+            <a:pPr indent="0" marL="0">
+              <a:buNone/>
+            </a:pPr>
+            <a:r>
+              <a:rPr lang="en-US" sz="1220" dirty="0">
                 <a:solidFill>
                   <a:srgbClr val="17364A"/>
                 </a:solidFill>
@@ -17117,13 +17431,16 @@
                 <a:ea typeface="Aptos" pitchFamily="34" charset="-122"/>
                 <a:cs typeface="Aptos" pitchFamily="34" charset="-120"/>
               </a:rPr>
-              <a:t>FHIR matters for AI because it may make clinical and public health data more accessible,.</a:t>
-            </a:r>
-            <a:endParaRPr lang="en-US" sz="1380" dirty="0"/>
-          </a:p>
-          <a:p>
-            <a:r>
-              <a:rPr lang="en-US" sz="1380" dirty="0">
+              <a:t>FHIR matters for AI because it may make clinical and public health.</a:t>
+            </a:r>
+            <a:endParaRPr lang="en-US" sz="1220" dirty="0"/>
+          </a:p>
+          <a:p>
+            <a:pPr indent="0" marL="0">
+              <a:buNone/>
+            </a:pPr>
+            <a:r>
+              <a:rPr lang="en-US" sz="1220" dirty="0">
                 <a:solidFill>
                   <a:srgbClr val="17364A"/>
                 </a:solidFill>
@@ -17131,13 +17448,16 @@
                 <a:ea typeface="Aptos" pitchFamily="34" charset="-122"/>
                 <a:cs typeface="Aptos" pitchFamily="34" charset="-120"/>
               </a:rPr>
-              <a:t>A FHIR API can allow an approved application to request specific resources, such as.</a:t>
-            </a:r>
-            <a:endParaRPr lang="en-US" sz="1380" dirty="0"/>
-          </a:p>
-          <a:p>
-            <a:r>
-              <a:rPr lang="en-US" sz="1380" dirty="0">
+              <a:t>A FHIR API can allow an approved application to request specific.</a:t>
+            </a:r>
+            <a:endParaRPr lang="en-US" sz="1220" dirty="0"/>
+          </a:p>
+          <a:p>
+            <a:pPr indent="0" marL="0">
+              <a:buNone/>
+            </a:pPr>
+            <a:r>
+              <a:rPr lang="en-US" sz="1220" dirty="0">
                 <a:solidFill>
                   <a:srgbClr val="17364A"/>
                 </a:solidFill>
@@ -17145,9 +17465,9 @@
                 <a:ea typeface="Aptos" pitchFamily="34" charset="-122"/>
                 <a:cs typeface="Aptos" pitchFamily="34" charset="-120"/>
               </a:rPr>
-              <a:t>This can support case summaries, decision support, cohort identification, immunization.</a:t>
-            </a:r>
-            <a:endParaRPr lang="en-US" sz="1380" dirty="0"/>
+              <a:t>This can support case summaries, decision support, cohort.</a:t>
+            </a:r>
+            <a:endParaRPr lang="en-US" sz="1220" dirty="0"/>
           </a:p>
         </p:txBody>
       </p:sp>
@@ -17225,17 +17545,17 @@
         </p:nvSpPr>
         <p:spPr>
           <a:xfrm>
-            <a:off x="7799832" y="5001768"/>
-            <a:ext cx="3145536" cy="502920"/>
-          </a:xfrm>
-          <a:prstGeom prst="rect">
-            <a:avLst/>
-          </a:prstGeom>
-          <a:noFill/>
-          <a:ln/>
-        </p:spPr>
-        <p:txBody>
-          <a:bodyPr wrap="square" lIns="0" tIns="0" rIns="0" bIns="0" rtlCol="0" anchor="t">
+            <a:off x="7799832" y="4974336"/>
+            <a:ext cx="3145536" cy="576072"/>
+          </a:xfrm>
+          <a:prstGeom prst="rect">
+            <a:avLst/>
+          </a:prstGeom>
+          <a:noFill/>
+          <a:ln/>
+        </p:spPr>
+        <p:txBody>
+          <a:bodyPr wrap="square" lIns="254" tIns="254" rIns="254" bIns="254" rtlCol="0" anchor="t">
             <a:normAutofit/>
           </a:bodyPr>
           <a:lstStyle/>
@@ -17244,7 +17564,7 @@
               <a:buNone/>
             </a:pPr>
             <a:r>
-              <a:rPr lang="en-US" sz="1550" dirty="0">
+              <a:rPr lang="en-US" sz="1320" dirty="0">
                 <a:solidFill>
                   <a:srgbClr val="17364A"/>
                 </a:solidFill>
@@ -17252,9 +17572,9 @@
                 <a:ea typeface="Aptos" pitchFamily="34" charset="-122"/>
                 <a:cs typeface="Aptos" pitchFamily="34" charset="-120"/>
               </a:rPr>
-              <a:t>Connect the concept to public health purpose, responsible use, required safeguards, documentation, and the next action a department should take.</a:t>
-            </a:r>
-            <a:endParaRPr lang="en-US" sz="1550" dirty="0"/>
+              <a:t>Connect the concept to public health purpose, responsible use, required safeguards, documentation, and the next action a.</a:t>
+            </a:r>
+            <a:endParaRPr lang="en-US" sz="1320" dirty="0"/>
           </a:p>
         </p:txBody>
       </p:sp>
@@ -17555,49 +17875,58 @@
           <a:ln/>
         </p:spPr>
         <p:txBody>
-          <a:bodyPr wrap="square" lIns="635" tIns="635" rIns="635" bIns="635" rtlCol="0" anchor="t">
+          <a:bodyPr wrap="square" lIns="1016" tIns="1016" rIns="1016" bIns="1016" rtlCol="0" anchor="t">
             <a:normAutofit/>
           </a:bodyPr>
           <a:lstStyle/>
           <a:p>
+            <a:pPr indent="0" marL="0">
+              <a:buNone/>
+            </a:pPr>
             <a:r>
               <a:rPr lang="en-US" sz="2100" dirty="0">
                 <a:solidFill>
-                  <a:srgbClr val="17364A"/>
-                </a:solidFill>
-                <a:latin typeface="Aptos" pitchFamily="34" charset="0"/>
-                <a:ea typeface="Aptos" pitchFamily="34" charset="-122"/>
-                <a:cs typeface="Aptos" pitchFamily="34" charset="-120"/>
-              </a:rPr>
-              <a:t>FHIR resource.</a:t>
+                  <a:srgbClr val="003A63"/>
+                </a:solidFill>
+                <a:latin typeface="Aptos" pitchFamily="34" charset="0"/>
+                <a:ea typeface="Aptos" pitchFamily="34" charset="-122"/>
+                <a:cs typeface="Aptos" pitchFamily="34" charset="-120"/>
+              </a:rPr>
+              <a:t>• FHIR resource.</a:t>
             </a:r>
             <a:endParaRPr lang="en-US" sz="2100" dirty="0"/>
           </a:p>
           <a:p>
+            <a:pPr indent="0" marL="0">
+              <a:buNone/>
+            </a:pPr>
             <a:r>
               <a:rPr lang="en-US" sz="2100" dirty="0">
                 <a:solidFill>
-                  <a:srgbClr val="17364A"/>
-                </a:solidFill>
-                <a:latin typeface="Aptos" pitchFamily="34" charset="0"/>
-                <a:ea typeface="Aptos" pitchFamily="34" charset="-122"/>
-                <a:cs typeface="Aptos" pitchFamily="34" charset="-120"/>
-              </a:rPr>
-              <a:t>A FHIR resource is a structured representation of a type of health information, such as Patient,.</a:t>
+                  <a:srgbClr val="003A63"/>
+                </a:solidFill>
+                <a:latin typeface="Aptos" pitchFamily="34" charset="0"/>
+                <a:ea typeface="Aptos" pitchFamily="34" charset="-122"/>
+                <a:cs typeface="Aptos" pitchFamily="34" charset="-120"/>
+              </a:rPr>
+              <a:t>• A FHIR resource is a structured representation of a type of health information, such as.</a:t>
             </a:r>
             <a:endParaRPr lang="en-US" sz="2100" dirty="0"/>
           </a:p>
           <a:p>
+            <a:pPr indent="0" marL="0">
+              <a:buNone/>
+            </a:pPr>
             <a:r>
               <a:rPr lang="en-US" sz="2100" dirty="0">
                 <a:solidFill>
-                  <a:srgbClr val="17364A"/>
-                </a:solidFill>
-                <a:latin typeface="Aptos" pitchFamily="34" charset="0"/>
-                <a:ea typeface="Aptos" pitchFamily="34" charset="-122"/>
-                <a:cs typeface="Aptos" pitchFamily="34" charset="-120"/>
-              </a:rPr>
-              <a:t>AI tools may use combinations of resources to support a workflow.</a:t>
+                  <a:srgbClr val="003A63"/>
+                </a:solidFill>
+                <a:latin typeface="Aptos" pitchFamily="34" charset="0"/>
+                <a:ea typeface="Aptos" pitchFamily="34" charset="-122"/>
+                <a:cs typeface="Aptos" pitchFamily="34" charset="-120"/>
+              </a:rPr>
+              <a:t>• AI tools may use combinations of resources to support a workflow.</a:t>
             </a:r>
             <a:endParaRPr lang="en-US" sz="2100" dirty="0"/>
           </a:p>
@@ -17677,17 +18006,17 @@
         </p:nvSpPr>
         <p:spPr>
           <a:xfrm>
-            <a:off x="7799832" y="1828800"/>
-            <a:ext cx="3145536" cy="685800"/>
-          </a:xfrm>
-          <a:prstGeom prst="rect">
-            <a:avLst/>
-          </a:prstGeom>
-          <a:noFill/>
-          <a:ln/>
-        </p:spPr>
-        <p:txBody>
-          <a:bodyPr wrap="square" lIns="0" tIns="0" rIns="0" bIns="0" rtlCol="0" anchor="t">
+            <a:off x="7799832" y="1801368"/>
+            <a:ext cx="3145536" cy="758952"/>
+          </a:xfrm>
+          <a:prstGeom prst="rect">
+            <a:avLst/>
+          </a:prstGeom>
+          <a:noFill/>
+          <a:ln/>
+        </p:spPr>
+        <p:txBody>
+          <a:bodyPr wrap="square" lIns="254" tIns="254" rIns="254" bIns="254" rtlCol="0" anchor="t">
             <a:normAutofit/>
           </a:bodyPr>
           <a:lstStyle/>
@@ -17696,7 +18025,7 @@
               <a:buNone/>
             </a:pPr>
             <a:r>
-              <a:rPr lang="en-US" sz="1550" dirty="0">
+              <a:rPr lang="en-US" sz="1320" dirty="0">
                 <a:solidFill>
                   <a:srgbClr val="17364A"/>
                 </a:solidFill>
@@ -17706,7 +18035,7 @@
               </a:rPr>
               <a:t>FHIR resource.</a:t>
             </a:r>
-            <a:endParaRPr lang="en-US" sz="1550" dirty="0"/>
+            <a:endParaRPr lang="en-US" sz="1320" dirty="0"/>
           </a:p>
         </p:txBody>
       </p:sp>
@@ -17794,13 +18123,16 @@
           <a:ln/>
         </p:spPr>
         <p:txBody>
-          <a:bodyPr wrap="square" lIns="254" tIns="254" rIns="254" bIns="254" rtlCol="0" anchor="t">
+          <a:bodyPr wrap="square" lIns="508" tIns="508" rIns="508" bIns="508" rtlCol="0" anchor="t">
             <a:normAutofit/>
           </a:bodyPr>
           <a:lstStyle/>
           <a:p>
-            <a:r>
-              <a:rPr lang="en-US" sz="1380" dirty="0">
+            <a:pPr indent="0" marL="0">
+              <a:buNone/>
+            </a:pPr>
+            <a:r>
+              <a:rPr lang="en-US" sz="1220" dirty="0">
                 <a:solidFill>
                   <a:srgbClr val="17364A"/>
                 </a:solidFill>
@@ -17808,13 +18140,16 @@
                 <a:ea typeface="Aptos" pitchFamily="34" charset="-122"/>
                 <a:cs typeface="Aptos" pitchFamily="34" charset="-120"/>
               </a:rPr>
-              <a:t>A FHIR resource is a structured representation of a type of health information, such as.</a:t>
-            </a:r>
-            <a:endParaRPr lang="en-US" sz="1380" dirty="0"/>
-          </a:p>
-          <a:p>
-            <a:r>
-              <a:rPr lang="en-US" sz="1380" dirty="0">
+              <a:t>A FHIR resource is a structured representation of a type of health.</a:t>
+            </a:r>
+            <a:endParaRPr lang="en-US" sz="1220" dirty="0"/>
+          </a:p>
+          <a:p>
+            <a:pPr indent="0" marL="0">
+              <a:buNone/>
+            </a:pPr>
+            <a:r>
+              <a:rPr lang="en-US" sz="1220" dirty="0">
                 <a:solidFill>
                   <a:srgbClr val="17364A"/>
                 </a:solidFill>
@@ -17824,11 +18159,14 @@
               </a:rPr>
               <a:t>FHIR profile.</a:t>
             </a:r>
-            <a:endParaRPr lang="en-US" sz="1380" dirty="0"/>
-          </a:p>
-          <a:p>
-            <a:r>
-              <a:rPr lang="en-US" sz="1380" dirty="0">
+            <a:endParaRPr lang="en-US" sz="1220" dirty="0"/>
+          </a:p>
+          <a:p>
+            <a:pPr indent="0" marL="0">
+              <a:buNone/>
+            </a:pPr>
+            <a:r>
+              <a:rPr lang="en-US" sz="1220" dirty="0">
                 <a:solidFill>
                   <a:srgbClr val="17364A"/>
                 </a:solidFill>
@@ -17836,9 +18174,9 @@
                 <a:ea typeface="Aptos" pitchFamily="34" charset="-122"/>
                 <a:cs typeface="Aptos" pitchFamily="34" charset="-120"/>
               </a:rPr>
-              <a:t>A FHIR profile constrains or extends a resource for a specific purpose.</a:t>
-            </a:r>
-            <a:endParaRPr lang="en-US" sz="1380" dirty="0"/>
+              <a:t>A FHIR profile constrains or extends a resource for a specific.</a:t>
+            </a:r>
+            <a:endParaRPr lang="en-US" sz="1220" dirty="0"/>
           </a:p>
         </p:txBody>
       </p:sp>
@@ -17916,17 +18254,17 @@
         </p:nvSpPr>
         <p:spPr>
           <a:xfrm>
-            <a:off x="7799832" y="5001768"/>
-            <a:ext cx="3145536" cy="502920"/>
-          </a:xfrm>
-          <a:prstGeom prst="rect">
-            <a:avLst/>
-          </a:prstGeom>
-          <a:noFill/>
-          <a:ln/>
-        </p:spPr>
-        <p:txBody>
-          <a:bodyPr wrap="square" lIns="0" tIns="0" rIns="0" bIns="0" rtlCol="0" anchor="t">
+            <a:off x="7799832" y="4974336"/>
+            <a:ext cx="3145536" cy="576072"/>
+          </a:xfrm>
+          <a:prstGeom prst="rect">
+            <a:avLst/>
+          </a:prstGeom>
+          <a:noFill/>
+          <a:ln/>
+        </p:spPr>
+        <p:txBody>
+          <a:bodyPr wrap="square" lIns="254" tIns="254" rIns="254" bIns="254" rtlCol="0" anchor="t">
             <a:normAutofit/>
           </a:bodyPr>
           <a:lstStyle/>
@@ -17935,7 +18273,7 @@
               <a:buNone/>
             </a:pPr>
             <a:r>
-              <a:rPr lang="en-US" sz="1550" dirty="0">
+              <a:rPr lang="en-US" sz="1320" dirty="0">
                 <a:solidFill>
                   <a:srgbClr val="17364A"/>
                 </a:solidFill>
@@ -17943,9 +18281,9 @@
                 <a:ea typeface="Aptos" pitchFamily="34" charset="-122"/>
                 <a:cs typeface="Aptos" pitchFamily="34" charset="-120"/>
               </a:rPr>
-              <a:t>Connect the concept to public health purpose, responsible use, required safeguards, documentation, and the next action a department should take.</a:t>
-            </a:r>
-            <a:endParaRPr lang="en-US" sz="1550" dirty="0"/>
+              <a:t>Connect the concept to public health purpose, responsible use, required safeguards, documentation, and the next action a.</a:t>
+            </a:r>
+            <a:endParaRPr lang="en-US" sz="1320" dirty="0"/>
           </a:p>
         </p:txBody>
       </p:sp>

--- a/downloads/presentations/modules/arc-250.pptx
+++ b/downloads/presentations/modules/arc-250.pptx
@@ -3509,11 +3509,11 @@
         <p:spPr>
           <a:xfrm>
             <a:off x="7635240" y="1325880"/>
-            <a:ext cx="3474720" cy="1325880"/>
+            <a:ext cx="3474720" cy="1207008"/>
           </a:xfrm>
           <a:prstGeom prst="roundRect">
             <a:avLst>
-              <a:gd name="adj" fmla="val 8276"/>
+              <a:gd name="adj" fmla="val 9091"/>
             </a:avLst>
           </a:prstGeom>
           <a:solidFill>
@@ -3575,7 +3575,7 @@
         <p:spPr>
           <a:xfrm>
             <a:off x="7799832" y="1801368"/>
-            <a:ext cx="3145536" cy="758952"/>
+            <a:ext cx="3145536" cy="640080"/>
           </a:xfrm>
           <a:prstGeom prst="rect">
             <a:avLst/>
@@ -3615,12 +3615,12 @@
         </p:nvSpPr>
         <p:spPr>
           <a:xfrm>
-            <a:off x="7635240" y="2788920"/>
-            <a:ext cx="3474720" cy="1536192"/>
+            <a:off x="7635240" y="2670048"/>
+            <a:ext cx="3474720" cy="1377086"/>
           </a:xfrm>
           <a:prstGeom prst="roundRect">
             <a:avLst>
-              <a:gd name="adj" fmla="val 7143"/>
+              <a:gd name="adj" fmla="val 7968"/>
             </a:avLst>
           </a:prstGeom>
           <a:solidFill>
@@ -3642,7 +3642,7 @@
         </p:nvSpPr>
         <p:spPr>
           <a:xfrm>
-            <a:off x="7799832" y="2935224"/>
+            <a:off x="7799832" y="2816352"/>
             <a:ext cx="3145536" cy="256032"/>
           </a:xfrm>
           <a:prstGeom prst="rect">
@@ -3681,8 +3681,8 @@
         </p:nvSpPr>
         <p:spPr>
           <a:xfrm>
-            <a:off x="7818120" y="3300984"/>
-            <a:ext cx="3090672" cy="877824"/>
+            <a:off x="7818120" y="3182112"/>
+            <a:ext cx="3090672" cy="718718"/>
           </a:xfrm>
           <a:prstGeom prst="rect">
             <a:avLst/>
@@ -3756,12 +3756,12 @@
         </p:nvSpPr>
         <p:spPr>
           <a:xfrm>
-            <a:off x="7635240" y="4498848"/>
-            <a:ext cx="3474720" cy="1143000"/>
+            <a:off x="7635240" y="4184294"/>
+            <a:ext cx="3474720" cy="1466698"/>
           </a:xfrm>
           <a:prstGeom prst="roundRect">
             <a:avLst>
-              <a:gd name="adj" fmla="val 9600"/>
+              <a:gd name="adj" fmla="val 7481"/>
             </a:avLst>
           </a:prstGeom>
           <a:solidFill>
@@ -3783,7 +3783,7 @@
         </p:nvSpPr>
         <p:spPr>
           <a:xfrm>
-            <a:off x="7799832" y="4645152"/>
+            <a:off x="7799832" y="4330598"/>
             <a:ext cx="3145536" cy="256032"/>
           </a:xfrm>
           <a:prstGeom prst="rect">
@@ -3822,8 +3822,8 @@
         </p:nvSpPr>
         <p:spPr>
           <a:xfrm>
-            <a:off x="7799832" y="4974336"/>
-            <a:ext cx="3145536" cy="576072"/>
+            <a:off x="7799832" y="4659782"/>
+            <a:ext cx="3145536" cy="899770"/>
           </a:xfrm>
           <a:prstGeom prst="rect">
             <a:avLst/>
@@ -3849,7 +3849,7 @@
                 <a:ea typeface="Aptos" pitchFamily="34" charset="-122"/>
                 <a:cs typeface="Aptos" pitchFamily="34" charset="-120"/>
               </a:rPr>
-              <a:t>Connect the concept to public health purpose, responsible use, required safeguards, documentation, and the next action a.</a:t>
+              <a:t>Connect the concept to public health purpose, responsible use, required safeguards, documentation, and the next action a department should take.</a:t>
             </a:r>
             <a:endParaRPr lang="en-US" sz="1320" dirty="0"/>
           </a:p>
@@ -4218,11 +4218,11 @@
         <p:spPr>
           <a:xfrm>
             <a:off x="7635240" y="1325880"/>
-            <a:ext cx="3474720" cy="1325880"/>
+            <a:ext cx="3474720" cy="1255471"/>
           </a:xfrm>
           <a:prstGeom prst="roundRect">
             <a:avLst>
-              <a:gd name="adj" fmla="val 8276"/>
+              <a:gd name="adj" fmla="val 8740"/>
             </a:avLst>
           </a:prstGeom>
           <a:solidFill>
@@ -4284,7 +4284,7 @@
         <p:spPr>
           <a:xfrm>
             <a:off x="7799832" y="1801368"/>
-            <a:ext cx="3145536" cy="758952"/>
+            <a:ext cx="3145536" cy="688543"/>
           </a:xfrm>
           <a:prstGeom prst="rect">
             <a:avLst/>
@@ -4324,12 +4324,12 @@
         </p:nvSpPr>
         <p:spPr>
           <a:xfrm>
-            <a:off x="7635240" y="2788920"/>
-            <a:ext cx="3474720" cy="1536192"/>
+            <a:off x="7635240" y="2718511"/>
+            <a:ext cx="3474720" cy="1328623"/>
           </a:xfrm>
           <a:prstGeom prst="roundRect">
             <a:avLst>
-              <a:gd name="adj" fmla="val 7143"/>
+              <a:gd name="adj" fmla="val 8259"/>
             </a:avLst>
           </a:prstGeom>
           <a:solidFill>
@@ -4351,7 +4351,7 @@
         </p:nvSpPr>
         <p:spPr>
           <a:xfrm>
-            <a:off x="7799832" y="2935224"/>
+            <a:off x="7799832" y="2864815"/>
             <a:ext cx="3145536" cy="256032"/>
           </a:xfrm>
           <a:prstGeom prst="rect">
@@ -4390,8 +4390,8 @@
         </p:nvSpPr>
         <p:spPr>
           <a:xfrm>
-            <a:off x="7818120" y="3300984"/>
-            <a:ext cx="3090672" cy="877824"/>
+            <a:off x="7818120" y="3230575"/>
+            <a:ext cx="3090672" cy="670255"/>
           </a:xfrm>
           <a:prstGeom prst="rect">
             <a:avLst/>
@@ -4465,12 +4465,12 @@
         </p:nvSpPr>
         <p:spPr>
           <a:xfrm>
-            <a:off x="7635240" y="4498848"/>
-            <a:ext cx="3474720" cy="1143000"/>
+            <a:off x="7635240" y="4184294"/>
+            <a:ext cx="3474720" cy="1466698"/>
           </a:xfrm>
           <a:prstGeom prst="roundRect">
             <a:avLst>
-              <a:gd name="adj" fmla="val 9600"/>
+              <a:gd name="adj" fmla="val 7481"/>
             </a:avLst>
           </a:prstGeom>
           <a:solidFill>
@@ -4492,7 +4492,7 @@
         </p:nvSpPr>
         <p:spPr>
           <a:xfrm>
-            <a:off x="7799832" y="4645152"/>
+            <a:off x="7799832" y="4330598"/>
             <a:ext cx="3145536" cy="256032"/>
           </a:xfrm>
           <a:prstGeom prst="rect">
@@ -4531,8 +4531,8 @@
         </p:nvSpPr>
         <p:spPr>
           <a:xfrm>
-            <a:off x="7799832" y="4974336"/>
-            <a:ext cx="3145536" cy="576072"/>
+            <a:off x="7799832" y="4659782"/>
+            <a:ext cx="3145536" cy="899770"/>
           </a:xfrm>
           <a:prstGeom prst="rect">
             <a:avLst/>
@@ -4558,7 +4558,7 @@
                 <a:ea typeface="Aptos" pitchFamily="34" charset="-122"/>
                 <a:cs typeface="Aptos" pitchFamily="34" charset="-120"/>
               </a:rPr>
-              <a:t>Connect the concept to public health purpose, responsible use, required safeguards, documentation, and the next action a.</a:t>
+              <a:t>Connect the concept to public health purpose, responsible use, required safeguards, documentation, and the next action a department should take.</a:t>
             </a:r>
             <a:endParaRPr lang="en-US" sz="1320" dirty="0"/>
           </a:p>
@@ -4927,11 +4927,11 @@
         <p:spPr>
           <a:xfrm>
             <a:off x="7635240" y="1325880"/>
-            <a:ext cx="3474720" cy="1325880"/>
+            <a:ext cx="3474720" cy="1207008"/>
           </a:xfrm>
           <a:prstGeom prst="roundRect">
             <a:avLst>
-              <a:gd name="adj" fmla="val 8276"/>
+              <a:gd name="adj" fmla="val 9091"/>
             </a:avLst>
           </a:prstGeom>
           <a:solidFill>
@@ -4993,7 +4993,7 @@
         <p:spPr>
           <a:xfrm>
             <a:off x="7799832" y="1801368"/>
-            <a:ext cx="3145536" cy="758952"/>
+            <a:ext cx="3145536" cy="640080"/>
           </a:xfrm>
           <a:prstGeom prst="rect">
             <a:avLst/>
@@ -5033,12 +5033,12 @@
         </p:nvSpPr>
         <p:spPr>
           <a:xfrm>
-            <a:off x="7635240" y="2788920"/>
-            <a:ext cx="3474720" cy="1536192"/>
+            <a:off x="7635240" y="2670048"/>
+            <a:ext cx="3474720" cy="1377086"/>
           </a:xfrm>
           <a:prstGeom prst="roundRect">
             <a:avLst>
-              <a:gd name="adj" fmla="val 7143"/>
+              <a:gd name="adj" fmla="val 7968"/>
             </a:avLst>
           </a:prstGeom>
           <a:solidFill>
@@ -5060,7 +5060,7 @@
         </p:nvSpPr>
         <p:spPr>
           <a:xfrm>
-            <a:off x="7799832" y="2935224"/>
+            <a:off x="7799832" y="2816352"/>
             <a:ext cx="3145536" cy="256032"/>
           </a:xfrm>
           <a:prstGeom prst="rect">
@@ -5099,8 +5099,8 @@
         </p:nvSpPr>
         <p:spPr>
           <a:xfrm>
-            <a:off x="7818120" y="3300984"/>
-            <a:ext cx="3090672" cy="877824"/>
+            <a:off x="7818120" y="3182112"/>
+            <a:ext cx="3090672" cy="718718"/>
           </a:xfrm>
           <a:prstGeom prst="rect">
             <a:avLst/>
@@ -5174,12 +5174,12 @@
         </p:nvSpPr>
         <p:spPr>
           <a:xfrm>
-            <a:off x="7635240" y="4498848"/>
-            <a:ext cx="3474720" cy="1143000"/>
+            <a:off x="7635240" y="4184294"/>
+            <a:ext cx="3474720" cy="1466698"/>
           </a:xfrm>
           <a:prstGeom prst="roundRect">
             <a:avLst>
-              <a:gd name="adj" fmla="val 9600"/>
+              <a:gd name="adj" fmla="val 7481"/>
             </a:avLst>
           </a:prstGeom>
           <a:solidFill>
@@ -5201,7 +5201,7 @@
         </p:nvSpPr>
         <p:spPr>
           <a:xfrm>
-            <a:off x="7799832" y="4645152"/>
+            <a:off x="7799832" y="4330598"/>
             <a:ext cx="3145536" cy="256032"/>
           </a:xfrm>
           <a:prstGeom prst="rect">
@@ -5240,8 +5240,8 @@
         </p:nvSpPr>
         <p:spPr>
           <a:xfrm>
-            <a:off x="7799832" y="4974336"/>
-            <a:ext cx="3145536" cy="576072"/>
+            <a:off x="7799832" y="4659782"/>
+            <a:ext cx="3145536" cy="899770"/>
           </a:xfrm>
           <a:prstGeom prst="rect">
             <a:avLst/>
@@ -5267,7 +5267,7 @@
                 <a:ea typeface="Aptos" pitchFamily="34" charset="-122"/>
                 <a:cs typeface="Aptos" pitchFamily="34" charset="-120"/>
               </a:rPr>
-              <a:t>Connect the concept to public health purpose, responsible use, required safeguards, documentation, and the next action a.</a:t>
+              <a:t>Connect the concept to public health purpose, responsible use, required safeguards, documentation, and the next action a department should take.</a:t>
             </a:r>
             <a:endParaRPr lang="en-US" sz="1320" dirty="0"/>
           </a:p>
@@ -5636,11 +5636,11 @@
         <p:spPr>
           <a:xfrm>
             <a:off x="7635240" y="1325880"/>
-            <a:ext cx="3474720" cy="1325880"/>
+            <a:ext cx="3474720" cy="1207008"/>
           </a:xfrm>
           <a:prstGeom prst="roundRect">
             <a:avLst>
-              <a:gd name="adj" fmla="val 8276"/>
+              <a:gd name="adj" fmla="val 9091"/>
             </a:avLst>
           </a:prstGeom>
           <a:solidFill>
@@ -5702,7 +5702,7 @@
         <p:spPr>
           <a:xfrm>
             <a:off x="7799832" y="1801368"/>
-            <a:ext cx="3145536" cy="758952"/>
+            <a:ext cx="3145536" cy="640080"/>
           </a:xfrm>
           <a:prstGeom prst="rect">
             <a:avLst/>
@@ -5742,7 +5742,7 @@
         </p:nvSpPr>
         <p:spPr>
           <a:xfrm>
-            <a:off x="7635240" y="2788920"/>
+            <a:off x="7635240" y="2670048"/>
             <a:ext cx="3474720" cy="1536192"/>
           </a:xfrm>
           <a:prstGeom prst="roundRect">
@@ -5769,8 +5769,8 @@
         </p:nvSpPr>
         <p:spPr>
           <a:xfrm>
-            <a:off x="7799832" y="2935224"/>
-            <a:ext cx="3145536" cy="256032"/>
+            <a:off x="7799832" y="2798064"/>
+            <a:ext cx="3145536" cy="237744"/>
           </a:xfrm>
           <a:prstGeom prst="rect">
             <a:avLst/>
@@ -5786,7 +5786,7 @@
               <a:buNone/>
             </a:pPr>
             <a:r>
-              <a:rPr lang="en-US" sz="1300" b="1" dirty="0">
+              <a:rPr lang="en-US" sz="1250" b="1" dirty="0">
                 <a:solidFill>
                   <a:srgbClr val="0068B7"/>
                 </a:solidFill>
@@ -5794,101 +5794,317 @@
                 <a:ea typeface="Aptos" pitchFamily="34" charset="-122"/>
                 <a:cs typeface="Aptos" pitchFamily="34" charset="-120"/>
               </a:rPr>
-              <a:t>Concept checkpoints</a:t>
-            </a:r>
-            <a:endParaRPr lang="en-US" sz="1300" dirty="0"/>
-          </a:p>
-        </p:txBody>
-      </p:sp>
-      <p:sp>
-        <p:nvSpPr>
-          <p:cNvPr id="15" name="Text 13"/>
-          <p:cNvSpPr/>
-          <p:nvPr/>
-        </p:nvSpPr>
-        <p:spPr>
-          <a:xfrm>
-            <a:off x="7818120" y="3300984"/>
-            <a:ext cx="3090672" cy="877824"/>
-          </a:xfrm>
-          <a:prstGeom prst="rect">
-            <a:avLst/>
-          </a:prstGeom>
-          <a:noFill/>
-          <a:ln/>
-        </p:spPr>
-        <p:txBody>
-          <a:bodyPr wrap="square" lIns="508" tIns="508" rIns="508" bIns="508" rtlCol="0" anchor="t">
+              <a:t>Risk control loop</a:t>
+            </a:r>
+            <a:endParaRPr lang="en-US" sz="1250" dirty="0"/>
+          </a:p>
+        </p:txBody>
+      </p:sp>
+      <p:sp>
+        <p:nvSpPr>
+          <p:cNvPr id="15" name="Shape 13"/>
+          <p:cNvSpPr/>
+          <p:nvPr/>
+        </p:nvSpPr>
+        <p:spPr>
+          <a:xfrm>
+            <a:off x="8763000" y="3351276"/>
+            <a:ext cx="164592" cy="0"/>
+          </a:xfrm>
+          <a:prstGeom prst="line">
+            <a:avLst/>
+          </a:prstGeom>
+          <a:noFill/>
+          <a:ln w="15240">
+            <a:solidFill>
+              <a:srgbClr val="8ABBD8"/>
+            </a:solidFill>
+            <a:prstDash val="solid"/>
+          </a:ln>
+        </p:spPr>
+      </p:sp>
+      <p:sp>
+        <p:nvSpPr>
+          <p:cNvPr id="16" name="Shape 14"/>
+          <p:cNvSpPr/>
+          <p:nvPr/>
+        </p:nvSpPr>
+        <p:spPr>
+          <a:xfrm>
+            <a:off x="7872984" y="3200400"/>
+            <a:ext cx="890016" cy="301752"/>
+          </a:xfrm>
+          <a:prstGeom prst="roundRect">
+            <a:avLst>
+              <a:gd name="adj" fmla="val 24242"/>
+            </a:avLst>
+          </a:prstGeom>
+          <a:solidFill>
+            <a:srgbClr val="0068B7"/>
+          </a:solidFill>
+          <a:ln w="12700">
+            <a:solidFill>
+              <a:srgbClr val="0068B7"/>
+            </a:solidFill>
+            <a:prstDash val="solid"/>
+          </a:ln>
+        </p:spPr>
+      </p:sp>
+      <p:sp>
+        <p:nvSpPr>
+          <p:cNvPr id="17" name="Text 15"/>
+          <p:cNvSpPr/>
+          <p:nvPr/>
+        </p:nvSpPr>
+        <p:spPr>
+          <a:xfrm>
+            <a:off x="7909560" y="3273552"/>
+            <a:ext cx="816864" cy="146304"/>
+          </a:xfrm>
+          <a:prstGeom prst="rect">
+            <a:avLst/>
+          </a:prstGeom>
+          <a:noFill/>
+          <a:ln/>
+        </p:spPr>
+        <p:txBody>
+          <a:bodyPr wrap="square" lIns="0" tIns="0" rIns="0" bIns="0" rtlCol="0" anchor="ctr">
             <a:normAutofit/>
           </a:bodyPr>
           <a:lstStyle/>
           <a:p>
-            <a:pPr indent="0" marL="0">
-              <a:buNone/>
-            </a:pPr>
-            <a:r>
-              <a:rPr lang="en-US" sz="1220" dirty="0">
-                <a:solidFill>
-                  <a:srgbClr val="17364A"/>
-                </a:solidFill>
-                <a:latin typeface="Aptos" pitchFamily="34" charset="0"/>
-                <a:ea typeface="Aptos" pitchFamily="34" charset="-122"/>
-                <a:cs typeface="Aptos" pitchFamily="34" charset="-120"/>
-              </a:rPr>
-              <a:t>Overbroad API access.</a:t>
-            </a:r>
-            <a:endParaRPr lang="en-US" sz="1220" dirty="0"/>
-          </a:p>
-          <a:p>
-            <a:pPr indent="0" marL="0">
-              <a:buNone/>
-            </a:pPr>
-            <a:r>
-              <a:rPr lang="en-US" sz="1220" dirty="0">
-                <a:solidFill>
-                  <a:srgbClr val="17364A"/>
-                </a:solidFill>
-                <a:latin typeface="Aptos" pitchFamily="34" charset="0"/>
-                <a:ea typeface="Aptos" pitchFamily="34" charset="-122"/>
-                <a:cs typeface="Aptos" pitchFamily="34" charset="-120"/>
-              </a:rPr>
-              <a:t>AI tools may request more data than needed.</a:t>
-            </a:r>
-            <a:endParaRPr lang="en-US" sz="1220" dirty="0"/>
-          </a:p>
-          <a:p>
-            <a:pPr indent="0" marL="0">
-              <a:buNone/>
-            </a:pPr>
-            <a:r>
-              <a:rPr lang="en-US" sz="1220" dirty="0">
-                <a:solidFill>
-                  <a:srgbClr val="17364A"/>
-                </a:solidFill>
-                <a:latin typeface="Aptos" pitchFamily="34" charset="0"/>
-                <a:ea typeface="Aptos" pitchFamily="34" charset="-122"/>
-                <a:cs typeface="Aptos" pitchFamily="34" charset="-120"/>
-              </a:rPr>
-              <a:t>Guardrails include scoped access, minimum necessary review, and.</a:t>
-            </a:r>
-            <a:endParaRPr lang="en-US" sz="1220" dirty="0"/>
-          </a:p>
-        </p:txBody>
-      </p:sp>
-      <p:sp>
-        <p:nvSpPr>
-          <p:cNvPr id="16" name="Shape 14"/>
-          <p:cNvSpPr/>
-          <p:nvPr/>
-        </p:nvSpPr>
-        <p:spPr>
-          <a:xfrm>
-            <a:off x="7635240" y="4498848"/>
-            <a:ext cx="3474720" cy="1143000"/>
+            <a:pPr algn="ctr" indent="0" marL="0">
+              <a:buNone/>
+            </a:pPr>
+            <a:r>
+              <a:rPr lang="en-US" sz="880" b="1" dirty="0">
+                <a:solidFill>
+                  <a:srgbClr val="FFFFFF"/>
+                </a:solidFill>
+                <a:latin typeface="Aptos" pitchFamily="34" charset="0"/>
+                <a:ea typeface="Aptos" pitchFamily="34" charset="-122"/>
+                <a:cs typeface="Aptos" pitchFamily="34" charset="-120"/>
+              </a:rPr>
+              <a:t>Identify</a:t>
+            </a:r>
+            <a:endParaRPr lang="en-US" sz="880" dirty="0"/>
+          </a:p>
+        </p:txBody>
+      </p:sp>
+      <p:sp>
+        <p:nvSpPr>
+          <p:cNvPr id="18" name="Shape 16"/>
+          <p:cNvSpPr/>
+          <p:nvPr/>
+        </p:nvSpPr>
+        <p:spPr>
+          <a:xfrm>
+            <a:off x="9817608" y="3351276"/>
+            <a:ext cx="164592" cy="0"/>
+          </a:xfrm>
+          <a:prstGeom prst="line">
+            <a:avLst/>
+          </a:prstGeom>
+          <a:noFill/>
+          <a:ln w="15240">
+            <a:solidFill>
+              <a:srgbClr val="8ABBD8"/>
+            </a:solidFill>
+            <a:prstDash val="solid"/>
+          </a:ln>
+        </p:spPr>
+      </p:sp>
+      <p:sp>
+        <p:nvSpPr>
+          <p:cNvPr id="19" name="Shape 17"/>
+          <p:cNvSpPr/>
+          <p:nvPr/>
+        </p:nvSpPr>
+        <p:spPr>
+          <a:xfrm>
+            <a:off x="8927592" y="3200400"/>
+            <a:ext cx="890016" cy="301752"/>
           </a:xfrm>
           <a:prstGeom prst="roundRect">
             <a:avLst>
-              <a:gd name="adj" fmla="val 9600"/>
+              <a:gd name="adj" fmla="val 24242"/>
+            </a:avLst>
+          </a:prstGeom>
+          <a:solidFill>
+            <a:srgbClr val="2F8A28"/>
+          </a:solidFill>
+          <a:ln w="12700">
+            <a:solidFill>
+              <a:srgbClr val="2F8A28"/>
+            </a:solidFill>
+            <a:prstDash val="solid"/>
+          </a:ln>
+        </p:spPr>
+      </p:sp>
+      <p:sp>
+        <p:nvSpPr>
+          <p:cNvPr id="20" name="Text 18"/>
+          <p:cNvSpPr/>
+          <p:nvPr/>
+        </p:nvSpPr>
+        <p:spPr>
+          <a:xfrm>
+            <a:off x="8964168" y="3273552"/>
+            <a:ext cx="816864" cy="146304"/>
+          </a:xfrm>
+          <a:prstGeom prst="rect">
+            <a:avLst/>
+          </a:prstGeom>
+          <a:noFill/>
+          <a:ln/>
+        </p:spPr>
+        <p:txBody>
+          <a:bodyPr wrap="square" lIns="0" tIns="0" rIns="0" bIns="0" rtlCol="0" anchor="ctr">
+            <a:normAutofit/>
+          </a:bodyPr>
+          <a:lstStyle/>
+          <a:p>
+            <a:pPr algn="ctr" indent="0" marL="0">
+              <a:buNone/>
+            </a:pPr>
+            <a:r>
+              <a:rPr lang="en-US" sz="880" b="1" dirty="0">
+                <a:solidFill>
+                  <a:srgbClr val="FFFFFF"/>
+                </a:solidFill>
+                <a:latin typeface="Aptos" pitchFamily="34" charset="0"/>
+                <a:ea typeface="Aptos" pitchFamily="34" charset="-122"/>
+                <a:cs typeface="Aptos" pitchFamily="34" charset="-120"/>
+              </a:rPr>
+              <a:t>Control</a:t>
+            </a:r>
+            <a:endParaRPr lang="en-US" sz="880" dirty="0"/>
+          </a:p>
+        </p:txBody>
+      </p:sp>
+      <p:sp>
+        <p:nvSpPr>
+          <p:cNvPr id="21" name="Shape 19"/>
+          <p:cNvSpPr/>
+          <p:nvPr/>
+        </p:nvSpPr>
+        <p:spPr>
+          <a:xfrm>
+            <a:off x="9982200" y="3200400"/>
+            <a:ext cx="890016" cy="301752"/>
+          </a:xfrm>
+          <a:prstGeom prst="roundRect">
+            <a:avLst>
+              <a:gd name="adj" fmla="val 24242"/>
+            </a:avLst>
+          </a:prstGeom>
+          <a:solidFill>
+            <a:srgbClr val="6A4CA3"/>
+          </a:solidFill>
+          <a:ln w="12700">
+            <a:solidFill>
+              <a:srgbClr val="6A4CA3"/>
+            </a:solidFill>
+            <a:prstDash val="solid"/>
+          </a:ln>
+        </p:spPr>
+      </p:sp>
+      <p:sp>
+        <p:nvSpPr>
+          <p:cNvPr id="22" name="Text 20"/>
+          <p:cNvSpPr/>
+          <p:nvPr/>
+        </p:nvSpPr>
+        <p:spPr>
+          <a:xfrm>
+            <a:off x="10018776" y="3273552"/>
+            <a:ext cx="816864" cy="146304"/>
+          </a:xfrm>
+          <a:prstGeom prst="rect">
+            <a:avLst/>
+          </a:prstGeom>
+          <a:noFill/>
+          <a:ln/>
+        </p:spPr>
+        <p:txBody>
+          <a:bodyPr wrap="square" lIns="0" tIns="0" rIns="0" bIns="0" rtlCol="0" anchor="ctr">
+            <a:normAutofit/>
+          </a:bodyPr>
+          <a:lstStyle/>
+          <a:p>
+            <a:pPr algn="ctr" indent="0" marL="0">
+              <a:buNone/>
+            </a:pPr>
+            <a:r>
+              <a:rPr lang="en-US" sz="880" b="1" dirty="0">
+                <a:solidFill>
+                  <a:srgbClr val="FFFFFF"/>
+                </a:solidFill>
+                <a:latin typeface="Aptos" pitchFamily="34" charset="0"/>
+                <a:ea typeface="Aptos" pitchFamily="34" charset="-122"/>
+                <a:cs typeface="Aptos" pitchFamily="34" charset="-120"/>
+              </a:rPr>
+              <a:t>Monitor</a:t>
+            </a:r>
+            <a:endParaRPr lang="en-US" sz="880" dirty="0"/>
+          </a:p>
+        </p:txBody>
+      </p:sp>
+      <p:sp>
+        <p:nvSpPr>
+          <p:cNvPr id="23" name="Text 21"/>
+          <p:cNvSpPr/>
+          <p:nvPr/>
+        </p:nvSpPr>
+        <p:spPr>
+          <a:xfrm>
+            <a:off x="7854696" y="3694176"/>
+            <a:ext cx="3035808" cy="365760"/>
+          </a:xfrm>
+          <a:prstGeom prst="rect">
+            <a:avLst/>
+          </a:prstGeom>
+          <a:noFill/>
+          <a:ln/>
+        </p:spPr>
+        <p:txBody>
+          <a:bodyPr wrap="square" lIns="254" tIns="254" rIns="254" bIns="254" rtlCol="0" anchor="t">
+            <a:normAutofit/>
+          </a:bodyPr>
+          <a:lstStyle/>
+          <a:p>
+            <a:pPr indent="0" marL="0">
+              <a:buNone/>
+            </a:pPr>
+            <a:r>
+              <a:rPr lang="en-US" sz="1120" dirty="0">
+                <a:solidFill>
+                  <a:srgbClr val="17364A"/>
+                </a:solidFill>
+                <a:latin typeface="Aptos" pitchFamily="34" charset="0"/>
+                <a:ea typeface="Aptos" pitchFamily="34" charset="-122"/>
+                <a:cs typeface="Aptos" pitchFamily="34" charset="-120"/>
+              </a:rPr>
+              <a:t>Responsible use depends on finding risks early, applying safeguards, and watching for drift or harm over time.</a:t>
+            </a:r>
+            <a:endParaRPr lang="en-US" sz="1120" dirty="0"/>
+          </a:p>
+        </p:txBody>
+      </p:sp>
+      <p:sp>
+        <p:nvSpPr>
+          <p:cNvPr id="24" name="Shape 22"/>
+          <p:cNvSpPr/>
+          <p:nvPr/>
+        </p:nvSpPr>
+        <p:spPr>
+          <a:xfrm>
+            <a:off x="7635240" y="4343400"/>
+            <a:ext cx="3474720" cy="1255471"/>
+          </a:xfrm>
+          <a:prstGeom prst="roundRect">
+            <a:avLst>
+              <a:gd name="adj" fmla="val 8740"/>
             </a:avLst>
           </a:prstGeom>
           <a:solidFill>
@@ -5904,13 +6120,13 @@
       </p:sp>
       <p:sp>
         <p:nvSpPr>
-          <p:cNvPr id="17" name="Text 15"/>
-          <p:cNvSpPr/>
-          <p:nvPr/>
-        </p:nvSpPr>
-        <p:spPr>
-          <a:xfrm>
-            <a:off x="7799832" y="4645152"/>
+          <p:cNvPr id="25" name="Text 23"/>
+          <p:cNvSpPr/>
+          <p:nvPr/>
+        </p:nvSpPr>
+        <p:spPr>
+          <a:xfrm>
+            <a:off x="7799832" y="4489704"/>
             <a:ext cx="3145536" cy="256032"/>
           </a:xfrm>
           <a:prstGeom prst="rect">
@@ -5943,14 +6159,14 @@
       </p:sp>
       <p:sp>
         <p:nvSpPr>
-          <p:cNvPr id="18" name="Text 16"/>
-          <p:cNvSpPr/>
-          <p:nvPr/>
-        </p:nvSpPr>
-        <p:spPr>
-          <a:xfrm>
-            <a:off x="7799832" y="4974336"/>
-            <a:ext cx="3145536" cy="576072"/>
+          <p:cNvPr id="26" name="Text 24"/>
+          <p:cNvSpPr/>
+          <p:nvPr/>
+        </p:nvSpPr>
+        <p:spPr>
+          <a:xfrm>
+            <a:off x="7799832" y="4818888"/>
+            <a:ext cx="3145536" cy="688543"/>
           </a:xfrm>
           <a:prstGeom prst="rect">
             <a:avLst/>
@@ -5976,7 +6192,7 @@
                 <a:ea typeface="Aptos" pitchFamily="34" charset="-122"/>
                 <a:cs typeface="Aptos" pitchFamily="34" charset="-120"/>
               </a:rPr>
-              <a:t>Identify what could go wrong, who could be affected, what safeguards are needed, and what evidence should be reviewed.</a:t>
+              <a:t>Identify what could go wrong, who could be affected, what safeguards are needed, and what evidence should be reviewed before use.</a:t>
             </a:r>
             <a:endParaRPr lang="en-US" sz="1320" dirty="0"/>
           </a:p>
@@ -6345,11 +6561,11 @@
         <p:spPr>
           <a:xfrm>
             <a:off x="7635240" y="1325880"/>
-            <a:ext cx="3474720" cy="1325880"/>
+            <a:ext cx="3474720" cy="1207008"/>
           </a:xfrm>
           <a:prstGeom prst="roundRect">
             <a:avLst>
-              <a:gd name="adj" fmla="val 8276"/>
+              <a:gd name="adj" fmla="val 9091"/>
             </a:avLst>
           </a:prstGeom>
           <a:solidFill>
@@ -6411,7 +6627,7 @@
         <p:spPr>
           <a:xfrm>
             <a:off x="7799832" y="1801368"/>
-            <a:ext cx="3145536" cy="758952"/>
+            <a:ext cx="3145536" cy="640080"/>
           </a:xfrm>
           <a:prstGeom prst="rect">
             <a:avLst/>
@@ -6451,7 +6667,7 @@
         </p:nvSpPr>
         <p:spPr>
           <a:xfrm>
-            <a:off x="7635240" y="2788920"/>
+            <a:off x="7635240" y="2670048"/>
             <a:ext cx="3474720" cy="1536192"/>
           </a:xfrm>
           <a:prstGeom prst="roundRect">
@@ -6478,8 +6694,8 @@
         </p:nvSpPr>
         <p:spPr>
           <a:xfrm>
-            <a:off x="7799832" y="2935224"/>
-            <a:ext cx="3145536" cy="256032"/>
+            <a:off x="7799832" y="2798064"/>
+            <a:ext cx="3145536" cy="237744"/>
           </a:xfrm>
           <a:prstGeom prst="rect">
             <a:avLst/>
@@ -6495,7 +6711,7 @@
               <a:buNone/>
             </a:pPr>
             <a:r>
-              <a:rPr lang="en-US" sz="1300" b="1" dirty="0">
+              <a:rPr lang="en-US" sz="1250" b="1" dirty="0">
                 <a:solidFill>
                   <a:srgbClr val="0068B7"/>
                 </a:solidFill>
@@ -6503,101 +6719,317 @@
                 <a:ea typeface="Aptos" pitchFamily="34" charset="-122"/>
                 <a:cs typeface="Aptos" pitchFamily="34" charset="-120"/>
               </a:rPr>
-              <a:t>Concept checkpoints</a:t>
-            </a:r>
-            <a:endParaRPr lang="en-US" sz="1300" dirty="0"/>
-          </a:p>
-        </p:txBody>
-      </p:sp>
-      <p:sp>
-        <p:nvSpPr>
-          <p:cNvPr id="15" name="Text 13"/>
-          <p:cNvSpPr/>
-          <p:nvPr/>
-        </p:nvSpPr>
-        <p:spPr>
-          <a:xfrm>
-            <a:off x="7818120" y="3300984"/>
-            <a:ext cx="3090672" cy="877824"/>
-          </a:xfrm>
-          <a:prstGeom prst="rect">
-            <a:avLst/>
-          </a:prstGeom>
-          <a:noFill/>
-          <a:ln/>
-        </p:spPr>
-        <p:txBody>
-          <a:bodyPr wrap="square" lIns="508" tIns="508" rIns="508" bIns="508" rtlCol="0" anchor="t">
+              <a:t>Risk control loop</a:t>
+            </a:r>
+            <a:endParaRPr lang="en-US" sz="1250" dirty="0"/>
+          </a:p>
+        </p:txBody>
+      </p:sp>
+      <p:sp>
+        <p:nvSpPr>
+          <p:cNvPr id="15" name="Shape 13"/>
+          <p:cNvSpPr/>
+          <p:nvPr/>
+        </p:nvSpPr>
+        <p:spPr>
+          <a:xfrm>
+            <a:off x="8763000" y="3351276"/>
+            <a:ext cx="164592" cy="0"/>
+          </a:xfrm>
+          <a:prstGeom prst="line">
+            <a:avLst/>
+          </a:prstGeom>
+          <a:noFill/>
+          <a:ln w="15240">
+            <a:solidFill>
+              <a:srgbClr val="8ABBD8"/>
+            </a:solidFill>
+            <a:prstDash val="solid"/>
+          </a:ln>
+        </p:spPr>
+      </p:sp>
+      <p:sp>
+        <p:nvSpPr>
+          <p:cNvPr id="16" name="Shape 14"/>
+          <p:cNvSpPr/>
+          <p:nvPr/>
+        </p:nvSpPr>
+        <p:spPr>
+          <a:xfrm>
+            <a:off x="7872984" y="3200400"/>
+            <a:ext cx="890016" cy="301752"/>
+          </a:xfrm>
+          <a:prstGeom prst="roundRect">
+            <a:avLst>
+              <a:gd name="adj" fmla="val 24242"/>
+            </a:avLst>
+          </a:prstGeom>
+          <a:solidFill>
+            <a:srgbClr val="0068B7"/>
+          </a:solidFill>
+          <a:ln w="12700">
+            <a:solidFill>
+              <a:srgbClr val="0068B7"/>
+            </a:solidFill>
+            <a:prstDash val="solid"/>
+          </a:ln>
+        </p:spPr>
+      </p:sp>
+      <p:sp>
+        <p:nvSpPr>
+          <p:cNvPr id="17" name="Text 15"/>
+          <p:cNvSpPr/>
+          <p:nvPr/>
+        </p:nvSpPr>
+        <p:spPr>
+          <a:xfrm>
+            <a:off x="7909560" y="3273552"/>
+            <a:ext cx="816864" cy="146304"/>
+          </a:xfrm>
+          <a:prstGeom prst="rect">
+            <a:avLst/>
+          </a:prstGeom>
+          <a:noFill/>
+          <a:ln/>
+        </p:spPr>
+        <p:txBody>
+          <a:bodyPr wrap="square" lIns="0" tIns="0" rIns="0" bIns="0" rtlCol="0" anchor="ctr">
             <a:normAutofit/>
           </a:bodyPr>
           <a:lstStyle/>
           <a:p>
-            <a:pPr indent="0" marL="0">
-              <a:buNone/>
-            </a:pPr>
-            <a:r>
-              <a:rPr lang="en-US" sz="1220" dirty="0">
-                <a:solidFill>
-                  <a:srgbClr val="17364A"/>
-                </a:solidFill>
-                <a:latin typeface="Aptos" pitchFamily="34" charset="0"/>
-                <a:ea typeface="Aptos" pitchFamily="34" charset="-122"/>
-                <a:cs typeface="Aptos" pitchFamily="34" charset="-120"/>
-              </a:rPr>
-              <a:t>Write-back risk.</a:t>
-            </a:r>
-            <a:endParaRPr lang="en-US" sz="1220" dirty="0"/>
-          </a:p>
-          <a:p>
-            <a:pPr indent="0" marL="0">
-              <a:buNone/>
-            </a:pPr>
-            <a:r>
-              <a:rPr lang="en-US" sz="1220" dirty="0">
-                <a:solidFill>
-                  <a:srgbClr val="17364A"/>
-                </a:solidFill>
-                <a:latin typeface="Aptos" pitchFamily="34" charset="0"/>
-                <a:ea typeface="Aptos" pitchFamily="34" charset="-122"/>
-                <a:cs typeface="Aptos" pitchFamily="34" charset="-120"/>
-              </a:rPr>
-              <a:t>FHIR APIs may support updates or task creation.</a:t>
-            </a:r>
-            <a:endParaRPr lang="en-US" sz="1220" dirty="0"/>
-          </a:p>
-          <a:p>
-            <a:pPr indent="0" marL="0">
-              <a:buNone/>
-            </a:pPr>
-            <a:r>
-              <a:rPr lang="en-US" sz="1220" dirty="0">
-                <a:solidFill>
-                  <a:srgbClr val="17364A"/>
-                </a:solidFill>
-                <a:latin typeface="Aptos" pitchFamily="34" charset="0"/>
-                <a:ea typeface="Aptos" pitchFamily="34" charset="-122"/>
-                <a:cs typeface="Aptos" pitchFamily="34" charset="-120"/>
-              </a:rPr>
-              <a:t>Guardrails include human approval, restricted permissions, sandbox.</a:t>
-            </a:r>
-            <a:endParaRPr lang="en-US" sz="1220" dirty="0"/>
-          </a:p>
-        </p:txBody>
-      </p:sp>
-      <p:sp>
-        <p:nvSpPr>
-          <p:cNvPr id="16" name="Shape 14"/>
-          <p:cNvSpPr/>
-          <p:nvPr/>
-        </p:nvSpPr>
-        <p:spPr>
-          <a:xfrm>
-            <a:off x="7635240" y="4498848"/>
-            <a:ext cx="3474720" cy="1143000"/>
+            <a:pPr algn="ctr" indent="0" marL="0">
+              <a:buNone/>
+            </a:pPr>
+            <a:r>
+              <a:rPr lang="en-US" sz="880" b="1" dirty="0">
+                <a:solidFill>
+                  <a:srgbClr val="FFFFFF"/>
+                </a:solidFill>
+                <a:latin typeface="Aptos" pitchFamily="34" charset="0"/>
+                <a:ea typeface="Aptos" pitchFamily="34" charset="-122"/>
+                <a:cs typeface="Aptos" pitchFamily="34" charset="-120"/>
+              </a:rPr>
+              <a:t>Identify</a:t>
+            </a:r>
+            <a:endParaRPr lang="en-US" sz="880" dirty="0"/>
+          </a:p>
+        </p:txBody>
+      </p:sp>
+      <p:sp>
+        <p:nvSpPr>
+          <p:cNvPr id="18" name="Shape 16"/>
+          <p:cNvSpPr/>
+          <p:nvPr/>
+        </p:nvSpPr>
+        <p:spPr>
+          <a:xfrm>
+            <a:off x="9817608" y="3351276"/>
+            <a:ext cx="164592" cy="0"/>
+          </a:xfrm>
+          <a:prstGeom prst="line">
+            <a:avLst/>
+          </a:prstGeom>
+          <a:noFill/>
+          <a:ln w="15240">
+            <a:solidFill>
+              <a:srgbClr val="8ABBD8"/>
+            </a:solidFill>
+            <a:prstDash val="solid"/>
+          </a:ln>
+        </p:spPr>
+      </p:sp>
+      <p:sp>
+        <p:nvSpPr>
+          <p:cNvPr id="19" name="Shape 17"/>
+          <p:cNvSpPr/>
+          <p:nvPr/>
+        </p:nvSpPr>
+        <p:spPr>
+          <a:xfrm>
+            <a:off x="8927592" y="3200400"/>
+            <a:ext cx="890016" cy="301752"/>
           </a:xfrm>
           <a:prstGeom prst="roundRect">
             <a:avLst>
-              <a:gd name="adj" fmla="val 9600"/>
+              <a:gd name="adj" fmla="val 24242"/>
+            </a:avLst>
+          </a:prstGeom>
+          <a:solidFill>
+            <a:srgbClr val="2F8A28"/>
+          </a:solidFill>
+          <a:ln w="12700">
+            <a:solidFill>
+              <a:srgbClr val="2F8A28"/>
+            </a:solidFill>
+            <a:prstDash val="solid"/>
+          </a:ln>
+        </p:spPr>
+      </p:sp>
+      <p:sp>
+        <p:nvSpPr>
+          <p:cNvPr id="20" name="Text 18"/>
+          <p:cNvSpPr/>
+          <p:nvPr/>
+        </p:nvSpPr>
+        <p:spPr>
+          <a:xfrm>
+            <a:off x="8964168" y="3273552"/>
+            <a:ext cx="816864" cy="146304"/>
+          </a:xfrm>
+          <a:prstGeom prst="rect">
+            <a:avLst/>
+          </a:prstGeom>
+          <a:noFill/>
+          <a:ln/>
+        </p:spPr>
+        <p:txBody>
+          <a:bodyPr wrap="square" lIns="0" tIns="0" rIns="0" bIns="0" rtlCol="0" anchor="ctr">
+            <a:normAutofit/>
+          </a:bodyPr>
+          <a:lstStyle/>
+          <a:p>
+            <a:pPr algn="ctr" indent="0" marL="0">
+              <a:buNone/>
+            </a:pPr>
+            <a:r>
+              <a:rPr lang="en-US" sz="880" b="1" dirty="0">
+                <a:solidFill>
+                  <a:srgbClr val="FFFFFF"/>
+                </a:solidFill>
+                <a:latin typeface="Aptos" pitchFamily="34" charset="0"/>
+                <a:ea typeface="Aptos" pitchFamily="34" charset="-122"/>
+                <a:cs typeface="Aptos" pitchFamily="34" charset="-120"/>
+              </a:rPr>
+              <a:t>Control</a:t>
+            </a:r>
+            <a:endParaRPr lang="en-US" sz="880" dirty="0"/>
+          </a:p>
+        </p:txBody>
+      </p:sp>
+      <p:sp>
+        <p:nvSpPr>
+          <p:cNvPr id="21" name="Shape 19"/>
+          <p:cNvSpPr/>
+          <p:nvPr/>
+        </p:nvSpPr>
+        <p:spPr>
+          <a:xfrm>
+            <a:off x="9982200" y="3200400"/>
+            <a:ext cx="890016" cy="301752"/>
+          </a:xfrm>
+          <a:prstGeom prst="roundRect">
+            <a:avLst>
+              <a:gd name="adj" fmla="val 24242"/>
+            </a:avLst>
+          </a:prstGeom>
+          <a:solidFill>
+            <a:srgbClr val="6A4CA3"/>
+          </a:solidFill>
+          <a:ln w="12700">
+            <a:solidFill>
+              <a:srgbClr val="6A4CA3"/>
+            </a:solidFill>
+            <a:prstDash val="solid"/>
+          </a:ln>
+        </p:spPr>
+      </p:sp>
+      <p:sp>
+        <p:nvSpPr>
+          <p:cNvPr id="22" name="Text 20"/>
+          <p:cNvSpPr/>
+          <p:nvPr/>
+        </p:nvSpPr>
+        <p:spPr>
+          <a:xfrm>
+            <a:off x="10018776" y="3273552"/>
+            <a:ext cx="816864" cy="146304"/>
+          </a:xfrm>
+          <a:prstGeom prst="rect">
+            <a:avLst/>
+          </a:prstGeom>
+          <a:noFill/>
+          <a:ln/>
+        </p:spPr>
+        <p:txBody>
+          <a:bodyPr wrap="square" lIns="0" tIns="0" rIns="0" bIns="0" rtlCol="0" anchor="ctr">
+            <a:normAutofit/>
+          </a:bodyPr>
+          <a:lstStyle/>
+          <a:p>
+            <a:pPr algn="ctr" indent="0" marL="0">
+              <a:buNone/>
+            </a:pPr>
+            <a:r>
+              <a:rPr lang="en-US" sz="880" b="1" dirty="0">
+                <a:solidFill>
+                  <a:srgbClr val="FFFFFF"/>
+                </a:solidFill>
+                <a:latin typeface="Aptos" pitchFamily="34" charset="0"/>
+                <a:ea typeface="Aptos" pitchFamily="34" charset="-122"/>
+                <a:cs typeface="Aptos" pitchFamily="34" charset="-120"/>
+              </a:rPr>
+              <a:t>Monitor</a:t>
+            </a:r>
+            <a:endParaRPr lang="en-US" sz="880" dirty="0"/>
+          </a:p>
+        </p:txBody>
+      </p:sp>
+      <p:sp>
+        <p:nvSpPr>
+          <p:cNvPr id="23" name="Text 21"/>
+          <p:cNvSpPr/>
+          <p:nvPr/>
+        </p:nvSpPr>
+        <p:spPr>
+          <a:xfrm>
+            <a:off x="7854696" y="3694176"/>
+            <a:ext cx="3035808" cy="365760"/>
+          </a:xfrm>
+          <a:prstGeom prst="rect">
+            <a:avLst/>
+          </a:prstGeom>
+          <a:noFill/>
+          <a:ln/>
+        </p:spPr>
+        <p:txBody>
+          <a:bodyPr wrap="square" lIns="254" tIns="254" rIns="254" bIns="254" rtlCol="0" anchor="t">
+            <a:normAutofit/>
+          </a:bodyPr>
+          <a:lstStyle/>
+          <a:p>
+            <a:pPr indent="0" marL="0">
+              <a:buNone/>
+            </a:pPr>
+            <a:r>
+              <a:rPr lang="en-US" sz="1120" dirty="0">
+                <a:solidFill>
+                  <a:srgbClr val="17364A"/>
+                </a:solidFill>
+                <a:latin typeface="Aptos" pitchFamily="34" charset="0"/>
+                <a:ea typeface="Aptos" pitchFamily="34" charset="-122"/>
+                <a:cs typeface="Aptos" pitchFamily="34" charset="-120"/>
+              </a:rPr>
+              <a:t>Responsible use depends on finding risks early, applying safeguards, and watching for drift or harm over time.</a:t>
+            </a:r>
+            <a:endParaRPr lang="en-US" sz="1120" dirty="0"/>
+          </a:p>
+        </p:txBody>
+      </p:sp>
+      <p:sp>
+        <p:nvSpPr>
+          <p:cNvPr id="24" name="Shape 22"/>
+          <p:cNvSpPr/>
+          <p:nvPr/>
+        </p:nvSpPr>
+        <p:spPr>
+          <a:xfrm>
+            <a:off x="7635240" y="4343400"/>
+            <a:ext cx="3474720" cy="1255471"/>
+          </a:xfrm>
+          <a:prstGeom prst="roundRect">
+            <a:avLst>
+              <a:gd name="adj" fmla="val 8740"/>
             </a:avLst>
           </a:prstGeom>
           <a:solidFill>
@@ -6613,13 +7045,13 @@
       </p:sp>
       <p:sp>
         <p:nvSpPr>
-          <p:cNvPr id="17" name="Text 15"/>
-          <p:cNvSpPr/>
-          <p:nvPr/>
-        </p:nvSpPr>
-        <p:spPr>
-          <a:xfrm>
-            <a:off x="7799832" y="4645152"/>
+          <p:cNvPr id="25" name="Text 23"/>
+          <p:cNvSpPr/>
+          <p:nvPr/>
+        </p:nvSpPr>
+        <p:spPr>
+          <a:xfrm>
+            <a:off x="7799832" y="4489704"/>
             <a:ext cx="3145536" cy="256032"/>
           </a:xfrm>
           <a:prstGeom prst="rect">
@@ -6652,14 +7084,14 @@
       </p:sp>
       <p:sp>
         <p:nvSpPr>
-          <p:cNvPr id="18" name="Text 16"/>
-          <p:cNvSpPr/>
-          <p:nvPr/>
-        </p:nvSpPr>
-        <p:spPr>
-          <a:xfrm>
-            <a:off x="7799832" y="4974336"/>
-            <a:ext cx="3145536" cy="576072"/>
+          <p:cNvPr id="26" name="Text 24"/>
+          <p:cNvSpPr/>
+          <p:nvPr/>
+        </p:nvSpPr>
+        <p:spPr>
+          <a:xfrm>
+            <a:off x="7799832" y="4818888"/>
+            <a:ext cx="3145536" cy="688543"/>
           </a:xfrm>
           <a:prstGeom prst="rect">
             <a:avLst/>
@@ -6685,7 +7117,7 @@
                 <a:ea typeface="Aptos" pitchFamily="34" charset="-122"/>
                 <a:cs typeface="Aptos" pitchFamily="34" charset="-120"/>
               </a:rPr>
-              <a:t>Identify what could go wrong, who could be affected, what safeguards are needed, and what evidence should be reviewed.</a:t>
+              <a:t>Identify what could go wrong, who could be affected, what safeguards are needed, and what evidence should be reviewed before use.</a:t>
             </a:r>
             <a:endParaRPr lang="en-US" sz="1320" dirty="0"/>
           </a:p>
@@ -7054,11 +7486,11 @@
         <p:spPr>
           <a:xfrm>
             <a:off x="7635240" y="1325880"/>
-            <a:ext cx="3474720" cy="1325880"/>
+            <a:ext cx="3474720" cy="1255471"/>
           </a:xfrm>
           <a:prstGeom prst="roundRect">
             <a:avLst>
-              <a:gd name="adj" fmla="val 8276"/>
+              <a:gd name="adj" fmla="val 8740"/>
             </a:avLst>
           </a:prstGeom>
           <a:solidFill>
@@ -7120,7 +7552,7 @@
         <p:spPr>
           <a:xfrm>
             <a:off x="7799832" y="1801368"/>
-            <a:ext cx="3145536" cy="758952"/>
+            <a:ext cx="3145536" cy="688543"/>
           </a:xfrm>
           <a:prstGeom prst="rect">
             <a:avLst/>
@@ -7160,12 +7592,12 @@
         </p:nvSpPr>
         <p:spPr>
           <a:xfrm>
-            <a:off x="7635240" y="2788920"/>
-            <a:ext cx="3474720" cy="1536192"/>
+            <a:off x="7635240" y="2718511"/>
+            <a:ext cx="3474720" cy="1328623"/>
           </a:xfrm>
           <a:prstGeom prst="roundRect">
             <a:avLst>
-              <a:gd name="adj" fmla="val 7143"/>
+              <a:gd name="adj" fmla="val 8259"/>
             </a:avLst>
           </a:prstGeom>
           <a:solidFill>
@@ -7187,7 +7619,7 @@
         </p:nvSpPr>
         <p:spPr>
           <a:xfrm>
-            <a:off x="7799832" y="2935224"/>
+            <a:off x="7799832" y="2864815"/>
             <a:ext cx="3145536" cy="256032"/>
           </a:xfrm>
           <a:prstGeom prst="rect">
@@ -7226,8 +7658,8 @@
         </p:nvSpPr>
         <p:spPr>
           <a:xfrm>
-            <a:off x="7818120" y="3300984"/>
-            <a:ext cx="3090672" cy="877824"/>
+            <a:off x="7818120" y="3230575"/>
+            <a:ext cx="3090672" cy="670255"/>
           </a:xfrm>
           <a:prstGeom prst="rect">
             <a:avLst/>
@@ -7301,12 +7733,12 @@
         </p:nvSpPr>
         <p:spPr>
           <a:xfrm>
-            <a:off x="7635240" y="4498848"/>
-            <a:ext cx="3474720" cy="1143000"/>
+            <a:off x="7635240" y="4184294"/>
+            <a:ext cx="3474720" cy="1466698"/>
           </a:xfrm>
           <a:prstGeom prst="roundRect">
             <a:avLst>
-              <a:gd name="adj" fmla="val 9600"/>
+              <a:gd name="adj" fmla="val 7481"/>
             </a:avLst>
           </a:prstGeom>
           <a:solidFill>
@@ -7328,7 +7760,7 @@
         </p:nvSpPr>
         <p:spPr>
           <a:xfrm>
-            <a:off x="7799832" y="4645152"/>
+            <a:off x="7799832" y="4330598"/>
             <a:ext cx="3145536" cy="256032"/>
           </a:xfrm>
           <a:prstGeom prst="rect">
@@ -7367,8 +7799,8 @@
         </p:nvSpPr>
         <p:spPr>
           <a:xfrm>
-            <a:off x="7799832" y="4974336"/>
-            <a:ext cx="3145536" cy="576072"/>
+            <a:off x="7799832" y="4659782"/>
+            <a:ext cx="3145536" cy="899770"/>
           </a:xfrm>
           <a:prstGeom prst="rect">
             <a:avLst/>
@@ -7394,7 +7826,7 @@
                 <a:ea typeface="Aptos" pitchFamily="34" charset="-122"/>
                 <a:cs typeface="Aptos" pitchFamily="34" charset="-120"/>
               </a:rPr>
-              <a:t>Use the concept to clarify workflow changes, dependencies, staffing, procurement requirements, training needs, and.</a:t>
+              <a:t>Use the concept to clarify workflow changes, dependencies, staffing, procurement requirements, training needs, and implementation checkpoints.</a:t>
             </a:r>
             <a:endParaRPr lang="en-US" sz="1320" dirty="0"/>
           </a:p>
@@ -7763,11 +8195,11 @@
         <p:spPr>
           <a:xfrm>
             <a:off x="7635240" y="1325880"/>
-            <a:ext cx="3474720" cy="1325880"/>
+            <a:ext cx="3474720" cy="1207008"/>
           </a:xfrm>
           <a:prstGeom prst="roundRect">
             <a:avLst>
-              <a:gd name="adj" fmla="val 8276"/>
+              <a:gd name="adj" fmla="val 9091"/>
             </a:avLst>
           </a:prstGeom>
           <a:solidFill>
@@ -7829,7 +8261,7 @@
         <p:spPr>
           <a:xfrm>
             <a:off x="7799832" y="1801368"/>
-            <a:ext cx="3145536" cy="758952"/>
+            <a:ext cx="3145536" cy="640080"/>
           </a:xfrm>
           <a:prstGeom prst="rect">
             <a:avLst/>
@@ -7869,12 +8301,12 @@
         </p:nvSpPr>
         <p:spPr>
           <a:xfrm>
-            <a:off x="7635240" y="2788920"/>
-            <a:ext cx="3474720" cy="1536192"/>
+            <a:off x="7635240" y="2670048"/>
+            <a:ext cx="3474720" cy="1377086"/>
           </a:xfrm>
           <a:prstGeom prst="roundRect">
             <a:avLst>
-              <a:gd name="adj" fmla="val 7143"/>
+              <a:gd name="adj" fmla="val 7968"/>
             </a:avLst>
           </a:prstGeom>
           <a:solidFill>
@@ -7896,7 +8328,7 @@
         </p:nvSpPr>
         <p:spPr>
           <a:xfrm>
-            <a:off x="7799832" y="2935224"/>
+            <a:off x="7799832" y="2816352"/>
             <a:ext cx="3145536" cy="256032"/>
           </a:xfrm>
           <a:prstGeom prst="rect">
@@ -7935,8 +8367,8 @@
         </p:nvSpPr>
         <p:spPr>
           <a:xfrm>
-            <a:off x="7818120" y="3300984"/>
-            <a:ext cx="3090672" cy="877824"/>
+            <a:off x="7818120" y="3182112"/>
+            <a:ext cx="3090672" cy="718718"/>
           </a:xfrm>
           <a:prstGeom prst="rect">
             <a:avLst/>
@@ -8010,12 +8442,12 @@
         </p:nvSpPr>
         <p:spPr>
           <a:xfrm>
-            <a:off x="7635240" y="4498848"/>
-            <a:ext cx="3474720" cy="1143000"/>
+            <a:off x="7635240" y="4184294"/>
+            <a:ext cx="3474720" cy="1466698"/>
           </a:xfrm>
           <a:prstGeom prst="roundRect">
             <a:avLst>
-              <a:gd name="adj" fmla="val 9600"/>
+              <a:gd name="adj" fmla="val 7481"/>
             </a:avLst>
           </a:prstGeom>
           <a:solidFill>
@@ -8037,7 +8469,7 @@
         </p:nvSpPr>
         <p:spPr>
           <a:xfrm>
-            <a:off x="7799832" y="4645152"/>
+            <a:off x="7799832" y="4330598"/>
             <a:ext cx="3145536" cy="256032"/>
           </a:xfrm>
           <a:prstGeom prst="rect">
@@ -8076,8 +8508,8 @@
         </p:nvSpPr>
         <p:spPr>
           <a:xfrm>
-            <a:off x="7799832" y="4974336"/>
-            <a:ext cx="3145536" cy="576072"/>
+            <a:off x="7799832" y="4659782"/>
+            <a:ext cx="3145536" cy="899770"/>
           </a:xfrm>
           <a:prstGeom prst="rect">
             <a:avLst/>
@@ -8103,7 +8535,7 @@
                 <a:ea typeface="Aptos" pitchFamily="34" charset="-122"/>
                 <a:cs typeface="Aptos" pitchFamily="34" charset="-120"/>
               </a:rPr>
-              <a:t>Connect the concept to public health purpose, responsible use, required safeguards, documentation, and the next action a.</a:t>
+              <a:t>Connect the concept to public health purpose, responsible use, required safeguards, documentation, and the next action a department should take.</a:t>
             </a:r>
             <a:endParaRPr lang="en-US" sz="1320" dirty="0"/>
           </a:p>
@@ -8455,11 +8887,11 @@
         <p:spPr>
           <a:xfrm>
             <a:off x="7635240" y="1325880"/>
-            <a:ext cx="3474720" cy="1325880"/>
+            <a:ext cx="3474720" cy="1207008"/>
           </a:xfrm>
           <a:prstGeom prst="roundRect">
             <a:avLst>
-              <a:gd name="adj" fmla="val 8276"/>
+              <a:gd name="adj" fmla="val 9091"/>
             </a:avLst>
           </a:prstGeom>
           <a:solidFill>
@@ -8521,7 +8953,7 @@
         <p:spPr>
           <a:xfrm>
             <a:off x="7799832" y="1801368"/>
-            <a:ext cx="3145536" cy="758952"/>
+            <a:ext cx="3145536" cy="640080"/>
           </a:xfrm>
           <a:prstGeom prst="rect">
             <a:avLst/>
@@ -8561,12 +8993,12 @@
         </p:nvSpPr>
         <p:spPr>
           <a:xfrm>
-            <a:off x="7635240" y="2788920"/>
-            <a:ext cx="3474720" cy="1536192"/>
+            <a:off x="7635240" y="2670048"/>
+            <a:ext cx="3474720" cy="1377086"/>
           </a:xfrm>
           <a:prstGeom prst="roundRect">
             <a:avLst>
-              <a:gd name="adj" fmla="val 7143"/>
+              <a:gd name="adj" fmla="val 7968"/>
             </a:avLst>
           </a:prstGeom>
           <a:solidFill>
@@ -8588,7 +9020,7 @@
         </p:nvSpPr>
         <p:spPr>
           <a:xfrm>
-            <a:off x="7799832" y="2935224"/>
+            <a:off x="7799832" y="2816352"/>
             <a:ext cx="3145536" cy="256032"/>
           </a:xfrm>
           <a:prstGeom prst="rect">
@@ -8627,8 +9059,8 @@
         </p:nvSpPr>
         <p:spPr>
           <a:xfrm>
-            <a:off x="7818120" y="3300984"/>
-            <a:ext cx="3090672" cy="877824"/>
+            <a:off x="7818120" y="3182112"/>
+            <a:ext cx="3090672" cy="718718"/>
           </a:xfrm>
           <a:prstGeom prst="rect">
             <a:avLst/>
@@ -8685,12 +9117,12 @@
         </p:nvSpPr>
         <p:spPr>
           <a:xfrm>
-            <a:off x="7635240" y="4498848"/>
-            <a:ext cx="3474720" cy="1143000"/>
+            <a:off x="7635240" y="4184294"/>
+            <a:ext cx="3474720" cy="1466698"/>
           </a:xfrm>
           <a:prstGeom prst="roundRect">
             <a:avLst>
-              <a:gd name="adj" fmla="val 9600"/>
+              <a:gd name="adj" fmla="val 7481"/>
             </a:avLst>
           </a:prstGeom>
           <a:solidFill>
@@ -8712,7 +9144,7 @@
         </p:nvSpPr>
         <p:spPr>
           <a:xfrm>
-            <a:off x="7799832" y="4645152"/>
+            <a:off x="7799832" y="4330598"/>
             <a:ext cx="3145536" cy="256032"/>
           </a:xfrm>
           <a:prstGeom prst="rect">
@@ -8751,8 +9183,8 @@
         </p:nvSpPr>
         <p:spPr>
           <a:xfrm>
-            <a:off x="7799832" y="4974336"/>
-            <a:ext cx="3145536" cy="576072"/>
+            <a:off x="7799832" y="4659782"/>
+            <a:ext cx="3145536" cy="899770"/>
           </a:xfrm>
           <a:prstGeom prst="rect">
             <a:avLst/>
@@ -8778,7 +9210,7 @@
                 <a:ea typeface="Aptos" pitchFamily="34" charset="-122"/>
                 <a:cs typeface="Aptos" pitchFamily="34" charset="-120"/>
               </a:rPr>
-              <a:t>Connect the concept to public health purpose, responsible use, required safeguards, documentation, and the next action a.</a:t>
+              <a:t>Connect the concept to public health purpose, responsible use, required safeguards, documentation, and the next action a department should take.</a:t>
             </a:r>
             <a:endParaRPr lang="en-US" sz="1320" dirty="0"/>
           </a:p>
@@ -9130,11 +9562,11 @@
         <p:spPr>
           <a:xfrm>
             <a:off x="7635240" y="1325880"/>
-            <a:ext cx="3474720" cy="1325880"/>
+            <a:ext cx="3474720" cy="1207008"/>
           </a:xfrm>
           <a:prstGeom prst="roundRect">
             <a:avLst>
-              <a:gd name="adj" fmla="val 8276"/>
+              <a:gd name="adj" fmla="val 9091"/>
             </a:avLst>
           </a:prstGeom>
           <a:solidFill>
@@ -9196,7 +9628,7 @@
         <p:spPr>
           <a:xfrm>
             <a:off x="7799832" y="1801368"/>
-            <a:ext cx="3145536" cy="758952"/>
+            <a:ext cx="3145536" cy="640080"/>
           </a:xfrm>
           <a:prstGeom prst="rect">
             <a:avLst/>
@@ -9236,12 +9668,12 @@
         </p:nvSpPr>
         <p:spPr>
           <a:xfrm>
-            <a:off x="7635240" y="2788920"/>
-            <a:ext cx="3474720" cy="1536192"/>
+            <a:off x="7635240" y="2670048"/>
+            <a:ext cx="3474720" cy="1377086"/>
           </a:xfrm>
           <a:prstGeom prst="roundRect">
             <a:avLst>
-              <a:gd name="adj" fmla="val 7143"/>
+              <a:gd name="adj" fmla="val 7968"/>
             </a:avLst>
           </a:prstGeom>
           <a:solidFill>
@@ -9263,7 +9695,7 @@
         </p:nvSpPr>
         <p:spPr>
           <a:xfrm>
-            <a:off x="7799832" y="2935224"/>
+            <a:off x="7799832" y="2816352"/>
             <a:ext cx="3145536" cy="256032"/>
           </a:xfrm>
           <a:prstGeom prst="rect">
@@ -9302,8 +9734,8 @@
         </p:nvSpPr>
         <p:spPr>
           <a:xfrm>
-            <a:off x="7818120" y="3300984"/>
-            <a:ext cx="3090672" cy="877824"/>
+            <a:off x="7818120" y="3182112"/>
+            <a:ext cx="3090672" cy="718718"/>
           </a:xfrm>
           <a:prstGeom prst="rect">
             <a:avLst/>
@@ -9360,12 +9792,12 @@
         </p:nvSpPr>
         <p:spPr>
           <a:xfrm>
-            <a:off x="7635240" y="4498848"/>
-            <a:ext cx="3474720" cy="1143000"/>
+            <a:off x="7635240" y="4184294"/>
+            <a:ext cx="3474720" cy="1466698"/>
           </a:xfrm>
           <a:prstGeom prst="roundRect">
             <a:avLst>
-              <a:gd name="adj" fmla="val 9600"/>
+              <a:gd name="adj" fmla="val 7481"/>
             </a:avLst>
           </a:prstGeom>
           <a:solidFill>
@@ -9387,7 +9819,7 @@
         </p:nvSpPr>
         <p:spPr>
           <a:xfrm>
-            <a:off x="7799832" y="4645152"/>
+            <a:off x="7799832" y="4330598"/>
             <a:ext cx="3145536" cy="256032"/>
           </a:xfrm>
           <a:prstGeom prst="rect">
@@ -9426,8 +9858,8 @@
         </p:nvSpPr>
         <p:spPr>
           <a:xfrm>
-            <a:off x="7799832" y="4974336"/>
-            <a:ext cx="3145536" cy="576072"/>
+            <a:off x="7799832" y="4659782"/>
+            <a:ext cx="3145536" cy="899770"/>
           </a:xfrm>
           <a:prstGeom prst="rect">
             <a:avLst/>
@@ -9453,7 +9885,7 @@
                 <a:ea typeface="Aptos" pitchFamily="34" charset="-122"/>
                 <a:cs typeface="Aptos" pitchFamily="34" charset="-120"/>
               </a:rPr>
-              <a:t>Use the assignment to test whether you can explain the concept, apply it to a realistic public health situation, and.</a:t>
+              <a:t>Use the assignment to test whether you can explain the concept, apply it to a realistic public health situation, and identify what would need review before the work moves forward.</a:t>
             </a:r>
             <a:endParaRPr lang="en-US" sz="1320" dirty="0"/>
           </a:p>
@@ -9822,11 +10254,11 @@
         <p:spPr>
           <a:xfrm>
             <a:off x="7635240" y="1325880"/>
-            <a:ext cx="3474720" cy="1325880"/>
+            <a:ext cx="3474720" cy="1207008"/>
           </a:xfrm>
           <a:prstGeom prst="roundRect">
             <a:avLst>
-              <a:gd name="adj" fmla="val 8276"/>
+              <a:gd name="adj" fmla="val 9091"/>
             </a:avLst>
           </a:prstGeom>
           <a:solidFill>
@@ -9888,7 +10320,7 @@
         <p:spPr>
           <a:xfrm>
             <a:off x="7799832" y="1801368"/>
-            <a:ext cx="3145536" cy="758952"/>
+            <a:ext cx="3145536" cy="640080"/>
           </a:xfrm>
           <a:prstGeom prst="rect">
             <a:avLst/>
@@ -9928,12 +10360,12 @@
         </p:nvSpPr>
         <p:spPr>
           <a:xfrm>
-            <a:off x="7635240" y="2788920"/>
-            <a:ext cx="3474720" cy="1536192"/>
+            <a:off x="7635240" y="2670048"/>
+            <a:ext cx="3474720" cy="1377086"/>
           </a:xfrm>
           <a:prstGeom prst="roundRect">
             <a:avLst>
-              <a:gd name="adj" fmla="val 7143"/>
+              <a:gd name="adj" fmla="val 7968"/>
             </a:avLst>
           </a:prstGeom>
           <a:solidFill>
@@ -9955,7 +10387,7 @@
         </p:nvSpPr>
         <p:spPr>
           <a:xfrm>
-            <a:off x="7799832" y="2935224"/>
+            <a:off x="7799832" y="2816352"/>
             <a:ext cx="3145536" cy="256032"/>
           </a:xfrm>
           <a:prstGeom prst="rect">
@@ -9994,8 +10426,8 @@
         </p:nvSpPr>
         <p:spPr>
           <a:xfrm>
-            <a:off x="7818120" y="3300984"/>
-            <a:ext cx="3090672" cy="877824"/>
+            <a:off x="7818120" y="3182112"/>
+            <a:ext cx="3090672" cy="718718"/>
           </a:xfrm>
           <a:prstGeom prst="rect">
             <a:avLst/>
@@ -10069,12 +10501,12 @@
         </p:nvSpPr>
         <p:spPr>
           <a:xfrm>
-            <a:off x="7635240" y="4498848"/>
-            <a:ext cx="3474720" cy="1143000"/>
+            <a:off x="7635240" y="4184294"/>
+            <a:ext cx="3474720" cy="1466698"/>
           </a:xfrm>
           <a:prstGeom prst="roundRect">
             <a:avLst>
-              <a:gd name="adj" fmla="val 9600"/>
+              <a:gd name="adj" fmla="val 7481"/>
             </a:avLst>
           </a:prstGeom>
           <a:solidFill>
@@ -10096,7 +10528,7 @@
         </p:nvSpPr>
         <p:spPr>
           <a:xfrm>
-            <a:off x="7799832" y="4645152"/>
+            <a:off x="7799832" y="4330598"/>
             <a:ext cx="3145536" cy="256032"/>
           </a:xfrm>
           <a:prstGeom prst="rect">
@@ -10135,8 +10567,8 @@
         </p:nvSpPr>
         <p:spPr>
           <a:xfrm>
-            <a:off x="7799832" y="4974336"/>
-            <a:ext cx="3145536" cy="576072"/>
+            <a:off x="7799832" y="4659782"/>
+            <a:ext cx="3145536" cy="899770"/>
           </a:xfrm>
           <a:prstGeom prst="rect">
             <a:avLst/>
@@ -10162,7 +10594,7 @@
                 <a:ea typeface="Aptos" pitchFamily="34" charset="-122"/>
                 <a:cs typeface="Aptos" pitchFamily="34" charset="-120"/>
               </a:rPr>
-              <a:t>Connect the concept to public health purpose, responsible use, required safeguards, documentation, and the next action a.</a:t>
+              <a:t>Connect the concept to public health purpose, responsible use, required safeguards, documentation, and the next action a department should take.</a:t>
             </a:r>
             <a:endParaRPr lang="en-US" sz="1320" dirty="0"/>
           </a:p>
@@ -11099,11 +11531,11 @@
         <p:spPr>
           <a:xfrm>
             <a:off x="7635240" y="1325880"/>
-            <a:ext cx="3474720" cy="1325880"/>
+            <a:ext cx="3474720" cy="1207008"/>
           </a:xfrm>
           <a:prstGeom prst="roundRect">
             <a:avLst>
-              <a:gd name="adj" fmla="val 8276"/>
+              <a:gd name="adj" fmla="val 9091"/>
             </a:avLst>
           </a:prstGeom>
           <a:solidFill>
@@ -11165,7 +11597,7 @@
         <p:spPr>
           <a:xfrm>
             <a:off x="7799832" y="1801368"/>
-            <a:ext cx="3145536" cy="758952"/>
+            <a:ext cx="3145536" cy="640080"/>
           </a:xfrm>
           <a:prstGeom prst="rect">
             <a:avLst/>
@@ -11205,12 +11637,12 @@
         </p:nvSpPr>
         <p:spPr>
           <a:xfrm>
-            <a:off x="7635240" y="2788920"/>
-            <a:ext cx="3474720" cy="1536192"/>
+            <a:off x="7635240" y="2670048"/>
+            <a:ext cx="3474720" cy="1377086"/>
           </a:xfrm>
           <a:prstGeom prst="roundRect">
             <a:avLst>
-              <a:gd name="adj" fmla="val 7143"/>
+              <a:gd name="adj" fmla="val 7968"/>
             </a:avLst>
           </a:prstGeom>
           <a:solidFill>
@@ -11232,7 +11664,7 @@
         </p:nvSpPr>
         <p:spPr>
           <a:xfrm>
-            <a:off x="7799832" y="2935224"/>
+            <a:off x="7799832" y="2816352"/>
             <a:ext cx="3145536" cy="256032"/>
           </a:xfrm>
           <a:prstGeom prst="rect">
@@ -11271,8 +11703,8 @@
         </p:nvSpPr>
         <p:spPr>
           <a:xfrm>
-            <a:off x="7818120" y="3300984"/>
-            <a:ext cx="3090672" cy="877824"/>
+            <a:off x="7818120" y="3182112"/>
+            <a:ext cx="3090672" cy="718718"/>
           </a:xfrm>
           <a:prstGeom prst="rect">
             <a:avLst/>
@@ -11312,12 +11744,12 @@
         </p:nvSpPr>
         <p:spPr>
           <a:xfrm>
-            <a:off x="7635240" y="4498848"/>
-            <a:ext cx="3474720" cy="1143000"/>
+            <a:off x="7635240" y="4184294"/>
+            <a:ext cx="3474720" cy="1466698"/>
           </a:xfrm>
           <a:prstGeom prst="roundRect">
             <a:avLst>
-              <a:gd name="adj" fmla="val 9600"/>
+              <a:gd name="adj" fmla="val 7481"/>
             </a:avLst>
           </a:prstGeom>
           <a:solidFill>
@@ -11339,7 +11771,7 @@
         </p:nvSpPr>
         <p:spPr>
           <a:xfrm>
-            <a:off x="7799832" y="4645152"/>
+            <a:off x="7799832" y="4330598"/>
             <a:ext cx="3145536" cy="256032"/>
           </a:xfrm>
           <a:prstGeom prst="rect">
@@ -11378,8 +11810,8 @@
         </p:nvSpPr>
         <p:spPr>
           <a:xfrm>
-            <a:off x="7799832" y="4974336"/>
-            <a:ext cx="3145536" cy="576072"/>
+            <a:off x="7799832" y="4659782"/>
+            <a:ext cx="3145536" cy="899770"/>
           </a:xfrm>
           <a:prstGeom prst="rect">
             <a:avLst/>
@@ -11405,7 +11837,7 @@
                 <a:ea typeface="Aptos" pitchFamily="34" charset="-122"/>
                 <a:cs typeface="Aptos" pitchFamily="34" charset="-120"/>
               </a:rPr>
-              <a:t>Connect the concept to public health purpose, responsible use, required safeguards, documentation, and the next action a.</a:t>
+              <a:t>Connect the concept to public health purpose, responsible use, required safeguards, documentation, and the next action a department should take.</a:t>
             </a:r>
             <a:endParaRPr lang="en-US" sz="1320" dirty="0"/>
           </a:p>
@@ -11774,11 +12206,11 @@
         <p:spPr>
           <a:xfrm>
             <a:off x="7635240" y="1325880"/>
-            <a:ext cx="3474720" cy="1325880"/>
+            <a:ext cx="3474720" cy="1207008"/>
           </a:xfrm>
           <a:prstGeom prst="roundRect">
             <a:avLst>
-              <a:gd name="adj" fmla="val 8276"/>
+              <a:gd name="adj" fmla="val 9091"/>
             </a:avLst>
           </a:prstGeom>
           <a:solidFill>
@@ -11840,7 +12272,7 @@
         <p:spPr>
           <a:xfrm>
             <a:off x="7799832" y="1801368"/>
-            <a:ext cx="3145536" cy="758952"/>
+            <a:ext cx="3145536" cy="640080"/>
           </a:xfrm>
           <a:prstGeom prst="rect">
             <a:avLst/>
@@ -11880,12 +12312,12 @@
         </p:nvSpPr>
         <p:spPr>
           <a:xfrm>
-            <a:off x="7635240" y="2788920"/>
-            <a:ext cx="3474720" cy="1536192"/>
+            <a:off x="7635240" y="2670048"/>
+            <a:ext cx="3474720" cy="1377086"/>
           </a:xfrm>
           <a:prstGeom prst="roundRect">
             <a:avLst>
-              <a:gd name="adj" fmla="val 7143"/>
+              <a:gd name="adj" fmla="val 7968"/>
             </a:avLst>
           </a:prstGeom>
           <a:solidFill>
@@ -11907,7 +12339,7 @@
         </p:nvSpPr>
         <p:spPr>
           <a:xfrm>
-            <a:off x="7799832" y="2935224"/>
+            <a:off x="7799832" y="2816352"/>
             <a:ext cx="3145536" cy="256032"/>
           </a:xfrm>
           <a:prstGeom prst="rect">
@@ -11946,8 +12378,8 @@
         </p:nvSpPr>
         <p:spPr>
           <a:xfrm>
-            <a:off x="7818120" y="3300984"/>
-            <a:ext cx="3090672" cy="877824"/>
+            <a:off x="7818120" y="3182112"/>
+            <a:ext cx="3090672" cy="718718"/>
           </a:xfrm>
           <a:prstGeom prst="rect">
             <a:avLst/>
@@ -12021,12 +12453,12 @@
         </p:nvSpPr>
         <p:spPr>
           <a:xfrm>
-            <a:off x="7635240" y="4498848"/>
-            <a:ext cx="3474720" cy="1143000"/>
+            <a:off x="7635240" y="4184294"/>
+            <a:ext cx="3474720" cy="1466698"/>
           </a:xfrm>
           <a:prstGeom prst="roundRect">
             <a:avLst>
-              <a:gd name="adj" fmla="val 9600"/>
+              <a:gd name="adj" fmla="val 7481"/>
             </a:avLst>
           </a:prstGeom>
           <a:solidFill>
@@ -12048,7 +12480,7 @@
         </p:nvSpPr>
         <p:spPr>
           <a:xfrm>
-            <a:off x="7799832" y="4645152"/>
+            <a:off x="7799832" y="4330598"/>
             <a:ext cx="3145536" cy="256032"/>
           </a:xfrm>
           <a:prstGeom prst="rect">
@@ -12087,8 +12519,8 @@
         </p:nvSpPr>
         <p:spPr>
           <a:xfrm>
-            <a:off x="7799832" y="4974336"/>
-            <a:ext cx="3145536" cy="576072"/>
+            <a:off x="7799832" y="4659782"/>
+            <a:ext cx="3145536" cy="899770"/>
           </a:xfrm>
           <a:prstGeom prst="rect">
             <a:avLst/>
@@ -12114,7 +12546,7 @@
                 <a:ea typeface="Aptos" pitchFamily="34" charset="-122"/>
                 <a:cs typeface="Aptos" pitchFamily="34" charset="-120"/>
               </a:rPr>
-              <a:t>Use the assignment to test whether you can explain the concept, apply it to a realistic public health situation, and.</a:t>
+              <a:t>Use the assignment to test whether you can explain the concept, apply it to a realistic public health situation, and identify what would need review before the work moves forward.</a:t>
             </a:r>
             <a:endParaRPr lang="en-US" sz="1320" dirty="0"/>
           </a:p>
@@ -12483,11 +12915,11 @@
         <p:spPr>
           <a:xfrm>
             <a:off x="7635240" y="1325880"/>
-            <a:ext cx="3474720" cy="1325880"/>
+            <a:ext cx="3474720" cy="1207008"/>
           </a:xfrm>
           <a:prstGeom prst="roundRect">
             <a:avLst>
-              <a:gd name="adj" fmla="val 8276"/>
+              <a:gd name="adj" fmla="val 9091"/>
             </a:avLst>
           </a:prstGeom>
           <a:solidFill>
@@ -12549,7 +12981,7 @@
         <p:spPr>
           <a:xfrm>
             <a:off x="7799832" y="1801368"/>
-            <a:ext cx="3145536" cy="758952"/>
+            <a:ext cx="3145536" cy="640080"/>
           </a:xfrm>
           <a:prstGeom prst="rect">
             <a:avLst/>
@@ -12589,12 +13021,12 @@
         </p:nvSpPr>
         <p:spPr>
           <a:xfrm>
-            <a:off x="7635240" y="2788920"/>
-            <a:ext cx="3474720" cy="1536192"/>
+            <a:off x="7635240" y="2670048"/>
+            <a:ext cx="3474720" cy="1377086"/>
           </a:xfrm>
           <a:prstGeom prst="roundRect">
             <a:avLst>
-              <a:gd name="adj" fmla="val 7143"/>
+              <a:gd name="adj" fmla="val 7968"/>
             </a:avLst>
           </a:prstGeom>
           <a:solidFill>
@@ -12616,7 +13048,7 @@
         </p:nvSpPr>
         <p:spPr>
           <a:xfrm>
-            <a:off x="7799832" y="2935224"/>
+            <a:off x="7799832" y="2816352"/>
             <a:ext cx="3145536" cy="256032"/>
           </a:xfrm>
           <a:prstGeom prst="rect">
@@ -12655,8 +13087,8 @@
         </p:nvSpPr>
         <p:spPr>
           <a:xfrm>
-            <a:off x="7818120" y="3300984"/>
-            <a:ext cx="3090672" cy="877824"/>
+            <a:off x="7818120" y="3182112"/>
+            <a:ext cx="3090672" cy="718718"/>
           </a:xfrm>
           <a:prstGeom prst="rect">
             <a:avLst/>
@@ -12730,12 +13162,12 @@
         </p:nvSpPr>
         <p:spPr>
           <a:xfrm>
-            <a:off x="7635240" y="4498848"/>
-            <a:ext cx="3474720" cy="1143000"/>
+            <a:off x="7635240" y="4184294"/>
+            <a:ext cx="3474720" cy="1466698"/>
           </a:xfrm>
           <a:prstGeom prst="roundRect">
             <a:avLst>
-              <a:gd name="adj" fmla="val 9600"/>
+              <a:gd name="adj" fmla="val 7481"/>
             </a:avLst>
           </a:prstGeom>
           <a:solidFill>
@@ -12757,7 +13189,7 @@
         </p:nvSpPr>
         <p:spPr>
           <a:xfrm>
-            <a:off x="7799832" y="4645152"/>
+            <a:off x="7799832" y="4330598"/>
             <a:ext cx="3145536" cy="256032"/>
           </a:xfrm>
           <a:prstGeom prst="rect">
@@ -12796,8 +13228,8 @@
         </p:nvSpPr>
         <p:spPr>
           <a:xfrm>
-            <a:off x="7799832" y="4974336"/>
-            <a:ext cx="3145536" cy="576072"/>
+            <a:off x="7799832" y="4659782"/>
+            <a:ext cx="3145536" cy="899770"/>
           </a:xfrm>
           <a:prstGeom prst="rect">
             <a:avLst/>
@@ -12823,7 +13255,7 @@
                 <a:ea typeface="Aptos" pitchFamily="34" charset="-122"/>
                 <a:cs typeface="Aptos" pitchFamily="34" charset="-120"/>
               </a:rPr>
-              <a:t>Use the assignment to test whether you can explain the concept, apply it to a realistic public health situation, and.</a:t>
+              <a:t>Use the assignment to test whether you can explain the concept, apply it to a realistic public health situation, and identify what would need review before the work moves forward.</a:t>
             </a:r>
             <a:endParaRPr lang="en-US" sz="1320" dirty="0"/>
           </a:p>
@@ -13192,11 +13624,11 @@
         <p:spPr>
           <a:xfrm>
             <a:off x="7635240" y="1325880"/>
-            <a:ext cx="3474720" cy="1325880"/>
+            <a:ext cx="3474720" cy="1207008"/>
           </a:xfrm>
           <a:prstGeom prst="roundRect">
             <a:avLst>
-              <a:gd name="adj" fmla="val 8276"/>
+              <a:gd name="adj" fmla="val 9091"/>
             </a:avLst>
           </a:prstGeom>
           <a:solidFill>
@@ -13258,7 +13690,7 @@
         <p:spPr>
           <a:xfrm>
             <a:off x="7799832" y="1801368"/>
-            <a:ext cx="3145536" cy="758952"/>
+            <a:ext cx="3145536" cy="640080"/>
           </a:xfrm>
           <a:prstGeom prst="rect">
             <a:avLst/>
@@ -13298,12 +13730,12 @@
         </p:nvSpPr>
         <p:spPr>
           <a:xfrm>
-            <a:off x="7635240" y="2788920"/>
-            <a:ext cx="3474720" cy="1536192"/>
+            <a:off x="7635240" y="2670048"/>
+            <a:ext cx="3474720" cy="1377086"/>
           </a:xfrm>
           <a:prstGeom prst="roundRect">
             <a:avLst>
-              <a:gd name="adj" fmla="val 7143"/>
+              <a:gd name="adj" fmla="val 7968"/>
             </a:avLst>
           </a:prstGeom>
           <a:solidFill>
@@ -13325,7 +13757,7 @@
         </p:nvSpPr>
         <p:spPr>
           <a:xfrm>
-            <a:off x="7799832" y="2935224"/>
+            <a:off x="7799832" y="2816352"/>
             <a:ext cx="3145536" cy="256032"/>
           </a:xfrm>
           <a:prstGeom prst="rect">
@@ -13364,8 +13796,8 @@
         </p:nvSpPr>
         <p:spPr>
           <a:xfrm>
-            <a:off x="7818120" y="3300984"/>
-            <a:ext cx="3090672" cy="877824"/>
+            <a:off x="7818120" y="3182112"/>
+            <a:ext cx="3090672" cy="718718"/>
           </a:xfrm>
           <a:prstGeom prst="rect">
             <a:avLst/>
@@ -13422,12 +13854,12 @@
         </p:nvSpPr>
         <p:spPr>
           <a:xfrm>
-            <a:off x="7635240" y="4498848"/>
-            <a:ext cx="3474720" cy="1143000"/>
+            <a:off x="7635240" y="4184294"/>
+            <a:ext cx="3474720" cy="1466698"/>
           </a:xfrm>
           <a:prstGeom prst="roundRect">
             <a:avLst>
-              <a:gd name="adj" fmla="val 9600"/>
+              <a:gd name="adj" fmla="val 7481"/>
             </a:avLst>
           </a:prstGeom>
           <a:solidFill>
@@ -13449,7 +13881,7 @@
         </p:nvSpPr>
         <p:spPr>
           <a:xfrm>
-            <a:off x="7799832" y="4645152"/>
+            <a:off x="7799832" y="4330598"/>
             <a:ext cx="3145536" cy="256032"/>
           </a:xfrm>
           <a:prstGeom prst="rect">
@@ -13488,8 +13920,8 @@
         </p:nvSpPr>
         <p:spPr>
           <a:xfrm>
-            <a:off x="7799832" y="4974336"/>
-            <a:ext cx="3145536" cy="576072"/>
+            <a:off x="7799832" y="4659782"/>
+            <a:ext cx="3145536" cy="899770"/>
           </a:xfrm>
           <a:prstGeom prst="rect">
             <a:avLst/>
@@ -13515,7 +13947,7 @@
                 <a:ea typeface="Aptos" pitchFamily="34" charset="-122"/>
                 <a:cs typeface="Aptos" pitchFamily="34" charset="-120"/>
               </a:rPr>
-              <a:t>Connect the concept to public health purpose, responsible use, required safeguards, documentation, and the next action a.</a:t>
+              <a:t>Connect the concept to public health purpose, responsible use, required safeguards, documentation, and the next action a department should take.</a:t>
             </a:r>
             <a:endParaRPr lang="en-US" sz="1320" dirty="0"/>
           </a:p>
@@ -13993,7 +14425,7 @@
                 <a:ea typeface="Aptos" pitchFamily="34" charset="-122"/>
                 <a:cs typeface="Aptos" pitchFamily="34" charset="-120"/>
               </a:rPr>
-              <a:t>Use the related plays to identify decisions, participants, timing, approvals, and documentation needed for responsible.</a:t>
+              <a:t>Use the related plays to identify decisions, participants, timing, approvals, and documentation needed for responsible implementation.</a:t>
             </a:r>
             <a:endParaRPr lang="en-US" sz="1320" dirty="0"/>
           </a:p>
@@ -14612,7 +15044,7 @@
                 <a:ea typeface="Aptos" pitchFamily="34" charset="-122"/>
                 <a:cs typeface="Aptos" pitchFamily="34" charset="-120"/>
               </a:rPr>
-              <a:t>Use linked tools when your department needs a structured worksheet, template, checklist, review process, or.</a:t>
+              <a:t>Use linked tools when your department needs a structured worksheet, template, checklist, review process, or documentation artifact.</a:t>
             </a:r>
             <a:endParaRPr lang="en-US" sz="1320" dirty="0"/>
           </a:p>
@@ -15122,11 +15554,11 @@
         <p:spPr>
           <a:xfrm>
             <a:off x="7635240" y="1325880"/>
-            <a:ext cx="3474720" cy="1325880"/>
+            <a:ext cx="3474720" cy="1207008"/>
           </a:xfrm>
           <a:prstGeom prst="roundRect">
             <a:avLst>
-              <a:gd name="adj" fmla="val 8276"/>
+              <a:gd name="adj" fmla="val 9091"/>
             </a:avLst>
           </a:prstGeom>
           <a:solidFill>
@@ -15188,7 +15620,7 @@
         <p:spPr>
           <a:xfrm>
             <a:off x="7799832" y="1801368"/>
-            <a:ext cx="3145536" cy="758952"/>
+            <a:ext cx="3145536" cy="640080"/>
           </a:xfrm>
           <a:prstGeom prst="rect">
             <a:avLst/>
@@ -15228,12 +15660,12 @@
         </p:nvSpPr>
         <p:spPr>
           <a:xfrm>
-            <a:off x="7635240" y="2788920"/>
-            <a:ext cx="3474720" cy="1536192"/>
+            <a:off x="7635240" y="2670048"/>
+            <a:ext cx="3474720" cy="1377086"/>
           </a:xfrm>
           <a:prstGeom prst="roundRect">
             <a:avLst>
-              <a:gd name="adj" fmla="val 7143"/>
+              <a:gd name="adj" fmla="val 7968"/>
             </a:avLst>
           </a:prstGeom>
           <a:solidFill>
@@ -15255,7 +15687,7 @@
         </p:nvSpPr>
         <p:spPr>
           <a:xfrm>
-            <a:off x="7799832" y="2935224"/>
+            <a:off x="7799832" y="2816352"/>
             <a:ext cx="3145536" cy="256032"/>
           </a:xfrm>
           <a:prstGeom prst="rect">
@@ -15294,8 +15726,8 @@
         </p:nvSpPr>
         <p:spPr>
           <a:xfrm>
-            <a:off x="7818120" y="3300984"/>
-            <a:ext cx="3090672" cy="877824"/>
+            <a:off x="7818120" y="3182112"/>
+            <a:ext cx="3090672" cy="718718"/>
           </a:xfrm>
           <a:prstGeom prst="rect">
             <a:avLst/>
@@ -15352,12 +15784,12 @@
         </p:nvSpPr>
         <p:spPr>
           <a:xfrm>
-            <a:off x="7635240" y="4498848"/>
-            <a:ext cx="3474720" cy="1143000"/>
+            <a:off x="7635240" y="4184294"/>
+            <a:ext cx="3474720" cy="1466698"/>
           </a:xfrm>
           <a:prstGeom prst="roundRect">
             <a:avLst>
-              <a:gd name="adj" fmla="val 9600"/>
+              <a:gd name="adj" fmla="val 7481"/>
             </a:avLst>
           </a:prstGeom>
           <a:solidFill>
@@ -15379,7 +15811,7 @@
         </p:nvSpPr>
         <p:spPr>
           <a:xfrm>
-            <a:off x="7799832" y="4645152"/>
+            <a:off x="7799832" y="4330598"/>
             <a:ext cx="3145536" cy="256032"/>
           </a:xfrm>
           <a:prstGeom prst="rect">
@@ -15418,8 +15850,8 @@
         </p:nvSpPr>
         <p:spPr>
           <a:xfrm>
-            <a:off x="7799832" y="4974336"/>
-            <a:ext cx="3145536" cy="576072"/>
+            <a:off x="7799832" y="4659782"/>
+            <a:ext cx="3145536" cy="899770"/>
           </a:xfrm>
           <a:prstGeom prst="rect">
             <a:avLst/>
@@ -15445,7 +15877,7 @@
                 <a:ea typeface="Aptos" pitchFamily="34" charset="-122"/>
                 <a:cs typeface="Aptos" pitchFamily="34" charset="-120"/>
               </a:rPr>
-              <a:t>Use the assignment to test whether you can explain the concept, apply it to a realistic public health situation, and.</a:t>
+              <a:t>Use the assignment to test whether you can explain the concept, apply it to a realistic public health situation, and identify what would need review before the work moves forward.</a:t>
             </a:r>
             <a:endParaRPr lang="en-US" sz="1320" dirty="0"/>
           </a:p>
@@ -15814,11 +16246,11 @@
         <p:spPr>
           <a:xfrm>
             <a:off x="7635240" y="1325880"/>
-            <a:ext cx="3474720" cy="1325880"/>
+            <a:ext cx="3474720" cy="1255471"/>
           </a:xfrm>
           <a:prstGeom prst="roundRect">
             <a:avLst>
-              <a:gd name="adj" fmla="val 8276"/>
+              <a:gd name="adj" fmla="val 8740"/>
             </a:avLst>
           </a:prstGeom>
           <a:solidFill>
@@ -15880,7 +16312,7 @@
         <p:spPr>
           <a:xfrm>
             <a:off x="7799832" y="1801368"/>
-            <a:ext cx="3145536" cy="758952"/>
+            <a:ext cx="3145536" cy="688543"/>
           </a:xfrm>
           <a:prstGeom prst="rect">
             <a:avLst/>
@@ -15920,12 +16352,12 @@
         </p:nvSpPr>
         <p:spPr>
           <a:xfrm>
-            <a:off x="7635240" y="2788920"/>
-            <a:ext cx="3474720" cy="1536192"/>
+            <a:off x="7635240" y="2718511"/>
+            <a:ext cx="3474720" cy="1328623"/>
           </a:xfrm>
           <a:prstGeom prst="roundRect">
             <a:avLst>
-              <a:gd name="adj" fmla="val 7143"/>
+              <a:gd name="adj" fmla="val 8259"/>
             </a:avLst>
           </a:prstGeom>
           <a:solidFill>
@@ -15947,7 +16379,7 @@
         </p:nvSpPr>
         <p:spPr>
           <a:xfrm>
-            <a:off x="7799832" y="2935224"/>
+            <a:off x="7799832" y="2864815"/>
             <a:ext cx="3145536" cy="256032"/>
           </a:xfrm>
           <a:prstGeom prst="rect">
@@ -15986,8 +16418,8 @@
         </p:nvSpPr>
         <p:spPr>
           <a:xfrm>
-            <a:off x="7818120" y="3300984"/>
-            <a:ext cx="3090672" cy="877824"/>
+            <a:off x="7818120" y="3230575"/>
+            <a:ext cx="3090672" cy="670255"/>
           </a:xfrm>
           <a:prstGeom prst="rect">
             <a:avLst/>
@@ -16061,12 +16493,12 @@
         </p:nvSpPr>
         <p:spPr>
           <a:xfrm>
-            <a:off x="7635240" y="4498848"/>
-            <a:ext cx="3474720" cy="1143000"/>
+            <a:off x="7635240" y="4184294"/>
+            <a:ext cx="3474720" cy="1466698"/>
           </a:xfrm>
           <a:prstGeom prst="roundRect">
             <a:avLst>
-              <a:gd name="adj" fmla="val 9600"/>
+              <a:gd name="adj" fmla="val 7481"/>
             </a:avLst>
           </a:prstGeom>
           <a:solidFill>
@@ -16088,7 +16520,7 @@
         </p:nvSpPr>
         <p:spPr>
           <a:xfrm>
-            <a:off x="7799832" y="4645152"/>
+            <a:off x="7799832" y="4330598"/>
             <a:ext cx="3145536" cy="256032"/>
           </a:xfrm>
           <a:prstGeom prst="rect">
@@ -16127,8 +16559,8 @@
         </p:nvSpPr>
         <p:spPr>
           <a:xfrm>
-            <a:off x="7799832" y="4974336"/>
-            <a:ext cx="3145536" cy="576072"/>
+            <a:off x="7799832" y="4659782"/>
+            <a:ext cx="3145536" cy="899770"/>
           </a:xfrm>
           <a:prstGeom prst="rect">
             <a:avLst/>
@@ -16154,7 +16586,7 @@
                 <a:ea typeface="Aptos" pitchFamily="34" charset="-122"/>
                 <a:cs typeface="Aptos" pitchFamily="34" charset="-120"/>
               </a:rPr>
-              <a:t>Connect the concept to public health purpose, responsible use, required safeguards, documentation, and the next action a.</a:t>
+              <a:t>Connect the concept to public health purpose, responsible use, required safeguards, documentation, and the next action a department should take.</a:t>
             </a:r>
             <a:endParaRPr lang="en-US" sz="1320" dirty="0"/>
           </a:p>
@@ -16523,11 +16955,11 @@
         <p:spPr>
           <a:xfrm>
             <a:off x="7635240" y="1325880"/>
-            <a:ext cx="3474720" cy="1325880"/>
+            <a:ext cx="3474720" cy="1207008"/>
           </a:xfrm>
           <a:prstGeom prst="roundRect">
             <a:avLst>
-              <a:gd name="adj" fmla="val 8276"/>
+              <a:gd name="adj" fmla="val 9091"/>
             </a:avLst>
           </a:prstGeom>
           <a:solidFill>
@@ -16589,7 +17021,7 @@
         <p:spPr>
           <a:xfrm>
             <a:off x="7799832" y="1801368"/>
-            <a:ext cx="3145536" cy="758952"/>
+            <a:ext cx="3145536" cy="640080"/>
           </a:xfrm>
           <a:prstGeom prst="rect">
             <a:avLst/>
@@ -16629,12 +17061,12 @@
         </p:nvSpPr>
         <p:spPr>
           <a:xfrm>
-            <a:off x="7635240" y="2788920"/>
-            <a:ext cx="3474720" cy="1536192"/>
+            <a:off x="7635240" y="2670048"/>
+            <a:ext cx="3474720" cy="1377086"/>
           </a:xfrm>
           <a:prstGeom prst="roundRect">
             <a:avLst>
-              <a:gd name="adj" fmla="val 7143"/>
+              <a:gd name="adj" fmla="val 7968"/>
             </a:avLst>
           </a:prstGeom>
           <a:solidFill>
@@ -16656,8 +17088,8 @@
         </p:nvSpPr>
         <p:spPr>
           <a:xfrm>
-            <a:off x="7799832" y="2935224"/>
-            <a:ext cx="3145536" cy="256032"/>
+            <a:off x="7799832" y="2798064"/>
+            <a:ext cx="3145536" cy="237744"/>
           </a:xfrm>
           <a:prstGeom prst="rect">
             <a:avLst/>
@@ -16673,7 +17105,7 @@
               <a:buNone/>
             </a:pPr>
             <a:r>
-              <a:rPr lang="en-US" sz="1300" b="1" dirty="0">
+              <a:rPr lang="en-US" sz="1250" b="1" dirty="0">
                 <a:solidFill>
                   <a:srgbClr val="0068B7"/>
                 </a:solidFill>
@@ -16681,101 +17113,317 @@
                 <a:ea typeface="Aptos" pitchFamily="34" charset="-122"/>
                 <a:cs typeface="Aptos" pitchFamily="34" charset="-120"/>
               </a:rPr>
-              <a:t>Concept checkpoints</a:t>
-            </a:r>
-            <a:endParaRPr lang="en-US" sz="1300" dirty="0"/>
-          </a:p>
-        </p:txBody>
-      </p:sp>
-      <p:sp>
-        <p:nvSpPr>
-          <p:cNvPr id="15" name="Text 13"/>
-          <p:cNvSpPr/>
-          <p:nvPr/>
-        </p:nvSpPr>
-        <p:spPr>
-          <a:xfrm>
-            <a:off x="7818120" y="3300984"/>
-            <a:ext cx="3090672" cy="877824"/>
-          </a:xfrm>
-          <a:prstGeom prst="rect">
-            <a:avLst/>
-          </a:prstGeom>
-          <a:noFill/>
-          <a:ln/>
-        </p:spPr>
-        <p:txBody>
-          <a:bodyPr wrap="square" lIns="508" tIns="508" rIns="508" bIns="508" rtlCol="0" anchor="t">
+              <a:t>Governance pathway</a:t>
+            </a:r>
+            <a:endParaRPr lang="en-US" sz="1250" dirty="0"/>
+          </a:p>
+        </p:txBody>
+      </p:sp>
+      <p:sp>
+        <p:nvSpPr>
+          <p:cNvPr id="15" name="Shape 13"/>
+          <p:cNvSpPr/>
+          <p:nvPr/>
+        </p:nvSpPr>
+        <p:spPr>
+          <a:xfrm>
+            <a:off x="8763000" y="3351276"/>
+            <a:ext cx="164592" cy="0"/>
+          </a:xfrm>
+          <a:prstGeom prst="line">
+            <a:avLst/>
+          </a:prstGeom>
+          <a:noFill/>
+          <a:ln w="15240">
+            <a:solidFill>
+              <a:srgbClr val="8ABBD8"/>
+            </a:solidFill>
+            <a:prstDash val="solid"/>
+          </a:ln>
+        </p:spPr>
+      </p:sp>
+      <p:sp>
+        <p:nvSpPr>
+          <p:cNvPr id="16" name="Shape 14"/>
+          <p:cNvSpPr/>
+          <p:nvPr/>
+        </p:nvSpPr>
+        <p:spPr>
+          <a:xfrm>
+            <a:off x="7872984" y="3200400"/>
+            <a:ext cx="890016" cy="301752"/>
+          </a:xfrm>
+          <a:prstGeom prst="roundRect">
+            <a:avLst>
+              <a:gd name="adj" fmla="val 24242"/>
+            </a:avLst>
+          </a:prstGeom>
+          <a:solidFill>
+            <a:srgbClr val="0068B7"/>
+          </a:solidFill>
+          <a:ln w="12700">
+            <a:solidFill>
+              <a:srgbClr val="0068B7"/>
+            </a:solidFill>
+            <a:prstDash val="solid"/>
+          </a:ln>
+        </p:spPr>
+      </p:sp>
+      <p:sp>
+        <p:nvSpPr>
+          <p:cNvPr id="17" name="Text 15"/>
+          <p:cNvSpPr/>
+          <p:nvPr/>
+        </p:nvSpPr>
+        <p:spPr>
+          <a:xfrm>
+            <a:off x="7909560" y="3273552"/>
+            <a:ext cx="816864" cy="146304"/>
+          </a:xfrm>
+          <a:prstGeom prst="rect">
+            <a:avLst/>
+          </a:prstGeom>
+          <a:noFill/>
+          <a:ln/>
+        </p:spPr>
+        <p:txBody>
+          <a:bodyPr wrap="square" lIns="0" tIns="0" rIns="0" bIns="0" rtlCol="0" anchor="ctr">
             <a:normAutofit/>
           </a:bodyPr>
           <a:lstStyle/>
           <a:p>
-            <a:pPr indent="0" marL="0">
-              <a:buNone/>
-            </a:pPr>
-            <a:r>
-              <a:rPr lang="en-US" sz="1220" dirty="0">
-                <a:solidFill>
-                  <a:srgbClr val="17364A"/>
-                </a:solidFill>
-                <a:latin typeface="Aptos" pitchFamily="34" charset="0"/>
-                <a:ea typeface="Aptos" pitchFamily="34" charset="-122"/>
-                <a:cs typeface="Aptos" pitchFamily="34" charset="-120"/>
-              </a:rPr>
-              <a:t>This national-level module is intended for training and planning.</a:t>
-            </a:r>
-            <a:endParaRPr lang="en-US" sz="1220" dirty="0"/>
-          </a:p>
-          <a:p>
-            <a:pPr indent="0" marL="0">
-              <a:buNone/>
-            </a:pPr>
-            <a:r>
-              <a:rPr lang="en-US" sz="1220" dirty="0">
-                <a:solidFill>
-                  <a:srgbClr val="17364A"/>
-                </a:solidFill>
-                <a:latin typeface="Aptos" pitchFamily="34" charset="0"/>
-                <a:ea typeface="Aptos" pitchFamily="34" charset="-122"/>
-                <a:cs typeface="Aptos" pitchFamily="34" charset="-120"/>
-              </a:rPr>
-              <a:t>It does not replace legal, privacy, procurement, civil rights,.</a:t>
-            </a:r>
-            <a:endParaRPr lang="en-US" sz="1220" dirty="0"/>
-          </a:p>
-          <a:p>
-            <a:pPr indent="0" marL="0">
-              <a:buNone/>
-            </a:pPr>
-            <a:r>
-              <a:rPr lang="en-US" sz="1220" dirty="0">
-                <a:solidFill>
-                  <a:srgbClr val="17364A"/>
-                </a:solidFill>
-                <a:latin typeface="Aptos" pitchFamily="34" charset="0"/>
-                <a:ea typeface="Aptos" pitchFamily="34" charset="-122"/>
-                <a:cs typeface="Aptos" pitchFamily="34" charset="-120"/>
-              </a:rPr>
-              <a:t>Learners should confirm applicable requirements in their own.</a:t>
-            </a:r>
-            <a:endParaRPr lang="en-US" sz="1220" dirty="0"/>
-          </a:p>
-        </p:txBody>
-      </p:sp>
-      <p:sp>
-        <p:nvSpPr>
-          <p:cNvPr id="16" name="Shape 14"/>
-          <p:cNvSpPr/>
-          <p:nvPr/>
-        </p:nvSpPr>
-        <p:spPr>
-          <a:xfrm>
-            <a:off x="7635240" y="4498848"/>
-            <a:ext cx="3474720" cy="1143000"/>
+            <a:pPr algn="ctr" indent="0" marL="0">
+              <a:buNone/>
+            </a:pPr>
+            <a:r>
+              <a:rPr lang="en-US" sz="880" b="1" dirty="0">
+                <a:solidFill>
+                  <a:srgbClr val="FFFFFF"/>
+                </a:solidFill>
+                <a:latin typeface="Aptos" pitchFamily="34" charset="0"/>
+                <a:ea typeface="Aptos" pitchFamily="34" charset="-122"/>
+                <a:cs typeface="Aptos" pitchFamily="34" charset="-120"/>
+              </a:rPr>
+              <a:t>Submit</a:t>
+            </a:r>
+            <a:endParaRPr lang="en-US" sz="880" dirty="0"/>
+          </a:p>
+        </p:txBody>
+      </p:sp>
+      <p:sp>
+        <p:nvSpPr>
+          <p:cNvPr id="18" name="Shape 16"/>
+          <p:cNvSpPr/>
+          <p:nvPr/>
+        </p:nvSpPr>
+        <p:spPr>
+          <a:xfrm>
+            <a:off x="9817608" y="3351276"/>
+            <a:ext cx="164592" cy="0"/>
+          </a:xfrm>
+          <a:prstGeom prst="line">
+            <a:avLst/>
+          </a:prstGeom>
+          <a:noFill/>
+          <a:ln w="15240">
+            <a:solidFill>
+              <a:srgbClr val="8ABBD8"/>
+            </a:solidFill>
+            <a:prstDash val="solid"/>
+          </a:ln>
+        </p:spPr>
+      </p:sp>
+      <p:sp>
+        <p:nvSpPr>
+          <p:cNvPr id="19" name="Shape 17"/>
+          <p:cNvSpPr/>
+          <p:nvPr/>
+        </p:nvSpPr>
+        <p:spPr>
+          <a:xfrm>
+            <a:off x="8927592" y="3200400"/>
+            <a:ext cx="890016" cy="301752"/>
           </a:xfrm>
           <a:prstGeom prst="roundRect">
             <a:avLst>
-              <a:gd name="adj" fmla="val 9600"/>
+              <a:gd name="adj" fmla="val 24242"/>
+            </a:avLst>
+          </a:prstGeom>
+          <a:solidFill>
+            <a:srgbClr val="2F8A28"/>
+          </a:solidFill>
+          <a:ln w="12700">
+            <a:solidFill>
+              <a:srgbClr val="2F8A28"/>
+            </a:solidFill>
+            <a:prstDash val="solid"/>
+          </a:ln>
+        </p:spPr>
+      </p:sp>
+      <p:sp>
+        <p:nvSpPr>
+          <p:cNvPr id="20" name="Text 18"/>
+          <p:cNvSpPr/>
+          <p:nvPr/>
+        </p:nvSpPr>
+        <p:spPr>
+          <a:xfrm>
+            <a:off x="8964168" y="3273552"/>
+            <a:ext cx="816864" cy="146304"/>
+          </a:xfrm>
+          <a:prstGeom prst="rect">
+            <a:avLst/>
+          </a:prstGeom>
+          <a:noFill/>
+          <a:ln/>
+        </p:spPr>
+        <p:txBody>
+          <a:bodyPr wrap="square" lIns="0" tIns="0" rIns="0" bIns="0" rtlCol="0" anchor="ctr">
+            <a:normAutofit/>
+          </a:bodyPr>
+          <a:lstStyle/>
+          <a:p>
+            <a:pPr algn="ctr" indent="0" marL="0">
+              <a:buNone/>
+            </a:pPr>
+            <a:r>
+              <a:rPr lang="en-US" sz="880" b="1" dirty="0">
+                <a:solidFill>
+                  <a:srgbClr val="FFFFFF"/>
+                </a:solidFill>
+                <a:latin typeface="Aptos" pitchFamily="34" charset="0"/>
+                <a:ea typeface="Aptos" pitchFamily="34" charset="-122"/>
+                <a:cs typeface="Aptos" pitchFamily="34" charset="-120"/>
+              </a:rPr>
+              <a:t>Review</a:t>
+            </a:r>
+            <a:endParaRPr lang="en-US" sz="880" dirty="0"/>
+          </a:p>
+        </p:txBody>
+      </p:sp>
+      <p:sp>
+        <p:nvSpPr>
+          <p:cNvPr id="21" name="Shape 19"/>
+          <p:cNvSpPr/>
+          <p:nvPr/>
+        </p:nvSpPr>
+        <p:spPr>
+          <a:xfrm>
+            <a:off x="9982200" y="3200400"/>
+            <a:ext cx="890016" cy="301752"/>
+          </a:xfrm>
+          <a:prstGeom prst="roundRect">
+            <a:avLst>
+              <a:gd name="adj" fmla="val 24242"/>
+            </a:avLst>
+          </a:prstGeom>
+          <a:solidFill>
+            <a:srgbClr val="6A4CA3"/>
+          </a:solidFill>
+          <a:ln w="12700">
+            <a:solidFill>
+              <a:srgbClr val="6A4CA3"/>
+            </a:solidFill>
+            <a:prstDash val="solid"/>
+          </a:ln>
+        </p:spPr>
+      </p:sp>
+      <p:sp>
+        <p:nvSpPr>
+          <p:cNvPr id="22" name="Text 20"/>
+          <p:cNvSpPr/>
+          <p:nvPr/>
+        </p:nvSpPr>
+        <p:spPr>
+          <a:xfrm>
+            <a:off x="10018776" y="3273552"/>
+            <a:ext cx="816864" cy="146304"/>
+          </a:xfrm>
+          <a:prstGeom prst="rect">
+            <a:avLst/>
+          </a:prstGeom>
+          <a:noFill/>
+          <a:ln/>
+        </p:spPr>
+        <p:txBody>
+          <a:bodyPr wrap="square" lIns="0" tIns="0" rIns="0" bIns="0" rtlCol="0" anchor="ctr">
+            <a:normAutofit/>
+          </a:bodyPr>
+          <a:lstStyle/>
+          <a:p>
+            <a:pPr algn="ctr" indent="0" marL="0">
+              <a:buNone/>
+            </a:pPr>
+            <a:r>
+              <a:rPr lang="en-US" sz="880" b="1" dirty="0">
+                <a:solidFill>
+                  <a:srgbClr val="FFFFFF"/>
+                </a:solidFill>
+                <a:latin typeface="Aptos" pitchFamily="34" charset="0"/>
+                <a:ea typeface="Aptos" pitchFamily="34" charset="-122"/>
+                <a:cs typeface="Aptos" pitchFamily="34" charset="-120"/>
+              </a:rPr>
+              <a:t>Oversee</a:t>
+            </a:r>
+            <a:endParaRPr lang="en-US" sz="880" dirty="0"/>
+          </a:p>
+        </p:txBody>
+      </p:sp>
+      <p:sp>
+        <p:nvSpPr>
+          <p:cNvPr id="23" name="Text 21"/>
+          <p:cNvSpPr/>
+          <p:nvPr/>
+        </p:nvSpPr>
+        <p:spPr>
+          <a:xfrm>
+            <a:off x="7854696" y="3694176"/>
+            <a:ext cx="3035808" cy="206654"/>
+          </a:xfrm>
+          <a:prstGeom prst="rect">
+            <a:avLst/>
+          </a:prstGeom>
+          <a:noFill/>
+          <a:ln/>
+        </p:spPr>
+        <p:txBody>
+          <a:bodyPr wrap="square" lIns="254" tIns="254" rIns="254" bIns="254" rtlCol="0" anchor="t">
+            <a:normAutofit/>
+          </a:bodyPr>
+          <a:lstStyle/>
+          <a:p>
+            <a:pPr indent="0" marL="0">
+              <a:buNone/>
+            </a:pPr>
+            <a:r>
+              <a:rPr lang="en-US" sz="1120" dirty="0">
+                <a:solidFill>
+                  <a:srgbClr val="17364A"/>
+                </a:solidFill>
+                <a:latin typeface="Aptos" pitchFamily="34" charset="0"/>
+                <a:ea typeface="Aptos" pitchFamily="34" charset="-122"/>
+                <a:cs typeface="Aptos" pitchFamily="34" charset="-120"/>
+              </a:rPr>
+              <a:t>A proposed AI use should move through documented review before it becomes an operational workflow.</a:t>
+            </a:r>
+            <a:endParaRPr lang="en-US" sz="1120" dirty="0"/>
+          </a:p>
+        </p:txBody>
+      </p:sp>
+      <p:sp>
+        <p:nvSpPr>
+          <p:cNvPr id="24" name="Shape 22"/>
+          <p:cNvSpPr/>
+          <p:nvPr/>
+        </p:nvSpPr>
+        <p:spPr>
+          <a:xfrm>
+            <a:off x="7635240" y="4184294"/>
+            <a:ext cx="3474720" cy="1466698"/>
+          </a:xfrm>
+          <a:prstGeom prst="roundRect">
+            <a:avLst>
+              <a:gd name="adj" fmla="val 7481"/>
             </a:avLst>
           </a:prstGeom>
           <a:solidFill>
@@ -16791,13 +17439,13 @@
       </p:sp>
       <p:sp>
         <p:nvSpPr>
-          <p:cNvPr id="17" name="Text 15"/>
-          <p:cNvSpPr/>
-          <p:nvPr/>
-        </p:nvSpPr>
-        <p:spPr>
-          <a:xfrm>
-            <a:off x="7799832" y="4645152"/>
+          <p:cNvPr id="25" name="Text 23"/>
+          <p:cNvSpPr/>
+          <p:nvPr/>
+        </p:nvSpPr>
+        <p:spPr>
+          <a:xfrm>
+            <a:off x="7799832" y="4330598"/>
             <a:ext cx="3145536" cy="256032"/>
           </a:xfrm>
           <a:prstGeom prst="rect">
@@ -16830,14 +17478,14 @@
       </p:sp>
       <p:sp>
         <p:nvSpPr>
-          <p:cNvPr id="18" name="Text 16"/>
-          <p:cNvSpPr/>
-          <p:nvPr/>
-        </p:nvSpPr>
-        <p:spPr>
-          <a:xfrm>
-            <a:off x="7799832" y="4974336"/>
-            <a:ext cx="3145536" cy="576072"/>
+          <p:cNvPr id="26" name="Text 24"/>
+          <p:cNvSpPr/>
+          <p:nvPr/>
+        </p:nvSpPr>
+        <p:spPr>
+          <a:xfrm>
+            <a:off x="7799832" y="4659782"/>
+            <a:ext cx="3145536" cy="899770"/>
           </a:xfrm>
           <a:prstGeom prst="rect">
             <a:avLst/>
@@ -16863,7 +17511,7 @@
                 <a:ea typeface="Aptos" pitchFamily="34" charset="-122"/>
                 <a:cs typeface="Aptos" pitchFamily="34" charset="-120"/>
               </a:rPr>
-              <a:t>Translate this concept into clear decision rights, review steps, documentation expectations, and escalation paths before.</a:t>
+              <a:t>Translate this concept into clear decision rights, review steps, documentation expectations, and escalation paths before an AI-supported workflow is approved.</a:t>
             </a:r>
             <a:endParaRPr lang="en-US" sz="1320" dirty="0"/>
           </a:p>
@@ -17232,11 +17880,11 @@
         <p:spPr>
           <a:xfrm>
             <a:off x="7635240" y="1325880"/>
-            <a:ext cx="3474720" cy="1325880"/>
+            <a:ext cx="3474720" cy="1255471"/>
           </a:xfrm>
           <a:prstGeom prst="roundRect">
             <a:avLst>
-              <a:gd name="adj" fmla="val 8276"/>
+              <a:gd name="adj" fmla="val 8740"/>
             </a:avLst>
           </a:prstGeom>
           <a:solidFill>
@@ -17298,7 +17946,7 @@
         <p:spPr>
           <a:xfrm>
             <a:off x="7799832" y="1801368"/>
-            <a:ext cx="3145536" cy="758952"/>
+            <a:ext cx="3145536" cy="688543"/>
           </a:xfrm>
           <a:prstGeom prst="rect">
             <a:avLst/>
@@ -17338,12 +17986,12 @@
         </p:nvSpPr>
         <p:spPr>
           <a:xfrm>
-            <a:off x="7635240" y="2788920"/>
-            <a:ext cx="3474720" cy="1536192"/>
+            <a:off x="7635240" y="2718511"/>
+            <a:ext cx="3474720" cy="1328623"/>
           </a:xfrm>
           <a:prstGeom prst="roundRect">
             <a:avLst>
-              <a:gd name="adj" fmla="val 7143"/>
+              <a:gd name="adj" fmla="val 8259"/>
             </a:avLst>
           </a:prstGeom>
           <a:solidFill>
@@ -17365,7 +18013,7 @@
         </p:nvSpPr>
         <p:spPr>
           <a:xfrm>
-            <a:off x="7799832" y="2935224"/>
+            <a:off x="7799832" y="2864815"/>
             <a:ext cx="3145536" cy="256032"/>
           </a:xfrm>
           <a:prstGeom prst="rect">
@@ -17404,8 +18052,8 @@
         </p:nvSpPr>
         <p:spPr>
           <a:xfrm>
-            <a:off x="7818120" y="3300984"/>
-            <a:ext cx="3090672" cy="877824"/>
+            <a:off x="7818120" y="3230575"/>
+            <a:ext cx="3090672" cy="670255"/>
           </a:xfrm>
           <a:prstGeom prst="rect">
             <a:avLst/>
@@ -17479,12 +18127,12 @@
         </p:nvSpPr>
         <p:spPr>
           <a:xfrm>
-            <a:off x="7635240" y="4498848"/>
-            <a:ext cx="3474720" cy="1143000"/>
+            <a:off x="7635240" y="4184294"/>
+            <a:ext cx="3474720" cy="1466698"/>
           </a:xfrm>
           <a:prstGeom prst="roundRect">
             <a:avLst>
-              <a:gd name="adj" fmla="val 9600"/>
+              <a:gd name="adj" fmla="val 7481"/>
             </a:avLst>
           </a:prstGeom>
           <a:solidFill>
@@ -17506,7 +18154,7 @@
         </p:nvSpPr>
         <p:spPr>
           <a:xfrm>
-            <a:off x="7799832" y="4645152"/>
+            <a:off x="7799832" y="4330598"/>
             <a:ext cx="3145536" cy="256032"/>
           </a:xfrm>
           <a:prstGeom prst="rect">
@@ -17545,8 +18193,8 @@
         </p:nvSpPr>
         <p:spPr>
           <a:xfrm>
-            <a:off x="7799832" y="4974336"/>
-            <a:ext cx="3145536" cy="576072"/>
+            <a:off x="7799832" y="4659782"/>
+            <a:ext cx="3145536" cy="899770"/>
           </a:xfrm>
           <a:prstGeom prst="rect">
             <a:avLst/>
@@ -17572,7 +18220,7 @@
                 <a:ea typeface="Aptos" pitchFamily="34" charset="-122"/>
                 <a:cs typeface="Aptos" pitchFamily="34" charset="-120"/>
               </a:rPr>
-              <a:t>Connect the concept to public health purpose, responsible use, required safeguards, documentation, and the next action a.</a:t>
+              <a:t>Connect the concept to public health purpose, responsible use, required safeguards, documentation, and the next action a department should take.</a:t>
             </a:r>
             <a:endParaRPr lang="en-US" sz="1320" dirty="0"/>
           </a:p>
@@ -17941,11 +18589,11 @@
         <p:spPr>
           <a:xfrm>
             <a:off x="7635240" y="1325880"/>
-            <a:ext cx="3474720" cy="1325880"/>
+            <a:ext cx="3474720" cy="1207008"/>
           </a:xfrm>
           <a:prstGeom prst="roundRect">
             <a:avLst>
-              <a:gd name="adj" fmla="val 8276"/>
+              <a:gd name="adj" fmla="val 9091"/>
             </a:avLst>
           </a:prstGeom>
           <a:solidFill>
@@ -18007,7 +18655,7 @@
         <p:spPr>
           <a:xfrm>
             <a:off x="7799832" y="1801368"/>
-            <a:ext cx="3145536" cy="758952"/>
+            <a:ext cx="3145536" cy="640080"/>
           </a:xfrm>
           <a:prstGeom prst="rect">
             <a:avLst/>
@@ -18047,12 +18695,12 @@
         </p:nvSpPr>
         <p:spPr>
           <a:xfrm>
-            <a:off x="7635240" y="2788920"/>
-            <a:ext cx="3474720" cy="1536192"/>
+            <a:off x="7635240" y="2670048"/>
+            <a:ext cx="3474720" cy="1377086"/>
           </a:xfrm>
           <a:prstGeom prst="roundRect">
             <a:avLst>
-              <a:gd name="adj" fmla="val 7143"/>
+              <a:gd name="adj" fmla="val 7968"/>
             </a:avLst>
           </a:prstGeom>
           <a:solidFill>
@@ -18074,7 +18722,7 @@
         </p:nvSpPr>
         <p:spPr>
           <a:xfrm>
-            <a:off x="7799832" y="2935224"/>
+            <a:off x="7799832" y="2816352"/>
             <a:ext cx="3145536" cy="256032"/>
           </a:xfrm>
           <a:prstGeom prst="rect">
@@ -18113,8 +18761,8 @@
         </p:nvSpPr>
         <p:spPr>
           <a:xfrm>
-            <a:off x="7818120" y="3300984"/>
-            <a:ext cx="3090672" cy="877824"/>
+            <a:off x="7818120" y="3182112"/>
+            <a:ext cx="3090672" cy="718718"/>
           </a:xfrm>
           <a:prstGeom prst="rect">
             <a:avLst/>
@@ -18188,12 +18836,12 @@
         </p:nvSpPr>
         <p:spPr>
           <a:xfrm>
-            <a:off x="7635240" y="4498848"/>
-            <a:ext cx="3474720" cy="1143000"/>
+            <a:off x="7635240" y="4184294"/>
+            <a:ext cx="3474720" cy="1466698"/>
           </a:xfrm>
           <a:prstGeom prst="roundRect">
             <a:avLst>
-              <a:gd name="adj" fmla="val 9600"/>
+              <a:gd name="adj" fmla="val 7481"/>
             </a:avLst>
           </a:prstGeom>
           <a:solidFill>
@@ -18215,7 +18863,7 @@
         </p:nvSpPr>
         <p:spPr>
           <a:xfrm>
-            <a:off x="7799832" y="4645152"/>
+            <a:off x="7799832" y="4330598"/>
             <a:ext cx="3145536" cy="256032"/>
           </a:xfrm>
           <a:prstGeom prst="rect">
@@ -18254,8 +18902,8 @@
         </p:nvSpPr>
         <p:spPr>
           <a:xfrm>
-            <a:off x="7799832" y="4974336"/>
-            <a:ext cx="3145536" cy="576072"/>
+            <a:off x="7799832" y="4659782"/>
+            <a:ext cx="3145536" cy="899770"/>
           </a:xfrm>
           <a:prstGeom prst="rect">
             <a:avLst/>
@@ -18281,7 +18929,7 @@
                 <a:ea typeface="Aptos" pitchFamily="34" charset="-122"/>
                 <a:cs typeface="Aptos" pitchFamily="34" charset="-120"/>
               </a:rPr>
-              <a:t>Connect the concept to public health purpose, responsible use, required safeguards, documentation, and the next action a.</a:t>
+              <a:t>Connect the concept to public health purpose, responsible use, required safeguards, documentation, and the next action a department should take.</a:t>
             </a:r>
             <a:endParaRPr lang="en-US" sz="1320" dirty="0"/>
           </a:p>

--- a/downloads/presentations/modules/arc-250.pptx
+++ b/downloads/presentations/modules/arc-250.pptx
@@ -3433,8 +3433,8 @@
         </p:nvSpPr>
         <p:spPr>
           <a:xfrm>
-            <a:off x="868680" y="1508760"/>
-            <a:ext cx="6309360" cy="4160520"/>
+            <a:off x="822960" y="1463040"/>
+            <a:ext cx="6565392" cy="4343400"/>
           </a:xfrm>
           <a:prstGeom prst="rect">
             <a:avLst/>
@@ -3452,7 +3452,7 @@
               <a:buNone/>
             </a:pPr>
             <a:r>
-              <a:rPr lang="en-US" sz="2100" dirty="0">
+              <a:rPr lang="en-US" sz="1920" dirty="0">
                 <a:solidFill>
                   <a:srgbClr val="003A63"/>
                 </a:solidFill>
@@ -3462,14 +3462,14 @@
               </a:rPr>
               <a:t>• US Core.</a:t>
             </a:r>
-            <a:endParaRPr lang="en-US" sz="2100" dirty="0"/>
-          </a:p>
-          <a:p>
-            <a:pPr indent="0" marL="0">
-              <a:buNone/>
-            </a:pPr>
-            <a:r>
-              <a:rPr lang="en-US" sz="2100" dirty="0">
+            <a:endParaRPr lang="en-US" sz="1920" dirty="0"/>
+          </a:p>
+          <a:p>
+            <a:pPr indent="0" marL="0">
+              <a:buNone/>
+            </a:pPr>
+            <a:r>
+              <a:rPr lang="en-US" sz="1920" dirty="0">
                 <a:solidFill>
                   <a:srgbClr val="003A63"/>
                 </a:solidFill>
@@ -3479,14 +3479,14 @@
               </a:rPr>
               <a:t>• US Core defines profiles for core U.S. clinical data exchange.</a:t>
             </a:r>
-            <a:endParaRPr lang="en-US" sz="2100" dirty="0"/>
-          </a:p>
-          <a:p>
-            <a:pPr indent="0" marL="0">
-              <a:buNone/>
-            </a:pPr>
-            <a:r>
-              <a:rPr lang="en-US" sz="2100" dirty="0">
+            <a:endParaRPr lang="en-US" sz="1920" dirty="0"/>
+          </a:p>
+          <a:p>
+            <a:pPr indent="0" marL="0">
+              <a:buNone/>
+            </a:pPr>
+            <a:r>
+              <a:rPr lang="en-US" sz="1920" dirty="0">
                 <a:solidFill>
                   <a:srgbClr val="003A63"/>
                 </a:solidFill>
@@ -3494,9 +3494,9 @@
                 <a:ea typeface="Aptos" pitchFamily="34" charset="-122"/>
                 <a:cs typeface="Aptos" pitchFamily="34" charset="-120"/>
               </a:rPr>
-              <a:t>• It can support common data access patterns, but public health workflows may require additional.</a:t>
-            </a:r>
-            <a:endParaRPr lang="en-US" sz="2100" dirty="0"/>
+              <a:t>• It can support common data access patterns, but public health workflows may.</a:t>
+            </a:r>
+            <a:endParaRPr lang="en-US" sz="1920" dirty="0"/>
           </a:p>
         </p:txBody>
       </p:sp>
@@ -3508,12 +3508,12 @@
         </p:nvSpPr>
         <p:spPr>
           <a:xfrm>
-            <a:off x="7635240" y="1325880"/>
-            <a:ext cx="3474720" cy="1207008"/>
+            <a:off x="7543800" y="1325880"/>
+            <a:ext cx="3611880" cy="1261872"/>
           </a:xfrm>
           <a:prstGeom prst="roundRect">
             <a:avLst>
-              <a:gd name="adj" fmla="val 9091"/>
+              <a:gd name="adj" fmla="val 8696"/>
             </a:avLst>
           </a:prstGeom>
           <a:solidFill>
@@ -3535,8 +3535,8 @@
         </p:nvSpPr>
         <p:spPr>
           <a:xfrm>
-            <a:off x="7799832" y="1472184"/>
-            <a:ext cx="3145536" cy="256032"/>
+            <a:off x="7708392" y="1453896"/>
+            <a:ext cx="3282696" cy="228600"/>
           </a:xfrm>
           <a:prstGeom prst="rect">
             <a:avLst/>
@@ -3552,7 +3552,7 @@
               <a:buNone/>
             </a:pPr>
             <a:r>
-              <a:rPr lang="en-US" sz="1300" b="1" dirty="0">
+              <a:rPr lang="en-US" sz="1220" b="1" dirty="0">
                 <a:solidFill>
                   <a:srgbClr val="0068B7"/>
                 </a:solidFill>
@@ -3562,7 +3562,7 @@
               </a:rPr>
               <a:t>Core concept</a:t>
             </a:r>
-            <a:endParaRPr lang="en-US" sz="1300" dirty="0"/>
+            <a:endParaRPr lang="en-US" sz="1220" dirty="0"/>
           </a:p>
         </p:txBody>
       </p:sp>
@@ -3574,8 +3574,8 @@
         </p:nvSpPr>
         <p:spPr>
           <a:xfrm>
-            <a:off x="7799832" y="1801368"/>
-            <a:ext cx="3145536" cy="640080"/>
+            <a:off x="7708392" y="1764792"/>
+            <a:ext cx="3282696" cy="749808"/>
           </a:xfrm>
           <a:prstGeom prst="rect">
             <a:avLst/>
@@ -3593,7 +3593,7 @@
               <a:buNone/>
             </a:pPr>
             <a:r>
-              <a:rPr lang="en-US" sz="1320" dirty="0">
+              <a:rPr lang="en-US" sz="1220" dirty="0">
                 <a:solidFill>
                   <a:srgbClr val="17364A"/>
                 </a:solidFill>
@@ -3603,7 +3603,7 @@
               </a:rPr>
               <a:t>US Core.</a:t>
             </a:r>
-            <a:endParaRPr lang="en-US" sz="1320" dirty="0"/>
+            <a:endParaRPr lang="en-US" sz="1220" dirty="0"/>
           </a:p>
         </p:txBody>
       </p:sp>
@@ -3615,12 +3615,12 @@
         </p:nvSpPr>
         <p:spPr>
           <a:xfrm>
-            <a:off x="7635240" y="2670048"/>
-            <a:ext cx="3474720" cy="1377086"/>
+            <a:off x="7543800" y="2724912"/>
+            <a:ext cx="3611880" cy="1527048"/>
           </a:xfrm>
           <a:prstGeom prst="roundRect">
             <a:avLst>
-              <a:gd name="adj" fmla="val 7968"/>
+              <a:gd name="adj" fmla="val 7186"/>
             </a:avLst>
           </a:prstGeom>
           <a:solidFill>
@@ -3642,8 +3642,8 @@
         </p:nvSpPr>
         <p:spPr>
           <a:xfrm>
-            <a:off x="7799832" y="2816352"/>
-            <a:ext cx="3145536" cy="256032"/>
+            <a:off x="7708392" y="2852928"/>
+            <a:ext cx="3282696" cy="228600"/>
           </a:xfrm>
           <a:prstGeom prst="rect">
             <a:avLst/>
@@ -3659,7 +3659,7 @@
               <a:buNone/>
             </a:pPr>
             <a:r>
-              <a:rPr lang="en-US" sz="1300" b="1" dirty="0">
+              <a:rPr lang="en-US" sz="1220" b="1" dirty="0">
                 <a:solidFill>
                   <a:srgbClr val="0068B7"/>
                 </a:solidFill>
@@ -3669,7 +3669,7 @@
               </a:rPr>
               <a:t>Concept checkpoints</a:t>
             </a:r>
-            <a:endParaRPr lang="en-US" sz="1300" dirty="0"/>
+            <a:endParaRPr lang="en-US" sz="1220" dirty="0"/>
           </a:p>
         </p:txBody>
       </p:sp>
@@ -3681,8 +3681,8 @@
         </p:nvSpPr>
         <p:spPr>
           <a:xfrm>
-            <a:off x="7818120" y="3182112"/>
-            <a:ext cx="3090672" cy="718718"/>
+            <a:off x="7726680" y="3182112"/>
+            <a:ext cx="3227832" cy="960120"/>
           </a:xfrm>
           <a:prstGeom prst="rect">
             <a:avLst/>
@@ -3700,7 +3700,7 @@
               <a:buNone/>
             </a:pPr>
             <a:r>
-              <a:rPr lang="en-US" sz="1220" dirty="0">
+              <a:rPr lang="en-US" sz="1140" dirty="0">
                 <a:solidFill>
                   <a:srgbClr val="17364A"/>
                 </a:solidFill>
@@ -3708,16 +3708,16 @@
                 <a:ea typeface="Aptos" pitchFamily="34" charset="-122"/>
                 <a:cs typeface="Aptos" pitchFamily="34" charset="-120"/>
               </a:rPr>
-              <a:t>It can support common data access patterns, but public health.</a:t>
-            </a:r>
-            <a:endParaRPr lang="en-US" sz="1220" dirty="0"/>
-          </a:p>
-          <a:p>
-            <a:pPr indent="0" marL="0">
-              <a:buNone/>
-            </a:pPr>
-            <a:r>
-              <a:rPr lang="en-US" sz="1220" dirty="0">
+              <a:t>It can support common data access patterns, but.</a:t>
+            </a:r>
+            <a:endParaRPr lang="en-US" sz="1140" dirty="0"/>
+          </a:p>
+          <a:p>
+            <a:pPr indent="0" marL="0">
+              <a:buNone/>
+            </a:pPr>
+            <a:r>
+              <a:rPr lang="en-US" sz="1140" dirty="0">
                 <a:solidFill>
                   <a:srgbClr val="17364A"/>
                 </a:solidFill>
@@ -3727,14 +3727,14 @@
               </a:rPr>
               <a:t>Implementation guide.</a:t>
             </a:r>
-            <a:endParaRPr lang="en-US" sz="1220" dirty="0"/>
-          </a:p>
-          <a:p>
-            <a:pPr indent="0" marL="0">
-              <a:buNone/>
-            </a:pPr>
-            <a:r>
-              <a:rPr lang="en-US" sz="1220" dirty="0">
+            <a:endParaRPr lang="en-US" sz="1140" dirty="0"/>
+          </a:p>
+          <a:p>
+            <a:pPr indent="0" marL="0">
+              <a:buNone/>
+            </a:pPr>
+            <a:r>
+              <a:rPr lang="en-US" sz="1140" dirty="0">
                 <a:solidFill>
                   <a:srgbClr val="17364A"/>
                 </a:solidFill>
@@ -3742,9 +3742,9 @@
                 <a:ea typeface="Aptos" pitchFamily="34" charset="-122"/>
                 <a:cs typeface="Aptos" pitchFamily="34" charset="-120"/>
               </a:rPr>
-              <a:t>A FHIR implementation guide defines how FHIR should be used for a.</a:t>
-            </a:r>
-            <a:endParaRPr lang="en-US" sz="1220" dirty="0"/>
+              <a:t>A FHIR implementation guide defines how FHIR.</a:t>
+            </a:r>
+            <a:endParaRPr lang="en-US" sz="1140" dirty="0"/>
           </a:p>
         </p:txBody>
       </p:sp>
@@ -3756,12 +3756,12 @@
         </p:nvSpPr>
         <p:spPr>
           <a:xfrm>
-            <a:off x="7635240" y="4184294"/>
-            <a:ext cx="3474720" cy="1466698"/>
+            <a:off x="7543800" y="4389120"/>
+            <a:ext cx="3611880" cy="1261872"/>
           </a:xfrm>
           <a:prstGeom prst="roundRect">
             <a:avLst>
-              <a:gd name="adj" fmla="val 7481"/>
+              <a:gd name="adj" fmla="val 8696"/>
             </a:avLst>
           </a:prstGeom>
           <a:solidFill>
@@ -3783,8 +3783,8 @@
         </p:nvSpPr>
         <p:spPr>
           <a:xfrm>
-            <a:off x="7799832" y="4330598"/>
-            <a:ext cx="3145536" cy="256032"/>
+            <a:off x="7708392" y="4517136"/>
+            <a:ext cx="3282696" cy="228600"/>
           </a:xfrm>
           <a:prstGeom prst="rect">
             <a:avLst/>
@@ -3800,7 +3800,7 @@
               <a:buNone/>
             </a:pPr>
             <a:r>
-              <a:rPr lang="en-US" sz="1300" b="1" dirty="0">
+              <a:rPr lang="en-US" sz="1220" b="1" dirty="0">
                 <a:solidFill>
                   <a:srgbClr val="0068B7"/>
                 </a:solidFill>
@@ -3810,7 +3810,7 @@
               </a:rPr>
               <a:t>Apply it</a:t>
             </a:r>
-            <a:endParaRPr lang="en-US" sz="1300" dirty="0"/>
+            <a:endParaRPr lang="en-US" sz="1220" dirty="0"/>
           </a:p>
         </p:txBody>
       </p:sp>
@@ -3822,8 +3822,8 @@
         </p:nvSpPr>
         <p:spPr>
           <a:xfrm>
-            <a:off x="7799832" y="4659782"/>
-            <a:ext cx="3145536" cy="899770"/>
+            <a:off x="7708392" y="4828032"/>
+            <a:ext cx="3282696" cy="749808"/>
           </a:xfrm>
           <a:prstGeom prst="rect">
             <a:avLst/>
@@ -3841,7 +3841,7 @@
               <a:buNone/>
             </a:pPr>
             <a:r>
-              <a:rPr lang="en-US" sz="1320" dirty="0">
+              <a:rPr lang="en-US" sz="1220" dirty="0">
                 <a:solidFill>
                   <a:srgbClr val="17364A"/>
                 </a:solidFill>
@@ -3849,9 +3849,9 @@
                 <a:ea typeface="Aptos" pitchFamily="34" charset="-122"/>
                 <a:cs typeface="Aptos" pitchFamily="34" charset="-120"/>
               </a:rPr>
-              <a:t>Connect the concept to public health purpose, responsible use, required safeguards, documentation, and the next action a department should take.</a:t>
-            </a:r>
-            <a:endParaRPr lang="en-US" sz="1320" dirty="0"/>
+              <a:t>Connect the concept to public health purpose, responsible use, required.</a:t>
+            </a:r>
+            <a:endParaRPr lang="en-US" sz="1220" dirty="0"/>
           </a:p>
         </p:txBody>
       </p:sp>
@@ -4142,8 +4142,8 @@
         </p:nvSpPr>
         <p:spPr>
           <a:xfrm>
-            <a:off x="868680" y="1508760"/>
-            <a:ext cx="6309360" cy="4160520"/>
+            <a:off x="822960" y="1463040"/>
+            <a:ext cx="6565392" cy="4343400"/>
           </a:xfrm>
           <a:prstGeom prst="rect">
             <a:avLst/>
@@ -4161,7 +4161,7 @@
               <a:buNone/>
             </a:pPr>
             <a:r>
-              <a:rPr lang="en-US" sz="2100" dirty="0">
+              <a:rPr lang="en-US" sz="1920" dirty="0">
                 <a:solidFill>
                   <a:srgbClr val="003A63"/>
                 </a:solidFill>
@@ -4169,16 +4169,16 @@
                 <a:ea typeface="Aptos" pitchFamily="34" charset="-122"/>
                 <a:cs typeface="Aptos" pitchFamily="34" charset="-120"/>
               </a:rPr>
-              <a:t>• A health department may want an AI tool to summarize relevant EHR information for a case.</a:t>
-            </a:r>
-            <a:endParaRPr lang="en-US" sz="2100" dirty="0"/>
-          </a:p>
-          <a:p>
-            <a:pPr indent="0" marL="0">
-              <a:buNone/>
-            </a:pPr>
-            <a:r>
-              <a:rPr lang="en-US" sz="2100" dirty="0">
+              <a:t>• A health department may want an AI tool to summarize relevant EHR.</a:t>
+            </a:r>
+            <a:endParaRPr lang="en-US" sz="1920" dirty="0"/>
+          </a:p>
+          <a:p>
+            <a:pPr indent="0" marL="0">
+              <a:buNone/>
+            </a:pPr>
+            <a:r>
+              <a:rPr lang="en-US" sz="1920" dirty="0">
                 <a:solidFill>
                   <a:srgbClr val="003A63"/>
                 </a:solidFill>
@@ -4186,16 +4186,16 @@
                 <a:ea typeface="Aptos" pitchFamily="34" charset="-122"/>
                 <a:cs typeface="Aptos" pitchFamily="34" charset="-120"/>
               </a:rPr>
-              <a:t>• The tool might need Patient, Encounter, Condition, Observation, DiagnosticReport,.</a:t>
-            </a:r>
-            <a:endParaRPr lang="en-US" sz="2100" dirty="0"/>
-          </a:p>
-          <a:p>
-            <a:pPr indent="0" marL="0">
-              <a:buNone/>
-            </a:pPr>
-            <a:r>
-              <a:rPr lang="en-US" sz="2100" dirty="0">
+              <a:t>• The tool might need Patient, Encounter, Condition, Observation,.</a:t>
+            </a:r>
+            <a:endParaRPr lang="en-US" sz="1920" dirty="0"/>
+          </a:p>
+          <a:p>
+            <a:pPr indent="0" marL="0">
+              <a:buNone/>
+            </a:pPr>
+            <a:r>
+              <a:rPr lang="en-US" sz="1920" dirty="0">
                 <a:solidFill>
                   <a:srgbClr val="003A63"/>
                 </a:solidFill>
@@ -4203,9 +4203,9 @@
                 <a:ea typeface="Aptos" pitchFamily="34" charset="-122"/>
                 <a:cs typeface="Aptos" pitchFamily="34" charset="-120"/>
               </a:rPr>
-              <a:t>• Staff need to verify whether the source system can provide these resources, whether the data.</a:t>
-            </a:r>
-            <a:endParaRPr lang="en-US" sz="2100" dirty="0"/>
+              <a:t>• Staff need to verify whether the source system can provide these resources,.</a:t>
+            </a:r>
+            <a:endParaRPr lang="en-US" sz="1920" dirty="0"/>
           </a:p>
         </p:txBody>
       </p:sp>
@@ -4217,12 +4217,12 @@
         </p:nvSpPr>
         <p:spPr>
           <a:xfrm>
-            <a:off x="7635240" y="1325880"/>
-            <a:ext cx="3474720" cy="1255471"/>
+            <a:off x="7543800" y="1325880"/>
+            <a:ext cx="3611880" cy="1261872"/>
           </a:xfrm>
           <a:prstGeom prst="roundRect">
             <a:avLst>
-              <a:gd name="adj" fmla="val 8740"/>
+              <a:gd name="adj" fmla="val 8696"/>
             </a:avLst>
           </a:prstGeom>
           <a:solidFill>
@@ -4244,8 +4244,8 @@
         </p:nvSpPr>
         <p:spPr>
           <a:xfrm>
-            <a:off x="7799832" y="1472184"/>
-            <a:ext cx="3145536" cy="256032"/>
+            <a:off x="7708392" y="1453896"/>
+            <a:ext cx="3282696" cy="228600"/>
           </a:xfrm>
           <a:prstGeom prst="rect">
             <a:avLst/>
@@ -4261,7 +4261,7 @@
               <a:buNone/>
             </a:pPr>
             <a:r>
-              <a:rPr lang="en-US" sz="1300" b="1" dirty="0">
+              <a:rPr lang="en-US" sz="1220" b="1" dirty="0">
                 <a:solidFill>
                   <a:srgbClr val="0068B7"/>
                 </a:solidFill>
@@ -4271,7 +4271,7 @@
               </a:rPr>
               <a:t>Core concept</a:t>
             </a:r>
-            <a:endParaRPr lang="en-US" sz="1300" dirty="0"/>
+            <a:endParaRPr lang="en-US" sz="1220" dirty="0"/>
           </a:p>
         </p:txBody>
       </p:sp>
@@ -4283,8 +4283,8 @@
         </p:nvSpPr>
         <p:spPr>
           <a:xfrm>
-            <a:off x="7799832" y="1801368"/>
-            <a:ext cx="3145536" cy="688543"/>
+            <a:off x="7708392" y="1764792"/>
+            <a:ext cx="3282696" cy="749808"/>
           </a:xfrm>
           <a:prstGeom prst="rect">
             <a:avLst/>
@@ -4302,7 +4302,7 @@
               <a:buNone/>
             </a:pPr>
             <a:r>
-              <a:rPr lang="en-US" sz="1320" dirty="0">
+              <a:rPr lang="en-US" sz="1220" dirty="0">
                 <a:solidFill>
                   <a:srgbClr val="17364A"/>
                 </a:solidFill>
@@ -4310,9 +4310,9 @@
                 <a:ea typeface="Aptos" pitchFamily="34" charset="-122"/>
                 <a:cs typeface="Aptos" pitchFamily="34" charset="-120"/>
               </a:rPr>
-              <a:t>A health department may want an AI tool to summarize relevant EHR information for a case investigation.</a:t>
-            </a:r>
-            <a:endParaRPr lang="en-US" sz="1320" dirty="0"/>
+              <a:t>A health department may want an AI tool to summarize relevant EHR information.</a:t>
+            </a:r>
+            <a:endParaRPr lang="en-US" sz="1220" dirty="0"/>
           </a:p>
         </p:txBody>
       </p:sp>
@@ -4324,12 +4324,12 @@
         </p:nvSpPr>
         <p:spPr>
           <a:xfrm>
-            <a:off x="7635240" y="2718511"/>
-            <a:ext cx="3474720" cy="1328623"/>
+            <a:off x="7543800" y="2724912"/>
+            <a:ext cx="3611880" cy="1527048"/>
           </a:xfrm>
           <a:prstGeom prst="roundRect">
             <a:avLst>
-              <a:gd name="adj" fmla="val 8259"/>
+              <a:gd name="adj" fmla="val 7186"/>
             </a:avLst>
           </a:prstGeom>
           <a:solidFill>
@@ -4351,8 +4351,8 @@
         </p:nvSpPr>
         <p:spPr>
           <a:xfrm>
-            <a:off x="7799832" y="2864815"/>
-            <a:ext cx="3145536" cy="256032"/>
+            <a:off x="7708392" y="2852928"/>
+            <a:ext cx="3282696" cy="228600"/>
           </a:xfrm>
           <a:prstGeom prst="rect">
             <a:avLst/>
@@ -4368,7 +4368,7 @@
               <a:buNone/>
             </a:pPr>
             <a:r>
-              <a:rPr lang="en-US" sz="1300" b="1" dirty="0">
+              <a:rPr lang="en-US" sz="1220" b="1" dirty="0">
                 <a:solidFill>
                   <a:srgbClr val="0068B7"/>
                 </a:solidFill>
@@ -4378,7 +4378,7 @@
               </a:rPr>
               <a:t>Concept checkpoints</a:t>
             </a:r>
-            <a:endParaRPr lang="en-US" sz="1300" dirty="0"/>
+            <a:endParaRPr lang="en-US" sz="1220" dirty="0"/>
           </a:p>
         </p:txBody>
       </p:sp>
@@ -4390,8 +4390,8 @@
         </p:nvSpPr>
         <p:spPr>
           <a:xfrm>
-            <a:off x="7818120" y="3230575"/>
-            <a:ext cx="3090672" cy="670255"/>
+            <a:off x="7726680" y="3182112"/>
+            <a:ext cx="3227832" cy="960120"/>
           </a:xfrm>
           <a:prstGeom prst="rect">
             <a:avLst/>
@@ -4409,7 +4409,7 @@
               <a:buNone/>
             </a:pPr>
             <a:r>
-              <a:rPr lang="en-US" sz="1220" dirty="0">
+              <a:rPr lang="en-US" sz="1140" dirty="0">
                 <a:solidFill>
                   <a:srgbClr val="17364A"/>
                 </a:solidFill>
@@ -4417,16 +4417,16 @@
                 <a:ea typeface="Aptos" pitchFamily="34" charset="-122"/>
                 <a:cs typeface="Aptos" pitchFamily="34" charset="-120"/>
               </a:rPr>
-              <a:t>The tool might need Patient, Encounter, Condition, Observation,.</a:t>
-            </a:r>
-            <a:endParaRPr lang="en-US" sz="1220" dirty="0"/>
-          </a:p>
-          <a:p>
-            <a:pPr indent="0" marL="0">
-              <a:buNone/>
-            </a:pPr>
-            <a:r>
-              <a:rPr lang="en-US" sz="1220" dirty="0">
+              <a:t>The tool might need Patient, Encounter, Condition,.</a:t>
+            </a:r>
+            <a:endParaRPr lang="en-US" sz="1140" dirty="0"/>
+          </a:p>
+          <a:p>
+            <a:pPr indent="0" marL="0">
+              <a:buNone/>
+            </a:pPr>
+            <a:r>
+              <a:rPr lang="en-US" sz="1140" dirty="0">
                 <a:solidFill>
                   <a:srgbClr val="17364A"/>
                 </a:solidFill>
@@ -4434,16 +4434,16 @@
                 <a:ea typeface="Aptos" pitchFamily="34" charset="-122"/>
                 <a:cs typeface="Aptos" pitchFamily="34" charset="-120"/>
               </a:rPr>
-              <a:t>Staff need to verify whether the source system can provide these.</a:t>
-            </a:r>
-            <a:endParaRPr lang="en-US" sz="1220" dirty="0"/>
-          </a:p>
-          <a:p>
-            <a:pPr indent="0" marL="0">
-              <a:buNone/>
-            </a:pPr>
-            <a:r>
-              <a:rPr lang="en-US" sz="1220" dirty="0">
+              <a:t>Staff need to verify whether the source system can.</a:t>
+            </a:r>
+            <a:endParaRPr lang="en-US" sz="1140" dirty="0"/>
+          </a:p>
+          <a:p>
+            <a:pPr indent="0" marL="0">
+              <a:buNone/>
+            </a:pPr>
+            <a:r>
+              <a:rPr lang="en-US" sz="1140" dirty="0">
                 <a:solidFill>
                   <a:srgbClr val="17364A"/>
                 </a:solidFill>
@@ -4451,9 +4451,9 @@
                 <a:ea typeface="Aptos" pitchFamily="34" charset="-122"/>
                 <a:cs typeface="Aptos" pitchFamily="34" charset="-120"/>
               </a:rPr>
-              <a:t>An immunization use case may need Patient and Immunization.</a:t>
-            </a:r>
-            <a:endParaRPr lang="en-US" sz="1220" dirty="0"/>
+              <a:t>An immunization use case may need Patient and.</a:t>
+            </a:r>
+            <a:endParaRPr lang="en-US" sz="1140" dirty="0"/>
           </a:p>
         </p:txBody>
       </p:sp>
@@ -4465,12 +4465,12 @@
         </p:nvSpPr>
         <p:spPr>
           <a:xfrm>
-            <a:off x="7635240" y="4184294"/>
-            <a:ext cx="3474720" cy="1466698"/>
+            <a:off x="7543800" y="4389120"/>
+            <a:ext cx="3611880" cy="1261872"/>
           </a:xfrm>
           <a:prstGeom prst="roundRect">
             <a:avLst>
-              <a:gd name="adj" fmla="val 7481"/>
+              <a:gd name="adj" fmla="val 8696"/>
             </a:avLst>
           </a:prstGeom>
           <a:solidFill>
@@ -4492,8 +4492,8 @@
         </p:nvSpPr>
         <p:spPr>
           <a:xfrm>
-            <a:off x="7799832" y="4330598"/>
-            <a:ext cx="3145536" cy="256032"/>
+            <a:off x="7708392" y="4517136"/>
+            <a:ext cx="3282696" cy="228600"/>
           </a:xfrm>
           <a:prstGeom prst="rect">
             <a:avLst/>
@@ -4509,7 +4509,7 @@
               <a:buNone/>
             </a:pPr>
             <a:r>
-              <a:rPr lang="en-US" sz="1300" b="1" dirty="0">
+              <a:rPr lang="en-US" sz="1220" b="1" dirty="0">
                 <a:solidFill>
                   <a:srgbClr val="0068B7"/>
                 </a:solidFill>
@@ -4519,7 +4519,7 @@
               </a:rPr>
               <a:t>Apply it</a:t>
             </a:r>
-            <a:endParaRPr lang="en-US" sz="1300" dirty="0"/>
+            <a:endParaRPr lang="en-US" sz="1220" dirty="0"/>
           </a:p>
         </p:txBody>
       </p:sp>
@@ -4531,8 +4531,8 @@
         </p:nvSpPr>
         <p:spPr>
           <a:xfrm>
-            <a:off x="7799832" y="4659782"/>
-            <a:ext cx="3145536" cy="899770"/>
+            <a:off x="7708392" y="4828032"/>
+            <a:ext cx="3282696" cy="749808"/>
           </a:xfrm>
           <a:prstGeom prst="rect">
             <a:avLst/>
@@ -4550,7 +4550,7 @@
               <a:buNone/>
             </a:pPr>
             <a:r>
-              <a:rPr lang="en-US" sz="1320" dirty="0">
+              <a:rPr lang="en-US" sz="1220" dirty="0">
                 <a:solidFill>
                   <a:srgbClr val="17364A"/>
                 </a:solidFill>
@@ -4558,9 +4558,9 @@
                 <a:ea typeface="Aptos" pitchFamily="34" charset="-122"/>
                 <a:cs typeface="Aptos" pitchFamily="34" charset="-120"/>
               </a:rPr>
-              <a:t>Connect the concept to public health purpose, responsible use, required safeguards, documentation, and the next action a department should take.</a:t>
-            </a:r>
-            <a:endParaRPr lang="en-US" sz="1320" dirty="0"/>
+              <a:t>Connect the concept to public health purpose, responsible use, required.</a:t>
+            </a:r>
+            <a:endParaRPr lang="en-US" sz="1220" dirty="0"/>
           </a:p>
         </p:txBody>
       </p:sp>
@@ -4851,8 +4851,8 @@
         </p:nvSpPr>
         <p:spPr>
           <a:xfrm>
-            <a:off x="868680" y="1508760"/>
-            <a:ext cx="6309360" cy="4160520"/>
+            <a:off x="822960" y="1463040"/>
+            <a:ext cx="6565392" cy="4343400"/>
           </a:xfrm>
           <a:prstGeom prst="rect">
             <a:avLst/>
@@ -4870,7 +4870,7 @@
               <a:buNone/>
             </a:pPr>
             <a:r>
-              <a:rPr lang="en-US" sz="2100" dirty="0">
+              <a:rPr lang="en-US" sz="1920" dirty="0">
                 <a:solidFill>
                   <a:srgbClr val="003A63"/>
                 </a:solidFill>
@@ -4880,14 +4880,14 @@
               </a:rPr>
               <a:t>• FHIR planning should begin with the use case rather than the technology.</a:t>
             </a:r>
-            <a:endParaRPr lang="en-US" sz="2100" dirty="0"/>
-          </a:p>
-          <a:p>
-            <a:pPr indent="0" marL="0">
-              <a:buNone/>
-            </a:pPr>
-            <a:r>
-              <a:rPr lang="en-US" sz="2100" dirty="0">
+            <a:endParaRPr lang="en-US" sz="1920" dirty="0"/>
+          </a:p>
+          <a:p>
+            <a:pPr indent="0" marL="0">
+              <a:buNone/>
+            </a:pPr>
+            <a:r>
+              <a:rPr lang="en-US" sz="1920" dirty="0">
                 <a:solidFill>
                   <a:srgbClr val="003A63"/>
                 </a:solidFill>
@@ -4895,16 +4895,16 @@
                 <a:ea typeface="Aptos" pitchFamily="34" charset="-122"/>
                 <a:cs typeface="Aptos" pitchFamily="34" charset="-120"/>
               </a:rPr>
-              <a:t>• Staff should identify the public health decision or task, the data elements required, the FHIR.</a:t>
-            </a:r>
-            <a:endParaRPr lang="en-US" sz="2100" dirty="0"/>
-          </a:p>
-          <a:p>
-            <a:pPr indent="0" marL="0">
-              <a:buNone/>
-            </a:pPr>
-            <a:r>
-              <a:rPr lang="en-US" sz="2100" dirty="0">
+              <a:t>• Staff should identify the public health decision or task, the data elements.</a:t>
+            </a:r>
+            <a:endParaRPr lang="en-US" sz="1920" dirty="0"/>
+          </a:p>
+          <a:p>
+            <a:pPr indent="0" marL="0">
+              <a:buNone/>
+            </a:pPr>
+            <a:r>
+              <a:rPr lang="en-US" sz="1920" dirty="0">
                 <a:solidFill>
                   <a:srgbClr val="003A63"/>
                 </a:solidFill>
@@ -4912,9 +4912,9 @@
                 <a:ea typeface="Aptos" pitchFamily="34" charset="-122"/>
                 <a:cs typeface="Aptos" pitchFamily="34" charset="-120"/>
               </a:rPr>
-              <a:t>• This prevents over-general claims about FHIR from substituting for a concrete data needs.</a:t>
-            </a:r>
-            <a:endParaRPr lang="en-US" sz="2100" dirty="0"/>
+              <a:t>• This prevents over-general claims about FHIR from substituting for a.</a:t>
+            </a:r>
+            <a:endParaRPr lang="en-US" sz="1920" dirty="0"/>
           </a:p>
         </p:txBody>
       </p:sp>
@@ -4926,12 +4926,12 @@
         </p:nvSpPr>
         <p:spPr>
           <a:xfrm>
-            <a:off x="7635240" y="1325880"/>
-            <a:ext cx="3474720" cy="1207008"/>
+            <a:off x="7543800" y="1325880"/>
+            <a:ext cx="3611880" cy="1261872"/>
           </a:xfrm>
           <a:prstGeom prst="roundRect">
             <a:avLst>
-              <a:gd name="adj" fmla="val 9091"/>
+              <a:gd name="adj" fmla="val 8696"/>
             </a:avLst>
           </a:prstGeom>
           <a:solidFill>
@@ -4953,8 +4953,8 @@
         </p:nvSpPr>
         <p:spPr>
           <a:xfrm>
-            <a:off x="7799832" y="1472184"/>
-            <a:ext cx="3145536" cy="256032"/>
+            <a:off x="7708392" y="1453896"/>
+            <a:ext cx="3282696" cy="228600"/>
           </a:xfrm>
           <a:prstGeom prst="rect">
             <a:avLst/>
@@ -4970,7 +4970,7 @@
               <a:buNone/>
             </a:pPr>
             <a:r>
-              <a:rPr lang="en-US" sz="1300" b="1" dirty="0">
+              <a:rPr lang="en-US" sz="1220" b="1" dirty="0">
                 <a:solidFill>
                   <a:srgbClr val="0068B7"/>
                 </a:solidFill>
@@ -4980,7 +4980,7 @@
               </a:rPr>
               <a:t>Core concept</a:t>
             </a:r>
-            <a:endParaRPr lang="en-US" sz="1300" dirty="0"/>
+            <a:endParaRPr lang="en-US" sz="1220" dirty="0"/>
           </a:p>
         </p:txBody>
       </p:sp>
@@ -4992,8 +4992,8 @@
         </p:nvSpPr>
         <p:spPr>
           <a:xfrm>
-            <a:off x="7799832" y="1801368"/>
-            <a:ext cx="3145536" cy="640080"/>
+            <a:off x="7708392" y="1764792"/>
+            <a:ext cx="3282696" cy="749808"/>
           </a:xfrm>
           <a:prstGeom prst="rect">
             <a:avLst/>
@@ -5011,7 +5011,7 @@
               <a:buNone/>
             </a:pPr>
             <a:r>
-              <a:rPr lang="en-US" sz="1320" dirty="0">
+              <a:rPr lang="en-US" sz="1220" dirty="0">
                 <a:solidFill>
                   <a:srgbClr val="17364A"/>
                 </a:solidFill>
@@ -5021,7 +5021,7 @@
               </a:rPr>
               <a:t>FHIR planning should begin with the use case rather than the technology.</a:t>
             </a:r>
-            <a:endParaRPr lang="en-US" sz="1320" dirty="0"/>
+            <a:endParaRPr lang="en-US" sz="1220" dirty="0"/>
           </a:p>
         </p:txBody>
       </p:sp>
@@ -5033,12 +5033,12 @@
         </p:nvSpPr>
         <p:spPr>
           <a:xfrm>
-            <a:off x="7635240" y="2670048"/>
-            <a:ext cx="3474720" cy="1377086"/>
+            <a:off x="7543800" y="2724912"/>
+            <a:ext cx="3611880" cy="1527048"/>
           </a:xfrm>
           <a:prstGeom prst="roundRect">
             <a:avLst>
-              <a:gd name="adj" fmla="val 7968"/>
+              <a:gd name="adj" fmla="val 7186"/>
             </a:avLst>
           </a:prstGeom>
           <a:solidFill>
@@ -5060,8 +5060,8 @@
         </p:nvSpPr>
         <p:spPr>
           <a:xfrm>
-            <a:off x="7799832" y="2816352"/>
-            <a:ext cx="3145536" cy="256032"/>
+            <a:off x="7708392" y="2852928"/>
+            <a:ext cx="3282696" cy="228600"/>
           </a:xfrm>
           <a:prstGeom prst="rect">
             <a:avLst/>
@@ -5077,7 +5077,7 @@
               <a:buNone/>
             </a:pPr>
             <a:r>
-              <a:rPr lang="en-US" sz="1300" b="1" dirty="0">
+              <a:rPr lang="en-US" sz="1220" b="1" dirty="0">
                 <a:solidFill>
                   <a:srgbClr val="0068B7"/>
                 </a:solidFill>
@@ -5087,7 +5087,7 @@
               </a:rPr>
               <a:t>Concept checkpoints</a:t>
             </a:r>
-            <a:endParaRPr lang="en-US" sz="1300" dirty="0"/>
+            <a:endParaRPr lang="en-US" sz="1220" dirty="0"/>
           </a:p>
         </p:txBody>
       </p:sp>
@@ -5099,8 +5099,8 @@
         </p:nvSpPr>
         <p:spPr>
           <a:xfrm>
-            <a:off x="7818120" y="3182112"/>
-            <a:ext cx="3090672" cy="718718"/>
+            <a:off x="7726680" y="3182112"/>
+            <a:ext cx="3227832" cy="960120"/>
           </a:xfrm>
           <a:prstGeom prst="rect">
             <a:avLst/>
@@ -5118,7 +5118,7 @@
               <a:buNone/>
             </a:pPr>
             <a:r>
-              <a:rPr lang="en-US" sz="1220" dirty="0">
+              <a:rPr lang="en-US" sz="1140" dirty="0">
                 <a:solidFill>
                   <a:srgbClr val="17364A"/>
                 </a:solidFill>
@@ -5126,16 +5126,16 @@
                 <a:ea typeface="Aptos" pitchFamily="34" charset="-122"/>
                 <a:cs typeface="Aptos" pitchFamily="34" charset="-120"/>
               </a:rPr>
-              <a:t>Staff should identify the public health decision or task, the data.</a:t>
-            </a:r>
-            <a:endParaRPr lang="en-US" sz="1220" dirty="0"/>
-          </a:p>
-          <a:p>
-            <a:pPr indent="0" marL="0">
-              <a:buNone/>
-            </a:pPr>
-            <a:r>
-              <a:rPr lang="en-US" sz="1220" dirty="0">
+              <a:t>Staff should identify the public health decision.</a:t>
+            </a:r>
+            <a:endParaRPr lang="en-US" sz="1140" dirty="0"/>
+          </a:p>
+          <a:p>
+            <a:pPr indent="0" marL="0">
+              <a:buNone/>
+            </a:pPr>
+            <a:r>
+              <a:rPr lang="en-US" sz="1140" dirty="0">
                 <a:solidFill>
                   <a:srgbClr val="17364A"/>
                 </a:solidFill>
@@ -5143,16 +5143,16 @@
                 <a:ea typeface="Aptos" pitchFamily="34" charset="-122"/>
                 <a:cs typeface="Aptos" pitchFamily="34" charset="-120"/>
               </a:rPr>
-              <a:t>Profiles and implementation guides matter because general.</a:t>
-            </a:r>
-            <a:endParaRPr lang="en-US" sz="1220" dirty="0"/>
-          </a:p>
-          <a:p>
-            <a:pPr indent="0" marL="0">
-              <a:buNone/>
-            </a:pPr>
-            <a:r>
-              <a:rPr lang="en-US" sz="1220" dirty="0">
+              <a:t>Profiles and implementation guides matter because.</a:t>
+            </a:r>
+            <a:endParaRPr lang="en-US" sz="1140" dirty="0"/>
+          </a:p>
+          <a:p>
+            <a:pPr indent="0" marL="0">
+              <a:buNone/>
+            </a:pPr>
+            <a:r>
+              <a:rPr lang="en-US" sz="1140" dirty="0">
                 <a:solidFill>
                   <a:srgbClr val="17364A"/>
                 </a:solidFill>
@@ -5160,9 +5160,9 @@
                 <a:ea typeface="Aptos" pitchFamily="34" charset="-122"/>
                 <a:cs typeface="Aptos" pitchFamily="34" charset="-120"/>
               </a:rPr>
-              <a:t>A public health workflow may need specific required elements,.</a:t>
-            </a:r>
-            <a:endParaRPr lang="en-US" sz="1220" dirty="0"/>
+              <a:t>A public health workflow may need specific.</a:t>
+            </a:r>
+            <a:endParaRPr lang="en-US" sz="1140" dirty="0"/>
           </a:p>
         </p:txBody>
       </p:sp>
@@ -5174,12 +5174,12 @@
         </p:nvSpPr>
         <p:spPr>
           <a:xfrm>
-            <a:off x="7635240" y="4184294"/>
-            <a:ext cx="3474720" cy="1466698"/>
+            <a:off x="7543800" y="4389120"/>
+            <a:ext cx="3611880" cy="1261872"/>
           </a:xfrm>
           <a:prstGeom prst="roundRect">
             <a:avLst>
-              <a:gd name="adj" fmla="val 7481"/>
+              <a:gd name="adj" fmla="val 8696"/>
             </a:avLst>
           </a:prstGeom>
           <a:solidFill>
@@ -5201,8 +5201,8 @@
         </p:nvSpPr>
         <p:spPr>
           <a:xfrm>
-            <a:off x="7799832" y="4330598"/>
-            <a:ext cx="3145536" cy="256032"/>
+            <a:off x="7708392" y="4517136"/>
+            <a:ext cx="3282696" cy="228600"/>
           </a:xfrm>
           <a:prstGeom prst="rect">
             <a:avLst/>
@@ -5218,7 +5218,7 @@
               <a:buNone/>
             </a:pPr>
             <a:r>
-              <a:rPr lang="en-US" sz="1300" b="1" dirty="0">
+              <a:rPr lang="en-US" sz="1220" b="1" dirty="0">
                 <a:solidFill>
                   <a:srgbClr val="0068B7"/>
                 </a:solidFill>
@@ -5228,7 +5228,7 @@
               </a:rPr>
               <a:t>Apply it</a:t>
             </a:r>
-            <a:endParaRPr lang="en-US" sz="1300" dirty="0"/>
+            <a:endParaRPr lang="en-US" sz="1220" dirty="0"/>
           </a:p>
         </p:txBody>
       </p:sp>
@@ -5240,8 +5240,8 @@
         </p:nvSpPr>
         <p:spPr>
           <a:xfrm>
-            <a:off x="7799832" y="4659782"/>
-            <a:ext cx="3145536" cy="899770"/>
+            <a:off x="7708392" y="4828032"/>
+            <a:ext cx="3282696" cy="749808"/>
           </a:xfrm>
           <a:prstGeom prst="rect">
             <a:avLst/>
@@ -5259,7 +5259,7 @@
               <a:buNone/>
             </a:pPr>
             <a:r>
-              <a:rPr lang="en-US" sz="1320" dirty="0">
+              <a:rPr lang="en-US" sz="1220" dirty="0">
                 <a:solidFill>
                   <a:srgbClr val="17364A"/>
                 </a:solidFill>
@@ -5267,9 +5267,9 @@
                 <a:ea typeface="Aptos" pitchFamily="34" charset="-122"/>
                 <a:cs typeface="Aptos" pitchFamily="34" charset="-120"/>
               </a:rPr>
-              <a:t>Connect the concept to public health purpose, responsible use, required safeguards, documentation, and the next action a department should take.</a:t>
-            </a:r>
-            <a:endParaRPr lang="en-US" sz="1320" dirty="0"/>
+              <a:t>Connect the concept to public health purpose, responsible use, required.</a:t>
+            </a:r>
+            <a:endParaRPr lang="en-US" sz="1220" dirty="0"/>
           </a:p>
         </p:txBody>
       </p:sp>
@@ -5560,8 +5560,8 @@
         </p:nvSpPr>
         <p:spPr>
           <a:xfrm>
-            <a:off x="868680" y="1508760"/>
-            <a:ext cx="6309360" cy="4160520"/>
+            <a:off x="822960" y="1463040"/>
+            <a:ext cx="6565392" cy="4343400"/>
           </a:xfrm>
           <a:prstGeom prst="rect">
             <a:avLst/>
@@ -5579,7 +5579,7 @@
               <a:buNone/>
             </a:pPr>
             <a:r>
-              <a:rPr lang="en-US" sz="2100" dirty="0">
+              <a:rPr lang="en-US" sz="1920" dirty="0">
                 <a:solidFill>
                   <a:srgbClr val="003A63"/>
                 </a:solidFill>
@@ -5589,14 +5589,14 @@
               </a:rPr>
               <a:t>• FHIR-compatible but incomplete.</a:t>
             </a:r>
-            <a:endParaRPr lang="en-US" sz="2100" dirty="0"/>
-          </a:p>
-          <a:p>
-            <a:pPr indent="0" marL="0">
-              <a:buNone/>
-            </a:pPr>
-            <a:r>
-              <a:rPr lang="en-US" sz="2100" dirty="0">
+            <a:endParaRPr lang="en-US" sz="1920" dirty="0"/>
+          </a:p>
+          <a:p>
+            <a:pPr indent="0" marL="0">
+              <a:buNone/>
+            </a:pPr>
+            <a:r>
+              <a:rPr lang="en-US" sz="1920" dirty="0">
                 <a:solidFill>
                   <a:srgbClr val="003A63"/>
                 </a:solidFill>
@@ -5604,16 +5604,16 @@
                 <a:ea typeface="Aptos" pitchFamily="34" charset="-122"/>
                 <a:cs typeface="Aptos" pitchFamily="34" charset="-120"/>
               </a:rPr>
-              <a:t>• A product may support FHIR but not the data needed for the public health use case.</a:t>
-            </a:r>
-            <a:endParaRPr lang="en-US" sz="2100" dirty="0"/>
-          </a:p>
-          <a:p>
-            <a:pPr indent="0" marL="0">
-              <a:buNone/>
-            </a:pPr>
-            <a:r>
-              <a:rPr lang="en-US" sz="2100" dirty="0">
+              <a:t>• A product may support FHIR but not the data needed for the public health use.</a:t>
+            </a:r>
+            <a:endParaRPr lang="en-US" sz="1920" dirty="0"/>
+          </a:p>
+          <a:p>
+            <a:pPr indent="0" marL="0">
+              <a:buNone/>
+            </a:pPr>
+            <a:r>
+              <a:rPr lang="en-US" sz="1920" dirty="0">
                 <a:solidFill>
                   <a:srgbClr val="003A63"/>
                 </a:solidFill>
@@ -5621,9 +5621,9 @@
                 <a:ea typeface="Aptos" pitchFamily="34" charset="-122"/>
                 <a:cs typeface="Aptos" pitchFamily="34" charset="-120"/>
               </a:rPr>
-              <a:t>• Guardrails include data needs worksheets, test queries, and acceptance criteria.</a:t>
-            </a:r>
-            <a:endParaRPr lang="en-US" sz="2100" dirty="0"/>
+              <a:t>• Guardrails include data needs worksheets, test queries, and acceptance.</a:t>
+            </a:r>
+            <a:endParaRPr lang="en-US" sz="1920" dirty="0"/>
           </a:p>
         </p:txBody>
       </p:sp>
@@ -5635,12 +5635,12 @@
         </p:nvSpPr>
         <p:spPr>
           <a:xfrm>
-            <a:off x="7635240" y="1325880"/>
-            <a:ext cx="3474720" cy="1207008"/>
+            <a:off x="7543800" y="1325880"/>
+            <a:ext cx="3611880" cy="1261872"/>
           </a:xfrm>
           <a:prstGeom prst="roundRect">
             <a:avLst>
-              <a:gd name="adj" fmla="val 9091"/>
+              <a:gd name="adj" fmla="val 8696"/>
             </a:avLst>
           </a:prstGeom>
           <a:solidFill>
@@ -5662,8 +5662,8 @@
         </p:nvSpPr>
         <p:spPr>
           <a:xfrm>
-            <a:off x="7799832" y="1472184"/>
-            <a:ext cx="3145536" cy="256032"/>
+            <a:off x="7708392" y="1453896"/>
+            <a:ext cx="3282696" cy="228600"/>
           </a:xfrm>
           <a:prstGeom prst="rect">
             <a:avLst/>
@@ -5679,7 +5679,7 @@
               <a:buNone/>
             </a:pPr>
             <a:r>
-              <a:rPr lang="en-US" sz="1300" b="1" dirty="0">
+              <a:rPr lang="en-US" sz="1220" b="1" dirty="0">
                 <a:solidFill>
                   <a:srgbClr val="0068B7"/>
                 </a:solidFill>
@@ -5689,7 +5689,7 @@
               </a:rPr>
               <a:t>Risk check</a:t>
             </a:r>
-            <a:endParaRPr lang="en-US" sz="1300" dirty="0"/>
+            <a:endParaRPr lang="en-US" sz="1220" dirty="0"/>
           </a:p>
         </p:txBody>
       </p:sp>
@@ -5701,8 +5701,8 @@
         </p:nvSpPr>
         <p:spPr>
           <a:xfrm>
-            <a:off x="7799832" y="1801368"/>
-            <a:ext cx="3145536" cy="640080"/>
+            <a:off x="7708392" y="1764792"/>
+            <a:ext cx="3282696" cy="749808"/>
           </a:xfrm>
           <a:prstGeom prst="rect">
             <a:avLst/>
@@ -5720,7 +5720,7 @@
               <a:buNone/>
             </a:pPr>
             <a:r>
-              <a:rPr lang="en-US" sz="1320" dirty="0">
+              <a:rPr lang="en-US" sz="1220" dirty="0">
                 <a:solidFill>
                   <a:srgbClr val="17364A"/>
                 </a:solidFill>
@@ -5730,7 +5730,7 @@
               </a:rPr>
               <a:t>FHIR-compatible but incomplete.</a:t>
             </a:r>
-            <a:endParaRPr lang="en-US" sz="1320" dirty="0"/>
+            <a:endParaRPr lang="en-US" sz="1220" dirty="0"/>
           </a:p>
         </p:txBody>
       </p:sp>
@@ -5742,12 +5742,12 @@
         </p:nvSpPr>
         <p:spPr>
           <a:xfrm>
-            <a:off x="7635240" y="2670048"/>
-            <a:ext cx="3474720" cy="1536192"/>
+            <a:off x="7543800" y="2724912"/>
+            <a:ext cx="3611880" cy="1527048"/>
           </a:xfrm>
           <a:prstGeom prst="roundRect">
             <a:avLst>
-              <a:gd name="adj" fmla="val 7143"/>
+              <a:gd name="adj" fmla="val 7186"/>
             </a:avLst>
           </a:prstGeom>
           <a:solidFill>
@@ -5769,24 +5769,26 @@
         </p:nvSpPr>
         <p:spPr>
           <a:xfrm>
-            <a:off x="7799832" y="2798064"/>
-            <a:ext cx="3145536" cy="237744"/>
-          </a:xfrm>
-          <a:prstGeom prst="rect">
-            <a:avLst/>
-          </a:prstGeom>
-          <a:noFill/>
-          <a:ln/>
-        </p:spPr>
-        <p:txBody>
-          <a:bodyPr wrap="square" lIns="0" tIns="0" rIns="0" bIns="0" rtlCol="0" anchor="ctr"/>
-          <a:lstStyle/>
-          <a:p>
-            <a:pPr indent="0" marL="0">
-              <a:buNone/>
-            </a:pPr>
-            <a:r>
-              <a:rPr lang="en-US" sz="1250" b="1" dirty="0">
+            <a:off x="7708392" y="2852928"/>
+            <a:ext cx="3282696" cy="219456"/>
+          </a:xfrm>
+          <a:prstGeom prst="rect">
+            <a:avLst/>
+          </a:prstGeom>
+          <a:noFill/>
+          <a:ln/>
+        </p:spPr>
+        <p:txBody>
+          <a:bodyPr wrap="square" lIns="0" tIns="0" rIns="0" bIns="0" rtlCol="0" anchor="ctr">
+            <a:normAutofit/>
+          </a:bodyPr>
+          <a:lstStyle/>
+          <a:p>
+            <a:pPr indent="0" marL="0">
+              <a:buNone/>
+            </a:pPr>
+            <a:r>
+              <a:rPr lang="en-US" sz="1160" b="1" dirty="0">
                 <a:solidFill>
                   <a:srgbClr val="0068B7"/>
                 </a:solidFill>
@@ -5796,7 +5798,7 @@
               </a:rPr>
               <a:t>Risk control loop</a:t>
             </a:r>
-            <a:endParaRPr lang="en-US" sz="1250" dirty="0"/>
+            <a:endParaRPr lang="en-US" sz="1160" dirty="0"/>
           </a:p>
         </p:txBody>
       </p:sp>
@@ -5808,7 +5810,7 @@
         </p:nvSpPr>
         <p:spPr>
           <a:xfrm>
-            <a:off x="8763000" y="3351276"/>
+            <a:off x="8717280" y="3406140"/>
             <a:ext cx="164592" cy="0"/>
           </a:xfrm>
           <a:prstGeom prst="line">
@@ -5831,8 +5833,8 @@
         </p:nvSpPr>
         <p:spPr>
           <a:xfrm>
-            <a:off x="7872984" y="3200400"/>
-            <a:ext cx="890016" cy="301752"/>
+            <a:off x="7781544" y="3255264"/>
+            <a:ext cx="935736" cy="301752"/>
           </a:xfrm>
           <a:prstGeom prst="roundRect">
             <a:avLst>
@@ -5858,8 +5860,8 @@
         </p:nvSpPr>
         <p:spPr>
           <a:xfrm>
-            <a:off x="7909560" y="3273552"/>
-            <a:ext cx="816864" cy="146304"/>
+            <a:off x="7818120" y="3328416"/>
+            <a:ext cx="862584" cy="146304"/>
           </a:xfrm>
           <a:prstGeom prst="rect">
             <a:avLst/>
@@ -5899,7 +5901,7 @@
         </p:nvSpPr>
         <p:spPr>
           <a:xfrm>
-            <a:off x="9817608" y="3351276"/>
+            <a:off x="9817608" y="3406140"/>
             <a:ext cx="164592" cy="0"/>
           </a:xfrm>
           <a:prstGeom prst="line">
@@ -5922,8 +5924,8 @@
         </p:nvSpPr>
         <p:spPr>
           <a:xfrm>
-            <a:off x="8927592" y="3200400"/>
-            <a:ext cx="890016" cy="301752"/>
+            <a:off x="8881872" y="3255264"/>
+            <a:ext cx="935736" cy="301752"/>
           </a:xfrm>
           <a:prstGeom prst="roundRect">
             <a:avLst>
@@ -5949,8 +5951,8 @@
         </p:nvSpPr>
         <p:spPr>
           <a:xfrm>
-            <a:off x="8964168" y="3273552"/>
-            <a:ext cx="816864" cy="146304"/>
+            <a:off x="8918448" y="3328416"/>
+            <a:ext cx="862584" cy="146304"/>
           </a:xfrm>
           <a:prstGeom prst="rect">
             <a:avLst/>
@@ -5990,8 +5992,8 @@
         </p:nvSpPr>
         <p:spPr>
           <a:xfrm>
-            <a:off x="9982200" y="3200400"/>
-            <a:ext cx="890016" cy="301752"/>
+            <a:off x="9982200" y="3255264"/>
+            <a:ext cx="935736" cy="301752"/>
           </a:xfrm>
           <a:prstGeom prst="roundRect">
             <a:avLst>
@@ -6017,8 +6019,8 @@
         </p:nvSpPr>
         <p:spPr>
           <a:xfrm>
-            <a:off x="10018776" y="3273552"/>
-            <a:ext cx="816864" cy="146304"/>
+            <a:off x="10018776" y="3328416"/>
+            <a:ext cx="862584" cy="146304"/>
           </a:xfrm>
           <a:prstGeom prst="rect">
             <a:avLst/>
@@ -6058,8 +6060,8 @@
         </p:nvSpPr>
         <p:spPr>
           <a:xfrm>
-            <a:off x="7854696" y="3694176"/>
-            <a:ext cx="3035808" cy="365760"/>
+            <a:off x="7763256" y="3749040"/>
+            <a:ext cx="3172968" cy="356616"/>
           </a:xfrm>
           <a:prstGeom prst="rect">
             <a:avLst/>
@@ -6077,7 +6079,7 @@
               <a:buNone/>
             </a:pPr>
             <a:r>
-              <a:rPr lang="en-US" sz="1120" dirty="0">
+              <a:rPr lang="en-US" sz="1040" dirty="0">
                 <a:solidFill>
                   <a:srgbClr val="17364A"/>
                 </a:solidFill>
@@ -6085,9 +6087,9 @@
                 <a:ea typeface="Aptos" pitchFamily="34" charset="-122"/>
                 <a:cs typeface="Aptos" pitchFamily="34" charset="-120"/>
               </a:rPr>
-              <a:t>Responsible use depends on finding risks early, applying safeguards, and watching for drift or harm over time.</a:t>
-            </a:r>
-            <a:endParaRPr lang="en-US" sz="1120" dirty="0"/>
+              <a:t>Responsible use depends on finding risks early, applying safeguards,.</a:t>
+            </a:r>
+            <a:endParaRPr lang="en-US" sz="1040" dirty="0"/>
           </a:p>
         </p:txBody>
       </p:sp>
@@ -6099,12 +6101,12 @@
         </p:nvSpPr>
         <p:spPr>
           <a:xfrm>
-            <a:off x="7635240" y="4343400"/>
-            <a:ext cx="3474720" cy="1255471"/>
+            <a:off x="7543800" y="4389120"/>
+            <a:ext cx="3611880" cy="1261872"/>
           </a:xfrm>
           <a:prstGeom prst="roundRect">
             <a:avLst>
-              <a:gd name="adj" fmla="val 8740"/>
+              <a:gd name="adj" fmla="val 8696"/>
             </a:avLst>
           </a:prstGeom>
           <a:solidFill>
@@ -6126,8 +6128,8 @@
         </p:nvSpPr>
         <p:spPr>
           <a:xfrm>
-            <a:off x="7799832" y="4489704"/>
-            <a:ext cx="3145536" cy="256032"/>
+            <a:off x="7708392" y="4517136"/>
+            <a:ext cx="3282696" cy="228600"/>
           </a:xfrm>
           <a:prstGeom prst="rect">
             <a:avLst/>
@@ -6143,7 +6145,7 @@
               <a:buNone/>
             </a:pPr>
             <a:r>
-              <a:rPr lang="en-US" sz="1300" b="1" dirty="0">
+              <a:rPr lang="en-US" sz="1220" b="1" dirty="0">
                 <a:solidFill>
                   <a:srgbClr val="0068B7"/>
                 </a:solidFill>
@@ -6153,7 +6155,7 @@
               </a:rPr>
               <a:t>Safeguard to plan</a:t>
             </a:r>
-            <a:endParaRPr lang="en-US" sz="1300" dirty="0"/>
+            <a:endParaRPr lang="en-US" sz="1220" dirty="0"/>
           </a:p>
         </p:txBody>
       </p:sp>
@@ -6165,8 +6167,8 @@
         </p:nvSpPr>
         <p:spPr>
           <a:xfrm>
-            <a:off x="7799832" y="4818888"/>
-            <a:ext cx="3145536" cy="688543"/>
+            <a:off x="7708392" y="4828032"/>
+            <a:ext cx="3282696" cy="749808"/>
           </a:xfrm>
           <a:prstGeom prst="rect">
             <a:avLst/>
@@ -6184,7 +6186,7 @@
               <a:buNone/>
             </a:pPr>
             <a:r>
-              <a:rPr lang="en-US" sz="1320" dirty="0">
+              <a:rPr lang="en-US" sz="1220" dirty="0">
                 <a:solidFill>
                   <a:srgbClr val="17364A"/>
                 </a:solidFill>
@@ -6192,9 +6194,9 @@
                 <a:ea typeface="Aptos" pitchFamily="34" charset="-122"/>
                 <a:cs typeface="Aptos" pitchFamily="34" charset="-120"/>
               </a:rPr>
-              <a:t>Identify what could go wrong, who could be affected, what safeguards are needed, and what evidence should be reviewed before use.</a:t>
-            </a:r>
-            <a:endParaRPr lang="en-US" sz="1320" dirty="0"/>
+              <a:t>Identify what could go wrong, who could be affected, what safeguards are needed,.</a:t>
+            </a:r>
+            <a:endParaRPr lang="en-US" sz="1220" dirty="0"/>
           </a:p>
         </p:txBody>
       </p:sp>
@@ -6485,8 +6487,8 @@
         </p:nvSpPr>
         <p:spPr>
           <a:xfrm>
-            <a:off x="868680" y="1508760"/>
-            <a:ext cx="6309360" cy="4160520"/>
+            <a:off x="822960" y="1463040"/>
+            <a:ext cx="6565392" cy="4343400"/>
           </a:xfrm>
           <a:prstGeom prst="rect">
             <a:avLst/>
@@ -6504,7 +6506,7 @@
               <a:buNone/>
             </a:pPr>
             <a:r>
-              <a:rPr lang="en-US" sz="2100" dirty="0">
+              <a:rPr lang="en-US" sz="1920" dirty="0">
                 <a:solidFill>
                   <a:srgbClr val="003A63"/>
                 </a:solidFill>
@@ -6514,14 +6516,14 @@
               </a:rPr>
               <a:t>• Write-back risk.</a:t>
             </a:r>
-            <a:endParaRPr lang="en-US" sz="2100" dirty="0"/>
-          </a:p>
-          <a:p>
-            <a:pPr indent="0" marL="0">
-              <a:buNone/>
-            </a:pPr>
-            <a:r>
-              <a:rPr lang="en-US" sz="2100" dirty="0">
+            <a:endParaRPr lang="en-US" sz="1920" dirty="0"/>
+          </a:p>
+          <a:p>
+            <a:pPr indent="0" marL="0">
+              <a:buNone/>
+            </a:pPr>
+            <a:r>
+              <a:rPr lang="en-US" sz="1920" dirty="0">
                 <a:solidFill>
                   <a:srgbClr val="003A63"/>
                 </a:solidFill>
@@ -6531,14 +6533,14 @@
               </a:rPr>
               <a:t>• FHIR APIs may support updates or task creation.</a:t>
             </a:r>
-            <a:endParaRPr lang="en-US" sz="2100" dirty="0"/>
-          </a:p>
-          <a:p>
-            <a:pPr indent="0" marL="0">
-              <a:buNone/>
-            </a:pPr>
-            <a:r>
-              <a:rPr lang="en-US" sz="2100" dirty="0">
+            <a:endParaRPr lang="en-US" sz="1920" dirty="0"/>
+          </a:p>
+          <a:p>
+            <a:pPr indent="0" marL="0">
+              <a:buNone/>
+            </a:pPr>
+            <a:r>
+              <a:rPr lang="en-US" sz="1920" dirty="0">
                 <a:solidFill>
                   <a:srgbClr val="003A63"/>
                 </a:solidFill>
@@ -6546,9 +6548,9 @@
                 <a:ea typeface="Aptos" pitchFamily="34" charset="-122"/>
                 <a:cs typeface="Aptos" pitchFamily="34" charset="-120"/>
               </a:rPr>
-              <a:t>• Guardrails include human approval, restricted permissions, sandbox testing, and rollback.</a:t>
-            </a:r>
-            <a:endParaRPr lang="en-US" sz="2100" dirty="0"/>
+              <a:t>• Guardrails include human approval, restricted permissions, sandbox testing,.</a:t>
+            </a:r>
+            <a:endParaRPr lang="en-US" sz="1920" dirty="0"/>
           </a:p>
         </p:txBody>
       </p:sp>
@@ -6560,12 +6562,12 @@
         </p:nvSpPr>
         <p:spPr>
           <a:xfrm>
-            <a:off x="7635240" y="1325880"/>
-            <a:ext cx="3474720" cy="1207008"/>
+            <a:off x="7543800" y="1325880"/>
+            <a:ext cx="3611880" cy="1261872"/>
           </a:xfrm>
           <a:prstGeom prst="roundRect">
             <a:avLst>
-              <a:gd name="adj" fmla="val 9091"/>
+              <a:gd name="adj" fmla="val 8696"/>
             </a:avLst>
           </a:prstGeom>
           <a:solidFill>
@@ -6587,8 +6589,8 @@
         </p:nvSpPr>
         <p:spPr>
           <a:xfrm>
-            <a:off x="7799832" y="1472184"/>
-            <a:ext cx="3145536" cy="256032"/>
+            <a:off x="7708392" y="1453896"/>
+            <a:ext cx="3282696" cy="228600"/>
           </a:xfrm>
           <a:prstGeom prst="rect">
             <a:avLst/>
@@ -6604,7 +6606,7 @@
               <a:buNone/>
             </a:pPr>
             <a:r>
-              <a:rPr lang="en-US" sz="1300" b="1" dirty="0">
+              <a:rPr lang="en-US" sz="1220" b="1" dirty="0">
                 <a:solidFill>
                   <a:srgbClr val="0068B7"/>
                 </a:solidFill>
@@ -6614,7 +6616,7 @@
               </a:rPr>
               <a:t>Risk check</a:t>
             </a:r>
-            <a:endParaRPr lang="en-US" sz="1300" dirty="0"/>
+            <a:endParaRPr lang="en-US" sz="1220" dirty="0"/>
           </a:p>
         </p:txBody>
       </p:sp>
@@ -6626,8 +6628,8 @@
         </p:nvSpPr>
         <p:spPr>
           <a:xfrm>
-            <a:off x="7799832" y="1801368"/>
-            <a:ext cx="3145536" cy="640080"/>
+            <a:off x="7708392" y="1764792"/>
+            <a:ext cx="3282696" cy="749808"/>
           </a:xfrm>
           <a:prstGeom prst="rect">
             <a:avLst/>
@@ -6645,7 +6647,7 @@
               <a:buNone/>
             </a:pPr>
             <a:r>
-              <a:rPr lang="en-US" sz="1320" dirty="0">
+              <a:rPr lang="en-US" sz="1220" dirty="0">
                 <a:solidFill>
                   <a:srgbClr val="17364A"/>
                 </a:solidFill>
@@ -6655,7 +6657,7 @@
               </a:rPr>
               <a:t>Write-back risk.</a:t>
             </a:r>
-            <a:endParaRPr lang="en-US" sz="1320" dirty="0"/>
+            <a:endParaRPr lang="en-US" sz="1220" dirty="0"/>
           </a:p>
         </p:txBody>
       </p:sp>
@@ -6667,12 +6669,12 @@
         </p:nvSpPr>
         <p:spPr>
           <a:xfrm>
-            <a:off x="7635240" y="2670048"/>
-            <a:ext cx="3474720" cy="1536192"/>
+            <a:off x="7543800" y="2724912"/>
+            <a:ext cx="3611880" cy="1527048"/>
           </a:xfrm>
           <a:prstGeom prst="roundRect">
             <a:avLst>
-              <a:gd name="adj" fmla="val 7143"/>
+              <a:gd name="adj" fmla="val 7186"/>
             </a:avLst>
           </a:prstGeom>
           <a:solidFill>
@@ -6694,24 +6696,26 @@
         </p:nvSpPr>
         <p:spPr>
           <a:xfrm>
-            <a:off x="7799832" y="2798064"/>
-            <a:ext cx="3145536" cy="237744"/>
-          </a:xfrm>
-          <a:prstGeom prst="rect">
-            <a:avLst/>
-          </a:prstGeom>
-          <a:noFill/>
-          <a:ln/>
-        </p:spPr>
-        <p:txBody>
-          <a:bodyPr wrap="square" lIns="0" tIns="0" rIns="0" bIns="0" rtlCol="0" anchor="ctr"/>
-          <a:lstStyle/>
-          <a:p>
-            <a:pPr indent="0" marL="0">
-              <a:buNone/>
-            </a:pPr>
-            <a:r>
-              <a:rPr lang="en-US" sz="1250" b="1" dirty="0">
+            <a:off x="7708392" y="2852928"/>
+            <a:ext cx="3282696" cy="219456"/>
+          </a:xfrm>
+          <a:prstGeom prst="rect">
+            <a:avLst/>
+          </a:prstGeom>
+          <a:noFill/>
+          <a:ln/>
+        </p:spPr>
+        <p:txBody>
+          <a:bodyPr wrap="square" lIns="0" tIns="0" rIns="0" bIns="0" rtlCol="0" anchor="ctr">
+            <a:normAutofit/>
+          </a:bodyPr>
+          <a:lstStyle/>
+          <a:p>
+            <a:pPr indent="0" marL="0">
+              <a:buNone/>
+            </a:pPr>
+            <a:r>
+              <a:rPr lang="en-US" sz="1160" b="1" dirty="0">
                 <a:solidFill>
                   <a:srgbClr val="0068B7"/>
                 </a:solidFill>
@@ -6721,7 +6725,7 @@
               </a:rPr>
               <a:t>Risk control loop</a:t>
             </a:r>
-            <a:endParaRPr lang="en-US" sz="1250" dirty="0"/>
+            <a:endParaRPr lang="en-US" sz="1160" dirty="0"/>
           </a:p>
         </p:txBody>
       </p:sp>
@@ -6733,7 +6737,7 @@
         </p:nvSpPr>
         <p:spPr>
           <a:xfrm>
-            <a:off x="8763000" y="3351276"/>
+            <a:off x="8717280" y="3406140"/>
             <a:ext cx="164592" cy="0"/>
           </a:xfrm>
           <a:prstGeom prst="line">
@@ -6756,8 +6760,8 @@
         </p:nvSpPr>
         <p:spPr>
           <a:xfrm>
-            <a:off x="7872984" y="3200400"/>
-            <a:ext cx="890016" cy="301752"/>
+            <a:off x="7781544" y="3255264"/>
+            <a:ext cx="935736" cy="301752"/>
           </a:xfrm>
           <a:prstGeom prst="roundRect">
             <a:avLst>
@@ -6783,8 +6787,8 @@
         </p:nvSpPr>
         <p:spPr>
           <a:xfrm>
-            <a:off x="7909560" y="3273552"/>
-            <a:ext cx="816864" cy="146304"/>
+            <a:off x="7818120" y="3328416"/>
+            <a:ext cx="862584" cy="146304"/>
           </a:xfrm>
           <a:prstGeom prst="rect">
             <a:avLst/>
@@ -6824,7 +6828,7 @@
         </p:nvSpPr>
         <p:spPr>
           <a:xfrm>
-            <a:off x="9817608" y="3351276"/>
+            <a:off x="9817608" y="3406140"/>
             <a:ext cx="164592" cy="0"/>
           </a:xfrm>
           <a:prstGeom prst="line">
@@ -6847,8 +6851,8 @@
         </p:nvSpPr>
         <p:spPr>
           <a:xfrm>
-            <a:off x="8927592" y="3200400"/>
-            <a:ext cx="890016" cy="301752"/>
+            <a:off x="8881872" y="3255264"/>
+            <a:ext cx="935736" cy="301752"/>
           </a:xfrm>
           <a:prstGeom prst="roundRect">
             <a:avLst>
@@ -6874,8 +6878,8 @@
         </p:nvSpPr>
         <p:spPr>
           <a:xfrm>
-            <a:off x="8964168" y="3273552"/>
-            <a:ext cx="816864" cy="146304"/>
+            <a:off x="8918448" y="3328416"/>
+            <a:ext cx="862584" cy="146304"/>
           </a:xfrm>
           <a:prstGeom prst="rect">
             <a:avLst/>
@@ -6915,8 +6919,8 @@
         </p:nvSpPr>
         <p:spPr>
           <a:xfrm>
-            <a:off x="9982200" y="3200400"/>
-            <a:ext cx="890016" cy="301752"/>
+            <a:off x="9982200" y="3255264"/>
+            <a:ext cx="935736" cy="301752"/>
           </a:xfrm>
           <a:prstGeom prst="roundRect">
             <a:avLst>
@@ -6942,8 +6946,8 @@
         </p:nvSpPr>
         <p:spPr>
           <a:xfrm>
-            <a:off x="10018776" y="3273552"/>
-            <a:ext cx="816864" cy="146304"/>
+            <a:off x="10018776" y="3328416"/>
+            <a:ext cx="862584" cy="146304"/>
           </a:xfrm>
           <a:prstGeom prst="rect">
             <a:avLst/>
@@ -6983,8 +6987,8 @@
         </p:nvSpPr>
         <p:spPr>
           <a:xfrm>
-            <a:off x="7854696" y="3694176"/>
-            <a:ext cx="3035808" cy="365760"/>
+            <a:off x="7763256" y="3749040"/>
+            <a:ext cx="3172968" cy="356616"/>
           </a:xfrm>
           <a:prstGeom prst="rect">
             <a:avLst/>
@@ -7002,7 +7006,7 @@
               <a:buNone/>
             </a:pPr>
             <a:r>
-              <a:rPr lang="en-US" sz="1120" dirty="0">
+              <a:rPr lang="en-US" sz="1040" dirty="0">
                 <a:solidFill>
                   <a:srgbClr val="17364A"/>
                 </a:solidFill>
@@ -7010,9 +7014,9 @@
                 <a:ea typeface="Aptos" pitchFamily="34" charset="-122"/>
                 <a:cs typeface="Aptos" pitchFamily="34" charset="-120"/>
               </a:rPr>
-              <a:t>Responsible use depends on finding risks early, applying safeguards, and watching for drift or harm over time.</a:t>
-            </a:r>
-            <a:endParaRPr lang="en-US" sz="1120" dirty="0"/>
+              <a:t>Responsible use depends on finding risks early, applying safeguards,.</a:t>
+            </a:r>
+            <a:endParaRPr lang="en-US" sz="1040" dirty="0"/>
           </a:p>
         </p:txBody>
       </p:sp>
@@ -7024,12 +7028,12 @@
         </p:nvSpPr>
         <p:spPr>
           <a:xfrm>
-            <a:off x="7635240" y="4343400"/>
-            <a:ext cx="3474720" cy="1255471"/>
+            <a:off x="7543800" y="4389120"/>
+            <a:ext cx="3611880" cy="1261872"/>
           </a:xfrm>
           <a:prstGeom prst="roundRect">
             <a:avLst>
-              <a:gd name="adj" fmla="val 8740"/>
+              <a:gd name="adj" fmla="val 8696"/>
             </a:avLst>
           </a:prstGeom>
           <a:solidFill>
@@ -7051,8 +7055,8 @@
         </p:nvSpPr>
         <p:spPr>
           <a:xfrm>
-            <a:off x="7799832" y="4489704"/>
-            <a:ext cx="3145536" cy="256032"/>
+            <a:off x="7708392" y="4517136"/>
+            <a:ext cx="3282696" cy="228600"/>
           </a:xfrm>
           <a:prstGeom prst="rect">
             <a:avLst/>
@@ -7068,7 +7072,7 @@
               <a:buNone/>
             </a:pPr>
             <a:r>
-              <a:rPr lang="en-US" sz="1300" b="1" dirty="0">
+              <a:rPr lang="en-US" sz="1220" b="1" dirty="0">
                 <a:solidFill>
                   <a:srgbClr val="0068B7"/>
                 </a:solidFill>
@@ -7078,7 +7082,7 @@
               </a:rPr>
               <a:t>Safeguard to plan</a:t>
             </a:r>
-            <a:endParaRPr lang="en-US" sz="1300" dirty="0"/>
+            <a:endParaRPr lang="en-US" sz="1220" dirty="0"/>
           </a:p>
         </p:txBody>
       </p:sp>
@@ -7090,8 +7094,8 @@
         </p:nvSpPr>
         <p:spPr>
           <a:xfrm>
-            <a:off x="7799832" y="4818888"/>
-            <a:ext cx="3145536" cy="688543"/>
+            <a:off x="7708392" y="4828032"/>
+            <a:ext cx="3282696" cy="749808"/>
           </a:xfrm>
           <a:prstGeom prst="rect">
             <a:avLst/>
@@ -7109,7 +7113,7 @@
               <a:buNone/>
             </a:pPr>
             <a:r>
-              <a:rPr lang="en-US" sz="1320" dirty="0">
+              <a:rPr lang="en-US" sz="1220" dirty="0">
                 <a:solidFill>
                   <a:srgbClr val="17364A"/>
                 </a:solidFill>
@@ -7117,9 +7121,9 @@
                 <a:ea typeface="Aptos" pitchFamily="34" charset="-122"/>
                 <a:cs typeface="Aptos" pitchFamily="34" charset="-120"/>
               </a:rPr>
-              <a:t>Identify what could go wrong, who could be affected, what safeguards are needed, and what evidence should be reviewed before use.</a:t>
-            </a:r>
-            <a:endParaRPr lang="en-US" sz="1320" dirty="0"/>
+              <a:t>Identify what could go wrong, who could be affected, what safeguards are needed,.</a:t>
+            </a:r>
+            <a:endParaRPr lang="en-US" sz="1220" dirty="0"/>
           </a:p>
         </p:txBody>
       </p:sp>
@@ -7410,8 +7414,8 @@
         </p:nvSpPr>
         <p:spPr>
           <a:xfrm>
-            <a:off x="868680" y="1508760"/>
-            <a:ext cx="6309360" cy="4160520"/>
+            <a:off x="822960" y="1463040"/>
+            <a:ext cx="6565392" cy="4343400"/>
           </a:xfrm>
           <a:prstGeom prst="rect">
             <a:avLst/>
@@ -7429,7 +7433,7 @@
               <a:buNone/>
             </a:pPr>
             <a:r>
-              <a:rPr lang="en-US" sz="2100" dirty="0">
+              <a:rPr lang="en-US" sz="1920" dirty="0">
                 <a:solidFill>
                   <a:srgbClr val="003A63"/>
                 </a:solidFill>
@@ -7437,16 +7441,16 @@
                 <a:ea typeface="Aptos" pitchFamily="34" charset="-122"/>
                 <a:cs typeface="Aptos" pitchFamily="34" charset="-120"/>
               </a:rPr>
-              <a:t>• Generative AI can use FHIR data to draft case or patient summaries, but the output should be.</a:t>
-            </a:r>
-            <a:endParaRPr lang="en-US" sz="2100" dirty="0"/>
-          </a:p>
-          <a:p>
-            <a:pPr indent="0" marL="0">
-              <a:buNone/>
-            </a:pPr>
-            <a:r>
-              <a:rPr lang="en-US" sz="2100" dirty="0">
+              <a:t>• Generative AI can use FHIR data to draft case or patient summaries, but the.</a:t>
+            </a:r>
+            <a:endParaRPr lang="en-US" sz="1920" dirty="0"/>
+          </a:p>
+          <a:p>
+            <a:pPr indent="0" marL="0">
+              <a:buNone/>
+            </a:pPr>
+            <a:r>
+              <a:rPr lang="en-US" sz="1920" dirty="0">
                 <a:solidFill>
                   <a:srgbClr val="003A63"/>
                 </a:solidFill>
@@ -7454,16 +7458,16 @@
                 <a:ea typeface="Aptos" pitchFamily="34" charset="-122"/>
                 <a:cs typeface="Aptos" pitchFamily="34" charset="-120"/>
               </a:rPr>
-              <a:t>• Predictive analytics may use features derived from FHIR resources, which requires stable.</a:t>
-            </a:r>
-            <a:endParaRPr lang="en-US" sz="2100" dirty="0"/>
-          </a:p>
-          <a:p>
-            <a:pPr indent="0" marL="0">
-              <a:buNone/>
-            </a:pPr>
-            <a:r>
-              <a:rPr lang="en-US" sz="2100" dirty="0">
+              <a:t>• Predictive analytics may use features derived from FHIR resources, which.</a:t>
+            </a:r>
+            <a:endParaRPr lang="en-US" sz="1920" dirty="0"/>
+          </a:p>
+          <a:p>
+            <a:pPr indent="0" marL="0">
+              <a:buNone/>
+            </a:pPr>
+            <a:r>
+              <a:rPr lang="en-US" sz="1920" dirty="0">
                 <a:solidFill>
                   <a:srgbClr val="003A63"/>
                 </a:solidFill>
@@ -7473,7 +7477,7 @@
               </a:rPr>
               <a:t>• RAG may combine FHIR-derived facts with agency guidance.</a:t>
             </a:r>
-            <a:endParaRPr lang="en-US" sz="2100" dirty="0"/>
+            <a:endParaRPr lang="en-US" sz="1920" dirty="0"/>
           </a:p>
         </p:txBody>
       </p:sp>
@@ -7485,12 +7489,12 @@
         </p:nvSpPr>
         <p:spPr>
           <a:xfrm>
-            <a:off x="7635240" y="1325880"/>
-            <a:ext cx="3474720" cy="1255471"/>
+            <a:off x="7543800" y="1325880"/>
+            <a:ext cx="3611880" cy="1261872"/>
           </a:xfrm>
           <a:prstGeom prst="roundRect">
             <a:avLst>
-              <a:gd name="adj" fmla="val 8740"/>
+              <a:gd name="adj" fmla="val 8696"/>
             </a:avLst>
           </a:prstGeom>
           <a:solidFill>
@@ -7512,8 +7516,8 @@
         </p:nvSpPr>
         <p:spPr>
           <a:xfrm>
-            <a:off x="7799832" y="1472184"/>
-            <a:ext cx="3145536" cy="256032"/>
+            <a:off x="7708392" y="1453896"/>
+            <a:ext cx="3282696" cy="228600"/>
           </a:xfrm>
           <a:prstGeom prst="rect">
             <a:avLst/>
@@ -7529,7 +7533,7 @@
               <a:buNone/>
             </a:pPr>
             <a:r>
-              <a:rPr lang="en-US" sz="1300" b="1" dirty="0">
+              <a:rPr lang="en-US" sz="1220" b="1" dirty="0">
                 <a:solidFill>
                   <a:srgbClr val="0068B7"/>
                 </a:solidFill>
@@ -7539,7 +7543,7 @@
               </a:rPr>
               <a:t>Implementation cue</a:t>
             </a:r>
-            <a:endParaRPr lang="en-US" sz="1300" dirty="0"/>
+            <a:endParaRPr lang="en-US" sz="1220" dirty="0"/>
           </a:p>
         </p:txBody>
       </p:sp>
@@ -7551,8 +7555,8 @@
         </p:nvSpPr>
         <p:spPr>
           <a:xfrm>
-            <a:off x="7799832" y="1801368"/>
-            <a:ext cx="3145536" cy="688543"/>
+            <a:off x="7708392" y="1764792"/>
+            <a:ext cx="3282696" cy="749808"/>
           </a:xfrm>
           <a:prstGeom prst="rect">
             <a:avLst/>
@@ -7570,7 +7574,7 @@
               <a:buNone/>
             </a:pPr>
             <a:r>
-              <a:rPr lang="en-US" sz="1320" dirty="0">
+              <a:rPr lang="en-US" sz="1220" dirty="0">
                 <a:solidFill>
                   <a:srgbClr val="17364A"/>
                 </a:solidFill>
@@ -7578,9 +7582,9 @@
                 <a:ea typeface="Aptos" pitchFamily="34" charset="-122"/>
                 <a:cs typeface="Aptos" pitchFamily="34" charset="-120"/>
               </a:rPr>
-              <a:t>Generative AI can use FHIR data to draft case or patient summaries, but the output should be grounded.</a:t>
-            </a:r>
-            <a:endParaRPr lang="en-US" sz="1320" dirty="0"/>
+              <a:t>Generative AI can use FHIR data to draft case or patient summaries, but the.</a:t>
+            </a:r>
+            <a:endParaRPr lang="en-US" sz="1220" dirty="0"/>
           </a:p>
         </p:txBody>
       </p:sp>
@@ -7592,12 +7596,12 @@
         </p:nvSpPr>
         <p:spPr>
           <a:xfrm>
-            <a:off x="7635240" y="2718511"/>
-            <a:ext cx="3474720" cy="1328623"/>
+            <a:off x="7543800" y="2724912"/>
+            <a:ext cx="3611880" cy="1527048"/>
           </a:xfrm>
           <a:prstGeom prst="roundRect">
             <a:avLst>
-              <a:gd name="adj" fmla="val 8259"/>
+              <a:gd name="adj" fmla="val 7186"/>
             </a:avLst>
           </a:prstGeom>
           <a:solidFill>
@@ -7619,8 +7623,8 @@
         </p:nvSpPr>
         <p:spPr>
           <a:xfrm>
-            <a:off x="7799832" y="2864815"/>
-            <a:ext cx="3145536" cy="256032"/>
+            <a:off x="7708392" y="2852928"/>
+            <a:ext cx="3282696" cy="228600"/>
           </a:xfrm>
           <a:prstGeom prst="rect">
             <a:avLst/>
@@ -7636,7 +7640,7 @@
               <a:buNone/>
             </a:pPr>
             <a:r>
-              <a:rPr lang="en-US" sz="1300" b="1" dirty="0">
+              <a:rPr lang="en-US" sz="1220" b="1" dirty="0">
                 <a:solidFill>
                   <a:srgbClr val="0068B7"/>
                 </a:solidFill>
@@ -7646,7 +7650,7 @@
               </a:rPr>
               <a:t>Concept checkpoints</a:t>
             </a:r>
-            <a:endParaRPr lang="en-US" sz="1300" dirty="0"/>
+            <a:endParaRPr lang="en-US" sz="1220" dirty="0"/>
           </a:p>
         </p:txBody>
       </p:sp>
@@ -7658,8 +7662,8 @@
         </p:nvSpPr>
         <p:spPr>
           <a:xfrm>
-            <a:off x="7818120" y="3230575"/>
-            <a:ext cx="3090672" cy="670255"/>
+            <a:off x="7726680" y="3182112"/>
+            <a:ext cx="3227832" cy="960120"/>
           </a:xfrm>
           <a:prstGeom prst="rect">
             <a:avLst/>
@@ -7677,7 +7681,7 @@
               <a:buNone/>
             </a:pPr>
             <a:r>
-              <a:rPr lang="en-US" sz="1220" dirty="0">
+              <a:rPr lang="en-US" sz="1140" dirty="0">
                 <a:solidFill>
                   <a:srgbClr val="17364A"/>
                 </a:solidFill>
@@ -7685,16 +7689,16 @@
                 <a:ea typeface="Aptos" pitchFamily="34" charset="-122"/>
                 <a:cs typeface="Aptos" pitchFamily="34" charset="-120"/>
               </a:rPr>
-              <a:t>Generative AI can use FHIR data to draft case or patient.</a:t>
-            </a:r>
-            <a:endParaRPr lang="en-US" sz="1220" dirty="0"/>
-          </a:p>
-          <a:p>
-            <a:pPr indent="0" marL="0">
-              <a:buNone/>
-            </a:pPr>
-            <a:r>
-              <a:rPr lang="en-US" sz="1220" dirty="0">
+              <a:t>Generative AI can use FHIR data to draft case or.</a:t>
+            </a:r>
+            <a:endParaRPr lang="en-US" sz="1140" dirty="0"/>
+          </a:p>
+          <a:p>
+            <a:pPr indent="0" marL="0">
+              <a:buNone/>
+            </a:pPr>
+            <a:r>
+              <a:rPr lang="en-US" sz="1140" dirty="0">
                 <a:solidFill>
                   <a:srgbClr val="17364A"/>
                 </a:solidFill>
@@ -7702,16 +7706,16 @@
                 <a:ea typeface="Aptos" pitchFamily="34" charset="-122"/>
                 <a:cs typeface="Aptos" pitchFamily="34" charset="-120"/>
               </a:rPr>
-              <a:t>Predictive analytics may use features derived from FHIR resources,.</a:t>
-            </a:r>
-            <a:endParaRPr lang="en-US" sz="1220" dirty="0"/>
-          </a:p>
-          <a:p>
-            <a:pPr indent="0" marL="0">
-              <a:buNone/>
-            </a:pPr>
-            <a:r>
-              <a:rPr lang="en-US" sz="1220" dirty="0">
+              <a:t>Predictive analytics may use features derived from.</a:t>
+            </a:r>
+            <a:endParaRPr lang="en-US" sz="1140" dirty="0"/>
+          </a:p>
+          <a:p>
+            <a:pPr indent="0" marL="0">
+              <a:buNone/>
+            </a:pPr>
+            <a:r>
+              <a:rPr lang="en-US" sz="1140" dirty="0">
                 <a:solidFill>
                   <a:srgbClr val="17364A"/>
                 </a:solidFill>
@@ -7719,9 +7723,9 @@
                 <a:ea typeface="Aptos" pitchFamily="34" charset="-122"/>
                 <a:cs typeface="Aptos" pitchFamily="34" charset="-120"/>
               </a:rPr>
-              <a:t>Agentic workflows may create Tasks or update statuses, making.</a:t>
-            </a:r>
-            <a:endParaRPr lang="en-US" sz="1220" dirty="0"/>
+              <a:t>Agentic workflows may create Tasks or update.</a:t>
+            </a:r>
+            <a:endParaRPr lang="en-US" sz="1140" dirty="0"/>
           </a:p>
         </p:txBody>
       </p:sp>
@@ -7733,12 +7737,12 @@
         </p:nvSpPr>
         <p:spPr>
           <a:xfrm>
-            <a:off x="7635240" y="4184294"/>
-            <a:ext cx="3474720" cy="1466698"/>
+            <a:off x="7543800" y="4389120"/>
+            <a:ext cx="3611880" cy="1261872"/>
           </a:xfrm>
           <a:prstGeom prst="roundRect">
             <a:avLst>
-              <a:gd name="adj" fmla="val 7481"/>
+              <a:gd name="adj" fmla="val 8696"/>
             </a:avLst>
           </a:prstGeom>
           <a:solidFill>
@@ -7760,8 +7764,8 @@
         </p:nvSpPr>
         <p:spPr>
           <a:xfrm>
-            <a:off x="7799832" y="4330598"/>
-            <a:ext cx="3145536" cy="256032"/>
+            <a:off x="7708392" y="4517136"/>
+            <a:ext cx="3282696" cy="228600"/>
           </a:xfrm>
           <a:prstGeom prst="rect">
             <a:avLst/>
@@ -7777,7 +7781,7 @@
               <a:buNone/>
             </a:pPr>
             <a:r>
-              <a:rPr lang="en-US" sz="1300" b="1" dirty="0">
+              <a:rPr lang="en-US" sz="1220" b="1" dirty="0">
                 <a:solidFill>
                   <a:srgbClr val="0068B7"/>
                 </a:solidFill>
@@ -7787,7 +7791,7 @@
               </a:rPr>
               <a:t>Next action</a:t>
             </a:r>
-            <a:endParaRPr lang="en-US" sz="1300" dirty="0"/>
+            <a:endParaRPr lang="en-US" sz="1220" dirty="0"/>
           </a:p>
         </p:txBody>
       </p:sp>
@@ -7799,8 +7803,8 @@
         </p:nvSpPr>
         <p:spPr>
           <a:xfrm>
-            <a:off x="7799832" y="4659782"/>
-            <a:ext cx="3145536" cy="899770"/>
+            <a:off x="7708392" y="4828032"/>
+            <a:ext cx="3282696" cy="749808"/>
           </a:xfrm>
           <a:prstGeom prst="rect">
             <a:avLst/>
@@ -7818,7 +7822,7 @@
               <a:buNone/>
             </a:pPr>
             <a:r>
-              <a:rPr lang="en-US" sz="1320" dirty="0">
+              <a:rPr lang="en-US" sz="1220" dirty="0">
                 <a:solidFill>
                   <a:srgbClr val="17364A"/>
                 </a:solidFill>
@@ -7826,9 +7830,9 @@
                 <a:ea typeface="Aptos" pitchFamily="34" charset="-122"/>
                 <a:cs typeface="Aptos" pitchFamily="34" charset="-120"/>
               </a:rPr>
-              <a:t>Use the concept to clarify workflow changes, dependencies, staffing, procurement requirements, training needs, and implementation checkpoints.</a:t>
-            </a:r>
-            <a:endParaRPr lang="en-US" sz="1320" dirty="0"/>
+              <a:t>Use the concept to clarify workflow changes, dependencies, staffing, procurement.</a:t>
+            </a:r>
+            <a:endParaRPr lang="en-US" sz="1220" dirty="0"/>
           </a:p>
         </p:txBody>
       </p:sp>
@@ -8119,8 +8123,8 @@
         </p:nvSpPr>
         <p:spPr>
           <a:xfrm>
-            <a:off x="868680" y="1508760"/>
-            <a:ext cx="6309360" cy="4160520"/>
+            <a:off x="822960" y="1463040"/>
+            <a:ext cx="6565392" cy="4343400"/>
           </a:xfrm>
           <a:prstGeom prst="rect">
             <a:avLst/>
@@ -8138,7 +8142,7 @@
               <a:buNone/>
             </a:pPr>
             <a:r>
-              <a:rPr lang="en-US" sz="2100" dirty="0">
+              <a:rPr lang="en-US" sz="1920" dirty="0">
                 <a:solidFill>
                   <a:srgbClr val="003A63"/>
                 </a:solidFill>
@@ -8148,14 +8152,14 @@
               </a:rPr>
               <a:t>• Which public health workflows could benefit from structured FHIR data?</a:t>
             </a:r>
-            <a:endParaRPr lang="en-US" sz="2100" dirty="0"/>
-          </a:p>
-          <a:p>
-            <a:pPr indent="0" marL="0">
-              <a:buNone/>
-            </a:pPr>
-            <a:r>
-              <a:rPr lang="en-US" sz="2100" dirty="0">
+            <a:endParaRPr lang="en-US" sz="1920" dirty="0"/>
+          </a:p>
+          <a:p>
+            <a:pPr indent="0" marL="0">
+              <a:buNone/>
+            </a:pPr>
+            <a:r>
+              <a:rPr lang="en-US" sz="1920" dirty="0">
                 <a:solidFill>
                   <a:srgbClr val="003A63"/>
                 </a:solidFill>
@@ -8165,14 +8169,14 @@
               </a:rPr>
               <a:t>• Which data elements are required for the workflow?</a:t>
             </a:r>
-            <a:endParaRPr lang="en-US" sz="2100" dirty="0"/>
-          </a:p>
-          <a:p>
-            <a:pPr indent="0" marL="0">
-              <a:buNone/>
-            </a:pPr>
-            <a:r>
-              <a:rPr lang="en-US" sz="2100" dirty="0">
+            <a:endParaRPr lang="en-US" sz="1920" dirty="0"/>
+          </a:p>
+          <a:p>
+            <a:pPr indent="0" marL="0">
+              <a:buNone/>
+            </a:pPr>
+            <a:r>
+              <a:rPr lang="en-US" sz="1920" dirty="0">
                 <a:solidFill>
                   <a:srgbClr val="003A63"/>
                 </a:solidFill>
@@ -8182,7 +8186,7 @@
               </a:rPr>
               <a:t>• Are those elements available through FHIR in the source systems?</a:t>
             </a:r>
-            <a:endParaRPr lang="en-US" sz="2100" dirty="0"/>
+            <a:endParaRPr lang="en-US" sz="1920" dirty="0"/>
           </a:p>
         </p:txBody>
       </p:sp>
@@ -8194,12 +8198,12 @@
         </p:nvSpPr>
         <p:spPr>
           <a:xfrm>
-            <a:off x="7635240" y="1325880"/>
-            <a:ext cx="3474720" cy="1207008"/>
+            <a:off x="7543800" y="1325880"/>
+            <a:ext cx="3611880" cy="1261872"/>
           </a:xfrm>
           <a:prstGeom prst="roundRect">
             <a:avLst>
-              <a:gd name="adj" fmla="val 9091"/>
+              <a:gd name="adj" fmla="val 8696"/>
             </a:avLst>
           </a:prstGeom>
           <a:solidFill>
@@ -8221,8 +8225,8 @@
         </p:nvSpPr>
         <p:spPr>
           <a:xfrm>
-            <a:off x="7799832" y="1472184"/>
-            <a:ext cx="3145536" cy="256032"/>
+            <a:off x="7708392" y="1453896"/>
+            <a:ext cx="3282696" cy="228600"/>
           </a:xfrm>
           <a:prstGeom prst="rect">
             <a:avLst/>
@@ -8238,7 +8242,7 @@
               <a:buNone/>
             </a:pPr>
             <a:r>
-              <a:rPr lang="en-US" sz="1300" b="1" dirty="0">
+              <a:rPr lang="en-US" sz="1220" b="1" dirty="0">
                 <a:solidFill>
                   <a:srgbClr val="0068B7"/>
                 </a:solidFill>
@@ -8248,7 +8252,7 @@
               </a:rPr>
               <a:t>Core concept</a:t>
             </a:r>
-            <a:endParaRPr lang="en-US" sz="1300" dirty="0"/>
+            <a:endParaRPr lang="en-US" sz="1220" dirty="0"/>
           </a:p>
         </p:txBody>
       </p:sp>
@@ -8260,8 +8264,8 @@
         </p:nvSpPr>
         <p:spPr>
           <a:xfrm>
-            <a:off x="7799832" y="1801368"/>
-            <a:ext cx="3145536" cy="640080"/>
+            <a:off x="7708392" y="1764792"/>
+            <a:ext cx="3282696" cy="749808"/>
           </a:xfrm>
           <a:prstGeom prst="rect">
             <a:avLst/>
@@ -8279,7 +8283,7 @@
               <a:buNone/>
             </a:pPr>
             <a:r>
-              <a:rPr lang="en-US" sz="1320" dirty="0">
+              <a:rPr lang="en-US" sz="1220" dirty="0">
                 <a:solidFill>
                   <a:srgbClr val="17364A"/>
                 </a:solidFill>
@@ -8289,7 +8293,7 @@
               </a:rPr>
               <a:t>Which public health workflows could benefit from structured FHIR data?</a:t>
             </a:r>
-            <a:endParaRPr lang="en-US" sz="1320" dirty="0"/>
+            <a:endParaRPr lang="en-US" sz="1220" dirty="0"/>
           </a:p>
         </p:txBody>
       </p:sp>
@@ -8301,12 +8305,12 @@
         </p:nvSpPr>
         <p:spPr>
           <a:xfrm>
-            <a:off x="7635240" y="2670048"/>
-            <a:ext cx="3474720" cy="1377086"/>
+            <a:off x="7543800" y="2724912"/>
+            <a:ext cx="3611880" cy="1527048"/>
           </a:xfrm>
           <a:prstGeom prst="roundRect">
             <a:avLst>
-              <a:gd name="adj" fmla="val 7968"/>
+              <a:gd name="adj" fmla="val 7186"/>
             </a:avLst>
           </a:prstGeom>
           <a:solidFill>
@@ -8328,8 +8332,8 @@
         </p:nvSpPr>
         <p:spPr>
           <a:xfrm>
-            <a:off x="7799832" y="2816352"/>
-            <a:ext cx="3145536" cy="256032"/>
+            <a:off x="7708392" y="2852928"/>
+            <a:ext cx="3282696" cy="228600"/>
           </a:xfrm>
           <a:prstGeom prst="rect">
             <a:avLst/>
@@ -8345,7 +8349,7 @@
               <a:buNone/>
             </a:pPr>
             <a:r>
-              <a:rPr lang="en-US" sz="1300" b="1" dirty="0">
+              <a:rPr lang="en-US" sz="1220" b="1" dirty="0">
                 <a:solidFill>
                   <a:srgbClr val="0068B7"/>
                 </a:solidFill>
@@ -8355,7 +8359,7 @@
               </a:rPr>
               <a:t>Concept checkpoints</a:t>
             </a:r>
-            <a:endParaRPr lang="en-US" sz="1300" dirty="0"/>
+            <a:endParaRPr lang="en-US" sz="1220" dirty="0"/>
           </a:p>
         </p:txBody>
       </p:sp>
@@ -8367,8 +8371,8 @@
         </p:nvSpPr>
         <p:spPr>
           <a:xfrm>
-            <a:off x="7818120" y="3182112"/>
-            <a:ext cx="3090672" cy="718718"/>
+            <a:off x="7726680" y="3182112"/>
+            <a:ext cx="3227832" cy="960120"/>
           </a:xfrm>
           <a:prstGeom prst="rect">
             <a:avLst/>
@@ -8386,7 +8390,7 @@
               <a:buNone/>
             </a:pPr>
             <a:r>
-              <a:rPr lang="en-US" sz="1220" dirty="0">
+              <a:rPr lang="en-US" sz="1140" dirty="0">
                 <a:solidFill>
                   <a:srgbClr val="17364A"/>
                 </a:solidFill>
@@ -8394,16 +8398,16 @@
                 <a:ea typeface="Aptos" pitchFamily="34" charset="-122"/>
                 <a:cs typeface="Aptos" pitchFamily="34" charset="-120"/>
               </a:rPr>
-              <a:t>Which public health workflows could benefit from structured FHIR.</a:t>
-            </a:r>
-            <a:endParaRPr lang="en-US" sz="1220" dirty="0"/>
-          </a:p>
-          <a:p>
-            <a:pPr indent="0" marL="0">
-              <a:buNone/>
-            </a:pPr>
-            <a:r>
-              <a:rPr lang="en-US" sz="1220" dirty="0">
+              <a:t>Which public health workflows could benefit from.</a:t>
+            </a:r>
+            <a:endParaRPr lang="en-US" sz="1140" dirty="0"/>
+          </a:p>
+          <a:p>
+            <a:pPr indent="0" marL="0">
+              <a:buNone/>
+            </a:pPr>
+            <a:r>
+              <a:rPr lang="en-US" sz="1140" dirty="0">
                 <a:solidFill>
                   <a:srgbClr val="17364A"/>
                 </a:solidFill>
@@ -8413,14 +8417,14 @@
               </a:rPr>
               <a:t>Which data elements are required for the workflow?</a:t>
             </a:r>
-            <a:endParaRPr lang="en-US" sz="1220" dirty="0"/>
-          </a:p>
-          <a:p>
-            <a:pPr indent="0" marL="0">
-              <a:buNone/>
-            </a:pPr>
-            <a:r>
-              <a:rPr lang="en-US" sz="1220" dirty="0">
+            <a:endParaRPr lang="en-US" sz="1140" dirty="0"/>
+          </a:p>
+          <a:p>
+            <a:pPr indent="0" marL="0">
+              <a:buNone/>
+            </a:pPr>
+            <a:r>
+              <a:rPr lang="en-US" sz="1140" dirty="0">
                 <a:solidFill>
                   <a:srgbClr val="17364A"/>
                 </a:solidFill>
@@ -8428,9 +8432,9 @@
                 <a:ea typeface="Aptos" pitchFamily="34" charset="-122"/>
                 <a:cs typeface="Aptos" pitchFamily="34" charset="-120"/>
               </a:rPr>
-              <a:t>Are those elements available through FHIR in the source systems?</a:t>
-            </a:r>
-            <a:endParaRPr lang="en-US" sz="1220" dirty="0"/>
+              <a:t>Are those elements available through FHIR in the.</a:t>
+            </a:r>
+            <a:endParaRPr lang="en-US" sz="1140" dirty="0"/>
           </a:p>
         </p:txBody>
       </p:sp>
@@ -8442,12 +8446,12 @@
         </p:nvSpPr>
         <p:spPr>
           <a:xfrm>
-            <a:off x="7635240" y="4184294"/>
-            <a:ext cx="3474720" cy="1466698"/>
+            <a:off x="7543800" y="4389120"/>
+            <a:ext cx="3611880" cy="1261872"/>
           </a:xfrm>
           <a:prstGeom prst="roundRect">
             <a:avLst>
-              <a:gd name="adj" fmla="val 7481"/>
+              <a:gd name="adj" fmla="val 8696"/>
             </a:avLst>
           </a:prstGeom>
           <a:solidFill>
@@ -8469,8 +8473,8 @@
         </p:nvSpPr>
         <p:spPr>
           <a:xfrm>
-            <a:off x="7799832" y="4330598"/>
-            <a:ext cx="3145536" cy="256032"/>
+            <a:off x="7708392" y="4517136"/>
+            <a:ext cx="3282696" cy="228600"/>
           </a:xfrm>
           <a:prstGeom prst="rect">
             <a:avLst/>
@@ -8486,7 +8490,7 @@
               <a:buNone/>
             </a:pPr>
             <a:r>
-              <a:rPr lang="en-US" sz="1300" b="1" dirty="0">
+              <a:rPr lang="en-US" sz="1220" b="1" dirty="0">
                 <a:solidFill>
                   <a:srgbClr val="0068B7"/>
                 </a:solidFill>
@@ -8496,7 +8500,7 @@
               </a:rPr>
               <a:t>Apply it</a:t>
             </a:r>
-            <a:endParaRPr lang="en-US" sz="1300" dirty="0"/>
+            <a:endParaRPr lang="en-US" sz="1220" dirty="0"/>
           </a:p>
         </p:txBody>
       </p:sp>
@@ -8508,8 +8512,8 @@
         </p:nvSpPr>
         <p:spPr>
           <a:xfrm>
-            <a:off x="7799832" y="4659782"/>
-            <a:ext cx="3145536" cy="899770"/>
+            <a:off x="7708392" y="4828032"/>
+            <a:ext cx="3282696" cy="749808"/>
           </a:xfrm>
           <a:prstGeom prst="rect">
             <a:avLst/>
@@ -8527,7 +8531,7 @@
               <a:buNone/>
             </a:pPr>
             <a:r>
-              <a:rPr lang="en-US" sz="1320" dirty="0">
+              <a:rPr lang="en-US" sz="1220" dirty="0">
                 <a:solidFill>
                   <a:srgbClr val="17364A"/>
                 </a:solidFill>
@@ -8535,9 +8539,9 @@
                 <a:ea typeface="Aptos" pitchFamily="34" charset="-122"/>
                 <a:cs typeface="Aptos" pitchFamily="34" charset="-120"/>
               </a:rPr>
-              <a:t>Connect the concept to public health purpose, responsible use, required safeguards, documentation, and the next action a department should take.</a:t>
-            </a:r>
-            <a:endParaRPr lang="en-US" sz="1320" dirty="0"/>
+              <a:t>Connect the concept to public health purpose, responsible use, required.</a:t>
+            </a:r>
+            <a:endParaRPr lang="en-US" sz="1220" dirty="0"/>
           </a:p>
         </p:txBody>
       </p:sp>
@@ -8828,8 +8832,8 @@
         </p:nvSpPr>
         <p:spPr>
           <a:xfrm>
-            <a:off x="868680" y="1508760"/>
-            <a:ext cx="6309360" cy="4160520"/>
+            <a:off x="822960" y="1463040"/>
+            <a:ext cx="6565392" cy="4343400"/>
           </a:xfrm>
           <a:prstGeom prst="rect">
             <a:avLst/>
@@ -8847,7 +8851,7 @@
               <a:buNone/>
             </a:pPr>
             <a:r>
-              <a:rPr lang="en-US" sz="2100" dirty="0">
+              <a:rPr lang="en-US" sz="1920" dirty="0">
                 <a:solidFill>
                   <a:srgbClr val="003A63"/>
                 </a:solidFill>
@@ -8857,14 +8861,14 @@
               </a:rPr>
               <a:t>• Which profiles or implementation guides apply?</a:t>
             </a:r>
-            <a:endParaRPr lang="en-US" sz="2100" dirty="0"/>
-          </a:p>
-          <a:p>
-            <a:pPr indent="0" marL="0">
-              <a:buNone/>
-            </a:pPr>
-            <a:r>
-              <a:rPr lang="en-US" sz="2100" dirty="0">
+            <a:endParaRPr lang="en-US" sz="1920" dirty="0"/>
+          </a:p>
+          <a:p>
+            <a:pPr indent="0" marL="0">
+              <a:buNone/>
+            </a:pPr>
+            <a:r>
+              <a:rPr lang="en-US" sz="1920" dirty="0">
                 <a:solidFill>
                   <a:srgbClr val="003A63"/>
                 </a:solidFill>
@@ -8874,7 +8878,7 @@
               </a:rPr>
               <a:t>• How will staff verify that the AI tool used the correct FHIR data?</a:t>
             </a:r>
-            <a:endParaRPr lang="en-US" sz="2100" dirty="0"/>
+            <a:endParaRPr lang="en-US" sz="1920" dirty="0"/>
           </a:p>
         </p:txBody>
       </p:sp>
@@ -8886,12 +8890,12 @@
         </p:nvSpPr>
         <p:spPr>
           <a:xfrm>
-            <a:off x="7635240" y="1325880"/>
-            <a:ext cx="3474720" cy="1207008"/>
+            <a:off x="7543800" y="1325880"/>
+            <a:ext cx="3611880" cy="1261872"/>
           </a:xfrm>
           <a:prstGeom prst="roundRect">
             <a:avLst>
-              <a:gd name="adj" fmla="val 9091"/>
+              <a:gd name="adj" fmla="val 8696"/>
             </a:avLst>
           </a:prstGeom>
           <a:solidFill>
@@ -8913,8 +8917,8 @@
         </p:nvSpPr>
         <p:spPr>
           <a:xfrm>
-            <a:off x="7799832" y="1472184"/>
-            <a:ext cx="3145536" cy="256032"/>
+            <a:off x="7708392" y="1453896"/>
+            <a:ext cx="3282696" cy="228600"/>
           </a:xfrm>
           <a:prstGeom prst="rect">
             <a:avLst/>
@@ -8930,7 +8934,7 @@
               <a:buNone/>
             </a:pPr>
             <a:r>
-              <a:rPr lang="en-US" sz="1300" b="1" dirty="0">
+              <a:rPr lang="en-US" sz="1220" b="1" dirty="0">
                 <a:solidFill>
                   <a:srgbClr val="0068B7"/>
                 </a:solidFill>
@@ -8940,7 +8944,7 @@
               </a:rPr>
               <a:t>Core concept</a:t>
             </a:r>
-            <a:endParaRPr lang="en-US" sz="1300" dirty="0"/>
+            <a:endParaRPr lang="en-US" sz="1220" dirty="0"/>
           </a:p>
         </p:txBody>
       </p:sp>
@@ -8952,8 +8956,8 @@
         </p:nvSpPr>
         <p:spPr>
           <a:xfrm>
-            <a:off x="7799832" y="1801368"/>
-            <a:ext cx="3145536" cy="640080"/>
+            <a:off x="7708392" y="1764792"/>
+            <a:ext cx="3282696" cy="749808"/>
           </a:xfrm>
           <a:prstGeom prst="rect">
             <a:avLst/>
@@ -8971,7 +8975,7 @@
               <a:buNone/>
             </a:pPr>
             <a:r>
-              <a:rPr lang="en-US" sz="1320" dirty="0">
+              <a:rPr lang="en-US" sz="1220" dirty="0">
                 <a:solidFill>
                   <a:srgbClr val="17364A"/>
                 </a:solidFill>
@@ -8981,7 +8985,7 @@
               </a:rPr>
               <a:t>Which profiles or implementation guides apply?</a:t>
             </a:r>
-            <a:endParaRPr lang="en-US" sz="1320" dirty="0"/>
+            <a:endParaRPr lang="en-US" sz="1220" dirty="0"/>
           </a:p>
         </p:txBody>
       </p:sp>
@@ -8993,12 +8997,12 @@
         </p:nvSpPr>
         <p:spPr>
           <a:xfrm>
-            <a:off x="7635240" y="2670048"/>
-            <a:ext cx="3474720" cy="1377086"/>
+            <a:off x="7543800" y="2724912"/>
+            <a:ext cx="3611880" cy="1527048"/>
           </a:xfrm>
           <a:prstGeom prst="roundRect">
             <a:avLst>
-              <a:gd name="adj" fmla="val 7968"/>
+              <a:gd name="adj" fmla="val 7186"/>
             </a:avLst>
           </a:prstGeom>
           <a:solidFill>
@@ -9020,8 +9024,8 @@
         </p:nvSpPr>
         <p:spPr>
           <a:xfrm>
-            <a:off x="7799832" y="2816352"/>
-            <a:ext cx="3145536" cy="256032"/>
+            <a:off x="7708392" y="2852928"/>
+            <a:ext cx="3282696" cy="228600"/>
           </a:xfrm>
           <a:prstGeom prst="rect">
             <a:avLst/>
@@ -9037,7 +9041,7 @@
               <a:buNone/>
             </a:pPr>
             <a:r>
-              <a:rPr lang="en-US" sz="1300" b="1" dirty="0">
+              <a:rPr lang="en-US" sz="1220" b="1" dirty="0">
                 <a:solidFill>
                   <a:srgbClr val="0068B7"/>
                 </a:solidFill>
@@ -9047,7 +9051,7 @@
               </a:rPr>
               <a:t>Concept checkpoints</a:t>
             </a:r>
-            <a:endParaRPr lang="en-US" sz="1300" dirty="0"/>
+            <a:endParaRPr lang="en-US" sz="1220" dirty="0"/>
           </a:p>
         </p:txBody>
       </p:sp>
@@ -9059,8 +9063,8 @@
         </p:nvSpPr>
         <p:spPr>
           <a:xfrm>
-            <a:off x="7818120" y="3182112"/>
-            <a:ext cx="3090672" cy="718718"/>
+            <a:off x="7726680" y="3182112"/>
+            <a:ext cx="3227832" cy="960120"/>
           </a:xfrm>
           <a:prstGeom prst="rect">
             <a:avLst/>
@@ -9078,7 +9082,7 @@
               <a:buNone/>
             </a:pPr>
             <a:r>
-              <a:rPr lang="en-US" sz="1220" dirty="0">
+              <a:rPr lang="en-US" sz="1140" dirty="0">
                 <a:solidFill>
                   <a:srgbClr val="17364A"/>
                 </a:solidFill>
@@ -9088,14 +9092,14 @@
               </a:rPr>
               <a:t>Which profiles or implementation guides apply?</a:t>
             </a:r>
-            <a:endParaRPr lang="en-US" sz="1220" dirty="0"/>
-          </a:p>
-          <a:p>
-            <a:pPr indent="0" marL="0">
-              <a:buNone/>
-            </a:pPr>
-            <a:r>
-              <a:rPr lang="en-US" sz="1220" dirty="0">
+            <a:endParaRPr lang="en-US" sz="1140" dirty="0"/>
+          </a:p>
+          <a:p>
+            <a:pPr indent="0" marL="0">
+              <a:buNone/>
+            </a:pPr>
+            <a:r>
+              <a:rPr lang="en-US" sz="1140" dirty="0">
                 <a:solidFill>
                   <a:srgbClr val="17364A"/>
                 </a:solidFill>
@@ -9103,9 +9107,9 @@
                 <a:ea typeface="Aptos" pitchFamily="34" charset="-122"/>
                 <a:cs typeface="Aptos" pitchFamily="34" charset="-120"/>
               </a:rPr>
-              <a:t>How will staff verify that the AI tool used the correct FHIR data?</a:t>
-            </a:r>
-            <a:endParaRPr lang="en-US" sz="1220" dirty="0"/>
+              <a:t>How will staff verify that the AI tool used the.</a:t>
+            </a:r>
+            <a:endParaRPr lang="en-US" sz="1140" dirty="0"/>
           </a:p>
         </p:txBody>
       </p:sp>
@@ -9117,12 +9121,12 @@
         </p:nvSpPr>
         <p:spPr>
           <a:xfrm>
-            <a:off x="7635240" y="4184294"/>
-            <a:ext cx="3474720" cy="1466698"/>
+            <a:off x="7543800" y="4389120"/>
+            <a:ext cx="3611880" cy="1261872"/>
           </a:xfrm>
           <a:prstGeom prst="roundRect">
             <a:avLst>
-              <a:gd name="adj" fmla="val 7481"/>
+              <a:gd name="adj" fmla="val 8696"/>
             </a:avLst>
           </a:prstGeom>
           <a:solidFill>
@@ -9144,8 +9148,8 @@
         </p:nvSpPr>
         <p:spPr>
           <a:xfrm>
-            <a:off x="7799832" y="4330598"/>
-            <a:ext cx="3145536" cy="256032"/>
+            <a:off x="7708392" y="4517136"/>
+            <a:ext cx="3282696" cy="228600"/>
           </a:xfrm>
           <a:prstGeom prst="rect">
             <a:avLst/>
@@ -9161,7 +9165,7 @@
               <a:buNone/>
             </a:pPr>
             <a:r>
-              <a:rPr lang="en-US" sz="1300" b="1" dirty="0">
+              <a:rPr lang="en-US" sz="1220" b="1" dirty="0">
                 <a:solidFill>
                   <a:srgbClr val="0068B7"/>
                 </a:solidFill>
@@ -9171,7 +9175,7 @@
               </a:rPr>
               <a:t>Apply it</a:t>
             </a:r>
-            <a:endParaRPr lang="en-US" sz="1300" dirty="0"/>
+            <a:endParaRPr lang="en-US" sz="1220" dirty="0"/>
           </a:p>
         </p:txBody>
       </p:sp>
@@ -9183,8 +9187,8 @@
         </p:nvSpPr>
         <p:spPr>
           <a:xfrm>
-            <a:off x="7799832" y="4659782"/>
-            <a:ext cx="3145536" cy="899770"/>
+            <a:off x="7708392" y="4828032"/>
+            <a:ext cx="3282696" cy="749808"/>
           </a:xfrm>
           <a:prstGeom prst="rect">
             <a:avLst/>
@@ -9202,7 +9206,7 @@
               <a:buNone/>
             </a:pPr>
             <a:r>
-              <a:rPr lang="en-US" sz="1320" dirty="0">
+              <a:rPr lang="en-US" sz="1220" dirty="0">
                 <a:solidFill>
                   <a:srgbClr val="17364A"/>
                 </a:solidFill>
@@ -9210,9 +9214,9 @@
                 <a:ea typeface="Aptos" pitchFamily="34" charset="-122"/>
                 <a:cs typeface="Aptos" pitchFamily="34" charset="-120"/>
               </a:rPr>
-              <a:t>Connect the concept to public health purpose, responsible use, required safeguards, documentation, and the next action a department should take.</a:t>
-            </a:r>
-            <a:endParaRPr lang="en-US" sz="1320" dirty="0"/>
+              <a:t>Connect the concept to public health purpose, responsible use, required.</a:t>
+            </a:r>
+            <a:endParaRPr lang="en-US" sz="1220" dirty="0"/>
           </a:p>
         </p:txBody>
       </p:sp>
@@ -9503,8 +9507,8 @@
         </p:nvSpPr>
         <p:spPr>
           <a:xfrm>
-            <a:off x="868680" y="1508760"/>
-            <a:ext cx="6309360" cy="4160520"/>
+            <a:off x="822960" y="1463040"/>
+            <a:ext cx="6565392" cy="4343400"/>
           </a:xfrm>
           <a:prstGeom prst="rect">
             <a:avLst/>
@@ -9522,7 +9526,7 @@
               <a:buNone/>
             </a:pPr>
             <a:r>
-              <a:rPr lang="en-US" sz="2100" dirty="0">
+              <a:rPr lang="en-US" sz="1920" dirty="0">
                 <a:solidFill>
                   <a:srgbClr val="003A63"/>
                 </a:solidFill>
@@ -9530,16 +9534,16 @@
                 <a:ea typeface="Aptos" pitchFamily="34" charset="-122"/>
                 <a:cs typeface="Aptos" pitchFamily="34" charset="-120"/>
               </a:rPr>
-              <a:t>• Create a FHIR data needs worksheet for one AI-supported public health use case.</a:t>
-            </a:r>
-            <a:endParaRPr lang="en-US" sz="2100" dirty="0"/>
-          </a:p>
-          <a:p>
-            <a:pPr indent="0" marL="0">
-              <a:buNone/>
-            </a:pPr>
-            <a:r>
-              <a:rPr lang="en-US" sz="2100" dirty="0">
+              <a:t>• Create a FHIR data needs worksheet for one AI-supported public health use.</a:t>
+            </a:r>
+            <a:endParaRPr lang="en-US" sz="1920" dirty="0"/>
+          </a:p>
+          <a:p>
+            <a:pPr indent="0" marL="0">
+              <a:buNone/>
+            </a:pPr>
+            <a:r>
+              <a:rPr lang="en-US" sz="1920" dirty="0">
                 <a:solidFill>
                   <a:srgbClr val="003A63"/>
                 </a:solidFill>
@@ -9547,9 +9551,9 @@
                 <a:ea typeface="Aptos" pitchFamily="34" charset="-122"/>
                 <a:cs typeface="Aptos" pitchFamily="34" charset="-120"/>
               </a:rPr>
-              <a:t>• Include the use case, required data elements, relevant FHIR resources, source systems, API.</a:t>
-            </a:r>
-            <a:endParaRPr lang="en-US" sz="2100" dirty="0"/>
+              <a:t>• Include the use case, required data elements, relevant FHIR resources,.</a:t>
+            </a:r>
+            <a:endParaRPr lang="en-US" sz="1920" dirty="0"/>
           </a:p>
         </p:txBody>
       </p:sp>
@@ -9561,12 +9565,12 @@
         </p:nvSpPr>
         <p:spPr>
           <a:xfrm>
-            <a:off x="7635240" y="1325880"/>
-            <a:ext cx="3474720" cy="1207008"/>
+            <a:off x="7543800" y="1325880"/>
+            <a:ext cx="3611880" cy="1261872"/>
           </a:xfrm>
           <a:prstGeom prst="roundRect">
             <a:avLst>
-              <a:gd name="adj" fmla="val 9091"/>
+              <a:gd name="adj" fmla="val 8696"/>
             </a:avLst>
           </a:prstGeom>
           <a:solidFill>
@@ -9588,8 +9592,8 @@
         </p:nvSpPr>
         <p:spPr>
           <a:xfrm>
-            <a:off x="7799832" y="1472184"/>
-            <a:ext cx="3145536" cy="256032"/>
+            <a:off x="7708392" y="1453896"/>
+            <a:ext cx="3282696" cy="228600"/>
           </a:xfrm>
           <a:prstGeom prst="rect">
             <a:avLst/>
@@ -9605,7 +9609,7 @@
               <a:buNone/>
             </a:pPr>
             <a:r>
-              <a:rPr lang="en-US" sz="1300" b="1" dirty="0">
+              <a:rPr lang="en-US" sz="1220" b="1" dirty="0">
                 <a:solidFill>
                   <a:srgbClr val="0068B7"/>
                 </a:solidFill>
@@ -9615,7 +9619,7 @@
               </a:rPr>
               <a:t>Practice focus</a:t>
             </a:r>
-            <a:endParaRPr lang="en-US" sz="1300" dirty="0"/>
+            <a:endParaRPr lang="en-US" sz="1220" dirty="0"/>
           </a:p>
         </p:txBody>
       </p:sp>
@@ -9627,8 +9631,8 @@
         </p:nvSpPr>
         <p:spPr>
           <a:xfrm>
-            <a:off x="7799832" y="1801368"/>
-            <a:ext cx="3145536" cy="640080"/>
+            <a:off x="7708392" y="1764792"/>
+            <a:ext cx="3282696" cy="749808"/>
           </a:xfrm>
           <a:prstGeom prst="rect">
             <a:avLst/>
@@ -9646,7 +9650,7 @@
               <a:buNone/>
             </a:pPr>
             <a:r>
-              <a:rPr lang="en-US" sz="1320" dirty="0">
+              <a:rPr lang="en-US" sz="1220" dirty="0">
                 <a:solidFill>
                   <a:srgbClr val="17364A"/>
                 </a:solidFill>
@@ -9656,7 +9660,7 @@
               </a:rPr>
               <a:t>Create a FHIR data needs worksheet for one AI-supported public health use case.</a:t>
             </a:r>
-            <a:endParaRPr lang="en-US" sz="1320" dirty="0"/>
+            <a:endParaRPr lang="en-US" sz="1220" dirty="0"/>
           </a:p>
         </p:txBody>
       </p:sp>
@@ -9668,12 +9672,12 @@
         </p:nvSpPr>
         <p:spPr>
           <a:xfrm>
-            <a:off x="7635240" y="2670048"/>
-            <a:ext cx="3474720" cy="1377086"/>
+            <a:off x="7543800" y="2724912"/>
+            <a:ext cx="3611880" cy="1527048"/>
           </a:xfrm>
           <a:prstGeom prst="roundRect">
             <a:avLst>
-              <a:gd name="adj" fmla="val 7968"/>
+              <a:gd name="adj" fmla="val 7186"/>
             </a:avLst>
           </a:prstGeom>
           <a:solidFill>
@@ -9695,8 +9699,8 @@
         </p:nvSpPr>
         <p:spPr>
           <a:xfrm>
-            <a:off x="7799832" y="2816352"/>
-            <a:ext cx="3145536" cy="256032"/>
+            <a:off x="7708392" y="2852928"/>
+            <a:ext cx="3282696" cy="228600"/>
           </a:xfrm>
           <a:prstGeom prst="rect">
             <a:avLst/>
@@ -9712,7 +9716,7 @@
               <a:buNone/>
             </a:pPr>
             <a:r>
-              <a:rPr lang="en-US" sz="1300" b="1" dirty="0">
+              <a:rPr lang="en-US" sz="1220" b="1" dirty="0">
                 <a:solidFill>
                   <a:srgbClr val="0068B7"/>
                 </a:solidFill>
@@ -9722,7 +9726,7 @@
               </a:rPr>
               <a:t>Concept checkpoints</a:t>
             </a:r>
-            <a:endParaRPr lang="en-US" sz="1300" dirty="0"/>
+            <a:endParaRPr lang="en-US" sz="1220" dirty="0"/>
           </a:p>
         </p:txBody>
       </p:sp>
@@ -9734,8 +9738,8 @@
         </p:nvSpPr>
         <p:spPr>
           <a:xfrm>
-            <a:off x="7818120" y="3182112"/>
-            <a:ext cx="3090672" cy="718718"/>
+            <a:off x="7726680" y="3182112"/>
+            <a:ext cx="3227832" cy="960120"/>
           </a:xfrm>
           <a:prstGeom prst="rect">
             <a:avLst/>
@@ -9753,7 +9757,7 @@
               <a:buNone/>
             </a:pPr>
             <a:r>
-              <a:rPr lang="en-US" sz="1220" dirty="0">
+              <a:rPr lang="en-US" sz="1140" dirty="0">
                 <a:solidFill>
                   <a:srgbClr val="17364A"/>
                 </a:solidFill>
@@ -9761,16 +9765,16 @@
                 <a:ea typeface="Aptos" pitchFamily="34" charset="-122"/>
                 <a:cs typeface="Aptos" pitchFamily="34" charset="-120"/>
               </a:rPr>
-              <a:t>Create a FHIR data needs worksheet for one AI-supported public.</a:t>
-            </a:r>
-            <a:endParaRPr lang="en-US" sz="1220" dirty="0"/>
-          </a:p>
-          <a:p>
-            <a:pPr indent="0" marL="0">
-              <a:buNone/>
-            </a:pPr>
-            <a:r>
-              <a:rPr lang="en-US" sz="1220" dirty="0">
+              <a:t>Create a FHIR data needs worksheet for one.</a:t>
+            </a:r>
+            <a:endParaRPr lang="en-US" sz="1140" dirty="0"/>
+          </a:p>
+          <a:p>
+            <a:pPr indent="0" marL="0">
+              <a:buNone/>
+            </a:pPr>
+            <a:r>
+              <a:rPr lang="en-US" sz="1140" dirty="0">
                 <a:solidFill>
                   <a:srgbClr val="17364A"/>
                 </a:solidFill>
@@ -9778,9 +9782,9 @@
                 <a:ea typeface="Aptos" pitchFamily="34" charset="-122"/>
                 <a:cs typeface="Aptos" pitchFamily="34" charset="-120"/>
               </a:rPr>
-              <a:t>Include the use case, required data elements, relevant FHIR.</a:t>
-            </a:r>
-            <a:endParaRPr lang="en-US" sz="1220" dirty="0"/>
+              <a:t>Include the use case, required data elements,.</a:t>
+            </a:r>
+            <a:endParaRPr lang="en-US" sz="1140" dirty="0"/>
           </a:p>
         </p:txBody>
       </p:sp>
@@ -9792,12 +9796,12 @@
         </p:nvSpPr>
         <p:spPr>
           <a:xfrm>
-            <a:off x="7635240" y="4184294"/>
-            <a:ext cx="3474720" cy="1466698"/>
+            <a:off x="7543800" y="4389120"/>
+            <a:ext cx="3611880" cy="1261872"/>
           </a:xfrm>
           <a:prstGeom prst="roundRect">
             <a:avLst>
-              <a:gd name="adj" fmla="val 7481"/>
+              <a:gd name="adj" fmla="val 8696"/>
             </a:avLst>
           </a:prstGeom>
           <a:solidFill>
@@ -9819,8 +9823,8 @@
         </p:nvSpPr>
         <p:spPr>
           <a:xfrm>
-            <a:off x="7799832" y="4330598"/>
-            <a:ext cx="3145536" cy="256032"/>
+            <a:off x="7708392" y="4517136"/>
+            <a:ext cx="3282696" cy="228600"/>
           </a:xfrm>
           <a:prstGeom prst="rect">
             <a:avLst/>
@@ -9836,7 +9840,7 @@
               <a:buNone/>
             </a:pPr>
             <a:r>
-              <a:rPr lang="en-US" sz="1300" b="1" dirty="0">
+              <a:rPr lang="en-US" sz="1220" b="1" dirty="0">
                 <a:solidFill>
                   <a:srgbClr val="0068B7"/>
                 </a:solidFill>
@@ -9846,7 +9850,7 @@
               </a:rPr>
               <a:t>What to produce</a:t>
             </a:r>
-            <a:endParaRPr lang="en-US" sz="1300" dirty="0"/>
+            <a:endParaRPr lang="en-US" sz="1220" dirty="0"/>
           </a:p>
         </p:txBody>
       </p:sp>
@@ -9858,8 +9862,8 @@
         </p:nvSpPr>
         <p:spPr>
           <a:xfrm>
-            <a:off x="7799832" y="4659782"/>
-            <a:ext cx="3145536" cy="899770"/>
+            <a:off x="7708392" y="4828032"/>
+            <a:ext cx="3282696" cy="749808"/>
           </a:xfrm>
           <a:prstGeom prst="rect">
             <a:avLst/>
@@ -9877,7 +9881,7 @@
               <a:buNone/>
             </a:pPr>
             <a:r>
-              <a:rPr lang="en-US" sz="1320" dirty="0">
+              <a:rPr lang="en-US" sz="1220" dirty="0">
                 <a:solidFill>
                   <a:srgbClr val="17364A"/>
                 </a:solidFill>
@@ -9885,9 +9889,9 @@
                 <a:ea typeface="Aptos" pitchFamily="34" charset="-122"/>
                 <a:cs typeface="Aptos" pitchFamily="34" charset="-120"/>
               </a:rPr>
-              <a:t>Use the assignment to test whether you can explain the concept, apply it to a realistic public health situation, and identify what would need review before the work moves forward.</a:t>
-            </a:r>
-            <a:endParaRPr lang="en-US" sz="1320" dirty="0"/>
+              <a:t>Use the assignment to test whether you can explain the concept, apply it to a.</a:t>
+            </a:r>
+            <a:endParaRPr lang="en-US" sz="1220" dirty="0"/>
           </a:p>
         </p:txBody>
       </p:sp>
@@ -10178,8 +10182,8 @@
         </p:nvSpPr>
         <p:spPr>
           <a:xfrm>
-            <a:off x="868680" y="1508760"/>
-            <a:ext cx="6309360" cy="4160520"/>
+            <a:off x="822960" y="1463040"/>
+            <a:ext cx="6565392" cy="4343400"/>
           </a:xfrm>
           <a:prstGeom prst="rect">
             <a:avLst/>
@@ -10197,7 +10201,7 @@
               <a:buNone/>
             </a:pPr>
             <a:r>
-              <a:rPr lang="en-US" sz="2100" dirty="0">
+              <a:rPr lang="en-US" sz="1920" dirty="0">
                 <a:solidFill>
                   <a:srgbClr val="003A63"/>
                 </a:solidFill>
@@ -10207,14 +10211,14 @@
               </a:rPr>
               <a:t>• FHIR data needs worksheet</a:t>
             </a:r>
-            <a:endParaRPr lang="en-US" sz="2100" dirty="0"/>
-          </a:p>
-          <a:p>
-            <a:pPr indent="0" marL="0">
-              <a:buNone/>
-            </a:pPr>
-            <a:r>
-              <a:rPr lang="en-US" sz="2100" dirty="0">
+            <a:endParaRPr lang="en-US" sz="1920" dirty="0"/>
+          </a:p>
+          <a:p>
+            <a:pPr indent="0" marL="0">
+              <a:buNone/>
+            </a:pPr>
+            <a:r>
+              <a:rPr lang="en-US" sz="1920" dirty="0">
                 <a:solidFill>
                   <a:srgbClr val="003A63"/>
                 </a:solidFill>
@@ -10224,14 +10228,14 @@
               </a:rPr>
               <a:t>• List of relevant FHIR resources</a:t>
             </a:r>
-            <a:endParaRPr lang="en-US" sz="2100" dirty="0"/>
-          </a:p>
-          <a:p>
-            <a:pPr indent="0" marL="0">
-              <a:buNone/>
-            </a:pPr>
-            <a:r>
-              <a:rPr lang="en-US" sz="2100" dirty="0">
+            <a:endParaRPr lang="en-US" sz="1920" dirty="0"/>
+          </a:p>
+          <a:p>
+            <a:pPr indent="0" marL="0">
+              <a:buNone/>
+            </a:pPr>
+            <a:r>
+              <a:rPr lang="en-US" sz="1920" dirty="0">
                 <a:solidFill>
                   <a:srgbClr val="003A63"/>
                 </a:solidFill>
@@ -10241,7 +10245,7 @@
               </a:rPr>
               <a:t>• Vendor or implementation questions</a:t>
             </a:r>
-            <a:endParaRPr lang="en-US" sz="2100" dirty="0"/>
+            <a:endParaRPr lang="en-US" sz="1920" dirty="0"/>
           </a:p>
         </p:txBody>
       </p:sp>
@@ -10253,12 +10257,12 @@
         </p:nvSpPr>
         <p:spPr>
           <a:xfrm>
-            <a:off x="7635240" y="1325880"/>
-            <a:ext cx="3474720" cy="1207008"/>
+            <a:off x="7543800" y="1325880"/>
+            <a:ext cx="3611880" cy="1261872"/>
           </a:xfrm>
           <a:prstGeom prst="roundRect">
             <a:avLst>
-              <a:gd name="adj" fmla="val 9091"/>
+              <a:gd name="adj" fmla="val 8696"/>
             </a:avLst>
           </a:prstGeom>
           <a:solidFill>
@@ -10280,8 +10284,8 @@
         </p:nvSpPr>
         <p:spPr>
           <a:xfrm>
-            <a:off x="7799832" y="1472184"/>
-            <a:ext cx="3145536" cy="256032"/>
+            <a:off x="7708392" y="1453896"/>
+            <a:ext cx="3282696" cy="228600"/>
           </a:xfrm>
           <a:prstGeom prst="rect">
             <a:avLst/>
@@ -10297,7 +10301,7 @@
               <a:buNone/>
             </a:pPr>
             <a:r>
-              <a:rPr lang="en-US" sz="1300" b="1" dirty="0">
+              <a:rPr lang="en-US" sz="1220" b="1" dirty="0">
                 <a:solidFill>
                   <a:srgbClr val="0068B7"/>
                 </a:solidFill>
@@ -10307,7 +10311,7 @@
               </a:rPr>
               <a:t>Core concept</a:t>
             </a:r>
-            <a:endParaRPr lang="en-US" sz="1300" dirty="0"/>
+            <a:endParaRPr lang="en-US" sz="1220" dirty="0"/>
           </a:p>
         </p:txBody>
       </p:sp>
@@ -10319,8 +10323,8 @@
         </p:nvSpPr>
         <p:spPr>
           <a:xfrm>
-            <a:off x="7799832" y="1801368"/>
-            <a:ext cx="3145536" cy="640080"/>
+            <a:off x="7708392" y="1764792"/>
+            <a:ext cx="3282696" cy="749808"/>
           </a:xfrm>
           <a:prstGeom prst="rect">
             <a:avLst/>
@@ -10338,7 +10342,7 @@
               <a:buNone/>
             </a:pPr>
             <a:r>
-              <a:rPr lang="en-US" sz="1320" dirty="0">
+              <a:rPr lang="en-US" sz="1220" dirty="0">
                 <a:solidFill>
                   <a:srgbClr val="17364A"/>
                 </a:solidFill>
@@ -10348,7 +10352,7 @@
               </a:rPr>
               <a:t>FHIR data needs worksheet</a:t>
             </a:r>
-            <a:endParaRPr lang="en-US" sz="1320" dirty="0"/>
+            <a:endParaRPr lang="en-US" sz="1220" dirty="0"/>
           </a:p>
         </p:txBody>
       </p:sp>
@@ -10360,12 +10364,12 @@
         </p:nvSpPr>
         <p:spPr>
           <a:xfrm>
-            <a:off x="7635240" y="2670048"/>
-            <a:ext cx="3474720" cy="1377086"/>
+            <a:off x="7543800" y="2724912"/>
+            <a:ext cx="3611880" cy="1527048"/>
           </a:xfrm>
           <a:prstGeom prst="roundRect">
             <a:avLst>
-              <a:gd name="adj" fmla="val 7968"/>
+              <a:gd name="adj" fmla="val 7186"/>
             </a:avLst>
           </a:prstGeom>
           <a:solidFill>
@@ -10387,8 +10391,8 @@
         </p:nvSpPr>
         <p:spPr>
           <a:xfrm>
-            <a:off x="7799832" y="2816352"/>
-            <a:ext cx="3145536" cy="256032"/>
+            <a:off x="7708392" y="2852928"/>
+            <a:ext cx="3282696" cy="228600"/>
           </a:xfrm>
           <a:prstGeom prst="rect">
             <a:avLst/>
@@ -10404,7 +10408,7 @@
               <a:buNone/>
             </a:pPr>
             <a:r>
-              <a:rPr lang="en-US" sz="1300" b="1" dirty="0">
+              <a:rPr lang="en-US" sz="1220" b="1" dirty="0">
                 <a:solidFill>
                   <a:srgbClr val="0068B7"/>
                 </a:solidFill>
@@ -10414,7 +10418,7 @@
               </a:rPr>
               <a:t>Concept checkpoints</a:t>
             </a:r>
-            <a:endParaRPr lang="en-US" sz="1300" dirty="0"/>
+            <a:endParaRPr lang="en-US" sz="1220" dirty="0"/>
           </a:p>
         </p:txBody>
       </p:sp>
@@ -10426,8 +10430,8 @@
         </p:nvSpPr>
         <p:spPr>
           <a:xfrm>
-            <a:off x="7818120" y="3182112"/>
-            <a:ext cx="3090672" cy="718718"/>
+            <a:off x="7726680" y="3182112"/>
+            <a:ext cx="3227832" cy="960120"/>
           </a:xfrm>
           <a:prstGeom prst="rect">
             <a:avLst/>
@@ -10445,7 +10449,7 @@
               <a:buNone/>
             </a:pPr>
             <a:r>
-              <a:rPr lang="en-US" sz="1220" dirty="0">
+              <a:rPr lang="en-US" sz="1140" dirty="0">
                 <a:solidFill>
                   <a:srgbClr val="17364A"/>
                 </a:solidFill>
@@ -10455,14 +10459,14 @@
               </a:rPr>
               <a:t>FHIR data needs worksheet</a:t>
             </a:r>
-            <a:endParaRPr lang="en-US" sz="1220" dirty="0"/>
-          </a:p>
-          <a:p>
-            <a:pPr indent="0" marL="0">
-              <a:buNone/>
-            </a:pPr>
-            <a:r>
-              <a:rPr lang="en-US" sz="1220" dirty="0">
+            <a:endParaRPr lang="en-US" sz="1140" dirty="0"/>
+          </a:p>
+          <a:p>
+            <a:pPr indent="0" marL="0">
+              <a:buNone/>
+            </a:pPr>
+            <a:r>
+              <a:rPr lang="en-US" sz="1140" dirty="0">
                 <a:solidFill>
                   <a:srgbClr val="17364A"/>
                 </a:solidFill>
@@ -10472,14 +10476,14 @@
               </a:rPr>
               <a:t>List of relevant FHIR resources</a:t>
             </a:r>
-            <a:endParaRPr lang="en-US" sz="1220" dirty="0"/>
-          </a:p>
-          <a:p>
-            <a:pPr indent="0" marL="0">
-              <a:buNone/>
-            </a:pPr>
-            <a:r>
-              <a:rPr lang="en-US" sz="1220" dirty="0">
+            <a:endParaRPr lang="en-US" sz="1140" dirty="0"/>
+          </a:p>
+          <a:p>
+            <a:pPr indent="0" marL="0">
+              <a:buNone/>
+            </a:pPr>
+            <a:r>
+              <a:rPr lang="en-US" sz="1140" dirty="0">
                 <a:solidFill>
                   <a:srgbClr val="17364A"/>
                 </a:solidFill>
@@ -10489,7 +10493,7 @@
               </a:rPr>
               <a:t>Vendor or implementation questions</a:t>
             </a:r>
-            <a:endParaRPr lang="en-US" sz="1220" dirty="0"/>
+            <a:endParaRPr lang="en-US" sz="1140" dirty="0"/>
           </a:p>
         </p:txBody>
       </p:sp>
@@ -10501,12 +10505,12 @@
         </p:nvSpPr>
         <p:spPr>
           <a:xfrm>
-            <a:off x="7635240" y="4184294"/>
-            <a:ext cx="3474720" cy="1466698"/>
+            <a:off x="7543800" y="4389120"/>
+            <a:ext cx="3611880" cy="1261872"/>
           </a:xfrm>
           <a:prstGeom prst="roundRect">
             <a:avLst>
-              <a:gd name="adj" fmla="val 7481"/>
+              <a:gd name="adj" fmla="val 8696"/>
             </a:avLst>
           </a:prstGeom>
           <a:solidFill>
@@ -10528,8 +10532,8 @@
         </p:nvSpPr>
         <p:spPr>
           <a:xfrm>
-            <a:off x="7799832" y="4330598"/>
-            <a:ext cx="3145536" cy="256032"/>
+            <a:off x="7708392" y="4517136"/>
+            <a:ext cx="3282696" cy="228600"/>
           </a:xfrm>
           <a:prstGeom prst="rect">
             <a:avLst/>
@@ -10545,7 +10549,7 @@
               <a:buNone/>
             </a:pPr>
             <a:r>
-              <a:rPr lang="en-US" sz="1300" b="1" dirty="0">
+              <a:rPr lang="en-US" sz="1220" b="1" dirty="0">
                 <a:solidFill>
                   <a:srgbClr val="0068B7"/>
                 </a:solidFill>
@@ -10555,7 +10559,7 @@
               </a:rPr>
               <a:t>Apply it</a:t>
             </a:r>
-            <a:endParaRPr lang="en-US" sz="1300" dirty="0"/>
+            <a:endParaRPr lang="en-US" sz="1220" dirty="0"/>
           </a:p>
         </p:txBody>
       </p:sp>
@@ -10567,8 +10571,8 @@
         </p:nvSpPr>
         <p:spPr>
           <a:xfrm>
-            <a:off x="7799832" y="4659782"/>
-            <a:ext cx="3145536" cy="899770"/>
+            <a:off x="7708392" y="4828032"/>
+            <a:ext cx="3282696" cy="749808"/>
           </a:xfrm>
           <a:prstGeom prst="rect">
             <a:avLst/>
@@ -10586,7 +10590,7 @@
               <a:buNone/>
             </a:pPr>
             <a:r>
-              <a:rPr lang="en-US" sz="1320" dirty="0">
+              <a:rPr lang="en-US" sz="1220" dirty="0">
                 <a:solidFill>
                   <a:srgbClr val="17364A"/>
                 </a:solidFill>
@@ -10594,9 +10598,9 @@
                 <a:ea typeface="Aptos" pitchFamily="34" charset="-122"/>
                 <a:cs typeface="Aptos" pitchFamily="34" charset="-120"/>
               </a:rPr>
-              <a:t>Connect the concept to public health purpose, responsible use, required safeguards, documentation, and the next action a department should take.</a:t>
-            </a:r>
-            <a:endParaRPr lang="en-US" sz="1320" dirty="0"/>
+              <a:t>Connect the concept to public health purpose, responsible use, required.</a:t>
+            </a:r>
+            <a:endParaRPr lang="en-US" sz="1220" dirty="0"/>
           </a:p>
         </p:txBody>
       </p:sp>
@@ -10914,7 +10918,7 @@
                 <a:ea typeface="Aptos" pitchFamily="34" charset="-122"/>
                 <a:cs typeface="Aptos" pitchFamily="34" charset="-120"/>
               </a:rPr>
-              <a:t>• FHIR is increasingly important for public health because it supports structured, API-based.</a:t>
+              <a:t>• FHIR is increasingly important for public health because it supports.</a:t>
             </a:r>
             <a:endParaRPr lang="en-US" sz="2100" dirty="0"/>
           </a:p>
@@ -10931,7 +10935,7 @@
                 <a:ea typeface="Aptos" pitchFamily="34" charset="-122"/>
                 <a:cs typeface="Aptos" pitchFamily="34" charset="-120"/>
               </a:rPr>
-              <a:t>• Public health staff do not need to become FHIR developers to participate in AI planning, but.</a:t>
+              <a:t>• Public health staff do not need to become FHIR developers to participate in.</a:t>
             </a:r>
             <a:endParaRPr lang="en-US" sz="2100" dirty="0"/>
           </a:p>
@@ -10948,7 +10952,7 @@
                 <a:ea typeface="Aptos" pitchFamily="34" charset="-122"/>
                 <a:cs typeface="Aptos" pitchFamily="34" charset="-120"/>
               </a:rPr>
-              <a:t>• This module explains how FHIR resources, profiles, implementation guides, and APIs may support.</a:t>
+              <a:t>• This module explains how FHIR resources, profiles, implementation guides,.</a:t>
             </a:r>
             <a:endParaRPr lang="en-US" sz="2100" dirty="0"/>
           </a:p>
@@ -10989,8 +10993,8 @@
         </p:nvSpPr>
         <p:spPr>
           <a:xfrm>
-            <a:off x="8074152" y="1563624"/>
-            <a:ext cx="2825496" cy="256032"/>
+            <a:off x="8074152" y="1545336"/>
+            <a:ext cx="2825496" cy="228600"/>
           </a:xfrm>
           <a:prstGeom prst="rect">
             <a:avLst/>
@@ -11006,7 +11010,7 @@
               <a:buNone/>
             </a:pPr>
             <a:r>
-              <a:rPr lang="en-US" sz="1300" b="1" dirty="0">
+              <a:rPr lang="en-US" sz="1220" b="1" dirty="0">
                 <a:solidFill>
                   <a:srgbClr val="0068B7"/>
                 </a:solidFill>
@@ -11016,7 +11020,7 @@
               </a:rPr>
               <a:t>Module details</a:t>
             </a:r>
-            <a:endParaRPr lang="en-US" sz="1300" dirty="0"/>
+            <a:endParaRPr lang="en-US" sz="1220" dirty="0"/>
           </a:p>
         </p:txBody>
       </p:sp>
@@ -11028,8 +11032,8 @@
         </p:nvSpPr>
         <p:spPr>
           <a:xfrm>
-            <a:off x="8074152" y="1892808"/>
-            <a:ext cx="2825496" cy="1353312"/>
+            <a:off x="8074152" y="1856232"/>
+            <a:ext cx="2825496" cy="1408176"/>
           </a:xfrm>
           <a:prstGeom prst="rect">
             <a:avLst/>
@@ -11047,7 +11051,7 @@
               <a:buNone/>
             </a:pPr>
             <a:r>
-              <a:rPr lang="en-US" sz="1320" dirty="0">
+              <a:rPr lang="en-US" sz="1220" dirty="0">
                 <a:solidFill>
                   <a:srgbClr val="17364A"/>
                 </a:solidFill>
@@ -11055,9 +11059,9 @@
                 <a:ea typeface="Aptos" pitchFamily="34" charset="-122"/>
                 <a:cs typeface="Aptos" pitchFamily="34" charset="-120"/>
               </a:rPr>
-              <a:t>Level: applied/foundational Primary track: Technical Architecture Track Appears in tracks: technical-architecture</a:t>
-            </a:r>
-            <a:endParaRPr lang="en-US" sz="1320" dirty="0"/>
+              <a:t>Level: applied/foundational Primary track: Technical Architecture Track Appears.</a:t>
+            </a:r>
+            <a:endParaRPr lang="en-US" sz="1220" dirty="0"/>
           </a:p>
         </p:txBody>
       </p:sp>
@@ -11096,8 +11100,8 @@
         </p:nvSpPr>
         <p:spPr>
           <a:xfrm>
-            <a:off x="8074152" y="3822192"/>
-            <a:ext cx="2825496" cy="256032"/>
+            <a:off x="8074152" y="3803904"/>
+            <a:ext cx="2825496" cy="228600"/>
           </a:xfrm>
           <a:prstGeom prst="rect">
             <a:avLst/>
@@ -11113,7 +11117,7 @@
               <a:buNone/>
             </a:pPr>
             <a:r>
-              <a:rPr lang="en-US" sz="1300" b="1" dirty="0">
+              <a:rPr lang="en-US" sz="1220" b="1" dirty="0">
                 <a:solidFill>
                   <a:srgbClr val="0068B7"/>
                 </a:solidFill>
@@ -11123,7 +11127,7 @@
               </a:rPr>
               <a:t>Learning sequence</a:t>
             </a:r>
-            <a:endParaRPr lang="en-US" sz="1300" dirty="0"/>
+            <a:endParaRPr lang="en-US" sz="1220" dirty="0"/>
           </a:p>
         </p:txBody>
       </p:sp>
@@ -11135,8 +11139,8 @@
         </p:nvSpPr>
         <p:spPr>
           <a:xfrm>
-            <a:off x="8092440" y="4187952"/>
-            <a:ext cx="2770632" cy="1033272"/>
+            <a:off x="8092440" y="4133088"/>
+            <a:ext cx="2770632" cy="1124712"/>
           </a:xfrm>
           <a:prstGeom prst="rect">
             <a:avLst/>
@@ -11154,7 +11158,7 @@
               <a:buNone/>
             </a:pPr>
             <a:r>
-              <a:rPr lang="en-US" sz="1220" dirty="0">
+              <a:rPr lang="en-US" sz="1140" dirty="0">
                 <a:solidFill>
                   <a:srgbClr val="17364A"/>
                 </a:solidFill>
@@ -11164,14 +11168,14 @@
               </a:rPr>
               <a:t>Read the module for shared vocabulary and context.</a:t>
             </a:r>
-            <a:endParaRPr lang="en-US" sz="1220" dirty="0"/>
-          </a:p>
-          <a:p>
-            <a:pPr indent="0" marL="0">
-              <a:buNone/>
-            </a:pPr>
-            <a:r>
-              <a:rPr lang="en-US" sz="1220" dirty="0">
+            <a:endParaRPr lang="en-US" sz="1140" dirty="0"/>
+          </a:p>
+          <a:p>
+            <a:pPr indent="0" marL="0">
+              <a:buNone/>
+            </a:pPr>
+            <a:r>
+              <a:rPr lang="en-US" sz="1140" dirty="0">
                 <a:solidFill>
                   <a:srgbClr val="17364A"/>
                 </a:solidFill>
@@ -11179,16 +11183,16 @@
                 <a:ea typeface="Aptos" pitchFamily="34" charset="-122"/>
                 <a:cs typeface="Aptos" pitchFamily="34" charset="-120"/>
               </a:rPr>
-              <a:t>Complete the practical exercise to apply the concept.</a:t>
-            </a:r>
-            <a:endParaRPr lang="en-US" sz="1220" dirty="0"/>
-          </a:p>
-          <a:p>
-            <a:pPr indent="0" marL="0">
-              <a:buNone/>
-            </a:pPr>
-            <a:r>
-              <a:rPr lang="en-US" sz="1220" dirty="0">
+              <a:t>Complete the practical exercise to apply the.</a:t>
+            </a:r>
+            <a:endParaRPr lang="en-US" sz="1140" dirty="0"/>
+          </a:p>
+          <a:p>
+            <a:pPr indent="0" marL="0">
+              <a:buNone/>
+            </a:pPr>
+            <a:r>
+              <a:rPr lang="en-US" sz="1140" dirty="0">
                 <a:solidFill>
                   <a:srgbClr val="17364A"/>
                 </a:solidFill>
@@ -11198,7 +11202,7 @@
               </a:rPr>
               <a:t>Use the notes and references for deeper review.</a:t>
             </a:r>
-            <a:endParaRPr lang="en-US" sz="1220" dirty="0"/>
+            <a:endParaRPr lang="en-US" sz="1140" dirty="0"/>
           </a:p>
         </p:txBody>
       </p:sp>
@@ -11489,8 +11493,8 @@
         </p:nvSpPr>
         <p:spPr>
           <a:xfrm>
-            <a:off x="868680" y="1508760"/>
-            <a:ext cx="6309360" cy="4160520"/>
+            <a:off x="822960" y="1463040"/>
+            <a:ext cx="6565392" cy="4343400"/>
           </a:xfrm>
           <a:prstGeom prst="rect">
             <a:avLst/>
@@ -11508,7 +11512,7 @@
               <a:buNone/>
             </a:pPr>
             <a:r>
-              <a:rPr lang="en-US" sz="2100" dirty="0">
+              <a:rPr lang="en-US" sz="1920" dirty="0">
                 <a:solidFill>
                   <a:srgbClr val="003A63"/>
                 </a:solidFill>
@@ -11518,7 +11522,7 @@
               </a:rPr>
               <a:t>• Validation checklist</a:t>
             </a:r>
-            <a:endParaRPr lang="en-US" sz="2100" dirty="0"/>
+            <a:endParaRPr lang="en-US" sz="1920" dirty="0"/>
           </a:p>
         </p:txBody>
       </p:sp>
@@ -11530,12 +11534,12 @@
         </p:nvSpPr>
         <p:spPr>
           <a:xfrm>
-            <a:off x="7635240" y="1325880"/>
-            <a:ext cx="3474720" cy="1207008"/>
+            <a:off x="7543800" y="1325880"/>
+            <a:ext cx="3611880" cy="1261872"/>
           </a:xfrm>
           <a:prstGeom prst="roundRect">
             <a:avLst>
-              <a:gd name="adj" fmla="val 9091"/>
+              <a:gd name="adj" fmla="val 8696"/>
             </a:avLst>
           </a:prstGeom>
           <a:solidFill>
@@ -11557,8 +11561,8 @@
         </p:nvSpPr>
         <p:spPr>
           <a:xfrm>
-            <a:off x="7799832" y="1472184"/>
-            <a:ext cx="3145536" cy="256032"/>
+            <a:off x="7708392" y="1453896"/>
+            <a:ext cx="3282696" cy="228600"/>
           </a:xfrm>
           <a:prstGeom prst="rect">
             <a:avLst/>
@@ -11574,7 +11578,7 @@
               <a:buNone/>
             </a:pPr>
             <a:r>
-              <a:rPr lang="en-US" sz="1300" b="1" dirty="0">
+              <a:rPr lang="en-US" sz="1220" b="1" dirty="0">
                 <a:solidFill>
                   <a:srgbClr val="0068B7"/>
                 </a:solidFill>
@@ -11584,7 +11588,7 @@
               </a:rPr>
               <a:t>Core concept</a:t>
             </a:r>
-            <a:endParaRPr lang="en-US" sz="1300" dirty="0"/>
+            <a:endParaRPr lang="en-US" sz="1220" dirty="0"/>
           </a:p>
         </p:txBody>
       </p:sp>
@@ -11596,8 +11600,8 @@
         </p:nvSpPr>
         <p:spPr>
           <a:xfrm>
-            <a:off x="7799832" y="1801368"/>
-            <a:ext cx="3145536" cy="640080"/>
+            <a:off x="7708392" y="1764792"/>
+            <a:ext cx="3282696" cy="749808"/>
           </a:xfrm>
           <a:prstGeom prst="rect">
             <a:avLst/>
@@ -11615,7 +11619,7 @@
               <a:buNone/>
             </a:pPr>
             <a:r>
-              <a:rPr lang="en-US" sz="1320" dirty="0">
+              <a:rPr lang="en-US" sz="1220" dirty="0">
                 <a:solidFill>
                   <a:srgbClr val="17364A"/>
                 </a:solidFill>
@@ -11625,7 +11629,7 @@
               </a:rPr>
               <a:t>Validation checklist</a:t>
             </a:r>
-            <a:endParaRPr lang="en-US" sz="1320" dirty="0"/>
+            <a:endParaRPr lang="en-US" sz="1220" dirty="0"/>
           </a:p>
         </p:txBody>
       </p:sp>
@@ -11637,12 +11641,12 @@
         </p:nvSpPr>
         <p:spPr>
           <a:xfrm>
-            <a:off x="7635240" y="2670048"/>
-            <a:ext cx="3474720" cy="1377086"/>
+            <a:off x="7543800" y="2724912"/>
+            <a:ext cx="3611880" cy="1527048"/>
           </a:xfrm>
           <a:prstGeom prst="roundRect">
             <a:avLst>
-              <a:gd name="adj" fmla="val 7968"/>
+              <a:gd name="adj" fmla="val 7186"/>
             </a:avLst>
           </a:prstGeom>
           <a:solidFill>
@@ -11664,8 +11668,8 @@
         </p:nvSpPr>
         <p:spPr>
           <a:xfrm>
-            <a:off x="7799832" y="2816352"/>
-            <a:ext cx="3145536" cy="256032"/>
+            <a:off x="7708392" y="2852928"/>
+            <a:ext cx="3282696" cy="228600"/>
           </a:xfrm>
           <a:prstGeom prst="rect">
             <a:avLst/>
@@ -11681,7 +11685,7 @@
               <a:buNone/>
             </a:pPr>
             <a:r>
-              <a:rPr lang="en-US" sz="1300" b="1" dirty="0">
+              <a:rPr lang="en-US" sz="1220" b="1" dirty="0">
                 <a:solidFill>
                   <a:srgbClr val="0068B7"/>
                 </a:solidFill>
@@ -11691,7 +11695,7 @@
               </a:rPr>
               <a:t>Concept checkpoints</a:t>
             </a:r>
-            <a:endParaRPr lang="en-US" sz="1300" dirty="0"/>
+            <a:endParaRPr lang="en-US" sz="1220" dirty="0"/>
           </a:p>
         </p:txBody>
       </p:sp>
@@ -11703,8 +11707,8 @@
         </p:nvSpPr>
         <p:spPr>
           <a:xfrm>
-            <a:off x="7818120" y="3182112"/>
-            <a:ext cx="3090672" cy="718718"/>
+            <a:off x="7726680" y="3182112"/>
+            <a:ext cx="3227832" cy="960120"/>
           </a:xfrm>
           <a:prstGeom prst="rect">
             <a:avLst/>
@@ -11722,7 +11726,7 @@
               <a:buNone/>
             </a:pPr>
             <a:r>
-              <a:rPr lang="en-US" sz="1220" dirty="0">
+              <a:rPr lang="en-US" sz="1140" dirty="0">
                 <a:solidFill>
                   <a:srgbClr val="17364A"/>
                 </a:solidFill>
@@ -11732,7 +11736,7 @@
               </a:rPr>
               <a:t>Validation checklist</a:t>
             </a:r>
-            <a:endParaRPr lang="en-US" sz="1220" dirty="0"/>
+            <a:endParaRPr lang="en-US" sz="1140" dirty="0"/>
           </a:p>
         </p:txBody>
       </p:sp>
@@ -11744,12 +11748,12 @@
         </p:nvSpPr>
         <p:spPr>
           <a:xfrm>
-            <a:off x="7635240" y="4184294"/>
-            <a:ext cx="3474720" cy="1466698"/>
+            <a:off x="7543800" y="4389120"/>
+            <a:ext cx="3611880" cy="1261872"/>
           </a:xfrm>
           <a:prstGeom prst="roundRect">
             <a:avLst>
-              <a:gd name="adj" fmla="val 7481"/>
+              <a:gd name="adj" fmla="val 8696"/>
             </a:avLst>
           </a:prstGeom>
           <a:solidFill>
@@ -11771,8 +11775,8 @@
         </p:nvSpPr>
         <p:spPr>
           <a:xfrm>
-            <a:off x="7799832" y="4330598"/>
-            <a:ext cx="3145536" cy="256032"/>
+            <a:off x="7708392" y="4517136"/>
+            <a:ext cx="3282696" cy="228600"/>
           </a:xfrm>
           <a:prstGeom prst="rect">
             <a:avLst/>
@@ -11788,7 +11792,7 @@
               <a:buNone/>
             </a:pPr>
             <a:r>
-              <a:rPr lang="en-US" sz="1300" b="1" dirty="0">
+              <a:rPr lang="en-US" sz="1220" b="1" dirty="0">
                 <a:solidFill>
                   <a:srgbClr val="0068B7"/>
                 </a:solidFill>
@@ -11798,7 +11802,7 @@
               </a:rPr>
               <a:t>Apply it</a:t>
             </a:r>
-            <a:endParaRPr lang="en-US" sz="1300" dirty="0"/>
+            <a:endParaRPr lang="en-US" sz="1220" dirty="0"/>
           </a:p>
         </p:txBody>
       </p:sp>
@@ -11810,8 +11814,8 @@
         </p:nvSpPr>
         <p:spPr>
           <a:xfrm>
-            <a:off x="7799832" y="4659782"/>
-            <a:ext cx="3145536" cy="899770"/>
+            <a:off x="7708392" y="4828032"/>
+            <a:ext cx="3282696" cy="749808"/>
           </a:xfrm>
           <a:prstGeom prst="rect">
             <a:avLst/>
@@ -11829,7 +11833,7 @@
               <a:buNone/>
             </a:pPr>
             <a:r>
-              <a:rPr lang="en-US" sz="1320" dirty="0">
+              <a:rPr lang="en-US" sz="1220" dirty="0">
                 <a:solidFill>
                   <a:srgbClr val="17364A"/>
                 </a:solidFill>
@@ -11837,9 +11841,9 @@
                 <a:ea typeface="Aptos" pitchFamily="34" charset="-122"/>
                 <a:cs typeface="Aptos" pitchFamily="34" charset="-120"/>
               </a:rPr>
-              <a:t>Connect the concept to public health purpose, responsible use, required safeguards, documentation, and the next action a department should take.</a:t>
-            </a:r>
-            <a:endParaRPr lang="en-US" sz="1320" dirty="0"/>
+              <a:t>Connect the concept to public health purpose, responsible use, required.</a:t>
+            </a:r>
+            <a:endParaRPr lang="en-US" sz="1220" dirty="0"/>
           </a:p>
         </p:txBody>
       </p:sp>
@@ -12130,8 +12134,8 @@
         </p:nvSpPr>
         <p:spPr>
           <a:xfrm>
-            <a:off x="868680" y="1508760"/>
-            <a:ext cx="6309360" cy="4160520"/>
+            <a:off x="822960" y="1463040"/>
+            <a:ext cx="6565392" cy="4343400"/>
           </a:xfrm>
           <a:prstGeom prst="rect">
             <a:avLst/>
@@ -12149,7 +12153,7 @@
               <a:buNone/>
             </a:pPr>
             <a:r>
-              <a:rPr lang="en-US" sz="2100" dirty="0">
+              <a:rPr lang="en-US" sz="1920" dirty="0">
                 <a:solidFill>
                   <a:srgbClr val="003A63"/>
                 </a:solidFill>
@@ -12159,14 +12163,14 @@
               </a:rPr>
               <a:t>• FHIR data needs worksheet</a:t>
             </a:r>
-            <a:endParaRPr lang="en-US" sz="2100" dirty="0"/>
-          </a:p>
-          <a:p>
-            <a:pPr indent="0" marL="0">
-              <a:buNone/>
-            </a:pPr>
-            <a:r>
-              <a:rPr lang="en-US" sz="2100" dirty="0">
+            <a:endParaRPr lang="en-US" sz="1920" dirty="0"/>
+          </a:p>
+          <a:p>
+            <a:pPr indent="0" marL="0">
+              <a:buNone/>
+            </a:pPr>
+            <a:r>
+              <a:rPr lang="en-US" sz="1920" dirty="0">
                 <a:solidFill>
                   <a:srgbClr val="003A63"/>
                 </a:solidFill>
@@ -12176,14 +12180,14 @@
               </a:rPr>
               <a:t>• List of relevant FHIR resources</a:t>
             </a:r>
-            <a:endParaRPr lang="en-US" sz="2100" dirty="0"/>
-          </a:p>
-          <a:p>
-            <a:pPr indent="0" marL="0">
-              <a:buNone/>
-            </a:pPr>
-            <a:r>
-              <a:rPr lang="en-US" sz="2100" dirty="0">
+            <a:endParaRPr lang="en-US" sz="1920" dirty="0"/>
+          </a:p>
+          <a:p>
+            <a:pPr indent="0" marL="0">
+              <a:buNone/>
+            </a:pPr>
+            <a:r>
+              <a:rPr lang="en-US" sz="1920" dirty="0">
                 <a:solidFill>
                   <a:srgbClr val="003A63"/>
                 </a:solidFill>
@@ -12193,7 +12197,7 @@
               </a:rPr>
               <a:t>• Vendor or implementation questions</a:t>
             </a:r>
-            <a:endParaRPr lang="en-US" sz="2100" dirty="0"/>
+            <a:endParaRPr lang="en-US" sz="1920" dirty="0"/>
           </a:p>
         </p:txBody>
       </p:sp>
@@ -12205,12 +12209,12 @@
         </p:nvSpPr>
         <p:spPr>
           <a:xfrm>
-            <a:off x="7635240" y="1325880"/>
-            <a:ext cx="3474720" cy="1207008"/>
+            <a:off x="7543800" y="1325880"/>
+            <a:ext cx="3611880" cy="1261872"/>
           </a:xfrm>
           <a:prstGeom prst="roundRect">
             <a:avLst>
-              <a:gd name="adj" fmla="val 9091"/>
+              <a:gd name="adj" fmla="val 8696"/>
             </a:avLst>
           </a:prstGeom>
           <a:solidFill>
@@ -12232,8 +12236,8 @@
         </p:nvSpPr>
         <p:spPr>
           <a:xfrm>
-            <a:off x="7799832" y="1472184"/>
-            <a:ext cx="3145536" cy="256032"/>
+            <a:off x="7708392" y="1453896"/>
+            <a:ext cx="3282696" cy="228600"/>
           </a:xfrm>
           <a:prstGeom prst="rect">
             <a:avLst/>
@@ -12249,7 +12253,7 @@
               <a:buNone/>
             </a:pPr>
             <a:r>
-              <a:rPr lang="en-US" sz="1300" b="1" dirty="0">
+              <a:rPr lang="en-US" sz="1220" b="1" dirty="0">
                 <a:solidFill>
                   <a:srgbClr val="0068B7"/>
                 </a:solidFill>
@@ -12259,7 +12263,7 @@
               </a:rPr>
               <a:t>Practice focus</a:t>
             </a:r>
-            <a:endParaRPr lang="en-US" sz="1300" dirty="0"/>
+            <a:endParaRPr lang="en-US" sz="1220" dirty="0"/>
           </a:p>
         </p:txBody>
       </p:sp>
@@ -12271,8 +12275,8 @@
         </p:nvSpPr>
         <p:spPr>
           <a:xfrm>
-            <a:off x="7799832" y="1801368"/>
-            <a:ext cx="3145536" cy="640080"/>
+            <a:off x="7708392" y="1764792"/>
+            <a:ext cx="3282696" cy="749808"/>
           </a:xfrm>
           <a:prstGeom prst="rect">
             <a:avLst/>
@@ -12290,7 +12294,7 @@
               <a:buNone/>
             </a:pPr>
             <a:r>
-              <a:rPr lang="en-US" sz="1320" dirty="0">
+              <a:rPr lang="en-US" sz="1220" dirty="0">
                 <a:solidFill>
                   <a:srgbClr val="17364A"/>
                 </a:solidFill>
@@ -12300,7 +12304,7 @@
               </a:rPr>
               <a:t>FHIR data needs worksheet</a:t>
             </a:r>
-            <a:endParaRPr lang="en-US" sz="1320" dirty="0"/>
+            <a:endParaRPr lang="en-US" sz="1220" dirty="0"/>
           </a:p>
         </p:txBody>
       </p:sp>
@@ -12312,12 +12316,12 @@
         </p:nvSpPr>
         <p:spPr>
           <a:xfrm>
-            <a:off x="7635240" y="2670048"/>
-            <a:ext cx="3474720" cy="1377086"/>
+            <a:off x="7543800" y="2724912"/>
+            <a:ext cx="3611880" cy="1527048"/>
           </a:xfrm>
           <a:prstGeom prst="roundRect">
             <a:avLst>
-              <a:gd name="adj" fmla="val 7968"/>
+              <a:gd name="adj" fmla="val 7186"/>
             </a:avLst>
           </a:prstGeom>
           <a:solidFill>
@@ -12339,8 +12343,8 @@
         </p:nvSpPr>
         <p:spPr>
           <a:xfrm>
-            <a:off x="7799832" y="2816352"/>
-            <a:ext cx="3145536" cy="256032"/>
+            <a:off x="7708392" y="2852928"/>
+            <a:ext cx="3282696" cy="228600"/>
           </a:xfrm>
           <a:prstGeom prst="rect">
             <a:avLst/>
@@ -12356,7 +12360,7 @@
               <a:buNone/>
             </a:pPr>
             <a:r>
-              <a:rPr lang="en-US" sz="1300" b="1" dirty="0">
+              <a:rPr lang="en-US" sz="1220" b="1" dirty="0">
                 <a:solidFill>
                   <a:srgbClr val="0068B7"/>
                 </a:solidFill>
@@ -12366,7 +12370,7 @@
               </a:rPr>
               <a:t>Concept checkpoints</a:t>
             </a:r>
-            <a:endParaRPr lang="en-US" sz="1300" dirty="0"/>
+            <a:endParaRPr lang="en-US" sz="1220" dirty="0"/>
           </a:p>
         </p:txBody>
       </p:sp>
@@ -12378,8 +12382,8 @@
         </p:nvSpPr>
         <p:spPr>
           <a:xfrm>
-            <a:off x="7818120" y="3182112"/>
-            <a:ext cx="3090672" cy="718718"/>
+            <a:off x="7726680" y="3182112"/>
+            <a:ext cx="3227832" cy="960120"/>
           </a:xfrm>
           <a:prstGeom prst="rect">
             <a:avLst/>
@@ -12397,7 +12401,7 @@
               <a:buNone/>
             </a:pPr>
             <a:r>
-              <a:rPr lang="en-US" sz="1220" dirty="0">
+              <a:rPr lang="en-US" sz="1140" dirty="0">
                 <a:solidFill>
                   <a:srgbClr val="17364A"/>
                 </a:solidFill>
@@ -12407,14 +12411,14 @@
               </a:rPr>
               <a:t>FHIR data needs worksheet</a:t>
             </a:r>
-            <a:endParaRPr lang="en-US" sz="1220" dirty="0"/>
-          </a:p>
-          <a:p>
-            <a:pPr indent="0" marL="0">
-              <a:buNone/>
-            </a:pPr>
-            <a:r>
-              <a:rPr lang="en-US" sz="1220" dirty="0">
+            <a:endParaRPr lang="en-US" sz="1140" dirty="0"/>
+          </a:p>
+          <a:p>
+            <a:pPr indent="0" marL="0">
+              <a:buNone/>
+            </a:pPr>
+            <a:r>
+              <a:rPr lang="en-US" sz="1140" dirty="0">
                 <a:solidFill>
                   <a:srgbClr val="17364A"/>
                 </a:solidFill>
@@ -12424,14 +12428,14 @@
               </a:rPr>
               <a:t>List of relevant FHIR resources</a:t>
             </a:r>
-            <a:endParaRPr lang="en-US" sz="1220" dirty="0"/>
-          </a:p>
-          <a:p>
-            <a:pPr indent="0" marL="0">
-              <a:buNone/>
-            </a:pPr>
-            <a:r>
-              <a:rPr lang="en-US" sz="1220" dirty="0">
+            <a:endParaRPr lang="en-US" sz="1140" dirty="0"/>
+          </a:p>
+          <a:p>
+            <a:pPr indent="0" marL="0">
+              <a:buNone/>
+            </a:pPr>
+            <a:r>
+              <a:rPr lang="en-US" sz="1140" dirty="0">
                 <a:solidFill>
                   <a:srgbClr val="17364A"/>
                 </a:solidFill>
@@ -12441,7 +12445,7 @@
               </a:rPr>
               <a:t>Vendor or implementation questions</a:t>
             </a:r>
-            <a:endParaRPr lang="en-US" sz="1220" dirty="0"/>
+            <a:endParaRPr lang="en-US" sz="1140" dirty="0"/>
           </a:p>
         </p:txBody>
       </p:sp>
@@ -12453,12 +12457,12 @@
         </p:nvSpPr>
         <p:spPr>
           <a:xfrm>
-            <a:off x="7635240" y="4184294"/>
-            <a:ext cx="3474720" cy="1466698"/>
+            <a:off x="7543800" y="4389120"/>
+            <a:ext cx="3611880" cy="1261872"/>
           </a:xfrm>
           <a:prstGeom prst="roundRect">
             <a:avLst>
-              <a:gd name="adj" fmla="val 7481"/>
+              <a:gd name="adj" fmla="val 8696"/>
             </a:avLst>
           </a:prstGeom>
           <a:solidFill>
@@ -12480,8 +12484,8 @@
         </p:nvSpPr>
         <p:spPr>
           <a:xfrm>
-            <a:off x="7799832" y="4330598"/>
-            <a:ext cx="3145536" cy="256032"/>
+            <a:off x="7708392" y="4517136"/>
+            <a:ext cx="3282696" cy="228600"/>
           </a:xfrm>
           <a:prstGeom prst="rect">
             <a:avLst/>
@@ -12497,7 +12501,7 @@
               <a:buNone/>
             </a:pPr>
             <a:r>
-              <a:rPr lang="en-US" sz="1300" b="1" dirty="0">
+              <a:rPr lang="en-US" sz="1220" b="1" dirty="0">
                 <a:solidFill>
                   <a:srgbClr val="0068B7"/>
                 </a:solidFill>
@@ -12507,7 +12511,7 @@
               </a:rPr>
               <a:t>What to produce</a:t>
             </a:r>
-            <a:endParaRPr lang="en-US" sz="1300" dirty="0"/>
+            <a:endParaRPr lang="en-US" sz="1220" dirty="0"/>
           </a:p>
         </p:txBody>
       </p:sp>
@@ -12519,8 +12523,8 @@
         </p:nvSpPr>
         <p:spPr>
           <a:xfrm>
-            <a:off x="7799832" y="4659782"/>
-            <a:ext cx="3145536" cy="899770"/>
+            <a:off x="7708392" y="4828032"/>
+            <a:ext cx="3282696" cy="749808"/>
           </a:xfrm>
           <a:prstGeom prst="rect">
             <a:avLst/>
@@ -12538,7 +12542,7 @@
               <a:buNone/>
             </a:pPr>
             <a:r>
-              <a:rPr lang="en-US" sz="1320" dirty="0">
+              <a:rPr lang="en-US" sz="1220" dirty="0">
                 <a:solidFill>
                   <a:srgbClr val="17364A"/>
                 </a:solidFill>
@@ -12546,9 +12550,9 @@
                 <a:ea typeface="Aptos" pitchFamily="34" charset="-122"/>
                 <a:cs typeface="Aptos" pitchFamily="34" charset="-120"/>
               </a:rPr>
-              <a:t>Use the assignment to test whether you can explain the concept, apply it to a realistic public health situation, and identify what would need review before the work moves forward.</a:t>
-            </a:r>
-            <a:endParaRPr lang="en-US" sz="1320" dirty="0"/>
+              <a:t>Use the assignment to test whether you can explain the concept, apply it to a.</a:t>
+            </a:r>
+            <a:endParaRPr lang="en-US" sz="1220" dirty="0"/>
           </a:p>
         </p:txBody>
       </p:sp>
@@ -12839,8 +12843,8 @@
         </p:nvSpPr>
         <p:spPr>
           <a:xfrm>
-            <a:off x="868680" y="1508760"/>
-            <a:ext cx="6309360" cy="4160520"/>
+            <a:off x="822960" y="1463040"/>
+            <a:ext cx="6565392" cy="4343400"/>
           </a:xfrm>
           <a:prstGeom prst="rect">
             <a:avLst/>
@@ -12858,7 +12862,7 @@
               <a:buNone/>
             </a:pPr>
             <a:r>
-              <a:rPr lang="en-US" sz="2100" dirty="0">
+              <a:rPr lang="en-US" sz="1920" dirty="0">
                 <a:solidFill>
                   <a:srgbClr val="003A63"/>
                 </a:solidFill>
@@ -12868,14 +12872,14 @@
               </a:rPr>
               <a:t>• 1. What is a FHIR resource?</a:t>
             </a:r>
-            <a:endParaRPr lang="en-US" sz="2100" dirty="0"/>
-          </a:p>
-          <a:p>
-            <a:pPr indent="0" marL="0">
-              <a:buNone/>
-            </a:pPr>
-            <a:r>
-              <a:rPr lang="en-US" sz="2100" dirty="0">
+            <a:endParaRPr lang="en-US" sz="1920" dirty="0"/>
+          </a:p>
+          <a:p>
+            <a:pPr indent="0" marL="0">
+              <a:buNone/>
+            </a:pPr>
+            <a:r>
+              <a:rPr lang="en-US" sz="1920" dirty="0">
                 <a:solidFill>
                   <a:srgbClr val="003A63"/>
                 </a:solidFill>
@@ -12885,14 +12889,14 @@
               </a:rPr>
               <a:t>• 2. Why does FHIR matter for AI-supported public health workflows?</a:t>
             </a:r>
-            <a:endParaRPr lang="en-US" sz="2100" dirty="0"/>
-          </a:p>
-          <a:p>
-            <a:pPr indent="0" marL="0">
-              <a:buNone/>
-            </a:pPr>
-            <a:r>
-              <a:rPr lang="en-US" sz="2100" dirty="0">
+            <a:endParaRPr lang="en-US" sz="1920" dirty="0"/>
+          </a:p>
+          <a:p>
+            <a:pPr indent="0" marL="0">
+              <a:buNone/>
+            </a:pPr>
+            <a:r>
+              <a:rPr lang="en-US" sz="1920" dirty="0">
                 <a:solidFill>
                   <a:srgbClr val="003A63"/>
                 </a:solidFill>
@@ -12902,7 +12906,7 @@
               </a:rPr>
               <a:t>• 3. What should staff verify when a vendor says a product is FHIR-compatible?</a:t>
             </a:r>
-            <a:endParaRPr lang="en-US" sz="2100" dirty="0"/>
+            <a:endParaRPr lang="en-US" sz="1920" dirty="0"/>
           </a:p>
         </p:txBody>
       </p:sp>
@@ -12914,12 +12918,12 @@
         </p:nvSpPr>
         <p:spPr>
           <a:xfrm>
-            <a:off x="7635240" y="1325880"/>
-            <a:ext cx="3474720" cy="1207008"/>
+            <a:off x="7543800" y="1325880"/>
+            <a:ext cx="3611880" cy="1261872"/>
           </a:xfrm>
           <a:prstGeom prst="roundRect">
             <a:avLst>
-              <a:gd name="adj" fmla="val 9091"/>
+              <a:gd name="adj" fmla="val 8696"/>
             </a:avLst>
           </a:prstGeom>
           <a:solidFill>
@@ -12941,8 +12945,8 @@
         </p:nvSpPr>
         <p:spPr>
           <a:xfrm>
-            <a:off x="7799832" y="1472184"/>
-            <a:ext cx="3145536" cy="256032"/>
+            <a:off x="7708392" y="1453896"/>
+            <a:ext cx="3282696" cy="228600"/>
           </a:xfrm>
           <a:prstGeom prst="rect">
             <a:avLst/>
@@ -12958,7 +12962,7 @@
               <a:buNone/>
             </a:pPr>
             <a:r>
-              <a:rPr lang="en-US" sz="1300" b="1" dirty="0">
+              <a:rPr lang="en-US" sz="1220" b="1" dirty="0">
                 <a:solidFill>
                   <a:srgbClr val="0068B7"/>
                 </a:solidFill>
@@ -12968,7 +12972,7 @@
               </a:rPr>
               <a:t>Practice focus</a:t>
             </a:r>
-            <a:endParaRPr lang="en-US" sz="1300" dirty="0"/>
+            <a:endParaRPr lang="en-US" sz="1220" dirty="0"/>
           </a:p>
         </p:txBody>
       </p:sp>
@@ -12980,8 +12984,8 @@
         </p:nvSpPr>
         <p:spPr>
           <a:xfrm>
-            <a:off x="7799832" y="1801368"/>
-            <a:ext cx="3145536" cy="640080"/>
+            <a:off x="7708392" y="1764792"/>
+            <a:ext cx="3282696" cy="749808"/>
           </a:xfrm>
           <a:prstGeom prst="rect">
             <a:avLst/>
@@ -12999,7 +13003,7 @@
               <a:buNone/>
             </a:pPr>
             <a:r>
-              <a:rPr lang="en-US" sz="1320" dirty="0">
+              <a:rPr lang="en-US" sz="1220" dirty="0">
                 <a:solidFill>
                   <a:srgbClr val="17364A"/>
                 </a:solidFill>
@@ -13009,7 +13013,7 @@
               </a:rPr>
               <a:t>1. What is a FHIR resource?</a:t>
             </a:r>
-            <a:endParaRPr lang="en-US" sz="1320" dirty="0"/>
+            <a:endParaRPr lang="en-US" sz="1220" dirty="0"/>
           </a:p>
         </p:txBody>
       </p:sp>
@@ -13021,12 +13025,12 @@
         </p:nvSpPr>
         <p:spPr>
           <a:xfrm>
-            <a:off x="7635240" y="2670048"/>
-            <a:ext cx="3474720" cy="1377086"/>
+            <a:off x="7543800" y="2724912"/>
+            <a:ext cx="3611880" cy="1527048"/>
           </a:xfrm>
           <a:prstGeom prst="roundRect">
             <a:avLst>
-              <a:gd name="adj" fmla="val 7968"/>
+              <a:gd name="adj" fmla="val 7186"/>
             </a:avLst>
           </a:prstGeom>
           <a:solidFill>
@@ -13048,8 +13052,8 @@
         </p:nvSpPr>
         <p:spPr>
           <a:xfrm>
-            <a:off x="7799832" y="2816352"/>
-            <a:ext cx="3145536" cy="256032"/>
+            <a:off x="7708392" y="2852928"/>
+            <a:ext cx="3282696" cy="228600"/>
           </a:xfrm>
           <a:prstGeom prst="rect">
             <a:avLst/>
@@ -13065,7 +13069,7 @@
               <a:buNone/>
             </a:pPr>
             <a:r>
-              <a:rPr lang="en-US" sz="1300" b="1" dirty="0">
+              <a:rPr lang="en-US" sz="1220" b="1" dirty="0">
                 <a:solidFill>
                   <a:srgbClr val="0068B7"/>
                 </a:solidFill>
@@ -13075,7 +13079,7 @@
               </a:rPr>
               <a:t>Concept checkpoints</a:t>
             </a:r>
-            <a:endParaRPr lang="en-US" sz="1300" dirty="0"/>
+            <a:endParaRPr lang="en-US" sz="1220" dirty="0"/>
           </a:p>
         </p:txBody>
       </p:sp>
@@ -13087,8 +13091,8 @@
         </p:nvSpPr>
         <p:spPr>
           <a:xfrm>
-            <a:off x="7818120" y="3182112"/>
-            <a:ext cx="3090672" cy="718718"/>
+            <a:off x="7726680" y="3182112"/>
+            <a:ext cx="3227832" cy="960120"/>
           </a:xfrm>
           <a:prstGeom prst="rect">
             <a:avLst/>
@@ -13106,7 +13110,7 @@
               <a:buNone/>
             </a:pPr>
             <a:r>
-              <a:rPr lang="en-US" sz="1220" dirty="0">
+              <a:rPr lang="en-US" sz="1140" dirty="0">
                 <a:solidFill>
                   <a:srgbClr val="17364A"/>
                 </a:solidFill>
@@ -13116,14 +13120,14 @@
               </a:rPr>
               <a:t>1.</a:t>
             </a:r>
-            <a:endParaRPr lang="en-US" sz="1220" dirty="0"/>
-          </a:p>
-          <a:p>
-            <a:pPr indent="0" marL="0">
-              <a:buNone/>
-            </a:pPr>
-            <a:r>
-              <a:rPr lang="en-US" sz="1220" dirty="0">
+            <a:endParaRPr lang="en-US" sz="1140" dirty="0"/>
+          </a:p>
+          <a:p>
+            <a:pPr indent="0" marL="0">
+              <a:buNone/>
+            </a:pPr>
+            <a:r>
+              <a:rPr lang="en-US" sz="1140" dirty="0">
                 <a:solidFill>
                   <a:srgbClr val="17364A"/>
                 </a:solidFill>
@@ -13133,14 +13137,14 @@
               </a:rPr>
               <a:t>What is a FHIR resource?</a:t>
             </a:r>
-            <a:endParaRPr lang="en-US" sz="1220" dirty="0"/>
-          </a:p>
-          <a:p>
-            <a:pPr indent="0" marL="0">
-              <a:buNone/>
-            </a:pPr>
-            <a:r>
-              <a:rPr lang="en-US" sz="1220" dirty="0">
+            <a:endParaRPr lang="en-US" sz="1140" dirty="0"/>
+          </a:p>
+          <a:p>
+            <a:pPr indent="0" marL="0">
+              <a:buNone/>
+            </a:pPr>
+            <a:r>
+              <a:rPr lang="en-US" sz="1140" dirty="0">
                 <a:solidFill>
                   <a:srgbClr val="17364A"/>
                 </a:solidFill>
@@ -13150,7 +13154,7 @@
               </a:rPr>
               <a:t>2.</a:t>
             </a:r>
-            <a:endParaRPr lang="en-US" sz="1220" dirty="0"/>
+            <a:endParaRPr lang="en-US" sz="1140" dirty="0"/>
           </a:p>
         </p:txBody>
       </p:sp>
@@ -13162,12 +13166,12 @@
         </p:nvSpPr>
         <p:spPr>
           <a:xfrm>
-            <a:off x="7635240" y="4184294"/>
-            <a:ext cx="3474720" cy="1466698"/>
+            <a:off x="7543800" y="4389120"/>
+            <a:ext cx="3611880" cy="1261872"/>
           </a:xfrm>
           <a:prstGeom prst="roundRect">
             <a:avLst>
-              <a:gd name="adj" fmla="val 7481"/>
+              <a:gd name="adj" fmla="val 8696"/>
             </a:avLst>
           </a:prstGeom>
           <a:solidFill>
@@ -13189,8 +13193,8 @@
         </p:nvSpPr>
         <p:spPr>
           <a:xfrm>
-            <a:off x="7799832" y="4330598"/>
-            <a:ext cx="3145536" cy="256032"/>
+            <a:off x="7708392" y="4517136"/>
+            <a:ext cx="3282696" cy="228600"/>
           </a:xfrm>
           <a:prstGeom prst="rect">
             <a:avLst/>
@@ -13206,7 +13210,7 @@
               <a:buNone/>
             </a:pPr>
             <a:r>
-              <a:rPr lang="en-US" sz="1300" b="1" dirty="0">
+              <a:rPr lang="en-US" sz="1220" b="1" dirty="0">
                 <a:solidFill>
                   <a:srgbClr val="0068B7"/>
                 </a:solidFill>
@@ -13216,7 +13220,7 @@
               </a:rPr>
               <a:t>What to produce</a:t>
             </a:r>
-            <a:endParaRPr lang="en-US" sz="1300" dirty="0"/>
+            <a:endParaRPr lang="en-US" sz="1220" dirty="0"/>
           </a:p>
         </p:txBody>
       </p:sp>
@@ -13228,8 +13232,8 @@
         </p:nvSpPr>
         <p:spPr>
           <a:xfrm>
-            <a:off x="7799832" y="4659782"/>
-            <a:ext cx="3145536" cy="899770"/>
+            <a:off x="7708392" y="4828032"/>
+            <a:ext cx="3282696" cy="749808"/>
           </a:xfrm>
           <a:prstGeom prst="rect">
             <a:avLst/>
@@ -13247,7 +13251,7 @@
               <a:buNone/>
             </a:pPr>
             <a:r>
-              <a:rPr lang="en-US" sz="1320" dirty="0">
+              <a:rPr lang="en-US" sz="1220" dirty="0">
                 <a:solidFill>
                   <a:srgbClr val="17364A"/>
                 </a:solidFill>
@@ -13255,9 +13259,9 @@
                 <a:ea typeface="Aptos" pitchFamily="34" charset="-122"/>
                 <a:cs typeface="Aptos" pitchFamily="34" charset="-120"/>
               </a:rPr>
-              <a:t>Use the assignment to test whether you can explain the concept, apply it to a realistic public health situation, and identify what would need review before the work moves forward.</a:t>
-            </a:r>
-            <a:endParaRPr lang="en-US" sz="1320" dirty="0"/>
+              <a:t>Use the assignment to test whether you can explain the concept, apply it to a.</a:t>
+            </a:r>
+            <a:endParaRPr lang="en-US" sz="1220" dirty="0"/>
           </a:p>
         </p:txBody>
       </p:sp>
@@ -13548,8 +13552,8 @@
         </p:nvSpPr>
         <p:spPr>
           <a:xfrm>
-            <a:off x="868680" y="1508760"/>
-            <a:ext cx="6309360" cy="4160520"/>
+            <a:off x="822960" y="1463040"/>
+            <a:ext cx="6565392" cy="4343400"/>
           </a:xfrm>
           <a:prstGeom prst="rect">
             <a:avLst/>
@@ -13567,7 +13571,7 @@
               <a:buNone/>
             </a:pPr>
             <a:r>
-              <a:rPr lang="en-US" sz="2100" dirty="0">
+              <a:rPr lang="en-US" sz="1920" dirty="0">
                 <a:solidFill>
                   <a:srgbClr val="003A63"/>
                 </a:solidFill>
@@ -13577,14 +13581,14 @@
               </a:rPr>
               <a:t>• HL7 FHIR resources: https://hl7.org/fhir/</a:t>
             </a:r>
-            <a:endParaRPr lang="en-US" sz="2100" dirty="0"/>
-          </a:p>
-          <a:p>
-            <a:pPr indent="0" marL="0">
-              <a:buNone/>
-            </a:pPr>
-            <a:r>
-              <a:rPr lang="en-US" sz="2100" dirty="0">
+            <a:endParaRPr lang="en-US" sz="1920" dirty="0"/>
+          </a:p>
+          <a:p>
+            <a:pPr indent="0" marL="0">
+              <a:buNone/>
+            </a:pPr>
+            <a:r>
+              <a:rPr lang="en-US" sz="1920" dirty="0">
                 <a:solidFill>
                   <a:srgbClr val="003A63"/>
                 </a:solidFill>
@@ -13594,14 +13598,14 @@
               </a:rPr>
               <a:t>• HL7 US Core Implementation Guide: https://build.fhir.org/ig/HL7/US-Core/</a:t>
             </a:r>
-            <a:endParaRPr lang="en-US" sz="2100" dirty="0"/>
-          </a:p>
-          <a:p>
-            <a:pPr indent="0" marL="0">
-              <a:buNone/>
-            </a:pPr>
-            <a:r>
-              <a:rPr lang="en-US" sz="2100" dirty="0">
+            <a:endParaRPr lang="en-US" sz="1920" dirty="0"/>
+          </a:p>
+          <a:p>
+            <a:pPr indent="0" marL="0">
+              <a:buNone/>
+            </a:pPr>
+            <a:r>
+              <a:rPr lang="en-US" sz="1920" dirty="0">
                 <a:solidFill>
                   <a:srgbClr val="003A63"/>
                 </a:solidFill>
@@ -13611,7 +13615,7 @@
               </a:rPr>
               <a:t>• HL7 eCR FHIR Implementation Guide: https://hl7.org/fhir/us/ecr/</a:t>
             </a:r>
-            <a:endParaRPr lang="en-US" sz="2100" dirty="0"/>
+            <a:endParaRPr lang="en-US" sz="1920" dirty="0"/>
           </a:p>
         </p:txBody>
       </p:sp>
@@ -13623,12 +13627,12 @@
         </p:nvSpPr>
         <p:spPr>
           <a:xfrm>
-            <a:off x="7635240" y="1325880"/>
-            <a:ext cx="3474720" cy="1207008"/>
+            <a:off x="7543800" y="1325880"/>
+            <a:ext cx="3611880" cy="1261872"/>
           </a:xfrm>
           <a:prstGeom prst="roundRect">
             <a:avLst>
-              <a:gd name="adj" fmla="val 9091"/>
+              <a:gd name="adj" fmla="val 8696"/>
             </a:avLst>
           </a:prstGeom>
           <a:solidFill>
@@ -13650,8 +13654,8 @@
         </p:nvSpPr>
         <p:spPr>
           <a:xfrm>
-            <a:off x="7799832" y="1472184"/>
-            <a:ext cx="3145536" cy="256032"/>
+            <a:off x="7708392" y="1453896"/>
+            <a:ext cx="3282696" cy="228600"/>
           </a:xfrm>
           <a:prstGeom prst="rect">
             <a:avLst/>
@@ -13667,7 +13671,7 @@
               <a:buNone/>
             </a:pPr>
             <a:r>
-              <a:rPr lang="en-US" sz="1300" b="1" dirty="0">
+              <a:rPr lang="en-US" sz="1220" b="1" dirty="0">
                 <a:solidFill>
                   <a:srgbClr val="0068B7"/>
                 </a:solidFill>
@@ -13677,7 +13681,7 @@
               </a:rPr>
               <a:t>Core concept</a:t>
             </a:r>
-            <a:endParaRPr lang="en-US" sz="1300" dirty="0"/>
+            <a:endParaRPr lang="en-US" sz="1220" dirty="0"/>
           </a:p>
         </p:txBody>
       </p:sp>
@@ -13689,8 +13693,8 @@
         </p:nvSpPr>
         <p:spPr>
           <a:xfrm>
-            <a:off x="7799832" y="1801368"/>
-            <a:ext cx="3145536" cy="640080"/>
+            <a:off x="7708392" y="1764792"/>
+            <a:ext cx="3282696" cy="749808"/>
           </a:xfrm>
           <a:prstGeom prst="rect">
             <a:avLst/>
@@ -13708,7 +13712,7 @@
               <a:buNone/>
             </a:pPr>
             <a:r>
-              <a:rPr lang="en-US" sz="1320" dirty="0">
+              <a:rPr lang="en-US" sz="1220" dirty="0">
                 <a:solidFill>
                   <a:srgbClr val="17364A"/>
                 </a:solidFill>
@@ -13718,7 +13722,7 @@
               </a:rPr>
               <a:t>HL7 FHIR resources: https://hl7.org/fhir/</a:t>
             </a:r>
-            <a:endParaRPr lang="en-US" sz="1320" dirty="0"/>
+            <a:endParaRPr lang="en-US" sz="1220" dirty="0"/>
           </a:p>
         </p:txBody>
       </p:sp>
@@ -13730,12 +13734,12 @@
         </p:nvSpPr>
         <p:spPr>
           <a:xfrm>
-            <a:off x="7635240" y="2670048"/>
-            <a:ext cx="3474720" cy="1377086"/>
+            <a:off x="7543800" y="2724912"/>
+            <a:ext cx="3611880" cy="1527048"/>
           </a:xfrm>
           <a:prstGeom prst="roundRect">
             <a:avLst>
-              <a:gd name="adj" fmla="val 7968"/>
+              <a:gd name="adj" fmla="val 7186"/>
             </a:avLst>
           </a:prstGeom>
           <a:solidFill>
@@ -13757,8 +13761,8 @@
         </p:nvSpPr>
         <p:spPr>
           <a:xfrm>
-            <a:off x="7799832" y="2816352"/>
-            <a:ext cx="3145536" cy="256032"/>
+            <a:off x="7708392" y="2852928"/>
+            <a:ext cx="3282696" cy="228600"/>
           </a:xfrm>
           <a:prstGeom prst="rect">
             <a:avLst/>
@@ -13774,7 +13778,7 @@
               <a:buNone/>
             </a:pPr>
             <a:r>
-              <a:rPr lang="en-US" sz="1300" b="1" dirty="0">
+              <a:rPr lang="en-US" sz="1220" b="1" dirty="0">
                 <a:solidFill>
                   <a:srgbClr val="0068B7"/>
                 </a:solidFill>
@@ -13784,7 +13788,7 @@
               </a:rPr>
               <a:t>Concept checkpoints</a:t>
             </a:r>
-            <a:endParaRPr lang="en-US" sz="1300" dirty="0"/>
+            <a:endParaRPr lang="en-US" sz="1220" dirty="0"/>
           </a:p>
         </p:txBody>
       </p:sp>
@@ -13796,8 +13800,8 @@
         </p:nvSpPr>
         <p:spPr>
           <a:xfrm>
-            <a:off x="7818120" y="3182112"/>
-            <a:ext cx="3090672" cy="718718"/>
+            <a:off x="7726680" y="3182112"/>
+            <a:ext cx="3227832" cy="960120"/>
           </a:xfrm>
           <a:prstGeom prst="rect">
             <a:avLst/>
@@ -13815,7 +13819,7 @@
               <a:buNone/>
             </a:pPr>
             <a:r>
-              <a:rPr lang="en-US" sz="1220" dirty="0">
+              <a:rPr lang="en-US" sz="1140" dirty="0">
                 <a:solidFill>
                   <a:srgbClr val="17364A"/>
                 </a:solidFill>
@@ -13825,14 +13829,14 @@
               </a:rPr>
               <a:t>US Public Health Profiles Library</a:t>
             </a:r>
-            <a:endParaRPr lang="en-US" sz="1220" dirty="0"/>
-          </a:p>
-          <a:p>
-            <a:pPr indent="0" marL="0">
-              <a:buNone/>
-            </a:pPr>
-            <a:r>
-              <a:rPr lang="en-US" sz="1220" dirty="0">
+            <a:endParaRPr lang="en-US" sz="1140" dirty="0"/>
+          </a:p>
+          <a:p>
+            <a:pPr indent="0" marL="0">
+              <a:buNone/>
+            </a:pPr>
+            <a:r>
+              <a:rPr lang="en-US" sz="1140" dirty="0">
                 <a:solidFill>
                   <a:srgbClr val="17364A"/>
                 </a:solidFill>
@@ -13842,7 +13846,7 @@
               </a:rPr>
               <a:t>ONC USCDI resources:.</a:t>
             </a:r>
-            <a:endParaRPr lang="en-US" sz="1220" dirty="0"/>
+            <a:endParaRPr lang="en-US" sz="1140" dirty="0"/>
           </a:p>
         </p:txBody>
       </p:sp>
@@ -13854,12 +13858,12 @@
         </p:nvSpPr>
         <p:spPr>
           <a:xfrm>
-            <a:off x="7635240" y="4184294"/>
-            <a:ext cx="3474720" cy="1466698"/>
+            <a:off x="7543800" y="4389120"/>
+            <a:ext cx="3611880" cy="1261872"/>
           </a:xfrm>
           <a:prstGeom prst="roundRect">
             <a:avLst>
-              <a:gd name="adj" fmla="val 7481"/>
+              <a:gd name="adj" fmla="val 8696"/>
             </a:avLst>
           </a:prstGeom>
           <a:solidFill>
@@ -13881,8 +13885,8 @@
         </p:nvSpPr>
         <p:spPr>
           <a:xfrm>
-            <a:off x="7799832" y="4330598"/>
-            <a:ext cx="3145536" cy="256032"/>
+            <a:off x="7708392" y="4517136"/>
+            <a:ext cx="3282696" cy="228600"/>
           </a:xfrm>
           <a:prstGeom prst="rect">
             <a:avLst/>
@@ -13898,7 +13902,7 @@
               <a:buNone/>
             </a:pPr>
             <a:r>
-              <a:rPr lang="en-US" sz="1300" b="1" dirty="0">
+              <a:rPr lang="en-US" sz="1220" b="1" dirty="0">
                 <a:solidFill>
                   <a:srgbClr val="0068B7"/>
                 </a:solidFill>
@@ -13908,7 +13912,7 @@
               </a:rPr>
               <a:t>Apply it</a:t>
             </a:r>
-            <a:endParaRPr lang="en-US" sz="1300" dirty="0"/>
+            <a:endParaRPr lang="en-US" sz="1220" dirty="0"/>
           </a:p>
         </p:txBody>
       </p:sp>
@@ -13920,8 +13924,8 @@
         </p:nvSpPr>
         <p:spPr>
           <a:xfrm>
-            <a:off x="7799832" y="4659782"/>
-            <a:ext cx="3145536" cy="899770"/>
+            <a:off x="7708392" y="4828032"/>
+            <a:ext cx="3282696" cy="749808"/>
           </a:xfrm>
           <a:prstGeom prst="rect">
             <a:avLst/>
@@ -13939,7 +13943,7 @@
               <a:buNone/>
             </a:pPr>
             <a:r>
-              <a:rPr lang="en-US" sz="1320" dirty="0">
+              <a:rPr lang="en-US" sz="1220" dirty="0">
                 <a:solidFill>
                   <a:srgbClr val="17364A"/>
                 </a:solidFill>
@@ -13947,9 +13951,9 @@
                 <a:ea typeface="Aptos" pitchFamily="34" charset="-122"/>
                 <a:cs typeface="Aptos" pitchFamily="34" charset="-120"/>
               </a:rPr>
-              <a:t>Connect the concept to public health purpose, responsible use, required safeguards, documentation, and the next action a department should take.</a:t>
-            </a:r>
-            <a:endParaRPr lang="en-US" sz="1320" dirty="0"/>
+              <a:t>Connect the concept to public health purpose, responsible use, required.</a:t>
+            </a:r>
+            <a:endParaRPr lang="en-US" sz="1220" dirty="0"/>
           </a:p>
         </p:txBody>
       </p:sp>
@@ -14267,7 +14271,7 @@
                 <a:ea typeface="Aptos" pitchFamily="34" charset="-122"/>
                 <a:cs typeface="Aptos" pitchFamily="34" charset="-120"/>
               </a:rPr>
-              <a:t>• Play 11: Build and Deploy AI Solutions - This lesson informs Play 11 by helping learners.</a:t>
+              <a:t>• Play 11: Build and Deploy AI Solutions - This lesson informs Play 11 by.</a:t>
             </a:r>
             <a:endParaRPr lang="en-US" sz="1900" dirty="0"/>
           </a:p>
@@ -14284,7 +14288,7 @@
                 <a:ea typeface="Aptos" pitchFamily="34" charset="-122"/>
                 <a:cs typeface="Aptos" pitchFamily="34" charset="-120"/>
               </a:rPr>
-              <a:t>• Play 2: Readiness Assessment - This lesson informs Play 2 by helping learners connect the.</a:t>
+              <a:t>• Play 2: Readiness Assessment - This lesson informs Play 2 by helping.</a:t>
             </a:r>
             <a:endParaRPr lang="en-US" sz="1900" dirty="0"/>
           </a:p>
@@ -14301,7 +14305,7 @@
                 <a:ea typeface="Aptos" pitchFamily="34" charset="-122"/>
                 <a:cs typeface="Aptos" pitchFamily="34" charset="-120"/>
               </a:rPr>
-              <a:t>• Play 1: Vision &amp; Guardrails - This lesson informs Play 1 by helping learners connect the.</a:t>
+              <a:t>• Play 1: Vision &amp; Guardrails - This lesson informs Play 1 by helping learners.</a:t>
             </a:r>
             <a:endParaRPr lang="en-US" sz="1900" dirty="0"/>
           </a:p>
@@ -14318,7 +14322,7 @@
                 <a:ea typeface="Aptos" pitchFamily="34" charset="-122"/>
                 <a:cs typeface="Aptos" pitchFamily="34" charset="-120"/>
               </a:rPr>
-              <a:t>• Play 7: Prioritize Use Cases - This lesson informs Play 7 by helping learners connect the.</a:t>
+              <a:t>• Play 7: Prioritize Use Cases - This lesson informs Play 7 by helping.</a:t>
             </a:r>
             <a:endParaRPr lang="en-US" sz="1900" dirty="0"/>
           </a:p>
@@ -14359,8 +14363,8 @@
         </p:nvSpPr>
         <p:spPr>
           <a:xfrm>
-            <a:off x="8211312" y="1563624"/>
-            <a:ext cx="2734056" cy="256032"/>
+            <a:off x="8211312" y="1545336"/>
+            <a:ext cx="2734056" cy="228600"/>
           </a:xfrm>
           <a:prstGeom prst="rect">
             <a:avLst/>
@@ -14376,7 +14380,7 @@
               <a:buNone/>
             </a:pPr>
             <a:r>
-              <a:rPr lang="en-US" sz="1300" b="1" dirty="0">
+              <a:rPr lang="en-US" sz="1220" b="1" dirty="0">
                 <a:solidFill>
                   <a:srgbClr val="0068B7"/>
                 </a:solidFill>
@@ -14386,7 +14390,7 @@
               </a:rPr>
               <a:t>Apply the lesson</a:t>
             </a:r>
-            <a:endParaRPr lang="en-US" sz="1300" dirty="0"/>
+            <a:endParaRPr lang="en-US" sz="1220" dirty="0"/>
           </a:p>
         </p:txBody>
       </p:sp>
@@ -14398,8 +14402,8 @@
         </p:nvSpPr>
         <p:spPr>
           <a:xfrm>
-            <a:off x="8211312" y="1892808"/>
-            <a:ext cx="2734056" cy="1536192"/>
+            <a:off x="8211312" y="1856232"/>
+            <a:ext cx="2734056" cy="1591056"/>
           </a:xfrm>
           <a:prstGeom prst="rect">
             <a:avLst/>
@@ -14417,7 +14421,7 @@
               <a:buNone/>
             </a:pPr>
             <a:r>
-              <a:rPr lang="en-US" sz="1320" dirty="0">
+              <a:rPr lang="en-US" sz="1220" dirty="0">
                 <a:solidFill>
                   <a:srgbClr val="17364A"/>
                 </a:solidFill>
@@ -14425,9 +14429,9 @@
                 <a:ea typeface="Aptos" pitchFamily="34" charset="-122"/>
                 <a:cs typeface="Aptos" pitchFamily="34" charset="-120"/>
               </a:rPr>
-              <a:t>Use the related plays to identify decisions, participants, timing, approvals, and documentation needed for responsible implementation.</a:t>
-            </a:r>
-            <a:endParaRPr lang="en-US" sz="1320" dirty="0"/>
+              <a:t>Use the related plays to identify decisions, participants, timing, approvals,.</a:t>
+            </a:r>
+            <a:endParaRPr lang="en-US" sz="1220" dirty="0"/>
           </a:p>
         </p:txBody>
       </p:sp>
@@ -14466,8 +14470,8 @@
         </p:nvSpPr>
         <p:spPr>
           <a:xfrm>
-            <a:off x="8211312" y="3941064"/>
-            <a:ext cx="2734056" cy="256032"/>
+            <a:off x="8211312" y="3922776"/>
+            <a:ext cx="2734056" cy="228600"/>
           </a:xfrm>
           <a:prstGeom prst="rect">
             <a:avLst/>
@@ -14483,7 +14487,7 @@
               <a:buNone/>
             </a:pPr>
             <a:r>
-              <a:rPr lang="en-US" sz="1300" b="1" dirty="0">
+              <a:rPr lang="en-US" sz="1220" b="1" dirty="0">
                 <a:solidFill>
                   <a:srgbClr val="0068B7"/>
                 </a:solidFill>
@@ -14493,7 +14497,7 @@
               </a:rPr>
               <a:t>Use the play links to</a:t>
             </a:r>
-            <a:endParaRPr lang="en-US" sz="1300" dirty="0"/>
+            <a:endParaRPr lang="en-US" sz="1220" dirty="0"/>
           </a:p>
         </p:txBody>
       </p:sp>
@@ -14505,8 +14509,8 @@
         </p:nvSpPr>
         <p:spPr>
           <a:xfrm>
-            <a:off x="8229600" y="4306824"/>
-            <a:ext cx="2679192" cy="941832"/>
+            <a:off x="8229600" y="4251960"/>
+            <a:ext cx="2679192" cy="1033272"/>
           </a:xfrm>
           <a:prstGeom prst="rect">
             <a:avLst/>
@@ -14524,7 +14528,7 @@
               <a:buNone/>
             </a:pPr>
             <a:r>
-              <a:rPr lang="en-US" sz="1220" dirty="0">
+              <a:rPr lang="en-US" sz="1140" dirty="0">
                 <a:solidFill>
                   <a:srgbClr val="17364A"/>
                 </a:solidFill>
@@ -14534,14 +14538,14 @@
               </a:rPr>
               <a:t>Locate the decision point in the playbook sequence.</a:t>
             </a:r>
-            <a:endParaRPr lang="en-US" sz="1220" dirty="0"/>
-          </a:p>
-          <a:p>
-            <a:pPr indent="0" marL="0">
-              <a:buNone/>
-            </a:pPr>
-            <a:r>
-              <a:rPr lang="en-US" sz="1220" dirty="0">
+            <a:endParaRPr lang="en-US" sz="1140" dirty="0"/>
+          </a:p>
+          <a:p>
+            <a:pPr indent="0" marL="0">
+              <a:buNone/>
+            </a:pPr>
+            <a:r>
+              <a:rPr lang="en-US" sz="1140" dirty="0">
                 <a:solidFill>
                   <a:srgbClr val="17364A"/>
                 </a:solidFill>
@@ -14551,14 +14555,14 @@
               </a:rPr>
               <a:t>Identify who should participate in the work.</a:t>
             </a:r>
-            <a:endParaRPr lang="en-US" sz="1220" dirty="0"/>
-          </a:p>
-          <a:p>
-            <a:pPr indent="0" marL="0">
-              <a:buNone/>
-            </a:pPr>
-            <a:r>
-              <a:rPr lang="en-US" sz="1220" dirty="0">
+            <a:endParaRPr lang="en-US" sz="1140" dirty="0"/>
+          </a:p>
+          <a:p>
+            <a:pPr indent="0" marL="0">
+              <a:buNone/>
+            </a:pPr>
+            <a:r>
+              <a:rPr lang="en-US" sz="1140" dirty="0">
                 <a:solidFill>
                   <a:srgbClr val="17364A"/>
                 </a:solidFill>
@@ -14566,9 +14570,9 @@
                 <a:ea typeface="Aptos" pitchFamily="34" charset="-122"/>
                 <a:cs typeface="Aptos" pitchFamily="34" charset="-120"/>
               </a:rPr>
-              <a:t>Document the review, approval, or implementation step.</a:t>
-            </a:r>
-            <a:endParaRPr lang="en-US" sz="1220" dirty="0"/>
+              <a:t>Document the review, approval, or implementation.</a:t>
+            </a:r>
+            <a:endParaRPr lang="en-US" sz="1140" dirty="0"/>
           </a:p>
         </p:txBody>
       </p:sp>
@@ -14886,7 +14890,7 @@
                 <a:ea typeface="Aptos" pitchFamily="34" charset="-122"/>
                 <a:cs typeface="Aptos" pitchFamily="34" charset="-120"/>
               </a:rPr>
-              <a:t>• Tool 4: AI Policy Landscape Scan (Worksheet) - Use AI Policy Landscape Scan to translate this.</a:t>
+              <a:t>• Tool 4: AI Policy Landscape Scan (Worksheet) - Use AI Policy Landscape Scan.</a:t>
             </a:r>
             <a:endParaRPr lang="en-US" sz="1850" dirty="0"/>
           </a:p>
@@ -14903,7 +14907,7 @@
                 <a:ea typeface="Aptos" pitchFamily="34" charset="-122"/>
                 <a:cs typeface="Aptos" pitchFamily="34" charset="-120"/>
               </a:rPr>
-              <a:t>• Tool 5: AI Environmental and Resource Impact Review (Checklist) - Use AI Environmental and.</a:t>
+              <a:t>• Tool 5: AI Environmental and Resource Impact Review (Checklist) - Use AI.</a:t>
             </a:r>
             <a:endParaRPr lang="en-US" sz="1850" dirty="0"/>
           </a:p>
@@ -14920,7 +14924,7 @@
                 <a:ea typeface="Aptos" pitchFamily="34" charset="-122"/>
                 <a:cs typeface="Aptos" pitchFamily="34" charset="-120"/>
               </a:rPr>
-              <a:t>• Tool 6: Human-Centered AI Decision Rule Checklist (Checklist) - Use Human-Centered AI Decision.</a:t>
+              <a:t>• Tool 6: Human-Centered AI Decision Rule Checklist (Checklist) - Use.</a:t>
             </a:r>
             <a:endParaRPr lang="en-US" sz="1850" dirty="0"/>
           </a:p>
@@ -14937,7 +14941,7 @@
                 <a:ea typeface="Aptos" pitchFamily="34" charset="-122"/>
                 <a:cs typeface="Aptos" pitchFamily="34" charset="-120"/>
               </a:rPr>
-              <a:t>• Tool 8: AI Project Charter (Planning) - Use AI Project Charter to translate this lesson into a.</a:t>
+              <a:t>• Tool 8: AI Project Charter (Planning) - Use AI Project Charter to translate.</a:t>
             </a:r>
             <a:endParaRPr lang="en-US" sz="1850" dirty="0"/>
           </a:p>
@@ -14978,8 +14982,8 @@
         </p:nvSpPr>
         <p:spPr>
           <a:xfrm>
-            <a:off x="8211312" y="1563624"/>
-            <a:ext cx="2734056" cy="256032"/>
+            <a:off x="8211312" y="1545336"/>
+            <a:ext cx="2734056" cy="228600"/>
           </a:xfrm>
           <a:prstGeom prst="rect">
             <a:avLst/>
@@ -14995,7 +14999,7 @@
               <a:buNone/>
             </a:pPr>
             <a:r>
-              <a:rPr lang="en-US" sz="1300" b="1" dirty="0">
+              <a:rPr lang="en-US" sz="1220" b="1" dirty="0">
                 <a:solidFill>
                   <a:srgbClr val="0068B7"/>
                 </a:solidFill>
@@ -15005,7 +15009,7 @@
               </a:rPr>
               <a:t>Use the tools</a:t>
             </a:r>
-            <a:endParaRPr lang="en-US" sz="1300" dirty="0"/>
+            <a:endParaRPr lang="en-US" sz="1220" dirty="0"/>
           </a:p>
         </p:txBody>
       </p:sp>
@@ -15017,8 +15021,8 @@
         </p:nvSpPr>
         <p:spPr>
           <a:xfrm>
-            <a:off x="8211312" y="1892808"/>
-            <a:ext cx="2734056" cy="1536192"/>
+            <a:off x="8211312" y="1856232"/>
+            <a:ext cx="2734056" cy="1591056"/>
           </a:xfrm>
           <a:prstGeom prst="rect">
             <a:avLst/>
@@ -15036,7 +15040,7 @@
               <a:buNone/>
             </a:pPr>
             <a:r>
-              <a:rPr lang="en-US" sz="1320" dirty="0">
+              <a:rPr lang="en-US" sz="1220" dirty="0">
                 <a:solidFill>
                   <a:srgbClr val="17364A"/>
                 </a:solidFill>
@@ -15044,9 +15048,9 @@
                 <a:ea typeface="Aptos" pitchFamily="34" charset="-122"/>
                 <a:cs typeface="Aptos" pitchFamily="34" charset="-120"/>
               </a:rPr>
-              <a:t>Use linked tools when your department needs a structured worksheet, template, checklist, review process, or documentation artifact.</a:t>
-            </a:r>
-            <a:endParaRPr lang="en-US" sz="1320" dirty="0"/>
+              <a:t>Use linked tools when your department needs a structured worksheet, template,.</a:t>
+            </a:r>
+            <a:endParaRPr lang="en-US" sz="1220" dirty="0"/>
           </a:p>
         </p:txBody>
       </p:sp>
@@ -15085,8 +15089,8 @@
         </p:nvSpPr>
         <p:spPr>
           <a:xfrm>
-            <a:off x="8211312" y="3941064"/>
-            <a:ext cx="2734056" cy="256032"/>
+            <a:off x="8211312" y="3922776"/>
+            <a:ext cx="2734056" cy="228600"/>
           </a:xfrm>
           <a:prstGeom prst="rect">
             <a:avLst/>
@@ -15102,7 +15106,7 @@
               <a:buNone/>
             </a:pPr>
             <a:r>
-              <a:rPr lang="en-US" sz="1300" b="1" dirty="0">
+              <a:rPr lang="en-US" sz="1220" b="1" dirty="0">
                 <a:solidFill>
                   <a:srgbClr val="0068B7"/>
                 </a:solidFill>
@@ -15112,7 +15116,7 @@
               </a:rPr>
               <a:t>Tool selection cues</a:t>
             </a:r>
-            <a:endParaRPr lang="en-US" sz="1300" dirty="0"/>
+            <a:endParaRPr lang="en-US" sz="1220" dirty="0"/>
           </a:p>
         </p:txBody>
       </p:sp>
@@ -15124,8 +15128,8 @@
         </p:nvSpPr>
         <p:spPr>
           <a:xfrm>
-            <a:off x="8229600" y="4306824"/>
-            <a:ext cx="2679192" cy="941832"/>
+            <a:off x="8229600" y="4251960"/>
+            <a:ext cx="2679192" cy="1033272"/>
           </a:xfrm>
           <a:prstGeom prst="rect">
             <a:avLst/>
@@ -15143,7 +15147,7 @@
               <a:buNone/>
             </a:pPr>
             <a:r>
-              <a:rPr lang="en-US" sz="1220" dirty="0">
+              <a:rPr lang="en-US" sz="1140" dirty="0">
                 <a:solidFill>
                   <a:srgbClr val="17364A"/>
                 </a:solidFill>
@@ -15153,14 +15157,14 @@
               </a:rPr>
               <a:t>Use a tool when no comparable local process exists.</a:t>
             </a:r>
-            <a:endParaRPr lang="en-US" sz="1220" dirty="0"/>
-          </a:p>
-          <a:p>
-            <a:pPr indent="0" marL="0">
-              <a:buNone/>
-            </a:pPr>
-            <a:r>
-              <a:rPr lang="en-US" sz="1220" dirty="0">
+            <a:endParaRPr lang="en-US" sz="1140" dirty="0"/>
+          </a:p>
+          <a:p>
+            <a:pPr indent="0" marL="0">
+              <a:buNone/>
+            </a:pPr>
+            <a:r>
+              <a:rPr lang="en-US" sz="1140" dirty="0">
                 <a:solidFill>
                   <a:srgbClr val="17364A"/>
                 </a:solidFill>
@@ -15168,16 +15172,16 @@
                 <a:ea typeface="Aptos" pitchFamily="34" charset="-122"/>
                 <a:cs typeface="Aptos" pitchFamily="34" charset="-120"/>
               </a:rPr>
-              <a:t>Adapt existing department templates when they already fit the.</a:t>
-            </a:r>
-            <a:endParaRPr lang="en-US" sz="1220" dirty="0"/>
-          </a:p>
-          <a:p>
-            <a:pPr indent="0" marL="0">
-              <a:buNone/>
-            </a:pPr>
-            <a:r>
-              <a:rPr lang="en-US" sz="1220" dirty="0">
+              <a:t>Adapt existing department templates when they.</a:t>
+            </a:r>
+            <a:endParaRPr lang="en-US" sz="1140" dirty="0"/>
+          </a:p>
+          <a:p>
+            <a:pPr indent="0" marL="0">
+              <a:buNone/>
+            </a:pPr>
+            <a:r>
+              <a:rPr lang="en-US" sz="1140" dirty="0">
                 <a:solidFill>
                   <a:srgbClr val="17364A"/>
                 </a:solidFill>
@@ -15185,9 +15189,9 @@
                 <a:ea typeface="Aptos" pitchFamily="34" charset="-122"/>
                 <a:cs typeface="Aptos" pitchFamily="34" charset="-120"/>
               </a:rPr>
-              <a:t>Save the completed artifact as evidence of the decision.</a:t>
-            </a:r>
-            <a:endParaRPr lang="en-US" sz="1220" dirty="0"/>
+              <a:t>Save the completed artifact as evidence of the.</a:t>
+            </a:r>
+            <a:endParaRPr lang="en-US" sz="1140" dirty="0"/>
           </a:p>
         </p:txBody>
       </p:sp>
@@ -15478,8 +15482,8 @@
         </p:nvSpPr>
         <p:spPr>
           <a:xfrm>
-            <a:off x="868680" y="1508760"/>
-            <a:ext cx="6309360" cy="4160520"/>
+            <a:off x="822960" y="1463040"/>
+            <a:ext cx="6565392" cy="4343400"/>
           </a:xfrm>
           <a:prstGeom prst="rect">
             <a:avLst/>
@@ -15497,7 +15501,7 @@
               <a:buNone/>
             </a:pPr>
             <a:r>
-              <a:rPr lang="en-US" sz="2100" dirty="0">
+              <a:rPr lang="en-US" sz="1920" dirty="0">
                 <a:solidFill>
                   <a:srgbClr val="003A63"/>
                 </a:solidFill>
@@ -15507,14 +15511,14 @@
               </a:rPr>
               <a:t>• Define FHIR in practical public health terms.</a:t>
             </a:r>
-            <a:endParaRPr lang="en-US" sz="2100" dirty="0"/>
-          </a:p>
-          <a:p>
-            <a:pPr indent="0" marL="0">
-              <a:buNone/>
-            </a:pPr>
-            <a:r>
-              <a:rPr lang="en-US" sz="2100" dirty="0">
+            <a:endParaRPr lang="en-US" sz="1920" dirty="0"/>
+          </a:p>
+          <a:p>
+            <a:pPr indent="0" marL="0">
+              <a:buNone/>
+            </a:pPr>
+            <a:r>
+              <a:rPr lang="en-US" sz="1920" dirty="0">
                 <a:solidFill>
                   <a:srgbClr val="003A63"/>
                 </a:solidFill>
@@ -15524,14 +15528,14 @@
               </a:rPr>
               <a:t>• Identify FHIR resources commonly relevant to public health AI use cases.</a:t>
             </a:r>
-            <a:endParaRPr lang="en-US" sz="2100" dirty="0"/>
-          </a:p>
-          <a:p>
-            <a:pPr indent="0" marL="0">
-              <a:buNone/>
-            </a:pPr>
-            <a:r>
-              <a:rPr lang="en-US" sz="2100" dirty="0">
+            <a:endParaRPr lang="en-US" sz="1920" dirty="0"/>
+          </a:p>
+          <a:p>
+            <a:pPr indent="0" marL="0">
+              <a:buNone/>
+            </a:pPr>
+            <a:r>
+              <a:rPr lang="en-US" sz="1920" dirty="0">
                 <a:solidFill>
                   <a:srgbClr val="003A63"/>
                 </a:solidFill>
@@ -15541,7 +15545,7 @@
               </a:rPr>
               <a:t>• Explain the role of profiles, implementation guides, and APIs.</a:t>
             </a:r>
-            <a:endParaRPr lang="en-US" sz="2100" dirty="0"/>
+            <a:endParaRPr lang="en-US" sz="1920" dirty="0"/>
           </a:p>
         </p:txBody>
       </p:sp>
@@ -15553,12 +15557,12 @@
         </p:nvSpPr>
         <p:spPr>
           <a:xfrm>
-            <a:off x="7635240" y="1325880"/>
-            <a:ext cx="3474720" cy="1207008"/>
+            <a:off x="7543800" y="1325880"/>
+            <a:ext cx="3611880" cy="1261872"/>
           </a:xfrm>
           <a:prstGeom prst="roundRect">
             <a:avLst>
-              <a:gd name="adj" fmla="val 9091"/>
+              <a:gd name="adj" fmla="val 8696"/>
             </a:avLst>
           </a:prstGeom>
           <a:solidFill>
@@ -15580,8 +15584,8 @@
         </p:nvSpPr>
         <p:spPr>
           <a:xfrm>
-            <a:off x="7799832" y="1472184"/>
-            <a:ext cx="3145536" cy="256032"/>
+            <a:off x="7708392" y="1453896"/>
+            <a:ext cx="3282696" cy="228600"/>
           </a:xfrm>
           <a:prstGeom prst="rect">
             <a:avLst/>
@@ -15597,7 +15601,7 @@
               <a:buNone/>
             </a:pPr>
             <a:r>
-              <a:rPr lang="en-US" sz="1300" b="1" dirty="0">
+              <a:rPr lang="en-US" sz="1220" b="1" dirty="0">
                 <a:solidFill>
                   <a:srgbClr val="0068B7"/>
                 </a:solidFill>
@@ -15607,7 +15611,7 @@
               </a:rPr>
               <a:t>Practice focus</a:t>
             </a:r>
-            <a:endParaRPr lang="en-US" sz="1300" dirty="0"/>
+            <a:endParaRPr lang="en-US" sz="1220" dirty="0"/>
           </a:p>
         </p:txBody>
       </p:sp>
@@ -15619,8 +15623,8 @@
         </p:nvSpPr>
         <p:spPr>
           <a:xfrm>
-            <a:off x="7799832" y="1801368"/>
-            <a:ext cx="3145536" cy="640080"/>
+            <a:off x="7708392" y="1764792"/>
+            <a:ext cx="3282696" cy="749808"/>
           </a:xfrm>
           <a:prstGeom prst="rect">
             <a:avLst/>
@@ -15638,7 +15642,7 @@
               <a:buNone/>
             </a:pPr>
             <a:r>
-              <a:rPr lang="en-US" sz="1320" dirty="0">
+              <a:rPr lang="en-US" sz="1220" dirty="0">
                 <a:solidFill>
                   <a:srgbClr val="17364A"/>
                 </a:solidFill>
@@ -15648,7 +15652,7 @@
               </a:rPr>
               <a:t>Define FHIR in practical public health terms.</a:t>
             </a:r>
-            <a:endParaRPr lang="en-US" sz="1320" dirty="0"/>
+            <a:endParaRPr lang="en-US" sz="1220" dirty="0"/>
           </a:p>
         </p:txBody>
       </p:sp>
@@ -15660,12 +15664,12 @@
         </p:nvSpPr>
         <p:spPr>
           <a:xfrm>
-            <a:off x="7635240" y="2670048"/>
-            <a:ext cx="3474720" cy="1377086"/>
+            <a:off x="7543800" y="2724912"/>
+            <a:ext cx="3611880" cy="1527048"/>
           </a:xfrm>
           <a:prstGeom prst="roundRect">
             <a:avLst>
-              <a:gd name="adj" fmla="val 7968"/>
+              <a:gd name="adj" fmla="val 7186"/>
             </a:avLst>
           </a:prstGeom>
           <a:solidFill>
@@ -15687,8 +15691,8 @@
         </p:nvSpPr>
         <p:spPr>
           <a:xfrm>
-            <a:off x="7799832" y="2816352"/>
-            <a:ext cx="3145536" cy="256032"/>
+            <a:off x="7708392" y="2852928"/>
+            <a:ext cx="3282696" cy="228600"/>
           </a:xfrm>
           <a:prstGeom prst="rect">
             <a:avLst/>
@@ -15704,7 +15708,7 @@
               <a:buNone/>
             </a:pPr>
             <a:r>
-              <a:rPr lang="en-US" sz="1300" b="1" dirty="0">
+              <a:rPr lang="en-US" sz="1220" b="1" dirty="0">
                 <a:solidFill>
                   <a:srgbClr val="0068B7"/>
                 </a:solidFill>
@@ -15714,7 +15718,7 @@
               </a:rPr>
               <a:t>Concept checkpoints</a:t>
             </a:r>
-            <a:endParaRPr lang="en-US" sz="1300" dirty="0"/>
+            <a:endParaRPr lang="en-US" sz="1220" dirty="0"/>
           </a:p>
         </p:txBody>
       </p:sp>
@@ -15726,8 +15730,8 @@
         </p:nvSpPr>
         <p:spPr>
           <a:xfrm>
-            <a:off x="7818120" y="3182112"/>
-            <a:ext cx="3090672" cy="718718"/>
+            <a:off x="7726680" y="3182112"/>
+            <a:ext cx="3227832" cy="960120"/>
           </a:xfrm>
           <a:prstGeom prst="rect">
             <a:avLst/>
@@ -15745,7 +15749,7 @@
               <a:buNone/>
             </a:pPr>
             <a:r>
-              <a:rPr lang="en-US" sz="1220" dirty="0">
+              <a:rPr lang="en-US" sz="1140" dirty="0">
                 <a:solidFill>
                   <a:srgbClr val="17364A"/>
                 </a:solidFill>
@@ -15753,16 +15757,16 @@
                 <a:ea typeface="Aptos" pitchFamily="34" charset="-122"/>
                 <a:cs typeface="Aptos" pitchFamily="34" charset="-120"/>
               </a:rPr>
-              <a:t>Assess whether FHIR-accessible data are complete and fit for a.</a:t>
-            </a:r>
-            <a:endParaRPr lang="en-US" sz="1220" dirty="0"/>
-          </a:p>
-          <a:p>
-            <a:pPr indent="0" marL="0">
-              <a:buNone/>
-            </a:pPr>
-            <a:r>
-              <a:rPr lang="en-US" sz="1220" dirty="0">
+              <a:t>Assess whether FHIR-accessible data are complete.</a:t>
+            </a:r>
+            <a:endParaRPr lang="en-US" sz="1140" dirty="0"/>
+          </a:p>
+          <a:p>
+            <a:pPr indent="0" marL="0">
+              <a:buNone/>
+            </a:pPr>
+            <a:r>
+              <a:rPr lang="en-US" sz="1140" dirty="0">
                 <a:solidFill>
                   <a:srgbClr val="17364A"/>
                 </a:solidFill>
@@ -15770,9 +15774,9 @@
                 <a:ea typeface="Aptos" pitchFamily="34" charset="-122"/>
                 <a:cs typeface="Aptos" pitchFamily="34" charset="-120"/>
               </a:rPr>
-              <a:t>Produce a FHIR data needs worksheet for an AI-supported workflow.</a:t>
-            </a:r>
-            <a:endParaRPr lang="en-US" sz="1220" dirty="0"/>
+              <a:t>Produce a FHIR data needs worksheet for an.</a:t>
+            </a:r>
+            <a:endParaRPr lang="en-US" sz="1140" dirty="0"/>
           </a:p>
         </p:txBody>
       </p:sp>
@@ -15784,12 +15788,12 @@
         </p:nvSpPr>
         <p:spPr>
           <a:xfrm>
-            <a:off x="7635240" y="4184294"/>
-            <a:ext cx="3474720" cy="1466698"/>
+            <a:off x="7543800" y="4389120"/>
+            <a:ext cx="3611880" cy="1261872"/>
           </a:xfrm>
           <a:prstGeom prst="roundRect">
             <a:avLst>
-              <a:gd name="adj" fmla="val 7481"/>
+              <a:gd name="adj" fmla="val 8696"/>
             </a:avLst>
           </a:prstGeom>
           <a:solidFill>
@@ -15811,8 +15815,8 @@
         </p:nvSpPr>
         <p:spPr>
           <a:xfrm>
-            <a:off x="7799832" y="4330598"/>
-            <a:ext cx="3145536" cy="256032"/>
+            <a:off x="7708392" y="4517136"/>
+            <a:ext cx="3282696" cy="228600"/>
           </a:xfrm>
           <a:prstGeom prst="rect">
             <a:avLst/>
@@ -15828,7 +15832,7 @@
               <a:buNone/>
             </a:pPr>
             <a:r>
-              <a:rPr lang="en-US" sz="1300" b="1" dirty="0">
+              <a:rPr lang="en-US" sz="1220" b="1" dirty="0">
                 <a:solidFill>
                   <a:srgbClr val="0068B7"/>
                 </a:solidFill>
@@ -15838,7 +15842,7 @@
               </a:rPr>
               <a:t>What to produce</a:t>
             </a:r>
-            <a:endParaRPr lang="en-US" sz="1300" dirty="0"/>
+            <a:endParaRPr lang="en-US" sz="1220" dirty="0"/>
           </a:p>
         </p:txBody>
       </p:sp>
@@ -15850,8 +15854,8 @@
         </p:nvSpPr>
         <p:spPr>
           <a:xfrm>
-            <a:off x="7799832" y="4659782"/>
-            <a:ext cx="3145536" cy="899770"/>
+            <a:off x="7708392" y="4828032"/>
+            <a:ext cx="3282696" cy="749808"/>
           </a:xfrm>
           <a:prstGeom prst="rect">
             <a:avLst/>
@@ -15869,7 +15873,7 @@
               <a:buNone/>
             </a:pPr>
             <a:r>
-              <a:rPr lang="en-US" sz="1320" dirty="0">
+              <a:rPr lang="en-US" sz="1220" dirty="0">
                 <a:solidFill>
                   <a:srgbClr val="17364A"/>
                 </a:solidFill>
@@ -15877,9 +15881,9 @@
                 <a:ea typeface="Aptos" pitchFamily="34" charset="-122"/>
                 <a:cs typeface="Aptos" pitchFamily="34" charset="-120"/>
               </a:rPr>
-              <a:t>Use the assignment to test whether you can explain the concept, apply it to a realistic public health situation, and identify what would need review before the work moves forward.</a:t>
-            </a:r>
-            <a:endParaRPr lang="en-US" sz="1320" dirty="0"/>
+              <a:t>Use the assignment to test whether you can explain the concept, apply it to a.</a:t>
+            </a:r>
+            <a:endParaRPr lang="en-US" sz="1220" dirty="0"/>
           </a:p>
         </p:txBody>
       </p:sp>
@@ -16170,8 +16174,8 @@
         </p:nvSpPr>
         <p:spPr>
           <a:xfrm>
-            <a:off x="868680" y="1508760"/>
-            <a:ext cx="6309360" cy="4160520"/>
+            <a:off x="822960" y="1463040"/>
+            <a:ext cx="6565392" cy="4343400"/>
           </a:xfrm>
           <a:prstGeom prst="rect">
             <a:avLst/>
@@ -16189,7 +16193,7 @@
               <a:buNone/>
             </a:pPr>
             <a:r>
-              <a:rPr lang="en-US" sz="2100" dirty="0">
+              <a:rPr lang="en-US" sz="1920" dirty="0">
                 <a:solidFill>
                   <a:srgbClr val="003A63"/>
                 </a:solidFill>
@@ -16197,16 +16201,16 @@
                 <a:ea typeface="Aptos" pitchFamily="34" charset="-122"/>
                 <a:cs typeface="Aptos" pitchFamily="34" charset="-120"/>
               </a:rPr>
-              <a:t>• FHIR is increasingly important for public health because it supports structured, API-based.</a:t>
-            </a:r>
-            <a:endParaRPr lang="en-US" sz="2100" dirty="0"/>
-          </a:p>
-          <a:p>
-            <a:pPr indent="0" marL="0">
-              <a:buNone/>
-            </a:pPr>
-            <a:r>
-              <a:rPr lang="en-US" sz="2100" dirty="0">
+              <a:t>• FHIR is increasingly important for public health because it supports.</a:t>
+            </a:r>
+            <a:endParaRPr lang="en-US" sz="1920" dirty="0"/>
+          </a:p>
+          <a:p>
+            <a:pPr indent="0" marL="0">
+              <a:buNone/>
+            </a:pPr>
+            <a:r>
+              <a:rPr lang="en-US" sz="1920" dirty="0">
                 <a:solidFill>
                   <a:srgbClr val="003A63"/>
                 </a:solidFill>
@@ -16214,16 +16218,16 @@
                 <a:ea typeface="Aptos" pitchFamily="34" charset="-122"/>
                 <a:cs typeface="Aptos" pitchFamily="34" charset="-120"/>
               </a:rPr>
-              <a:t>• Public health staff do not need to become FHIR developers to participate in AI planning, but.</a:t>
-            </a:r>
-            <a:endParaRPr lang="en-US" sz="2100" dirty="0"/>
-          </a:p>
-          <a:p>
-            <a:pPr indent="0" marL="0">
-              <a:buNone/>
-            </a:pPr>
-            <a:r>
-              <a:rPr lang="en-US" sz="2100" dirty="0">
+              <a:t>• Public health staff do not need to become FHIR developers to participate in.</a:t>
+            </a:r>
+            <a:endParaRPr lang="en-US" sz="1920" dirty="0"/>
+          </a:p>
+          <a:p>
+            <a:pPr indent="0" marL="0">
+              <a:buNone/>
+            </a:pPr>
+            <a:r>
+              <a:rPr lang="en-US" sz="1920" dirty="0">
                 <a:solidFill>
                   <a:srgbClr val="003A63"/>
                 </a:solidFill>
@@ -16231,9 +16235,9 @@
                 <a:ea typeface="Aptos" pitchFamily="34" charset="-122"/>
                 <a:cs typeface="Aptos" pitchFamily="34" charset="-120"/>
               </a:rPr>
-              <a:t>• This module explains how FHIR resources, profiles, implementation guides, and APIs may support.</a:t>
-            </a:r>
-            <a:endParaRPr lang="en-US" sz="2100" dirty="0"/>
+              <a:t>• This module explains how FHIR resources, profiles, implementation guides,.</a:t>
+            </a:r>
+            <a:endParaRPr lang="en-US" sz="1920" dirty="0"/>
           </a:p>
         </p:txBody>
       </p:sp>
@@ -16245,12 +16249,12 @@
         </p:nvSpPr>
         <p:spPr>
           <a:xfrm>
-            <a:off x="7635240" y="1325880"/>
-            <a:ext cx="3474720" cy="1255471"/>
+            <a:off x="7543800" y="1325880"/>
+            <a:ext cx="3611880" cy="1261872"/>
           </a:xfrm>
           <a:prstGeom prst="roundRect">
             <a:avLst>
-              <a:gd name="adj" fmla="val 8740"/>
+              <a:gd name="adj" fmla="val 8696"/>
             </a:avLst>
           </a:prstGeom>
           <a:solidFill>
@@ -16272,8 +16276,8 @@
         </p:nvSpPr>
         <p:spPr>
           <a:xfrm>
-            <a:off x="7799832" y="1472184"/>
-            <a:ext cx="3145536" cy="256032"/>
+            <a:off x="7708392" y="1453896"/>
+            <a:ext cx="3282696" cy="228600"/>
           </a:xfrm>
           <a:prstGeom prst="rect">
             <a:avLst/>
@@ -16289,7 +16293,7 @@
               <a:buNone/>
             </a:pPr>
             <a:r>
-              <a:rPr lang="en-US" sz="1300" b="1" dirty="0">
+              <a:rPr lang="en-US" sz="1220" b="1" dirty="0">
                 <a:solidFill>
                   <a:srgbClr val="0068B7"/>
                 </a:solidFill>
@@ -16299,7 +16303,7 @@
               </a:rPr>
               <a:t>Core concept</a:t>
             </a:r>
-            <a:endParaRPr lang="en-US" sz="1300" dirty="0"/>
+            <a:endParaRPr lang="en-US" sz="1220" dirty="0"/>
           </a:p>
         </p:txBody>
       </p:sp>
@@ -16311,8 +16315,8 @@
         </p:nvSpPr>
         <p:spPr>
           <a:xfrm>
-            <a:off x="7799832" y="1801368"/>
-            <a:ext cx="3145536" cy="688543"/>
+            <a:off x="7708392" y="1764792"/>
+            <a:ext cx="3282696" cy="749808"/>
           </a:xfrm>
           <a:prstGeom prst="rect">
             <a:avLst/>
@@ -16330,7 +16334,7 @@
               <a:buNone/>
             </a:pPr>
             <a:r>
-              <a:rPr lang="en-US" sz="1320" dirty="0">
+              <a:rPr lang="en-US" sz="1220" dirty="0">
                 <a:solidFill>
                   <a:srgbClr val="17364A"/>
                 </a:solidFill>
@@ -16338,9 +16342,9 @@
                 <a:ea typeface="Aptos" pitchFamily="34" charset="-122"/>
                 <a:cs typeface="Aptos" pitchFamily="34" charset="-120"/>
               </a:rPr>
-              <a:t>FHIR is increasingly important for public health because it supports structured, API-based access to.</a:t>
-            </a:r>
-            <a:endParaRPr lang="en-US" sz="1320" dirty="0"/>
+              <a:t>FHIR is increasingly important for public health because it supports structured,.</a:t>
+            </a:r>
+            <a:endParaRPr lang="en-US" sz="1220" dirty="0"/>
           </a:p>
         </p:txBody>
       </p:sp>
@@ -16352,12 +16356,12 @@
         </p:nvSpPr>
         <p:spPr>
           <a:xfrm>
-            <a:off x="7635240" y="2718511"/>
-            <a:ext cx="3474720" cy="1328623"/>
+            <a:off x="7543800" y="2724912"/>
+            <a:ext cx="3611880" cy="1527048"/>
           </a:xfrm>
           <a:prstGeom prst="roundRect">
             <a:avLst>
-              <a:gd name="adj" fmla="val 8259"/>
+              <a:gd name="adj" fmla="val 7186"/>
             </a:avLst>
           </a:prstGeom>
           <a:solidFill>
@@ -16379,8 +16383,8 @@
         </p:nvSpPr>
         <p:spPr>
           <a:xfrm>
-            <a:off x="7799832" y="2864815"/>
-            <a:ext cx="3145536" cy="256032"/>
+            <a:off x="7708392" y="2852928"/>
+            <a:ext cx="3282696" cy="228600"/>
           </a:xfrm>
           <a:prstGeom prst="rect">
             <a:avLst/>
@@ -16396,7 +16400,7 @@
               <a:buNone/>
             </a:pPr>
             <a:r>
-              <a:rPr lang="en-US" sz="1300" b="1" dirty="0">
+              <a:rPr lang="en-US" sz="1220" b="1" dirty="0">
                 <a:solidFill>
                   <a:srgbClr val="0068B7"/>
                 </a:solidFill>
@@ -16406,7 +16410,7 @@
               </a:rPr>
               <a:t>Concept checkpoints</a:t>
             </a:r>
-            <a:endParaRPr lang="en-US" sz="1300" dirty="0"/>
+            <a:endParaRPr lang="en-US" sz="1220" dirty="0"/>
           </a:p>
         </p:txBody>
       </p:sp>
@@ -16418,8 +16422,8 @@
         </p:nvSpPr>
         <p:spPr>
           <a:xfrm>
-            <a:off x="7818120" y="3230575"/>
-            <a:ext cx="3090672" cy="670255"/>
+            <a:off x="7726680" y="3182112"/>
+            <a:ext cx="3227832" cy="960120"/>
           </a:xfrm>
           <a:prstGeom prst="rect">
             <a:avLst/>
@@ -16437,7 +16441,7 @@
               <a:buNone/>
             </a:pPr>
             <a:r>
-              <a:rPr lang="en-US" sz="1220" dirty="0">
+              <a:rPr lang="en-US" sz="1140" dirty="0">
                 <a:solidFill>
                   <a:srgbClr val="17364A"/>
                 </a:solidFill>
@@ -16445,16 +16449,16 @@
                 <a:ea typeface="Aptos" pitchFamily="34" charset="-122"/>
                 <a:cs typeface="Aptos" pitchFamily="34" charset="-120"/>
               </a:rPr>
-              <a:t>FHIR is increasingly important for public health because it.</a:t>
-            </a:r>
-            <a:endParaRPr lang="en-US" sz="1220" dirty="0"/>
-          </a:p>
-          <a:p>
-            <a:pPr indent="0" marL="0">
-              <a:buNone/>
-            </a:pPr>
-            <a:r>
-              <a:rPr lang="en-US" sz="1220" dirty="0">
+              <a:t>FHIR is increasingly important for public health.</a:t>
+            </a:r>
+            <a:endParaRPr lang="en-US" sz="1140" dirty="0"/>
+          </a:p>
+          <a:p>
+            <a:pPr indent="0" marL="0">
+              <a:buNone/>
+            </a:pPr>
+            <a:r>
+              <a:rPr lang="en-US" sz="1140" dirty="0">
                 <a:solidFill>
                   <a:srgbClr val="17364A"/>
                 </a:solidFill>
@@ -16462,16 +16466,16 @@
                 <a:ea typeface="Aptos" pitchFamily="34" charset="-122"/>
                 <a:cs typeface="Aptos" pitchFamily="34" charset="-120"/>
               </a:rPr>
-              <a:t>Public health staff do not need to become FHIR developers to.</a:t>
-            </a:r>
-            <a:endParaRPr lang="en-US" sz="1220" dirty="0"/>
-          </a:p>
-          <a:p>
-            <a:pPr indent="0" marL="0">
-              <a:buNone/>
-            </a:pPr>
-            <a:r>
-              <a:rPr lang="en-US" sz="1220" dirty="0">
+              <a:t>Public health staff do not need to become FHIR.</a:t>
+            </a:r>
+            <a:endParaRPr lang="en-US" sz="1140" dirty="0"/>
+          </a:p>
+          <a:p>
+            <a:pPr indent="0" marL="0">
+              <a:buNone/>
+            </a:pPr>
+            <a:r>
+              <a:rPr lang="en-US" sz="1140" dirty="0">
                 <a:solidFill>
                   <a:srgbClr val="17364A"/>
                 </a:solidFill>
@@ -16479,9 +16483,9 @@
                 <a:ea typeface="Aptos" pitchFamily="34" charset="-122"/>
                 <a:cs typeface="Aptos" pitchFamily="34" charset="-120"/>
               </a:rPr>
-              <a:t>This module explains how FHIR resources, profiles, implementation.</a:t>
-            </a:r>
-            <a:endParaRPr lang="en-US" sz="1220" dirty="0"/>
+              <a:t>This module explains how FHIR resources, profiles,.</a:t>
+            </a:r>
+            <a:endParaRPr lang="en-US" sz="1140" dirty="0"/>
           </a:p>
         </p:txBody>
       </p:sp>
@@ -16493,12 +16497,12 @@
         </p:nvSpPr>
         <p:spPr>
           <a:xfrm>
-            <a:off x="7635240" y="4184294"/>
-            <a:ext cx="3474720" cy="1466698"/>
+            <a:off x="7543800" y="4389120"/>
+            <a:ext cx="3611880" cy="1261872"/>
           </a:xfrm>
           <a:prstGeom prst="roundRect">
             <a:avLst>
-              <a:gd name="adj" fmla="val 7481"/>
+              <a:gd name="adj" fmla="val 8696"/>
             </a:avLst>
           </a:prstGeom>
           <a:solidFill>
@@ -16520,8 +16524,8 @@
         </p:nvSpPr>
         <p:spPr>
           <a:xfrm>
-            <a:off x="7799832" y="4330598"/>
-            <a:ext cx="3145536" cy="256032"/>
+            <a:off x="7708392" y="4517136"/>
+            <a:ext cx="3282696" cy="228600"/>
           </a:xfrm>
           <a:prstGeom prst="rect">
             <a:avLst/>
@@ -16537,7 +16541,7 @@
               <a:buNone/>
             </a:pPr>
             <a:r>
-              <a:rPr lang="en-US" sz="1300" b="1" dirty="0">
+              <a:rPr lang="en-US" sz="1220" b="1" dirty="0">
                 <a:solidFill>
                   <a:srgbClr val="0068B7"/>
                 </a:solidFill>
@@ -16547,7 +16551,7 @@
               </a:rPr>
               <a:t>Apply it</a:t>
             </a:r>
-            <a:endParaRPr lang="en-US" sz="1300" dirty="0"/>
+            <a:endParaRPr lang="en-US" sz="1220" dirty="0"/>
           </a:p>
         </p:txBody>
       </p:sp>
@@ -16559,8 +16563,8 @@
         </p:nvSpPr>
         <p:spPr>
           <a:xfrm>
-            <a:off x="7799832" y="4659782"/>
-            <a:ext cx="3145536" cy="899770"/>
+            <a:off x="7708392" y="4828032"/>
+            <a:ext cx="3282696" cy="749808"/>
           </a:xfrm>
           <a:prstGeom prst="rect">
             <a:avLst/>
@@ -16578,7 +16582,7 @@
               <a:buNone/>
             </a:pPr>
             <a:r>
-              <a:rPr lang="en-US" sz="1320" dirty="0">
+              <a:rPr lang="en-US" sz="1220" dirty="0">
                 <a:solidFill>
                   <a:srgbClr val="17364A"/>
                 </a:solidFill>
@@ -16586,9 +16590,9 @@
                 <a:ea typeface="Aptos" pitchFamily="34" charset="-122"/>
                 <a:cs typeface="Aptos" pitchFamily="34" charset="-120"/>
               </a:rPr>
-              <a:t>Connect the concept to public health purpose, responsible use, required safeguards, documentation, and the next action a department should take.</a:t>
-            </a:r>
-            <a:endParaRPr lang="en-US" sz="1320" dirty="0"/>
+              <a:t>Connect the concept to public health purpose, responsible use, required.</a:t>
+            </a:r>
+            <a:endParaRPr lang="en-US" sz="1220" dirty="0"/>
           </a:p>
         </p:txBody>
       </p:sp>
@@ -16879,8 +16883,8 @@
         </p:nvSpPr>
         <p:spPr>
           <a:xfrm>
-            <a:off x="868680" y="1508760"/>
-            <a:ext cx="6309360" cy="4160520"/>
+            <a:off x="822960" y="1463040"/>
+            <a:ext cx="6565392" cy="4343400"/>
           </a:xfrm>
           <a:prstGeom prst="rect">
             <a:avLst/>
@@ -16898,7 +16902,7 @@
               <a:buNone/>
             </a:pPr>
             <a:r>
-              <a:rPr lang="en-US" sz="2100" dirty="0">
+              <a:rPr lang="en-US" sz="1920" dirty="0">
                 <a:solidFill>
                   <a:srgbClr val="003A63"/>
                 </a:solidFill>
@@ -16908,14 +16912,14 @@
               </a:rPr>
               <a:t>• This national-level module is intended for training and planning purposes.</a:t>
             </a:r>
-            <a:endParaRPr lang="en-US" sz="2100" dirty="0"/>
-          </a:p>
-          <a:p>
-            <a:pPr indent="0" marL="0">
-              <a:buNone/>
-            </a:pPr>
-            <a:r>
-              <a:rPr lang="en-US" sz="2100" dirty="0">
+            <a:endParaRPr lang="en-US" sz="1920" dirty="0"/>
+          </a:p>
+          <a:p>
+            <a:pPr indent="0" marL="0">
+              <a:buNone/>
+            </a:pPr>
+            <a:r>
+              <a:rPr lang="en-US" sz="1920" dirty="0">
                 <a:solidFill>
                   <a:srgbClr val="003A63"/>
                 </a:solidFill>
@@ -16923,16 +16927,16 @@
                 <a:ea typeface="Aptos" pitchFamily="34" charset="-122"/>
                 <a:cs typeface="Aptos" pitchFamily="34" charset="-120"/>
               </a:rPr>
-              <a:t>• It does not replace legal, privacy, procurement, civil rights, records, or agency policy review.</a:t>
-            </a:r>
-            <a:endParaRPr lang="en-US" sz="2100" dirty="0"/>
-          </a:p>
-          <a:p>
-            <a:pPr indent="0" marL="0">
-              <a:buNone/>
-            </a:pPr>
-            <a:r>
-              <a:rPr lang="en-US" sz="2100" dirty="0">
+              <a:t>• It does not replace legal, privacy, procurement, civil rights, records, or.</a:t>
+            </a:r>
+            <a:endParaRPr lang="en-US" sz="1920" dirty="0"/>
+          </a:p>
+          <a:p>
+            <a:pPr indent="0" marL="0">
+              <a:buNone/>
+            </a:pPr>
+            <a:r>
+              <a:rPr lang="en-US" sz="1920" dirty="0">
                 <a:solidFill>
                   <a:srgbClr val="003A63"/>
                 </a:solidFill>
@@ -16940,9 +16944,9 @@
                 <a:ea typeface="Aptos" pitchFamily="34" charset="-122"/>
                 <a:cs typeface="Aptos" pitchFamily="34" charset="-120"/>
               </a:rPr>
-              <a:t>• Learners should confirm applicable requirements in their own jurisdiction and organization.</a:t>
-            </a:r>
-            <a:endParaRPr lang="en-US" sz="2100" dirty="0"/>
+              <a:t>• Learners should confirm applicable requirements in their own jurisdiction.</a:t>
+            </a:r>
+            <a:endParaRPr lang="en-US" sz="1920" dirty="0"/>
           </a:p>
         </p:txBody>
       </p:sp>
@@ -16954,12 +16958,12 @@
         </p:nvSpPr>
         <p:spPr>
           <a:xfrm>
-            <a:off x="7635240" y="1325880"/>
-            <a:ext cx="3474720" cy="1207008"/>
+            <a:off x="7543800" y="1325880"/>
+            <a:ext cx="3611880" cy="1261872"/>
           </a:xfrm>
           <a:prstGeom prst="roundRect">
             <a:avLst>
-              <a:gd name="adj" fmla="val 9091"/>
+              <a:gd name="adj" fmla="val 8696"/>
             </a:avLst>
           </a:prstGeom>
           <a:solidFill>
@@ -16981,8 +16985,8 @@
         </p:nvSpPr>
         <p:spPr>
           <a:xfrm>
-            <a:off x="7799832" y="1472184"/>
-            <a:ext cx="3145536" cy="256032"/>
+            <a:off x="7708392" y="1453896"/>
+            <a:ext cx="3282696" cy="228600"/>
           </a:xfrm>
           <a:prstGeom prst="rect">
             <a:avLst/>
@@ -16998,7 +17002,7 @@
               <a:buNone/>
             </a:pPr>
             <a:r>
-              <a:rPr lang="en-US" sz="1300" b="1" dirty="0">
+              <a:rPr lang="en-US" sz="1220" b="1" dirty="0">
                 <a:solidFill>
                   <a:srgbClr val="0068B7"/>
                 </a:solidFill>
@@ -17008,7 +17012,7 @@
               </a:rPr>
               <a:t>Governance lens</a:t>
             </a:r>
-            <a:endParaRPr lang="en-US" sz="1300" dirty="0"/>
+            <a:endParaRPr lang="en-US" sz="1220" dirty="0"/>
           </a:p>
         </p:txBody>
       </p:sp>
@@ -17020,8 +17024,8 @@
         </p:nvSpPr>
         <p:spPr>
           <a:xfrm>
-            <a:off x="7799832" y="1801368"/>
-            <a:ext cx="3145536" cy="640080"/>
+            <a:off x="7708392" y="1764792"/>
+            <a:ext cx="3282696" cy="749808"/>
           </a:xfrm>
           <a:prstGeom prst="rect">
             <a:avLst/>
@@ -17039,7 +17043,7 @@
               <a:buNone/>
             </a:pPr>
             <a:r>
-              <a:rPr lang="en-US" sz="1320" dirty="0">
+              <a:rPr lang="en-US" sz="1220" dirty="0">
                 <a:solidFill>
                   <a:srgbClr val="17364A"/>
                 </a:solidFill>
@@ -17049,7 +17053,7 @@
               </a:rPr>
               <a:t>This national-level module is intended for training and planning purposes.</a:t>
             </a:r>
-            <a:endParaRPr lang="en-US" sz="1320" dirty="0"/>
+            <a:endParaRPr lang="en-US" sz="1220" dirty="0"/>
           </a:p>
         </p:txBody>
       </p:sp>
@@ -17061,12 +17065,12 @@
         </p:nvSpPr>
         <p:spPr>
           <a:xfrm>
-            <a:off x="7635240" y="2670048"/>
-            <a:ext cx="3474720" cy="1377086"/>
+            <a:off x="7543800" y="2724912"/>
+            <a:ext cx="3611880" cy="1527048"/>
           </a:xfrm>
           <a:prstGeom prst="roundRect">
             <a:avLst>
-              <a:gd name="adj" fmla="val 7968"/>
+              <a:gd name="adj" fmla="val 7186"/>
             </a:avLst>
           </a:prstGeom>
           <a:solidFill>
@@ -17088,24 +17092,26 @@
         </p:nvSpPr>
         <p:spPr>
           <a:xfrm>
-            <a:off x="7799832" y="2798064"/>
-            <a:ext cx="3145536" cy="237744"/>
-          </a:xfrm>
-          <a:prstGeom prst="rect">
-            <a:avLst/>
-          </a:prstGeom>
-          <a:noFill/>
-          <a:ln/>
-        </p:spPr>
-        <p:txBody>
-          <a:bodyPr wrap="square" lIns="0" tIns="0" rIns="0" bIns="0" rtlCol="0" anchor="ctr"/>
-          <a:lstStyle/>
-          <a:p>
-            <a:pPr indent="0" marL="0">
-              <a:buNone/>
-            </a:pPr>
-            <a:r>
-              <a:rPr lang="en-US" sz="1250" b="1" dirty="0">
+            <a:off x="7708392" y="2852928"/>
+            <a:ext cx="3282696" cy="219456"/>
+          </a:xfrm>
+          <a:prstGeom prst="rect">
+            <a:avLst/>
+          </a:prstGeom>
+          <a:noFill/>
+          <a:ln/>
+        </p:spPr>
+        <p:txBody>
+          <a:bodyPr wrap="square" lIns="0" tIns="0" rIns="0" bIns="0" rtlCol="0" anchor="ctr">
+            <a:normAutofit/>
+          </a:bodyPr>
+          <a:lstStyle/>
+          <a:p>
+            <a:pPr indent="0" marL="0">
+              <a:buNone/>
+            </a:pPr>
+            <a:r>
+              <a:rPr lang="en-US" sz="1160" b="1" dirty="0">
                 <a:solidFill>
                   <a:srgbClr val="0068B7"/>
                 </a:solidFill>
@@ -17115,7 +17121,7 @@
               </a:rPr>
               <a:t>Governance pathway</a:t>
             </a:r>
-            <a:endParaRPr lang="en-US" sz="1250" dirty="0"/>
+            <a:endParaRPr lang="en-US" sz="1160" dirty="0"/>
           </a:p>
         </p:txBody>
       </p:sp>
@@ -17127,7 +17133,7 @@
         </p:nvSpPr>
         <p:spPr>
           <a:xfrm>
-            <a:off x="8763000" y="3351276"/>
+            <a:off x="8717280" y="3406140"/>
             <a:ext cx="164592" cy="0"/>
           </a:xfrm>
           <a:prstGeom prst="line">
@@ -17150,8 +17156,8 @@
         </p:nvSpPr>
         <p:spPr>
           <a:xfrm>
-            <a:off x="7872984" y="3200400"/>
-            <a:ext cx="890016" cy="301752"/>
+            <a:off x="7781544" y="3255264"/>
+            <a:ext cx="935736" cy="301752"/>
           </a:xfrm>
           <a:prstGeom prst="roundRect">
             <a:avLst>
@@ -17177,8 +17183,8 @@
         </p:nvSpPr>
         <p:spPr>
           <a:xfrm>
-            <a:off x="7909560" y="3273552"/>
-            <a:ext cx="816864" cy="146304"/>
+            <a:off x="7818120" y="3328416"/>
+            <a:ext cx="862584" cy="146304"/>
           </a:xfrm>
           <a:prstGeom prst="rect">
             <a:avLst/>
@@ -17218,7 +17224,7 @@
         </p:nvSpPr>
         <p:spPr>
           <a:xfrm>
-            <a:off x="9817608" y="3351276"/>
+            <a:off x="9817608" y="3406140"/>
             <a:ext cx="164592" cy="0"/>
           </a:xfrm>
           <a:prstGeom prst="line">
@@ -17241,8 +17247,8 @@
         </p:nvSpPr>
         <p:spPr>
           <a:xfrm>
-            <a:off x="8927592" y="3200400"/>
-            <a:ext cx="890016" cy="301752"/>
+            <a:off x="8881872" y="3255264"/>
+            <a:ext cx="935736" cy="301752"/>
           </a:xfrm>
           <a:prstGeom prst="roundRect">
             <a:avLst>
@@ -17268,8 +17274,8 @@
         </p:nvSpPr>
         <p:spPr>
           <a:xfrm>
-            <a:off x="8964168" y="3273552"/>
-            <a:ext cx="816864" cy="146304"/>
+            <a:off x="8918448" y="3328416"/>
+            <a:ext cx="862584" cy="146304"/>
           </a:xfrm>
           <a:prstGeom prst="rect">
             <a:avLst/>
@@ -17309,8 +17315,8 @@
         </p:nvSpPr>
         <p:spPr>
           <a:xfrm>
-            <a:off x="9982200" y="3200400"/>
-            <a:ext cx="890016" cy="301752"/>
+            <a:off x="9982200" y="3255264"/>
+            <a:ext cx="935736" cy="301752"/>
           </a:xfrm>
           <a:prstGeom prst="roundRect">
             <a:avLst>
@@ -17336,8 +17342,8 @@
         </p:nvSpPr>
         <p:spPr>
           <a:xfrm>
-            <a:off x="10018776" y="3273552"/>
-            <a:ext cx="816864" cy="146304"/>
+            <a:off x="10018776" y="3328416"/>
+            <a:ext cx="862584" cy="146304"/>
           </a:xfrm>
           <a:prstGeom prst="rect">
             <a:avLst/>
@@ -17377,8 +17383,8 @@
         </p:nvSpPr>
         <p:spPr>
           <a:xfrm>
-            <a:off x="7854696" y="3694176"/>
-            <a:ext cx="3035808" cy="206654"/>
+            <a:off x="7763256" y="3749040"/>
+            <a:ext cx="3172968" cy="356616"/>
           </a:xfrm>
           <a:prstGeom prst="rect">
             <a:avLst/>
@@ -17396,7 +17402,7 @@
               <a:buNone/>
             </a:pPr>
             <a:r>
-              <a:rPr lang="en-US" sz="1120" dirty="0">
+              <a:rPr lang="en-US" sz="1040" dirty="0">
                 <a:solidFill>
                   <a:srgbClr val="17364A"/>
                 </a:solidFill>
@@ -17404,9 +17410,9 @@
                 <a:ea typeface="Aptos" pitchFamily="34" charset="-122"/>
                 <a:cs typeface="Aptos" pitchFamily="34" charset="-120"/>
               </a:rPr>
-              <a:t>A proposed AI use should move through documented review before it becomes an operational workflow.</a:t>
-            </a:r>
-            <a:endParaRPr lang="en-US" sz="1120" dirty="0"/>
+              <a:t>A proposed AI use should move through documented review before it.</a:t>
+            </a:r>
+            <a:endParaRPr lang="en-US" sz="1040" dirty="0"/>
           </a:p>
         </p:txBody>
       </p:sp>
@@ -17418,12 +17424,12 @@
         </p:nvSpPr>
         <p:spPr>
           <a:xfrm>
-            <a:off x="7635240" y="4184294"/>
-            <a:ext cx="3474720" cy="1466698"/>
+            <a:off x="7543800" y="4389120"/>
+            <a:ext cx="3611880" cy="1261872"/>
           </a:xfrm>
           <a:prstGeom prst="roundRect">
             <a:avLst>
-              <a:gd name="adj" fmla="val 7481"/>
+              <a:gd name="adj" fmla="val 8696"/>
             </a:avLst>
           </a:prstGeom>
           <a:solidFill>
@@ -17445,8 +17451,8 @@
         </p:nvSpPr>
         <p:spPr>
           <a:xfrm>
-            <a:off x="7799832" y="4330598"/>
-            <a:ext cx="3145536" cy="256032"/>
+            <a:off x="7708392" y="4517136"/>
+            <a:ext cx="3282696" cy="228600"/>
           </a:xfrm>
           <a:prstGeom prst="rect">
             <a:avLst/>
@@ -17462,7 +17468,7 @@
               <a:buNone/>
             </a:pPr>
             <a:r>
-              <a:rPr lang="en-US" sz="1300" b="1" dirty="0">
+              <a:rPr lang="en-US" sz="1220" b="1" dirty="0">
                 <a:solidFill>
                   <a:srgbClr val="0068B7"/>
                 </a:solidFill>
@@ -17472,7 +17478,7 @@
               </a:rPr>
               <a:t>What to document</a:t>
             </a:r>
-            <a:endParaRPr lang="en-US" sz="1300" dirty="0"/>
+            <a:endParaRPr lang="en-US" sz="1220" dirty="0"/>
           </a:p>
         </p:txBody>
       </p:sp>
@@ -17484,8 +17490,8 @@
         </p:nvSpPr>
         <p:spPr>
           <a:xfrm>
-            <a:off x="7799832" y="4659782"/>
-            <a:ext cx="3145536" cy="899770"/>
+            <a:off x="7708392" y="4828032"/>
+            <a:ext cx="3282696" cy="749808"/>
           </a:xfrm>
           <a:prstGeom prst="rect">
             <a:avLst/>
@@ -17503,7 +17509,7 @@
               <a:buNone/>
             </a:pPr>
             <a:r>
-              <a:rPr lang="en-US" sz="1320" dirty="0">
+              <a:rPr lang="en-US" sz="1220" dirty="0">
                 <a:solidFill>
                   <a:srgbClr val="17364A"/>
                 </a:solidFill>
@@ -17511,9 +17517,9 @@
                 <a:ea typeface="Aptos" pitchFamily="34" charset="-122"/>
                 <a:cs typeface="Aptos" pitchFamily="34" charset="-120"/>
               </a:rPr>
-              <a:t>Translate this concept into clear decision rights, review steps, documentation expectations, and escalation paths before an AI-supported workflow is approved.</a:t>
-            </a:r>
-            <a:endParaRPr lang="en-US" sz="1320" dirty="0"/>
+              <a:t>Translate this concept into clear decision rights, review steps, documentation.</a:t>
+            </a:r>
+            <a:endParaRPr lang="en-US" sz="1220" dirty="0"/>
           </a:p>
         </p:txBody>
       </p:sp>
@@ -17804,8 +17810,8 @@
         </p:nvSpPr>
         <p:spPr>
           <a:xfrm>
-            <a:off x="868680" y="1508760"/>
-            <a:ext cx="6309360" cy="4160520"/>
+            <a:off x="822960" y="1463040"/>
+            <a:ext cx="6565392" cy="4343400"/>
           </a:xfrm>
           <a:prstGeom prst="rect">
             <a:avLst/>
@@ -17823,7 +17829,7 @@
               <a:buNone/>
             </a:pPr>
             <a:r>
-              <a:rPr lang="en-US" sz="2100" dirty="0">
+              <a:rPr lang="en-US" sz="1920" dirty="0">
                 <a:solidFill>
                   <a:srgbClr val="003A63"/>
                 </a:solidFill>
@@ -17831,16 +17837,16 @@
                 <a:ea typeface="Aptos" pitchFamily="34" charset="-122"/>
                 <a:cs typeface="Aptos" pitchFamily="34" charset="-120"/>
               </a:rPr>
-              <a:t>• FHIR matters for AI because it may make clinical and public health data more accessible,.</a:t>
-            </a:r>
-            <a:endParaRPr lang="en-US" sz="2100" dirty="0"/>
-          </a:p>
-          <a:p>
-            <a:pPr indent="0" marL="0">
-              <a:buNone/>
-            </a:pPr>
-            <a:r>
-              <a:rPr lang="en-US" sz="2100" dirty="0">
+              <a:t>• FHIR matters for AI because it may make clinical and public health data more.</a:t>
+            </a:r>
+            <a:endParaRPr lang="en-US" sz="1920" dirty="0"/>
+          </a:p>
+          <a:p>
+            <a:pPr indent="0" marL="0">
+              <a:buNone/>
+            </a:pPr>
+            <a:r>
+              <a:rPr lang="en-US" sz="1920" dirty="0">
                 <a:solidFill>
                   <a:srgbClr val="003A63"/>
                 </a:solidFill>
@@ -17848,16 +17854,16 @@
                 <a:ea typeface="Aptos" pitchFamily="34" charset="-122"/>
                 <a:cs typeface="Aptos" pitchFamily="34" charset="-120"/>
               </a:rPr>
-              <a:t>• A FHIR API can allow an approved application to request specific resources, such as Patient,.</a:t>
-            </a:r>
-            <a:endParaRPr lang="en-US" sz="2100" dirty="0"/>
-          </a:p>
-          <a:p>
-            <a:pPr indent="0" marL="0">
-              <a:buNone/>
-            </a:pPr>
-            <a:r>
-              <a:rPr lang="en-US" sz="2100" dirty="0">
+              <a:t>• A FHIR API can allow an approved application to request specific resources,.</a:t>
+            </a:r>
+            <a:endParaRPr lang="en-US" sz="1920" dirty="0"/>
+          </a:p>
+          <a:p>
+            <a:pPr indent="0" marL="0">
+              <a:buNone/>
+            </a:pPr>
+            <a:r>
+              <a:rPr lang="en-US" sz="1920" dirty="0">
                 <a:solidFill>
                   <a:srgbClr val="003A63"/>
                 </a:solidFill>
@@ -17865,9 +17871,9 @@
                 <a:ea typeface="Aptos" pitchFamily="34" charset="-122"/>
                 <a:cs typeface="Aptos" pitchFamily="34" charset="-120"/>
               </a:rPr>
-              <a:t>• This can support case summaries, decision support, cohort identification, immunization review,.</a:t>
-            </a:r>
-            <a:endParaRPr lang="en-US" sz="2100" dirty="0"/>
+              <a:t>• This can support case summaries, decision support, cohort identification,.</a:t>
+            </a:r>
+            <a:endParaRPr lang="en-US" sz="1920" dirty="0"/>
           </a:p>
         </p:txBody>
       </p:sp>
@@ -17879,12 +17885,12 @@
         </p:nvSpPr>
         <p:spPr>
           <a:xfrm>
-            <a:off x="7635240" y="1325880"/>
-            <a:ext cx="3474720" cy="1255471"/>
+            <a:off x="7543800" y="1325880"/>
+            <a:ext cx="3611880" cy="1261872"/>
           </a:xfrm>
           <a:prstGeom prst="roundRect">
             <a:avLst>
-              <a:gd name="adj" fmla="val 8740"/>
+              <a:gd name="adj" fmla="val 8696"/>
             </a:avLst>
           </a:prstGeom>
           <a:solidFill>
@@ -17906,8 +17912,8 @@
         </p:nvSpPr>
         <p:spPr>
           <a:xfrm>
-            <a:off x="7799832" y="1472184"/>
-            <a:ext cx="3145536" cy="256032"/>
+            <a:off x="7708392" y="1453896"/>
+            <a:ext cx="3282696" cy="228600"/>
           </a:xfrm>
           <a:prstGeom prst="rect">
             <a:avLst/>
@@ -17923,7 +17929,7 @@
               <a:buNone/>
             </a:pPr>
             <a:r>
-              <a:rPr lang="en-US" sz="1300" b="1" dirty="0">
+              <a:rPr lang="en-US" sz="1220" b="1" dirty="0">
                 <a:solidFill>
                   <a:srgbClr val="0068B7"/>
                 </a:solidFill>
@@ -17933,7 +17939,7 @@
               </a:rPr>
               <a:t>Core concept</a:t>
             </a:r>
-            <a:endParaRPr lang="en-US" sz="1300" dirty="0"/>
+            <a:endParaRPr lang="en-US" sz="1220" dirty="0"/>
           </a:p>
         </p:txBody>
       </p:sp>
@@ -17945,8 +17951,8 @@
         </p:nvSpPr>
         <p:spPr>
           <a:xfrm>
-            <a:off x="7799832" y="1801368"/>
-            <a:ext cx="3145536" cy="688543"/>
+            <a:off x="7708392" y="1764792"/>
+            <a:ext cx="3282696" cy="749808"/>
           </a:xfrm>
           <a:prstGeom prst="rect">
             <a:avLst/>
@@ -17964,7 +17970,7 @@
               <a:buNone/>
             </a:pPr>
             <a:r>
-              <a:rPr lang="en-US" sz="1320" dirty="0">
+              <a:rPr lang="en-US" sz="1220" dirty="0">
                 <a:solidFill>
                   <a:srgbClr val="17364A"/>
                 </a:solidFill>
@@ -17972,9 +17978,9 @@
                 <a:ea typeface="Aptos" pitchFamily="34" charset="-122"/>
                 <a:cs typeface="Aptos" pitchFamily="34" charset="-120"/>
               </a:rPr>
-              <a:t>FHIR matters for AI because it may make clinical and public health data more accessible, modular, and.</a:t>
-            </a:r>
-            <a:endParaRPr lang="en-US" sz="1320" dirty="0"/>
+              <a:t>FHIR matters for AI because it may make clinical and public health data more.</a:t>
+            </a:r>
+            <a:endParaRPr lang="en-US" sz="1220" dirty="0"/>
           </a:p>
         </p:txBody>
       </p:sp>
@@ -17986,12 +17992,12 @@
         </p:nvSpPr>
         <p:spPr>
           <a:xfrm>
-            <a:off x="7635240" y="2718511"/>
-            <a:ext cx="3474720" cy="1328623"/>
+            <a:off x="7543800" y="2724912"/>
+            <a:ext cx="3611880" cy="1527048"/>
           </a:xfrm>
           <a:prstGeom prst="roundRect">
             <a:avLst>
-              <a:gd name="adj" fmla="val 8259"/>
+              <a:gd name="adj" fmla="val 7186"/>
             </a:avLst>
           </a:prstGeom>
           <a:solidFill>
@@ -18013,8 +18019,8 @@
         </p:nvSpPr>
         <p:spPr>
           <a:xfrm>
-            <a:off x="7799832" y="2864815"/>
-            <a:ext cx="3145536" cy="256032"/>
+            <a:off x="7708392" y="2852928"/>
+            <a:ext cx="3282696" cy="228600"/>
           </a:xfrm>
           <a:prstGeom prst="rect">
             <a:avLst/>
@@ -18030,7 +18036,7 @@
               <a:buNone/>
             </a:pPr>
             <a:r>
-              <a:rPr lang="en-US" sz="1300" b="1" dirty="0">
+              <a:rPr lang="en-US" sz="1220" b="1" dirty="0">
                 <a:solidFill>
                   <a:srgbClr val="0068B7"/>
                 </a:solidFill>
@@ -18040,7 +18046,7 @@
               </a:rPr>
               <a:t>Concept checkpoints</a:t>
             </a:r>
-            <a:endParaRPr lang="en-US" sz="1300" dirty="0"/>
+            <a:endParaRPr lang="en-US" sz="1220" dirty="0"/>
           </a:p>
         </p:txBody>
       </p:sp>
@@ -18052,8 +18058,8 @@
         </p:nvSpPr>
         <p:spPr>
           <a:xfrm>
-            <a:off x="7818120" y="3230575"/>
-            <a:ext cx="3090672" cy="670255"/>
+            <a:off x="7726680" y="3182112"/>
+            <a:ext cx="3227832" cy="960120"/>
           </a:xfrm>
           <a:prstGeom prst="rect">
             <a:avLst/>
@@ -18071,7 +18077,7 @@
               <a:buNone/>
             </a:pPr>
             <a:r>
-              <a:rPr lang="en-US" sz="1220" dirty="0">
+              <a:rPr lang="en-US" sz="1140" dirty="0">
                 <a:solidFill>
                   <a:srgbClr val="17364A"/>
                 </a:solidFill>
@@ -18079,16 +18085,16 @@
                 <a:ea typeface="Aptos" pitchFamily="34" charset="-122"/>
                 <a:cs typeface="Aptos" pitchFamily="34" charset="-120"/>
               </a:rPr>
-              <a:t>FHIR matters for AI because it may make clinical and public health.</a:t>
-            </a:r>
-            <a:endParaRPr lang="en-US" sz="1220" dirty="0"/>
-          </a:p>
-          <a:p>
-            <a:pPr indent="0" marL="0">
-              <a:buNone/>
-            </a:pPr>
-            <a:r>
-              <a:rPr lang="en-US" sz="1220" dirty="0">
+              <a:t>FHIR matters for AI because it may make clinical.</a:t>
+            </a:r>
+            <a:endParaRPr lang="en-US" sz="1140" dirty="0"/>
+          </a:p>
+          <a:p>
+            <a:pPr indent="0" marL="0">
+              <a:buNone/>
+            </a:pPr>
+            <a:r>
+              <a:rPr lang="en-US" sz="1140" dirty="0">
                 <a:solidFill>
                   <a:srgbClr val="17364A"/>
                 </a:solidFill>
@@ -18096,16 +18102,16 @@
                 <a:ea typeface="Aptos" pitchFamily="34" charset="-122"/>
                 <a:cs typeface="Aptos" pitchFamily="34" charset="-120"/>
               </a:rPr>
-              <a:t>A FHIR API can allow an approved application to request specific.</a:t>
-            </a:r>
-            <a:endParaRPr lang="en-US" sz="1220" dirty="0"/>
-          </a:p>
-          <a:p>
-            <a:pPr indent="0" marL="0">
-              <a:buNone/>
-            </a:pPr>
-            <a:r>
-              <a:rPr lang="en-US" sz="1220" dirty="0">
+              <a:t>A FHIR API can allow an approved application to.</a:t>
+            </a:r>
+            <a:endParaRPr lang="en-US" sz="1140" dirty="0"/>
+          </a:p>
+          <a:p>
+            <a:pPr indent="0" marL="0">
+              <a:buNone/>
+            </a:pPr>
+            <a:r>
+              <a:rPr lang="en-US" sz="1140" dirty="0">
                 <a:solidFill>
                   <a:srgbClr val="17364A"/>
                 </a:solidFill>
@@ -18113,9 +18119,9 @@
                 <a:ea typeface="Aptos" pitchFamily="34" charset="-122"/>
                 <a:cs typeface="Aptos" pitchFamily="34" charset="-120"/>
               </a:rPr>
-              <a:t>This can support case summaries, decision support, cohort.</a:t>
-            </a:r>
-            <a:endParaRPr lang="en-US" sz="1220" dirty="0"/>
+              <a:t>This can support case summaries, decision support,.</a:t>
+            </a:r>
+            <a:endParaRPr lang="en-US" sz="1140" dirty="0"/>
           </a:p>
         </p:txBody>
       </p:sp>
@@ -18127,12 +18133,12 @@
         </p:nvSpPr>
         <p:spPr>
           <a:xfrm>
-            <a:off x="7635240" y="4184294"/>
-            <a:ext cx="3474720" cy="1466698"/>
+            <a:off x="7543800" y="4389120"/>
+            <a:ext cx="3611880" cy="1261872"/>
           </a:xfrm>
           <a:prstGeom prst="roundRect">
             <a:avLst>
-              <a:gd name="adj" fmla="val 7481"/>
+              <a:gd name="adj" fmla="val 8696"/>
             </a:avLst>
           </a:prstGeom>
           <a:solidFill>
@@ -18154,8 +18160,8 @@
         </p:nvSpPr>
         <p:spPr>
           <a:xfrm>
-            <a:off x="7799832" y="4330598"/>
-            <a:ext cx="3145536" cy="256032"/>
+            <a:off x="7708392" y="4517136"/>
+            <a:ext cx="3282696" cy="228600"/>
           </a:xfrm>
           <a:prstGeom prst="rect">
             <a:avLst/>
@@ -18171,7 +18177,7 @@
               <a:buNone/>
             </a:pPr>
             <a:r>
-              <a:rPr lang="en-US" sz="1300" b="1" dirty="0">
+              <a:rPr lang="en-US" sz="1220" b="1" dirty="0">
                 <a:solidFill>
                   <a:srgbClr val="0068B7"/>
                 </a:solidFill>
@@ -18181,7 +18187,7 @@
               </a:rPr>
               <a:t>Apply it</a:t>
             </a:r>
-            <a:endParaRPr lang="en-US" sz="1300" dirty="0"/>
+            <a:endParaRPr lang="en-US" sz="1220" dirty="0"/>
           </a:p>
         </p:txBody>
       </p:sp>
@@ -18193,8 +18199,8 @@
         </p:nvSpPr>
         <p:spPr>
           <a:xfrm>
-            <a:off x="7799832" y="4659782"/>
-            <a:ext cx="3145536" cy="899770"/>
+            <a:off x="7708392" y="4828032"/>
+            <a:ext cx="3282696" cy="749808"/>
           </a:xfrm>
           <a:prstGeom prst="rect">
             <a:avLst/>
@@ -18212,7 +18218,7 @@
               <a:buNone/>
             </a:pPr>
             <a:r>
-              <a:rPr lang="en-US" sz="1320" dirty="0">
+              <a:rPr lang="en-US" sz="1220" dirty="0">
                 <a:solidFill>
                   <a:srgbClr val="17364A"/>
                 </a:solidFill>
@@ -18220,9 +18226,9 @@
                 <a:ea typeface="Aptos" pitchFamily="34" charset="-122"/>
                 <a:cs typeface="Aptos" pitchFamily="34" charset="-120"/>
               </a:rPr>
-              <a:t>Connect the concept to public health purpose, responsible use, required safeguards, documentation, and the next action a department should take.</a:t>
-            </a:r>
-            <a:endParaRPr lang="en-US" sz="1320" dirty="0"/>
+              <a:t>Connect the concept to public health purpose, responsible use, required.</a:t>
+            </a:r>
+            <a:endParaRPr lang="en-US" sz="1220" dirty="0"/>
           </a:p>
         </p:txBody>
       </p:sp>
@@ -18513,8 +18519,8 @@
         </p:nvSpPr>
         <p:spPr>
           <a:xfrm>
-            <a:off x="868680" y="1508760"/>
-            <a:ext cx="6309360" cy="4160520"/>
+            <a:off x="822960" y="1463040"/>
+            <a:ext cx="6565392" cy="4343400"/>
           </a:xfrm>
           <a:prstGeom prst="rect">
             <a:avLst/>
@@ -18532,7 +18538,7 @@
               <a:buNone/>
             </a:pPr>
             <a:r>
-              <a:rPr lang="en-US" sz="2100" dirty="0">
+              <a:rPr lang="en-US" sz="1920" dirty="0">
                 <a:solidFill>
                   <a:srgbClr val="003A63"/>
                 </a:solidFill>
@@ -18542,14 +18548,14 @@
               </a:rPr>
               <a:t>• FHIR resource.</a:t>
             </a:r>
-            <a:endParaRPr lang="en-US" sz="2100" dirty="0"/>
-          </a:p>
-          <a:p>
-            <a:pPr indent="0" marL="0">
-              <a:buNone/>
-            </a:pPr>
-            <a:r>
-              <a:rPr lang="en-US" sz="2100" dirty="0">
+            <a:endParaRPr lang="en-US" sz="1920" dirty="0"/>
+          </a:p>
+          <a:p>
+            <a:pPr indent="0" marL="0">
+              <a:buNone/>
+            </a:pPr>
+            <a:r>
+              <a:rPr lang="en-US" sz="1920" dirty="0">
                 <a:solidFill>
                   <a:srgbClr val="003A63"/>
                 </a:solidFill>
@@ -18557,16 +18563,16 @@
                 <a:ea typeface="Aptos" pitchFamily="34" charset="-122"/>
                 <a:cs typeface="Aptos" pitchFamily="34" charset="-120"/>
               </a:rPr>
-              <a:t>• A FHIR resource is a structured representation of a type of health information, such as.</a:t>
-            </a:r>
-            <a:endParaRPr lang="en-US" sz="2100" dirty="0"/>
-          </a:p>
-          <a:p>
-            <a:pPr indent="0" marL="0">
-              <a:buNone/>
-            </a:pPr>
-            <a:r>
-              <a:rPr lang="en-US" sz="2100" dirty="0">
+              <a:t>• A FHIR resource is a structured representation of a type of health.</a:t>
+            </a:r>
+            <a:endParaRPr lang="en-US" sz="1920" dirty="0"/>
+          </a:p>
+          <a:p>
+            <a:pPr indent="0" marL="0">
+              <a:buNone/>
+            </a:pPr>
+            <a:r>
+              <a:rPr lang="en-US" sz="1920" dirty="0">
                 <a:solidFill>
                   <a:srgbClr val="003A63"/>
                 </a:solidFill>
@@ -18576,7 +18582,7 @@
               </a:rPr>
               <a:t>• AI tools may use combinations of resources to support a workflow.</a:t>
             </a:r>
-            <a:endParaRPr lang="en-US" sz="2100" dirty="0"/>
+            <a:endParaRPr lang="en-US" sz="1920" dirty="0"/>
           </a:p>
         </p:txBody>
       </p:sp>
@@ -18588,12 +18594,12 @@
         </p:nvSpPr>
         <p:spPr>
           <a:xfrm>
-            <a:off x="7635240" y="1325880"/>
-            <a:ext cx="3474720" cy="1207008"/>
+            <a:off x="7543800" y="1325880"/>
+            <a:ext cx="3611880" cy="1261872"/>
           </a:xfrm>
           <a:prstGeom prst="roundRect">
             <a:avLst>
-              <a:gd name="adj" fmla="val 9091"/>
+              <a:gd name="adj" fmla="val 8696"/>
             </a:avLst>
           </a:prstGeom>
           <a:solidFill>
@@ -18615,8 +18621,8 @@
         </p:nvSpPr>
         <p:spPr>
           <a:xfrm>
-            <a:off x="7799832" y="1472184"/>
-            <a:ext cx="3145536" cy="256032"/>
+            <a:off x="7708392" y="1453896"/>
+            <a:ext cx="3282696" cy="228600"/>
           </a:xfrm>
           <a:prstGeom prst="rect">
             <a:avLst/>
@@ -18632,7 +18638,7 @@
               <a:buNone/>
             </a:pPr>
             <a:r>
-              <a:rPr lang="en-US" sz="1300" b="1" dirty="0">
+              <a:rPr lang="en-US" sz="1220" b="1" dirty="0">
                 <a:solidFill>
                   <a:srgbClr val="0068B7"/>
                 </a:solidFill>
@@ -18642,7 +18648,7 @@
               </a:rPr>
               <a:t>Core concept</a:t>
             </a:r>
-            <a:endParaRPr lang="en-US" sz="1300" dirty="0"/>
+            <a:endParaRPr lang="en-US" sz="1220" dirty="0"/>
           </a:p>
         </p:txBody>
       </p:sp>
@@ -18654,8 +18660,8 @@
         </p:nvSpPr>
         <p:spPr>
           <a:xfrm>
-            <a:off x="7799832" y="1801368"/>
-            <a:ext cx="3145536" cy="640080"/>
+            <a:off x="7708392" y="1764792"/>
+            <a:ext cx="3282696" cy="749808"/>
           </a:xfrm>
           <a:prstGeom prst="rect">
             <a:avLst/>
@@ -18673,7 +18679,7 @@
               <a:buNone/>
             </a:pPr>
             <a:r>
-              <a:rPr lang="en-US" sz="1320" dirty="0">
+              <a:rPr lang="en-US" sz="1220" dirty="0">
                 <a:solidFill>
                   <a:srgbClr val="17364A"/>
                 </a:solidFill>
@@ -18683,7 +18689,7 @@
               </a:rPr>
               <a:t>FHIR resource.</a:t>
             </a:r>
-            <a:endParaRPr lang="en-US" sz="1320" dirty="0"/>
+            <a:endParaRPr lang="en-US" sz="1220" dirty="0"/>
           </a:p>
         </p:txBody>
       </p:sp>
@@ -18695,12 +18701,12 @@
         </p:nvSpPr>
         <p:spPr>
           <a:xfrm>
-            <a:off x="7635240" y="2670048"/>
-            <a:ext cx="3474720" cy="1377086"/>
+            <a:off x="7543800" y="2724912"/>
+            <a:ext cx="3611880" cy="1527048"/>
           </a:xfrm>
           <a:prstGeom prst="roundRect">
             <a:avLst>
-              <a:gd name="adj" fmla="val 7968"/>
+              <a:gd name="adj" fmla="val 7186"/>
             </a:avLst>
           </a:prstGeom>
           <a:solidFill>
@@ -18722,8 +18728,8 @@
         </p:nvSpPr>
         <p:spPr>
           <a:xfrm>
-            <a:off x="7799832" y="2816352"/>
-            <a:ext cx="3145536" cy="256032"/>
+            <a:off x="7708392" y="2852928"/>
+            <a:ext cx="3282696" cy="228600"/>
           </a:xfrm>
           <a:prstGeom prst="rect">
             <a:avLst/>
@@ -18739,7 +18745,7 @@
               <a:buNone/>
             </a:pPr>
             <a:r>
-              <a:rPr lang="en-US" sz="1300" b="1" dirty="0">
+              <a:rPr lang="en-US" sz="1220" b="1" dirty="0">
                 <a:solidFill>
                   <a:srgbClr val="0068B7"/>
                 </a:solidFill>
@@ -18749,7 +18755,7 @@
               </a:rPr>
               <a:t>Concept checkpoints</a:t>
             </a:r>
-            <a:endParaRPr lang="en-US" sz="1300" dirty="0"/>
+            <a:endParaRPr lang="en-US" sz="1220" dirty="0"/>
           </a:p>
         </p:txBody>
       </p:sp>
@@ -18761,8 +18767,8 @@
         </p:nvSpPr>
         <p:spPr>
           <a:xfrm>
-            <a:off x="7818120" y="3182112"/>
-            <a:ext cx="3090672" cy="718718"/>
+            <a:off x="7726680" y="3182112"/>
+            <a:ext cx="3227832" cy="960120"/>
           </a:xfrm>
           <a:prstGeom prst="rect">
             <a:avLst/>
@@ -18780,7 +18786,7 @@
               <a:buNone/>
             </a:pPr>
             <a:r>
-              <a:rPr lang="en-US" sz="1220" dirty="0">
+              <a:rPr lang="en-US" sz="1140" dirty="0">
                 <a:solidFill>
                   <a:srgbClr val="17364A"/>
                 </a:solidFill>
@@ -18788,16 +18794,16 @@
                 <a:ea typeface="Aptos" pitchFamily="34" charset="-122"/>
                 <a:cs typeface="Aptos" pitchFamily="34" charset="-120"/>
               </a:rPr>
-              <a:t>A FHIR resource is a structured representation of a type of health.</a:t>
-            </a:r>
-            <a:endParaRPr lang="en-US" sz="1220" dirty="0"/>
-          </a:p>
-          <a:p>
-            <a:pPr indent="0" marL="0">
-              <a:buNone/>
-            </a:pPr>
-            <a:r>
-              <a:rPr lang="en-US" sz="1220" dirty="0">
+              <a:t>A FHIR resource is a structured representation of.</a:t>
+            </a:r>
+            <a:endParaRPr lang="en-US" sz="1140" dirty="0"/>
+          </a:p>
+          <a:p>
+            <a:pPr indent="0" marL="0">
+              <a:buNone/>
+            </a:pPr>
+            <a:r>
+              <a:rPr lang="en-US" sz="1140" dirty="0">
                 <a:solidFill>
                   <a:srgbClr val="17364A"/>
                 </a:solidFill>
@@ -18807,14 +18813,14 @@
               </a:rPr>
               <a:t>FHIR profile.</a:t>
             </a:r>
-            <a:endParaRPr lang="en-US" sz="1220" dirty="0"/>
-          </a:p>
-          <a:p>
-            <a:pPr indent="0" marL="0">
-              <a:buNone/>
-            </a:pPr>
-            <a:r>
-              <a:rPr lang="en-US" sz="1220" dirty="0">
+            <a:endParaRPr lang="en-US" sz="1140" dirty="0"/>
+          </a:p>
+          <a:p>
+            <a:pPr indent="0" marL="0">
+              <a:buNone/>
+            </a:pPr>
+            <a:r>
+              <a:rPr lang="en-US" sz="1140" dirty="0">
                 <a:solidFill>
                   <a:srgbClr val="17364A"/>
                 </a:solidFill>
@@ -18822,9 +18828,9 @@
                 <a:ea typeface="Aptos" pitchFamily="34" charset="-122"/>
                 <a:cs typeface="Aptos" pitchFamily="34" charset="-120"/>
               </a:rPr>
-              <a:t>A FHIR profile constrains or extends a resource for a specific.</a:t>
-            </a:r>
-            <a:endParaRPr lang="en-US" sz="1220" dirty="0"/>
+              <a:t>A FHIR profile constrains or extends a resource.</a:t>
+            </a:r>
+            <a:endParaRPr lang="en-US" sz="1140" dirty="0"/>
           </a:p>
         </p:txBody>
       </p:sp>
@@ -18836,12 +18842,12 @@
         </p:nvSpPr>
         <p:spPr>
           <a:xfrm>
-            <a:off x="7635240" y="4184294"/>
-            <a:ext cx="3474720" cy="1466698"/>
+            <a:off x="7543800" y="4389120"/>
+            <a:ext cx="3611880" cy="1261872"/>
           </a:xfrm>
           <a:prstGeom prst="roundRect">
             <a:avLst>
-              <a:gd name="adj" fmla="val 7481"/>
+              <a:gd name="adj" fmla="val 8696"/>
             </a:avLst>
           </a:prstGeom>
           <a:solidFill>
@@ -18863,8 +18869,8 @@
         </p:nvSpPr>
         <p:spPr>
           <a:xfrm>
-            <a:off x="7799832" y="4330598"/>
-            <a:ext cx="3145536" cy="256032"/>
+            <a:off x="7708392" y="4517136"/>
+            <a:ext cx="3282696" cy="228600"/>
           </a:xfrm>
           <a:prstGeom prst="rect">
             <a:avLst/>
@@ -18880,7 +18886,7 @@
               <a:buNone/>
             </a:pPr>
             <a:r>
-              <a:rPr lang="en-US" sz="1300" b="1" dirty="0">
+              <a:rPr lang="en-US" sz="1220" b="1" dirty="0">
                 <a:solidFill>
                   <a:srgbClr val="0068B7"/>
                 </a:solidFill>
@@ -18890,7 +18896,7 @@
               </a:rPr>
               <a:t>Apply it</a:t>
             </a:r>
-            <a:endParaRPr lang="en-US" sz="1300" dirty="0"/>
+            <a:endParaRPr lang="en-US" sz="1220" dirty="0"/>
           </a:p>
         </p:txBody>
       </p:sp>
@@ -18902,8 +18908,8 @@
         </p:nvSpPr>
         <p:spPr>
           <a:xfrm>
-            <a:off x="7799832" y="4659782"/>
-            <a:ext cx="3145536" cy="899770"/>
+            <a:off x="7708392" y="4828032"/>
+            <a:ext cx="3282696" cy="749808"/>
           </a:xfrm>
           <a:prstGeom prst="rect">
             <a:avLst/>
@@ -18921,7 +18927,7 @@
               <a:buNone/>
             </a:pPr>
             <a:r>
-              <a:rPr lang="en-US" sz="1320" dirty="0">
+              <a:rPr lang="en-US" sz="1220" dirty="0">
                 <a:solidFill>
                   <a:srgbClr val="17364A"/>
                 </a:solidFill>
@@ -18929,9 +18935,9 @@
                 <a:ea typeface="Aptos" pitchFamily="34" charset="-122"/>
                 <a:cs typeface="Aptos" pitchFamily="34" charset="-120"/>
               </a:rPr>
-              <a:t>Connect the concept to public health purpose, responsible use, required safeguards, documentation, and the next action a department should take.</a:t>
-            </a:r>
-            <a:endParaRPr lang="en-US" sz="1320" dirty="0"/>
+              <a:t>Connect the concept to public health purpose, responsible use, required.</a:t>
+            </a:r>
+            <a:endParaRPr lang="en-US" sz="1220" dirty="0"/>
           </a:p>
         </p:txBody>
       </p:sp>

--- a/downloads/presentations/modules/arc-250.pptx
+++ b/downloads/presentations/modules/arc-250.pptx
@@ -12870,7 +12870,7 @@
                 <a:ea typeface="Aptos" pitchFamily="34" charset="-122"/>
                 <a:cs typeface="Aptos" pitchFamily="34" charset="-120"/>
               </a:rPr>
-              <a:t>• 1. What is a FHIR resource?</a:t>
+              <a:t>1. What is a FHIR resource?</a:t>
             </a:r>
             <a:endParaRPr lang="en-US" sz="1920" dirty="0"/>
           </a:p>
@@ -12887,7 +12887,7 @@
                 <a:ea typeface="Aptos" pitchFamily="34" charset="-122"/>
                 <a:cs typeface="Aptos" pitchFamily="34" charset="-120"/>
               </a:rPr>
-              <a:t>• 2. Why does FHIR matter for AI-supported public health workflows?</a:t>
+              <a:t>2. Why does FHIR matter for AI-supported public health workflows?</a:t>
             </a:r>
             <a:endParaRPr lang="en-US" sz="1920" dirty="0"/>
           </a:p>
@@ -12904,7 +12904,7 @@
                 <a:ea typeface="Aptos" pitchFamily="34" charset="-122"/>
                 <a:cs typeface="Aptos" pitchFamily="34" charset="-120"/>
               </a:rPr>
-              <a:t>• 3. What should staff verify when a vendor says a product is FHIR-compatible?</a:t>
+              <a:t>3. What should staff verify when a vendor says a product is FHIR-compatible?</a:t>
             </a:r>
             <a:endParaRPr lang="en-US" sz="1920" dirty="0"/>
           </a:p>
@@ -13011,7 +13011,7 @@
                 <a:ea typeface="Aptos" pitchFamily="34" charset="-122"/>
                 <a:cs typeface="Aptos" pitchFamily="34" charset="-120"/>
               </a:rPr>
-              <a:t>1. What is a FHIR resource?</a:t>
+              <a:t>What is a FHIR resource?</a:t>
             </a:r>
             <a:endParaRPr lang="en-US" sz="1220" dirty="0"/>
           </a:p>
@@ -13118,41 +13118,7 @@
                 <a:ea typeface="Aptos" pitchFamily="34" charset="-122"/>
                 <a:cs typeface="Aptos" pitchFamily="34" charset="-120"/>
               </a:rPr>
-              <a:t>1.</a:t>
-            </a:r>
-            <a:endParaRPr lang="en-US" sz="1140" dirty="0"/>
-          </a:p>
-          <a:p>
-            <a:pPr indent="0" marL="0">
-              <a:buNone/>
-            </a:pPr>
-            <a:r>
-              <a:rPr lang="en-US" sz="1140" dirty="0">
-                <a:solidFill>
-                  <a:srgbClr val="17364A"/>
-                </a:solidFill>
-                <a:latin typeface="Aptos" pitchFamily="34" charset="0"/>
-                <a:ea typeface="Aptos" pitchFamily="34" charset="-122"/>
-                <a:cs typeface="Aptos" pitchFamily="34" charset="-120"/>
-              </a:rPr>
               <a:t>What is a FHIR resource?</a:t>
-            </a:r>
-            <a:endParaRPr lang="en-US" sz="1140" dirty="0"/>
-          </a:p>
-          <a:p>
-            <a:pPr indent="0" marL="0">
-              <a:buNone/>
-            </a:pPr>
-            <a:r>
-              <a:rPr lang="en-US" sz="1140" dirty="0">
-                <a:solidFill>
-                  <a:srgbClr val="17364A"/>
-                </a:solidFill>
-                <a:latin typeface="Aptos" pitchFamily="34" charset="0"/>
-                <a:ea typeface="Aptos" pitchFamily="34" charset="-122"/>
-                <a:cs typeface="Aptos" pitchFamily="34" charset="-120"/>
-              </a:rPr>
-              <a:t>2.</a:t>
             </a:r>
             <a:endParaRPr lang="en-US" sz="1140" dirty="0"/>
           </a:p>
